--- a/RTE_Rice_Suppliers.pptx
+++ b/RTE_Rice_Suppliers.pptx
@@ -2741,7 +2741,7 @@
                 <a:ea typeface="Calibri" pitchFamily="34" charset="-122"/>
                 <a:cs typeface="Calibri" pitchFamily="34" charset="-120"/>
               </a:rPr>
-              <a:t>Джерело: каталог продукції BSCM Foods та комерційна пропозиція постачальника; сертифікати — за каталогом виробника.</a:t>
+              <a:t>Джерело: каталог продукції BSCM Foods, комерційна пропозиція постачальника та корпоративний сайт групи BSCM (bscm.co.th); сертифікати — за каталогом.</a:t>
             </a:r>
             <a:endParaRPr lang="en-US" sz="900" dirty="0"/>
           </a:p>
@@ -5472,7 +5472,7 @@
                 <a:ea typeface="Calibri" pitchFamily="34" charset="-122"/>
                 <a:cs typeface="Calibri" pitchFamily="34" charset="-120"/>
               </a:rPr>
-              <a:t>Фото — з офіційного каталогу BSCM Foods; для Japanese Style Rice каталог фото упаковки не містить. Собівартість включає мито 10%, ПДВ 20%, транспорт і кредитні гроші 2,5%.</a:t>
+              <a:t>Фото упаковки — з каталогу BSCM Foods; для Japanese Style Rice постачальник фото не надав. Собівартість: мито 10%, ПДВ 20%, транспорт, кредитні гроші 2,5%.</a:t>
             </a:r>
             <a:endParaRPr lang="en-US" sz="900" dirty="0"/>
           </a:p>

--- a/RTE_Rice_Suppliers.pptx
+++ b/RTE_Rice_Suppliers.pptx
@@ -1707,7 +1707,7 @@
                 <a:ea typeface="Calibri" pitchFamily="34" charset="-122"/>
                 <a:cs typeface="Calibri" pitchFamily="34" charset="-120"/>
               </a:rPr>
-              <a:t>Бангкок, Таїланд</a:t>
+              <a:t>Бангкок (Bangsue), Таїланд</a:t>
             </a:r>
             <a:endParaRPr lang="en-US" sz="1150" dirty="0"/>
           </a:p>
@@ -1746,7 +1746,7 @@
                 <a:ea typeface="Calibri" pitchFamily="34" charset="-122"/>
                 <a:cs typeface="Calibri" pitchFamily="34" charset="-120"/>
               </a:rPr>
-              <a:t>Технологія</a:t>
+              <a:t>Група</a:t>
             </a:r>
             <a:endParaRPr lang="en-US" sz="1050" dirty="0"/>
           </a:p>
@@ -1785,7 +1785,7 @@
                 <a:ea typeface="Calibri" pitchFamily="34" charset="-122"/>
                 <a:cs typeface="Calibri" pitchFamily="34" charset="-120"/>
               </a:rPr>
-              <a:t>Ретортна стерилізація, без консервантів</a:t>
+              <a:t>Bangsue Chia Meng Rice Mill, з 1937</a:t>
             </a:r>
             <a:endParaRPr lang="en-US" sz="1150" dirty="0"/>
           </a:p>
@@ -1824,7 +1824,7 @@
                 <a:ea typeface="Calibri" pitchFamily="34" charset="-122"/>
                 <a:cs typeface="Calibri" pitchFamily="34" charset="-120"/>
               </a:rPr>
-              <a:t>Формат в офері</a:t>
+              <a:t>RTE-виробництво</a:t>
             </a:r>
             <a:endParaRPr lang="en-US" sz="1050" dirty="0"/>
           </a:p>
@@ -1863,7 +1863,7 @@
                 <a:ea typeface="Calibri" pitchFamily="34" charset="-122"/>
                 <a:cs typeface="Calibri" pitchFamily="34" charset="-120"/>
               </a:rPr>
-              <a:t>Пауч 240 г · 6 шт у коробі</a:t>
+              <a:t>власний завод BSCM Foods, з 2009</a:t>
             </a:r>
             <a:endParaRPr lang="en-US" sz="1150" dirty="0"/>
           </a:p>
@@ -1902,7 +1902,7 @@
                 <a:ea typeface="Calibri" pitchFamily="34" charset="-122"/>
                 <a:cs typeface="Calibri" pitchFamily="34" charset="-120"/>
               </a:rPr>
-              <a:t>Габарит короба</a:t>
+              <a:t>Технологія</a:t>
             </a:r>
             <a:endParaRPr lang="en-US" sz="1050" dirty="0"/>
           </a:p>
@@ -1941,7 +1941,7 @@
                 <a:ea typeface="Calibri" pitchFamily="34" charset="-122"/>
                 <a:cs typeface="Calibri" pitchFamily="34" charset="-120"/>
               </a:rPr>
-              <a:t>159 × 140 × 185 мм · 0,004118 м³</a:t>
+              <a:t>ретортна стерилізація, без консервантів</a:t>
             </a:r>
             <a:endParaRPr lang="en-US" sz="1150" dirty="0"/>
           </a:p>
@@ -2097,7 +2097,7 @@
                 <a:ea typeface="Calibri" pitchFamily="34" charset="-122"/>
                 <a:cs typeface="Calibri" pitchFamily="34" charset="-120"/>
               </a:rPr>
-              <a:t>Мікрохвильова піч, 60–90 сек</a:t>
+              <a:t>мікрохвильова піч, 60–90 сек</a:t>
             </a:r>
             <a:endParaRPr lang="en-US" sz="1150" dirty="0"/>
           </a:p>
@@ -2136,7 +2136,7 @@
                 <a:ea typeface="Calibri" pitchFamily="34" charset="-122"/>
                 <a:cs typeface="Calibri" pitchFamily="34" charset="-120"/>
               </a:rPr>
-              <a:t>Код УКТЗЕД / HS</a:t>
+              <a:t>Формат в офері</a:t>
             </a:r>
             <a:endParaRPr lang="en-US" sz="1050" dirty="0"/>
           </a:p>
@@ -2175,7 +2175,7 @@
                 <a:ea typeface="Calibri" pitchFamily="34" charset="-122"/>
                 <a:cs typeface="Calibri" pitchFamily="34" charset="-120"/>
               </a:rPr>
-              <a:t>1904 90 10</a:t>
+              <a:t>пауч 240 г · 6 шт у коробі</a:t>
             </a:r>
             <a:endParaRPr lang="en-US" sz="1150" dirty="0"/>
           </a:p>
@@ -2253,7 +2253,7 @@
                 <a:ea typeface="Calibri" pitchFamily="34" charset="-122"/>
                 <a:cs typeface="Calibri" pitchFamily="34" charset="-120"/>
               </a:rPr>
-              <a:t>BRCGS · HACCP · USDA/EU Organic · Halal</a:t>
+              <a:t>BRC · HACCP · ISO 22000 · GMP · Organic</a:t>
             </a:r>
             <a:endParaRPr lang="en-US" sz="1150" dirty="0"/>
           </a:p>
@@ -2652,7 +2652,7 @@
                 <a:ea typeface="Cambria" pitchFamily="34" charset="-122"/>
                 <a:cs typeface="Cambria" pitchFamily="34" charset="-120"/>
               </a:rPr>
-              <a:t>4</a:t>
+              <a:t>60+</a:t>
             </a:r>
             <a:r>
               <a:rPr lang="en-US" sz="1100" dirty="0">
@@ -2663,7 +2663,7 @@
                 <a:ea typeface="Cambria" pitchFamily="34" charset="-122"/>
                 <a:cs typeface="Cambria" pitchFamily="34" charset="-120"/>
               </a:rPr>
-              <a:t> SKU</a:t>
+              <a:t> країн</a:t>
             </a:r>
             <a:endParaRPr lang="en-US" sz="1900" dirty="0"/>
           </a:p>
@@ -2702,7 +2702,7 @@
                 <a:ea typeface="Calibri" pitchFamily="34" charset="-122"/>
                 <a:cs typeface="Calibri" pitchFamily="34" charset="-120"/>
               </a:rPr>
-              <a:t>у поточному офері</a:t>
+              <a:t>країн експорту групи</a:t>
             </a:r>
             <a:endParaRPr lang="en-US" sz="1050" dirty="0"/>
           </a:p>
@@ -5805,7 +5805,7 @@
         </p:nvSpPr>
         <p:spPr>
           <a:xfrm>
-            <a:off x="841248" y="3401568"/>
+            <a:off x="841248" y="3383280"/>
             <a:ext cx="2103120" cy="256032"/>
           </a:xfrm>
           <a:prstGeom prst="rect">
@@ -5844,7 +5844,7 @@
         </p:nvSpPr>
         <p:spPr>
           <a:xfrm>
-            <a:off x="2971800" y="3401568"/>
+            <a:off x="2971800" y="3383280"/>
             <a:ext cx="4023360" cy="256032"/>
           </a:xfrm>
           <a:prstGeom prst="rect">
@@ -5869,7 +5869,7 @@
                 <a:ea typeface="Calibri" pitchFamily="34" charset="-122"/>
                 <a:cs typeface="Calibri" pitchFamily="34" charset="-120"/>
               </a:rPr>
-              <a:t>Офіс Nonthaburi · завод Nakhon Ratchasima</a:t>
+              <a:t>офіс Nonthaburi · завод Nakhon Ratchasima</a:t>
             </a:r>
             <a:endParaRPr lang="en-US" sz="1150" dirty="0"/>
           </a:p>
@@ -5883,7 +5883,7 @@
         </p:nvSpPr>
         <p:spPr>
           <a:xfrm>
-            <a:off x="841248" y="3767328"/>
+            <a:off x="841248" y="3717036"/>
             <a:ext cx="2103120" cy="256032"/>
           </a:xfrm>
           <a:prstGeom prst="rect">
@@ -5908,7 +5908,7 @@
                 <a:ea typeface="Calibri" pitchFamily="34" charset="-122"/>
                 <a:cs typeface="Calibri" pitchFamily="34" charset="-120"/>
               </a:rPr>
-              <a:t>На ринку з</a:t>
+              <a:t>Заснована</a:t>
             </a:r>
             <a:endParaRPr lang="en-US" sz="1050" dirty="0"/>
           </a:p>
@@ -5922,7 +5922,7 @@
         </p:nvSpPr>
         <p:spPr>
           <a:xfrm>
-            <a:off x="2971800" y="3767328"/>
+            <a:off x="2971800" y="3717036"/>
             <a:ext cx="4023360" cy="256032"/>
           </a:xfrm>
           <a:prstGeom prst="rect">
@@ -5947,7 +5947,7 @@
                 <a:ea typeface="Calibri" pitchFamily="34" charset="-122"/>
                 <a:cs typeface="Calibri" pitchFamily="34" charset="-120"/>
               </a:rPr>
-              <a:t>2016 · останнє оновлення ліній 2024</a:t>
+              <a:t>6 липня 2016 · капітал 50 млн THB</a:t>
             </a:r>
             <a:endParaRPr lang="en-US" sz="1150" dirty="0"/>
           </a:p>
@@ -5961,7 +5961,7 @@
         </p:nvSpPr>
         <p:spPr>
           <a:xfrm>
-            <a:off x="841248" y="4133088"/>
+            <a:off x="841248" y="4050792"/>
             <a:ext cx="2103120" cy="256032"/>
           </a:xfrm>
           <a:prstGeom prst="rect">
@@ -5986,6 +5986,84 @@
                 <a:ea typeface="Calibri" pitchFamily="34" charset="-122"/>
                 <a:cs typeface="Calibri" pitchFamily="34" charset="-120"/>
               </a:rPr>
+              <a:t>Досвід групи</a:t>
+            </a:r>
+            <a:endParaRPr lang="en-US" sz="1050" dirty="0"/>
+          </a:p>
+        </p:txBody>
+      </p:sp>
+      <p:sp>
+        <p:nvSpPr>
+          <p:cNvPr id="14" name="Text 12"/>
+          <p:cNvSpPr/>
+          <p:nvPr/>
+        </p:nvSpPr>
+        <p:spPr>
+          <a:xfrm>
+            <a:off x="2971800" y="4050792"/>
+            <a:ext cx="4023360" cy="256032"/>
+          </a:xfrm>
+          <a:prstGeom prst="rect">
+            <a:avLst/>
+          </a:prstGeom>
+          <a:noFill/>
+          <a:ln/>
+        </p:spPr>
+        <p:txBody>
+          <a:bodyPr wrap="square" lIns="0" tIns="0" rIns="0" bIns="0" rtlCol="0" anchor="ctr"/>
+          <a:lstStyle/>
+          <a:p>
+            <a:pPr marL="0" indent="0">
+              <a:buNone/>
+            </a:pPr>
+            <a:r>
+              <a:rPr lang="en-US" sz="1150" b="1" dirty="0">
+                <a:solidFill>
+                  <a:srgbClr val="F5F0E2"/>
+                </a:solidFill>
+                <a:latin typeface="Calibri" pitchFamily="34" charset="0"/>
+                <a:ea typeface="Calibri" pitchFamily="34" charset="-122"/>
+                <a:cs typeface="Calibri" pitchFamily="34" charset="-120"/>
+              </a:rPr>
+              <a:t>понад 30 років у рисовому виробництві</a:t>
+            </a:r>
+            <a:endParaRPr lang="en-US" sz="1150" dirty="0"/>
+          </a:p>
+        </p:txBody>
+      </p:sp>
+      <p:sp>
+        <p:nvSpPr>
+          <p:cNvPr id="15" name="Text 13"/>
+          <p:cNvSpPr/>
+          <p:nvPr/>
+        </p:nvSpPr>
+        <p:spPr>
+          <a:xfrm>
+            <a:off x="841248" y="4384548"/>
+            <a:ext cx="2103120" cy="256032"/>
+          </a:xfrm>
+          <a:prstGeom prst="rect">
+            <a:avLst/>
+          </a:prstGeom>
+          <a:noFill/>
+          <a:ln/>
+        </p:spPr>
+        <p:txBody>
+          <a:bodyPr wrap="square" lIns="0" tIns="0" rIns="0" bIns="0" rtlCol="0" anchor="ctr"/>
+          <a:lstStyle/>
+          <a:p>
+            <a:pPr marL="0" indent="0">
+              <a:buNone/>
+            </a:pPr>
+            <a:r>
+              <a:rPr lang="en-US" sz="1050" dirty="0">
+                <a:solidFill>
+                  <a:srgbClr val="BFCFBB"/>
+                </a:solidFill>
+                <a:latin typeface="Calibri" pitchFamily="34" charset="0"/>
+                <a:ea typeface="Calibri" pitchFamily="34" charset="-122"/>
+                <a:cs typeface="Calibri" pitchFamily="34" charset="-120"/>
+              </a:rPr>
               <a:t>Потужність</a:t>
             </a:r>
             <a:endParaRPr lang="en-US" sz="1050" dirty="0"/>
@@ -5994,13 +6072,13 @@
       </p:sp>
       <p:sp>
         <p:nvSpPr>
-          <p:cNvPr id="14" name="Text 12"/>
-          <p:cNvSpPr/>
-          <p:nvPr/>
-        </p:nvSpPr>
-        <p:spPr>
-          <a:xfrm>
-            <a:off x="2971800" y="4133088"/>
+          <p:cNvPr id="16" name="Text 14"/>
+          <p:cNvSpPr/>
+          <p:nvPr/>
+        </p:nvSpPr>
+        <p:spPr>
+          <a:xfrm>
+            <a:off x="2971800" y="4384548"/>
             <a:ext cx="4023360" cy="256032"/>
           </a:xfrm>
           <a:prstGeom prst="rect">
@@ -6025,7 +6103,7 @@
                 <a:ea typeface="Calibri" pitchFamily="34" charset="-122"/>
                 <a:cs typeface="Calibri" pitchFamily="34" charset="-120"/>
               </a:rPr>
-              <a:t>10 000 тонн на місяць</a:t>
+              <a:t>120 000 тонн на рік · 10 000 т/міс</a:t>
             </a:r>
             <a:endParaRPr lang="en-US" sz="1150" dirty="0"/>
           </a:p>
@@ -6033,13 +6111,13 @@
       </p:sp>
       <p:sp>
         <p:nvSpPr>
-          <p:cNvPr id="15" name="Text 13"/>
-          <p:cNvSpPr/>
-          <p:nvPr/>
-        </p:nvSpPr>
-        <p:spPr>
-          <a:xfrm>
-            <a:off x="841248" y="4498848"/>
+          <p:cNvPr id="17" name="Text 15"/>
+          <p:cNvSpPr/>
+          <p:nvPr/>
+        </p:nvSpPr>
+        <p:spPr>
+          <a:xfrm>
+            <a:off x="841248" y="4718304"/>
             <a:ext cx="2103120" cy="256032"/>
           </a:xfrm>
           <a:prstGeom prst="rect">
@@ -6064,6 +6142,240 @@
                 <a:ea typeface="Calibri" pitchFamily="34" charset="-122"/>
                 <a:cs typeface="Calibri" pitchFamily="34" charset="-120"/>
               </a:rPr>
+              <a:t>Сировина</a:t>
+            </a:r>
+            <a:endParaRPr lang="en-US" sz="1050" dirty="0"/>
+          </a:p>
+        </p:txBody>
+      </p:sp>
+      <p:sp>
+        <p:nvSpPr>
+          <p:cNvPr id="18" name="Text 16"/>
+          <p:cNvSpPr/>
+          <p:nvPr/>
+        </p:nvSpPr>
+        <p:spPr>
+          <a:xfrm>
+            <a:off x="2971800" y="4718304"/>
+            <a:ext cx="4023360" cy="256032"/>
+          </a:xfrm>
+          <a:prstGeom prst="rect">
+            <a:avLst/>
+          </a:prstGeom>
+          <a:noFill/>
+          <a:ln/>
+        </p:spPr>
+        <p:txBody>
+          <a:bodyPr wrap="square" lIns="0" tIns="0" rIns="0" bIns="0" rtlCol="0" anchor="ctr"/>
+          <a:lstStyle/>
+          <a:p>
+            <a:pPr marL="0" indent="0">
+              <a:buNone/>
+            </a:pPr>
+            <a:r>
+              <a:rPr lang="en-US" sz="1150" b="1" dirty="0">
+                <a:solidFill>
+                  <a:srgbClr val="F5F0E2"/>
+                </a:solidFill>
+                <a:latin typeface="Calibri" pitchFamily="34" charset="0"/>
+                <a:ea typeface="Calibri" pitchFamily="34" charset="-122"/>
+                <a:cs typeface="Calibri" pitchFamily="34" charset="-120"/>
+              </a:rPr>
+              <a:t>99% Таїланд · 30+ партнерських рисозаводів</a:t>
+            </a:r>
+            <a:endParaRPr lang="en-US" sz="1150" dirty="0"/>
+          </a:p>
+        </p:txBody>
+      </p:sp>
+      <p:sp>
+        <p:nvSpPr>
+          <p:cNvPr id="19" name="Text 17"/>
+          <p:cNvSpPr/>
+          <p:nvPr/>
+        </p:nvSpPr>
+        <p:spPr>
+          <a:xfrm>
+            <a:off x="841248" y="5052060"/>
+            <a:ext cx="2103120" cy="256032"/>
+          </a:xfrm>
+          <a:prstGeom prst="rect">
+            <a:avLst/>
+          </a:prstGeom>
+          <a:noFill/>
+          <a:ln/>
+        </p:spPr>
+        <p:txBody>
+          <a:bodyPr wrap="square" lIns="0" tIns="0" rIns="0" bIns="0" rtlCol="0" anchor="ctr"/>
+          <a:lstStyle/>
+          <a:p>
+            <a:pPr marL="0" indent="0">
+              <a:buNone/>
+            </a:pPr>
+            <a:r>
+              <a:rPr lang="en-US" sz="1050" dirty="0">
+                <a:solidFill>
+                  <a:srgbClr val="BFCFBB"/>
+                </a:solidFill>
+                <a:latin typeface="Calibri" pitchFamily="34" charset="0"/>
+                <a:ea typeface="Calibri" pitchFamily="34" charset="-122"/>
+                <a:cs typeface="Calibri" pitchFamily="34" charset="-120"/>
+              </a:rPr>
+              <a:t>Експорт</a:t>
+            </a:r>
+            <a:endParaRPr lang="en-US" sz="1050" dirty="0"/>
+          </a:p>
+        </p:txBody>
+      </p:sp>
+      <p:sp>
+        <p:nvSpPr>
+          <p:cNvPr id="20" name="Text 18"/>
+          <p:cNvSpPr/>
+          <p:nvPr/>
+        </p:nvSpPr>
+        <p:spPr>
+          <a:xfrm>
+            <a:off x="2971800" y="5052060"/>
+            <a:ext cx="4023360" cy="256032"/>
+          </a:xfrm>
+          <a:prstGeom prst="rect">
+            <a:avLst/>
+          </a:prstGeom>
+          <a:noFill/>
+          <a:ln/>
+        </p:spPr>
+        <p:txBody>
+          <a:bodyPr wrap="square" lIns="0" tIns="0" rIns="0" bIns="0" rtlCol="0" anchor="ctr"/>
+          <a:lstStyle/>
+          <a:p>
+            <a:pPr marL="0" indent="0">
+              <a:buNone/>
+            </a:pPr>
+            <a:r>
+              <a:rPr lang="en-US" sz="1150" b="1" dirty="0">
+                <a:solidFill>
+                  <a:srgbClr val="F5F0E2"/>
+                </a:solidFill>
+                <a:latin typeface="Calibri" pitchFamily="34" charset="0"/>
+                <a:ea typeface="Calibri" pitchFamily="34" charset="-122"/>
+                <a:cs typeface="Calibri" pitchFamily="34" charset="-120"/>
+              </a:rPr>
+              <a:t>понад 20 країн світу</a:t>
+            </a:r>
+            <a:endParaRPr lang="en-US" sz="1150" dirty="0"/>
+          </a:p>
+        </p:txBody>
+      </p:sp>
+      <p:sp>
+        <p:nvSpPr>
+          <p:cNvPr id="21" name="Text 19"/>
+          <p:cNvSpPr/>
+          <p:nvPr/>
+        </p:nvSpPr>
+        <p:spPr>
+          <a:xfrm>
+            <a:off x="841248" y="5385816"/>
+            <a:ext cx="2103120" cy="256032"/>
+          </a:xfrm>
+          <a:prstGeom prst="rect">
+            <a:avLst/>
+          </a:prstGeom>
+          <a:noFill/>
+          <a:ln/>
+        </p:spPr>
+        <p:txBody>
+          <a:bodyPr wrap="square" lIns="0" tIns="0" rIns="0" bIns="0" rtlCol="0" anchor="ctr"/>
+          <a:lstStyle/>
+          <a:p>
+            <a:pPr marL="0" indent="0">
+              <a:buNone/>
+            </a:pPr>
+            <a:r>
+              <a:rPr lang="en-US" sz="1050" dirty="0">
+                <a:solidFill>
+                  <a:srgbClr val="BFCFBB"/>
+                </a:solidFill>
+                <a:latin typeface="Calibri" pitchFamily="34" charset="0"/>
+                <a:ea typeface="Calibri" pitchFamily="34" charset="-122"/>
+                <a:cs typeface="Calibri" pitchFamily="34" charset="-120"/>
+              </a:rPr>
+              <a:t>Формат в офері</a:t>
+            </a:r>
+            <a:endParaRPr lang="en-US" sz="1050" dirty="0"/>
+          </a:p>
+        </p:txBody>
+      </p:sp>
+      <p:sp>
+        <p:nvSpPr>
+          <p:cNvPr id="22" name="Text 20"/>
+          <p:cNvSpPr/>
+          <p:nvPr/>
+        </p:nvSpPr>
+        <p:spPr>
+          <a:xfrm>
+            <a:off x="2971800" y="5385816"/>
+            <a:ext cx="4023360" cy="256032"/>
+          </a:xfrm>
+          <a:prstGeom prst="rect">
+            <a:avLst/>
+          </a:prstGeom>
+          <a:noFill/>
+          <a:ln/>
+        </p:spPr>
+        <p:txBody>
+          <a:bodyPr wrap="square" lIns="0" tIns="0" rIns="0" bIns="0" rtlCol="0" anchor="ctr"/>
+          <a:lstStyle/>
+          <a:p>
+            <a:pPr marL="0" indent="0">
+              <a:buNone/>
+            </a:pPr>
+            <a:r>
+              <a:rPr lang="en-US" sz="1150" b="1" dirty="0">
+                <a:solidFill>
+                  <a:srgbClr val="F5F0E2"/>
+                </a:solidFill>
+                <a:latin typeface="Calibri" pitchFamily="34" charset="0"/>
+                <a:ea typeface="Calibri" pitchFamily="34" charset="-122"/>
+                <a:cs typeface="Calibri" pitchFamily="34" charset="-120"/>
+              </a:rPr>
+              <a:t>пауч 250 г · 24 шт у коробі</a:t>
+            </a:r>
+            <a:endParaRPr lang="en-US" sz="1150" dirty="0"/>
+          </a:p>
+        </p:txBody>
+      </p:sp>
+      <p:sp>
+        <p:nvSpPr>
+          <p:cNvPr id="21" name="Text 19"/>
+          <p:cNvSpPr/>
+          <p:nvPr/>
+        </p:nvSpPr>
+        <p:spPr>
+          <a:xfrm>
+            <a:off x="841248" y="5719572"/>
+            <a:ext cx="2103120" cy="256032"/>
+          </a:xfrm>
+          <a:prstGeom prst="rect">
+            <a:avLst/>
+          </a:prstGeom>
+          <a:noFill/>
+          <a:ln/>
+        </p:spPr>
+        <p:txBody>
+          <a:bodyPr wrap="square" lIns="0" tIns="0" rIns="0" bIns="0" rtlCol="0" anchor="ctr"/>
+          <a:lstStyle/>
+          <a:p>
+            <a:pPr marL="0" indent="0">
+              <a:buNone/>
+            </a:pPr>
+            <a:r>
+              <a:rPr lang="en-US" sz="1050" dirty="0">
+                <a:solidFill>
+                  <a:srgbClr val="BFCFBB"/>
+                </a:solidFill>
+                <a:latin typeface="Calibri" pitchFamily="34" charset="0"/>
+                <a:ea typeface="Calibri" pitchFamily="34" charset="-122"/>
+                <a:cs typeface="Calibri" pitchFamily="34" charset="-120"/>
+              </a:rPr>
               <a:t>Сертифікація</a:t>
             </a:r>
             <a:endParaRPr lang="en-US" sz="1050" dirty="0"/>
@@ -6072,13 +6384,13 @@
       </p:sp>
       <p:sp>
         <p:nvSpPr>
-          <p:cNvPr id="16" name="Text 14"/>
-          <p:cNvSpPr/>
-          <p:nvPr/>
-        </p:nvSpPr>
-        <p:spPr>
-          <a:xfrm>
-            <a:off x="2971800" y="4498848"/>
+          <p:cNvPr id="22" name="Text 20"/>
+          <p:cNvSpPr/>
+          <p:nvPr/>
+        </p:nvSpPr>
+        <p:spPr>
+          <a:xfrm>
+            <a:off x="2971800" y="5719572"/>
             <a:ext cx="4023360" cy="256032"/>
           </a:xfrm>
           <a:prstGeom prst="rect">
@@ -6103,241 +6415,7 @@
                 <a:ea typeface="Calibri" pitchFamily="34" charset="-122"/>
                 <a:cs typeface="Calibri" pitchFamily="34" charset="-120"/>
               </a:rPr>
-              <a:t>USDA Organic · EU Organic · BRCGS · HACCP</a:t>
-            </a:r>
-            <a:endParaRPr lang="en-US" sz="1150" dirty="0"/>
-          </a:p>
-        </p:txBody>
-      </p:sp>
-      <p:sp>
-        <p:nvSpPr>
-          <p:cNvPr id="17" name="Text 15"/>
-          <p:cNvSpPr/>
-          <p:nvPr/>
-        </p:nvSpPr>
-        <p:spPr>
-          <a:xfrm>
-            <a:off x="841248" y="4864608"/>
-            <a:ext cx="2103120" cy="256032"/>
-          </a:xfrm>
-          <a:prstGeom prst="rect">
-            <a:avLst/>
-          </a:prstGeom>
-          <a:noFill/>
-          <a:ln/>
-        </p:spPr>
-        <p:txBody>
-          <a:bodyPr wrap="square" lIns="0" tIns="0" rIns="0" bIns="0" rtlCol="0" anchor="ctr"/>
-          <a:lstStyle/>
-          <a:p>
-            <a:pPr marL="0" indent="0">
-              <a:buNone/>
-            </a:pPr>
-            <a:r>
-              <a:rPr lang="en-US" sz="1050" dirty="0">
-                <a:solidFill>
-                  <a:srgbClr val="BFCFBB"/>
-                </a:solidFill>
-                <a:latin typeface="Calibri" pitchFamily="34" charset="0"/>
-                <a:ea typeface="Calibri" pitchFamily="34" charset="-122"/>
-                <a:cs typeface="Calibri" pitchFamily="34" charset="-120"/>
-              </a:rPr>
-              <a:t>Формат в офері</a:t>
-            </a:r>
-            <a:endParaRPr lang="en-US" sz="1050" dirty="0"/>
-          </a:p>
-        </p:txBody>
-      </p:sp>
-      <p:sp>
-        <p:nvSpPr>
-          <p:cNvPr id="18" name="Text 16"/>
-          <p:cNvSpPr/>
-          <p:nvPr/>
-        </p:nvSpPr>
-        <p:spPr>
-          <a:xfrm>
-            <a:off x="2971800" y="4864608"/>
-            <a:ext cx="4023360" cy="256032"/>
-          </a:xfrm>
-          <a:prstGeom prst="rect">
-            <a:avLst/>
-          </a:prstGeom>
-          <a:noFill/>
-          <a:ln/>
-        </p:spPr>
-        <p:txBody>
-          <a:bodyPr wrap="square" lIns="0" tIns="0" rIns="0" bIns="0" rtlCol="0" anchor="ctr"/>
-          <a:lstStyle/>
-          <a:p>
-            <a:pPr marL="0" indent="0">
-              <a:buNone/>
-            </a:pPr>
-            <a:r>
-              <a:rPr lang="en-US" sz="1150" b="1" dirty="0">
-                <a:solidFill>
-                  <a:srgbClr val="F5F0E2"/>
-                </a:solidFill>
-                <a:latin typeface="Calibri" pitchFamily="34" charset="0"/>
-                <a:ea typeface="Calibri" pitchFamily="34" charset="-122"/>
-                <a:cs typeface="Calibri" pitchFamily="34" charset="-120"/>
-              </a:rPr>
-              <a:t>Пауч 250 г · 24 шт у коробі</a:t>
-            </a:r>
-            <a:endParaRPr lang="en-US" sz="1150" dirty="0"/>
-          </a:p>
-        </p:txBody>
-      </p:sp>
-      <p:sp>
-        <p:nvSpPr>
-          <p:cNvPr id="19" name="Text 17"/>
-          <p:cNvSpPr/>
-          <p:nvPr/>
-        </p:nvSpPr>
-        <p:spPr>
-          <a:xfrm>
-            <a:off x="841248" y="5230368"/>
-            <a:ext cx="2103120" cy="256032"/>
-          </a:xfrm>
-          <a:prstGeom prst="rect">
-            <a:avLst/>
-          </a:prstGeom>
-          <a:noFill/>
-          <a:ln/>
-        </p:spPr>
-        <p:txBody>
-          <a:bodyPr wrap="square" lIns="0" tIns="0" rIns="0" bIns="0" rtlCol="0" anchor="ctr"/>
-          <a:lstStyle/>
-          <a:p>
-            <a:pPr marL="0" indent="0">
-              <a:buNone/>
-            </a:pPr>
-            <a:r>
-              <a:rPr lang="en-US" sz="1050" dirty="0">
-                <a:solidFill>
-                  <a:srgbClr val="BFCFBB"/>
-                </a:solidFill>
-                <a:latin typeface="Calibri" pitchFamily="34" charset="0"/>
-                <a:ea typeface="Calibri" pitchFamily="34" charset="-122"/>
-                <a:cs typeface="Calibri" pitchFamily="34" charset="-120"/>
-              </a:rPr>
-              <a:t>Габарит короба</a:t>
-            </a:r>
-            <a:endParaRPr lang="en-US" sz="1050" dirty="0"/>
-          </a:p>
-        </p:txBody>
-      </p:sp>
-      <p:sp>
-        <p:nvSpPr>
-          <p:cNvPr id="20" name="Text 18"/>
-          <p:cNvSpPr/>
-          <p:nvPr/>
-        </p:nvSpPr>
-        <p:spPr>
-          <a:xfrm>
-            <a:off x="2971800" y="5230368"/>
-            <a:ext cx="4023360" cy="256032"/>
-          </a:xfrm>
-          <a:prstGeom prst="rect">
-            <a:avLst/>
-          </a:prstGeom>
-          <a:noFill/>
-          <a:ln/>
-        </p:spPr>
-        <p:txBody>
-          <a:bodyPr wrap="square" lIns="0" tIns="0" rIns="0" bIns="0" rtlCol="0" anchor="ctr"/>
-          <a:lstStyle/>
-          <a:p>
-            <a:pPr marL="0" indent="0">
-              <a:buNone/>
-            </a:pPr>
-            <a:r>
-              <a:rPr lang="en-US" sz="1150" b="1" dirty="0">
-                <a:solidFill>
-                  <a:srgbClr val="F5F0E2"/>
-                </a:solidFill>
-                <a:latin typeface="Calibri" pitchFamily="34" charset="0"/>
-                <a:ea typeface="Calibri" pitchFamily="34" charset="-122"/>
-                <a:cs typeface="Calibri" pitchFamily="34" charset="-120"/>
-              </a:rPr>
-              <a:t>200 × 400 × 200 мм · 0,016 м³</a:t>
-            </a:r>
-            <a:endParaRPr lang="en-US" sz="1150" dirty="0"/>
-          </a:p>
-        </p:txBody>
-      </p:sp>
-      <p:sp>
-        <p:nvSpPr>
-          <p:cNvPr id="21" name="Text 19"/>
-          <p:cNvSpPr/>
-          <p:nvPr/>
-        </p:nvSpPr>
-        <p:spPr>
-          <a:xfrm>
-            <a:off x="841248" y="5596128"/>
-            <a:ext cx="2103120" cy="256032"/>
-          </a:xfrm>
-          <a:prstGeom prst="rect">
-            <a:avLst/>
-          </a:prstGeom>
-          <a:noFill/>
-          <a:ln/>
-        </p:spPr>
-        <p:txBody>
-          <a:bodyPr wrap="square" lIns="0" tIns="0" rIns="0" bIns="0" rtlCol="0" anchor="ctr"/>
-          <a:lstStyle/>
-          <a:p>
-            <a:pPr marL="0" indent="0">
-              <a:buNone/>
-            </a:pPr>
-            <a:r>
-              <a:rPr lang="en-US" sz="1050" dirty="0">
-                <a:solidFill>
-                  <a:srgbClr val="BFCFBB"/>
-                </a:solidFill>
-                <a:latin typeface="Calibri" pitchFamily="34" charset="0"/>
-                <a:ea typeface="Calibri" pitchFamily="34" charset="-122"/>
-                <a:cs typeface="Calibri" pitchFamily="34" charset="-120"/>
-              </a:rPr>
-              <a:t>Термін виконання</a:t>
-            </a:r>
-            <a:endParaRPr lang="en-US" sz="1050" dirty="0"/>
-          </a:p>
-        </p:txBody>
-      </p:sp>
-      <p:sp>
-        <p:nvSpPr>
-          <p:cNvPr id="22" name="Text 20"/>
-          <p:cNvSpPr/>
-          <p:nvPr/>
-        </p:nvSpPr>
-        <p:spPr>
-          <a:xfrm>
-            <a:off x="2971800" y="5596128"/>
-            <a:ext cx="4023360" cy="256032"/>
-          </a:xfrm>
-          <a:prstGeom prst="rect">
-            <a:avLst/>
-          </a:prstGeom>
-          <a:noFill/>
-          <a:ln/>
-        </p:spPr>
-        <p:txBody>
-          <a:bodyPr wrap="square" lIns="0" tIns="0" rIns="0" bIns="0" rtlCol="0" anchor="ctr"/>
-          <a:lstStyle/>
-          <a:p>
-            <a:pPr marL="0" indent="0">
-              <a:buNone/>
-            </a:pPr>
-            <a:r>
-              <a:rPr lang="en-US" sz="1150" b="1" dirty="0">
-                <a:solidFill>
-                  <a:srgbClr val="F5F0E2"/>
-                </a:solidFill>
-                <a:latin typeface="Calibri" pitchFamily="34" charset="0"/>
-                <a:ea typeface="Calibri" pitchFamily="34" charset="-122"/>
-                <a:cs typeface="Calibri" pitchFamily="34" charset="-120"/>
-              </a:rPr>
-              <a:t>до 30 днів від контракту до ETD</a:t>
+              <a:t>BRC · HACCP · ISO 9001 · Halal · Organic</a:t>
             </a:r>
             <a:endParaRPr lang="en-US" sz="1150" dirty="0"/>
           </a:p>
@@ -6592,7 +6670,7 @@
                 <a:ea typeface="Cambria" pitchFamily="34" charset="-122"/>
                 <a:cs typeface="Cambria" pitchFamily="34" charset="-120"/>
               </a:rPr>
-              <a:t>10 000</a:t>
+              <a:t>120 000</a:t>
             </a:r>
             <a:r>
               <a:rPr lang="en-US" sz="1100" dirty="0">
@@ -6603,7 +6681,7 @@
                 <a:ea typeface="Cambria" pitchFamily="34" charset="-122"/>
                 <a:cs typeface="Cambria" pitchFamily="34" charset="-120"/>
               </a:rPr>
-              <a:t> т/міс</a:t>
+              <a:t> т/рік</a:t>
             </a:r>
             <a:endParaRPr lang="en-US" sz="1900" dirty="0"/>
           </a:p>
@@ -6813,7 +6891,7 @@
                 <a:ea typeface="Calibri" pitchFamily="34" charset="-122"/>
                 <a:cs typeface="Calibri" pitchFamily="34" charset="-120"/>
               </a:rPr>
-              <a:t>Джерело: корпоративна презентація CM Premium Rice Co., Ltd. та прайс-лист Chefrey.</a:t>
+              <a:t>Джерело: корпоративна презентація CM Premium Rice Co., Ltd., сайт cmp-rice.com та прайс-лист Chefrey.</a:t>
             </a:r>
             <a:endParaRPr lang="en-US" sz="900" dirty="0"/>
           </a:p>

--- a/RTE_Rice_Suppliers.pptx
+++ b/RTE_Rice_Suppliers.pptx
@@ -1012,8 +1012,8 @@
         </p:nvSpPr>
         <p:spPr>
           <a:xfrm>
-            <a:off x="640080" y="1417320"/>
-            <a:ext cx="5852160" cy="4023360"/>
+            <a:off x="640080" y="1691640"/>
+            <a:ext cx="5349240" cy="3474720"/>
           </a:xfrm>
           <a:prstGeom prst="roundRect">
             <a:avLst>
@@ -1021,8 +1021,8 @@
             </a:avLst>
           </a:prstGeom>
           <a:solidFill>
-            <a:srgbClr val="0A2214">
-              <a:alpha val="92000"/>
+            <a:srgbClr val="FFFFFF">
+              <a:alpha val="100000"/>
             </a:srgbClr>
           </a:solidFill>
           <a:ln w="15875">
@@ -1055,8 +1055,8 @@
         </p:nvSpPr>
         <p:spPr>
           <a:xfrm>
-            <a:off x="1143000" y="2276856"/>
-            <a:ext cx="4846320" cy="685800"/>
+            <a:off x="1097280" y="2322576"/>
+            <a:ext cx="4434840" cy="685800"/>
           </a:xfrm>
           <a:prstGeom prst="rect">
             <a:avLst/>
@@ -1072,9 +1072,9 @@
               <a:buNone/>
             </a:pPr>
             <a:r>
-              <a:rPr lang="en-US" sz="3000" b="1" kern="0" spc="150" dirty="0">
-                <a:solidFill>
-                  <a:srgbClr val="E0B252"/>
+              <a:rPr lang="en-US" sz="2700" b="1" kern="0" spc="150" dirty="0">
+                <a:solidFill>
+                  <a:srgbClr val="A5730F"/>
                 </a:solidFill>
                 <a:latin typeface="Cambria" pitchFamily="34" charset="0"/>
                 <a:ea typeface="Cambria" pitchFamily="34" charset="-122"/>
@@ -1094,8 +1094,8 @@
         </p:nvSpPr>
         <p:spPr>
           <a:xfrm>
-            <a:off x="1143000" y="3099816"/>
-            <a:ext cx="2011680" cy="0"/>
+            <a:off x="1097280" y="3081528"/>
+            <a:ext cx="1828800" cy="0"/>
           </a:xfrm>
           <a:prstGeom prst="line">
             <a:avLst/>
@@ -1124,7 +1124,7 @@
         </p:nvSpPr>
         <p:spPr>
           <a:xfrm>
-            <a:off x="2098548" y="3054096"/>
+            <a:off x="1961388" y="3035808"/>
             <a:ext cx="100584" cy="100584"/>
           </a:xfrm>
           <a:prstGeom prst="diamond">
@@ -1156,8 +1156,8 @@
         </p:nvSpPr>
         <p:spPr>
           <a:xfrm>
-            <a:off x="1143000" y="3282696"/>
-            <a:ext cx="4846320" cy="384048"/>
+            <a:off x="1097280" y="3264408"/>
+            <a:ext cx="4434840" cy="384048"/>
           </a:xfrm>
           <a:prstGeom prst="rect">
             <a:avLst/>
@@ -1175,7 +1175,7 @@
             <a:r>
               <a:rPr lang="en-US" sz="1700" dirty="0">
                 <a:solidFill>
-                  <a:srgbClr val="F5F0E2"/>
+                  <a:srgbClr val="241C10"/>
                 </a:solidFill>
                 <a:latin typeface="Calibri" pitchFamily="34" charset="0"/>
                 <a:ea typeface="Calibri" pitchFamily="34" charset="-122"/>
@@ -1195,8 +1195,8 @@
         </p:nvSpPr>
         <p:spPr>
           <a:xfrm>
-            <a:off x="1143000" y="3831336"/>
-            <a:ext cx="4983480" cy="329184"/>
+            <a:off x="1097280" y="3785616"/>
+            <a:ext cx="4434840" cy="329184"/>
           </a:xfrm>
           <a:prstGeom prst="rect">
             <a:avLst/>
@@ -1212,9 +1212,9 @@
               <a:buNone/>
             </a:pPr>
             <a:r>
-              <a:rPr lang="en-US" sz="1200" b="1" dirty="0">
-                <a:solidFill>
-                  <a:srgbClr val="FFFFFF"/>
+              <a:rPr lang="en-US" sz="1150" b="1" dirty="0">
+                <a:solidFill>
+                  <a:srgbClr val="241C10"/>
                 </a:solidFill>
                 <a:latin typeface="Calibri" pitchFamily="34" charset="0"/>
                 <a:ea typeface="Calibri" pitchFamily="34" charset="-122"/>
@@ -1223,9 +1223,9 @@
               <a:t>BSCM Foods Co., Ltd.</a:t>
             </a:r>
             <a:r>
-              <a:rPr lang="en-US" sz="1200" dirty="0">
-                <a:solidFill>
-                  <a:srgbClr val="A87C2A"/>
+              <a:rPr lang="en-US" sz="1150" dirty="0">
+                <a:solidFill>
+                  <a:srgbClr val="A5730F"/>
                 </a:solidFill>
                 <a:latin typeface="Calibri" pitchFamily="34" charset="0"/>
                 <a:ea typeface="Calibri" pitchFamily="34" charset="-122"/>
@@ -1234,9 +1234,9 @@
               <a:t>   ·   </a:t>
             </a:r>
             <a:r>
-              <a:rPr lang="en-US" sz="1200" b="1" dirty="0">
-                <a:solidFill>
-                  <a:srgbClr val="FFFFFF"/>
+              <a:rPr lang="en-US" sz="1150" b="1" dirty="0">
+                <a:solidFill>
+                  <a:srgbClr val="241C10"/>
                 </a:solidFill>
                 <a:latin typeface="Calibri" pitchFamily="34" charset="0"/>
                 <a:ea typeface="Calibri" pitchFamily="34" charset="-122"/>
@@ -1256,8 +1256,8 @@
         </p:nvSpPr>
         <p:spPr>
           <a:xfrm>
-            <a:off x="1143000" y="4288536"/>
-            <a:ext cx="4846320" cy="292608"/>
+            <a:off x="1097280" y="4242816"/>
+            <a:ext cx="4434840" cy="292608"/>
           </a:xfrm>
           <a:prstGeom prst="rect">
             <a:avLst/>
@@ -1275,7 +1275,7 @@
             <a:r>
               <a:rPr lang="en-US" sz="1150" dirty="0">
                 <a:solidFill>
-                  <a:srgbClr val="BFCFBB"/>
+                  <a:srgbClr val="8A7457"/>
                 </a:solidFill>
                 <a:latin typeface="Calibri" pitchFamily="34" charset="0"/>
                 <a:ea typeface="Calibri" pitchFamily="34" charset="-122"/>
@@ -1287,35 +1287,6 @@
           </a:p>
         </p:txBody>
       </p:sp>
-      <p:pic>
-        <p:nvPicPr>
-          <p:cNvPr id="9" name="Picture 8" descr="hero_rice.jpg"/>
-          <p:cNvPicPr>
-            <a:picLocks noChangeAspect="1"/>
-          </p:cNvPicPr>
-          <p:nvPr/>
-        </p:nvPicPr>
-        <p:blipFill>
-          <a:blip r:embed="rId4"/>
-          <a:stretch>
-            <a:fillRect/>
-          </a:stretch>
-        </p:blipFill>
-        <p:spPr>
-          <a:xfrm>
-            <a:off x="6949440" y="1417320"/>
-            <a:ext cx="4599432" cy="4023360"/>
-          </a:xfrm>
-          <a:prstGeom prst="roundRect">
-            <a:avLst/>
-          </a:prstGeom>
-          <a:ln w="15875">
-            <a:solidFill>
-              <a:srgbClr val="A87C2A"/>
-            </a:solidFill>
-          </a:ln>
-        </p:spPr>
-      </p:pic>
     </p:spTree>
   </p:cSld>
   <p:clrMapOvr>
@@ -1382,7 +1353,7 @@
             <a:r>
               <a:rPr lang="en-US" sz="1100" b="1" kern="0" spc="260" dirty="0">
                 <a:solidFill>
-                  <a:srgbClr val="D08A3C"/>
+                  <a:srgbClr val="B8721E"/>
                 </a:solidFill>
                 <a:latin typeface="Calibri" pitchFamily="34" charset="0"/>
                 <a:ea typeface="Calibri" pitchFamily="34" charset="-122"/>
@@ -1421,7 +1392,7 @@
             <a:r>
               <a:rPr lang="en-US" sz="3100" b="1" dirty="0">
                 <a:solidFill>
-                  <a:srgbClr val="FFFFFF"/>
+                  <a:srgbClr val="241C10"/>
                 </a:solidFill>
                 <a:latin typeface="Cambria" pitchFamily="34" charset="0"/>
                 <a:ea typeface="Cambria" pitchFamily="34" charset="-122"/>
@@ -1460,7 +1431,7 @@
             <a:r>
               <a:rPr lang="en-US" sz="1250" i="1" dirty="0">
                 <a:solidFill>
-                  <a:srgbClr val="BFCFBB"/>
+                  <a:srgbClr val="8A7457"/>
                 </a:solidFill>
                 <a:latin typeface="Calibri" pitchFamily="34" charset="0"/>
                 <a:ea typeface="Calibri" pitchFamily="34" charset="-122"/>
@@ -1489,7 +1460,7 @@
             </a:avLst>
           </a:prstGeom>
           <a:solidFill>
-            <a:srgbClr val="0A2214">
+            <a:srgbClr val="FFFFFF">
               <a:alpha val="90000"/>
             </a:srgbClr>
           </a:solidFill>
@@ -1542,7 +1513,7 @@
             <a:r>
               <a:rPr lang="en-US" sz="1700" b="1" dirty="0">
                 <a:solidFill>
-                  <a:srgbClr val="E0B252"/>
+                  <a:srgbClr val="A5730F"/>
                 </a:solidFill>
                 <a:latin typeface="Cambria" pitchFamily="34" charset="0"/>
                 <a:ea typeface="Cambria" pitchFamily="34" charset="-122"/>
@@ -1584,7 +1555,7 @@
             <a:r>
               <a:rPr lang="en-US" sz="1200" dirty="0">
                 <a:solidFill>
-                  <a:srgbClr val="F5F0E2"/>
+                  <a:srgbClr val="3A2F1F"/>
                 </a:solidFill>
                 <a:latin typeface="Calibri" pitchFamily="34" charset="0"/>
                 <a:ea typeface="Calibri" pitchFamily="34" charset="-122"/>
@@ -1623,7 +1594,7 @@
             <a:r>
               <a:rPr lang="en-US" sz="1700" b="1" dirty="0">
                 <a:solidFill>
-                  <a:srgbClr val="E0B252"/>
+                  <a:srgbClr val="A5730F"/>
                 </a:solidFill>
                 <a:latin typeface="Cambria" pitchFamily="34" charset="0"/>
                 <a:ea typeface="Cambria" pitchFamily="34" charset="-122"/>
@@ -1662,7 +1633,7 @@
             <a:r>
               <a:rPr lang="en-US" sz="1050" dirty="0">
                 <a:solidFill>
-                  <a:srgbClr val="BFCFBB"/>
+                  <a:srgbClr val="8A7457"/>
                 </a:solidFill>
                 <a:latin typeface="Calibri" pitchFamily="34" charset="0"/>
                 <a:ea typeface="Calibri" pitchFamily="34" charset="-122"/>
@@ -1701,7 +1672,7 @@
             <a:r>
               <a:rPr lang="en-US" sz="1150" b="1" dirty="0">
                 <a:solidFill>
-                  <a:srgbClr val="F5F0E2"/>
+                  <a:srgbClr val="3A2F1F"/>
                 </a:solidFill>
                 <a:latin typeface="Calibri" pitchFamily="34" charset="0"/>
                 <a:ea typeface="Calibri" pitchFamily="34" charset="-122"/>
@@ -1740,7 +1711,7 @@
             <a:r>
               <a:rPr lang="en-US" sz="1050" dirty="0">
                 <a:solidFill>
-                  <a:srgbClr val="BFCFBB"/>
+                  <a:srgbClr val="8A7457"/>
                 </a:solidFill>
                 <a:latin typeface="Calibri" pitchFamily="34" charset="0"/>
                 <a:ea typeface="Calibri" pitchFamily="34" charset="-122"/>
@@ -1779,7 +1750,7 @@
             <a:r>
               <a:rPr lang="en-US" sz="1150" b="1" dirty="0">
                 <a:solidFill>
-                  <a:srgbClr val="F5F0E2"/>
+                  <a:srgbClr val="3A2F1F"/>
                 </a:solidFill>
                 <a:latin typeface="Calibri" pitchFamily="34" charset="0"/>
                 <a:ea typeface="Calibri" pitchFamily="34" charset="-122"/>
@@ -1818,7 +1789,7 @@
             <a:r>
               <a:rPr lang="en-US" sz="1050" dirty="0">
                 <a:solidFill>
-                  <a:srgbClr val="BFCFBB"/>
+                  <a:srgbClr val="8A7457"/>
                 </a:solidFill>
                 <a:latin typeface="Calibri" pitchFamily="34" charset="0"/>
                 <a:ea typeface="Calibri" pitchFamily="34" charset="-122"/>
@@ -1857,7 +1828,7 @@
             <a:r>
               <a:rPr lang="en-US" sz="1150" b="1" dirty="0">
                 <a:solidFill>
-                  <a:srgbClr val="F5F0E2"/>
+                  <a:srgbClr val="3A2F1F"/>
                 </a:solidFill>
                 <a:latin typeface="Calibri" pitchFamily="34" charset="0"/>
                 <a:ea typeface="Calibri" pitchFamily="34" charset="-122"/>
@@ -1896,7 +1867,7 @@
             <a:r>
               <a:rPr lang="en-US" sz="1050" dirty="0">
                 <a:solidFill>
-                  <a:srgbClr val="BFCFBB"/>
+                  <a:srgbClr val="8A7457"/>
                 </a:solidFill>
                 <a:latin typeface="Calibri" pitchFamily="34" charset="0"/>
                 <a:ea typeface="Calibri" pitchFamily="34" charset="-122"/>
@@ -1935,7 +1906,7 @@
             <a:r>
               <a:rPr lang="en-US" sz="1150" b="1" dirty="0">
                 <a:solidFill>
-                  <a:srgbClr val="F5F0E2"/>
+                  <a:srgbClr val="3A2F1F"/>
                 </a:solidFill>
                 <a:latin typeface="Calibri" pitchFamily="34" charset="0"/>
                 <a:ea typeface="Calibri" pitchFamily="34" charset="-122"/>
@@ -1974,7 +1945,7 @@
             <a:r>
               <a:rPr lang="en-US" sz="1050" dirty="0">
                 <a:solidFill>
-                  <a:srgbClr val="BFCFBB"/>
+                  <a:srgbClr val="8A7457"/>
                 </a:solidFill>
                 <a:latin typeface="Calibri" pitchFamily="34" charset="0"/>
                 <a:ea typeface="Calibri" pitchFamily="34" charset="-122"/>
@@ -2013,7 +1984,7 @@
             <a:r>
               <a:rPr lang="en-US" sz="1150" b="1" dirty="0">
                 <a:solidFill>
-                  <a:srgbClr val="F5F0E2"/>
+                  <a:srgbClr val="3A2F1F"/>
                 </a:solidFill>
                 <a:latin typeface="Calibri" pitchFamily="34" charset="0"/>
                 <a:ea typeface="Calibri" pitchFamily="34" charset="-122"/>
@@ -2052,7 +2023,7 @@
             <a:r>
               <a:rPr lang="en-US" sz="1050" dirty="0">
                 <a:solidFill>
-                  <a:srgbClr val="BFCFBB"/>
+                  <a:srgbClr val="8A7457"/>
                 </a:solidFill>
                 <a:latin typeface="Calibri" pitchFamily="34" charset="0"/>
                 <a:ea typeface="Calibri" pitchFamily="34" charset="-122"/>
@@ -2091,7 +2062,7 @@
             <a:r>
               <a:rPr lang="en-US" sz="1150" b="1" dirty="0">
                 <a:solidFill>
-                  <a:srgbClr val="F5F0E2"/>
+                  <a:srgbClr val="3A2F1F"/>
                 </a:solidFill>
                 <a:latin typeface="Calibri" pitchFamily="34" charset="0"/>
                 <a:ea typeface="Calibri" pitchFamily="34" charset="-122"/>
@@ -2130,7 +2101,7 @@
             <a:r>
               <a:rPr lang="en-US" sz="1050" dirty="0">
                 <a:solidFill>
-                  <a:srgbClr val="BFCFBB"/>
+                  <a:srgbClr val="8A7457"/>
                 </a:solidFill>
                 <a:latin typeface="Calibri" pitchFamily="34" charset="0"/>
                 <a:ea typeface="Calibri" pitchFamily="34" charset="-122"/>
@@ -2169,7 +2140,7 @@
             <a:r>
               <a:rPr lang="en-US" sz="1150" b="1" dirty="0">
                 <a:solidFill>
-                  <a:srgbClr val="F5F0E2"/>
+                  <a:srgbClr val="3A2F1F"/>
                 </a:solidFill>
                 <a:latin typeface="Calibri" pitchFamily="34" charset="0"/>
                 <a:ea typeface="Calibri" pitchFamily="34" charset="-122"/>
@@ -2208,7 +2179,7 @@
             <a:r>
               <a:rPr lang="en-US" sz="1050" dirty="0">
                 <a:solidFill>
-                  <a:srgbClr val="BFCFBB"/>
+                  <a:srgbClr val="8A7457"/>
                 </a:solidFill>
                 <a:latin typeface="Calibri" pitchFamily="34" charset="0"/>
                 <a:ea typeface="Calibri" pitchFamily="34" charset="-122"/>
@@ -2247,7 +2218,7 @@
             <a:r>
               <a:rPr lang="en-US" sz="1150" b="1" dirty="0">
                 <a:solidFill>
-                  <a:srgbClr val="F5F0E2"/>
+                  <a:srgbClr val="3A2F1F"/>
                 </a:solidFill>
                 <a:latin typeface="Calibri" pitchFamily="34" charset="0"/>
                 <a:ea typeface="Calibri" pitchFamily="34" charset="-122"/>
@@ -2329,8 +2300,8 @@
             </a:avLst>
           </a:prstGeom>
           <a:solidFill>
-            <a:srgbClr val="0A2214">
-              <a:alpha val="90000"/>
+            <a:srgbClr val="9C5A16">
+              <a:alpha val="100000"/>
             </a:srgbClr>
           </a:solidFill>
           <a:ln w="15875">
@@ -2382,7 +2353,7 @@
             <a:r>
               <a:rPr lang="en-US" sz="1900" b="1" dirty="0">
                 <a:solidFill>
-                  <a:srgbClr val="E0B252"/>
+                  <a:srgbClr val="FBF1DC"/>
                 </a:solidFill>
                 <a:latin typeface="Cambria" pitchFamily="34" charset="0"/>
                 <a:ea typeface="Cambria" pitchFamily="34" charset="-122"/>
@@ -2393,7 +2364,7 @@
             <a:r>
               <a:rPr lang="en-US" sz="1100" dirty="0">
                 <a:solidFill>
-                  <a:srgbClr val="E0B252"/>
+                  <a:srgbClr val="FBF1DC"/>
                 </a:solidFill>
                 <a:latin typeface="Cambria" pitchFamily="34" charset="0"/>
                 <a:ea typeface="Cambria" pitchFamily="34" charset="-122"/>
@@ -2432,7 +2403,7 @@
             <a:r>
               <a:rPr lang="en-US" sz="1050" dirty="0">
                 <a:solidFill>
-                  <a:srgbClr val="F5F0E2"/>
+                  <a:srgbClr val="FBF1DC"/>
                 </a:solidFill>
                 <a:latin typeface="Calibri" pitchFamily="34" charset="0"/>
                 <a:ea typeface="Calibri" pitchFamily="34" charset="-122"/>
@@ -2461,8 +2432,8 @@
             </a:avLst>
           </a:prstGeom>
           <a:solidFill>
-            <a:srgbClr val="0A2214">
-              <a:alpha val="90000"/>
+            <a:srgbClr val="9C5A16">
+              <a:alpha val="100000"/>
             </a:srgbClr>
           </a:solidFill>
           <a:ln w="15875">
@@ -2514,7 +2485,7 @@
             <a:r>
               <a:rPr lang="en-US" sz="1900" b="1" dirty="0">
                 <a:solidFill>
-                  <a:srgbClr val="E0B252"/>
+                  <a:srgbClr val="FBF1DC"/>
                 </a:solidFill>
                 <a:latin typeface="Cambria" pitchFamily="34" charset="0"/>
                 <a:ea typeface="Cambria" pitchFamily="34" charset="-122"/>
@@ -2525,7 +2496,7 @@
             <a:r>
               <a:rPr lang="en-US" sz="1100" dirty="0">
                 <a:solidFill>
-                  <a:srgbClr val="E0B252"/>
+                  <a:srgbClr val="FBF1DC"/>
                 </a:solidFill>
                 <a:latin typeface="Cambria" pitchFamily="34" charset="0"/>
                 <a:ea typeface="Cambria" pitchFamily="34" charset="-122"/>
@@ -2564,7 +2535,7 @@
             <a:r>
               <a:rPr lang="en-US" sz="1050" dirty="0">
                 <a:solidFill>
-                  <a:srgbClr val="F5F0E2"/>
+                  <a:srgbClr val="FBF1DC"/>
                 </a:solidFill>
                 <a:latin typeface="Calibri" pitchFamily="34" charset="0"/>
                 <a:ea typeface="Calibri" pitchFamily="34" charset="-122"/>
@@ -2593,8 +2564,8 @@
             </a:avLst>
           </a:prstGeom>
           <a:solidFill>
-            <a:srgbClr val="0A2214">
-              <a:alpha val="90000"/>
+            <a:srgbClr val="9C5A16">
+              <a:alpha val="100000"/>
             </a:srgbClr>
           </a:solidFill>
           <a:ln w="15875">
@@ -2646,7 +2617,7 @@
             <a:r>
               <a:rPr lang="en-US" sz="1900" b="1" dirty="0">
                 <a:solidFill>
-                  <a:srgbClr val="E0B252"/>
+                  <a:srgbClr val="FBF1DC"/>
                 </a:solidFill>
                 <a:latin typeface="Cambria" pitchFamily="34" charset="0"/>
                 <a:ea typeface="Cambria" pitchFamily="34" charset="-122"/>
@@ -2657,7 +2628,7 @@
             <a:r>
               <a:rPr lang="en-US" sz="1100" dirty="0">
                 <a:solidFill>
-                  <a:srgbClr val="E0B252"/>
+                  <a:srgbClr val="FBF1DC"/>
                 </a:solidFill>
                 <a:latin typeface="Cambria" pitchFamily="34" charset="0"/>
                 <a:ea typeface="Cambria" pitchFamily="34" charset="-122"/>
@@ -2696,7 +2667,7 @@
             <a:r>
               <a:rPr lang="en-US" sz="1050" dirty="0">
                 <a:solidFill>
-                  <a:srgbClr val="F5F0E2"/>
+                  <a:srgbClr val="FBF1DC"/>
                 </a:solidFill>
                 <a:latin typeface="Calibri" pitchFamily="34" charset="0"/>
                 <a:ea typeface="Calibri" pitchFamily="34" charset="-122"/>
@@ -2735,7 +2706,7 @@
             <a:r>
               <a:rPr lang="en-US" sz="900" dirty="0">
                 <a:solidFill>
-                  <a:srgbClr val="C2D2BD"/>
+                  <a:srgbClr val="9C8B6E"/>
                 </a:solidFill>
                 <a:latin typeface="Calibri" pitchFamily="34" charset="0"/>
                 <a:ea typeface="Calibri" pitchFamily="34" charset="-122"/>
@@ -2813,7 +2784,7 @@
             <a:r>
               <a:rPr lang="en-US" sz="1100" b="1" kern="0" spc="260" dirty="0">
                 <a:solidFill>
-                  <a:srgbClr val="D08A3C"/>
+                  <a:srgbClr val="B8721E"/>
                 </a:solidFill>
                 <a:latin typeface="Calibri" pitchFamily="34" charset="0"/>
                 <a:ea typeface="Calibri" pitchFamily="34" charset="-122"/>
@@ -2852,7 +2823,7 @@
             <a:r>
               <a:rPr lang="en-US" sz="3100" b="1" dirty="0">
                 <a:solidFill>
-                  <a:srgbClr val="FFFFFF"/>
+                  <a:srgbClr val="241C10"/>
                 </a:solidFill>
                 <a:latin typeface="Cambria" pitchFamily="34" charset="0"/>
                 <a:ea typeface="Cambria" pitchFamily="34" charset="-122"/>
@@ -2891,7 +2862,7 @@
             <a:r>
               <a:rPr lang="en-US" sz="1250" i="1" dirty="0">
                 <a:solidFill>
-                  <a:srgbClr val="BFCFBB"/>
+                  <a:srgbClr val="8A7457"/>
                 </a:solidFill>
                 <a:latin typeface="Calibri" pitchFamily="34" charset="0"/>
                 <a:ea typeface="Calibri" pitchFamily="34" charset="-122"/>
@@ -2920,7 +2891,7 @@
             </a:avLst>
           </a:prstGeom>
           <a:solidFill>
-            <a:srgbClr val="0A2214">
+            <a:srgbClr val="FFFFFF">
               <a:alpha val="90000"/>
             </a:srgbClr>
           </a:solidFill>
@@ -3099,7 +3070,7 @@
             <a:r>
               <a:rPr lang="en-US" sz="1450" b="1" dirty="0">
                 <a:solidFill>
-                  <a:srgbClr val="FFFFFF"/>
+                  <a:srgbClr val="241C10"/>
                 </a:solidFill>
                 <a:latin typeface="Cambria" pitchFamily="34" charset="0"/>
                 <a:ea typeface="Cambria" pitchFamily="34" charset="-122"/>
@@ -3138,7 +3109,7 @@
             <a:r>
               <a:rPr lang="en-US" sz="1000" dirty="0">
                 <a:solidFill>
-                  <a:srgbClr val="BFCFBB"/>
+                  <a:srgbClr val="8A7457"/>
                 </a:solidFill>
                 <a:latin typeface="Calibri" pitchFamily="34" charset="0"/>
                 <a:ea typeface="Calibri" pitchFamily="34" charset="-122"/>
@@ -3167,7 +3138,7 @@
             </a:avLst>
           </a:prstGeom>
           <a:solidFill>
-            <a:srgbClr val="16391F">
+            <a:srgbClr val="FBF1DC">
               <a:alpha val="92000"/>
             </a:srgbClr>
           </a:solidFill>
@@ -3213,7 +3184,7 @@
             <a:r>
               <a:rPr lang="en-US" sz="750" b="1" kern="0" spc="100" dirty="0">
                 <a:solidFill>
-                  <a:srgbClr val="E0B252"/>
+                  <a:srgbClr val="A5730F"/>
                 </a:solidFill>
                 <a:latin typeface="Calibri" pitchFamily="34" charset="0"/>
                 <a:ea typeface="Calibri" pitchFamily="34" charset="-122"/>
@@ -3252,7 +3223,7 @@
             <a:r>
               <a:rPr lang="en-US" sz="900" dirty="0">
                 <a:solidFill>
-                  <a:srgbClr val="BFCFBB"/>
+                  <a:srgbClr val="8A7457"/>
                 </a:solidFill>
                 <a:latin typeface="Calibri" pitchFamily="34" charset="0"/>
                 <a:ea typeface="Calibri" pitchFamily="34" charset="-122"/>
@@ -3291,7 +3262,7 @@
             <a:r>
               <a:rPr lang="en-US" sz="950" dirty="0">
                 <a:solidFill>
-                  <a:srgbClr val="F5F0E2"/>
+                  <a:srgbClr val="3A2F1F"/>
                 </a:solidFill>
                 <a:latin typeface="Calibri" pitchFamily="34" charset="0"/>
                 <a:ea typeface="Calibri" pitchFamily="34" charset="-122"/>
@@ -3330,7 +3301,7 @@
             <a:r>
               <a:rPr lang="en-US" sz="900" b="1" dirty="0">
                 <a:solidFill>
-                  <a:srgbClr val="E0B252"/>
+                  <a:srgbClr val="A5730F"/>
                 </a:solidFill>
                 <a:latin typeface="Calibri" pitchFamily="34" charset="0"/>
                 <a:ea typeface="Calibri" pitchFamily="34" charset="-122"/>
@@ -3369,7 +3340,7 @@
             <a:r>
               <a:rPr lang="en-US" sz="950" b="1" dirty="0">
                 <a:solidFill>
-                  <a:srgbClr val="E0B252"/>
+                  <a:srgbClr val="A5730F"/>
                 </a:solidFill>
                 <a:latin typeface="Calibri" pitchFamily="34" charset="0"/>
                 <a:ea typeface="Calibri" pitchFamily="34" charset="-122"/>
@@ -3408,7 +3379,7 @@
             <a:r>
               <a:rPr lang="en-US" sz="900" dirty="0">
                 <a:solidFill>
-                  <a:srgbClr val="BFCFBB"/>
+                  <a:srgbClr val="8A7457"/>
                 </a:solidFill>
                 <a:latin typeface="Calibri" pitchFamily="34" charset="0"/>
                 <a:ea typeface="Calibri" pitchFamily="34" charset="-122"/>
@@ -3447,7 +3418,7 @@
             <a:r>
               <a:rPr lang="en-US" sz="950" dirty="0">
                 <a:solidFill>
-                  <a:srgbClr val="F5F0E2"/>
+                  <a:srgbClr val="3A2F1F"/>
                 </a:solidFill>
                 <a:latin typeface="Calibri" pitchFamily="34" charset="0"/>
                 <a:ea typeface="Calibri" pitchFamily="34" charset="-122"/>
@@ -3486,7 +3457,7 @@
             <a:r>
               <a:rPr lang="en-US" sz="900" dirty="0">
                 <a:solidFill>
-                  <a:srgbClr val="BFCFBB"/>
+                  <a:srgbClr val="8A7457"/>
                 </a:solidFill>
                 <a:latin typeface="Calibri" pitchFamily="34" charset="0"/>
                 <a:ea typeface="Calibri" pitchFamily="34" charset="-122"/>
@@ -3525,7 +3496,7 @@
             <a:r>
               <a:rPr lang="en-US" sz="950" dirty="0">
                 <a:solidFill>
-                  <a:srgbClr val="F5F0E2"/>
+                  <a:srgbClr val="3A2F1F"/>
                 </a:solidFill>
                 <a:latin typeface="Calibri" pitchFamily="34" charset="0"/>
                 <a:ea typeface="Calibri" pitchFamily="34" charset="-122"/>
@@ -3554,7 +3525,7 @@
             </a:avLst>
           </a:prstGeom>
           <a:solidFill>
-            <a:srgbClr val="0A2214">
+            <a:srgbClr val="FFFFFF">
               <a:alpha val="90000"/>
             </a:srgbClr>
           </a:solidFill>
@@ -3733,7 +3704,7 @@
             <a:r>
               <a:rPr lang="en-US" sz="1450" b="1" dirty="0">
                 <a:solidFill>
-                  <a:srgbClr val="FFFFFF"/>
+                  <a:srgbClr val="241C10"/>
                 </a:solidFill>
                 <a:latin typeface="Cambria" pitchFamily="34" charset="0"/>
                 <a:ea typeface="Cambria" pitchFamily="34" charset="-122"/>
@@ -3772,7 +3743,7 @@
             <a:r>
               <a:rPr lang="en-US" sz="1000" dirty="0">
                 <a:solidFill>
-                  <a:srgbClr val="BFCFBB"/>
+                  <a:srgbClr val="8A7457"/>
                 </a:solidFill>
                 <a:latin typeface="Calibri" pitchFamily="34" charset="0"/>
                 <a:ea typeface="Calibri" pitchFamily="34" charset="-122"/>
@@ -3801,7 +3772,7 @@
             </a:avLst>
           </a:prstGeom>
           <a:solidFill>
-            <a:srgbClr val="16391F">
+            <a:srgbClr val="FBF1DC">
               <a:alpha val="92000"/>
             </a:srgbClr>
           </a:solidFill>
@@ -3847,7 +3818,7 @@
             <a:r>
               <a:rPr lang="en-US" sz="750" b="1" kern="0" spc="100" dirty="0">
                 <a:solidFill>
-                  <a:srgbClr val="E0B252"/>
+                  <a:srgbClr val="A5730F"/>
                 </a:solidFill>
                 <a:latin typeface="Calibri" pitchFamily="34" charset="0"/>
                 <a:ea typeface="Calibri" pitchFamily="34" charset="-122"/>
@@ -3886,7 +3857,7 @@
             <a:r>
               <a:rPr lang="en-US" sz="900" dirty="0">
                 <a:solidFill>
-                  <a:srgbClr val="BFCFBB"/>
+                  <a:srgbClr val="8A7457"/>
                 </a:solidFill>
                 <a:latin typeface="Calibri" pitchFamily="34" charset="0"/>
                 <a:ea typeface="Calibri" pitchFamily="34" charset="-122"/>
@@ -3925,7 +3896,7 @@
             <a:r>
               <a:rPr lang="en-US" sz="950" dirty="0">
                 <a:solidFill>
-                  <a:srgbClr val="F5F0E2"/>
+                  <a:srgbClr val="3A2F1F"/>
                 </a:solidFill>
                 <a:latin typeface="Calibri" pitchFamily="34" charset="0"/>
                 <a:ea typeface="Calibri" pitchFamily="34" charset="-122"/>
@@ -3964,7 +3935,7 @@
             <a:r>
               <a:rPr lang="en-US" sz="900" b="1" dirty="0">
                 <a:solidFill>
-                  <a:srgbClr val="E0B252"/>
+                  <a:srgbClr val="A5730F"/>
                 </a:solidFill>
                 <a:latin typeface="Calibri" pitchFamily="34" charset="0"/>
                 <a:ea typeface="Calibri" pitchFamily="34" charset="-122"/>
@@ -4003,7 +3974,7 @@
             <a:r>
               <a:rPr lang="en-US" sz="950" b="1" dirty="0">
                 <a:solidFill>
-                  <a:srgbClr val="E0B252"/>
+                  <a:srgbClr val="A5730F"/>
                 </a:solidFill>
                 <a:latin typeface="Calibri" pitchFamily="34" charset="0"/>
                 <a:ea typeface="Calibri" pitchFamily="34" charset="-122"/>
@@ -4042,7 +4013,7 @@
             <a:r>
               <a:rPr lang="en-US" sz="900" dirty="0">
                 <a:solidFill>
-                  <a:srgbClr val="BFCFBB"/>
+                  <a:srgbClr val="8A7457"/>
                 </a:solidFill>
                 <a:latin typeface="Calibri" pitchFamily="34" charset="0"/>
                 <a:ea typeface="Calibri" pitchFamily="34" charset="-122"/>
@@ -4081,7 +4052,7 @@
             <a:r>
               <a:rPr lang="en-US" sz="950" dirty="0">
                 <a:solidFill>
-                  <a:srgbClr val="F5F0E2"/>
+                  <a:srgbClr val="3A2F1F"/>
                 </a:solidFill>
                 <a:latin typeface="Calibri" pitchFamily="34" charset="0"/>
                 <a:ea typeface="Calibri" pitchFamily="34" charset="-122"/>
@@ -4120,7 +4091,7 @@
             <a:r>
               <a:rPr lang="en-US" sz="900" dirty="0">
                 <a:solidFill>
-                  <a:srgbClr val="BFCFBB"/>
+                  <a:srgbClr val="8A7457"/>
                 </a:solidFill>
                 <a:latin typeface="Calibri" pitchFamily="34" charset="0"/>
                 <a:ea typeface="Calibri" pitchFamily="34" charset="-122"/>
@@ -4159,7 +4130,7 @@
             <a:r>
               <a:rPr lang="en-US" sz="950" dirty="0">
                 <a:solidFill>
-                  <a:srgbClr val="F5F0E2"/>
+                  <a:srgbClr val="3A2F1F"/>
                 </a:solidFill>
                 <a:latin typeface="Calibri" pitchFamily="34" charset="0"/>
                 <a:ea typeface="Calibri" pitchFamily="34" charset="-122"/>
@@ -4188,7 +4159,7 @@
             </a:avLst>
           </a:prstGeom>
           <a:solidFill>
-            <a:srgbClr val="0A2214">
+            <a:srgbClr val="FFFFFF">
               <a:alpha val="90000"/>
             </a:srgbClr>
           </a:solidFill>
@@ -4367,7 +4338,7 @@
             <a:r>
               <a:rPr lang="en-US" sz="1450" b="1" dirty="0">
                 <a:solidFill>
-                  <a:srgbClr val="FFFFFF"/>
+                  <a:srgbClr val="241C10"/>
                 </a:solidFill>
                 <a:latin typeface="Cambria" pitchFamily="34" charset="0"/>
                 <a:ea typeface="Cambria" pitchFamily="34" charset="-122"/>
@@ -4406,7 +4377,7 @@
             <a:r>
               <a:rPr lang="en-US" sz="1000" dirty="0">
                 <a:solidFill>
-                  <a:srgbClr val="BFCFBB"/>
+                  <a:srgbClr val="8A7457"/>
                 </a:solidFill>
                 <a:latin typeface="Calibri" pitchFamily="34" charset="0"/>
                 <a:ea typeface="Calibri" pitchFamily="34" charset="-122"/>
@@ -4435,7 +4406,7 @@
             </a:avLst>
           </a:prstGeom>
           <a:solidFill>
-            <a:srgbClr val="16391F">
+            <a:srgbClr val="FBF1DC">
               <a:alpha val="92000"/>
             </a:srgbClr>
           </a:solidFill>
@@ -4481,7 +4452,7 @@
             <a:r>
               <a:rPr lang="en-US" sz="750" b="1" kern="0" spc="100" dirty="0">
                 <a:solidFill>
-                  <a:srgbClr val="E0B252"/>
+                  <a:srgbClr val="A5730F"/>
                 </a:solidFill>
                 <a:latin typeface="Calibri" pitchFamily="34" charset="0"/>
                 <a:ea typeface="Calibri" pitchFamily="34" charset="-122"/>
@@ -4520,7 +4491,7 @@
             <a:r>
               <a:rPr lang="en-US" sz="900" dirty="0">
                 <a:solidFill>
-                  <a:srgbClr val="BFCFBB"/>
+                  <a:srgbClr val="8A7457"/>
                 </a:solidFill>
                 <a:latin typeface="Calibri" pitchFamily="34" charset="0"/>
                 <a:ea typeface="Calibri" pitchFamily="34" charset="-122"/>
@@ -4559,7 +4530,7 @@
             <a:r>
               <a:rPr lang="en-US" sz="950" dirty="0">
                 <a:solidFill>
-                  <a:srgbClr val="F5F0E2"/>
+                  <a:srgbClr val="3A2F1F"/>
                 </a:solidFill>
                 <a:latin typeface="Calibri" pitchFamily="34" charset="0"/>
                 <a:ea typeface="Calibri" pitchFamily="34" charset="-122"/>
@@ -4598,7 +4569,7 @@
             <a:r>
               <a:rPr lang="en-US" sz="900" b="1" dirty="0">
                 <a:solidFill>
-                  <a:srgbClr val="E0B252"/>
+                  <a:srgbClr val="A5730F"/>
                 </a:solidFill>
                 <a:latin typeface="Calibri" pitchFamily="34" charset="0"/>
                 <a:ea typeface="Calibri" pitchFamily="34" charset="-122"/>
@@ -4637,7 +4608,7 @@
             <a:r>
               <a:rPr lang="en-US" sz="950" b="1" dirty="0">
                 <a:solidFill>
-                  <a:srgbClr val="E0B252"/>
+                  <a:srgbClr val="A5730F"/>
                 </a:solidFill>
                 <a:latin typeface="Calibri" pitchFamily="34" charset="0"/>
                 <a:ea typeface="Calibri" pitchFamily="34" charset="-122"/>
@@ -4676,7 +4647,7 @@
             <a:r>
               <a:rPr lang="en-US" sz="900" dirty="0">
                 <a:solidFill>
-                  <a:srgbClr val="BFCFBB"/>
+                  <a:srgbClr val="8A7457"/>
                 </a:solidFill>
                 <a:latin typeface="Calibri" pitchFamily="34" charset="0"/>
                 <a:ea typeface="Calibri" pitchFamily="34" charset="-122"/>
@@ -4715,7 +4686,7 @@
             <a:r>
               <a:rPr lang="en-US" sz="950" dirty="0">
                 <a:solidFill>
-                  <a:srgbClr val="F5F0E2"/>
+                  <a:srgbClr val="3A2F1F"/>
                 </a:solidFill>
                 <a:latin typeface="Calibri" pitchFamily="34" charset="0"/>
                 <a:ea typeface="Calibri" pitchFamily="34" charset="-122"/>
@@ -4754,7 +4725,7 @@
             <a:r>
               <a:rPr lang="en-US" sz="900" dirty="0">
                 <a:solidFill>
-                  <a:srgbClr val="BFCFBB"/>
+                  <a:srgbClr val="8A7457"/>
                 </a:solidFill>
                 <a:latin typeface="Calibri" pitchFamily="34" charset="0"/>
                 <a:ea typeface="Calibri" pitchFamily="34" charset="-122"/>
@@ -4793,7 +4764,7 @@
             <a:r>
               <a:rPr lang="en-US" sz="950" dirty="0">
                 <a:solidFill>
-                  <a:srgbClr val="F5F0E2"/>
+                  <a:srgbClr val="3A2F1F"/>
                 </a:solidFill>
                 <a:latin typeface="Calibri" pitchFamily="34" charset="0"/>
                 <a:ea typeface="Calibri" pitchFamily="34" charset="-122"/>
@@ -4822,7 +4793,7 @@
             </a:avLst>
           </a:prstGeom>
           <a:solidFill>
-            <a:srgbClr val="0A2214">
+            <a:srgbClr val="FFFFFF">
               <a:alpha val="90000"/>
             </a:srgbClr>
           </a:solidFill>
@@ -5001,7 +4972,7 @@
             <a:r>
               <a:rPr lang="en-US" sz="1450" b="1" dirty="0">
                 <a:solidFill>
-                  <a:srgbClr val="FFFFFF"/>
+                  <a:srgbClr val="241C10"/>
                 </a:solidFill>
                 <a:latin typeface="Cambria" pitchFamily="34" charset="0"/>
                 <a:ea typeface="Cambria" pitchFamily="34" charset="-122"/>
@@ -5040,7 +5011,7 @@
             <a:r>
               <a:rPr lang="en-US" sz="1000" dirty="0">
                 <a:solidFill>
-                  <a:srgbClr val="BFCFBB"/>
+                  <a:srgbClr val="8A7457"/>
                 </a:solidFill>
                 <a:latin typeface="Calibri" pitchFamily="34" charset="0"/>
                 <a:ea typeface="Calibri" pitchFamily="34" charset="-122"/>
@@ -5069,7 +5040,7 @@
             </a:avLst>
           </a:prstGeom>
           <a:solidFill>
-            <a:srgbClr val="16391F">
+            <a:srgbClr val="FBF1DC">
               <a:alpha val="92000"/>
             </a:srgbClr>
           </a:solidFill>
@@ -5115,7 +5086,7 @@
             <a:r>
               <a:rPr lang="en-US" sz="750" b="1" kern="0" spc="100" dirty="0">
                 <a:solidFill>
-                  <a:srgbClr val="E0B252"/>
+                  <a:srgbClr val="A5730F"/>
                 </a:solidFill>
                 <a:latin typeface="Calibri" pitchFamily="34" charset="0"/>
                 <a:ea typeface="Calibri" pitchFamily="34" charset="-122"/>
@@ -5154,7 +5125,7 @@
             <a:r>
               <a:rPr lang="en-US" sz="900" dirty="0">
                 <a:solidFill>
-                  <a:srgbClr val="BFCFBB"/>
+                  <a:srgbClr val="8A7457"/>
                 </a:solidFill>
                 <a:latin typeface="Calibri" pitchFamily="34" charset="0"/>
                 <a:ea typeface="Calibri" pitchFamily="34" charset="-122"/>
@@ -5193,7 +5164,7 @@
             <a:r>
               <a:rPr lang="en-US" sz="950" dirty="0">
                 <a:solidFill>
-                  <a:srgbClr val="F5F0E2"/>
+                  <a:srgbClr val="3A2F1F"/>
                 </a:solidFill>
                 <a:latin typeface="Calibri" pitchFamily="34" charset="0"/>
                 <a:ea typeface="Calibri" pitchFamily="34" charset="-122"/>
@@ -5232,7 +5203,7 @@
             <a:r>
               <a:rPr lang="en-US" sz="900" b="1" dirty="0">
                 <a:solidFill>
-                  <a:srgbClr val="E0B252"/>
+                  <a:srgbClr val="A5730F"/>
                 </a:solidFill>
                 <a:latin typeface="Calibri" pitchFamily="34" charset="0"/>
                 <a:ea typeface="Calibri" pitchFamily="34" charset="-122"/>
@@ -5271,7 +5242,7 @@
             <a:r>
               <a:rPr lang="en-US" sz="950" b="1" dirty="0">
                 <a:solidFill>
-                  <a:srgbClr val="E0B252"/>
+                  <a:srgbClr val="A5730F"/>
                 </a:solidFill>
                 <a:latin typeface="Calibri" pitchFamily="34" charset="0"/>
                 <a:ea typeface="Calibri" pitchFamily="34" charset="-122"/>
@@ -5310,7 +5281,7 @@
             <a:r>
               <a:rPr lang="en-US" sz="900" dirty="0">
                 <a:solidFill>
-                  <a:srgbClr val="BFCFBB"/>
+                  <a:srgbClr val="8A7457"/>
                 </a:solidFill>
                 <a:latin typeface="Calibri" pitchFamily="34" charset="0"/>
                 <a:ea typeface="Calibri" pitchFamily="34" charset="-122"/>
@@ -5349,7 +5320,7 @@
             <a:r>
               <a:rPr lang="en-US" sz="950" dirty="0">
                 <a:solidFill>
-                  <a:srgbClr val="F5F0E2"/>
+                  <a:srgbClr val="3A2F1F"/>
                 </a:solidFill>
                 <a:latin typeface="Calibri" pitchFamily="34" charset="0"/>
                 <a:ea typeface="Calibri" pitchFamily="34" charset="-122"/>
@@ -5388,7 +5359,7 @@
             <a:r>
               <a:rPr lang="en-US" sz="900" dirty="0">
                 <a:solidFill>
-                  <a:srgbClr val="BFCFBB"/>
+                  <a:srgbClr val="8A7457"/>
                 </a:solidFill>
                 <a:latin typeface="Calibri" pitchFamily="34" charset="0"/>
                 <a:ea typeface="Calibri" pitchFamily="34" charset="-122"/>
@@ -5427,7 +5398,7 @@
             <a:r>
               <a:rPr lang="en-US" sz="950" dirty="0">
                 <a:solidFill>
-                  <a:srgbClr val="F5F0E2"/>
+                  <a:srgbClr val="3A2F1F"/>
                 </a:solidFill>
                 <a:latin typeface="Calibri" pitchFamily="34" charset="0"/>
                 <a:ea typeface="Calibri" pitchFamily="34" charset="-122"/>
@@ -5466,7 +5437,7 @@
             <a:r>
               <a:rPr lang="en-US" sz="900" dirty="0">
                 <a:solidFill>
-                  <a:srgbClr val="C2D2BD"/>
+                  <a:srgbClr val="9C8B6E"/>
                 </a:solidFill>
                 <a:latin typeface="Calibri" pitchFamily="34" charset="0"/>
                 <a:ea typeface="Calibri" pitchFamily="34" charset="-122"/>
@@ -5544,7 +5515,7 @@
             <a:r>
               <a:rPr lang="en-US" sz="1100" b="1" kern="0" spc="260" dirty="0">
                 <a:solidFill>
-                  <a:srgbClr val="6FA84B"/>
+                  <a:srgbClr val="2E7D3C"/>
                 </a:solidFill>
                 <a:latin typeface="Calibri" pitchFamily="34" charset="0"/>
                 <a:ea typeface="Calibri" pitchFamily="34" charset="-122"/>
@@ -5583,7 +5554,7 @@
             <a:r>
               <a:rPr lang="en-US" sz="3100" b="1" dirty="0">
                 <a:solidFill>
-                  <a:srgbClr val="FFFFFF"/>
+                  <a:srgbClr val="241C10"/>
                 </a:solidFill>
                 <a:latin typeface="Cambria" pitchFamily="34" charset="0"/>
                 <a:ea typeface="Cambria" pitchFamily="34" charset="-122"/>
@@ -5622,7 +5593,7 @@
             <a:r>
               <a:rPr lang="en-US" sz="1250" i="1" dirty="0">
                 <a:solidFill>
-                  <a:srgbClr val="BFCFBB"/>
+                  <a:srgbClr val="8A7457"/>
                 </a:solidFill>
                 <a:latin typeface="Calibri" pitchFamily="34" charset="0"/>
                 <a:ea typeface="Calibri" pitchFamily="34" charset="-122"/>
@@ -5651,13 +5622,13 @@
             </a:avLst>
           </a:prstGeom>
           <a:solidFill>
-            <a:srgbClr val="0A2214">
+            <a:srgbClr val="FFFFFF">
               <a:alpha val="90000"/>
             </a:srgbClr>
           </a:solidFill>
           <a:ln w="15875">
             <a:solidFill>
-              <a:srgbClr val="A87C2A"/>
+              <a:srgbClr val="2E7D3C"/>
             </a:solidFill>
             <a:prstDash val="solid"/>
           </a:ln>
@@ -5704,7 +5675,7 @@
             <a:r>
               <a:rPr lang="en-US" sz="1700" b="1" dirty="0">
                 <a:solidFill>
-                  <a:srgbClr val="E0B252"/>
+                  <a:srgbClr val="1F5C3A"/>
                 </a:solidFill>
                 <a:latin typeface="Cambria" pitchFamily="34" charset="0"/>
                 <a:ea typeface="Cambria" pitchFamily="34" charset="-122"/>
@@ -5746,7 +5717,7 @@
             <a:r>
               <a:rPr lang="en-US" sz="1200" dirty="0">
                 <a:solidFill>
-                  <a:srgbClr val="F5F0E2"/>
+                  <a:srgbClr val="3A2F1F"/>
                 </a:solidFill>
                 <a:latin typeface="Calibri" pitchFamily="34" charset="0"/>
                 <a:ea typeface="Calibri" pitchFamily="34" charset="-122"/>
@@ -5785,7 +5756,7 @@
             <a:r>
               <a:rPr lang="en-US" sz="1700" b="1" dirty="0">
                 <a:solidFill>
-                  <a:srgbClr val="E0B252"/>
+                  <a:srgbClr val="1F5C3A"/>
                 </a:solidFill>
                 <a:latin typeface="Cambria" pitchFamily="34" charset="0"/>
                 <a:ea typeface="Cambria" pitchFamily="34" charset="-122"/>
@@ -5824,7 +5795,7 @@
             <a:r>
               <a:rPr lang="en-US" sz="1050" dirty="0">
                 <a:solidFill>
-                  <a:srgbClr val="BFCFBB"/>
+                  <a:srgbClr val="8A7457"/>
                 </a:solidFill>
                 <a:latin typeface="Calibri" pitchFamily="34" charset="0"/>
                 <a:ea typeface="Calibri" pitchFamily="34" charset="-122"/>
@@ -5863,7 +5834,7 @@
             <a:r>
               <a:rPr lang="en-US" sz="1150" b="1" dirty="0">
                 <a:solidFill>
-                  <a:srgbClr val="F5F0E2"/>
+                  <a:srgbClr val="3A2F1F"/>
                 </a:solidFill>
                 <a:latin typeface="Calibri" pitchFamily="34" charset="0"/>
                 <a:ea typeface="Calibri" pitchFamily="34" charset="-122"/>
@@ -5902,7 +5873,7 @@
             <a:r>
               <a:rPr lang="en-US" sz="1050" dirty="0">
                 <a:solidFill>
-                  <a:srgbClr val="BFCFBB"/>
+                  <a:srgbClr val="8A7457"/>
                 </a:solidFill>
                 <a:latin typeface="Calibri" pitchFamily="34" charset="0"/>
                 <a:ea typeface="Calibri" pitchFamily="34" charset="-122"/>
@@ -5941,7 +5912,7 @@
             <a:r>
               <a:rPr lang="en-US" sz="1150" b="1" dirty="0">
                 <a:solidFill>
-                  <a:srgbClr val="F5F0E2"/>
+                  <a:srgbClr val="3A2F1F"/>
                 </a:solidFill>
                 <a:latin typeface="Calibri" pitchFamily="34" charset="0"/>
                 <a:ea typeface="Calibri" pitchFamily="34" charset="-122"/>
@@ -5980,7 +5951,7 @@
             <a:r>
               <a:rPr lang="en-US" sz="1050" dirty="0">
                 <a:solidFill>
-                  <a:srgbClr val="BFCFBB"/>
+                  <a:srgbClr val="8A7457"/>
                 </a:solidFill>
                 <a:latin typeface="Calibri" pitchFamily="34" charset="0"/>
                 <a:ea typeface="Calibri" pitchFamily="34" charset="-122"/>
@@ -6019,7 +5990,7 @@
             <a:r>
               <a:rPr lang="en-US" sz="1150" b="1" dirty="0">
                 <a:solidFill>
-                  <a:srgbClr val="F5F0E2"/>
+                  <a:srgbClr val="3A2F1F"/>
                 </a:solidFill>
                 <a:latin typeface="Calibri" pitchFamily="34" charset="0"/>
                 <a:ea typeface="Calibri" pitchFamily="34" charset="-122"/>
@@ -6058,7 +6029,7 @@
             <a:r>
               <a:rPr lang="en-US" sz="1050" dirty="0">
                 <a:solidFill>
-                  <a:srgbClr val="BFCFBB"/>
+                  <a:srgbClr val="8A7457"/>
                 </a:solidFill>
                 <a:latin typeface="Calibri" pitchFamily="34" charset="0"/>
                 <a:ea typeface="Calibri" pitchFamily="34" charset="-122"/>
@@ -6097,7 +6068,7 @@
             <a:r>
               <a:rPr lang="en-US" sz="1150" b="1" dirty="0">
                 <a:solidFill>
-                  <a:srgbClr val="F5F0E2"/>
+                  <a:srgbClr val="3A2F1F"/>
                 </a:solidFill>
                 <a:latin typeface="Calibri" pitchFamily="34" charset="0"/>
                 <a:ea typeface="Calibri" pitchFamily="34" charset="-122"/>
@@ -6136,7 +6107,7 @@
             <a:r>
               <a:rPr lang="en-US" sz="1050" dirty="0">
                 <a:solidFill>
-                  <a:srgbClr val="BFCFBB"/>
+                  <a:srgbClr val="8A7457"/>
                 </a:solidFill>
                 <a:latin typeface="Calibri" pitchFamily="34" charset="0"/>
                 <a:ea typeface="Calibri" pitchFamily="34" charset="-122"/>
@@ -6175,7 +6146,7 @@
             <a:r>
               <a:rPr lang="en-US" sz="1150" b="1" dirty="0">
                 <a:solidFill>
-                  <a:srgbClr val="F5F0E2"/>
+                  <a:srgbClr val="3A2F1F"/>
                 </a:solidFill>
                 <a:latin typeface="Calibri" pitchFamily="34" charset="0"/>
                 <a:ea typeface="Calibri" pitchFamily="34" charset="-122"/>
@@ -6214,7 +6185,7 @@
             <a:r>
               <a:rPr lang="en-US" sz="1050" dirty="0">
                 <a:solidFill>
-                  <a:srgbClr val="BFCFBB"/>
+                  <a:srgbClr val="8A7457"/>
                 </a:solidFill>
                 <a:latin typeface="Calibri" pitchFamily="34" charset="0"/>
                 <a:ea typeface="Calibri" pitchFamily="34" charset="-122"/>
@@ -6253,7 +6224,7 @@
             <a:r>
               <a:rPr lang="en-US" sz="1150" b="1" dirty="0">
                 <a:solidFill>
-                  <a:srgbClr val="F5F0E2"/>
+                  <a:srgbClr val="3A2F1F"/>
                 </a:solidFill>
                 <a:latin typeface="Calibri" pitchFamily="34" charset="0"/>
                 <a:ea typeface="Calibri" pitchFamily="34" charset="-122"/>
@@ -6292,7 +6263,7 @@
             <a:r>
               <a:rPr lang="en-US" sz="1050" dirty="0">
                 <a:solidFill>
-                  <a:srgbClr val="BFCFBB"/>
+                  <a:srgbClr val="8A7457"/>
                 </a:solidFill>
                 <a:latin typeface="Calibri" pitchFamily="34" charset="0"/>
                 <a:ea typeface="Calibri" pitchFamily="34" charset="-122"/>
@@ -6331,7 +6302,7 @@
             <a:r>
               <a:rPr lang="en-US" sz="1150" b="1" dirty="0">
                 <a:solidFill>
-                  <a:srgbClr val="F5F0E2"/>
+                  <a:srgbClr val="3A2F1F"/>
                 </a:solidFill>
                 <a:latin typeface="Calibri" pitchFamily="34" charset="0"/>
                 <a:ea typeface="Calibri" pitchFamily="34" charset="-122"/>
@@ -6370,7 +6341,7 @@
             <a:r>
               <a:rPr lang="en-US" sz="1050" dirty="0">
                 <a:solidFill>
-                  <a:srgbClr val="BFCFBB"/>
+                  <a:srgbClr val="8A7457"/>
                 </a:solidFill>
                 <a:latin typeface="Calibri" pitchFamily="34" charset="0"/>
                 <a:ea typeface="Calibri" pitchFamily="34" charset="-122"/>
@@ -6409,7 +6380,7 @@
             <a:r>
               <a:rPr lang="en-US" sz="1150" b="1" dirty="0">
                 <a:solidFill>
-                  <a:srgbClr val="F5F0E2"/>
+                  <a:srgbClr val="3A2F1F"/>
                 </a:solidFill>
                 <a:latin typeface="Calibri" pitchFamily="34" charset="0"/>
                 <a:ea typeface="Calibri" pitchFamily="34" charset="-122"/>
@@ -6460,7 +6431,7 @@
           </a:prstGeom>
           <a:ln w="15875">
             <a:solidFill>
-              <a:srgbClr val="A87C2A"/>
+              <a:srgbClr val="2E7D3C"/>
             </a:solidFill>
             <a:prstDash val="solid"/>
           </a:ln>
@@ -6490,13 +6461,13 @@
             </a:avLst>
           </a:prstGeom>
           <a:solidFill>
-            <a:srgbClr val="0A2214">
-              <a:alpha val="90000"/>
+            <a:srgbClr val="1F5C3A">
+              <a:alpha val="100000"/>
             </a:srgbClr>
           </a:solidFill>
           <a:ln w="15875">
             <a:solidFill>
-              <a:srgbClr val="A87C2A"/>
+              <a:srgbClr val="2E7D3C"/>
             </a:solidFill>
             <a:prstDash val="solid"/>
           </a:ln>
@@ -6543,7 +6514,7 @@
             <a:r>
               <a:rPr lang="en-US" sz="1900" b="1" dirty="0">
                 <a:solidFill>
-                  <a:srgbClr val="E0B252"/>
+                  <a:srgbClr val="EAF3EA"/>
                 </a:solidFill>
                 <a:latin typeface="Cambria" pitchFamily="34" charset="0"/>
                 <a:ea typeface="Cambria" pitchFamily="34" charset="-122"/>
@@ -6582,7 +6553,7 @@
             <a:r>
               <a:rPr lang="en-US" sz="1050" dirty="0">
                 <a:solidFill>
-                  <a:srgbClr val="F5F0E2"/>
+                  <a:srgbClr val="EAF3EA"/>
                 </a:solidFill>
                 <a:latin typeface="Calibri" pitchFamily="34" charset="0"/>
                 <a:ea typeface="Calibri" pitchFamily="34" charset="-122"/>
@@ -6611,13 +6582,13 @@
             </a:avLst>
           </a:prstGeom>
           <a:solidFill>
-            <a:srgbClr val="0A2214">
-              <a:alpha val="90000"/>
+            <a:srgbClr val="1F5C3A">
+              <a:alpha val="100000"/>
             </a:srgbClr>
           </a:solidFill>
           <a:ln w="15875">
             <a:solidFill>
-              <a:srgbClr val="A87C2A"/>
+              <a:srgbClr val="2E7D3C"/>
             </a:solidFill>
             <a:prstDash val="solid"/>
           </a:ln>
@@ -6664,7 +6635,7 @@
             <a:r>
               <a:rPr lang="en-US" sz="1900" b="1" dirty="0">
                 <a:solidFill>
-                  <a:srgbClr val="E0B252"/>
+                  <a:srgbClr val="EAF3EA"/>
                 </a:solidFill>
                 <a:latin typeface="Cambria" pitchFamily="34" charset="0"/>
                 <a:ea typeface="Cambria" pitchFamily="34" charset="-122"/>
@@ -6675,7 +6646,7 @@
             <a:r>
               <a:rPr lang="en-US" sz="1100" dirty="0">
                 <a:solidFill>
-                  <a:srgbClr val="E0B252"/>
+                  <a:srgbClr val="EAF3EA"/>
                 </a:solidFill>
                 <a:latin typeface="Cambria" pitchFamily="34" charset="0"/>
                 <a:ea typeface="Cambria" pitchFamily="34" charset="-122"/>
@@ -6714,7 +6685,7 @@
             <a:r>
               <a:rPr lang="en-US" sz="1050" dirty="0">
                 <a:solidFill>
-                  <a:srgbClr val="F5F0E2"/>
+                  <a:srgbClr val="EAF3EA"/>
                 </a:solidFill>
                 <a:latin typeface="Calibri" pitchFamily="34" charset="0"/>
                 <a:ea typeface="Calibri" pitchFamily="34" charset="-122"/>
@@ -6743,13 +6714,13 @@
             </a:avLst>
           </a:prstGeom>
           <a:solidFill>
-            <a:srgbClr val="0A2214">
-              <a:alpha val="90000"/>
+            <a:srgbClr val="1F5C3A">
+              <a:alpha val="100000"/>
             </a:srgbClr>
           </a:solidFill>
           <a:ln w="15875">
             <a:solidFill>
-              <a:srgbClr val="A87C2A"/>
+              <a:srgbClr val="2E7D3C"/>
             </a:solidFill>
             <a:prstDash val="solid"/>
           </a:ln>
@@ -6796,7 +6767,7 @@
             <a:r>
               <a:rPr lang="en-US" sz="1900" b="1" dirty="0">
                 <a:solidFill>
-                  <a:srgbClr val="E0B252"/>
+                  <a:srgbClr val="EAF3EA"/>
                 </a:solidFill>
                 <a:latin typeface="Cambria" pitchFamily="34" charset="0"/>
                 <a:ea typeface="Cambria" pitchFamily="34" charset="-122"/>
@@ -6807,7 +6778,7 @@
             <a:r>
               <a:rPr lang="en-US" sz="1100" dirty="0">
                 <a:solidFill>
-                  <a:srgbClr val="E0B252"/>
+                  <a:srgbClr val="EAF3EA"/>
                 </a:solidFill>
                 <a:latin typeface="Cambria" pitchFamily="34" charset="0"/>
                 <a:ea typeface="Cambria" pitchFamily="34" charset="-122"/>
@@ -6846,7 +6817,7 @@
             <a:r>
               <a:rPr lang="en-US" sz="1050" dirty="0">
                 <a:solidFill>
-                  <a:srgbClr val="F5F0E2"/>
+                  <a:srgbClr val="EAF3EA"/>
                 </a:solidFill>
                 <a:latin typeface="Calibri" pitchFamily="34" charset="0"/>
                 <a:ea typeface="Calibri" pitchFamily="34" charset="-122"/>
@@ -6885,7 +6856,7 @@
             <a:r>
               <a:rPr lang="en-US" sz="900" dirty="0">
                 <a:solidFill>
-                  <a:srgbClr val="C2D2BD"/>
+                  <a:srgbClr val="9C8B6E"/>
                 </a:solidFill>
                 <a:latin typeface="Calibri" pitchFamily="34" charset="0"/>
                 <a:ea typeface="Calibri" pitchFamily="34" charset="-122"/>
@@ -6963,7 +6934,7 @@
             <a:r>
               <a:rPr lang="en-US" sz="1100" b="1" kern="0" spc="260" dirty="0">
                 <a:solidFill>
-                  <a:srgbClr val="6FA84B"/>
+                  <a:srgbClr val="2E7D3C"/>
                 </a:solidFill>
                 <a:latin typeface="Calibri" pitchFamily="34" charset="0"/>
                 <a:ea typeface="Calibri" pitchFamily="34" charset="-122"/>
@@ -7002,7 +6973,7 @@
             <a:r>
               <a:rPr lang="en-US" sz="3100" b="1" dirty="0">
                 <a:solidFill>
-                  <a:srgbClr val="FFFFFF"/>
+                  <a:srgbClr val="241C10"/>
                 </a:solidFill>
                 <a:latin typeface="Cambria" pitchFamily="34" charset="0"/>
                 <a:ea typeface="Cambria" pitchFamily="34" charset="-122"/>
@@ -7041,7 +7012,7 @@
             <a:r>
               <a:rPr lang="en-US" sz="1250" i="1" dirty="0">
                 <a:solidFill>
-                  <a:srgbClr val="BFCFBB"/>
+                  <a:srgbClr val="8A7457"/>
                 </a:solidFill>
                 <a:latin typeface="Calibri" pitchFamily="34" charset="0"/>
                 <a:ea typeface="Calibri" pitchFamily="34" charset="-122"/>
@@ -7070,13 +7041,13 @@
             </a:avLst>
           </a:prstGeom>
           <a:solidFill>
-            <a:srgbClr val="0A2214">
+            <a:srgbClr val="FFFFFF">
               <a:alpha val="90000"/>
             </a:srgbClr>
           </a:solidFill>
           <a:ln w="15875">
             <a:solidFill>
-              <a:srgbClr val="A87C2A"/>
+              <a:srgbClr val="2E7D3C"/>
             </a:solidFill>
             <a:prstDash val="solid"/>
           </a:ln>
@@ -7135,7 +7106,7 @@
           </a:prstGeom>
           <a:ln w="12700">
             <a:solidFill>
-              <a:srgbClr val="A87C2A"/>
+              <a:srgbClr val="2E7D3C"/>
             </a:solidFill>
             <a:prstDash val="solid"/>
           </a:ln>
@@ -7169,7 +7140,7 @@
           </a:solidFill>
           <a:ln w="6350">
             <a:solidFill>
-              <a:srgbClr val="A87C2A"/>
+              <a:srgbClr val="2E7D3C"/>
             </a:solidFill>
             <a:prstDash val="solid"/>
           </a:ln>
@@ -7248,7 +7219,7 @@
             <a:r>
               <a:rPr lang="en-US" sz="1450" b="1" dirty="0">
                 <a:solidFill>
-                  <a:srgbClr val="FFFFFF"/>
+                  <a:srgbClr val="241C10"/>
                 </a:solidFill>
                 <a:latin typeface="Cambria" pitchFamily="34" charset="0"/>
                 <a:ea typeface="Cambria" pitchFamily="34" charset="-122"/>
@@ -7265,7 +7236,7 @@
             <a:r>
               <a:rPr lang="en-US" sz="1450" b="1" dirty="0">
                 <a:solidFill>
-                  <a:srgbClr val="FFFFFF"/>
+                  <a:srgbClr val="241C10"/>
                 </a:solidFill>
                 <a:latin typeface="Cambria" pitchFamily="34" charset="0"/>
                 <a:ea typeface="Cambria" pitchFamily="34" charset="-122"/>
@@ -7304,7 +7275,7 @@
             <a:r>
               <a:rPr lang="en-US" sz="1000" dirty="0">
                 <a:solidFill>
-                  <a:srgbClr val="BFCFBB"/>
+                  <a:srgbClr val="8A7457"/>
                 </a:solidFill>
                 <a:latin typeface="Calibri" pitchFamily="34" charset="0"/>
                 <a:ea typeface="Calibri" pitchFamily="34" charset="-122"/>
@@ -7333,13 +7304,13 @@
             </a:avLst>
           </a:prstGeom>
           <a:solidFill>
-            <a:srgbClr val="16391F">
+            <a:srgbClr val="EAF3EA">
               <a:alpha val="92000"/>
             </a:srgbClr>
           </a:solidFill>
           <a:ln w="9525">
             <a:solidFill>
-              <a:srgbClr val="A87C2A"/>
+              <a:srgbClr val="2E7D3C"/>
             </a:solidFill>
             <a:prstDash val="solid"/>
           </a:ln>
@@ -7379,7 +7350,7 @@
             <a:r>
               <a:rPr lang="en-US" sz="750" b="1" kern="0" spc="100" dirty="0">
                 <a:solidFill>
-                  <a:srgbClr val="E0B252"/>
+                  <a:srgbClr val="1F5C3A"/>
                 </a:solidFill>
                 <a:latin typeface="Calibri" pitchFamily="34" charset="0"/>
                 <a:ea typeface="Calibri" pitchFamily="34" charset="-122"/>
@@ -7418,7 +7389,7 @@
             <a:r>
               <a:rPr lang="en-US" sz="900" dirty="0">
                 <a:solidFill>
-                  <a:srgbClr val="BFCFBB"/>
+                  <a:srgbClr val="8A7457"/>
                 </a:solidFill>
                 <a:latin typeface="Calibri" pitchFamily="34" charset="0"/>
                 <a:ea typeface="Calibri" pitchFamily="34" charset="-122"/>
@@ -7457,7 +7428,7 @@
             <a:r>
               <a:rPr lang="en-US" sz="950" dirty="0">
                 <a:solidFill>
-                  <a:srgbClr val="F5F0E2"/>
+                  <a:srgbClr val="3A2F1F"/>
                 </a:solidFill>
                 <a:latin typeface="Calibri" pitchFamily="34" charset="0"/>
                 <a:ea typeface="Calibri" pitchFamily="34" charset="-122"/>
@@ -7496,7 +7467,7 @@
             <a:r>
               <a:rPr lang="en-US" sz="900" b="1" dirty="0">
                 <a:solidFill>
-                  <a:srgbClr val="E0B252"/>
+                  <a:srgbClr val="1F5C3A"/>
                 </a:solidFill>
                 <a:latin typeface="Calibri" pitchFamily="34" charset="0"/>
                 <a:ea typeface="Calibri" pitchFamily="34" charset="-122"/>
@@ -7535,7 +7506,7 @@
             <a:r>
               <a:rPr lang="en-US" sz="950" b="1" dirty="0">
                 <a:solidFill>
-                  <a:srgbClr val="E0B252"/>
+                  <a:srgbClr val="1F5C3A"/>
                 </a:solidFill>
                 <a:latin typeface="Calibri" pitchFamily="34" charset="0"/>
                 <a:ea typeface="Calibri" pitchFamily="34" charset="-122"/>
@@ -7574,7 +7545,7 @@
             <a:r>
               <a:rPr lang="en-US" sz="900" dirty="0">
                 <a:solidFill>
-                  <a:srgbClr val="BFCFBB"/>
+                  <a:srgbClr val="8A7457"/>
                 </a:solidFill>
                 <a:latin typeface="Calibri" pitchFamily="34" charset="0"/>
                 <a:ea typeface="Calibri" pitchFamily="34" charset="-122"/>
@@ -7613,7 +7584,7 @@
             <a:r>
               <a:rPr lang="en-US" sz="950" dirty="0">
                 <a:solidFill>
-                  <a:srgbClr val="F5F0E2"/>
+                  <a:srgbClr val="3A2F1F"/>
                 </a:solidFill>
                 <a:latin typeface="Calibri" pitchFamily="34" charset="0"/>
                 <a:ea typeface="Calibri" pitchFamily="34" charset="-122"/>
@@ -7652,7 +7623,7 @@
             <a:r>
               <a:rPr lang="en-US" sz="900" dirty="0">
                 <a:solidFill>
-                  <a:srgbClr val="BFCFBB"/>
+                  <a:srgbClr val="8A7457"/>
                 </a:solidFill>
                 <a:latin typeface="Calibri" pitchFamily="34" charset="0"/>
                 <a:ea typeface="Calibri" pitchFamily="34" charset="-122"/>
@@ -7691,7 +7662,7 @@
             <a:r>
               <a:rPr lang="en-US" sz="950" dirty="0">
                 <a:solidFill>
-                  <a:srgbClr val="F5F0E2"/>
+                  <a:srgbClr val="3A2F1F"/>
                 </a:solidFill>
                 <a:latin typeface="Calibri" pitchFamily="34" charset="0"/>
                 <a:ea typeface="Calibri" pitchFamily="34" charset="-122"/>
@@ -7720,13 +7691,13 @@
             </a:avLst>
           </a:prstGeom>
           <a:solidFill>
-            <a:srgbClr val="0A2214">
+            <a:srgbClr val="FFFFFF">
               <a:alpha val="90000"/>
             </a:srgbClr>
           </a:solidFill>
           <a:ln w="15875">
             <a:solidFill>
-              <a:srgbClr val="A87C2A"/>
+              <a:srgbClr val="2E7D3C"/>
             </a:solidFill>
             <a:prstDash val="solid"/>
           </a:ln>
@@ -7785,7 +7756,7 @@
           </a:prstGeom>
           <a:ln w="12700">
             <a:solidFill>
-              <a:srgbClr val="A87C2A"/>
+              <a:srgbClr val="2E7D3C"/>
             </a:solidFill>
             <a:prstDash val="solid"/>
           </a:ln>
@@ -7819,7 +7790,7 @@
           </a:solidFill>
           <a:ln w="6350">
             <a:solidFill>
-              <a:srgbClr val="A87C2A"/>
+              <a:srgbClr val="2E7D3C"/>
             </a:solidFill>
             <a:prstDash val="solid"/>
           </a:ln>
@@ -7898,7 +7869,7 @@
             <a:r>
               <a:rPr lang="en-US" sz="1450" b="1" dirty="0">
                 <a:solidFill>
-                  <a:srgbClr val="FFFFFF"/>
+                  <a:srgbClr val="241C10"/>
                 </a:solidFill>
                 <a:latin typeface="Cambria" pitchFamily="34" charset="0"/>
                 <a:ea typeface="Cambria" pitchFamily="34" charset="-122"/>
@@ -7937,7 +7908,7 @@
             <a:r>
               <a:rPr lang="en-US" sz="1000" dirty="0">
                 <a:solidFill>
-                  <a:srgbClr val="BFCFBB"/>
+                  <a:srgbClr val="8A7457"/>
                 </a:solidFill>
                 <a:latin typeface="Calibri" pitchFamily="34" charset="0"/>
                 <a:ea typeface="Calibri" pitchFamily="34" charset="-122"/>
@@ -7966,13 +7937,13 @@
             </a:avLst>
           </a:prstGeom>
           <a:solidFill>
-            <a:srgbClr val="16391F">
+            <a:srgbClr val="EAF3EA">
               <a:alpha val="92000"/>
             </a:srgbClr>
           </a:solidFill>
           <a:ln w="9525">
             <a:solidFill>
-              <a:srgbClr val="A87C2A"/>
+              <a:srgbClr val="2E7D3C"/>
             </a:solidFill>
             <a:prstDash val="solid"/>
           </a:ln>
@@ -8012,7 +7983,7 @@
             <a:r>
               <a:rPr lang="en-US" sz="750" b="1" kern="0" spc="100" dirty="0">
                 <a:solidFill>
-                  <a:srgbClr val="E0B252"/>
+                  <a:srgbClr val="1F5C3A"/>
                 </a:solidFill>
                 <a:latin typeface="Calibri" pitchFamily="34" charset="0"/>
                 <a:ea typeface="Calibri" pitchFamily="34" charset="-122"/>
@@ -8051,7 +8022,7 @@
             <a:r>
               <a:rPr lang="en-US" sz="900" dirty="0">
                 <a:solidFill>
-                  <a:srgbClr val="BFCFBB"/>
+                  <a:srgbClr val="8A7457"/>
                 </a:solidFill>
                 <a:latin typeface="Calibri" pitchFamily="34" charset="0"/>
                 <a:ea typeface="Calibri" pitchFamily="34" charset="-122"/>
@@ -8090,7 +8061,7 @@
             <a:r>
               <a:rPr lang="en-US" sz="950" dirty="0">
                 <a:solidFill>
-                  <a:srgbClr val="F5F0E2"/>
+                  <a:srgbClr val="3A2F1F"/>
                 </a:solidFill>
                 <a:latin typeface="Calibri" pitchFamily="34" charset="0"/>
                 <a:ea typeface="Calibri" pitchFamily="34" charset="-122"/>
@@ -8129,7 +8100,7 @@
             <a:r>
               <a:rPr lang="en-US" sz="900" b="1" dirty="0">
                 <a:solidFill>
-                  <a:srgbClr val="E0B252"/>
+                  <a:srgbClr val="1F5C3A"/>
                 </a:solidFill>
                 <a:latin typeface="Calibri" pitchFamily="34" charset="0"/>
                 <a:ea typeface="Calibri" pitchFamily="34" charset="-122"/>
@@ -8168,7 +8139,7 @@
             <a:r>
               <a:rPr lang="en-US" sz="950" b="1" dirty="0">
                 <a:solidFill>
-                  <a:srgbClr val="E0B252"/>
+                  <a:srgbClr val="1F5C3A"/>
                 </a:solidFill>
                 <a:latin typeface="Calibri" pitchFamily="34" charset="0"/>
                 <a:ea typeface="Calibri" pitchFamily="34" charset="-122"/>
@@ -8207,7 +8178,7 @@
             <a:r>
               <a:rPr lang="en-US" sz="900" dirty="0">
                 <a:solidFill>
-                  <a:srgbClr val="BFCFBB"/>
+                  <a:srgbClr val="8A7457"/>
                 </a:solidFill>
                 <a:latin typeface="Calibri" pitchFamily="34" charset="0"/>
                 <a:ea typeface="Calibri" pitchFamily="34" charset="-122"/>
@@ -8246,7 +8217,7 @@
             <a:r>
               <a:rPr lang="en-US" sz="950" dirty="0">
                 <a:solidFill>
-                  <a:srgbClr val="F5F0E2"/>
+                  <a:srgbClr val="3A2F1F"/>
                 </a:solidFill>
                 <a:latin typeface="Calibri" pitchFamily="34" charset="0"/>
                 <a:ea typeface="Calibri" pitchFamily="34" charset="-122"/>
@@ -8285,7 +8256,7 @@
             <a:r>
               <a:rPr lang="en-US" sz="900" dirty="0">
                 <a:solidFill>
-                  <a:srgbClr val="BFCFBB"/>
+                  <a:srgbClr val="8A7457"/>
                 </a:solidFill>
                 <a:latin typeface="Calibri" pitchFamily="34" charset="0"/>
                 <a:ea typeface="Calibri" pitchFamily="34" charset="-122"/>
@@ -8324,7 +8295,7 @@
             <a:r>
               <a:rPr lang="en-US" sz="950" dirty="0">
                 <a:solidFill>
-                  <a:srgbClr val="F5F0E2"/>
+                  <a:srgbClr val="3A2F1F"/>
                 </a:solidFill>
                 <a:latin typeface="Calibri" pitchFamily="34" charset="0"/>
                 <a:ea typeface="Calibri" pitchFamily="34" charset="-122"/>
@@ -8353,13 +8324,13 @@
             </a:avLst>
           </a:prstGeom>
           <a:solidFill>
-            <a:srgbClr val="0A2214">
+            <a:srgbClr val="FFFFFF">
               <a:alpha val="90000"/>
             </a:srgbClr>
           </a:solidFill>
           <a:ln w="15875">
             <a:solidFill>
-              <a:srgbClr val="A87C2A"/>
+              <a:srgbClr val="2E7D3C"/>
             </a:solidFill>
             <a:prstDash val="solid"/>
           </a:ln>
@@ -8418,7 +8389,7 @@
           </a:prstGeom>
           <a:ln w="12700">
             <a:solidFill>
-              <a:srgbClr val="A87C2A"/>
+              <a:srgbClr val="2E7D3C"/>
             </a:solidFill>
             <a:prstDash val="solid"/>
           </a:ln>
@@ -8452,7 +8423,7 @@
           </a:solidFill>
           <a:ln w="6350">
             <a:solidFill>
-              <a:srgbClr val="A87C2A"/>
+              <a:srgbClr val="2E7D3C"/>
             </a:solidFill>
             <a:prstDash val="solid"/>
           </a:ln>
@@ -8531,7 +8502,7 @@
             <a:r>
               <a:rPr lang="en-US" sz="1450" b="1" dirty="0">
                 <a:solidFill>
-                  <a:srgbClr val="FFFFFF"/>
+                  <a:srgbClr val="241C10"/>
                 </a:solidFill>
                 <a:latin typeface="Cambria" pitchFamily="34" charset="0"/>
                 <a:ea typeface="Cambria" pitchFamily="34" charset="-122"/>
@@ -8570,7 +8541,7 @@
             <a:r>
               <a:rPr lang="en-US" sz="1000" dirty="0">
                 <a:solidFill>
-                  <a:srgbClr val="BFCFBB"/>
+                  <a:srgbClr val="8A7457"/>
                 </a:solidFill>
                 <a:latin typeface="Calibri" pitchFamily="34" charset="0"/>
                 <a:ea typeface="Calibri" pitchFamily="34" charset="-122"/>
@@ -8599,13 +8570,13 @@
             </a:avLst>
           </a:prstGeom>
           <a:solidFill>
-            <a:srgbClr val="16391F">
+            <a:srgbClr val="EAF3EA">
               <a:alpha val="92000"/>
             </a:srgbClr>
           </a:solidFill>
           <a:ln w="9525">
             <a:solidFill>
-              <a:srgbClr val="A87C2A"/>
+              <a:srgbClr val="2E7D3C"/>
             </a:solidFill>
             <a:prstDash val="solid"/>
           </a:ln>
@@ -8645,7 +8616,7 @@
             <a:r>
               <a:rPr lang="en-US" sz="750" b="1" kern="0" spc="100" dirty="0">
                 <a:solidFill>
-                  <a:srgbClr val="E0B252"/>
+                  <a:srgbClr val="1F5C3A"/>
                 </a:solidFill>
                 <a:latin typeface="Calibri" pitchFamily="34" charset="0"/>
                 <a:ea typeface="Calibri" pitchFamily="34" charset="-122"/>
@@ -8684,7 +8655,7 @@
             <a:r>
               <a:rPr lang="en-US" sz="900" dirty="0">
                 <a:solidFill>
-                  <a:srgbClr val="BFCFBB"/>
+                  <a:srgbClr val="8A7457"/>
                 </a:solidFill>
                 <a:latin typeface="Calibri" pitchFamily="34" charset="0"/>
                 <a:ea typeface="Calibri" pitchFamily="34" charset="-122"/>
@@ -8723,7 +8694,7 @@
             <a:r>
               <a:rPr lang="en-US" sz="950" dirty="0">
                 <a:solidFill>
-                  <a:srgbClr val="F5F0E2"/>
+                  <a:srgbClr val="3A2F1F"/>
                 </a:solidFill>
                 <a:latin typeface="Calibri" pitchFamily="34" charset="0"/>
                 <a:ea typeface="Calibri" pitchFamily="34" charset="-122"/>
@@ -8762,7 +8733,7 @@
             <a:r>
               <a:rPr lang="en-US" sz="900" b="1" dirty="0">
                 <a:solidFill>
-                  <a:srgbClr val="E0B252"/>
+                  <a:srgbClr val="1F5C3A"/>
                 </a:solidFill>
                 <a:latin typeface="Calibri" pitchFamily="34" charset="0"/>
                 <a:ea typeface="Calibri" pitchFamily="34" charset="-122"/>
@@ -8801,7 +8772,7 @@
             <a:r>
               <a:rPr lang="en-US" sz="950" b="1" dirty="0">
                 <a:solidFill>
-                  <a:srgbClr val="E0B252"/>
+                  <a:srgbClr val="1F5C3A"/>
                 </a:solidFill>
                 <a:latin typeface="Calibri" pitchFamily="34" charset="0"/>
                 <a:ea typeface="Calibri" pitchFamily="34" charset="-122"/>
@@ -8840,7 +8811,7 @@
             <a:r>
               <a:rPr lang="en-US" sz="900" dirty="0">
                 <a:solidFill>
-                  <a:srgbClr val="BFCFBB"/>
+                  <a:srgbClr val="8A7457"/>
                 </a:solidFill>
                 <a:latin typeface="Calibri" pitchFamily="34" charset="0"/>
                 <a:ea typeface="Calibri" pitchFamily="34" charset="-122"/>
@@ -8879,7 +8850,7 @@
             <a:r>
               <a:rPr lang="en-US" sz="950" dirty="0">
                 <a:solidFill>
-                  <a:srgbClr val="F5F0E2"/>
+                  <a:srgbClr val="3A2F1F"/>
                 </a:solidFill>
                 <a:latin typeface="Calibri" pitchFamily="34" charset="0"/>
                 <a:ea typeface="Calibri" pitchFamily="34" charset="-122"/>
@@ -8918,7 +8889,7 @@
             <a:r>
               <a:rPr lang="en-US" sz="900" dirty="0">
                 <a:solidFill>
-                  <a:srgbClr val="BFCFBB"/>
+                  <a:srgbClr val="8A7457"/>
                 </a:solidFill>
                 <a:latin typeface="Calibri" pitchFamily="34" charset="0"/>
                 <a:ea typeface="Calibri" pitchFamily="34" charset="-122"/>
@@ -8957,7 +8928,7 @@
             <a:r>
               <a:rPr lang="en-US" sz="950" dirty="0">
                 <a:solidFill>
-                  <a:srgbClr val="F5F0E2"/>
+                  <a:srgbClr val="3A2F1F"/>
                 </a:solidFill>
                 <a:latin typeface="Calibri" pitchFamily="34" charset="0"/>
                 <a:ea typeface="Calibri" pitchFamily="34" charset="-122"/>
@@ -8986,13 +8957,13 @@
             </a:avLst>
           </a:prstGeom>
           <a:solidFill>
-            <a:srgbClr val="0A2214">
+            <a:srgbClr val="FFFFFF">
               <a:alpha val="90000"/>
             </a:srgbClr>
           </a:solidFill>
           <a:ln w="15875">
             <a:solidFill>
-              <a:srgbClr val="A87C2A"/>
+              <a:srgbClr val="2E7D3C"/>
             </a:solidFill>
             <a:prstDash val="solid"/>
           </a:ln>
@@ -9051,7 +9022,7 @@
           </a:prstGeom>
           <a:ln w="12700">
             <a:solidFill>
-              <a:srgbClr val="A87C2A"/>
+              <a:srgbClr val="2E7D3C"/>
             </a:solidFill>
             <a:prstDash val="solid"/>
           </a:ln>
@@ -9085,7 +9056,7 @@
           </a:solidFill>
           <a:ln w="6350">
             <a:solidFill>
-              <a:srgbClr val="A87C2A"/>
+              <a:srgbClr val="2E7D3C"/>
             </a:solidFill>
             <a:prstDash val="solid"/>
           </a:ln>
@@ -9164,7 +9135,7 @@
             <a:r>
               <a:rPr lang="en-US" sz="1450" b="1" dirty="0">
                 <a:solidFill>
-                  <a:srgbClr val="FFFFFF"/>
+                  <a:srgbClr val="241C10"/>
                 </a:solidFill>
                 <a:latin typeface="Cambria" pitchFamily="34" charset="0"/>
                 <a:ea typeface="Cambria" pitchFamily="34" charset="-122"/>
@@ -9203,7 +9174,7 @@
             <a:r>
               <a:rPr lang="en-US" sz="1000" dirty="0">
                 <a:solidFill>
-                  <a:srgbClr val="BFCFBB"/>
+                  <a:srgbClr val="8A7457"/>
                 </a:solidFill>
                 <a:latin typeface="Calibri" pitchFamily="34" charset="0"/>
                 <a:ea typeface="Calibri" pitchFamily="34" charset="-122"/>
@@ -9232,13 +9203,13 @@
             </a:avLst>
           </a:prstGeom>
           <a:solidFill>
-            <a:srgbClr val="16391F">
+            <a:srgbClr val="EAF3EA">
               <a:alpha val="92000"/>
             </a:srgbClr>
           </a:solidFill>
           <a:ln w="9525">
             <a:solidFill>
-              <a:srgbClr val="A87C2A"/>
+              <a:srgbClr val="2E7D3C"/>
             </a:solidFill>
             <a:prstDash val="solid"/>
           </a:ln>
@@ -9278,7 +9249,7 @@
             <a:r>
               <a:rPr lang="en-US" sz="750" b="1" kern="0" spc="100" dirty="0">
                 <a:solidFill>
-                  <a:srgbClr val="E0B252"/>
+                  <a:srgbClr val="1F5C3A"/>
                 </a:solidFill>
                 <a:latin typeface="Calibri" pitchFamily="34" charset="0"/>
                 <a:ea typeface="Calibri" pitchFamily="34" charset="-122"/>
@@ -9317,7 +9288,7 @@
             <a:r>
               <a:rPr lang="en-US" sz="900" dirty="0">
                 <a:solidFill>
-                  <a:srgbClr val="BFCFBB"/>
+                  <a:srgbClr val="8A7457"/>
                 </a:solidFill>
                 <a:latin typeface="Calibri" pitchFamily="34" charset="0"/>
                 <a:ea typeface="Calibri" pitchFamily="34" charset="-122"/>
@@ -9356,7 +9327,7 @@
             <a:r>
               <a:rPr lang="en-US" sz="950" dirty="0">
                 <a:solidFill>
-                  <a:srgbClr val="F5F0E2"/>
+                  <a:srgbClr val="3A2F1F"/>
                 </a:solidFill>
                 <a:latin typeface="Calibri" pitchFamily="34" charset="0"/>
                 <a:ea typeface="Calibri" pitchFamily="34" charset="-122"/>
@@ -9395,7 +9366,7 @@
             <a:r>
               <a:rPr lang="en-US" sz="900" b="1" dirty="0">
                 <a:solidFill>
-                  <a:srgbClr val="E0B252"/>
+                  <a:srgbClr val="1F5C3A"/>
                 </a:solidFill>
                 <a:latin typeface="Calibri" pitchFamily="34" charset="0"/>
                 <a:ea typeface="Calibri" pitchFamily="34" charset="-122"/>
@@ -9434,7 +9405,7 @@
             <a:r>
               <a:rPr lang="en-US" sz="950" b="1" dirty="0">
                 <a:solidFill>
-                  <a:srgbClr val="E0B252"/>
+                  <a:srgbClr val="1F5C3A"/>
                 </a:solidFill>
                 <a:latin typeface="Calibri" pitchFamily="34" charset="0"/>
                 <a:ea typeface="Calibri" pitchFamily="34" charset="-122"/>
@@ -9473,7 +9444,7 @@
             <a:r>
               <a:rPr lang="en-US" sz="900" dirty="0">
                 <a:solidFill>
-                  <a:srgbClr val="BFCFBB"/>
+                  <a:srgbClr val="8A7457"/>
                 </a:solidFill>
                 <a:latin typeface="Calibri" pitchFamily="34" charset="0"/>
                 <a:ea typeface="Calibri" pitchFamily="34" charset="-122"/>
@@ -9512,7 +9483,7 @@
             <a:r>
               <a:rPr lang="en-US" sz="950" dirty="0">
                 <a:solidFill>
-                  <a:srgbClr val="F5F0E2"/>
+                  <a:srgbClr val="3A2F1F"/>
                 </a:solidFill>
                 <a:latin typeface="Calibri" pitchFamily="34" charset="0"/>
                 <a:ea typeface="Calibri" pitchFamily="34" charset="-122"/>
@@ -9551,7 +9522,7 @@
             <a:r>
               <a:rPr lang="en-US" sz="900" dirty="0">
                 <a:solidFill>
-                  <a:srgbClr val="BFCFBB"/>
+                  <a:srgbClr val="8A7457"/>
                 </a:solidFill>
                 <a:latin typeface="Calibri" pitchFamily="34" charset="0"/>
                 <a:ea typeface="Calibri" pitchFamily="34" charset="-122"/>
@@ -9590,7 +9561,7 @@
             <a:r>
               <a:rPr lang="en-US" sz="950" dirty="0">
                 <a:solidFill>
-                  <a:srgbClr val="F5F0E2"/>
+                  <a:srgbClr val="3A2F1F"/>
                 </a:solidFill>
                 <a:latin typeface="Calibri" pitchFamily="34" charset="0"/>
                 <a:ea typeface="Calibri" pitchFamily="34" charset="-122"/>
@@ -9629,7 +9600,7 @@
             <a:r>
               <a:rPr lang="en-US" sz="900" dirty="0">
                 <a:solidFill>
-                  <a:srgbClr val="C2D2BD"/>
+                  <a:srgbClr val="9C8B6E"/>
                 </a:solidFill>
                 <a:latin typeface="Calibri" pitchFamily="34" charset="0"/>
                 <a:ea typeface="Calibri" pitchFamily="34" charset="-122"/>

--- a/RTE_Rice_Suppliers.pptx
+++ b/RTE_Rice_Suppliers.pptx
@@ -1353,7 +1353,7 @@
             <a:r>
               <a:rPr lang="en-US" sz="1100" b="1" kern="0" spc="260" dirty="0">
                 <a:solidFill>
-                  <a:srgbClr val="B8721E"/>
+                  <a:srgbClr val="F0AC58"/>
                 </a:solidFill>
                 <a:latin typeface="Calibri" pitchFamily="34" charset="0"/>
                 <a:ea typeface="Calibri" pitchFamily="34" charset="-122"/>
@@ -1392,7 +1392,7 @@
             <a:r>
               <a:rPr lang="en-US" sz="3100" b="1" dirty="0">
                 <a:solidFill>
-                  <a:srgbClr val="241C10"/>
+                  <a:srgbClr val="FFFFFF"/>
                 </a:solidFill>
                 <a:latin typeface="Cambria" pitchFamily="34" charset="0"/>
                 <a:ea typeface="Cambria" pitchFamily="34" charset="-122"/>
@@ -1431,7 +1431,7 @@
             <a:r>
               <a:rPr lang="en-US" sz="1250" i="1" dirty="0">
                 <a:solidFill>
-                  <a:srgbClr val="8A7457"/>
+                  <a:srgbClr val="D2E4CE"/>
                 </a:solidFill>
                 <a:latin typeface="Calibri" pitchFamily="34" charset="0"/>
                 <a:ea typeface="Calibri" pitchFamily="34" charset="-122"/>
@@ -1460,13 +1460,13 @@
             </a:avLst>
           </a:prstGeom>
           <a:solidFill>
-            <a:srgbClr val="FFFFFF">
+            <a:srgbClr val="12452B">
               <a:alpha val="90000"/>
             </a:srgbClr>
           </a:solidFill>
           <a:ln w="15875">
             <a:solidFill>
-              <a:srgbClr val="A87C2A"/>
+              <a:srgbClr val="C89C40"/>
             </a:solidFill>
             <a:prstDash val="solid"/>
           </a:ln>
@@ -1513,7 +1513,7 @@
             <a:r>
               <a:rPr lang="en-US" sz="1700" b="1" dirty="0">
                 <a:solidFill>
-                  <a:srgbClr val="A5730F"/>
+                  <a:srgbClr val="F5CE76"/>
                 </a:solidFill>
                 <a:latin typeface="Cambria" pitchFamily="34" charset="0"/>
                 <a:ea typeface="Cambria" pitchFamily="34" charset="-122"/>
@@ -1555,7 +1555,7 @@
             <a:r>
               <a:rPr lang="en-US" sz="1200" dirty="0">
                 <a:solidFill>
-                  <a:srgbClr val="3A2F1F"/>
+                  <a:srgbClr val="FCF9F0"/>
                 </a:solidFill>
                 <a:latin typeface="Calibri" pitchFamily="34" charset="0"/>
                 <a:ea typeface="Calibri" pitchFamily="34" charset="-122"/>
@@ -1594,7 +1594,7 @@
             <a:r>
               <a:rPr lang="en-US" sz="1700" b="1" dirty="0">
                 <a:solidFill>
-                  <a:srgbClr val="A5730F"/>
+                  <a:srgbClr val="F5CE76"/>
                 </a:solidFill>
                 <a:latin typeface="Cambria" pitchFamily="34" charset="0"/>
                 <a:ea typeface="Cambria" pitchFamily="34" charset="-122"/>
@@ -1633,7 +1633,7 @@
             <a:r>
               <a:rPr lang="en-US" sz="1050" dirty="0">
                 <a:solidFill>
-                  <a:srgbClr val="8A7457"/>
+                  <a:srgbClr val="D2E4CE"/>
                 </a:solidFill>
                 <a:latin typeface="Calibri" pitchFamily="34" charset="0"/>
                 <a:ea typeface="Calibri" pitchFamily="34" charset="-122"/>
@@ -1672,7 +1672,7 @@
             <a:r>
               <a:rPr lang="en-US" sz="1150" b="1" dirty="0">
                 <a:solidFill>
-                  <a:srgbClr val="3A2F1F"/>
+                  <a:srgbClr val="FCF9F0"/>
                 </a:solidFill>
                 <a:latin typeface="Calibri" pitchFamily="34" charset="0"/>
                 <a:ea typeface="Calibri" pitchFamily="34" charset="-122"/>
@@ -1711,7 +1711,7 @@
             <a:r>
               <a:rPr lang="en-US" sz="1050" dirty="0">
                 <a:solidFill>
-                  <a:srgbClr val="8A7457"/>
+                  <a:srgbClr val="D2E4CE"/>
                 </a:solidFill>
                 <a:latin typeface="Calibri" pitchFamily="34" charset="0"/>
                 <a:ea typeface="Calibri" pitchFamily="34" charset="-122"/>
@@ -1750,7 +1750,7 @@
             <a:r>
               <a:rPr lang="en-US" sz="1150" b="1" dirty="0">
                 <a:solidFill>
-                  <a:srgbClr val="3A2F1F"/>
+                  <a:srgbClr val="FCF9F0"/>
                 </a:solidFill>
                 <a:latin typeface="Calibri" pitchFamily="34" charset="0"/>
                 <a:ea typeface="Calibri" pitchFamily="34" charset="-122"/>
@@ -1789,7 +1789,7 @@
             <a:r>
               <a:rPr lang="en-US" sz="1050" dirty="0">
                 <a:solidFill>
-                  <a:srgbClr val="8A7457"/>
+                  <a:srgbClr val="D2E4CE"/>
                 </a:solidFill>
                 <a:latin typeface="Calibri" pitchFamily="34" charset="0"/>
                 <a:ea typeface="Calibri" pitchFamily="34" charset="-122"/>
@@ -1828,7 +1828,7 @@
             <a:r>
               <a:rPr lang="en-US" sz="1150" b="1" dirty="0">
                 <a:solidFill>
-                  <a:srgbClr val="3A2F1F"/>
+                  <a:srgbClr val="FCF9F0"/>
                 </a:solidFill>
                 <a:latin typeface="Calibri" pitchFamily="34" charset="0"/>
                 <a:ea typeface="Calibri" pitchFamily="34" charset="-122"/>
@@ -1867,7 +1867,7 @@
             <a:r>
               <a:rPr lang="en-US" sz="1050" dirty="0">
                 <a:solidFill>
-                  <a:srgbClr val="8A7457"/>
+                  <a:srgbClr val="D2E4CE"/>
                 </a:solidFill>
                 <a:latin typeface="Calibri" pitchFamily="34" charset="0"/>
                 <a:ea typeface="Calibri" pitchFamily="34" charset="-122"/>
@@ -1906,7 +1906,7 @@
             <a:r>
               <a:rPr lang="en-US" sz="1150" b="1" dirty="0">
                 <a:solidFill>
-                  <a:srgbClr val="3A2F1F"/>
+                  <a:srgbClr val="FCF9F0"/>
                 </a:solidFill>
                 <a:latin typeface="Calibri" pitchFamily="34" charset="0"/>
                 <a:ea typeface="Calibri" pitchFamily="34" charset="-122"/>
@@ -1945,7 +1945,7 @@
             <a:r>
               <a:rPr lang="en-US" sz="1050" dirty="0">
                 <a:solidFill>
-                  <a:srgbClr val="8A7457"/>
+                  <a:srgbClr val="D2E4CE"/>
                 </a:solidFill>
                 <a:latin typeface="Calibri" pitchFamily="34" charset="0"/>
                 <a:ea typeface="Calibri" pitchFamily="34" charset="-122"/>
@@ -1984,7 +1984,7 @@
             <a:r>
               <a:rPr lang="en-US" sz="1150" b="1" dirty="0">
                 <a:solidFill>
-                  <a:srgbClr val="3A2F1F"/>
+                  <a:srgbClr val="FCF9F0"/>
                 </a:solidFill>
                 <a:latin typeface="Calibri" pitchFamily="34" charset="0"/>
                 <a:ea typeface="Calibri" pitchFamily="34" charset="-122"/>
@@ -2023,7 +2023,7 @@
             <a:r>
               <a:rPr lang="en-US" sz="1050" dirty="0">
                 <a:solidFill>
-                  <a:srgbClr val="8A7457"/>
+                  <a:srgbClr val="D2E4CE"/>
                 </a:solidFill>
                 <a:latin typeface="Calibri" pitchFamily="34" charset="0"/>
                 <a:ea typeface="Calibri" pitchFamily="34" charset="-122"/>
@@ -2062,7 +2062,7 @@
             <a:r>
               <a:rPr lang="en-US" sz="1150" b="1" dirty="0">
                 <a:solidFill>
-                  <a:srgbClr val="3A2F1F"/>
+                  <a:srgbClr val="FCF9F0"/>
                 </a:solidFill>
                 <a:latin typeface="Calibri" pitchFamily="34" charset="0"/>
                 <a:ea typeface="Calibri" pitchFamily="34" charset="-122"/>
@@ -2101,7 +2101,7 @@
             <a:r>
               <a:rPr lang="en-US" sz="1050" dirty="0">
                 <a:solidFill>
-                  <a:srgbClr val="8A7457"/>
+                  <a:srgbClr val="D2E4CE"/>
                 </a:solidFill>
                 <a:latin typeface="Calibri" pitchFamily="34" charset="0"/>
                 <a:ea typeface="Calibri" pitchFamily="34" charset="-122"/>
@@ -2140,7 +2140,7 @@
             <a:r>
               <a:rPr lang="en-US" sz="1150" b="1" dirty="0">
                 <a:solidFill>
-                  <a:srgbClr val="3A2F1F"/>
+                  <a:srgbClr val="FCF9F0"/>
                 </a:solidFill>
                 <a:latin typeface="Calibri" pitchFamily="34" charset="0"/>
                 <a:ea typeface="Calibri" pitchFamily="34" charset="-122"/>
@@ -2179,7 +2179,7 @@
             <a:r>
               <a:rPr lang="en-US" sz="1050" dirty="0">
                 <a:solidFill>
-                  <a:srgbClr val="8A7457"/>
+                  <a:srgbClr val="D2E4CE"/>
                 </a:solidFill>
                 <a:latin typeface="Calibri" pitchFamily="34" charset="0"/>
                 <a:ea typeface="Calibri" pitchFamily="34" charset="-122"/>
@@ -2218,7 +2218,7 @@
             <a:r>
               <a:rPr lang="en-US" sz="1150" b="1" dirty="0">
                 <a:solidFill>
-                  <a:srgbClr val="3A2F1F"/>
+                  <a:srgbClr val="FCF9F0"/>
                 </a:solidFill>
                 <a:latin typeface="Calibri" pitchFamily="34" charset="0"/>
                 <a:ea typeface="Calibri" pitchFamily="34" charset="-122"/>
@@ -2270,7 +2270,7 @@
           </a:prstGeom>
           <a:ln w="15875">
             <a:solidFill>
-              <a:srgbClr val="A87C2A"/>
+              <a:srgbClr val="C89C40"/>
             </a:solidFill>
             <a:prstDash val="solid"/>
           </a:ln>
@@ -2300,13 +2300,13 @@
             </a:avLst>
           </a:prstGeom>
           <a:solidFill>
-            <a:srgbClr val="9C5A16">
-              <a:alpha val="100000"/>
+            <a:srgbClr val="12452B">
+              <a:alpha val="90000"/>
             </a:srgbClr>
           </a:solidFill>
           <a:ln w="15875">
             <a:solidFill>
-              <a:srgbClr val="A87C2A"/>
+              <a:srgbClr val="C89C40"/>
             </a:solidFill>
             <a:prstDash val="solid"/>
           </a:ln>
@@ -2353,7 +2353,7 @@
             <a:r>
               <a:rPr lang="en-US" sz="1900" b="1" dirty="0">
                 <a:solidFill>
-                  <a:srgbClr val="FBF1DC"/>
+                  <a:srgbClr val="F5CE76"/>
                 </a:solidFill>
                 <a:latin typeface="Cambria" pitchFamily="34" charset="0"/>
                 <a:ea typeface="Cambria" pitchFamily="34" charset="-122"/>
@@ -2364,7 +2364,7 @@
             <a:r>
               <a:rPr lang="en-US" sz="1100" dirty="0">
                 <a:solidFill>
-                  <a:srgbClr val="FBF1DC"/>
+                  <a:srgbClr val="F5CE76"/>
                 </a:solidFill>
                 <a:latin typeface="Cambria" pitchFamily="34" charset="0"/>
                 <a:ea typeface="Cambria" pitchFamily="34" charset="-122"/>
@@ -2403,7 +2403,7 @@
             <a:r>
               <a:rPr lang="en-US" sz="1050" dirty="0">
                 <a:solidFill>
-                  <a:srgbClr val="FBF1DC"/>
+                  <a:srgbClr val="FCF9F0"/>
                 </a:solidFill>
                 <a:latin typeface="Calibri" pitchFamily="34" charset="0"/>
                 <a:ea typeface="Calibri" pitchFamily="34" charset="-122"/>
@@ -2432,13 +2432,13 @@
             </a:avLst>
           </a:prstGeom>
           <a:solidFill>
-            <a:srgbClr val="9C5A16">
-              <a:alpha val="100000"/>
+            <a:srgbClr val="12452B">
+              <a:alpha val="90000"/>
             </a:srgbClr>
           </a:solidFill>
           <a:ln w="15875">
             <a:solidFill>
-              <a:srgbClr val="A87C2A"/>
+              <a:srgbClr val="C89C40"/>
             </a:solidFill>
             <a:prstDash val="solid"/>
           </a:ln>
@@ -2485,7 +2485,7 @@
             <a:r>
               <a:rPr lang="en-US" sz="1900" b="1" dirty="0">
                 <a:solidFill>
-                  <a:srgbClr val="FBF1DC"/>
+                  <a:srgbClr val="F5CE76"/>
                 </a:solidFill>
                 <a:latin typeface="Cambria" pitchFamily="34" charset="0"/>
                 <a:ea typeface="Cambria" pitchFamily="34" charset="-122"/>
@@ -2496,7 +2496,7 @@
             <a:r>
               <a:rPr lang="en-US" sz="1100" dirty="0">
                 <a:solidFill>
-                  <a:srgbClr val="FBF1DC"/>
+                  <a:srgbClr val="F5CE76"/>
                 </a:solidFill>
                 <a:latin typeface="Cambria" pitchFamily="34" charset="0"/>
                 <a:ea typeface="Cambria" pitchFamily="34" charset="-122"/>
@@ -2535,7 +2535,7 @@
             <a:r>
               <a:rPr lang="en-US" sz="1050" dirty="0">
                 <a:solidFill>
-                  <a:srgbClr val="FBF1DC"/>
+                  <a:srgbClr val="FCF9F0"/>
                 </a:solidFill>
                 <a:latin typeface="Calibri" pitchFamily="34" charset="0"/>
                 <a:ea typeface="Calibri" pitchFamily="34" charset="-122"/>
@@ -2564,13 +2564,13 @@
             </a:avLst>
           </a:prstGeom>
           <a:solidFill>
-            <a:srgbClr val="9C5A16">
-              <a:alpha val="100000"/>
+            <a:srgbClr val="12452B">
+              <a:alpha val="90000"/>
             </a:srgbClr>
           </a:solidFill>
           <a:ln w="15875">
             <a:solidFill>
-              <a:srgbClr val="A87C2A"/>
+              <a:srgbClr val="C89C40"/>
             </a:solidFill>
             <a:prstDash val="solid"/>
           </a:ln>
@@ -2617,7 +2617,7 @@
             <a:r>
               <a:rPr lang="en-US" sz="1900" b="1" dirty="0">
                 <a:solidFill>
-                  <a:srgbClr val="FBF1DC"/>
+                  <a:srgbClr val="F5CE76"/>
                 </a:solidFill>
                 <a:latin typeface="Cambria" pitchFamily="34" charset="0"/>
                 <a:ea typeface="Cambria" pitchFamily="34" charset="-122"/>
@@ -2628,7 +2628,7 @@
             <a:r>
               <a:rPr lang="en-US" sz="1100" dirty="0">
                 <a:solidFill>
-                  <a:srgbClr val="FBF1DC"/>
+                  <a:srgbClr val="F5CE76"/>
                 </a:solidFill>
                 <a:latin typeface="Cambria" pitchFamily="34" charset="0"/>
                 <a:ea typeface="Cambria" pitchFamily="34" charset="-122"/>
@@ -2667,7 +2667,7 @@
             <a:r>
               <a:rPr lang="en-US" sz="1050" dirty="0">
                 <a:solidFill>
-                  <a:srgbClr val="FBF1DC"/>
+                  <a:srgbClr val="FCF9F0"/>
                 </a:solidFill>
                 <a:latin typeface="Calibri" pitchFamily="34" charset="0"/>
                 <a:ea typeface="Calibri" pitchFamily="34" charset="-122"/>
@@ -2706,7 +2706,7 @@
             <a:r>
               <a:rPr lang="en-US" sz="900" dirty="0">
                 <a:solidFill>
-                  <a:srgbClr val="9C8B6E"/>
+                  <a:srgbClr val="C3D7BF"/>
                 </a:solidFill>
                 <a:latin typeface="Calibri" pitchFamily="34" charset="0"/>
                 <a:ea typeface="Calibri" pitchFamily="34" charset="-122"/>
@@ -2784,7 +2784,7 @@
             <a:r>
               <a:rPr lang="en-US" sz="1100" b="1" kern="0" spc="260" dirty="0">
                 <a:solidFill>
-                  <a:srgbClr val="B8721E"/>
+                  <a:srgbClr val="F0AC58"/>
                 </a:solidFill>
                 <a:latin typeface="Calibri" pitchFamily="34" charset="0"/>
                 <a:ea typeface="Calibri" pitchFamily="34" charset="-122"/>
@@ -2823,7 +2823,7 @@
             <a:r>
               <a:rPr lang="en-US" sz="3100" b="1" dirty="0">
                 <a:solidFill>
-                  <a:srgbClr val="241C10"/>
+                  <a:srgbClr val="FFFFFF"/>
                 </a:solidFill>
                 <a:latin typeface="Cambria" pitchFamily="34" charset="0"/>
                 <a:ea typeface="Cambria" pitchFamily="34" charset="-122"/>
@@ -2862,7 +2862,7 @@
             <a:r>
               <a:rPr lang="en-US" sz="1250" i="1" dirty="0">
                 <a:solidFill>
-                  <a:srgbClr val="8A7457"/>
+                  <a:srgbClr val="D2E4CE"/>
                 </a:solidFill>
                 <a:latin typeface="Calibri" pitchFamily="34" charset="0"/>
                 <a:ea typeface="Calibri" pitchFamily="34" charset="-122"/>
@@ -2891,13 +2891,13 @@
             </a:avLst>
           </a:prstGeom>
           <a:solidFill>
-            <a:srgbClr val="FFFFFF">
+            <a:srgbClr val="12452B">
               <a:alpha val="90000"/>
             </a:srgbClr>
           </a:solidFill>
           <a:ln w="15875">
             <a:solidFill>
-              <a:srgbClr val="A87C2A"/>
+              <a:srgbClr val="C89C40"/>
             </a:solidFill>
             <a:prstDash val="solid"/>
           </a:ln>
@@ -2957,7 +2957,7 @@
           </a:prstGeom>
           <a:ln w="12700">
             <a:solidFill>
-              <a:srgbClr val="A87C2A"/>
+              <a:srgbClr val="C89C40"/>
             </a:solidFill>
             <a:prstDash val="solid"/>
           </a:ln>
@@ -2987,11 +2987,11 @@
             </a:avLst>
           </a:prstGeom>
           <a:solidFill>
-            <a:srgbClr val="8A5A20"/>
+            <a:srgbClr val="B0762A"/>
           </a:solidFill>
           <a:ln w="6350">
             <a:solidFill>
-              <a:srgbClr val="A87C2A"/>
+              <a:srgbClr val="C89C40"/>
             </a:solidFill>
             <a:prstDash val="solid"/>
           </a:ln>
@@ -3070,7 +3070,7 @@
             <a:r>
               <a:rPr lang="en-US" sz="1450" b="1" dirty="0">
                 <a:solidFill>
-                  <a:srgbClr val="241C10"/>
+                  <a:srgbClr val="FFFFFF"/>
                 </a:solidFill>
                 <a:latin typeface="Cambria" pitchFamily="34" charset="0"/>
                 <a:ea typeface="Cambria" pitchFamily="34" charset="-122"/>
@@ -3109,7 +3109,7 @@
             <a:r>
               <a:rPr lang="en-US" sz="1000" dirty="0">
                 <a:solidFill>
-                  <a:srgbClr val="8A7457"/>
+                  <a:srgbClr val="D2E4CE"/>
                 </a:solidFill>
                 <a:latin typeface="Calibri" pitchFamily="34" charset="0"/>
                 <a:ea typeface="Calibri" pitchFamily="34" charset="-122"/>
@@ -3138,13 +3138,13 @@
             </a:avLst>
           </a:prstGeom>
           <a:solidFill>
-            <a:srgbClr val="FBF1DC">
+            <a:srgbClr val="1A5433">
               <a:alpha val="92000"/>
             </a:srgbClr>
           </a:solidFill>
           <a:ln w="9525">
             <a:solidFill>
-              <a:srgbClr val="A87C2A"/>
+              <a:srgbClr val="C89C40"/>
             </a:solidFill>
             <a:prstDash val="solid"/>
           </a:ln>
@@ -3184,7 +3184,7 @@
             <a:r>
               <a:rPr lang="en-US" sz="750" b="1" kern="0" spc="100" dirty="0">
                 <a:solidFill>
-                  <a:srgbClr val="A5730F"/>
+                  <a:srgbClr val="F5CE76"/>
                 </a:solidFill>
                 <a:latin typeface="Calibri" pitchFamily="34" charset="0"/>
                 <a:ea typeface="Calibri" pitchFamily="34" charset="-122"/>
@@ -3223,7 +3223,7 @@
             <a:r>
               <a:rPr lang="en-US" sz="900" dirty="0">
                 <a:solidFill>
-                  <a:srgbClr val="8A7457"/>
+                  <a:srgbClr val="D2E4CE"/>
                 </a:solidFill>
                 <a:latin typeface="Calibri" pitchFamily="34" charset="0"/>
                 <a:ea typeface="Calibri" pitchFamily="34" charset="-122"/>
@@ -3262,7 +3262,7 @@
             <a:r>
               <a:rPr lang="en-US" sz="950" dirty="0">
                 <a:solidFill>
-                  <a:srgbClr val="3A2F1F"/>
+                  <a:srgbClr val="FCF9F0"/>
                 </a:solidFill>
                 <a:latin typeface="Calibri" pitchFamily="34" charset="0"/>
                 <a:ea typeface="Calibri" pitchFamily="34" charset="-122"/>
@@ -3301,7 +3301,7 @@
             <a:r>
               <a:rPr lang="en-US" sz="900" b="1" dirty="0">
                 <a:solidFill>
-                  <a:srgbClr val="A5730F"/>
+                  <a:srgbClr val="F5CE76"/>
                 </a:solidFill>
                 <a:latin typeface="Calibri" pitchFamily="34" charset="0"/>
                 <a:ea typeface="Calibri" pitchFamily="34" charset="-122"/>
@@ -3340,7 +3340,7 @@
             <a:r>
               <a:rPr lang="en-US" sz="950" b="1" dirty="0">
                 <a:solidFill>
-                  <a:srgbClr val="A5730F"/>
+                  <a:srgbClr val="F5CE76"/>
                 </a:solidFill>
                 <a:latin typeface="Calibri" pitchFamily="34" charset="0"/>
                 <a:ea typeface="Calibri" pitchFamily="34" charset="-122"/>
@@ -3379,7 +3379,7 @@
             <a:r>
               <a:rPr lang="en-US" sz="900" dirty="0">
                 <a:solidFill>
-                  <a:srgbClr val="8A7457"/>
+                  <a:srgbClr val="D2E4CE"/>
                 </a:solidFill>
                 <a:latin typeface="Calibri" pitchFamily="34" charset="0"/>
                 <a:ea typeface="Calibri" pitchFamily="34" charset="-122"/>
@@ -3418,7 +3418,7 @@
             <a:r>
               <a:rPr lang="en-US" sz="950" dirty="0">
                 <a:solidFill>
-                  <a:srgbClr val="3A2F1F"/>
+                  <a:srgbClr val="FCF9F0"/>
                 </a:solidFill>
                 <a:latin typeface="Calibri" pitchFamily="34" charset="0"/>
                 <a:ea typeface="Calibri" pitchFamily="34" charset="-122"/>
@@ -3457,7 +3457,7 @@
             <a:r>
               <a:rPr lang="en-US" sz="900" dirty="0">
                 <a:solidFill>
-                  <a:srgbClr val="8A7457"/>
+                  <a:srgbClr val="D2E4CE"/>
                 </a:solidFill>
                 <a:latin typeface="Calibri" pitchFamily="34" charset="0"/>
                 <a:ea typeface="Calibri" pitchFamily="34" charset="-122"/>
@@ -3496,7 +3496,7 @@
             <a:r>
               <a:rPr lang="en-US" sz="950" dirty="0">
                 <a:solidFill>
-                  <a:srgbClr val="3A2F1F"/>
+                  <a:srgbClr val="FCF9F0"/>
                 </a:solidFill>
                 <a:latin typeface="Calibri" pitchFamily="34" charset="0"/>
                 <a:ea typeface="Calibri" pitchFamily="34" charset="-122"/>
@@ -3525,13 +3525,13 @@
             </a:avLst>
           </a:prstGeom>
           <a:solidFill>
-            <a:srgbClr val="FFFFFF">
+            <a:srgbClr val="12452B">
               <a:alpha val="90000"/>
             </a:srgbClr>
           </a:solidFill>
           <a:ln w="15875">
             <a:solidFill>
-              <a:srgbClr val="A87C2A"/>
+              <a:srgbClr val="C89C40"/>
             </a:solidFill>
             <a:prstDash val="solid"/>
           </a:ln>
@@ -3591,7 +3591,7 @@
           </a:prstGeom>
           <a:ln w="12700">
             <a:solidFill>
-              <a:srgbClr val="A87C2A"/>
+              <a:srgbClr val="C89C40"/>
             </a:solidFill>
             <a:prstDash val="solid"/>
           </a:ln>
@@ -3621,11 +3621,11 @@
             </a:avLst>
           </a:prstGeom>
           <a:solidFill>
-            <a:srgbClr val="8A5A20"/>
+            <a:srgbClr val="B0762A"/>
           </a:solidFill>
           <a:ln w="6350">
             <a:solidFill>
-              <a:srgbClr val="A87C2A"/>
+              <a:srgbClr val="C89C40"/>
             </a:solidFill>
             <a:prstDash val="solid"/>
           </a:ln>
@@ -3704,7 +3704,7 @@
             <a:r>
               <a:rPr lang="en-US" sz="1450" b="1" dirty="0">
                 <a:solidFill>
-                  <a:srgbClr val="241C10"/>
+                  <a:srgbClr val="FFFFFF"/>
                 </a:solidFill>
                 <a:latin typeface="Cambria" pitchFamily="34" charset="0"/>
                 <a:ea typeface="Cambria" pitchFamily="34" charset="-122"/>
@@ -3743,7 +3743,7 @@
             <a:r>
               <a:rPr lang="en-US" sz="1000" dirty="0">
                 <a:solidFill>
-                  <a:srgbClr val="8A7457"/>
+                  <a:srgbClr val="D2E4CE"/>
                 </a:solidFill>
                 <a:latin typeface="Calibri" pitchFamily="34" charset="0"/>
                 <a:ea typeface="Calibri" pitchFamily="34" charset="-122"/>
@@ -3772,13 +3772,13 @@
             </a:avLst>
           </a:prstGeom>
           <a:solidFill>
-            <a:srgbClr val="FBF1DC">
+            <a:srgbClr val="1A5433">
               <a:alpha val="92000"/>
             </a:srgbClr>
           </a:solidFill>
           <a:ln w="9525">
             <a:solidFill>
-              <a:srgbClr val="A87C2A"/>
+              <a:srgbClr val="C89C40"/>
             </a:solidFill>
             <a:prstDash val="solid"/>
           </a:ln>
@@ -3818,7 +3818,7 @@
             <a:r>
               <a:rPr lang="en-US" sz="750" b="1" kern="0" spc="100" dirty="0">
                 <a:solidFill>
-                  <a:srgbClr val="A5730F"/>
+                  <a:srgbClr val="F5CE76"/>
                 </a:solidFill>
                 <a:latin typeface="Calibri" pitchFamily="34" charset="0"/>
                 <a:ea typeface="Calibri" pitchFamily="34" charset="-122"/>
@@ -3857,7 +3857,7 @@
             <a:r>
               <a:rPr lang="en-US" sz="900" dirty="0">
                 <a:solidFill>
-                  <a:srgbClr val="8A7457"/>
+                  <a:srgbClr val="D2E4CE"/>
                 </a:solidFill>
                 <a:latin typeface="Calibri" pitchFamily="34" charset="0"/>
                 <a:ea typeface="Calibri" pitchFamily="34" charset="-122"/>
@@ -3896,7 +3896,7 @@
             <a:r>
               <a:rPr lang="en-US" sz="950" dirty="0">
                 <a:solidFill>
-                  <a:srgbClr val="3A2F1F"/>
+                  <a:srgbClr val="FCF9F0"/>
                 </a:solidFill>
                 <a:latin typeface="Calibri" pitchFamily="34" charset="0"/>
                 <a:ea typeface="Calibri" pitchFamily="34" charset="-122"/>
@@ -3935,7 +3935,7 @@
             <a:r>
               <a:rPr lang="en-US" sz="900" b="1" dirty="0">
                 <a:solidFill>
-                  <a:srgbClr val="A5730F"/>
+                  <a:srgbClr val="F5CE76"/>
                 </a:solidFill>
                 <a:latin typeface="Calibri" pitchFamily="34" charset="0"/>
                 <a:ea typeface="Calibri" pitchFamily="34" charset="-122"/>
@@ -3974,7 +3974,7 @@
             <a:r>
               <a:rPr lang="en-US" sz="950" b="1" dirty="0">
                 <a:solidFill>
-                  <a:srgbClr val="A5730F"/>
+                  <a:srgbClr val="F5CE76"/>
                 </a:solidFill>
                 <a:latin typeface="Calibri" pitchFamily="34" charset="0"/>
                 <a:ea typeface="Calibri" pitchFamily="34" charset="-122"/>
@@ -4013,7 +4013,7 @@
             <a:r>
               <a:rPr lang="en-US" sz="900" dirty="0">
                 <a:solidFill>
-                  <a:srgbClr val="8A7457"/>
+                  <a:srgbClr val="D2E4CE"/>
                 </a:solidFill>
                 <a:latin typeface="Calibri" pitchFamily="34" charset="0"/>
                 <a:ea typeface="Calibri" pitchFamily="34" charset="-122"/>
@@ -4052,7 +4052,7 @@
             <a:r>
               <a:rPr lang="en-US" sz="950" dirty="0">
                 <a:solidFill>
-                  <a:srgbClr val="3A2F1F"/>
+                  <a:srgbClr val="FCF9F0"/>
                 </a:solidFill>
                 <a:latin typeface="Calibri" pitchFamily="34" charset="0"/>
                 <a:ea typeface="Calibri" pitchFamily="34" charset="-122"/>
@@ -4091,7 +4091,7 @@
             <a:r>
               <a:rPr lang="en-US" sz="900" dirty="0">
                 <a:solidFill>
-                  <a:srgbClr val="8A7457"/>
+                  <a:srgbClr val="D2E4CE"/>
                 </a:solidFill>
                 <a:latin typeface="Calibri" pitchFamily="34" charset="0"/>
                 <a:ea typeface="Calibri" pitchFamily="34" charset="-122"/>
@@ -4130,7 +4130,7 @@
             <a:r>
               <a:rPr lang="en-US" sz="950" dirty="0">
                 <a:solidFill>
-                  <a:srgbClr val="3A2F1F"/>
+                  <a:srgbClr val="FCF9F0"/>
                 </a:solidFill>
                 <a:latin typeface="Calibri" pitchFamily="34" charset="0"/>
                 <a:ea typeface="Calibri" pitchFamily="34" charset="-122"/>
@@ -4159,13 +4159,13 @@
             </a:avLst>
           </a:prstGeom>
           <a:solidFill>
-            <a:srgbClr val="FFFFFF">
+            <a:srgbClr val="12452B">
               <a:alpha val="90000"/>
             </a:srgbClr>
           </a:solidFill>
           <a:ln w="15875">
             <a:solidFill>
-              <a:srgbClr val="A87C2A"/>
+              <a:srgbClr val="C89C40"/>
             </a:solidFill>
             <a:prstDash val="solid"/>
           </a:ln>
@@ -4225,7 +4225,7 @@
           </a:prstGeom>
           <a:ln w="12700">
             <a:solidFill>
-              <a:srgbClr val="A87C2A"/>
+              <a:srgbClr val="C89C40"/>
             </a:solidFill>
             <a:prstDash val="solid"/>
           </a:ln>
@@ -4255,11 +4255,11 @@
             </a:avLst>
           </a:prstGeom>
           <a:solidFill>
-            <a:srgbClr val="8A5A20"/>
+            <a:srgbClr val="B0762A"/>
           </a:solidFill>
           <a:ln w="6350">
             <a:solidFill>
-              <a:srgbClr val="A87C2A"/>
+              <a:srgbClr val="C89C40"/>
             </a:solidFill>
             <a:prstDash val="solid"/>
           </a:ln>
@@ -4338,7 +4338,7 @@
             <a:r>
               <a:rPr lang="en-US" sz="1450" b="1" dirty="0">
                 <a:solidFill>
-                  <a:srgbClr val="241C10"/>
+                  <a:srgbClr val="FFFFFF"/>
                 </a:solidFill>
                 <a:latin typeface="Cambria" pitchFamily="34" charset="0"/>
                 <a:ea typeface="Cambria" pitchFamily="34" charset="-122"/>
@@ -4377,7 +4377,7 @@
             <a:r>
               <a:rPr lang="en-US" sz="1000" dirty="0">
                 <a:solidFill>
-                  <a:srgbClr val="8A7457"/>
+                  <a:srgbClr val="D2E4CE"/>
                 </a:solidFill>
                 <a:latin typeface="Calibri" pitchFamily="34" charset="0"/>
                 <a:ea typeface="Calibri" pitchFamily="34" charset="-122"/>
@@ -4406,13 +4406,13 @@
             </a:avLst>
           </a:prstGeom>
           <a:solidFill>
-            <a:srgbClr val="FBF1DC">
+            <a:srgbClr val="1A5433">
               <a:alpha val="92000"/>
             </a:srgbClr>
           </a:solidFill>
           <a:ln w="9525">
             <a:solidFill>
-              <a:srgbClr val="A87C2A"/>
+              <a:srgbClr val="C89C40"/>
             </a:solidFill>
             <a:prstDash val="solid"/>
           </a:ln>
@@ -4452,7 +4452,7 @@
             <a:r>
               <a:rPr lang="en-US" sz="750" b="1" kern="0" spc="100" dirty="0">
                 <a:solidFill>
-                  <a:srgbClr val="A5730F"/>
+                  <a:srgbClr val="F5CE76"/>
                 </a:solidFill>
                 <a:latin typeface="Calibri" pitchFamily="34" charset="0"/>
                 <a:ea typeface="Calibri" pitchFamily="34" charset="-122"/>
@@ -4491,7 +4491,7 @@
             <a:r>
               <a:rPr lang="en-US" sz="900" dirty="0">
                 <a:solidFill>
-                  <a:srgbClr val="8A7457"/>
+                  <a:srgbClr val="D2E4CE"/>
                 </a:solidFill>
                 <a:latin typeface="Calibri" pitchFamily="34" charset="0"/>
                 <a:ea typeface="Calibri" pitchFamily="34" charset="-122"/>
@@ -4530,7 +4530,7 @@
             <a:r>
               <a:rPr lang="en-US" sz="950" dirty="0">
                 <a:solidFill>
-                  <a:srgbClr val="3A2F1F"/>
+                  <a:srgbClr val="FCF9F0"/>
                 </a:solidFill>
                 <a:latin typeface="Calibri" pitchFamily="34" charset="0"/>
                 <a:ea typeface="Calibri" pitchFamily="34" charset="-122"/>
@@ -4569,7 +4569,7 @@
             <a:r>
               <a:rPr lang="en-US" sz="900" b="1" dirty="0">
                 <a:solidFill>
-                  <a:srgbClr val="A5730F"/>
+                  <a:srgbClr val="F5CE76"/>
                 </a:solidFill>
                 <a:latin typeface="Calibri" pitchFamily="34" charset="0"/>
                 <a:ea typeface="Calibri" pitchFamily="34" charset="-122"/>
@@ -4608,7 +4608,7 @@
             <a:r>
               <a:rPr lang="en-US" sz="950" b="1" dirty="0">
                 <a:solidFill>
-                  <a:srgbClr val="A5730F"/>
+                  <a:srgbClr val="F5CE76"/>
                 </a:solidFill>
                 <a:latin typeface="Calibri" pitchFamily="34" charset="0"/>
                 <a:ea typeface="Calibri" pitchFamily="34" charset="-122"/>
@@ -4647,7 +4647,7 @@
             <a:r>
               <a:rPr lang="en-US" sz="900" dirty="0">
                 <a:solidFill>
-                  <a:srgbClr val="8A7457"/>
+                  <a:srgbClr val="D2E4CE"/>
                 </a:solidFill>
                 <a:latin typeface="Calibri" pitchFamily="34" charset="0"/>
                 <a:ea typeface="Calibri" pitchFamily="34" charset="-122"/>
@@ -4686,7 +4686,7 @@
             <a:r>
               <a:rPr lang="en-US" sz="950" dirty="0">
                 <a:solidFill>
-                  <a:srgbClr val="3A2F1F"/>
+                  <a:srgbClr val="FCF9F0"/>
                 </a:solidFill>
                 <a:latin typeface="Calibri" pitchFamily="34" charset="0"/>
                 <a:ea typeface="Calibri" pitchFamily="34" charset="-122"/>
@@ -4725,7 +4725,7 @@
             <a:r>
               <a:rPr lang="en-US" sz="900" dirty="0">
                 <a:solidFill>
-                  <a:srgbClr val="8A7457"/>
+                  <a:srgbClr val="D2E4CE"/>
                 </a:solidFill>
                 <a:latin typeface="Calibri" pitchFamily="34" charset="0"/>
                 <a:ea typeface="Calibri" pitchFamily="34" charset="-122"/>
@@ -4764,7 +4764,7 @@
             <a:r>
               <a:rPr lang="en-US" sz="950" dirty="0">
                 <a:solidFill>
-                  <a:srgbClr val="3A2F1F"/>
+                  <a:srgbClr val="FCF9F0"/>
                 </a:solidFill>
                 <a:latin typeface="Calibri" pitchFamily="34" charset="0"/>
                 <a:ea typeface="Calibri" pitchFamily="34" charset="-122"/>
@@ -4793,13 +4793,13 @@
             </a:avLst>
           </a:prstGeom>
           <a:solidFill>
-            <a:srgbClr val="FFFFFF">
+            <a:srgbClr val="12452B">
               <a:alpha val="90000"/>
             </a:srgbClr>
           </a:solidFill>
           <a:ln w="15875">
             <a:solidFill>
-              <a:srgbClr val="A87C2A"/>
+              <a:srgbClr val="C89C40"/>
             </a:solidFill>
             <a:prstDash val="solid"/>
           </a:ln>
@@ -4859,7 +4859,7 @@
           </a:prstGeom>
           <a:ln w="12700">
             <a:solidFill>
-              <a:srgbClr val="A87C2A"/>
+              <a:srgbClr val="C89C40"/>
             </a:solidFill>
             <a:prstDash val="solid"/>
           </a:ln>
@@ -4889,11 +4889,11 @@
             </a:avLst>
           </a:prstGeom>
           <a:solidFill>
-            <a:srgbClr val="8A5A20"/>
+            <a:srgbClr val="B0762A"/>
           </a:solidFill>
           <a:ln w="6350">
             <a:solidFill>
-              <a:srgbClr val="A87C2A"/>
+              <a:srgbClr val="C89C40"/>
             </a:solidFill>
             <a:prstDash val="solid"/>
           </a:ln>
@@ -4972,7 +4972,7 @@
             <a:r>
               <a:rPr lang="en-US" sz="1450" b="1" dirty="0">
                 <a:solidFill>
-                  <a:srgbClr val="241C10"/>
+                  <a:srgbClr val="FFFFFF"/>
                 </a:solidFill>
                 <a:latin typeface="Cambria" pitchFamily="34" charset="0"/>
                 <a:ea typeface="Cambria" pitchFamily="34" charset="-122"/>
@@ -5011,7 +5011,7 @@
             <a:r>
               <a:rPr lang="en-US" sz="1000" dirty="0">
                 <a:solidFill>
-                  <a:srgbClr val="8A7457"/>
+                  <a:srgbClr val="D2E4CE"/>
                 </a:solidFill>
                 <a:latin typeface="Calibri" pitchFamily="34" charset="0"/>
                 <a:ea typeface="Calibri" pitchFamily="34" charset="-122"/>
@@ -5040,13 +5040,13 @@
             </a:avLst>
           </a:prstGeom>
           <a:solidFill>
-            <a:srgbClr val="FBF1DC">
+            <a:srgbClr val="1A5433">
               <a:alpha val="92000"/>
             </a:srgbClr>
           </a:solidFill>
           <a:ln w="9525">
             <a:solidFill>
-              <a:srgbClr val="A87C2A"/>
+              <a:srgbClr val="C89C40"/>
             </a:solidFill>
             <a:prstDash val="solid"/>
           </a:ln>
@@ -5086,7 +5086,7 @@
             <a:r>
               <a:rPr lang="en-US" sz="750" b="1" kern="0" spc="100" dirty="0">
                 <a:solidFill>
-                  <a:srgbClr val="A5730F"/>
+                  <a:srgbClr val="F5CE76"/>
                 </a:solidFill>
                 <a:latin typeface="Calibri" pitchFamily="34" charset="0"/>
                 <a:ea typeface="Calibri" pitchFamily="34" charset="-122"/>
@@ -5125,7 +5125,7 @@
             <a:r>
               <a:rPr lang="en-US" sz="900" dirty="0">
                 <a:solidFill>
-                  <a:srgbClr val="8A7457"/>
+                  <a:srgbClr val="D2E4CE"/>
                 </a:solidFill>
                 <a:latin typeface="Calibri" pitchFamily="34" charset="0"/>
                 <a:ea typeface="Calibri" pitchFamily="34" charset="-122"/>
@@ -5164,7 +5164,7 @@
             <a:r>
               <a:rPr lang="en-US" sz="950" dirty="0">
                 <a:solidFill>
-                  <a:srgbClr val="3A2F1F"/>
+                  <a:srgbClr val="FCF9F0"/>
                 </a:solidFill>
                 <a:latin typeface="Calibri" pitchFamily="34" charset="0"/>
                 <a:ea typeface="Calibri" pitchFamily="34" charset="-122"/>
@@ -5203,7 +5203,7 @@
             <a:r>
               <a:rPr lang="en-US" sz="900" b="1" dirty="0">
                 <a:solidFill>
-                  <a:srgbClr val="A5730F"/>
+                  <a:srgbClr val="F5CE76"/>
                 </a:solidFill>
                 <a:latin typeface="Calibri" pitchFamily="34" charset="0"/>
                 <a:ea typeface="Calibri" pitchFamily="34" charset="-122"/>
@@ -5242,7 +5242,7 @@
             <a:r>
               <a:rPr lang="en-US" sz="950" b="1" dirty="0">
                 <a:solidFill>
-                  <a:srgbClr val="A5730F"/>
+                  <a:srgbClr val="F5CE76"/>
                 </a:solidFill>
                 <a:latin typeface="Calibri" pitchFamily="34" charset="0"/>
                 <a:ea typeface="Calibri" pitchFamily="34" charset="-122"/>
@@ -5281,7 +5281,7 @@
             <a:r>
               <a:rPr lang="en-US" sz="900" dirty="0">
                 <a:solidFill>
-                  <a:srgbClr val="8A7457"/>
+                  <a:srgbClr val="D2E4CE"/>
                 </a:solidFill>
                 <a:latin typeface="Calibri" pitchFamily="34" charset="0"/>
                 <a:ea typeface="Calibri" pitchFamily="34" charset="-122"/>
@@ -5320,7 +5320,7 @@
             <a:r>
               <a:rPr lang="en-US" sz="950" dirty="0">
                 <a:solidFill>
-                  <a:srgbClr val="3A2F1F"/>
+                  <a:srgbClr val="FCF9F0"/>
                 </a:solidFill>
                 <a:latin typeface="Calibri" pitchFamily="34" charset="0"/>
                 <a:ea typeface="Calibri" pitchFamily="34" charset="-122"/>
@@ -5359,7 +5359,7 @@
             <a:r>
               <a:rPr lang="en-US" sz="900" dirty="0">
                 <a:solidFill>
-                  <a:srgbClr val="8A7457"/>
+                  <a:srgbClr val="D2E4CE"/>
                 </a:solidFill>
                 <a:latin typeface="Calibri" pitchFamily="34" charset="0"/>
                 <a:ea typeface="Calibri" pitchFamily="34" charset="-122"/>
@@ -5398,7 +5398,7 @@
             <a:r>
               <a:rPr lang="en-US" sz="950" dirty="0">
                 <a:solidFill>
-                  <a:srgbClr val="3A2F1F"/>
+                  <a:srgbClr val="FCF9F0"/>
                 </a:solidFill>
                 <a:latin typeface="Calibri" pitchFamily="34" charset="0"/>
                 <a:ea typeface="Calibri" pitchFamily="34" charset="-122"/>
@@ -5437,7 +5437,7 @@
             <a:r>
               <a:rPr lang="en-US" sz="900" dirty="0">
                 <a:solidFill>
-                  <a:srgbClr val="9C8B6E"/>
+                  <a:srgbClr val="C3D7BF"/>
                 </a:solidFill>
                 <a:latin typeface="Calibri" pitchFamily="34" charset="0"/>
                 <a:ea typeface="Calibri" pitchFamily="34" charset="-122"/>
@@ -5515,7 +5515,7 @@
             <a:r>
               <a:rPr lang="en-US" sz="1100" b="1" kern="0" spc="260" dirty="0">
                 <a:solidFill>
-                  <a:srgbClr val="2E7D3C"/>
+                  <a:srgbClr val="9BD473"/>
                 </a:solidFill>
                 <a:latin typeface="Calibri" pitchFamily="34" charset="0"/>
                 <a:ea typeface="Calibri" pitchFamily="34" charset="-122"/>
@@ -5554,7 +5554,7 @@
             <a:r>
               <a:rPr lang="en-US" sz="3100" b="1" dirty="0">
                 <a:solidFill>
-                  <a:srgbClr val="241C10"/>
+                  <a:srgbClr val="FFFFFF"/>
                 </a:solidFill>
                 <a:latin typeface="Cambria" pitchFamily="34" charset="0"/>
                 <a:ea typeface="Cambria" pitchFamily="34" charset="-122"/>
@@ -5593,7 +5593,7 @@
             <a:r>
               <a:rPr lang="en-US" sz="1250" i="1" dirty="0">
                 <a:solidFill>
-                  <a:srgbClr val="8A7457"/>
+                  <a:srgbClr val="D2E4CE"/>
                 </a:solidFill>
                 <a:latin typeface="Calibri" pitchFamily="34" charset="0"/>
                 <a:ea typeface="Calibri" pitchFamily="34" charset="-122"/>
@@ -5622,13 +5622,13 @@
             </a:avLst>
           </a:prstGeom>
           <a:solidFill>
-            <a:srgbClr val="FFFFFF">
+            <a:srgbClr val="12452B">
               <a:alpha val="90000"/>
             </a:srgbClr>
           </a:solidFill>
           <a:ln w="15875">
             <a:solidFill>
-              <a:srgbClr val="2E7D3C"/>
+              <a:srgbClr val="C89C40"/>
             </a:solidFill>
             <a:prstDash val="solid"/>
           </a:ln>
@@ -5675,7 +5675,7 @@
             <a:r>
               <a:rPr lang="en-US" sz="1700" b="1" dirty="0">
                 <a:solidFill>
-                  <a:srgbClr val="1F5C3A"/>
+                  <a:srgbClr val="F5CE76"/>
                 </a:solidFill>
                 <a:latin typeface="Cambria" pitchFamily="34" charset="0"/>
                 <a:ea typeface="Cambria" pitchFamily="34" charset="-122"/>
@@ -5717,7 +5717,7 @@
             <a:r>
               <a:rPr lang="en-US" sz="1200" dirty="0">
                 <a:solidFill>
-                  <a:srgbClr val="3A2F1F"/>
+                  <a:srgbClr val="FCF9F0"/>
                 </a:solidFill>
                 <a:latin typeface="Calibri" pitchFamily="34" charset="0"/>
                 <a:ea typeface="Calibri" pitchFamily="34" charset="-122"/>
@@ -5756,7 +5756,7 @@
             <a:r>
               <a:rPr lang="en-US" sz="1700" b="1" dirty="0">
                 <a:solidFill>
-                  <a:srgbClr val="1F5C3A"/>
+                  <a:srgbClr val="F5CE76"/>
                 </a:solidFill>
                 <a:latin typeface="Cambria" pitchFamily="34" charset="0"/>
                 <a:ea typeface="Cambria" pitchFamily="34" charset="-122"/>
@@ -5795,7 +5795,7 @@
             <a:r>
               <a:rPr lang="en-US" sz="1050" dirty="0">
                 <a:solidFill>
-                  <a:srgbClr val="8A7457"/>
+                  <a:srgbClr val="D2E4CE"/>
                 </a:solidFill>
                 <a:latin typeface="Calibri" pitchFamily="34" charset="0"/>
                 <a:ea typeface="Calibri" pitchFamily="34" charset="-122"/>
@@ -5834,7 +5834,7 @@
             <a:r>
               <a:rPr lang="en-US" sz="1150" b="1" dirty="0">
                 <a:solidFill>
-                  <a:srgbClr val="3A2F1F"/>
+                  <a:srgbClr val="FCF9F0"/>
                 </a:solidFill>
                 <a:latin typeface="Calibri" pitchFamily="34" charset="0"/>
                 <a:ea typeface="Calibri" pitchFamily="34" charset="-122"/>
@@ -5873,7 +5873,7 @@
             <a:r>
               <a:rPr lang="en-US" sz="1050" dirty="0">
                 <a:solidFill>
-                  <a:srgbClr val="8A7457"/>
+                  <a:srgbClr val="D2E4CE"/>
                 </a:solidFill>
                 <a:latin typeface="Calibri" pitchFamily="34" charset="0"/>
                 <a:ea typeface="Calibri" pitchFamily="34" charset="-122"/>
@@ -5912,7 +5912,7 @@
             <a:r>
               <a:rPr lang="en-US" sz="1150" b="1" dirty="0">
                 <a:solidFill>
-                  <a:srgbClr val="3A2F1F"/>
+                  <a:srgbClr val="FCF9F0"/>
                 </a:solidFill>
                 <a:latin typeface="Calibri" pitchFamily="34" charset="0"/>
                 <a:ea typeface="Calibri" pitchFamily="34" charset="-122"/>
@@ -5951,7 +5951,7 @@
             <a:r>
               <a:rPr lang="en-US" sz="1050" dirty="0">
                 <a:solidFill>
-                  <a:srgbClr val="8A7457"/>
+                  <a:srgbClr val="D2E4CE"/>
                 </a:solidFill>
                 <a:latin typeface="Calibri" pitchFamily="34" charset="0"/>
                 <a:ea typeface="Calibri" pitchFamily="34" charset="-122"/>
@@ -5990,7 +5990,7 @@
             <a:r>
               <a:rPr lang="en-US" sz="1150" b="1" dirty="0">
                 <a:solidFill>
-                  <a:srgbClr val="3A2F1F"/>
+                  <a:srgbClr val="FCF9F0"/>
                 </a:solidFill>
                 <a:latin typeface="Calibri" pitchFamily="34" charset="0"/>
                 <a:ea typeface="Calibri" pitchFamily="34" charset="-122"/>
@@ -6029,7 +6029,7 @@
             <a:r>
               <a:rPr lang="en-US" sz="1050" dirty="0">
                 <a:solidFill>
-                  <a:srgbClr val="8A7457"/>
+                  <a:srgbClr val="D2E4CE"/>
                 </a:solidFill>
                 <a:latin typeface="Calibri" pitchFamily="34" charset="0"/>
                 <a:ea typeface="Calibri" pitchFamily="34" charset="-122"/>
@@ -6068,7 +6068,7 @@
             <a:r>
               <a:rPr lang="en-US" sz="1150" b="1" dirty="0">
                 <a:solidFill>
-                  <a:srgbClr val="3A2F1F"/>
+                  <a:srgbClr val="FCF9F0"/>
                 </a:solidFill>
                 <a:latin typeface="Calibri" pitchFamily="34" charset="0"/>
                 <a:ea typeface="Calibri" pitchFamily="34" charset="-122"/>
@@ -6107,7 +6107,7 @@
             <a:r>
               <a:rPr lang="en-US" sz="1050" dirty="0">
                 <a:solidFill>
-                  <a:srgbClr val="8A7457"/>
+                  <a:srgbClr val="D2E4CE"/>
                 </a:solidFill>
                 <a:latin typeface="Calibri" pitchFamily="34" charset="0"/>
                 <a:ea typeface="Calibri" pitchFamily="34" charset="-122"/>
@@ -6146,7 +6146,7 @@
             <a:r>
               <a:rPr lang="en-US" sz="1150" b="1" dirty="0">
                 <a:solidFill>
-                  <a:srgbClr val="3A2F1F"/>
+                  <a:srgbClr val="FCF9F0"/>
                 </a:solidFill>
                 <a:latin typeface="Calibri" pitchFamily="34" charset="0"/>
                 <a:ea typeface="Calibri" pitchFamily="34" charset="-122"/>
@@ -6185,7 +6185,7 @@
             <a:r>
               <a:rPr lang="en-US" sz="1050" dirty="0">
                 <a:solidFill>
-                  <a:srgbClr val="8A7457"/>
+                  <a:srgbClr val="D2E4CE"/>
                 </a:solidFill>
                 <a:latin typeface="Calibri" pitchFamily="34" charset="0"/>
                 <a:ea typeface="Calibri" pitchFamily="34" charset="-122"/>
@@ -6224,7 +6224,7 @@
             <a:r>
               <a:rPr lang="en-US" sz="1150" b="1" dirty="0">
                 <a:solidFill>
-                  <a:srgbClr val="3A2F1F"/>
+                  <a:srgbClr val="FCF9F0"/>
                 </a:solidFill>
                 <a:latin typeface="Calibri" pitchFamily="34" charset="0"/>
                 <a:ea typeface="Calibri" pitchFamily="34" charset="-122"/>
@@ -6263,7 +6263,7 @@
             <a:r>
               <a:rPr lang="en-US" sz="1050" dirty="0">
                 <a:solidFill>
-                  <a:srgbClr val="8A7457"/>
+                  <a:srgbClr val="D2E4CE"/>
                 </a:solidFill>
                 <a:latin typeface="Calibri" pitchFamily="34" charset="0"/>
                 <a:ea typeface="Calibri" pitchFamily="34" charset="-122"/>
@@ -6302,7 +6302,7 @@
             <a:r>
               <a:rPr lang="en-US" sz="1150" b="1" dirty="0">
                 <a:solidFill>
-                  <a:srgbClr val="3A2F1F"/>
+                  <a:srgbClr val="FCF9F0"/>
                 </a:solidFill>
                 <a:latin typeface="Calibri" pitchFamily="34" charset="0"/>
                 <a:ea typeface="Calibri" pitchFamily="34" charset="-122"/>
@@ -6341,7 +6341,7 @@
             <a:r>
               <a:rPr lang="en-US" sz="1050" dirty="0">
                 <a:solidFill>
-                  <a:srgbClr val="8A7457"/>
+                  <a:srgbClr val="D2E4CE"/>
                 </a:solidFill>
                 <a:latin typeface="Calibri" pitchFamily="34" charset="0"/>
                 <a:ea typeface="Calibri" pitchFamily="34" charset="-122"/>
@@ -6380,7 +6380,7 @@
             <a:r>
               <a:rPr lang="en-US" sz="1150" b="1" dirty="0">
                 <a:solidFill>
-                  <a:srgbClr val="3A2F1F"/>
+                  <a:srgbClr val="FCF9F0"/>
                 </a:solidFill>
                 <a:latin typeface="Calibri" pitchFamily="34" charset="0"/>
                 <a:ea typeface="Calibri" pitchFamily="34" charset="-122"/>
@@ -6431,7 +6431,7 @@
           </a:prstGeom>
           <a:ln w="15875">
             <a:solidFill>
-              <a:srgbClr val="2E7D3C"/>
+              <a:srgbClr val="C89C40"/>
             </a:solidFill>
             <a:prstDash val="solid"/>
           </a:ln>
@@ -6461,13 +6461,13 @@
             </a:avLst>
           </a:prstGeom>
           <a:solidFill>
-            <a:srgbClr val="1F5C3A">
-              <a:alpha val="100000"/>
+            <a:srgbClr val="12452B">
+              <a:alpha val="90000"/>
             </a:srgbClr>
           </a:solidFill>
           <a:ln w="15875">
             <a:solidFill>
-              <a:srgbClr val="2E7D3C"/>
+              <a:srgbClr val="C89C40"/>
             </a:solidFill>
             <a:prstDash val="solid"/>
           </a:ln>
@@ -6514,7 +6514,7 @@
             <a:r>
               <a:rPr lang="en-US" sz="1900" b="1" dirty="0">
                 <a:solidFill>
-                  <a:srgbClr val="EAF3EA"/>
+                  <a:srgbClr val="F5CE76"/>
                 </a:solidFill>
                 <a:latin typeface="Cambria" pitchFamily="34" charset="0"/>
                 <a:ea typeface="Cambria" pitchFamily="34" charset="-122"/>
@@ -6553,7 +6553,7 @@
             <a:r>
               <a:rPr lang="en-US" sz="1050" dirty="0">
                 <a:solidFill>
-                  <a:srgbClr val="EAF3EA"/>
+                  <a:srgbClr val="FCF9F0"/>
                 </a:solidFill>
                 <a:latin typeface="Calibri" pitchFamily="34" charset="0"/>
                 <a:ea typeface="Calibri" pitchFamily="34" charset="-122"/>
@@ -6582,13 +6582,13 @@
             </a:avLst>
           </a:prstGeom>
           <a:solidFill>
-            <a:srgbClr val="1F5C3A">
-              <a:alpha val="100000"/>
+            <a:srgbClr val="12452B">
+              <a:alpha val="90000"/>
             </a:srgbClr>
           </a:solidFill>
           <a:ln w="15875">
             <a:solidFill>
-              <a:srgbClr val="2E7D3C"/>
+              <a:srgbClr val="C89C40"/>
             </a:solidFill>
             <a:prstDash val="solid"/>
           </a:ln>
@@ -6635,7 +6635,7 @@
             <a:r>
               <a:rPr lang="en-US" sz="1900" b="1" dirty="0">
                 <a:solidFill>
-                  <a:srgbClr val="EAF3EA"/>
+                  <a:srgbClr val="F5CE76"/>
                 </a:solidFill>
                 <a:latin typeface="Cambria" pitchFamily="34" charset="0"/>
                 <a:ea typeface="Cambria" pitchFamily="34" charset="-122"/>
@@ -6646,7 +6646,7 @@
             <a:r>
               <a:rPr lang="en-US" sz="1100" dirty="0">
                 <a:solidFill>
-                  <a:srgbClr val="EAF3EA"/>
+                  <a:srgbClr val="F5CE76"/>
                 </a:solidFill>
                 <a:latin typeface="Cambria" pitchFamily="34" charset="0"/>
                 <a:ea typeface="Cambria" pitchFamily="34" charset="-122"/>
@@ -6685,7 +6685,7 @@
             <a:r>
               <a:rPr lang="en-US" sz="1050" dirty="0">
                 <a:solidFill>
-                  <a:srgbClr val="EAF3EA"/>
+                  <a:srgbClr val="FCF9F0"/>
                 </a:solidFill>
                 <a:latin typeface="Calibri" pitchFamily="34" charset="0"/>
                 <a:ea typeface="Calibri" pitchFamily="34" charset="-122"/>
@@ -6714,13 +6714,13 @@
             </a:avLst>
           </a:prstGeom>
           <a:solidFill>
-            <a:srgbClr val="1F5C3A">
-              <a:alpha val="100000"/>
+            <a:srgbClr val="12452B">
+              <a:alpha val="90000"/>
             </a:srgbClr>
           </a:solidFill>
           <a:ln w="15875">
             <a:solidFill>
-              <a:srgbClr val="2E7D3C"/>
+              <a:srgbClr val="C89C40"/>
             </a:solidFill>
             <a:prstDash val="solid"/>
           </a:ln>
@@ -6767,7 +6767,7 @@
             <a:r>
               <a:rPr lang="en-US" sz="1900" b="1" dirty="0">
                 <a:solidFill>
-                  <a:srgbClr val="EAF3EA"/>
+                  <a:srgbClr val="F5CE76"/>
                 </a:solidFill>
                 <a:latin typeface="Cambria" pitchFamily="34" charset="0"/>
                 <a:ea typeface="Cambria" pitchFamily="34" charset="-122"/>
@@ -6778,7 +6778,7 @@
             <a:r>
               <a:rPr lang="en-US" sz="1100" dirty="0">
                 <a:solidFill>
-                  <a:srgbClr val="EAF3EA"/>
+                  <a:srgbClr val="F5CE76"/>
                 </a:solidFill>
                 <a:latin typeface="Cambria" pitchFamily="34" charset="0"/>
                 <a:ea typeface="Cambria" pitchFamily="34" charset="-122"/>
@@ -6817,7 +6817,7 @@
             <a:r>
               <a:rPr lang="en-US" sz="1050" dirty="0">
                 <a:solidFill>
-                  <a:srgbClr val="EAF3EA"/>
+                  <a:srgbClr val="FCF9F0"/>
                 </a:solidFill>
                 <a:latin typeface="Calibri" pitchFamily="34" charset="0"/>
                 <a:ea typeface="Calibri" pitchFamily="34" charset="-122"/>
@@ -6856,7 +6856,7 @@
             <a:r>
               <a:rPr lang="en-US" sz="900" dirty="0">
                 <a:solidFill>
-                  <a:srgbClr val="9C8B6E"/>
+                  <a:srgbClr val="C3D7BF"/>
                 </a:solidFill>
                 <a:latin typeface="Calibri" pitchFamily="34" charset="0"/>
                 <a:ea typeface="Calibri" pitchFamily="34" charset="-122"/>
@@ -6934,7 +6934,7 @@
             <a:r>
               <a:rPr lang="en-US" sz="1100" b="1" kern="0" spc="260" dirty="0">
                 <a:solidFill>
-                  <a:srgbClr val="2E7D3C"/>
+                  <a:srgbClr val="9BD473"/>
                 </a:solidFill>
                 <a:latin typeface="Calibri" pitchFamily="34" charset="0"/>
                 <a:ea typeface="Calibri" pitchFamily="34" charset="-122"/>
@@ -6973,7 +6973,7 @@
             <a:r>
               <a:rPr lang="en-US" sz="3100" b="1" dirty="0">
                 <a:solidFill>
-                  <a:srgbClr val="241C10"/>
+                  <a:srgbClr val="FFFFFF"/>
                 </a:solidFill>
                 <a:latin typeface="Cambria" pitchFamily="34" charset="0"/>
                 <a:ea typeface="Cambria" pitchFamily="34" charset="-122"/>
@@ -7012,7 +7012,7 @@
             <a:r>
               <a:rPr lang="en-US" sz="1250" i="1" dirty="0">
                 <a:solidFill>
-                  <a:srgbClr val="8A7457"/>
+                  <a:srgbClr val="D2E4CE"/>
                 </a:solidFill>
                 <a:latin typeface="Calibri" pitchFamily="34" charset="0"/>
                 <a:ea typeface="Calibri" pitchFamily="34" charset="-122"/>
@@ -7041,13 +7041,13 @@
             </a:avLst>
           </a:prstGeom>
           <a:solidFill>
-            <a:srgbClr val="FFFFFF">
+            <a:srgbClr val="12452B">
               <a:alpha val="90000"/>
             </a:srgbClr>
           </a:solidFill>
           <a:ln w="15875">
             <a:solidFill>
-              <a:srgbClr val="2E7D3C"/>
+              <a:srgbClr val="C89C40"/>
             </a:solidFill>
             <a:prstDash val="solid"/>
           </a:ln>
@@ -7106,7 +7106,7 @@
           </a:prstGeom>
           <a:ln w="12700">
             <a:solidFill>
-              <a:srgbClr val="2E7D3C"/>
+              <a:srgbClr val="C89C40"/>
             </a:solidFill>
             <a:prstDash val="solid"/>
           </a:ln>
@@ -7136,11 +7136,11 @@
             </a:avLst>
           </a:prstGeom>
           <a:solidFill>
-            <a:srgbClr val="2E6B3A"/>
+            <a:srgbClr val="358A48"/>
           </a:solidFill>
           <a:ln w="6350">
             <a:solidFill>
-              <a:srgbClr val="2E7D3C"/>
+              <a:srgbClr val="C89C40"/>
             </a:solidFill>
             <a:prstDash val="solid"/>
           </a:ln>
@@ -7219,7 +7219,7 @@
             <a:r>
               <a:rPr lang="en-US" sz="1450" b="1" dirty="0">
                 <a:solidFill>
-                  <a:srgbClr val="241C10"/>
+                  <a:srgbClr val="FFFFFF"/>
                 </a:solidFill>
                 <a:latin typeface="Cambria" pitchFamily="34" charset="0"/>
                 <a:ea typeface="Cambria" pitchFamily="34" charset="-122"/>
@@ -7236,7 +7236,7 @@
             <a:r>
               <a:rPr lang="en-US" sz="1450" b="1" dirty="0">
                 <a:solidFill>
-                  <a:srgbClr val="241C10"/>
+                  <a:srgbClr val="FFFFFF"/>
                 </a:solidFill>
                 <a:latin typeface="Cambria" pitchFamily="34" charset="0"/>
                 <a:ea typeface="Cambria" pitchFamily="34" charset="-122"/>
@@ -7275,7 +7275,7 @@
             <a:r>
               <a:rPr lang="en-US" sz="1000" dirty="0">
                 <a:solidFill>
-                  <a:srgbClr val="8A7457"/>
+                  <a:srgbClr val="D2E4CE"/>
                 </a:solidFill>
                 <a:latin typeface="Calibri" pitchFamily="34" charset="0"/>
                 <a:ea typeface="Calibri" pitchFamily="34" charset="-122"/>
@@ -7304,13 +7304,13 @@
             </a:avLst>
           </a:prstGeom>
           <a:solidFill>
-            <a:srgbClr val="EAF3EA">
+            <a:srgbClr val="1A5433">
               <a:alpha val="92000"/>
             </a:srgbClr>
           </a:solidFill>
           <a:ln w="9525">
             <a:solidFill>
-              <a:srgbClr val="2E7D3C"/>
+              <a:srgbClr val="C89C40"/>
             </a:solidFill>
             <a:prstDash val="solid"/>
           </a:ln>
@@ -7350,7 +7350,7 @@
             <a:r>
               <a:rPr lang="en-US" sz="750" b="1" kern="0" spc="100" dirty="0">
                 <a:solidFill>
-                  <a:srgbClr val="1F5C3A"/>
+                  <a:srgbClr val="F5CE76"/>
                 </a:solidFill>
                 <a:latin typeface="Calibri" pitchFamily="34" charset="0"/>
                 <a:ea typeface="Calibri" pitchFamily="34" charset="-122"/>
@@ -7389,7 +7389,7 @@
             <a:r>
               <a:rPr lang="en-US" sz="900" dirty="0">
                 <a:solidFill>
-                  <a:srgbClr val="8A7457"/>
+                  <a:srgbClr val="D2E4CE"/>
                 </a:solidFill>
                 <a:latin typeface="Calibri" pitchFamily="34" charset="0"/>
                 <a:ea typeface="Calibri" pitchFamily="34" charset="-122"/>
@@ -7428,7 +7428,7 @@
             <a:r>
               <a:rPr lang="en-US" sz="950" dirty="0">
                 <a:solidFill>
-                  <a:srgbClr val="3A2F1F"/>
+                  <a:srgbClr val="FCF9F0"/>
                 </a:solidFill>
                 <a:latin typeface="Calibri" pitchFamily="34" charset="0"/>
                 <a:ea typeface="Calibri" pitchFamily="34" charset="-122"/>
@@ -7467,7 +7467,7 @@
             <a:r>
               <a:rPr lang="en-US" sz="900" b="1" dirty="0">
                 <a:solidFill>
-                  <a:srgbClr val="1F5C3A"/>
+                  <a:srgbClr val="F5CE76"/>
                 </a:solidFill>
                 <a:latin typeface="Calibri" pitchFamily="34" charset="0"/>
                 <a:ea typeface="Calibri" pitchFamily="34" charset="-122"/>
@@ -7506,7 +7506,7 @@
             <a:r>
               <a:rPr lang="en-US" sz="950" b="1" dirty="0">
                 <a:solidFill>
-                  <a:srgbClr val="1F5C3A"/>
+                  <a:srgbClr val="F5CE76"/>
                 </a:solidFill>
                 <a:latin typeface="Calibri" pitchFamily="34" charset="0"/>
                 <a:ea typeface="Calibri" pitchFamily="34" charset="-122"/>
@@ -7545,7 +7545,7 @@
             <a:r>
               <a:rPr lang="en-US" sz="900" dirty="0">
                 <a:solidFill>
-                  <a:srgbClr val="8A7457"/>
+                  <a:srgbClr val="D2E4CE"/>
                 </a:solidFill>
                 <a:latin typeface="Calibri" pitchFamily="34" charset="0"/>
                 <a:ea typeface="Calibri" pitchFamily="34" charset="-122"/>
@@ -7584,7 +7584,7 @@
             <a:r>
               <a:rPr lang="en-US" sz="950" dirty="0">
                 <a:solidFill>
-                  <a:srgbClr val="3A2F1F"/>
+                  <a:srgbClr val="FCF9F0"/>
                 </a:solidFill>
                 <a:latin typeface="Calibri" pitchFamily="34" charset="0"/>
                 <a:ea typeface="Calibri" pitchFamily="34" charset="-122"/>
@@ -7623,7 +7623,7 @@
             <a:r>
               <a:rPr lang="en-US" sz="900" dirty="0">
                 <a:solidFill>
-                  <a:srgbClr val="8A7457"/>
+                  <a:srgbClr val="D2E4CE"/>
                 </a:solidFill>
                 <a:latin typeface="Calibri" pitchFamily="34" charset="0"/>
                 <a:ea typeface="Calibri" pitchFamily="34" charset="-122"/>
@@ -7662,7 +7662,7 @@
             <a:r>
               <a:rPr lang="en-US" sz="950" dirty="0">
                 <a:solidFill>
-                  <a:srgbClr val="3A2F1F"/>
+                  <a:srgbClr val="FCF9F0"/>
                 </a:solidFill>
                 <a:latin typeface="Calibri" pitchFamily="34" charset="0"/>
                 <a:ea typeface="Calibri" pitchFamily="34" charset="-122"/>
@@ -7691,13 +7691,13 @@
             </a:avLst>
           </a:prstGeom>
           <a:solidFill>
-            <a:srgbClr val="FFFFFF">
+            <a:srgbClr val="12452B">
               <a:alpha val="90000"/>
             </a:srgbClr>
           </a:solidFill>
           <a:ln w="15875">
             <a:solidFill>
-              <a:srgbClr val="2E7D3C"/>
+              <a:srgbClr val="C89C40"/>
             </a:solidFill>
             <a:prstDash val="solid"/>
           </a:ln>
@@ -7756,7 +7756,7 @@
           </a:prstGeom>
           <a:ln w="12700">
             <a:solidFill>
-              <a:srgbClr val="2E7D3C"/>
+              <a:srgbClr val="C89C40"/>
             </a:solidFill>
             <a:prstDash val="solid"/>
           </a:ln>
@@ -7786,11 +7786,11 @@
             </a:avLst>
           </a:prstGeom>
           <a:solidFill>
-            <a:srgbClr val="2E6B3A"/>
+            <a:srgbClr val="358A48"/>
           </a:solidFill>
           <a:ln w="6350">
             <a:solidFill>
-              <a:srgbClr val="2E7D3C"/>
+              <a:srgbClr val="C89C40"/>
             </a:solidFill>
             <a:prstDash val="solid"/>
           </a:ln>
@@ -7869,7 +7869,7 @@
             <a:r>
               <a:rPr lang="en-US" sz="1450" b="1" dirty="0">
                 <a:solidFill>
-                  <a:srgbClr val="241C10"/>
+                  <a:srgbClr val="FFFFFF"/>
                 </a:solidFill>
                 <a:latin typeface="Cambria" pitchFamily="34" charset="0"/>
                 <a:ea typeface="Cambria" pitchFamily="34" charset="-122"/>
@@ -7908,7 +7908,7 @@
             <a:r>
               <a:rPr lang="en-US" sz="1000" dirty="0">
                 <a:solidFill>
-                  <a:srgbClr val="8A7457"/>
+                  <a:srgbClr val="D2E4CE"/>
                 </a:solidFill>
                 <a:latin typeface="Calibri" pitchFamily="34" charset="0"/>
                 <a:ea typeface="Calibri" pitchFamily="34" charset="-122"/>
@@ -7937,13 +7937,13 @@
             </a:avLst>
           </a:prstGeom>
           <a:solidFill>
-            <a:srgbClr val="EAF3EA">
+            <a:srgbClr val="1A5433">
               <a:alpha val="92000"/>
             </a:srgbClr>
           </a:solidFill>
           <a:ln w="9525">
             <a:solidFill>
-              <a:srgbClr val="2E7D3C"/>
+              <a:srgbClr val="C89C40"/>
             </a:solidFill>
             <a:prstDash val="solid"/>
           </a:ln>
@@ -7983,7 +7983,7 @@
             <a:r>
               <a:rPr lang="en-US" sz="750" b="1" kern="0" spc="100" dirty="0">
                 <a:solidFill>
-                  <a:srgbClr val="1F5C3A"/>
+                  <a:srgbClr val="F5CE76"/>
                 </a:solidFill>
                 <a:latin typeface="Calibri" pitchFamily="34" charset="0"/>
                 <a:ea typeface="Calibri" pitchFamily="34" charset="-122"/>
@@ -8022,7 +8022,7 @@
             <a:r>
               <a:rPr lang="en-US" sz="900" dirty="0">
                 <a:solidFill>
-                  <a:srgbClr val="8A7457"/>
+                  <a:srgbClr val="D2E4CE"/>
                 </a:solidFill>
                 <a:latin typeface="Calibri" pitchFamily="34" charset="0"/>
                 <a:ea typeface="Calibri" pitchFamily="34" charset="-122"/>
@@ -8061,7 +8061,7 @@
             <a:r>
               <a:rPr lang="en-US" sz="950" dirty="0">
                 <a:solidFill>
-                  <a:srgbClr val="3A2F1F"/>
+                  <a:srgbClr val="FCF9F0"/>
                 </a:solidFill>
                 <a:latin typeface="Calibri" pitchFamily="34" charset="0"/>
                 <a:ea typeface="Calibri" pitchFamily="34" charset="-122"/>
@@ -8100,7 +8100,7 @@
             <a:r>
               <a:rPr lang="en-US" sz="900" b="1" dirty="0">
                 <a:solidFill>
-                  <a:srgbClr val="1F5C3A"/>
+                  <a:srgbClr val="F5CE76"/>
                 </a:solidFill>
                 <a:latin typeface="Calibri" pitchFamily="34" charset="0"/>
                 <a:ea typeface="Calibri" pitchFamily="34" charset="-122"/>
@@ -8139,7 +8139,7 @@
             <a:r>
               <a:rPr lang="en-US" sz="950" b="1" dirty="0">
                 <a:solidFill>
-                  <a:srgbClr val="1F5C3A"/>
+                  <a:srgbClr val="F5CE76"/>
                 </a:solidFill>
                 <a:latin typeface="Calibri" pitchFamily="34" charset="0"/>
                 <a:ea typeface="Calibri" pitchFamily="34" charset="-122"/>
@@ -8178,7 +8178,7 @@
             <a:r>
               <a:rPr lang="en-US" sz="900" dirty="0">
                 <a:solidFill>
-                  <a:srgbClr val="8A7457"/>
+                  <a:srgbClr val="D2E4CE"/>
                 </a:solidFill>
                 <a:latin typeface="Calibri" pitchFamily="34" charset="0"/>
                 <a:ea typeface="Calibri" pitchFamily="34" charset="-122"/>
@@ -8217,7 +8217,7 @@
             <a:r>
               <a:rPr lang="en-US" sz="950" dirty="0">
                 <a:solidFill>
-                  <a:srgbClr val="3A2F1F"/>
+                  <a:srgbClr val="FCF9F0"/>
                 </a:solidFill>
                 <a:latin typeface="Calibri" pitchFamily="34" charset="0"/>
                 <a:ea typeface="Calibri" pitchFamily="34" charset="-122"/>
@@ -8256,7 +8256,7 @@
             <a:r>
               <a:rPr lang="en-US" sz="900" dirty="0">
                 <a:solidFill>
-                  <a:srgbClr val="8A7457"/>
+                  <a:srgbClr val="D2E4CE"/>
                 </a:solidFill>
                 <a:latin typeface="Calibri" pitchFamily="34" charset="0"/>
                 <a:ea typeface="Calibri" pitchFamily="34" charset="-122"/>
@@ -8295,7 +8295,7 @@
             <a:r>
               <a:rPr lang="en-US" sz="950" dirty="0">
                 <a:solidFill>
-                  <a:srgbClr val="3A2F1F"/>
+                  <a:srgbClr val="FCF9F0"/>
                 </a:solidFill>
                 <a:latin typeface="Calibri" pitchFamily="34" charset="0"/>
                 <a:ea typeface="Calibri" pitchFamily="34" charset="-122"/>
@@ -8324,13 +8324,13 @@
             </a:avLst>
           </a:prstGeom>
           <a:solidFill>
-            <a:srgbClr val="FFFFFF">
+            <a:srgbClr val="12452B">
               <a:alpha val="90000"/>
             </a:srgbClr>
           </a:solidFill>
           <a:ln w="15875">
             <a:solidFill>
-              <a:srgbClr val="2E7D3C"/>
+              <a:srgbClr val="C89C40"/>
             </a:solidFill>
             <a:prstDash val="solid"/>
           </a:ln>
@@ -8389,7 +8389,7 @@
           </a:prstGeom>
           <a:ln w="12700">
             <a:solidFill>
-              <a:srgbClr val="2E7D3C"/>
+              <a:srgbClr val="C89C40"/>
             </a:solidFill>
             <a:prstDash val="solid"/>
           </a:ln>
@@ -8419,11 +8419,11 @@
             </a:avLst>
           </a:prstGeom>
           <a:solidFill>
-            <a:srgbClr val="2E6B3A"/>
+            <a:srgbClr val="358A48"/>
           </a:solidFill>
           <a:ln w="6350">
             <a:solidFill>
-              <a:srgbClr val="2E7D3C"/>
+              <a:srgbClr val="C89C40"/>
             </a:solidFill>
             <a:prstDash val="solid"/>
           </a:ln>
@@ -8502,7 +8502,7 @@
             <a:r>
               <a:rPr lang="en-US" sz="1450" b="1" dirty="0">
                 <a:solidFill>
-                  <a:srgbClr val="241C10"/>
+                  <a:srgbClr val="FFFFFF"/>
                 </a:solidFill>
                 <a:latin typeface="Cambria" pitchFamily="34" charset="0"/>
                 <a:ea typeface="Cambria" pitchFamily="34" charset="-122"/>
@@ -8541,7 +8541,7 @@
             <a:r>
               <a:rPr lang="en-US" sz="1000" dirty="0">
                 <a:solidFill>
-                  <a:srgbClr val="8A7457"/>
+                  <a:srgbClr val="D2E4CE"/>
                 </a:solidFill>
                 <a:latin typeface="Calibri" pitchFamily="34" charset="0"/>
                 <a:ea typeface="Calibri" pitchFamily="34" charset="-122"/>
@@ -8570,13 +8570,13 @@
             </a:avLst>
           </a:prstGeom>
           <a:solidFill>
-            <a:srgbClr val="EAF3EA">
+            <a:srgbClr val="1A5433">
               <a:alpha val="92000"/>
             </a:srgbClr>
           </a:solidFill>
           <a:ln w="9525">
             <a:solidFill>
-              <a:srgbClr val="2E7D3C"/>
+              <a:srgbClr val="C89C40"/>
             </a:solidFill>
             <a:prstDash val="solid"/>
           </a:ln>
@@ -8616,7 +8616,7 @@
             <a:r>
               <a:rPr lang="en-US" sz="750" b="1" kern="0" spc="100" dirty="0">
                 <a:solidFill>
-                  <a:srgbClr val="1F5C3A"/>
+                  <a:srgbClr val="F5CE76"/>
                 </a:solidFill>
                 <a:latin typeface="Calibri" pitchFamily="34" charset="0"/>
                 <a:ea typeface="Calibri" pitchFamily="34" charset="-122"/>
@@ -8655,7 +8655,7 @@
             <a:r>
               <a:rPr lang="en-US" sz="900" dirty="0">
                 <a:solidFill>
-                  <a:srgbClr val="8A7457"/>
+                  <a:srgbClr val="D2E4CE"/>
                 </a:solidFill>
                 <a:latin typeface="Calibri" pitchFamily="34" charset="0"/>
                 <a:ea typeface="Calibri" pitchFamily="34" charset="-122"/>
@@ -8694,7 +8694,7 @@
             <a:r>
               <a:rPr lang="en-US" sz="950" dirty="0">
                 <a:solidFill>
-                  <a:srgbClr val="3A2F1F"/>
+                  <a:srgbClr val="FCF9F0"/>
                 </a:solidFill>
                 <a:latin typeface="Calibri" pitchFamily="34" charset="0"/>
                 <a:ea typeface="Calibri" pitchFamily="34" charset="-122"/>
@@ -8733,7 +8733,7 @@
             <a:r>
               <a:rPr lang="en-US" sz="900" b="1" dirty="0">
                 <a:solidFill>
-                  <a:srgbClr val="1F5C3A"/>
+                  <a:srgbClr val="F5CE76"/>
                 </a:solidFill>
                 <a:latin typeface="Calibri" pitchFamily="34" charset="0"/>
                 <a:ea typeface="Calibri" pitchFamily="34" charset="-122"/>
@@ -8772,7 +8772,7 @@
             <a:r>
               <a:rPr lang="en-US" sz="950" b="1" dirty="0">
                 <a:solidFill>
-                  <a:srgbClr val="1F5C3A"/>
+                  <a:srgbClr val="F5CE76"/>
                 </a:solidFill>
                 <a:latin typeface="Calibri" pitchFamily="34" charset="0"/>
                 <a:ea typeface="Calibri" pitchFamily="34" charset="-122"/>
@@ -8811,7 +8811,7 @@
             <a:r>
               <a:rPr lang="en-US" sz="900" dirty="0">
                 <a:solidFill>
-                  <a:srgbClr val="8A7457"/>
+                  <a:srgbClr val="D2E4CE"/>
                 </a:solidFill>
                 <a:latin typeface="Calibri" pitchFamily="34" charset="0"/>
                 <a:ea typeface="Calibri" pitchFamily="34" charset="-122"/>
@@ -8850,7 +8850,7 @@
             <a:r>
               <a:rPr lang="en-US" sz="950" dirty="0">
                 <a:solidFill>
-                  <a:srgbClr val="3A2F1F"/>
+                  <a:srgbClr val="FCF9F0"/>
                 </a:solidFill>
                 <a:latin typeface="Calibri" pitchFamily="34" charset="0"/>
                 <a:ea typeface="Calibri" pitchFamily="34" charset="-122"/>
@@ -8889,7 +8889,7 @@
             <a:r>
               <a:rPr lang="en-US" sz="900" dirty="0">
                 <a:solidFill>
-                  <a:srgbClr val="8A7457"/>
+                  <a:srgbClr val="D2E4CE"/>
                 </a:solidFill>
                 <a:latin typeface="Calibri" pitchFamily="34" charset="0"/>
                 <a:ea typeface="Calibri" pitchFamily="34" charset="-122"/>
@@ -8928,7 +8928,7 @@
             <a:r>
               <a:rPr lang="en-US" sz="950" dirty="0">
                 <a:solidFill>
-                  <a:srgbClr val="3A2F1F"/>
+                  <a:srgbClr val="FCF9F0"/>
                 </a:solidFill>
                 <a:latin typeface="Calibri" pitchFamily="34" charset="0"/>
                 <a:ea typeface="Calibri" pitchFamily="34" charset="-122"/>
@@ -8957,13 +8957,13 @@
             </a:avLst>
           </a:prstGeom>
           <a:solidFill>
-            <a:srgbClr val="FFFFFF">
+            <a:srgbClr val="12452B">
               <a:alpha val="90000"/>
             </a:srgbClr>
           </a:solidFill>
           <a:ln w="15875">
             <a:solidFill>
-              <a:srgbClr val="2E7D3C"/>
+              <a:srgbClr val="C89C40"/>
             </a:solidFill>
             <a:prstDash val="solid"/>
           </a:ln>
@@ -9022,7 +9022,7 @@
           </a:prstGeom>
           <a:ln w="12700">
             <a:solidFill>
-              <a:srgbClr val="2E7D3C"/>
+              <a:srgbClr val="C89C40"/>
             </a:solidFill>
             <a:prstDash val="solid"/>
           </a:ln>
@@ -9052,11 +9052,11 @@
             </a:avLst>
           </a:prstGeom>
           <a:solidFill>
-            <a:srgbClr val="2E6B3A"/>
+            <a:srgbClr val="358A48"/>
           </a:solidFill>
           <a:ln w="6350">
             <a:solidFill>
-              <a:srgbClr val="2E7D3C"/>
+              <a:srgbClr val="C89C40"/>
             </a:solidFill>
             <a:prstDash val="solid"/>
           </a:ln>
@@ -9135,7 +9135,7 @@
             <a:r>
               <a:rPr lang="en-US" sz="1450" b="1" dirty="0">
                 <a:solidFill>
-                  <a:srgbClr val="241C10"/>
+                  <a:srgbClr val="FFFFFF"/>
                 </a:solidFill>
                 <a:latin typeface="Cambria" pitchFamily="34" charset="0"/>
                 <a:ea typeface="Cambria" pitchFamily="34" charset="-122"/>
@@ -9174,7 +9174,7 @@
             <a:r>
               <a:rPr lang="en-US" sz="1000" dirty="0">
                 <a:solidFill>
-                  <a:srgbClr val="8A7457"/>
+                  <a:srgbClr val="D2E4CE"/>
                 </a:solidFill>
                 <a:latin typeface="Calibri" pitchFamily="34" charset="0"/>
                 <a:ea typeface="Calibri" pitchFamily="34" charset="-122"/>
@@ -9203,13 +9203,13 @@
             </a:avLst>
           </a:prstGeom>
           <a:solidFill>
-            <a:srgbClr val="EAF3EA">
+            <a:srgbClr val="1A5433">
               <a:alpha val="92000"/>
             </a:srgbClr>
           </a:solidFill>
           <a:ln w="9525">
             <a:solidFill>
-              <a:srgbClr val="2E7D3C"/>
+              <a:srgbClr val="C89C40"/>
             </a:solidFill>
             <a:prstDash val="solid"/>
           </a:ln>
@@ -9249,7 +9249,7 @@
             <a:r>
               <a:rPr lang="en-US" sz="750" b="1" kern="0" spc="100" dirty="0">
                 <a:solidFill>
-                  <a:srgbClr val="1F5C3A"/>
+                  <a:srgbClr val="F5CE76"/>
                 </a:solidFill>
                 <a:latin typeface="Calibri" pitchFamily="34" charset="0"/>
                 <a:ea typeface="Calibri" pitchFamily="34" charset="-122"/>
@@ -9288,7 +9288,7 @@
             <a:r>
               <a:rPr lang="en-US" sz="900" dirty="0">
                 <a:solidFill>
-                  <a:srgbClr val="8A7457"/>
+                  <a:srgbClr val="D2E4CE"/>
                 </a:solidFill>
                 <a:latin typeface="Calibri" pitchFamily="34" charset="0"/>
                 <a:ea typeface="Calibri" pitchFamily="34" charset="-122"/>
@@ -9327,7 +9327,7 @@
             <a:r>
               <a:rPr lang="en-US" sz="950" dirty="0">
                 <a:solidFill>
-                  <a:srgbClr val="3A2F1F"/>
+                  <a:srgbClr val="FCF9F0"/>
                 </a:solidFill>
                 <a:latin typeface="Calibri" pitchFamily="34" charset="0"/>
                 <a:ea typeface="Calibri" pitchFamily="34" charset="-122"/>
@@ -9366,7 +9366,7 @@
             <a:r>
               <a:rPr lang="en-US" sz="900" b="1" dirty="0">
                 <a:solidFill>
-                  <a:srgbClr val="1F5C3A"/>
+                  <a:srgbClr val="F5CE76"/>
                 </a:solidFill>
                 <a:latin typeface="Calibri" pitchFamily="34" charset="0"/>
                 <a:ea typeface="Calibri" pitchFamily="34" charset="-122"/>
@@ -9405,7 +9405,7 @@
             <a:r>
               <a:rPr lang="en-US" sz="950" b="1" dirty="0">
                 <a:solidFill>
-                  <a:srgbClr val="1F5C3A"/>
+                  <a:srgbClr val="F5CE76"/>
                 </a:solidFill>
                 <a:latin typeface="Calibri" pitchFamily="34" charset="0"/>
                 <a:ea typeface="Calibri" pitchFamily="34" charset="-122"/>
@@ -9444,7 +9444,7 @@
             <a:r>
               <a:rPr lang="en-US" sz="900" dirty="0">
                 <a:solidFill>
-                  <a:srgbClr val="8A7457"/>
+                  <a:srgbClr val="D2E4CE"/>
                 </a:solidFill>
                 <a:latin typeface="Calibri" pitchFamily="34" charset="0"/>
                 <a:ea typeface="Calibri" pitchFamily="34" charset="-122"/>
@@ -9483,7 +9483,7 @@
             <a:r>
               <a:rPr lang="en-US" sz="950" dirty="0">
                 <a:solidFill>
-                  <a:srgbClr val="3A2F1F"/>
+                  <a:srgbClr val="FCF9F0"/>
                 </a:solidFill>
                 <a:latin typeface="Calibri" pitchFamily="34" charset="0"/>
                 <a:ea typeface="Calibri" pitchFamily="34" charset="-122"/>
@@ -9522,7 +9522,7 @@
             <a:r>
               <a:rPr lang="en-US" sz="900" dirty="0">
                 <a:solidFill>
-                  <a:srgbClr val="8A7457"/>
+                  <a:srgbClr val="D2E4CE"/>
                 </a:solidFill>
                 <a:latin typeface="Calibri" pitchFamily="34" charset="0"/>
                 <a:ea typeface="Calibri" pitchFamily="34" charset="-122"/>
@@ -9561,7 +9561,7 @@
             <a:r>
               <a:rPr lang="en-US" sz="950" dirty="0">
                 <a:solidFill>
-                  <a:srgbClr val="3A2F1F"/>
+                  <a:srgbClr val="FCF9F0"/>
                 </a:solidFill>
                 <a:latin typeface="Calibri" pitchFamily="34" charset="0"/>
                 <a:ea typeface="Calibri" pitchFamily="34" charset="-122"/>
@@ -9600,7 +9600,7 @@
             <a:r>
               <a:rPr lang="en-US" sz="900" dirty="0">
                 <a:solidFill>
-                  <a:srgbClr val="9C8B6E"/>
+                  <a:srgbClr val="C3D7BF"/>
                 </a:solidFill>
                 <a:latin typeface="Calibri" pitchFamily="34" charset="0"/>
                 <a:ea typeface="Calibri" pitchFamily="34" charset="-122"/>

--- a/RTE_Rice_Suppliers.pptx
+++ b/RTE_Rice_Suppliers.pptx
@@ -1021,13 +1021,13 @@
             </a:avLst>
           </a:prstGeom>
           <a:solidFill>
-            <a:srgbClr val="FFFFFF">
-              <a:alpha val="100000"/>
+            <a:srgbClr val="12452B">
+              <a:alpha val="92000"/>
             </a:srgbClr>
           </a:solidFill>
           <a:ln w="15875">
             <a:solidFill>
-              <a:srgbClr val="A87C2A"/>
+              <a:srgbClr val="C89C40"/>
             </a:solidFill>
             <a:prstDash val="solid"/>
           </a:ln>
@@ -1074,7 +1074,7 @@
             <a:r>
               <a:rPr lang="en-US" sz="2700" b="1" kern="0" spc="150" dirty="0">
                 <a:solidFill>
-                  <a:srgbClr val="A5730F"/>
+                  <a:srgbClr val="F5CE76"/>
                 </a:solidFill>
                 <a:latin typeface="Cambria" pitchFamily="34" charset="0"/>
                 <a:ea typeface="Cambria" pitchFamily="34" charset="-122"/>
@@ -1103,7 +1103,7 @@
           <a:noFill/>
           <a:ln w="12700">
             <a:solidFill>
-              <a:srgbClr val="A87C2A"/>
+              <a:srgbClr val="C89C40"/>
             </a:solidFill>
             <a:prstDash val="solid"/>
           </a:ln>
@@ -1131,7 +1131,7 @@
             <a:avLst/>
           </a:prstGeom>
           <a:solidFill>
-            <a:srgbClr val="E0B252"/>
+            <a:srgbClr val="F5CE76"/>
           </a:solidFill>
           <a:ln w="6350">
             <a:solidFill>
@@ -1175,7 +1175,7 @@
             <a:r>
               <a:rPr lang="en-US" sz="1700" dirty="0">
                 <a:solidFill>
-                  <a:srgbClr val="241C10"/>
+                  <a:srgbClr val="FCF9F0"/>
                 </a:solidFill>
                 <a:latin typeface="Calibri" pitchFamily="34" charset="0"/>
                 <a:ea typeface="Calibri" pitchFamily="34" charset="-122"/>
@@ -1214,7 +1214,7 @@
             <a:r>
               <a:rPr lang="en-US" sz="1150" b="1" dirty="0">
                 <a:solidFill>
-                  <a:srgbClr val="241C10"/>
+                  <a:srgbClr val="FFFFFF"/>
                 </a:solidFill>
                 <a:latin typeface="Calibri" pitchFamily="34" charset="0"/>
                 <a:ea typeface="Calibri" pitchFamily="34" charset="-122"/>
@@ -1225,7 +1225,7 @@
             <a:r>
               <a:rPr lang="en-US" sz="1150" dirty="0">
                 <a:solidFill>
-                  <a:srgbClr val="A5730F"/>
+                  <a:srgbClr val="C89C40"/>
                 </a:solidFill>
                 <a:latin typeface="Calibri" pitchFamily="34" charset="0"/>
                 <a:ea typeface="Calibri" pitchFamily="34" charset="-122"/>
@@ -1236,7 +1236,7 @@
             <a:r>
               <a:rPr lang="en-US" sz="1150" b="1" dirty="0">
                 <a:solidFill>
-                  <a:srgbClr val="241C10"/>
+                  <a:srgbClr val="FFFFFF"/>
                 </a:solidFill>
                 <a:latin typeface="Calibri" pitchFamily="34" charset="0"/>
                 <a:ea typeface="Calibri" pitchFamily="34" charset="-122"/>
@@ -1275,7 +1275,7 @@
             <a:r>
               <a:rPr lang="en-US" sz="1150" dirty="0">
                 <a:solidFill>
-                  <a:srgbClr val="8A7457"/>
+                  <a:srgbClr val="D2E4CE"/>
                 </a:solidFill>
                 <a:latin typeface="Calibri" pitchFamily="34" charset="0"/>
                 <a:ea typeface="Calibri" pitchFamily="34" charset="-122"/>

--- a/RTE_Rice_Suppliers.pptx
+++ b/RTE_Rice_Suppliers.pptx
@@ -14,7 +14,7 @@
     <p:sldId xmlns:r="http://schemas.openxmlformats.org/officeDocument/2006/relationships" id="259" r:id="Rfbb40df39bce476e"/>
     <p:sldId xmlns:r="http://schemas.openxmlformats.org/officeDocument/2006/relationships" id="260" r:id="Rbce01309253b447d"/>
     <p:sldId xmlns:r="http://schemas.openxmlformats.org/officeDocument/2006/relationships" id="261" r:id="Rd02b738b12d84961"/>
-    <p:sldId xmlns:r="http://schemas.openxmlformats.org/officeDocument/2006/relationships" id="262" r:id="R0eb9f675fbe54556"/>
+    <p:sldId xmlns:r="http://schemas.openxmlformats.org/officeDocument/2006/relationships" id="263" r:id="rId1"/>
   </p:sldIdLst>
   <p:sldSz cx="12192000" cy="6858000"/>
   <p:notesSz cx="6858000" cy="9144000"/>
@@ -841,95 +841,6 @@
           <a:p xmlns:a="http://schemas.openxmlformats.org/drawingml/2006/main">
             <a:r>
               <a:t>- User instruction — BSCM launched new cup production; cost is intentionally omitted.</a:t>
-            </a:r>
-            <a:endParaRPr/>
-          </a:p>
-        </p:txBody>
-      </p:sp>
-      <p:sp>
-        <p:nvSpPr>
-          <p:cNvPr id="4" name="Slide Number Placeholder 3"/>
-          <p:cNvSpPr>
-            <a:spLocks xmlns:a="http://schemas.openxmlformats.org/drawingml/2006/main" noGrp="1"/>
-          </p:cNvSpPr>
-          <p:nvPr>
-            <p:ph type="sldNum" idx="5"/>
-          </p:nvPr>
-        </p:nvSpPr>
-        <p:spPr/>
-        <p:txBody>
-          <a:bodyPr xmlns:a="http://schemas.openxmlformats.org/drawingml/2006/main"/>
-          <a:lstStyle xmlns:a="http://schemas.openxmlformats.org/drawingml/2006/main"/>
-          <a:p xmlns:a="http://schemas.openxmlformats.org/drawingml/2006/main"/>
-        </p:txBody>
-      </p:sp>
-    </p:spTree>
-  </p:cSld>
-  <p:clrMapOvr>
-    <a:masterClrMapping xmlns:a="http://schemas.openxmlformats.org/drawingml/2006/main"/>
-  </p:clrMapOvr>
-</p:notes>
-</file>
-
-<file path=ppt/notesSlides/notesSlide7.xml><?xml version="1.0" encoding="utf-8"?>
-<p:notes xmlns:p="http://schemas.openxmlformats.org/presentationml/2006/main">
-  <p:cSld>
-    <p:spTree>
-      <p:nvGrpSpPr>
-        <p:cNvPr id="1" name=""/>
-        <p:cNvGrpSpPr/>
-        <p:nvPr/>
-      </p:nvGrpSpPr>
-      <p:grpSpPr>
-        <a:xfrm xmlns:a="http://schemas.openxmlformats.org/drawingml/2006/main"/>
-      </p:grpSpPr>
-      <p:sp>
-        <p:nvSpPr>
-          <p:cNvPr id="2" name="Slide Image Placeholder 1"/>
-          <p:cNvSpPr>
-            <a:spLocks xmlns:a="http://schemas.openxmlformats.org/drawingml/2006/main" noGrp="1"/>
-          </p:cNvSpPr>
-          <p:nvPr>
-            <p:ph type="sldImg" idx="0"/>
-          </p:nvPr>
-        </p:nvSpPr>
-        <p:spPr/>
-      </p:sp>
-      <p:sp>
-        <p:nvSpPr>
-          <p:cNvPr id="3" name="Notes Placeholder 2"/>
-          <p:cNvSpPr>
-            <a:spLocks xmlns:a="http://schemas.openxmlformats.org/drawingml/2006/main" noGrp="1"/>
-          </p:cNvSpPr>
-          <p:nvPr>
-            <p:ph type="body" idx="1"/>
-          </p:nvPr>
-        </p:nvSpPr>
-        <p:spPr/>
-        <p:txBody>
-          <a:bodyPr xmlns:a="http://schemas.openxmlformats.org/drawingml/2006/main"/>
-          <a:lstStyle xmlns:a="http://schemas.openxmlformats.org/drawingml/2006/main"/>
-          <a:p xmlns:a="http://schemas.openxmlformats.org/drawingml/2006/main">
-            <a:r>
-              <a:t>[Sources]</a:t>
-            </a:r>
-            <a:endParaRPr/>
-          </a:p>
-          <a:p xmlns:a="http://schemas.openxmlformats.org/drawingml/2006/main">
-            <a:r>
-              <a:t>- Cup-Photo of Products.pdf — remaining Single Cup products and Double Cup configuration; supplied by the user.</a:t>
-            </a:r>
-            <a:endParaRPr/>
-          </a:p>
-          <a:p xmlns:a="http://schemas.openxmlformats.org/drawingml/2006/main">
-            <a:r>
-              <a:t>- ca90073a-6936-4878-b5fd-b76099408938.png — SPAR Private Label example; supplied by the user.</a:t>
-            </a:r>
-            <a:endParaRPr/>
-          </a:p>
-          <a:p xmlns:a="http://schemas.openxmlformats.org/drawingml/2006/main">
-            <a:r>
-              <a:t>- User instruction — cup and prior pouch assortment may be mixed in one container.</a:t>
             </a:r>
             <a:endParaRPr/>
           </a:p>
@@ -14870,7 +14781,7 @@
     <p:bg>
       <p:bgPr>
         <a:blipFill xmlns:a="http://schemas.openxmlformats.org/drawingml/2006/main" rotWithShape="1">
-          <a:blip xmlns:r="http://schemas.openxmlformats.org/officeDocument/2006/relationships" r:embed="R9794f7d478994cec">
+          <a:blip xmlns:r="http://schemas.openxmlformats.org/officeDocument/2006/relationships" r:embed="R835cd8b4bbcb4311">
             <a:lum/>
           </a:blip>
           <a:srcRect l="0" t="0" r="0" b="0"/>
@@ -14894,7 +14805,7 @@
           <p:cNvPr id="2" name="Text 0">
             <a:extLst xmlns:a="http://schemas.openxmlformats.org/drawingml/2006/main">
               <a:ext uri="{FF2B5EF4-FFF2-40B4-BE49-F238E27FC236}">
-                <a16:creationId xmlns:a16="http://schemas.microsoft.com/office/drawing/2014/main" id="{318C5BA4-D3A1-44C2-B745-30F83BBCCF97}"/>
+                <a16:creationId xmlns:a16="http://schemas.microsoft.com/office/drawing/2014/main" id="{BF77CD9A-0EFB-41E4-BB91-158CD8B97E51}"/>
               </a:ext>
             </a:extLst>
           </p:cNvPr>
@@ -14929,7 +14840,7 @@
                 <a:ea typeface="Calibri"/>
                 <a:cs typeface="Calibri"/>
               </a:rPr>
-              <a:t>BSCM FOODS · CUP / PRIVATE LABEL</a:t>
+              <a:t>BSCM FOODS  ·  DOUBLE CUP</a:t>
             </a:r>
             <a:endParaRPr sz="1100"/>
           </a:p>
@@ -14940,7 +14851,7 @@
           <p:cNvPr id="3" name="Text 1">
             <a:extLst xmlns:a="http://schemas.openxmlformats.org/drawingml/2006/main">
               <a:ext uri="{FF2B5EF4-FFF2-40B4-BE49-F238E27FC236}">
-                <a16:creationId xmlns:a16="http://schemas.microsoft.com/office/drawing/2014/main" id="{380CCB68-F07E-4088-8869-8D3DB6C90508}"/>
+                <a16:creationId xmlns:a16="http://schemas.microsoft.com/office/drawing/2014/main" id="{9496C762-5C3C-4C5E-AE52-4FCFDC0031FD}"/>
               </a:ext>
             </a:extLst>
           </p:cNvPr>
@@ -14975,7 +14886,7 @@
                 <a:ea typeface="Cambria"/>
                 <a:cs typeface="Cambria"/>
               </a:rPr>
-              <a:t>Ready Rice in Plastic Cup — продовження</a:t>
+              <a:t>Ready Rice in Plastic Cup 6 × (2 × 125 г)</a:t>
             </a:r>
             <a:endParaRPr sz="3100"/>
           </a:p>
@@ -14986,7 +14897,7 @@
           <p:cNvPr id="4" name="Text 2">
             <a:extLst xmlns:a="http://schemas.openxmlformats.org/drawingml/2006/main">
               <a:ext uri="{FF2B5EF4-FFF2-40B4-BE49-F238E27FC236}">
-                <a16:creationId xmlns:a16="http://schemas.microsoft.com/office/drawing/2014/main" id="{8EA601D2-50AF-4274-98C3-4894B277423C}"/>
+                <a16:creationId xmlns:a16="http://schemas.microsoft.com/office/drawing/2014/main" id="{477A47AF-CA07-4AD7-9441-ED43883C2405}"/>
               </a:ext>
             </a:extLst>
           </p:cNvPr>
@@ -15021,7 +14932,7 @@
                 <a:ea typeface="Calibri"/>
                 <a:cs typeface="Calibri"/>
               </a:rPr>
-              <a:t>Single Cup 12 × 150 г · Double Cup 6 × (2 × 125 г) · mixed container</a:t>
+              <a:t>Double cup зі sleeve-боксом · доступно тільки як Private Label</a:t>
             </a:r>
             <a:endParaRPr sz="1250"/>
           </a:p>
@@ -15032,7 +14943,7 @@
           <p:cNvPr id="5" name="Shape 3">
             <a:extLst xmlns:a="http://schemas.openxmlformats.org/drawingml/2006/main">
               <a:ext uri="{FF2B5EF4-FFF2-40B4-BE49-F238E27FC236}">
-                <a16:creationId xmlns:a16="http://schemas.microsoft.com/office/drawing/2014/main" id="{760E89EB-DA37-42CB-AC69-91A6CA0EA8B6}"/>
+                <a16:creationId xmlns:a16="http://schemas.microsoft.com/office/drawing/2014/main" id="{F1C3D159-6BBB-4F8D-B9ED-F6496F44B44F}"/>
               </a:ext>
             </a:extLst>
           </p:cNvPr>
@@ -15044,11 +14955,11 @@
         <p:spPr>
           <a:xfrm xmlns:a="http://schemas.openxmlformats.org/drawingml/2006/main">
             <a:off x="566928" y="1536192"/>
-            <a:ext cx="2706624" cy="4626864"/>
+            <a:ext cx="6675120" cy="4626864"/>
           </a:xfrm>
           <a:prstGeom xmlns:a="http://schemas.openxmlformats.org/drawingml/2006/main" prst="roundRect">
             <a:avLst>
-              <a:gd name="adj" fmla="val 4054"/>
+              <a:gd name="adj" fmla="val 2372"/>
             </a:avLst>
           </a:prstGeom>
           <a:solidFill xmlns:a="http://schemas.openxmlformats.org/drawingml/2006/main">
@@ -15080,27 +14991,837 @@
       </p:sp>
       <p:sp>
         <p:nvSpPr>
-          <p:cNvPr id="7" name="Shape 4">
-            <a:extLst xmlns:a="http://schemas.openxmlformats.org/drawingml/2006/main">
-              <a:ext uri="{FF2B5EF4-FFF2-40B4-BE49-F238E27FC236}">
-                <a16:creationId xmlns:a16="http://schemas.microsoft.com/office/drawing/2014/main" id="{030FCABB-62B5-4CCC-AA9F-B4C4F1FAE801}"/>
-              </a:ext>
-            </a:extLst>
-          </p:cNvPr>
-          <p:cNvSpPr>
-            <a:spLocks xmlns:a="http://schemas.openxmlformats.org/drawingml/2006/main" noGrp="1"/>
-          </p:cNvSpPr>
-          <p:nvPr/>
-        </p:nvSpPr>
-        <p:spPr>
-          <a:xfrm xmlns:a="http://schemas.openxmlformats.org/drawingml/2006/main">
-            <a:off x="749808" y="1700784"/>
-            <a:ext cx="2340864" cy="1810512"/>
-          </a:xfrm>
-          <a:prstGeom xmlns:a="http://schemas.openxmlformats.org/drawingml/2006/main" prst="rect">
-            <a:avLst/>
-          </a:prstGeom>
-          <a:ln xmlns:a="http://schemas.openxmlformats.org/drawingml/2006/main" w="12700">
+          <p:cNvPr id="6" name="Text 4">
+            <a:extLst xmlns:a="http://schemas.openxmlformats.org/drawingml/2006/main">
+              <a:ext uri="{FF2B5EF4-FFF2-40B4-BE49-F238E27FC236}">
+                <a16:creationId xmlns:a16="http://schemas.microsoft.com/office/drawing/2014/main" id="{ABB6272E-A3D6-4F20-AF34-CF17DAB68835}"/>
+              </a:ext>
+            </a:extLst>
+          </p:cNvPr>
+          <p:cNvSpPr>
+            <a:spLocks xmlns:a="http://schemas.openxmlformats.org/drawingml/2006/main" noGrp="1"/>
+          </p:cNvSpPr>
+          <p:nvPr/>
+        </p:nvSpPr>
+        <p:spPr>
+          <a:xfrm xmlns:a="http://schemas.openxmlformats.org/drawingml/2006/main">
+            <a:off x="841248" y="1737360"/>
+            <a:ext cx="6126480" cy="310896"/>
+          </a:xfrm>
+          <a:prstGeom xmlns:a="http://schemas.openxmlformats.org/drawingml/2006/main" prst="rect">
+            <a:avLst/>
+          </a:prstGeom>
+          <a:noFill xmlns:a="http://schemas.openxmlformats.org/drawingml/2006/main"/>
+        </p:spPr>
+        <p:txBody>
+          <a:bodyPr xmlns:a="http://schemas.openxmlformats.org/drawingml/2006/main" wrap="square" lIns="0" tIns="0" rIns="0" bIns="0" anchor="ctr"/>
+          <a:lstStyle xmlns:a="http://schemas.openxmlformats.org/drawingml/2006/main"/>
+          <a:p xmlns:a="http://schemas.openxmlformats.org/drawingml/2006/main">
+            <a:pPr marL="0" indent="0">
+              <a:buNone/>
+            </a:pPr>
+            <a:r>
+              <a:rPr sz="1700" b="1">
+                <a:solidFill>
+                  <a:srgbClr val="F5CE76"/>
+                </a:solidFill>
+                <a:latin typeface="Cambria"/>
+                <a:ea typeface="Cambria"/>
+                <a:cs typeface="Cambria"/>
+              </a:rPr>
+              <a:t>Про формат</a:t>
+            </a:r>
+            <a:endParaRPr sz="1700"/>
+          </a:p>
+        </p:txBody>
+      </p:sp>
+      <p:sp>
+        <p:nvSpPr>
+          <p:cNvPr id="7" name="Text 5">
+            <a:extLst xmlns:a="http://schemas.openxmlformats.org/drawingml/2006/main">
+              <a:ext uri="{FF2B5EF4-FFF2-40B4-BE49-F238E27FC236}">
+                <a16:creationId xmlns:a16="http://schemas.microsoft.com/office/drawing/2014/main" id="{F27C41B4-C39E-4BB3-87E3-96451AFDB1CC}"/>
+              </a:ext>
+            </a:extLst>
+          </p:cNvPr>
+          <p:cNvSpPr>
+            <a:spLocks xmlns:a="http://schemas.openxmlformats.org/drawingml/2006/main" noGrp="1"/>
+          </p:cNvSpPr>
+          <p:nvPr/>
+        </p:nvSpPr>
+        <p:spPr>
+          <a:xfrm xmlns:a="http://schemas.openxmlformats.org/drawingml/2006/main">
+            <a:off x="841248" y="2103120"/>
+            <a:ext cx="6126480" cy="868680"/>
+          </a:xfrm>
+          <a:prstGeom xmlns:a="http://schemas.openxmlformats.org/drawingml/2006/main" prst="rect">
+            <a:avLst/>
+          </a:prstGeom>
+          <a:noFill xmlns:a="http://schemas.openxmlformats.org/drawingml/2006/main"/>
+        </p:spPr>
+        <p:txBody>
+          <a:bodyPr xmlns:a="http://schemas.openxmlformats.org/drawingml/2006/main" wrap="square" lIns="0" tIns="0" rIns="0" bIns="0" anchor="ctr"/>
+          <a:lstStyle xmlns:a="http://schemas.openxmlformats.org/drawingml/2006/main"/>
+          <a:p xmlns:a="http://schemas.openxmlformats.org/drawingml/2006/main">
+            <a:pPr marL="0" indent="0">
+              <a:lnSpc>
+                <a:spcPts val="1700"/>
+              </a:lnSpc>
+              <a:buNone/>
+            </a:pPr>
+            <a:r>
+              <a:rPr sz="1200">
+                <a:solidFill>
+                  <a:srgbClr val="FCF9F0"/>
+                </a:solidFill>
+                <a:latin typeface="Calibri"/>
+                <a:ea typeface="Calibri"/>
+                <a:cs typeface="Calibri"/>
+              </a:rPr>
+              <a:t>Власного бренду BSCM у форматі double cup немає — цей формат постачальник випускає виключно під приватною маркою замовника. Sleeve-бокс друкується під дизайн клієнта; приклад нижче — Jasmine Rice Cups для мережі SPAR.</a:t>
+            </a:r>
+            <a:endParaRPr sz="1200"/>
+          </a:p>
+        </p:txBody>
+      </p:sp>
+      <p:sp>
+        <p:nvSpPr>
+          <p:cNvPr id="8" name="Text 6">
+            <a:extLst xmlns:a="http://schemas.openxmlformats.org/drawingml/2006/main">
+              <a:ext uri="{FF2B5EF4-FFF2-40B4-BE49-F238E27FC236}">
+                <a16:creationId xmlns:a16="http://schemas.microsoft.com/office/drawing/2014/main" id="{650D0EC9-3F48-4B23-B62F-2DC20F4CB1E3}"/>
+              </a:ext>
+            </a:extLst>
+          </p:cNvPr>
+          <p:cNvSpPr>
+            <a:spLocks xmlns:a="http://schemas.openxmlformats.org/drawingml/2006/main" noGrp="1"/>
+          </p:cNvSpPr>
+          <p:nvPr/>
+        </p:nvSpPr>
+        <p:spPr>
+          <a:xfrm xmlns:a="http://schemas.openxmlformats.org/drawingml/2006/main">
+            <a:off x="841248" y="3017520"/>
+            <a:ext cx="6126480" cy="310896"/>
+          </a:xfrm>
+          <a:prstGeom xmlns:a="http://schemas.openxmlformats.org/drawingml/2006/main" prst="rect">
+            <a:avLst/>
+          </a:prstGeom>
+          <a:noFill xmlns:a="http://schemas.openxmlformats.org/drawingml/2006/main"/>
+        </p:spPr>
+        <p:txBody>
+          <a:bodyPr xmlns:a="http://schemas.openxmlformats.org/drawingml/2006/main" wrap="square" lIns="0" tIns="0" rIns="0" bIns="0" anchor="ctr"/>
+          <a:lstStyle xmlns:a="http://schemas.openxmlformats.org/drawingml/2006/main"/>
+          <a:p xmlns:a="http://schemas.openxmlformats.org/drawingml/2006/main">
+            <a:pPr marL="0" indent="0">
+              <a:buNone/>
+            </a:pPr>
+            <a:r>
+              <a:rPr sz="1700" b="1">
+                <a:solidFill>
+                  <a:srgbClr val="F5CE76"/>
+                </a:solidFill>
+                <a:latin typeface="Cambria"/>
+                <a:ea typeface="Cambria"/>
+                <a:cs typeface="Cambria"/>
+              </a:rPr>
+              <a:t>Смаки в офері</a:t>
+            </a:r>
+            <a:endParaRPr sz="1700"/>
+          </a:p>
+        </p:txBody>
+      </p:sp>
+      <p:sp>
+        <p:nvSpPr>
+          <p:cNvPr id="9" name="Text 7">
+            <a:extLst xmlns:a="http://schemas.openxmlformats.org/drawingml/2006/main">
+              <a:ext uri="{FF2B5EF4-FFF2-40B4-BE49-F238E27FC236}">
+                <a16:creationId xmlns:a16="http://schemas.microsoft.com/office/drawing/2014/main" id="{7A91FA7F-CF81-4499-8A50-A7DEE4346D83}"/>
+              </a:ext>
+            </a:extLst>
+          </p:cNvPr>
+          <p:cNvSpPr>
+            <a:spLocks xmlns:a="http://schemas.openxmlformats.org/drawingml/2006/main" noGrp="1"/>
+          </p:cNvSpPr>
+          <p:nvPr/>
+        </p:nvSpPr>
+        <p:spPr>
+          <a:xfrm xmlns:a="http://schemas.openxmlformats.org/drawingml/2006/main">
+            <a:off x="841248" y="3383280"/>
+            <a:ext cx="2103120" cy="256032"/>
+          </a:xfrm>
+          <a:prstGeom xmlns:a="http://schemas.openxmlformats.org/drawingml/2006/main" prst="rect">
+            <a:avLst/>
+          </a:prstGeom>
+          <a:noFill xmlns:a="http://schemas.openxmlformats.org/drawingml/2006/main"/>
+        </p:spPr>
+        <p:txBody>
+          <a:bodyPr xmlns:a="http://schemas.openxmlformats.org/drawingml/2006/main" wrap="square" lIns="0" tIns="0" rIns="0" bIns="0" anchor="ctr"/>
+          <a:lstStyle xmlns:a="http://schemas.openxmlformats.org/drawingml/2006/main"/>
+          <a:p xmlns:a="http://schemas.openxmlformats.org/drawingml/2006/main">
+            <a:pPr marL="0" indent="0">
+              <a:buNone/>
+            </a:pPr>
+            <a:r>
+              <a:rPr sz="1050">
+                <a:solidFill>
+                  <a:srgbClr val="D2E4CE"/>
+                </a:solidFill>
+                <a:latin typeface="Calibri"/>
+                <a:ea typeface="Calibri"/>
+                <a:cs typeface="Calibri"/>
+              </a:rPr>
+              <a:t>Jasmine Rice, no oil</a:t>
+            </a:r>
+            <a:endParaRPr sz="1050"/>
+          </a:p>
+        </p:txBody>
+      </p:sp>
+      <p:sp>
+        <p:nvSpPr>
+          <p:cNvPr id="10" name="Text 8">
+            <a:extLst xmlns:a="http://schemas.openxmlformats.org/drawingml/2006/main">
+              <a:ext uri="{FF2B5EF4-FFF2-40B4-BE49-F238E27FC236}">
+                <a16:creationId xmlns:a16="http://schemas.microsoft.com/office/drawing/2014/main" id="{BE8A5288-4469-45DA-BAD0-F665517C1E65}"/>
+              </a:ext>
+            </a:extLst>
+          </p:cNvPr>
+          <p:cNvSpPr>
+            <a:spLocks xmlns:a="http://schemas.openxmlformats.org/drawingml/2006/main" noGrp="1"/>
+          </p:cNvSpPr>
+          <p:nvPr/>
+        </p:nvSpPr>
+        <p:spPr>
+          <a:xfrm xmlns:a="http://schemas.openxmlformats.org/drawingml/2006/main">
+            <a:off x="2971800" y="3383280"/>
+            <a:ext cx="4023360" cy="256032"/>
+          </a:xfrm>
+          <a:prstGeom xmlns:a="http://schemas.openxmlformats.org/drawingml/2006/main" prst="rect">
+            <a:avLst/>
+          </a:prstGeom>
+          <a:noFill xmlns:a="http://schemas.openxmlformats.org/drawingml/2006/main"/>
+        </p:spPr>
+        <p:txBody>
+          <a:bodyPr xmlns:a="http://schemas.openxmlformats.org/drawingml/2006/main" wrap="square" lIns="0" tIns="0" rIns="0" bIns="0" anchor="ctr"/>
+          <a:lstStyle xmlns:a="http://schemas.openxmlformats.org/drawingml/2006/main"/>
+          <a:p xmlns:a="http://schemas.openxmlformats.org/drawingml/2006/main">
+            <a:pPr marL="0" indent="0">
+              <a:buNone/>
+            </a:pPr>
+            <a:r>
+              <a:rPr sz="1150" b="1">
+                <a:solidFill>
+                  <a:srgbClr val="FCF9F0"/>
+                </a:solidFill>
+                <a:latin typeface="Calibri"/>
+                <a:ea typeface="Calibri"/>
+                <a:cs typeface="Calibri"/>
+              </a:rPr>
+              <a:t>немає в PL</a:t>
+            </a:r>
+            <a:endParaRPr sz="1150"/>
+          </a:p>
+        </p:txBody>
+      </p:sp>
+      <p:sp>
+        <p:nvSpPr>
+          <p:cNvPr id="11" name="Text 9">
+            <a:extLst xmlns:a="http://schemas.openxmlformats.org/drawingml/2006/main">
+              <a:ext uri="{FF2B5EF4-FFF2-40B4-BE49-F238E27FC236}">
+                <a16:creationId xmlns:a16="http://schemas.microsoft.com/office/drawing/2014/main" id="{FCACD5D8-D338-4EA5-B23F-C319A9D0F23D}"/>
+              </a:ext>
+            </a:extLst>
+          </p:cNvPr>
+          <p:cNvSpPr>
+            <a:spLocks xmlns:a="http://schemas.openxmlformats.org/drawingml/2006/main" noGrp="1"/>
+          </p:cNvSpPr>
+          <p:nvPr/>
+        </p:nvSpPr>
+        <p:spPr>
+          <a:xfrm xmlns:a="http://schemas.openxmlformats.org/drawingml/2006/main">
+            <a:off x="841248" y="3717036"/>
+            <a:ext cx="2103120" cy="256032"/>
+          </a:xfrm>
+          <a:prstGeom xmlns:a="http://schemas.openxmlformats.org/drawingml/2006/main" prst="rect">
+            <a:avLst/>
+          </a:prstGeom>
+          <a:noFill xmlns:a="http://schemas.openxmlformats.org/drawingml/2006/main"/>
+        </p:spPr>
+        <p:txBody>
+          <a:bodyPr xmlns:a="http://schemas.openxmlformats.org/drawingml/2006/main" wrap="square" lIns="0" tIns="0" rIns="0" bIns="0" anchor="ctr"/>
+          <a:lstStyle xmlns:a="http://schemas.openxmlformats.org/drawingml/2006/main"/>
+          <a:p xmlns:a="http://schemas.openxmlformats.org/drawingml/2006/main">
+            <a:pPr marL="0" indent="0">
+              <a:buNone/>
+            </a:pPr>
+            <a:r>
+              <a:rPr sz="1050">
+                <a:solidFill>
+                  <a:srgbClr val="D2E4CE"/>
+                </a:solidFill>
+                <a:latin typeface="Calibri"/>
+                <a:ea typeface="Calibri"/>
+                <a:cs typeface="Calibri"/>
+              </a:rPr>
+              <a:t>Jasmine Rice, w oil</a:t>
+            </a:r>
+            <a:endParaRPr sz="1050"/>
+          </a:p>
+        </p:txBody>
+      </p:sp>
+      <p:sp>
+        <p:nvSpPr>
+          <p:cNvPr id="12" name="Text 10">
+            <a:extLst xmlns:a="http://schemas.openxmlformats.org/drawingml/2006/main">
+              <a:ext uri="{FF2B5EF4-FFF2-40B4-BE49-F238E27FC236}">
+                <a16:creationId xmlns:a16="http://schemas.microsoft.com/office/drawing/2014/main" id="{818D73A6-5619-40CD-864C-164E337887CE}"/>
+              </a:ext>
+            </a:extLst>
+          </p:cNvPr>
+          <p:cNvSpPr>
+            <a:spLocks xmlns:a="http://schemas.openxmlformats.org/drawingml/2006/main" noGrp="1"/>
+          </p:cNvSpPr>
+          <p:nvPr/>
+        </p:nvSpPr>
+        <p:spPr>
+          <a:xfrm xmlns:a="http://schemas.openxmlformats.org/drawingml/2006/main">
+            <a:off x="2971800" y="3717036"/>
+            <a:ext cx="4023360" cy="256032"/>
+          </a:xfrm>
+          <a:prstGeom xmlns:a="http://schemas.openxmlformats.org/drawingml/2006/main" prst="rect">
+            <a:avLst/>
+          </a:prstGeom>
+          <a:noFill xmlns:a="http://schemas.openxmlformats.org/drawingml/2006/main"/>
+        </p:spPr>
+        <p:txBody>
+          <a:bodyPr xmlns:a="http://schemas.openxmlformats.org/drawingml/2006/main" wrap="square" lIns="0" tIns="0" rIns="0" bIns="0" anchor="ctr"/>
+          <a:lstStyle xmlns:a="http://schemas.openxmlformats.org/drawingml/2006/main"/>
+          <a:p xmlns:a="http://schemas.openxmlformats.org/drawingml/2006/main">
+            <a:pPr marL="0" indent="0">
+              <a:buNone/>
+            </a:pPr>
+            <a:r>
+              <a:rPr sz="1150" b="1">
+                <a:solidFill>
+                  <a:srgbClr val="FCF9F0"/>
+                </a:solidFill>
+                <a:latin typeface="Calibri"/>
+                <a:ea typeface="Calibri"/>
+                <a:cs typeface="Calibri"/>
+              </a:rPr>
+              <a:t>доступно</a:t>
+            </a:r>
+            <a:endParaRPr sz="1150"/>
+          </a:p>
+        </p:txBody>
+      </p:sp>
+      <p:sp>
+        <p:nvSpPr>
+          <p:cNvPr id="13" name="Text 11">
+            <a:extLst xmlns:a="http://schemas.openxmlformats.org/drawingml/2006/main">
+              <a:ext uri="{FF2B5EF4-FFF2-40B4-BE49-F238E27FC236}">
+                <a16:creationId xmlns:a16="http://schemas.microsoft.com/office/drawing/2014/main" id="{1B17E25C-EAC6-44DA-BED1-8DA3C384AB1F}"/>
+              </a:ext>
+            </a:extLst>
+          </p:cNvPr>
+          <p:cNvSpPr>
+            <a:spLocks xmlns:a="http://schemas.openxmlformats.org/drawingml/2006/main" noGrp="1"/>
+          </p:cNvSpPr>
+          <p:nvPr/>
+        </p:nvSpPr>
+        <p:spPr>
+          <a:xfrm xmlns:a="http://schemas.openxmlformats.org/drawingml/2006/main">
+            <a:off x="841248" y="4050792"/>
+            <a:ext cx="2103120" cy="256032"/>
+          </a:xfrm>
+          <a:prstGeom xmlns:a="http://schemas.openxmlformats.org/drawingml/2006/main" prst="rect">
+            <a:avLst/>
+          </a:prstGeom>
+          <a:noFill xmlns:a="http://schemas.openxmlformats.org/drawingml/2006/main"/>
+        </p:spPr>
+        <p:txBody>
+          <a:bodyPr xmlns:a="http://schemas.openxmlformats.org/drawingml/2006/main" wrap="square" lIns="0" tIns="0" rIns="0" bIns="0" anchor="ctr"/>
+          <a:lstStyle xmlns:a="http://schemas.openxmlformats.org/drawingml/2006/main"/>
+          <a:p xmlns:a="http://schemas.openxmlformats.org/drawingml/2006/main">
+            <a:pPr marL="0" indent="0">
+              <a:buNone/>
+            </a:pPr>
+            <a:r>
+              <a:rPr sz="1050">
+                <a:solidFill>
+                  <a:srgbClr val="D2E4CE"/>
+                </a:solidFill>
+                <a:latin typeface="Calibri"/>
+                <a:ea typeface="Calibri"/>
+                <a:cs typeface="Calibri"/>
+              </a:rPr>
+              <a:t>Jasmine Rice (Pathum), w oil</a:t>
+            </a:r>
+            <a:endParaRPr sz="1050"/>
+          </a:p>
+        </p:txBody>
+      </p:sp>
+      <p:sp>
+        <p:nvSpPr>
+          <p:cNvPr id="14" name="Text 12">
+            <a:extLst xmlns:a="http://schemas.openxmlformats.org/drawingml/2006/main">
+              <a:ext uri="{FF2B5EF4-FFF2-40B4-BE49-F238E27FC236}">
+                <a16:creationId xmlns:a16="http://schemas.microsoft.com/office/drawing/2014/main" id="{1ACB90C5-BF37-41D9-8DC3-D21E41BC119E}"/>
+              </a:ext>
+            </a:extLst>
+          </p:cNvPr>
+          <p:cNvSpPr>
+            <a:spLocks xmlns:a="http://schemas.openxmlformats.org/drawingml/2006/main" noGrp="1"/>
+          </p:cNvSpPr>
+          <p:nvPr/>
+        </p:nvSpPr>
+        <p:spPr>
+          <a:xfrm xmlns:a="http://schemas.openxmlformats.org/drawingml/2006/main">
+            <a:off x="2971800" y="4050792"/>
+            <a:ext cx="4023360" cy="256032"/>
+          </a:xfrm>
+          <a:prstGeom xmlns:a="http://schemas.openxmlformats.org/drawingml/2006/main" prst="rect">
+            <a:avLst/>
+          </a:prstGeom>
+          <a:noFill xmlns:a="http://schemas.openxmlformats.org/drawingml/2006/main"/>
+        </p:spPr>
+        <p:txBody>
+          <a:bodyPr xmlns:a="http://schemas.openxmlformats.org/drawingml/2006/main" wrap="square" lIns="0" tIns="0" rIns="0" bIns="0" anchor="ctr"/>
+          <a:lstStyle xmlns:a="http://schemas.openxmlformats.org/drawingml/2006/main"/>
+          <a:p xmlns:a="http://schemas.openxmlformats.org/drawingml/2006/main">
+            <a:pPr marL="0" indent="0">
+              <a:buNone/>
+            </a:pPr>
+            <a:r>
+              <a:rPr sz="1150" b="1">
+                <a:solidFill>
+                  <a:srgbClr val="FCF9F0"/>
+                </a:solidFill>
+                <a:latin typeface="Calibri"/>
+                <a:ea typeface="Calibri"/>
+                <a:cs typeface="Calibri"/>
+              </a:rPr>
+              <a:t>доступно</a:t>
+            </a:r>
+            <a:endParaRPr sz="1150"/>
+          </a:p>
+        </p:txBody>
+      </p:sp>
+      <p:sp>
+        <p:nvSpPr>
+          <p:cNvPr id="15" name="Text 13">
+            <a:extLst xmlns:a="http://schemas.openxmlformats.org/drawingml/2006/main">
+              <a:ext uri="{FF2B5EF4-FFF2-40B4-BE49-F238E27FC236}">
+                <a16:creationId xmlns:a16="http://schemas.microsoft.com/office/drawing/2014/main" id="{61BC70C4-0C92-435A-9487-D75013A4A699}"/>
+              </a:ext>
+            </a:extLst>
+          </p:cNvPr>
+          <p:cNvSpPr>
+            <a:spLocks xmlns:a="http://schemas.openxmlformats.org/drawingml/2006/main" noGrp="1"/>
+          </p:cNvSpPr>
+          <p:nvPr/>
+        </p:nvSpPr>
+        <p:spPr>
+          <a:xfrm xmlns:a="http://schemas.openxmlformats.org/drawingml/2006/main">
+            <a:off x="841248" y="4384548"/>
+            <a:ext cx="2103120" cy="256032"/>
+          </a:xfrm>
+          <a:prstGeom xmlns:a="http://schemas.openxmlformats.org/drawingml/2006/main" prst="rect">
+            <a:avLst/>
+          </a:prstGeom>
+          <a:noFill xmlns:a="http://schemas.openxmlformats.org/drawingml/2006/main"/>
+        </p:spPr>
+        <p:txBody>
+          <a:bodyPr xmlns:a="http://schemas.openxmlformats.org/drawingml/2006/main" wrap="square" lIns="0" tIns="0" rIns="0" bIns="0" anchor="ctr"/>
+          <a:lstStyle xmlns:a="http://schemas.openxmlformats.org/drawingml/2006/main"/>
+          <a:p xmlns:a="http://schemas.openxmlformats.org/drawingml/2006/main">
+            <a:pPr marL="0" indent="0">
+              <a:buNone/>
+            </a:pPr>
+            <a:r>
+              <a:rPr sz="1050">
+                <a:solidFill>
+                  <a:srgbClr val="D2E4CE"/>
+                </a:solidFill>
+                <a:latin typeface="Calibri"/>
+                <a:ea typeface="Calibri"/>
+                <a:cs typeface="Calibri"/>
+              </a:rPr>
+              <a:t>Brown Jasmine Rice, w oil</a:t>
+            </a:r>
+            <a:endParaRPr sz="1050"/>
+          </a:p>
+        </p:txBody>
+      </p:sp>
+      <p:sp>
+        <p:nvSpPr>
+          <p:cNvPr id="16" name="Text 14">
+            <a:extLst xmlns:a="http://schemas.openxmlformats.org/drawingml/2006/main">
+              <a:ext uri="{FF2B5EF4-FFF2-40B4-BE49-F238E27FC236}">
+                <a16:creationId xmlns:a16="http://schemas.microsoft.com/office/drawing/2014/main" id="{3F159060-DCDF-44CC-8B6D-02E8ED33BA8F}"/>
+              </a:ext>
+            </a:extLst>
+          </p:cNvPr>
+          <p:cNvSpPr>
+            <a:spLocks xmlns:a="http://schemas.openxmlformats.org/drawingml/2006/main" noGrp="1"/>
+          </p:cNvSpPr>
+          <p:nvPr/>
+        </p:nvSpPr>
+        <p:spPr>
+          <a:xfrm xmlns:a="http://schemas.openxmlformats.org/drawingml/2006/main">
+            <a:off x="2971800" y="4384548"/>
+            <a:ext cx="4023360" cy="256032"/>
+          </a:xfrm>
+          <a:prstGeom xmlns:a="http://schemas.openxmlformats.org/drawingml/2006/main" prst="rect">
+            <a:avLst/>
+          </a:prstGeom>
+          <a:noFill xmlns:a="http://schemas.openxmlformats.org/drawingml/2006/main"/>
+        </p:spPr>
+        <p:txBody>
+          <a:bodyPr xmlns:a="http://schemas.openxmlformats.org/drawingml/2006/main" wrap="square" lIns="0" tIns="0" rIns="0" bIns="0" anchor="ctr"/>
+          <a:lstStyle xmlns:a="http://schemas.openxmlformats.org/drawingml/2006/main"/>
+          <a:p xmlns:a="http://schemas.openxmlformats.org/drawingml/2006/main">
+            <a:pPr marL="0" indent="0">
+              <a:buNone/>
+            </a:pPr>
+            <a:r>
+              <a:rPr sz="1150" b="1">
+                <a:solidFill>
+                  <a:srgbClr val="FCF9F0"/>
+                </a:solidFill>
+                <a:latin typeface="Calibri"/>
+                <a:ea typeface="Calibri"/>
+                <a:cs typeface="Calibri"/>
+              </a:rPr>
+              <a:t>доступно</a:t>
+            </a:r>
+            <a:endParaRPr sz="1150"/>
+          </a:p>
+        </p:txBody>
+      </p:sp>
+      <p:sp>
+        <p:nvSpPr>
+          <p:cNvPr id="17" name="Text 15">
+            <a:extLst xmlns:a="http://schemas.openxmlformats.org/drawingml/2006/main">
+              <a:ext uri="{FF2B5EF4-FFF2-40B4-BE49-F238E27FC236}">
+                <a16:creationId xmlns:a16="http://schemas.microsoft.com/office/drawing/2014/main" id="{387B55C1-5453-4641-8FEE-2A2600E80415}"/>
+              </a:ext>
+            </a:extLst>
+          </p:cNvPr>
+          <p:cNvSpPr>
+            <a:spLocks xmlns:a="http://schemas.openxmlformats.org/drawingml/2006/main" noGrp="1"/>
+          </p:cNvSpPr>
+          <p:nvPr/>
+        </p:nvSpPr>
+        <p:spPr>
+          <a:xfrm xmlns:a="http://schemas.openxmlformats.org/drawingml/2006/main">
+            <a:off x="841248" y="4718304"/>
+            <a:ext cx="2103120" cy="256032"/>
+          </a:xfrm>
+          <a:prstGeom xmlns:a="http://schemas.openxmlformats.org/drawingml/2006/main" prst="rect">
+            <a:avLst/>
+          </a:prstGeom>
+          <a:noFill xmlns:a="http://schemas.openxmlformats.org/drawingml/2006/main"/>
+        </p:spPr>
+        <p:txBody>
+          <a:bodyPr xmlns:a="http://schemas.openxmlformats.org/drawingml/2006/main" wrap="square" lIns="0" tIns="0" rIns="0" bIns="0" anchor="ctr"/>
+          <a:lstStyle xmlns:a="http://schemas.openxmlformats.org/drawingml/2006/main"/>
+          <a:p xmlns:a="http://schemas.openxmlformats.org/drawingml/2006/main">
+            <a:pPr marL="0" indent="0">
+              <a:buNone/>
+            </a:pPr>
+            <a:r>
+              <a:rPr sz="1050">
+                <a:solidFill>
+                  <a:srgbClr val="D2E4CE"/>
+                </a:solidFill>
+                <a:latin typeface="Calibri"/>
+                <a:ea typeface="Calibri"/>
+                <a:cs typeface="Calibri"/>
+              </a:rPr>
+              <a:t>Brown Rice, w oil</a:t>
+            </a:r>
+            <a:endParaRPr sz="1050"/>
+          </a:p>
+        </p:txBody>
+      </p:sp>
+      <p:sp>
+        <p:nvSpPr>
+          <p:cNvPr id="18" name="Text 16">
+            <a:extLst xmlns:a="http://schemas.openxmlformats.org/drawingml/2006/main">
+              <a:ext uri="{FF2B5EF4-FFF2-40B4-BE49-F238E27FC236}">
+                <a16:creationId xmlns:a16="http://schemas.microsoft.com/office/drawing/2014/main" id="{E5BCD84D-F4E9-40F7-AA7D-85E5A9A7C865}"/>
+              </a:ext>
+            </a:extLst>
+          </p:cNvPr>
+          <p:cNvSpPr>
+            <a:spLocks xmlns:a="http://schemas.openxmlformats.org/drawingml/2006/main" noGrp="1"/>
+          </p:cNvSpPr>
+          <p:nvPr/>
+        </p:nvSpPr>
+        <p:spPr>
+          <a:xfrm xmlns:a="http://schemas.openxmlformats.org/drawingml/2006/main">
+            <a:off x="2971800" y="4718304"/>
+            <a:ext cx="4023360" cy="256032"/>
+          </a:xfrm>
+          <a:prstGeom xmlns:a="http://schemas.openxmlformats.org/drawingml/2006/main" prst="rect">
+            <a:avLst/>
+          </a:prstGeom>
+          <a:noFill xmlns:a="http://schemas.openxmlformats.org/drawingml/2006/main"/>
+        </p:spPr>
+        <p:txBody>
+          <a:bodyPr xmlns:a="http://schemas.openxmlformats.org/drawingml/2006/main" wrap="square" lIns="0" tIns="0" rIns="0" bIns="0" anchor="ctr"/>
+          <a:lstStyle xmlns:a="http://schemas.openxmlformats.org/drawingml/2006/main"/>
+          <a:p xmlns:a="http://schemas.openxmlformats.org/drawingml/2006/main">
+            <a:pPr marL="0" indent="0">
+              <a:buNone/>
+            </a:pPr>
+            <a:r>
+              <a:rPr sz="1150" b="1">
+                <a:solidFill>
+                  <a:srgbClr val="FCF9F0"/>
+                </a:solidFill>
+                <a:latin typeface="Calibri"/>
+                <a:ea typeface="Calibri"/>
+                <a:cs typeface="Calibri"/>
+              </a:rPr>
+              <a:t>доступно</a:t>
+            </a:r>
+            <a:endParaRPr sz="1150"/>
+          </a:p>
+        </p:txBody>
+      </p:sp>
+      <p:sp>
+        <p:nvSpPr>
+          <p:cNvPr id="19" name="Text 17">
+            <a:extLst xmlns:a="http://schemas.openxmlformats.org/drawingml/2006/main">
+              <a:ext uri="{FF2B5EF4-FFF2-40B4-BE49-F238E27FC236}">
+                <a16:creationId xmlns:a16="http://schemas.microsoft.com/office/drawing/2014/main" id="{9CD79870-7EED-40F1-B03F-865D47193057}"/>
+              </a:ext>
+            </a:extLst>
+          </p:cNvPr>
+          <p:cNvSpPr>
+            <a:spLocks xmlns:a="http://schemas.openxmlformats.org/drawingml/2006/main" noGrp="1"/>
+          </p:cNvSpPr>
+          <p:nvPr/>
+        </p:nvSpPr>
+        <p:spPr>
+          <a:xfrm xmlns:a="http://schemas.openxmlformats.org/drawingml/2006/main">
+            <a:off x="841248" y="5052060"/>
+            <a:ext cx="2103120" cy="256032"/>
+          </a:xfrm>
+          <a:prstGeom xmlns:a="http://schemas.openxmlformats.org/drawingml/2006/main" prst="rect">
+            <a:avLst/>
+          </a:prstGeom>
+          <a:noFill xmlns:a="http://schemas.openxmlformats.org/drawingml/2006/main"/>
+        </p:spPr>
+        <p:txBody>
+          <a:bodyPr xmlns:a="http://schemas.openxmlformats.org/drawingml/2006/main" wrap="square" lIns="0" tIns="0" rIns="0" bIns="0" anchor="ctr"/>
+          <a:lstStyle xmlns:a="http://schemas.openxmlformats.org/drawingml/2006/main"/>
+          <a:p xmlns:a="http://schemas.openxmlformats.org/drawingml/2006/main">
+            <a:pPr marL="0" indent="0">
+              <a:buNone/>
+            </a:pPr>
+            <a:r>
+              <a:rPr sz="1050">
+                <a:solidFill>
+                  <a:srgbClr val="D2E4CE"/>
+                </a:solidFill>
+                <a:latin typeface="Calibri"/>
+                <a:ea typeface="Calibri"/>
+                <a:cs typeface="Calibri"/>
+              </a:rPr>
+              <a:t>Basmati Rice*, w oil</a:t>
+            </a:r>
+            <a:endParaRPr sz="1050"/>
+          </a:p>
+        </p:txBody>
+      </p:sp>
+      <p:sp>
+        <p:nvSpPr>
+          <p:cNvPr id="20" name="Text 18">
+            <a:extLst xmlns:a="http://schemas.openxmlformats.org/drawingml/2006/main">
+              <a:ext uri="{FF2B5EF4-FFF2-40B4-BE49-F238E27FC236}">
+                <a16:creationId xmlns:a16="http://schemas.microsoft.com/office/drawing/2014/main" id="{9696F0F8-6388-458A-9A6E-BD09F3ACBA30}"/>
+              </a:ext>
+            </a:extLst>
+          </p:cNvPr>
+          <p:cNvSpPr>
+            <a:spLocks xmlns:a="http://schemas.openxmlformats.org/drawingml/2006/main" noGrp="1"/>
+          </p:cNvSpPr>
+          <p:nvPr/>
+        </p:nvSpPr>
+        <p:spPr>
+          <a:xfrm xmlns:a="http://schemas.openxmlformats.org/drawingml/2006/main">
+            <a:off x="2971800" y="5052060"/>
+            <a:ext cx="4023360" cy="256032"/>
+          </a:xfrm>
+          <a:prstGeom xmlns:a="http://schemas.openxmlformats.org/drawingml/2006/main" prst="rect">
+            <a:avLst/>
+          </a:prstGeom>
+          <a:noFill xmlns:a="http://schemas.openxmlformats.org/drawingml/2006/main"/>
+        </p:spPr>
+        <p:txBody>
+          <a:bodyPr xmlns:a="http://schemas.openxmlformats.org/drawingml/2006/main" wrap="square" lIns="0" tIns="0" rIns="0" bIns="0" anchor="ctr"/>
+          <a:lstStyle xmlns:a="http://schemas.openxmlformats.org/drawingml/2006/main"/>
+          <a:p xmlns:a="http://schemas.openxmlformats.org/drawingml/2006/main">
+            <a:pPr marL="0" indent="0">
+              <a:buNone/>
+            </a:pPr>
+            <a:r>
+              <a:rPr sz="1150" b="1">
+                <a:solidFill>
+                  <a:srgbClr val="FCF9F0"/>
+                </a:solidFill>
+                <a:latin typeface="Calibri"/>
+                <a:ea typeface="Calibri"/>
+                <a:cs typeface="Calibri"/>
+              </a:rPr>
+              <a:t>доступно</a:t>
+            </a:r>
+            <a:endParaRPr sz="1150"/>
+          </a:p>
+        </p:txBody>
+      </p:sp>
+      <p:sp>
+        <p:nvSpPr>
+          <p:cNvPr id="21" name="Text 19">
+            <a:extLst xmlns:a="http://schemas.openxmlformats.org/drawingml/2006/main">
+              <a:ext uri="{FF2B5EF4-FFF2-40B4-BE49-F238E27FC236}">
+                <a16:creationId xmlns:a16="http://schemas.microsoft.com/office/drawing/2014/main" id="{13A8E69A-5D22-455F-8007-BE2ECE9342F0}"/>
+              </a:ext>
+            </a:extLst>
+          </p:cNvPr>
+          <p:cNvSpPr>
+            <a:spLocks xmlns:a="http://schemas.openxmlformats.org/drawingml/2006/main" noGrp="1"/>
+          </p:cNvSpPr>
+          <p:nvPr/>
+        </p:nvSpPr>
+        <p:spPr>
+          <a:xfrm xmlns:a="http://schemas.openxmlformats.org/drawingml/2006/main">
+            <a:off x="841248" y="5385816"/>
+            <a:ext cx="2103120" cy="256032"/>
+          </a:xfrm>
+          <a:prstGeom xmlns:a="http://schemas.openxmlformats.org/drawingml/2006/main" prst="rect">
+            <a:avLst/>
+          </a:prstGeom>
+          <a:noFill xmlns:a="http://schemas.openxmlformats.org/drawingml/2006/main"/>
+        </p:spPr>
+        <p:txBody>
+          <a:bodyPr xmlns:a="http://schemas.openxmlformats.org/drawingml/2006/main" wrap="square" lIns="0" tIns="0" rIns="0" bIns="0" anchor="ctr"/>
+          <a:lstStyle xmlns:a="http://schemas.openxmlformats.org/drawingml/2006/main"/>
+          <a:p xmlns:a="http://schemas.openxmlformats.org/drawingml/2006/main">
+            <a:pPr marL="0" indent="0">
+              <a:buNone/>
+            </a:pPr>
+            <a:r>
+              <a:rPr sz="1050">
+                <a:solidFill>
+                  <a:srgbClr val="D2E4CE"/>
+                </a:solidFill>
+                <a:latin typeface="Calibri"/>
+                <a:ea typeface="Calibri"/>
+                <a:cs typeface="Calibri"/>
+              </a:rPr>
+              <a:t>Long Grain, w oil</a:t>
+            </a:r>
+            <a:endParaRPr sz="1050"/>
+          </a:p>
+        </p:txBody>
+      </p:sp>
+      <p:sp>
+        <p:nvSpPr>
+          <p:cNvPr id="22" name="Text 20">
+            <a:extLst xmlns:a="http://schemas.openxmlformats.org/drawingml/2006/main">
+              <a:ext uri="{FF2B5EF4-FFF2-40B4-BE49-F238E27FC236}">
+                <a16:creationId xmlns:a16="http://schemas.microsoft.com/office/drawing/2014/main" id="{0F71CE83-5380-4313-A831-A097BEC1C816}"/>
+              </a:ext>
+            </a:extLst>
+          </p:cNvPr>
+          <p:cNvSpPr>
+            <a:spLocks xmlns:a="http://schemas.openxmlformats.org/drawingml/2006/main" noGrp="1"/>
+          </p:cNvSpPr>
+          <p:nvPr/>
+        </p:nvSpPr>
+        <p:spPr>
+          <a:xfrm xmlns:a="http://schemas.openxmlformats.org/drawingml/2006/main">
+            <a:off x="2971800" y="5385816"/>
+            <a:ext cx="4023360" cy="256032"/>
+          </a:xfrm>
+          <a:prstGeom xmlns:a="http://schemas.openxmlformats.org/drawingml/2006/main" prst="rect">
+            <a:avLst/>
+          </a:prstGeom>
+          <a:noFill xmlns:a="http://schemas.openxmlformats.org/drawingml/2006/main"/>
+        </p:spPr>
+        <p:txBody>
+          <a:bodyPr xmlns:a="http://schemas.openxmlformats.org/drawingml/2006/main" wrap="square" lIns="0" tIns="0" rIns="0" bIns="0" anchor="ctr"/>
+          <a:lstStyle xmlns:a="http://schemas.openxmlformats.org/drawingml/2006/main"/>
+          <a:p xmlns:a="http://schemas.openxmlformats.org/drawingml/2006/main">
+            <a:pPr marL="0" indent="0">
+              <a:buNone/>
+            </a:pPr>
+            <a:r>
+              <a:rPr sz="1150" b="1">
+                <a:solidFill>
+                  <a:srgbClr val="FCF9F0"/>
+                </a:solidFill>
+                <a:latin typeface="Calibri"/>
+                <a:ea typeface="Calibri"/>
+                <a:cs typeface="Calibri"/>
+              </a:rPr>
+              <a:t>доступно</a:t>
+            </a:r>
+            <a:endParaRPr sz="1150"/>
+          </a:p>
+        </p:txBody>
+      </p:sp>
+      <p:pic>
+        <p:nvPicPr>
+          <p:cNvPr id="61" name="Picture 34"/>
+          <p:cNvPicPr>
+            <a:picLocks xmlns:a="http://schemas.openxmlformats.org/drawingml/2006/main" noChangeAspect="1"/>
+          </p:cNvPicPr>
+          <p:nvPr/>
+        </p:nvPicPr>
+        <p:blipFill>
+          <a:blip xmlns:r="http://schemas.openxmlformats.org/officeDocument/2006/relationships" xmlns:a="http://schemas.openxmlformats.org/drawingml/2006/main" r:embed="R5f5ac99bb7944fca"/>
+          <a:srcRect xmlns:a="http://schemas.openxmlformats.org/drawingml/2006/main"/>
+          <a:stretch xmlns:a="http://schemas.openxmlformats.org/drawingml/2006/main">
+            <a:fillRect l="0" t="0" r="0" b="0"/>
+          </a:stretch>
+        </p:blipFill>
+        <p:spPr>
+          <a:xfrm xmlns:a="http://schemas.openxmlformats.org/drawingml/2006/main">
+            <a:off x="7534656" y="1536192"/>
+            <a:ext cx="4096512" cy="2834640"/>
+          </a:xfrm>
+          <a:prstGeom xmlns:a="http://schemas.openxmlformats.org/drawingml/2006/main" prst="roundRect">
+            <a:avLst/>
+          </a:prstGeom>
+        </p:spPr>
+      </p:pic>
+      <p:sp>
+        <p:nvSpPr>
+          <p:cNvPr id="24" name="Shape 21">
+            <a:extLst xmlns:a="http://schemas.openxmlformats.org/drawingml/2006/main">
+              <a:ext uri="{FF2B5EF4-FFF2-40B4-BE49-F238E27FC236}">
+                <a16:creationId xmlns:a16="http://schemas.microsoft.com/office/drawing/2014/main" id="{7366CF28-1B6D-49C3-946A-65C3FD0C8631}"/>
+              </a:ext>
+            </a:extLst>
+          </p:cNvPr>
+          <p:cNvSpPr>
+            <a:spLocks xmlns:a="http://schemas.openxmlformats.org/drawingml/2006/main" noGrp="1"/>
+          </p:cNvSpPr>
+          <p:nvPr/>
+        </p:nvSpPr>
+        <p:spPr>
+          <a:xfrm xmlns:a="http://schemas.openxmlformats.org/drawingml/2006/main">
+            <a:off x="7534656" y="1536192"/>
+            <a:ext cx="4096512" cy="2834640"/>
+          </a:xfrm>
+          <a:prstGeom xmlns:a="http://schemas.openxmlformats.org/drawingml/2006/main" prst="rect">
+            <a:avLst/>
+          </a:prstGeom>
+          <a:ln xmlns:a="http://schemas.openxmlformats.org/drawingml/2006/main" w="15875">
             <a:solidFill>
               <a:srgbClr val="C89C40"/>
             </a:solidFill>
@@ -15117,665 +15838,26 @@
       </p:sp>
       <p:sp>
         <p:nvSpPr>
-          <p:cNvPr id="8" name="Shape 5">
-            <a:extLst xmlns:a="http://schemas.openxmlformats.org/drawingml/2006/main">
-              <a:ext uri="{FF2B5EF4-FFF2-40B4-BE49-F238E27FC236}">
-                <a16:creationId xmlns:a16="http://schemas.microsoft.com/office/drawing/2014/main" id="{30459869-F0AC-4806-A6A5-9985DB86A96E}"/>
-              </a:ext>
-            </a:extLst>
-          </p:cNvPr>
-          <p:cNvSpPr>
-            <a:spLocks xmlns:a="http://schemas.openxmlformats.org/drawingml/2006/main" noGrp="1"/>
-          </p:cNvSpPr>
-          <p:nvPr/>
-        </p:nvSpPr>
-        <p:spPr>
-          <a:xfrm xmlns:a="http://schemas.openxmlformats.org/drawingml/2006/main">
-            <a:off x="749808" y="3611880"/>
-            <a:ext cx="1417320" cy="237744"/>
+          <p:cNvPr id="25" name="Shape 22">
+            <a:extLst xmlns:a="http://schemas.openxmlformats.org/drawingml/2006/main">
+              <a:ext uri="{FF2B5EF4-FFF2-40B4-BE49-F238E27FC236}">
+                <a16:creationId xmlns:a16="http://schemas.microsoft.com/office/drawing/2014/main" id="{831A629E-B7E5-4A9F-8D0C-CEFC366EAB2E}"/>
+              </a:ext>
+            </a:extLst>
+          </p:cNvPr>
+          <p:cNvSpPr>
+            <a:spLocks xmlns:a="http://schemas.openxmlformats.org/drawingml/2006/main" noGrp="1"/>
+          </p:cNvSpPr>
+          <p:nvPr/>
+        </p:nvSpPr>
+        <p:spPr>
+          <a:xfrm xmlns:a="http://schemas.openxmlformats.org/drawingml/2006/main">
+            <a:off x="7534656" y="4526280"/>
+            <a:ext cx="4096512" cy="484632"/>
           </a:xfrm>
           <a:prstGeom xmlns:a="http://schemas.openxmlformats.org/drawingml/2006/main" prst="roundRect">
             <a:avLst>
-              <a:gd name="adj" fmla="val 23077"/>
-            </a:avLst>
-          </a:prstGeom>
-          <a:solidFill xmlns:a="http://schemas.openxmlformats.org/drawingml/2006/main">
-            <a:srgbClr val="B0762A"/>
-          </a:solidFill>
-          <a:ln xmlns:a="http://schemas.openxmlformats.org/drawingml/2006/main" w="6350">
-            <a:solidFill>
-              <a:srgbClr val="C89C40"/>
-            </a:solidFill>
-            <a:prstDash val="solid"/>
-          </a:ln>
-        </p:spPr>
-        <p:txBody>
-          <a:bodyPr xmlns:a="http://schemas.openxmlformats.org/drawingml/2006/main"/>
-          <a:lstStyle xmlns:a="http://schemas.openxmlformats.org/drawingml/2006/main"/>
-          <a:p xmlns:a="http://schemas.openxmlformats.org/drawingml/2006/main">
-            <a:endParaRPr/>
-          </a:p>
-        </p:txBody>
-      </p:sp>
-      <p:sp>
-        <p:nvSpPr>
-          <p:cNvPr id="9" name="Text 6">
-            <a:extLst xmlns:a="http://schemas.openxmlformats.org/drawingml/2006/main">
-              <a:ext uri="{FF2B5EF4-FFF2-40B4-BE49-F238E27FC236}">
-                <a16:creationId xmlns:a16="http://schemas.microsoft.com/office/drawing/2014/main" id="{740FE40E-3AFF-44AA-822A-DF0305CB94F6}"/>
-              </a:ext>
-            </a:extLst>
-          </p:cNvPr>
-          <p:cNvSpPr>
-            <a:spLocks xmlns:a="http://schemas.openxmlformats.org/drawingml/2006/main" noGrp="1"/>
-          </p:cNvSpPr>
-          <p:nvPr/>
-        </p:nvSpPr>
-        <p:spPr>
-          <a:xfrm xmlns:a="http://schemas.openxmlformats.org/drawingml/2006/main">
-            <a:off x="749808" y="3621024"/>
-            <a:ext cx="1417320" cy="219456"/>
-          </a:xfrm>
-          <a:prstGeom xmlns:a="http://schemas.openxmlformats.org/drawingml/2006/main" prst="rect">
-            <a:avLst/>
-          </a:prstGeom>
-          <a:noFill xmlns:a="http://schemas.openxmlformats.org/drawingml/2006/main"/>
-        </p:spPr>
-        <p:txBody>
-          <a:bodyPr xmlns:a="http://schemas.openxmlformats.org/drawingml/2006/main" wrap="square" lIns="0" tIns="0" rIns="0" bIns="0" anchor="ctr"/>
-          <a:lstStyle xmlns:a="http://schemas.openxmlformats.org/drawingml/2006/main"/>
-          <a:p xmlns:a="http://schemas.openxmlformats.org/drawingml/2006/main">
-            <a:pPr marL="0" indent="0" algn="ctr">
-              <a:buNone/>
-            </a:pPr>
-            <a:r>
-              <a:rPr sz="850" b="1" spc="60">
-                <a:solidFill>
-                  <a:srgbClr val="FFFFFF"/>
-                </a:solidFill>
-                <a:latin typeface="Calibri"/>
-                <a:ea typeface="Calibri"/>
-                <a:cs typeface="Calibri"/>
-              </a:rPr>
-              <a:t>CUP 150 Г · W/O OIL</a:t>
-            </a:r>
-            <a:endParaRPr sz="850"/>
-          </a:p>
-        </p:txBody>
-      </p:sp>
-      <p:sp>
-        <p:nvSpPr>
-          <p:cNvPr id="10" name="Text 7">
-            <a:extLst xmlns:a="http://schemas.openxmlformats.org/drawingml/2006/main">
-              <a:ext uri="{FF2B5EF4-FFF2-40B4-BE49-F238E27FC236}">
-                <a16:creationId xmlns:a16="http://schemas.microsoft.com/office/drawing/2014/main" id="{3634DF81-CF5A-42FF-B295-D79E46794514}"/>
-              </a:ext>
-            </a:extLst>
-          </p:cNvPr>
-          <p:cNvSpPr>
-            <a:spLocks xmlns:a="http://schemas.openxmlformats.org/drawingml/2006/main" noGrp="1"/>
-          </p:cNvSpPr>
-          <p:nvPr/>
-        </p:nvSpPr>
-        <p:spPr>
-          <a:xfrm xmlns:a="http://schemas.openxmlformats.org/drawingml/2006/main">
-            <a:off x="749808" y="3931920"/>
-            <a:ext cx="2340864" cy="548640"/>
-          </a:xfrm>
-          <a:prstGeom xmlns:a="http://schemas.openxmlformats.org/drawingml/2006/main" prst="rect">
-            <a:avLst/>
-          </a:prstGeom>
-          <a:noFill xmlns:a="http://schemas.openxmlformats.org/drawingml/2006/main"/>
-        </p:spPr>
-        <p:txBody>
-          <a:bodyPr xmlns:a="http://schemas.openxmlformats.org/drawingml/2006/main" wrap="square" lIns="0" tIns="0" rIns="0" bIns="0" anchor="t"/>
-          <a:lstStyle xmlns:a="http://schemas.openxmlformats.org/drawingml/2006/main"/>
-          <a:p xmlns:a="http://schemas.openxmlformats.org/drawingml/2006/main">
-            <a:pPr marL="0" indent="0">
-              <a:buNone/>
-            </a:pPr>
-            <a:r>
-              <a:rPr sz="1450" b="1">
-                <a:solidFill>
-                  <a:srgbClr val="FFFFFF"/>
-                </a:solidFill>
-                <a:latin typeface="Cambria"/>
-                <a:ea typeface="Cambria"/>
-                <a:cs typeface="Cambria"/>
-              </a:rPr>
-              <a:t>Brown Jasmine Rice
-with Red Quinoa</a:t>
-            </a:r>
-            <a:endParaRPr sz="1450"/>
-          </a:p>
-        </p:txBody>
-      </p:sp>
-      <p:sp>
-        <p:nvSpPr>
-          <p:cNvPr id="11" name="Text 8">
-            <a:extLst xmlns:a="http://schemas.openxmlformats.org/drawingml/2006/main">
-              <a:ext uri="{FF2B5EF4-FFF2-40B4-BE49-F238E27FC236}">
-                <a16:creationId xmlns:a16="http://schemas.microsoft.com/office/drawing/2014/main" id="{25EE9D78-55FB-4825-A4EC-1CE5288481C3}"/>
-              </a:ext>
-            </a:extLst>
-          </p:cNvPr>
-          <p:cNvSpPr>
-            <a:spLocks xmlns:a="http://schemas.openxmlformats.org/drawingml/2006/main" noGrp="1"/>
-          </p:cNvSpPr>
-          <p:nvPr/>
-        </p:nvSpPr>
-        <p:spPr>
-          <a:xfrm xmlns:a="http://schemas.openxmlformats.org/drawingml/2006/main">
-            <a:off x="749808" y="4498848"/>
-            <a:ext cx="2340864" cy="237744"/>
-          </a:xfrm>
-          <a:prstGeom xmlns:a="http://schemas.openxmlformats.org/drawingml/2006/main" prst="rect">
-            <a:avLst/>
-          </a:prstGeom>
-          <a:noFill xmlns:a="http://schemas.openxmlformats.org/drawingml/2006/main"/>
-        </p:spPr>
-        <p:txBody>
-          <a:bodyPr xmlns:a="http://schemas.openxmlformats.org/drawingml/2006/main" wrap="square" lIns="0" tIns="0" rIns="0" bIns="0" anchor="ctr"/>
-          <a:lstStyle xmlns:a="http://schemas.openxmlformats.org/drawingml/2006/main"/>
-          <a:p xmlns:a="http://schemas.openxmlformats.org/drawingml/2006/main">
-            <a:pPr marL="0" indent="0">
-              <a:buNone/>
-            </a:pPr>
-            <a:r>
-              <a:rPr sz="1000">
-                <a:solidFill>
-                  <a:srgbClr val="D2E4CE"/>
-                </a:solidFill>
-                <a:latin typeface="Calibri"/>
-                <a:ea typeface="Calibri"/>
-                <a:cs typeface="Calibri"/>
-              </a:rPr>
-              <a:t>Single Cup · Sleeve Box</a:t>
-            </a:r>
-            <a:endParaRPr sz="1000"/>
-          </a:p>
-        </p:txBody>
-      </p:sp>
-      <p:sp>
-        <p:nvSpPr>
-          <p:cNvPr id="12" name="Shape 9">
-            <a:extLst xmlns:a="http://schemas.openxmlformats.org/drawingml/2006/main">
-              <a:ext uri="{FF2B5EF4-FFF2-40B4-BE49-F238E27FC236}">
-                <a16:creationId xmlns:a16="http://schemas.microsoft.com/office/drawing/2014/main" id="{B8161C34-47AF-4A98-91ED-6E1E141D9701}"/>
-              </a:ext>
-            </a:extLst>
-          </p:cNvPr>
-          <p:cNvSpPr>
-            <a:spLocks xmlns:a="http://schemas.openxmlformats.org/drawingml/2006/main" noGrp="1"/>
-          </p:cNvSpPr>
-          <p:nvPr/>
-        </p:nvSpPr>
-        <p:spPr>
-          <a:xfrm xmlns:a="http://schemas.openxmlformats.org/drawingml/2006/main">
-            <a:off x="749808" y="4791456"/>
-            <a:ext cx="2340864" cy="1170432"/>
-          </a:xfrm>
-          <a:prstGeom xmlns:a="http://schemas.openxmlformats.org/drawingml/2006/main" prst="roundRect">
-            <a:avLst>
-              <a:gd name="adj" fmla="val 5469"/>
-            </a:avLst>
-          </a:prstGeom>
-          <a:solidFill xmlns:a="http://schemas.openxmlformats.org/drawingml/2006/main">
-            <a:srgbClr val="1A5433">
-              <a:alpha val="92000"/>
-            </a:srgbClr>
-          </a:solidFill>
-          <a:ln xmlns:a="http://schemas.openxmlformats.org/drawingml/2006/main" w="9525">
-            <a:solidFill>
-              <a:srgbClr val="C89C40"/>
-            </a:solidFill>
-            <a:prstDash val="solid"/>
-          </a:ln>
-        </p:spPr>
-        <p:txBody>
-          <a:bodyPr xmlns:a="http://schemas.openxmlformats.org/drawingml/2006/main"/>
-          <a:lstStyle xmlns:a="http://schemas.openxmlformats.org/drawingml/2006/main"/>
-          <a:p xmlns:a="http://schemas.openxmlformats.org/drawingml/2006/main">
-            <a:endParaRPr/>
-          </a:p>
-        </p:txBody>
-      </p:sp>
-      <p:sp>
-        <p:nvSpPr>
-          <p:cNvPr id="13" name="Text 10">
-            <a:extLst xmlns:a="http://schemas.openxmlformats.org/drawingml/2006/main">
-              <a:ext uri="{FF2B5EF4-FFF2-40B4-BE49-F238E27FC236}">
-                <a16:creationId xmlns:a16="http://schemas.microsoft.com/office/drawing/2014/main" id="{6D3A29BD-427F-41DD-A67A-208B5804CF15}"/>
-              </a:ext>
-            </a:extLst>
-          </p:cNvPr>
-          <p:cNvSpPr>
-            <a:spLocks xmlns:a="http://schemas.openxmlformats.org/drawingml/2006/main" noGrp="1"/>
-          </p:cNvSpPr>
-          <p:nvPr/>
-        </p:nvSpPr>
-        <p:spPr>
-          <a:xfrm xmlns:a="http://schemas.openxmlformats.org/drawingml/2006/main">
-            <a:off x="859536" y="4855464"/>
-            <a:ext cx="2148840" cy="182880"/>
-          </a:xfrm>
-          <a:prstGeom xmlns:a="http://schemas.openxmlformats.org/drawingml/2006/main" prst="rect">
-            <a:avLst/>
-          </a:prstGeom>
-          <a:noFill xmlns:a="http://schemas.openxmlformats.org/drawingml/2006/main"/>
-        </p:spPr>
-        <p:txBody>
-          <a:bodyPr xmlns:a="http://schemas.openxmlformats.org/drawingml/2006/main" wrap="square" lIns="0" tIns="0" rIns="0" bIns="0" anchor="ctr"/>
-          <a:lstStyle xmlns:a="http://schemas.openxmlformats.org/drawingml/2006/main"/>
-          <a:p xmlns:a="http://schemas.openxmlformats.org/drawingml/2006/main">
-            <a:pPr marL="0" indent="0">
-              <a:buNone/>
-            </a:pPr>
-            <a:r>
-              <a:rPr sz="750" b="1" spc="100">
-                <a:solidFill>
-                  <a:srgbClr val="F5CE76"/>
-                </a:solidFill>
-                <a:latin typeface="Calibri"/>
-                <a:ea typeface="Calibri"/>
-                <a:cs typeface="Calibri"/>
-              </a:rPr>
-              <a:t>ПАРАМЕТРИ УПАКОВКИ</a:t>
-            </a:r>
-            <a:endParaRPr sz="750"/>
-          </a:p>
-        </p:txBody>
-      </p:sp>
-      <p:sp>
-        <p:nvSpPr>
-          <p:cNvPr id="14" name="Text 11">
-            <a:extLst xmlns:a="http://schemas.openxmlformats.org/drawingml/2006/main">
-              <a:ext uri="{FF2B5EF4-FFF2-40B4-BE49-F238E27FC236}">
-                <a16:creationId xmlns:a16="http://schemas.microsoft.com/office/drawing/2014/main" id="{DF225FD2-5DF4-4E27-A0C2-ED5225E2FD54}"/>
-              </a:ext>
-            </a:extLst>
-          </p:cNvPr>
-          <p:cNvSpPr>
-            <a:spLocks xmlns:a="http://schemas.openxmlformats.org/drawingml/2006/main" noGrp="1"/>
-          </p:cNvSpPr>
-          <p:nvPr/>
-        </p:nvSpPr>
-        <p:spPr>
-          <a:xfrm xmlns:a="http://schemas.openxmlformats.org/drawingml/2006/main">
-            <a:off x="859536" y="5056632"/>
-            <a:ext cx="658368" cy="192024"/>
-          </a:xfrm>
-          <a:prstGeom xmlns:a="http://schemas.openxmlformats.org/drawingml/2006/main" prst="rect">
-            <a:avLst/>
-          </a:prstGeom>
-          <a:noFill xmlns:a="http://schemas.openxmlformats.org/drawingml/2006/main"/>
-        </p:spPr>
-        <p:txBody>
-          <a:bodyPr xmlns:a="http://schemas.openxmlformats.org/drawingml/2006/main" wrap="square" lIns="0" tIns="0" rIns="0" bIns="0" anchor="ctr"/>
-          <a:lstStyle xmlns:a="http://schemas.openxmlformats.org/drawingml/2006/main"/>
-          <a:p xmlns:a="http://schemas.openxmlformats.org/drawingml/2006/main">
-            <a:pPr marL="0" indent="0">
-              <a:buNone/>
-            </a:pPr>
-            <a:r>
-              <a:rPr sz="900">
-                <a:solidFill>
-                  <a:srgbClr val="D2E4CE"/>
-                </a:solidFill>
-                <a:latin typeface="Calibri"/>
-                <a:ea typeface="Calibri"/>
-                <a:cs typeface="Calibri"/>
-              </a:rPr>
-              <a:t>Формат</a:t>
-            </a:r>
-            <a:endParaRPr sz="900"/>
-          </a:p>
-        </p:txBody>
-      </p:sp>
-      <p:sp>
-        <p:nvSpPr>
-          <p:cNvPr id="15" name="Text 12">
-            <a:extLst xmlns:a="http://schemas.openxmlformats.org/drawingml/2006/main">
-              <a:ext uri="{FF2B5EF4-FFF2-40B4-BE49-F238E27FC236}">
-                <a16:creationId xmlns:a16="http://schemas.microsoft.com/office/drawing/2014/main" id="{CBAEDDDF-B30B-44A8-84D8-1F1351720E53}"/>
-              </a:ext>
-            </a:extLst>
-          </p:cNvPr>
-          <p:cNvSpPr>
-            <a:spLocks xmlns:a="http://schemas.openxmlformats.org/drawingml/2006/main" noGrp="1"/>
-          </p:cNvSpPr>
-          <p:nvPr/>
-        </p:nvSpPr>
-        <p:spPr>
-          <a:xfrm xmlns:a="http://schemas.openxmlformats.org/drawingml/2006/main">
-            <a:off x="1499616" y="5056632"/>
-            <a:ext cx="1508760" cy="192024"/>
-          </a:xfrm>
-          <a:prstGeom xmlns:a="http://schemas.openxmlformats.org/drawingml/2006/main" prst="rect">
-            <a:avLst/>
-          </a:prstGeom>
-          <a:noFill xmlns:a="http://schemas.openxmlformats.org/drawingml/2006/main"/>
-        </p:spPr>
-        <p:txBody>
-          <a:bodyPr xmlns:a="http://schemas.openxmlformats.org/drawingml/2006/main" wrap="square" lIns="0" tIns="0" rIns="0" bIns="0" anchor="ctr"/>
-          <a:lstStyle xmlns:a="http://schemas.openxmlformats.org/drawingml/2006/main"/>
-          <a:p xmlns:a="http://schemas.openxmlformats.org/drawingml/2006/main">
-            <a:pPr marL="0" indent="0" algn="r">
-              <a:buNone/>
-            </a:pPr>
-            <a:r>
-              <a:rPr sz="950">
-                <a:solidFill>
-                  <a:srgbClr val="FCF9F0"/>
-                </a:solidFill>
-                <a:latin typeface="Calibri"/>
-                <a:ea typeface="Calibri"/>
-                <a:cs typeface="Calibri"/>
-              </a:rPr>
-              <a:t>Single Cup</a:t>
-            </a:r>
-            <a:endParaRPr sz="950"/>
-          </a:p>
-        </p:txBody>
-      </p:sp>
-      <p:sp>
-        <p:nvSpPr>
-          <p:cNvPr id="16" name="Text 13">
-            <a:extLst xmlns:a="http://schemas.openxmlformats.org/drawingml/2006/main">
-              <a:ext uri="{FF2B5EF4-FFF2-40B4-BE49-F238E27FC236}">
-                <a16:creationId xmlns:a16="http://schemas.microsoft.com/office/drawing/2014/main" id="{6D2FA2E5-E055-4EED-B764-D8C358F13040}"/>
-              </a:ext>
-            </a:extLst>
-          </p:cNvPr>
-          <p:cNvSpPr>
-            <a:spLocks xmlns:a="http://schemas.openxmlformats.org/drawingml/2006/main" noGrp="1"/>
-          </p:cNvSpPr>
-          <p:nvPr/>
-        </p:nvSpPr>
-        <p:spPr>
-          <a:xfrm xmlns:a="http://schemas.openxmlformats.org/drawingml/2006/main">
-            <a:off x="859536" y="5262372"/>
-            <a:ext cx="658368" cy="192024"/>
-          </a:xfrm>
-          <a:prstGeom xmlns:a="http://schemas.openxmlformats.org/drawingml/2006/main" prst="rect">
-            <a:avLst/>
-          </a:prstGeom>
-          <a:noFill xmlns:a="http://schemas.openxmlformats.org/drawingml/2006/main"/>
-        </p:spPr>
-        <p:txBody>
-          <a:bodyPr xmlns:a="http://schemas.openxmlformats.org/drawingml/2006/main" wrap="square" lIns="0" tIns="0" rIns="0" bIns="0" anchor="ctr"/>
-          <a:lstStyle xmlns:a="http://schemas.openxmlformats.org/drawingml/2006/main"/>
-          <a:p xmlns:a="http://schemas.openxmlformats.org/drawingml/2006/main">
-            <a:pPr marL="0" indent="0">
-              <a:buNone/>
-            </a:pPr>
-            <a:r>
-              <a:rPr sz="900" b="1">
-                <a:solidFill>
-                  <a:srgbClr val="F5CE76"/>
-                </a:solidFill>
-                <a:latin typeface="Calibri"/>
-                <a:ea typeface="Calibri"/>
-                <a:cs typeface="Calibri"/>
-              </a:rPr>
-              <a:t>Вага</a:t>
-            </a:r>
-            <a:endParaRPr sz="900"/>
-          </a:p>
-        </p:txBody>
-      </p:sp>
-      <p:sp>
-        <p:nvSpPr>
-          <p:cNvPr id="17" name="Text 14">
-            <a:extLst xmlns:a="http://schemas.openxmlformats.org/drawingml/2006/main">
-              <a:ext uri="{FF2B5EF4-FFF2-40B4-BE49-F238E27FC236}">
-                <a16:creationId xmlns:a16="http://schemas.microsoft.com/office/drawing/2014/main" id="{3EFA949F-A8B8-4BD8-BEA2-862EF1E9F3A7}"/>
-              </a:ext>
-            </a:extLst>
-          </p:cNvPr>
-          <p:cNvSpPr>
-            <a:spLocks xmlns:a="http://schemas.openxmlformats.org/drawingml/2006/main" noGrp="1"/>
-          </p:cNvSpPr>
-          <p:nvPr/>
-        </p:nvSpPr>
-        <p:spPr>
-          <a:xfrm xmlns:a="http://schemas.openxmlformats.org/drawingml/2006/main">
-            <a:off x="1499616" y="5262372"/>
-            <a:ext cx="1508760" cy="192024"/>
-          </a:xfrm>
-          <a:prstGeom xmlns:a="http://schemas.openxmlformats.org/drawingml/2006/main" prst="rect">
-            <a:avLst/>
-          </a:prstGeom>
-          <a:noFill xmlns:a="http://schemas.openxmlformats.org/drawingml/2006/main"/>
-        </p:spPr>
-        <p:txBody>
-          <a:bodyPr xmlns:a="http://schemas.openxmlformats.org/drawingml/2006/main" wrap="square" lIns="0" tIns="0" rIns="0" bIns="0" anchor="ctr"/>
-          <a:lstStyle xmlns:a="http://schemas.openxmlformats.org/drawingml/2006/main"/>
-          <a:p xmlns:a="http://schemas.openxmlformats.org/drawingml/2006/main">
-            <a:pPr marL="0" indent="0" algn="r">
-              <a:buNone/>
-            </a:pPr>
-            <a:r>
-              <a:rPr sz="950" b="1">
-                <a:solidFill>
-                  <a:srgbClr val="F5CE76"/>
-                </a:solidFill>
-                <a:latin typeface="Calibri"/>
-                <a:ea typeface="Calibri"/>
-                <a:cs typeface="Calibri"/>
-              </a:rPr>
-              <a:t>150 г</a:t>
-            </a:r>
-            <a:endParaRPr sz="950"/>
-          </a:p>
-        </p:txBody>
-      </p:sp>
-      <p:sp>
-        <p:nvSpPr>
-          <p:cNvPr id="18" name="Text 15">
-            <a:extLst xmlns:a="http://schemas.openxmlformats.org/drawingml/2006/main">
-              <a:ext uri="{FF2B5EF4-FFF2-40B4-BE49-F238E27FC236}">
-                <a16:creationId xmlns:a16="http://schemas.microsoft.com/office/drawing/2014/main" id="{9F4E7F66-E648-45BF-B645-840EB5CD86B3}"/>
-              </a:ext>
-            </a:extLst>
-          </p:cNvPr>
-          <p:cNvSpPr>
-            <a:spLocks xmlns:a="http://schemas.openxmlformats.org/drawingml/2006/main" noGrp="1"/>
-          </p:cNvSpPr>
-          <p:nvPr/>
-        </p:nvSpPr>
-        <p:spPr>
-          <a:xfrm xmlns:a="http://schemas.openxmlformats.org/drawingml/2006/main">
-            <a:off x="859536" y="5468112"/>
-            <a:ext cx="658368" cy="192024"/>
-          </a:xfrm>
-          <a:prstGeom xmlns:a="http://schemas.openxmlformats.org/drawingml/2006/main" prst="rect">
-            <a:avLst/>
-          </a:prstGeom>
-          <a:noFill xmlns:a="http://schemas.openxmlformats.org/drawingml/2006/main"/>
-        </p:spPr>
-        <p:txBody>
-          <a:bodyPr xmlns:a="http://schemas.openxmlformats.org/drawingml/2006/main" wrap="square" lIns="0" tIns="0" rIns="0" bIns="0" anchor="ctr"/>
-          <a:lstStyle xmlns:a="http://schemas.openxmlformats.org/drawingml/2006/main"/>
-          <a:p xmlns:a="http://schemas.openxmlformats.org/drawingml/2006/main">
-            <a:pPr marL="0" indent="0">
-              <a:buNone/>
-            </a:pPr>
-            <a:r>
-              <a:rPr sz="900">
-                <a:solidFill>
-                  <a:srgbClr val="D2E4CE"/>
-                </a:solidFill>
-                <a:latin typeface="Calibri"/>
-                <a:ea typeface="Calibri"/>
-                <a:cs typeface="Calibri"/>
-              </a:rPr>
-              <a:t>Короб</a:t>
-            </a:r>
-            <a:endParaRPr sz="900"/>
-          </a:p>
-        </p:txBody>
-      </p:sp>
-      <p:sp>
-        <p:nvSpPr>
-          <p:cNvPr id="19" name="Text 16">
-            <a:extLst xmlns:a="http://schemas.openxmlformats.org/drawingml/2006/main">
-              <a:ext uri="{FF2B5EF4-FFF2-40B4-BE49-F238E27FC236}">
-                <a16:creationId xmlns:a16="http://schemas.microsoft.com/office/drawing/2014/main" id="{03FA87CF-3F1F-407C-97E5-CE3B0D83E714}"/>
-              </a:ext>
-            </a:extLst>
-          </p:cNvPr>
-          <p:cNvSpPr>
-            <a:spLocks xmlns:a="http://schemas.openxmlformats.org/drawingml/2006/main" noGrp="1"/>
-          </p:cNvSpPr>
-          <p:nvPr/>
-        </p:nvSpPr>
-        <p:spPr>
-          <a:xfrm xmlns:a="http://schemas.openxmlformats.org/drawingml/2006/main">
-            <a:off x="1499616" y="5468112"/>
-            <a:ext cx="1508760" cy="192024"/>
-          </a:xfrm>
-          <a:prstGeom xmlns:a="http://schemas.openxmlformats.org/drawingml/2006/main" prst="rect">
-            <a:avLst/>
-          </a:prstGeom>
-          <a:noFill xmlns:a="http://schemas.openxmlformats.org/drawingml/2006/main"/>
-        </p:spPr>
-        <p:txBody>
-          <a:bodyPr xmlns:a="http://schemas.openxmlformats.org/drawingml/2006/main" wrap="square" lIns="0" tIns="0" rIns="0" bIns="0" anchor="ctr"/>
-          <a:lstStyle xmlns:a="http://schemas.openxmlformats.org/drawingml/2006/main"/>
-          <a:p xmlns:a="http://schemas.openxmlformats.org/drawingml/2006/main">
-            <a:pPr marL="0" indent="0" algn="r">
-              <a:buNone/>
-            </a:pPr>
-            <a:r>
-              <a:rPr sz="950">
-                <a:solidFill>
-                  <a:srgbClr val="FCF9F0"/>
-                </a:solidFill>
-                <a:latin typeface="Calibri"/>
-                <a:ea typeface="Calibri"/>
-                <a:cs typeface="Calibri"/>
-              </a:rPr>
-              <a:t>12 шт.</a:t>
-            </a:r>
-            <a:endParaRPr sz="950"/>
-          </a:p>
-        </p:txBody>
-      </p:sp>
-      <p:sp>
-        <p:nvSpPr>
-          <p:cNvPr id="20" name="Text 17">
-            <a:extLst xmlns:a="http://schemas.openxmlformats.org/drawingml/2006/main">
-              <a:ext uri="{FF2B5EF4-FFF2-40B4-BE49-F238E27FC236}">
-                <a16:creationId xmlns:a16="http://schemas.microsoft.com/office/drawing/2014/main" id="{ED686B9D-4A4D-4002-9CDE-77BA53EB1911}"/>
-              </a:ext>
-            </a:extLst>
-          </p:cNvPr>
-          <p:cNvSpPr>
-            <a:spLocks xmlns:a="http://schemas.openxmlformats.org/drawingml/2006/main" noGrp="1"/>
-          </p:cNvSpPr>
-          <p:nvPr/>
-        </p:nvSpPr>
-        <p:spPr>
-          <a:xfrm xmlns:a="http://schemas.openxmlformats.org/drawingml/2006/main">
-            <a:off x="859536" y="5673852"/>
-            <a:ext cx="658368" cy="192024"/>
-          </a:xfrm>
-          <a:prstGeom xmlns:a="http://schemas.openxmlformats.org/drawingml/2006/main" prst="rect">
-            <a:avLst/>
-          </a:prstGeom>
-          <a:noFill xmlns:a="http://schemas.openxmlformats.org/drawingml/2006/main"/>
-        </p:spPr>
-        <p:txBody>
-          <a:bodyPr xmlns:a="http://schemas.openxmlformats.org/drawingml/2006/main" wrap="square" lIns="0" tIns="0" rIns="0" bIns="0" anchor="ctr"/>
-          <a:lstStyle xmlns:a="http://schemas.openxmlformats.org/drawingml/2006/main"/>
-          <a:p xmlns:a="http://schemas.openxmlformats.org/drawingml/2006/main">
-            <a:pPr marL="0" indent="0">
-              <a:buNone/>
-            </a:pPr>
-            <a:r>
-              <a:rPr sz="900">
-                <a:solidFill>
-                  <a:srgbClr val="D2E4CE"/>
-                </a:solidFill>
-                <a:latin typeface="Calibri"/>
-                <a:ea typeface="Calibri"/>
-                <a:cs typeface="Calibri"/>
-              </a:rPr>
-              <a:t>Sleeve</a:t>
-            </a:r>
-            <a:endParaRPr sz="900"/>
-          </a:p>
-        </p:txBody>
-      </p:sp>
-      <p:sp>
-        <p:nvSpPr>
-          <p:cNvPr id="21" name="Text 18">
-            <a:extLst xmlns:a="http://schemas.openxmlformats.org/drawingml/2006/main">
-              <a:ext uri="{FF2B5EF4-FFF2-40B4-BE49-F238E27FC236}">
-                <a16:creationId xmlns:a16="http://schemas.microsoft.com/office/drawing/2014/main" id="{5F1395A1-2F78-48B0-8C30-47BF1137A35B}"/>
-              </a:ext>
-            </a:extLst>
-          </p:cNvPr>
-          <p:cNvSpPr>
-            <a:spLocks xmlns:a="http://schemas.openxmlformats.org/drawingml/2006/main" noGrp="1"/>
-          </p:cNvSpPr>
-          <p:nvPr/>
-        </p:nvSpPr>
-        <p:spPr>
-          <a:xfrm xmlns:a="http://schemas.openxmlformats.org/drawingml/2006/main">
-            <a:off x="1499616" y="5673852"/>
-            <a:ext cx="1508760" cy="192024"/>
-          </a:xfrm>
-          <a:prstGeom xmlns:a="http://schemas.openxmlformats.org/drawingml/2006/main" prst="rect">
-            <a:avLst/>
-          </a:prstGeom>
-          <a:noFill xmlns:a="http://schemas.openxmlformats.org/drawingml/2006/main"/>
-        </p:spPr>
-        <p:txBody>
-          <a:bodyPr xmlns:a="http://schemas.openxmlformats.org/drawingml/2006/main" wrap="square" lIns="0" tIns="0" rIns="0" bIns="0" anchor="ctr"/>
-          <a:lstStyle xmlns:a="http://schemas.openxmlformats.org/drawingml/2006/main"/>
-          <a:p xmlns:a="http://schemas.openxmlformats.org/drawingml/2006/main">
-            <a:pPr marL="0" indent="0" algn="r">
-              <a:buNone/>
-            </a:pPr>
-            <a:r>
-              <a:rPr sz="950">
-                <a:solidFill>
-                  <a:srgbClr val="FCF9F0"/>
-                </a:solidFill>
-                <a:latin typeface="Calibri"/>
-                <a:ea typeface="Calibri"/>
-                <a:cs typeface="Calibri"/>
-              </a:rPr>
-              <a:t>коробка</a:t>
-            </a:r>
-            <a:endParaRPr sz="950"/>
-          </a:p>
-        </p:txBody>
-      </p:sp>
-      <p:sp>
-        <p:nvSpPr>
-          <p:cNvPr id="22" name="Shape 19">
-            <a:extLst xmlns:a="http://schemas.openxmlformats.org/drawingml/2006/main">
-              <a:ext uri="{FF2B5EF4-FFF2-40B4-BE49-F238E27FC236}">
-                <a16:creationId xmlns:a16="http://schemas.microsoft.com/office/drawing/2014/main" id="{AFCD23EF-4833-427F-B74B-6E405E3069ED}"/>
-              </a:ext>
-            </a:extLst>
-          </p:cNvPr>
-          <p:cNvSpPr>
-            <a:spLocks xmlns:a="http://schemas.openxmlformats.org/drawingml/2006/main" noGrp="1"/>
-          </p:cNvSpPr>
-          <p:nvPr/>
-        </p:nvSpPr>
-        <p:spPr>
-          <a:xfrm xmlns:a="http://schemas.openxmlformats.org/drawingml/2006/main">
-            <a:off x="3383280" y="1536192"/>
-            <a:ext cx="2706624" cy="4626864"/>
-          </a:xfrm>
-          <a:prstGeom xmlns:a="http://schemas.openxmlformats.org/drawingml/2006/main" prst="roundRect">
-            <a:avLst>
-              <a:gd name="adj" fmla="val 4054"/>
+              <a:gd name="adj" fmla="val 15094"/>
             </a:avLst>
           </a:prstGeom>
           <a:solidFill xmlns:a="http://schemas.openxmlformats.org/drawingml/2006/main">
@@ -15807,701 +15889,129 @@
       </p:sp>
       <p:sp>
         <p:nvSpPr>
-          <p:cNvPr id="24" name="Shape 20">
-            <a:extLst xmlns:a="http://schemas.openxmlformats.org/drawingml/2006/main">
-              <a:ext uri="{FF2B5EF4-FFF2-40B4-BE49-F238E27FC236}">
-                <a16:creationId xmlns:a16="http://schemas.microsoft.com/office/drawing/2014/main" id="{CC510ACE-6515-4BC0-B50D-985970D330BD}"/>
-              </a:ext>
-            </a:extLst>
-          </p:cNvPr>
-          <p:cNvSpPr>
-            <a:spLocks xmlns:a="http://schemas.openxmlformats.org/drawingml/2006/main" noGrp="1"/>
-          </p:cNvSpPr>
-          <p:nvPr/>
-        </p:nvSpPr>
-        <p:spPr>
-          <a:xfrm xmlns:a="http://schemas.openxmlformats.org/drawingml/2006/main">
-            <a:off x="3566160" y="1700784"/>
-            <a:ext cx="2340864" cy="1810512"/>
-          </a:xfrm>
-          <a:prstGeom xmlns:a="http://schemas.openxmlformats.org/drawingml/2006/main" prst="rect">
-            <a:avLst/>
-          </a:prstGeom>
-          <a:ln xmlns:a="http://schemas.openxmlformats.org/drawingml/2006/main" w="12700">
-            <a:solidFill>
-              <a:srgbClr val="C89C40"/>
-            </a:solidFill>
-            <a:prstDash val="solid"/>
-          </a:ln>
-        </p:spPr>
-        <p:txBody>
-          <a:bodyPr xmlns:a="http://schemas.openxmlformats.org/drawingml/2006/main"/>
-          <a:lstStyle xmlns:a="http://schemas.openxmlformats.org/drawingml/2006/main"/>
-          <a:p xmlns:a="http://schemas.openxmlformats.org/drawingml/2006/main">
-            <a:endParaRPr/>
-          </a:p>
-        </p:txBody>
-      </p:sp>
-      <p:sp>
-        <p:nvSpPr>
-          <p:cNvPr id="25" name="Shape 21">
-            <a:extLst xmlns:a="http://schemas.openxmlformats.org/drawingml/2006/main">
-              <a:ext uri="{FF2B5EF4-FFF2-40B4-BE49-F238E27FC236}">
-                <a16:creationId xmlns:a16="http://schemas.microsoft.com/office/drawing/2014/main" id="{6F360826-A308-4AC3-BAA1-7446672F8749}"/>
-              </a:ext>
-            </a:extLst>
-          </p:cNvPr>
-          <p:cNvSpPr>
-            <a:spLocks xmlns:a="http://schemas.openxmlformats.org/drawingml/2006/main" noGrp="1"/>
-          </p:cNvSpPr>
-          <p:nvPr/>
-        </p:nvSpPr>
-        <p:spPr>
-          <a:xfrm xmlns:a="http://schemas.openxmlformats.org/drawingml/2006/main">
-            <a:off x="3566160" y="3611880"/>
-            <a:ext cx="1417320" cy="237744"/>
-          </a:xfrm>
-          <a:prstGeom xmlns:a="http://schemas.openxmlformats.org/drawingml/2006/main" prst="roundRect">
-            <a:avLst>
-              <a:gd name="adj" fmla="val 23077"/>
-            </a:avLst>
-          </a:prstGeom>
-          <a:solidFill xmlns:a="http://schemas.openxmlformats.org/drawingml/2006/main">
-            <a:srgbClr val="B0762A"/>
-          </a:solidFill>
-          <a:ln xmlns:a="http://schemas.openxmlformats.org/drawingml/2006/main" w="6350">
-            <a:solidFill>
-              <a:srgbClr val="C89C40"/>
-            </a:solidFill>
-            <a:prstDash val="solid"/>
-          </a:ln>
-        </p:spPr>
-        <p:txBody>
-          <a:bodyPr xmlns:a="http://schemas.openxmlformats.org/drawingml/2006/main"/>
-          <a:lstStyle xmlns:a="http://schemas.openxmlformats.org/drawingml/2006/main"/>
-          <a:p xmlns:a="http://schemas.openxmlformats.org/drawingml/2006/main">
-            <a:endParaRPr/>
-          </a:p>
-        </p:txBody>
-      </p:sp>
-      <p:sp>
-        <p:nvSpPr>
-          <p:cNvPr id="26" name="Text 22">
-            <a:extLst xmlns:a="http://schemas.openxmlformats.org/drawingml/2006/main">
-              <a:ext uri="{FF2B5EF4-FFF2-40B4-BE49-F238E27FC236}">
-                <a16:creationId xmlns:a16="http://schemas.microsoft.com/office/drawing/2014/main" id="{7036F6EF-F813-4855-BBAB-E834036C4733}"/>
-              </a:ext>
-            </a:extLst>
-          </p:cNvPr>
-          <p:cNvSpPr>
-            <a:spLocks xmlns:a="http://schemas.openxmlformats.org/drawingml/2006/main" noGrp="1"/>
-          </p:cNvSpPr>
-          <p:nvPr/>
-        </p:nvSpPr>
-        <p:spPr>
-          <a:xfrm xmlns:a="http://schemas.openxmlformats.org/drawingml/2006/main">
-            <a:off x="3566160" y="3621024"/>
-            <a:ext cx="1417320" cy="219456"/>
-          </a:xfrm>
-          <a:prstGeom xmlns:a="http://schemas.openxmlformats.org/drawingml/2006/main" prst="rect">
-            <a:avLst/>
-          </a:prstGeom>
-          <a:noFill xmlns:a="http://schemas.openxmlformats.org/drawingml/2006/main"/>
-        </p:spPr>
-        <p:txBody>
-          <a:bodyPr xmlns:a="http://schemas.openxmlformats.org/drawingml/2006/main" wrap="square" lIns="0" tIns="0" rIns="0" bIns="0" anchor="ctr"/>
-          <a:lstStyle xmlns:a="http://schemas.openxmlformats.org/drawingml/2006/main"/>
-          <a:p xmlns:a="http://schemas.openxmlformats.org/drawingml/2006/main">
-            <a:pPr marL="0" indent="0" algn="ctr">
-              <a:buNone/>
-            </a:pPr>
-            <a:r>
-              <a:rPr sz="850" b="1" spc="60">
-                <a:solidFill>
-                  <a:srgbClr val="FFFFFF"/>
-                </a:solidFill>
-                <a:latin typeface="Calibri"/>
-                <a:ea typeface="Calibri"/>
-                <a:cs typeface="Calibri"/>
-              </a:rPr>
-              <a:t>CUP 150 Г · W/O OIL</a:t>
-            </a:r>
-            <a:endParaRPr sz="850"/>
-          </a:p>
-        </p:txBody>
-      </p:sp>
-      <p:sp>
-        <p:nvSpPr>
-          <p:cNvPr id="27" name="Text 23">
-            <a:extLst xmlns:a="http://schemas.openxmlformats.org/drawingml/2006/main">
-              <a:ext uri="{FF2B5EF4-FFF2-40B4-BE49-F238E27FC236}">
-                <a16:creationId xmlns:a16="http://schemas.microsoft.com/office/drawing/2014/main" id="{D623579F-4CF0-49CB-8419-DC085FE5D432}"/>
-              </a:ext>
-            </a:extLst>
-          </p:cNvPr>
-          <p:cNvSpPr>
-            <a:spLocks xmlns:a="http://schemas.openxmlformats.org/drawingml/2006/main" noGrp="1"/>
-          </p:cNvSpPr>
-          <p:nvPr/>
-        </p:nvSpPr>
-        <p:spPr>
-          <a:xfrm xmlns:a="http://schemas.openxmlformats.org/drawingml/2006/main">
-            <a:off x="3566160" y="3931920"/>
-            <a:ext cx="2340864" cy="548640"/>
-          </a:xfrm>
-          <a:prstGeom xmlns:a="http://schemas.openxmlformats.org/drawingml/2006/main" prst="rect">
-            <a:avLst/>
-          </a:prstGeom>
-          <a:noFill xmlns:a="http://schemas.openxmlformats.org/drawingml/2006/main"/>
-        </p:spPr>
-        <p:txBody>
-          <a:bodyPr xmlns:a="http://schemas.openxmlformats.org/drawingml/2006/main" wrap="square" lIns="0" tIns="0" rIns="0" bIns="0" anchor="t"/>
-          <a:lstStyle xmlns:a="http://schemas.openxmlformats.org/drawingml/2006/main"/>
-          <a:p xmlns:a="http://schemas.openxmlformats.org/drawingml/2006/main">
-            <a:pPr marL="0" indent="0">
-              <a:buNone/>
-            </a:pPr>
-            <a:r>
-              <a:rPr sz="1450" b="1">
-                <a:solidFill>
-                  <a:srgbClr val="FFFFFF"/>
+          <p:cNvPr id="26" name="Text 23">
+            <a:extLst xmlns:a="http://schemas.openxmlformats.org/drawingml/2006/main">
+              <a:ext uri="{FF2B5EF4-FFF2-40B4-BE49-F238E27FC236}">
+                <a16:creationId xmlns:a16="http://schemas.microsoft.com/office/drawing/2014/main" id="{3B99B33F-CA18-49F8-8EC9-D0A44AF63E2D}"/>
+              </a:ext>
+            </a:extLst>
+          </p:cNvPr>
+          <p:cNvSpPr>
+            <a:spLocks xmlns:a="http://schemas.openxmlformats.org/drawingml/2006/main" noGrp="1"/>
+          </p:cNvSpPr>
+          <p:nvPr/>
+        </p:nvSpPr>
+        <p:spPr>
+          <a:xfrm xmlns:a="http://schemas.openxmlformats.org/drawingml/2006/main">
+            <a:off x="7717536" y="4581144"/>
+            <a:ext cx="1371600" cy="365760"/>
+          </a:xfrm>
+          <a:prstGeom xmlns:a="http://schemas.openxmlformats.org/drawingml/2006/main" prst="rect">
+            <a:avLst/>
+          </a:prstGeom>
+          <a:noFill xmlns:a="http://schemas.openxmlformats.org/drawingml/2006/main"/>
+        </p:spPr>
+        <p:txBody>
+          <a:bodyPr xmlns:a="http://schemas.openxmlformats.org/drawingml/2006/main" wrap="square" lIns="0" tIns="0" rIns="0" bIns="0" anchor="ctr"/>
+          <a:lstStyle xmlns:a="http://schemas.openxmlformats.org/drawingml/2006/main"/>
+          <a:p xmlns:a="http://schemas.openxmlformats.org/drawingml/2006/main">
+            <a:pPr marL="0" indent="0">
+              <a:buNone/>
+            </a:pPr>
+            <a:r>
+              <a:rPr sz="1900" b="1">
+                <a:solidFill>
+                  <a:srgbClr val="F5CE76"/>
                 </a:solidFill>
                 <a:latin typeface="Cambria"/>
                 <a:ea typeface="Cambria"/>
                 <a:cs typeface="Cambria"/>
               </a:rPr>
-              <a:t>Jasmine Rice (Pathum)</a:t>
-            </a:r>
-            <a:endParaRPr sz="1450"/>
-          </a:p>
-        </p:txBody>
-      </p:sp>
-      <p:sp>
-        <p:nvSpPr>
-          <p:cNvPr id="28" name="Text 24">
-            <a:extLst xmlns:a="http://schemas.openxmlformats.org/drawingml/2006/main">
-              <a:ext uri="{FF2B5EF4-FFF2-40B4-BE49-F238E27FC236}">
-                <a16:creationId xmlns:a16="http://schemas.microsoft.com/office/drawing/2014/main" id="{34F13D1A-C3CC-4661-A13D-5D4192098AD7}"/>
-              </a:ext>
-            </a:extLst>
-          </p:cNvPr>
-          <p:cNvSpPr>
-            <a:spLocks xmlns:a="http://schemas.openxmlformats.org/drawingml/2006/main" noGrp="1"/>
-          </p:cNvSpPr>
-          <p:nvPr/>
-        </p:nvSpPr>
-        <p:spPr>
-          <a:xfrm xmlns:a="http://schemas.openxmlformats.org/drawingml/2006/main">
-            <a:off x="3566160" y="4498848"/>
-            <a:ext cx="2340864" cy="237744"/>
-          </a:xfrm>
-          <a:prstGeom xmlns:a="http://schemas.openxmlformats.org/drawingml/2006/main" prst="rect">
-            <a:avLst/>
-          </a:prstGeom>
-          <a:noFill xmlns:a="http://schemas.openxmlformats.org/drawingml/2006/main"/>
-        </p:spPr>
-        <p:txBody>
-          <a:bodyPr xmlns:a="http://schemas.openxmlformats.org/drawingml/2006/main" wrap="square" lIns="0" tIns="0" rIns="0" bIns="0" anchor="ctr"/>
-          <a:lstStyle xmlns:a="http://schemas.openxmlformats.org/drawingml/2006/main"/>
-          <a:p xmlns:a="http://schemas.openxmlformats.org/drawingml/2006/main">
-            <a:pPr marL="0" indent="0">
-              <a:buNone/>
-            </a:pPr>
-            <a:r>
-              <a:rPr sz="1000">
-                <a:solidFill>
-                  <a:srgbClr val="D2E4CE"/>
-                </a:solidFill>
-                <a:latin typeface="Calibri"/>
-                <a:ea typeface="Calibri"/>
-                <a:cs typeface="Calibri"/>
-              </a:rPr>
-              <a:t>Single Cup · Sleeve Box</a:t>
-            </a:r>
-            <a:endParaRPr sz="1000"/>
-          </a:p>
-        </p:txBody>
-      </p:sp>
-      <p:sp>
-        <p:nvSpPr>
-          <p:cNvPr id="29" name="Shape 25">
-            <a:extLst xmlns:a="http://schemas.openxmlformats.org/drawingml/2006/main">
-              <a:ext uri="{FF2B5EF4-FFF2-40B4-BE49-F238E27FC236}">
-                <a16:creationId xmlns:a16="http://schemas.microsoft.com/office/drawing/2014/main" id="{D49B14DE-CA73-4039-8430-FB42DBBD3991}"/>
-              </a:ext>
-            </a:extLst>
-          </p:cNvPr>
-          <p:cNvSpPr>
-            <a:spLocks xmlns:a="http://schemas.openxmlformats.org/drawingml/2006/main" noGrp="1"/>
-          </p:cNvSpPr>
-          <p:nvPr/>
-        </p:nvSpPr>
-        <p:spPr>
-          <a:xfrm xmlns:a="http://schemas.openxmlformats.org/drawingml/2006/main">
-            <a:off x="3566160" y="4791456"/>
-            <a:ext cx="2340864" cy="1170432"/>
+              <a:t>6 од.</a:t>
+            </a:r>
+            <a:r>
+              <a:rPr sz="1100">
+                <a:solidFill>
+                  <a:srgbClr val="F5CE76"/>
+                </a:solidFill>
+                <a:latin typeface="Cambria"/>
+                <a:ea typeface="Cambria"/>
+                <a:cs typeface="Cambria"/>
+              </a:rPr>
+              <a:t> у коробі</a:t>
+            </a:r>
+            <a:endParaRPr sz="1900"/>
+          </a:p>
+        </p:txBody>
+      </p:sp>
+      <p:sp>
+        <p:nvSpPr>
+          <p:cNvPr id="27" name="Text 24">
+            <a:extLst xmlns:a="http://schemas.openxmlformats.org/drawingml/2006/main">
+              <a:ext uri="{FF2B5EF4-FFF2-40B4-BE49-F238E27FC236}">
+                <a16:creationId xmlns:a16="http://schemas.microsoft.com/office/drawing/2014/main" id="{9254B401-36F1-4B46-897A-3CB2BDEB1BA4}"/>
+              </a:ext>
+            </a:extLst>
+          </p:cNvPr>
+          <p:cNvSpPr>
+            <a:spLocks xmlns:a="http://schemas.openxmlformats.org/drawingml/2006/main" noGrp="1"/>
+          </p:cNvSpPr>
+          <p:nvPr/>
+        </p:nvSpPr>
+        <p:spPr>
+          <a:xfrm xmlns:a="http://schemas.openxmlformats.org/drawingml/2006/main">
+            <a:off x="9098280" y="4581144"/>
+            <a:ext cx="2377440" cy="365760"/>
+          </a:xfrm>
+          <a:prstGeom xmlns:a="http://schemas.openxmlformats.org/drawingml/2006/main" prst="rect">
+            <a:avLst/>
+          </a:prstGeom>
+          <a:noFill xmlns:a="http://schemas.openxmlformats.org/drawingml/2006/main"/>
+        </p:spPr>
+        <p:txBody>
+          <a:bodyPr xmlns:a="http://schemas.openxmlformats.org/drawingml/2006/main" wrap="square" lIns="0" tIns="0" rIns="0" bIns="0" anchor="ctr"/>
+          <a:lstStyle xmlns:a="http://schemas.openxmlformats.org/drawingml/2006/main"/>
+          <a:p xmlns:a="http://schemas.openxmlformats.org/drawingml/2006/main">
+            <a:pPr marL="0" indent="0" algn="r">
+              <a:buNone/>
+            </a:pPr>
+            <a:r>
+              <a:rPr sz="1050">
+                <a:solidFill>
+                  <a:srgbClr val="FCF9F0"/>
+                </a:solidFill>
+                <a:latin typeface="Calibri"/>
+                <a:ea typeface="Calibri"/>
+                <a:cs typeface="Calibri"/>
+              </a:rPr>
+              <a:t>2 × 125 г = 250 г / уніт</a:t>
+            </a:r>
+            <a:endParaRPr sz="1050"/>
+          </a:p>
+        </p:txBody>
+      </p:sp>
+      <p:sp>
+        <p:nvSpPr>
+          <p:cNvPr id="28" name="Shape 25">
+            <a:extLst xmlns:a="http://schemas.openxmlformats.org/drawingml/2006/main">
+              <a:ext uri="{FF2B5EF4-FFF2-40B4-BE49-F238E27FC236}">
+                <a16:creationId xmlns:a16="http://schemas.microsoft.com/office/drawing/2014/main" id="{B6DB6DF8-9EDE-4700-B934-B2C5D27FD37C}"/>
+              </a:ext>
+            </a:extLst>
+          </p:cNvPr>
+          <p:cNvSpPr>
+            <a:spLocks xmlns:a="http://schemas.openxmlformats.org/drawingml/2006/main" noGrp="1"/>
+          </p:cNvSpPr>
+          <p:nvPr/>
+        </p:nvSpPr>
+        <p:spPr>
+          <a:xfrm xmlns:a="http://schemas.openxmlformats.org/drawingml/2006/main">
+            <a:off x="7534656" y="5093208"/>
+            <a:ext cx="4096512" cy="484632"/>
           </a:xfrm>
           <a:prstGeom xmlns:a="http://schemas.openxmlformats.org/drawingml/2006/main" prst="roundRect">
             <a:avLst>
-              <a:gd name="adj" fmla="val 5469"/>
-            </a:avLst>
-          </a:prstGeom>
-          <a:solidFill xmlns:a="http://schemas.openxmlformats.org/drawingml/2006/main">
-            <a:srgbClr val="1A5433">
-              <a:alpha val="92000"/>
-            </a:srgbClr>
-          </a:solidFill>
-          <a:ln xmlns:a="http://schemas.openxmlformats.org/drawingml/2006/main" w="9525">
-            <a:solidFill>
-              <a:srgbClr val="C89C40"/>
-            </a:solidFill>
-            <a:prstDash val="solid"/>
-          </a:ln>
-        </p:spPr>
-        <p:txBody>
-          <a:bodyPr xmlns:a="http://schemas.openxmlformats.org/drawingml/2006/main"/>
-          <a:lstStyle xmlns:a="http://schemas.openxmlformats.org/drawingml/2006/main"/>
-          <a:p xmlns:a="http://schemas.openxmlformats.org/drawingml/2006/main">
-            <a:endParaRPr/>
-          </a:p>
-        </p:txBody>
-      </p:sp>
-      <p:sp>
-        <p:nvSpPr>
-          <p:cNvPr id="30" name="Text 26">
-            <a:extLst xmlns:a="http://schemas.openxmlformats.org/drawingml/2006/main">
-              <a:ext uri="{FF2B5EF4-FFF2-40B4-BE49-F238E27FC236}">
-                <a16:creationId xmlns:a16="http://schemas.microsoft.com/office/drawing/2014/main" id="{D005C7CF-646A-4687-B1EA-E63F75D77D5C}"/>
-              </a:ext>
-            </a:extLst>
-          </p:cNvPr>
-          <p:cNvSpPr>
-            <a:spLocks xmlns:a="http://schemas.openxmlformats.org/drawingml/2006/main" noGrp="1"/>
-          </p:cNvSpPr>
-          <p:nvPr/>
-        </p:nvSpPr>
-        <p:spPr>
-          <a:xfrm xmlns:a="http://schemas.openxmlformats.org/drawingml/2006/main">
-            <a:off x="3675888" y="4855464"/>
-            <a:ext cx="2148840" cy="182880"/>
-          </a:xfrm>
-          <a:prstGeom xmlns:a="http://schemas.openxmlformats.org/drawingml/2006/main" prst="rect">
-            <a:avLst/>
-          </a:prstGeom>
-          <a:noFill xmlns:a="http://schemas.openxmlformats.org/drawingml/2006/main"/>
-        </p:spPr>
-        <p:txBody>
-          <a:bodyPr xmlns:a="http://schemas.openxmlformats.org/drawingml/2006/main" wrap="square" lIns="0" tIns="0" rIns="0" bIns="0" anchor="ctr"/>
-          <a:lstStyle xmlns:a="http://schemas.openxmlformats.org/drawingml/2006/main"/>
-          <a:p xmlns:a="http://schemas.openxmlformats.org/drawingml/2006/main">
-            <a:pPr marL="0" indent="0">
-              <a:buNone/>
-            </a:pPr>
-            <a:r>
-              <a:rPr sz="750" b="1" spc="100">
-                <a:solidFill>
-                  <a:srgbClr val="F5CE76"/>
-                </a:solidFill>
-                <a:latin typeface="Calibri"/>
-                <a:ea typeface="Calibri"/>
-                <a:cs typeface="Calibri"/>
-              </a:rPr>
-              <a:t>ПАРАМЕТРИ УПАКОВКИ</a:t>
-            </a:r>
-            <a:endParaRPr sz="750"/>
-          </a:p>
-        </p:txBody>
-      </p:sp>
-      <p:sp>
-        <p:nvSpPr>
-          <p:cNvPr id="31" name="Text 27">
-            <a:extLst xmlns:a="http://schemas.openxmlformats.org/drawingml/2006/main">
-              <a:ext uri="{FF2B5EF4-FFF2-40B4-BE49-F238E27FC236}">
-                <a16:creationId xmlns:a16="http://schemas.microsoft.com/office/drawing/2014/main" id="{793A1173-463D-43C7-AEA9-358CA2D92BA8}"/>
-              </a:ext>
-            </a:extLst>
-          </p:cNvPr>
-          <p:cNvSpPr>
-            <a:spLocks xmlns:a="http://schemas.openxmlformats.org/drawingml/2006/main" noGrp="1"/>
-          </p:cNvSpPr>
-          <p:nvPr/>
-        </p:nvSpPr>
-        <p:spPr>
-          <a:xfrm xmlns:a="http://schemas.openxmlformats.org/drawingml/2006/main">
-            <a:off x="3675888" y="5056632"/>
-            <a:ext cx="658368" cy="192024"/>
-          </a:xfrm>
-          <a:prstGeom xmlns:a="http://schemas.openxmlformats.org/drawingml/2006/main" prst="rect">
-            <a:avLst/>
-          </a:prstGeom>
-          <a:noFill xmlns:a="http://schemas.openxmlformats.org/drawingml/2006/main"/>
-        </p:spPr>
-        <p:txBody>
-          <a:bodyPr xmlns:a="http://schemas.openxmlformats.org/drawingml/2006/main" wrap="square" lIns="0" tIns="0" rIns="0" bIns="0" anchor="ctr"/>
-          <a:lstStyle xmlns:a="http://schemas.openxmlformats.org/drawingml/2006/main"/>
-          <a:p xmlns:a="http://schemas.openxmlformats.org/drawingml/2006/main">
-            <a:pPr marL="0" indent="0">
-              <a:buNone/>
-            </a:pPr>
-            <a:r>
-              <a:rPr sz="900">
-                <a:solidFill>
-                  <a:srgbClr val="D2E4CE"/>
-                </a:solidFill>
-                <a:latin typeface="Calibri"/>
-                <a:ea typeface="Calibri"/>
-                <a:cs typeface="Calibri"/>
-              </a:rPr>
-              <a:t>Формат</a:t>
-            </a:r>
-            <a:endParaRPr sz="900"/>
-          </a:p>
-        </p:txBody>
-      </p:sp>
-      <p:sp>
-        <p:nvSpPr>
-          <p:cNvPr id="32" name="Text 28">
-            <a:extLst xmlns:a="http://schemas.openxmlformats.org/drawingml/2006/main">
-              <a:ext uri="{FF2B5EF4-FFF2-40B4-BE49-F238E27FC236}">
-                <a16:creationId xmlns:a16="http://schemas.microsoft.com/office/drawing/2014/main" id="{7117FC0B-4F73-40B9-9BEC-953254E4BA9A}"/>
-              </a:ext>
-            </a:extLst>
-          </p:cNvPr>
-          <p:cNvSpPr>
-            <a:spLocks xmlns:a="http://schemas.openxmlformats.org/drawingml/2006/main" noGrp="1"/>
-          </p:cNvSpPr>
-          <p:nvPr/>
-        </p:nvSpPr>
-        <p:spPr>
-          <a:xfrm xmlns:a="http://schemas.openxmlformats.org/drawingml/2006/main">
-            <a:off x="4315968" y="5056632"/>
-            <a:ext cx="1508760" cy="192024"/>
-          </a:xfrm>
-          <a:prstGeom xmlns:a="http://schemas.openxmlformats.org/drawingml/2006/main" prst="rect">
-            <a:avLst/>
-          </a:prstGeom>
-          <a:noFill xmlns:a="http://schemas.openxmlformats.org/drawingml/2006/main"/>
-        </p:spPr>
-        <p:txBody>
-          <a:bodyPr xmlns:a="http://schemas.openxmlformats.org/drawingml/2006/main" wrap="square" lIns="0" tIns="0" rIns="0" bIns="0" anchor="ctr"/>
-          <a:lstStyle xmlns:a="http://schemas.openxmlformats.org/drawingml/2006/main"/>
-          <a:p xmlns:a="http://schemas.openxmlformats.org/drawingml/2006/main">
-            <a:pPr marL="0" indent="0" algn="r">
-              <a:buNone/>
-            </a:pPr>
-            <a:r>
-              <a:rPr sz="950">
-                <a:solidFill>
-                  <a:srgbClr val="FCF9F0"/>
-                </a:solidFill>
-                <a:latin typeface="Calibri"/>
-                <a:ea typeface="Calibri"/>
-                <a:cs typeface="Calibri"/>
-              </a:rPr>
-              <a:t>Single Cup</a:t>
-            </a:r>
-            <a:endParaRPr sz="950"/>
-          </a:p>
-        </p:txBody>
-      </p:sp>
-      <p:sp>
-        <p:nvSpPr>
-          <p:cNvPr id="33" name="Text 29">
-            <a:extLst xmlns:a="http://schemas.openxmlformats.org/drawingml/2006/main">
-              <a:ext uri="{FF2B5EF4-FFF2-40B4-BE49-F238E27FC236}">
-                <a16:creationId xmlns:a16="http://schemas.microsoft.com/office/drawing/2014/main" id="{48663418-84F8-4462-909D-711F0DD1DDD7}"/>
-              </a:ext>
-            </a:extLst>
-          </p:cNvPr>
-          <p:cNvSpPr>
-            <a:spLocks xmlns:a="http://schemas.openxmlformats.org/drawingml/2006/main" noGrp="1"/>
-          </p:cNvSpPr>
-          <p:nvPr/>
-        </p:nvSpPr>
-        <p:spPr>
-          <a:xfrm xmlns:a="http://schemas.openxmlformats.org/drawingml/2006/main">
-            <a:off x="3675888" y="5262372"/>
-            <a:ext cx="658368" cy="192024"/>
-          </a:xfrm>
-          <a:prstGeom xmlns:a="http://schemas.openxmlformats.org/drawingml/2006/main" prst="rect">
-            <a:avLst/>
-          </a:prstGeom>
-          <a:noFill xmlns:a="http://schemas.openxmlformats.org/drawingml/2006/main"/>
-        </p:spPr>
-        <p:txBody>
-          <a:bodyPr xmlns:a="http://schemas.openxmlformats.org/drawingml/2006/main" wrap="square" lIns="0" tIns="0" rIns="0" bIns="0" anchor="ctr"/>
-          <a:lstStyle xmlns:a="http://schemas.openxmlformats.org/drawingml/2006/main"/>
-          <a:p xmlns:a="http://schemas.openxmlformats.org/drawingml/2006/main">
-            <a:pPr marL="0" indent="0">
-              <a:buNone/>
-            </a:pPr>
-            <a:r>
-              <a:rPr sz="900" b="1">
-                <a:solidFill>
-                  <a:srgbClr val="F5CE76"/>
-                </a:solidFill>
-                <a:latin typeface="Calibri"/>
-                <a:ea typeface="Calibri"/>
-                <a:cs typeface="Calibri"/>
-              </a:rPr>
-              <a:t>Вага</a:t>
-            </a:r>
-            <a:endParaRPr sz="900"/>
-          </a:p>
-        </p:txBody>
-      </p:sp>
-      <p:sp>
-        <p:nvSpPr>
-          <p:cNvPr id="34" name="Text 30">
-            <a:extLst xmlns:a="http://schemas.openxmlformats.org/drawingml/2006/main">
-              <a:ext uri="{FF2B5EF4-FFF2-40B4-BE49-F238E27FC236}">
-                <a16:creationId xmlns:a16="http://schemas.microsoft.com/office/drawing/2014/main" id="{B09A954A-25C5-4C8C-BACC-D09A2CA513F0}"/>
-              </a:ext>
-            </a:extLst>
-          </p:cNvPr>
-          <p:cNvSpPr>
-            <a:spLocks xmlns:a="http://schemas.openxmlformats.org/drawingml/2006/main" noGrp="1"/>
-          </p:cNvSpPr>
-          <p:nvPr/>
-        </p:nvSpPr>
-        <p:spPr>
-          <a:xfrm xmlns:a="http://schemas.openxmlformats.org/drawingml/2006/main">
-            <a:off x="4315968" y="5262372"/>
-            <a:ext cx="1508760" cy="192024"/>
-          </a:xfrm>
-          <a:prstGeom xmlns:a="http://schemas.openxmlformats.org/drawingml/2006/main" prst="rect">
-            <a:avLst/>
-          </a:prstGeom>
-          <a:noFill xmlns:a="http://schemas.openxmlformats.org/drawingml/2006/main"/>
-        </p:spPr>
-        <p:txBody>
-          <a:bodyPr xmlns:a="http://schemas.openxmlformats.org/drawingml/2006/main" wrap="square" lIns="0" tIns="0" rIns="0" bIns="0" anchor="ctr"/>
-          <a:lstStyle xmlns:a="http://schemas.openxmlformats.org/drawingml/2006/main"/>
-          <a:p xmlns:a="http://schemas.openxmlformats.org/drawingml/2006/main">
-            <a:pPr marL="0" indent="0" algn="r">
-              <a:buNone/>
-            </a:pPr>
-            <a:r>
-              <a:rPr sz="950" b="1">
-                <a:solidFill>
-                  <a:srgbClr val="F5CE76"/>
-                </a:solidFill>
-                <a:latin typeface="Calibri"/>
-                <a:ea typeface="Calibri"/>
-                <a:cs typeface="Calibri"/>
-              </a:rPr>
-              <a:t>150 г</a:t>
-            </a:r>
-            <a:endParaRPr sz="950"/>
-          </a:p>
-        </p:txBody>
-      </p:sp>
-      <p:sp>
-        <p:nvSpPr>
-          <p:cNvPr id="35" name="Text 31">
-            <a:extLst xmlns:a="http://schemas.openxmlformats.org/drawingml/2006/main">
-              <a:ext uri="{FF2B5EF4-FFF2-40B4-BE49-F238E27FC236}">
-                <a16:creationId xmlns:a16="http://schemas.microsoft.com/office/drawing/2014/main" id="{1BD63ABA-2795-4167-B138-F7286363F43A}"/>
-              </a:ext>
-            </a:extLst>
-          </p:cNvPr>
-          <p:cNvSpPr>
-            <a:spLocks xmlns:a="http://schemas.openxmlformats.org/drawingml/2006/main" noGrp="1"/>
-          </p:cNvSpPr>
-          <p:nvPr/>
-        </p:nvSpPr>
-        <p:spPr>
-          <a:xfrm xmlns:a="http://schemas.openxmlformats.org/drawingml/2006/main">
-            <a:off x="3675888" y="5468112"/>
-            <a:ext cx="658368" cy="192024"/>
-          </a:xfrm>
-          <a:prstGeom xmlns:a="http://schemas.openxmlformats.org/drawingml/2006/main" prst="rect">
-            <a:avLst/>
-          </a:prstGeom>
-          <a:noFill xmlns:a="http://schemas.openxmlformats.org/drawingml/2006/main"/>
-        </p:spPr>
-        <p:txBody>
-          <a:bodyPr xmlns:a="http://schemas.openxmlformats.org/drawingml/2006/main" wrap="square" lIns="0" tIns="0" rIns="0" bIns="0" anchor="ctr"/>
-          <a:lstStyle xmlns:a="http://schemas.openxmlformats.org/drawingml/2006/main"/>
-          <a:p xmlns:a="http://schemas.openxmlformats.org/drawingml/2006/main">
-            <a:pPr marL="0" indent="0">
-              <a:buNone/>
-            </a:pPr>
-            <a:r>
-              <a:rPr sz="900">
-                <a:solidFill>
-                  <a:srgbClr val="D2E4CE"/>
-                </a:solidFill>
-                <a:latin typeface="Calibri"/>
-                <a:ea typeface="Calibri"/>
-                <a:cs typeface="Calibri"/>
-              </a:rPr>
-              <a:t>Короб</a:t>
-            </a:r>
-            <a:endParaRPr sz="900"/>
-          </a:p>
-        </p:txBody>
-      </p:sp>
-      <p:sp>
-        <p:nvSpPr>
-          <p:cNvPr id="36" name="Text 32">
-            <a:extLst xmlns:a="http://schemas.openxmlformats.org/drawingml/2006/main">
-              <a:ext uri="{FF2B5EF4-FFF2-40B4-BE49-F238E27FC236}">
-                <a16:creationId xmlns:a16="http://schemas.microsoft.com/office/drawing/2014/main" id="{995EAFC3-88FF-44CF-AFF4-614342C3B96D}"/>
-              </a:ext>
-            </a:extLst>
-          </p:cNvPr>
-          <p:cNvSpPr>
-            <a:spLocks xmlns:a="http://schemas.openxmlformats.org/drawingml/2006/main" noGrp="1"/>
-          </p:cNvSpPr>
-          <p:nvPr/>
-        </p:nvSpPr>
-        <p:spPr>
-          <a:xfrm xmlns:a="http://schemas.openxmlformats.org/drawingml/2006/main">
-            <a:off x="4315968" y="5468112"/>
-            <a:ext cx="1508760" cy="192024"/>
-          </a:xfrm>
-          <a:prstGeom xmlns:a="http://schemas.openxmlformats.org/drawingml/2006/main" prst="rect">
-            <a:avLst/>
-          </a:prstGeom>
-          <a:noFill xmlns:a="http://schemas.openxmlformats.org/drawingml/2006/main"/>
-        </p:spPr>
-        <p:txBody>
-          <a:bodyPr xmlns:a="http://schemas.openxmlformats.org/drawingml/2006/main" wrap="square" lIns="0" tIns="0" rIns="0" bIns="0" anchor="ctr"/>
-          <a:lstStyle xmlns:a="http://schemas.openxmlformats.org/drawingml/2006/main"/>
-          <a:p xmlns:a="http://schemas.openxmlformats.org/drawingml/2006/main">
-            <a:pPr marL="0" indent="0" algn="r">
-              <a:buNone/>
-            </a:pPr>
-            <a:r>
-              <a:rPr sz="950">
-                <a:solidFill>
-                  <a:srgbClr val="FCF9F0"/>
-                </a:solidFill>
-                <a:latin typeface="Calibri"/>
-                <a:ea typeface="Calibri"/>
-                <a:cs typeface="Calibri"/>
-              </a:rPr>
-              <a:t>12 шт.</a:t>
-            </a:r>
-            <a:endParaRPr sz="950"/>
-          </a:p>
-        </p:txBody>
-      </p:sp>
-      <p:sp>
-        <p:nvSpPr>
-          <p:cNvPr id="37" name="Text 33">
-            <a:extLst xmlns:a="http://schemas.openxmlformats.org/drawingml/2006/main">
-              <a:ext uri="{FF2B5EF4-FFF2-40B4-BE49-F238E27FC236}">
-                <a16:creationId xmlns:a16="http://schemas.microsoft.com/office/drawing/2014/main" id="{90133D29-79AD-41F7-AC4D-08F94F211A09}"/>
-              </a:ext>
-            </a:extLst>
-          </p:cNvPr>
-          <p:cNvSpPr>
-            <a:spLocks xmlns:a="http://schemas.openxmlformats.org/drawingml/2006/main" noGrp="1"/>
-          </p:cNvSpPr>
-          <p:nvPr/>
-        </p:nvSpPr>
-        <p:spPr>
-          <a:xfrm xmlns:a="http://schemas.openxmlformats.org/drawingml/2006/main">
-            <a:off x="3675888" y="5673852"/>
-            <a:ext cx="658368" cy="192024"/>
-          </a:xfrm>
-          <a:prstGeom xmlns:a="http://schemas.openxmlformats.org/drawingml/2006/main" prst="rect">
-            <a:avLst/>
-          </a:prstGeom>
-          <a:noFill xmlns:a="http://schemas.openxmlformats.org/drawingml/2006/main"/>
-        </p:spPr>
-        <p:txBody>
-          <a:bodyPr xmlns:a="http://schemas.openxmlformats.org/drawingml/2006/main" wrap="square" lIns="0" tIns="0" rIns="0" bIns="0" anchor="ctr"/>
-          <a:lstStyle xmlns:a="http://schemas.openxmlformats.org/drawingml/2006/main"/>
-          <a:p xmlns:a="http://schemas.openxmlformats.org/drawingml/2006/main">
-            <a:pPr marL="0" indent="0">
-              <a:buNone/>
-            </a:pPr>
-            <a:r>
-              <a:rPr sz="900">
-                <a:solidFill>
-                  <a:srgbClr val="D2E4CE"/>
-                </a:solidFill>
-                <a:latin typeface="Calibri"/>
-                <a:ea typeface="Calibri"/>
-                <a:cs typeface="Calibri"/>
-              </a:rPr>
-              <a:t>Статус</a:t>
-            </a:r>
-            <a:endParaRPr sz="900"/>
-          </a:p>
-        </p:txBody>
-      </p:sp>
-      <p:sp>
-        <p:nvSpPr>
-          <p:cNvPr id="38" name="Text 34">
-            <a:extLst xmlns:a="http://schemas.openxmlformats.org/drawingml/2006/main">
-              <a:ext uri="{FF2B5EF4-FFF2-40B4-BE49-F238E27FC236}">
-                <a16:creationId xmlns:a16="http://schemas.microsoft.com/office/drawing/2014/main" id="{48907D16-EC0C-4DB8-9E32-E30599EA1EE7}"/>
-              </a:ext>
-            </a:extLst>
-          </p:cNvPr>
-          <p:cNvSpPr>
-            <a:spLocks xmlns:a="http://schemas.openxmlformats.org/drawingml/2006/main" noGrp="1"/>
-          </p:cNvSpPr>
-          <p:nvPr/>
-        </p:nvSpPr>
-        <p:spPr>
-          <a:xfrm xmlns:a="http://schemas.openxmlformats.org/drawingml/2006/main">
-            <a:off x="4315968" y="5673852"/>
-            <a:ext cx="1508760" cy="192024"/>
-          </a:xfrm>
-          <a:prstGeom xmlns:a="http://schemas.openxmlformats.org/drawingml/2006/main" prst="rect">
-            <a:avLst/>
-          </a:prstGeom>
-          <a:noFill xmlns:a="http://schemas.openxmlformats.org/drawingml/2006/main"/>
-        </p:spPr>
-        <p:txBody>
-          <a:bodyPr xmlns:a="http://schemas.openxmlformats.org/drawingml/2006/main" wrap="square" lIns="0" tIns="0" rIns="0" bIns="0" anchor="ctr"/>
-          <a:lstStyle xmlns:a="http://schemas.openxmlformats.org/drawingml/2006/main"/>
-          <a:p xmlns:a="http://schemas.openxmlformats.org/drawingml/2006/main">
-            <a:pPr marL="0" indent="0" algn="r">
-              <a:buNone/>
-            </a:pPr>
-            <a:r>
-              <a:rPr sz="950">
-                <a:solidFill>
-                  <a:srgbClr val="FCF9F0"/>
-                </a:solidFill>
-                <a:latin typeface="Calibri"/>
-                <a:ea typeface="Calibri"/>
-                <a:cs typeface="Calibri"/>
-              </a:rPr>
-              <a:t>немає в PL</a:t>
-            </a:r>
-            <a:endParaRPr sz="950"/>
-          </a:p>
-        </p:txBody>
-      </p:sp>
-      <p:sp>
-        <p:nvSpPr>
-          <p:cNvPr id="39" name="Shape 35">
-            <a:extLst xmlns:a="http://schemas.openxmlformats.org/drawingml/2006/main">
-              <a:ext uri="{FF2B5EF4-FFF2-40B4-BE49-F238E27FC236}">
-                <a16:creationId xmlns:a16="http://schemas.microsoft.com/office/drawing/2014/main" id="{2259E21A-9C34-47EA-B3E9-E565B7940B3A}"/>
-              </a:ext>
-            </a:extLst>
-          </p:cNvPr>
-          <p:cNvSpPr>
-            <a:spLocks xmlns:a="http://schemas.openxmlformats.org/drawingml/2006/main" noGrp="1"/>
-          </p:cNvSpPr>
-          <p:nvPr/>
-        </p:nvSpPr>
-        <p:spPr>
-          <a:xfrm xmlns:a="http://schemas.openxmlformats.org/drawingml/2006/main">
-            <a:off x="6199632" y="1536192"/>
-            <a:ext cx="2706624" cy="4626864"/>
-          </a:xfrm>
-          <a:prstGeom xmlns:a="http://schemas.openxmlformats.org/drawingml/2006/main" prst="roundRect">
-            <a:avLst>
-              <a:gd name="adj" fmla="val 4054"/>
+              <a:gd name="adj" fmla="val 15094"/>
             </a:avLst>
           </a:prstGeom>
           <a:solidFill xmlns:a="http://schemas.openxmlformats.org/drawingml/2006/main">
@@ -16533,701 +16043,129 @@
       </p:sp>
       <p:sp>
         <p:nvSpPr>
-          <p:cNvPr id="41" name="Shape 36">
-            <a:extLst xmlns:a="http://schemas.openxmlformats.org/drawingml/2006/main">
-              <a:ext uri="{FF2B5EF4-FFF2-40B4-BE49-F238E27FC236}">
-                <a16:creationId xmlns:a16="http://schemas.microsoft.com/office/drawing/2014/main" id="{0711C6CE-DEDB-4DD0-8D53-429DE193BFFB}"/>
-              </a:ext>
-            </a:extLst>
-          </p:cNvPr>
-          <p:cNvSpPr>
-            <a:spLocks xmlns:a="http://schemas.openxmlformats.org/drawingml/2006/main" noGrp="1"/>
-          </p:cNvSpPr>
-          <p:nvPr/>
-        </p:nvSpPr>
-        <p:spPr>
-          <a:xfrm xmlns:a="http://schemas.openxmlformats.org/drawingml/2006/main">
-            <a:off x="6382512" y="1700784"/>
-            <a:ext cx="2340864" cy="1810512"/>
-          </a:xfrm>
-          <a:prstGeom xmlns:a="http://schemas.openxmlformats.org/drawingml/2006/main" prst="rect">
-            <a:avLst/>
-          </a:prstGeom>
-          <a:ln xmlns:a="http://schemas.openxmlformats.org/drawingml/2006/main" w="12700">
-            <a:solidFill>
-              <a:srgbClr val="C89C40"/>
-            </a:solidFill>
-            <a:prstDash val="solid"/>
-          </a:ln>
-        </p:spPr>
-        <p:txBody>
-          <a:bodyPr xmlns:a="http://schemas.openxmlformats.org/drawingml/2006/main"/>
-          <a:lstStyle xmlns:a="http://schemas.openxmlformats.org/drawingml/2006/main"/>
-          <a:p xmlns:a="http://schemas.openxmlformats.org/drawingml/2006/main">
-            <a:endParaRPr/>
-          </a:p>
-        </p:txBody>
-      </p:sp>
-      <p:sp>
-        <p:nvSpPr>
-          <p:cNvPr id="42" name="Shape 37">
-            <a:extLst xmlns:a="http://schemas.openxmlformats.org/drawingml/2006/main">
-              <a:ext uri="{FF2B5EF4-FFF2-40B4-BE49-F238E27FC236}">
-                <a16:creationId xmlns:a16="http://schemas.microsoft.com/office/drawing/2014/main" id="{DC7C47A5-93C4-467C-AF6A-51561B8A3AB4}"/>
-              </a:ext>
-            </a:extLst>
-          </p:cNvPr>
-          <p:cNvSpPr>
-            <a:spLocks xmlns:a="http://schemas.openxmlformats.org/drawingml/2006/main" noGrp="1"/>
-          </p:cNvSpPr>
-          <p:nvPr/>
-        </p:nvSpPr>
-        <p:spPr>
-          <a:xfrm xmlns:a="http://schemas.openxmlformats.org/drawingml/2006/main">
-            <a:off x="6382512" y="3611880"/>
-            <a:ext cx="1417320" cy="237744"/>
-          </a:xfrm>
-          <a:prstGeom xmlns:a="http://schemas.openxmlformats.org/drawingml/2006/main" prst="roundRect">
-            <a:avLst>
-              <a:gd name="adj" fmla="val 23077"/>
-            </a:avLst>
-          </a:prstGeom>
-          <a:solidFill xmlns:a="http://schemas.openxmlformats.org/drawingml/2006/main">
-            <a:srgbClr val="B0762A"/>
-          </a:solidFill>
-          <a:ln xmlns:a="http://schemas.openxmlformats.org/drawingml/2006/main" w="6350">
-            <a:solidFill>
-              <a:srgbClr val="C89C40"/>
-            </a:solidFill>
-            <a:prstDash val="solid"/>
-          </a:ln>
-        </p:spPr>
-        <p:txBody>
-          <a:bodyPr xmlns:a="http://schemas.openxmlformats.org/drawingml/2006/main"/>
-          <a:lstStyle xmlns:a="http://schemas.openxmlformats.org/drawingml/2006/main"/>
-          <a:p xmlns:a="http://schemas.openxmlformats.org/drawingml/2006/main">
-            <a:endParaRPr/>
-          </a:p>
-        </p:txBody>
-      </p:sp>
-      <p:sp>
-        <p:nvSpPr>
-          <p:cNvPr id="43" name="Text 38">
-            <a:extLst xmlns:a="http://schemas.openxmlformats.org/drawingml/2006/main">
-              <a:ext uri="{FF2B5EF4-FFF2-40B4-BE49-F238E27FC236}">
-                <a16:creationId xmlns:a16="http://schemas.microsoft.com/office/drawing/2014/main" id="{0596B2BA-8710-4E95-8365-1BF11E1890BF}"/>
-              </a:ext>
-            </a:extLst>
-          </p:cNvPr>
-          <p:cNvSpPr>
-            <a:spLocks xmlns:a="http://schemas.openxmlformats.org/drawingml/2006/main" noGrp="1"/>
-          </p:cNvSpPr>
-          <p:nvPr/>
-        </p:nvSpPr>
-        <p:spPr>
-          <a:xfrm xmlns:a="http://schemas.openxmlformats.org/drawingml/2006/main">
-            <a:off x="6382512" y="3621024"/>
-            <a:ext cx="1417320" cy="219456"/>
-          </a:xfrm>
-          <a:prstGeom xmlns:a="http://schemas.openxmlformats.org/drawingml/2006/main" prst="rect">
-            <a:avLst/>
-          </a:prstGeom>
-          <a:noFill xmlns:a="http://schemas.openxmlformats.org/drawingml/2006/main"/>
-        </p:spPr>
-        <p:txBody>
-          <a:bodyPr xmlns:a="http://schemas.openxmlformats.org/drawingml/2006/main" wrap="square" lIns="0" tIns="0" rIns="0" bIns="0" anchor="ctr"/>
-          <a:lstStyle xmlns:a="http://schemas.openxmlformats.org/drawingml/2006/main"/>
-          <a:p xmlns:a="http://schemas.openxmlformats.org/drawingml/2006/main">
-            <a:pPr marL="0" indent="0" algn="ctr">
-              <a:buNone/>
-            </a:pPr>
-            <a:r>
-              <a:rPr sz="850" b="1" spc="60">
-                <a:solidFill>
-                  <a:srgbClr val="FFFFFF"/>
-                </a:solidFill>
-                <a:latin typeface="Calibri"/>
-                <a:ea typeface="Calibri"/>
-                <a:cs typeface="Calibri"/>
-              </a:rPr>
-              <a:t>DOUBLE CUP · PL</a:t>
-            </a:r>
-            <a:endParaRPr sz="850"/>
-          </a:p>
-        </p:txBody>
-      </p:sp>
-      <p:sp>
-        <p:nvSpPr>
-          <p:cNvPr id="44" name="Text 39">
-            <a:extLst xmlns:a="http://schemas.openxmlformats.org/drawingml/2006/main">
-              <a:ext uri="{FF2B5EF4-FFF2-40B4-BE49-F238E27FC236}">
-                <a16:creationId xmlns:a16="http://schemas.microsoft.com/office/drawing/2014/main" id="{C06B8F32-5124-4A18-AC53-3481907D9192}"/>
-              </a:ext>
-            </a:extLst>
-          </p:cNvPr>
-          <p:cNvSpPr>
-            <a:spLocks xmlns:a="http://schemas.openxmlformats.org/drawingml/2006/main" noGrp="1"/>
-          </p:cNvSpPr>
-          <p:nvPr/>
-        </p:nvSpPr>
-        <p:spPr>
-          <a:xfrm xmlns:a="http://schemas.openxmlformats.org/drawingml/2006/main">
-            <a:off x="6382512" y="3931920"/>
-            <a:ext cx="2340864" cy="548640"/>
-          </a:xfrm>
-          <a:prstGeom xmlns:a="http://schemas.openxmlformats.org/drawingml/2006/main" prst="rect">
-            <a:avLst/>
-          </a:prstGeom>
-          <a:noFill xmlns:a="http://schemas.openxmlformats.org/drawingml/2006/main"/>
-        </p:spPr>
-        <p:txBody>
-          <a:bodyPr xmlns:a="http://schemas.openxmlformats.org/drawingml/2006/main" wrap="square" lIns="0" tIns="0" rIns="0" bIns="0" anchor="t"/>
-          <a:lstStyle xmlns:a="http://schemas.openxmlformats.org/drawingml/2006/main"/>
-          <a:p xmlns:a="http://schemas.openxmlformats.org/drawingml/2006/main">
-            <a:pPr marL="0" indent="0">
-              <a:buNone/>
-            </a:pPr>
-            <a:r>
-              <a:rPr sz="1450" b="1">
-                <a:solidFill>
-                  <a:srgbClr val="FFFFFF"/>
+          <p:cNvPr id="29" name="Text 26">
+            <a:extLst xmlns:a="http://schemas.openxmlformats.org/drawingml/2006/main">
+              <a:ext uri="{FF2B5EF4-FFF2-40B4-BE49-F238E27FC236}">
+                <a16:creationId xmlns:a16="http://schemas.microsoft.com/office/drawing/2014/main" id="{C0BEDDE1-3BA8-41C7-A18B-3458416DEE72}"/>
+              </a:ext>
+            </a:extLst>
+          </p:cNvPr>
+          <p:cNvSpPr>
+            <a:spLocks xmlns:a="http://schemas.openxmlformats.org/drawingml/2006/main" noGrp="1"/>
+          </p:cNvSpPr>
+          <p:nvPr/>
+        </p:nvSpPr>
+        <p:spPr>
+          <a:xfrm xmlns:a="http://schemas.openxmlformats.org/drawingml/2006/main">
+            <a:off x="7717536" y="5148072"/>
+            <a:ext cx="1371600" cy="365760"/>
+          </a:xfrm>
+          <a:prstGeom xmlns:a="http://schemas.openxmlformats.org/drawingml/2006/main" prst="rect">
+            <a:avLst/>
+          </a:prstGeom>
+          <a:noFill xmlns:a="http://schemas.openxmlformats.org/drawingml/2006/main"/>
+        </p:spPr>
+        <p:txBody>
+          <a:bodyPr xmlns:a="http://schemas.openxmlformats.org/drawingml/2006/main" wrap="square" lIns="0" tIns="0" rIns="0" bIns="0" anchor="ctr"/>
+          <a:lstStyle xmlns:a="http://schemas.openxmlformats.org/drawingml/2006/main"/>
+          <a:p xmlns:a="http://schemas.openxmlformats.org/drawingml/2006/main">
+            <a:pPr marL="0" indent="0">
+              <a:buNone/>
+            </a:pPr>
+            <a:r>
+              <a:rPr sz="1900" b="1">
+                <a:solidFill>
+                  <a:srgbClr val="F5CE76"/>
                 </a:solidFill>
                 <a:latin typeface="Cambria"/>
                 <a:ea typeface="Cambria"/>
                 <a:cs typeface="Cambria"/>
               </a:rPr>
-              <a:t>SPAR Jasmine Rice Cups</a:t>
-            </a:r>
-            <a:endParaRPr sz="1450"/>
-          </a:p>
-        </p:txBody>
-      </p:sp>
-      <p:sp>
-        <p:nvSpPr>
-          <p:cNvPr id="45" name="Text 40">
-            <a:extLst xmlns:a="http://schemas.openxmlformats.org/drawingml/2006/main">
-              <a:ext uri="{FF2B5EF4-FFF2-40B4-BE49-F238E27FC236}">
-                <a16:creationId xmlns:a16="http://schemas.microsoft.com/office/drawing/2014/main" id="{B818A736-226A-4409-9E84-13D21A31A265}"/>
-              </a:ext>
-            </a:extLst>
-          </p:cNvPr>
-          <p:cNvSpPr>
-            <a:spLocks xmlns:a="http://schemas.openxmlformats.org/drawingml/2006/main" noGrp="1"/>
-          </p:cNvSpPr>
-          <p:nvPr/>
-        </p:nvSpPr>
-        <p:spPr>
-          <a:xfrm xmlns:a="http://schemas.openxmlformats.org/drawingml/2006/main">
-            <a:off x="6382512" y="4498848"/>
-            <a:ext cx="2340864" cy="237744"/>
-          </a:xfrm>
-          <a:prstGeom xmlns:a="http://schemas.openxmlformats.org/drawingml/2006/main" prst="rect">
-            <a:avLst/>
-          </a:prstGeom>
-          <a:noFill xmlns:a="http://schemas.openxmlformats.org/drawingml/2006/main"/>
-        </p:spPr>
-        <p:txBody>
-          <a:bodyPr xmlns:a="http://schemas.openxmlformats.org/drawingml/2006/main" wrap="square" lIns="0" tIns="0" rIns="0" bIns="0" anchor="ctr"/>
-          <a:lstStyle xmlns:a="http://schemas.openxmlformats.org/drawingml/2006/main"/>
-          <a:p xmlns:a="http://schemas.openxmlformats.org/drawingml/2006/main">
-            <a:pPr marL="0" indent="0">
-              <a:buNone/>
-            </a:pPr>
-            <a:r>
-              <a:rPr sz="1000">
-                <a:solidFill>
-                  <a:srgbClr val="D2E4CE"/>
-                </a:solidFill>
-                <a:latin typeface="Calibri"/>
-                <a:ea typeface="Calibri"/>
-                <a:cs typeface="Calibri"/>
-              </a:rPr>
-              <a:t>Приклад Private Label</a:t>
-            </a:r>
-            <a:endParaRPr sz="1000"/>
-          </a:p>
-        </p:txBody>
-      </p:sp>
-      <p:sp>
-        <p:nvSpPr>
-          <p:cNvPr id="46" name="Shape 41">
-            <a:extLst xmlns:a="http://schemas.openxmlformats.org/drawingml/2006/main">
-              <a:ext uri="{FF2B5EF4-FFF2-40B4-BE49-F238E27FC236}">
-                <a16:creationId xmlns:a16="http://schemas.microsoft.com/office/drawing/2014/main" id="{74EB33FE-2A74-4110-9400-0929BAE7D070}"/>
-              </a:ext>
-            </a:extLst>
-          </p:cNvPr>
-          <p:cNvSpPr>
-            <a:spLocks xmlns:a="http://schemas.openxmlformats.org/drawingml/2006/main" noGrp="1"/>
-          </p:cNvSpPr>
-          <p:nvPr/>
-        </p:nvSpPr>
-        <p:spPr>
-          <a:xfrm xmlns:a="http://schemas.openxmlformats.org/drawingml/2006/main">
-            <a:off x="6382512" y="4791456"/>
-            <a:ext cx="2340864" cy="1170432"/>
+              <a:t>PL</a:t>
+            </a:r>
+            <a:r>
+              <a:rPr sz="1100">
+                <a:solidFill>
+                  <a:srgbClr val="F5CE76"/>
+                </a:solidFill>
+                <a:latin typeface="Cambria"/>
+                <a:ea typeface="Cambria"/>
+                <a:cs typeface="Cambria"/>
+              </a:rPr>
+              <a:t> бренд</a:t>
+            </a:r>
+            <a:endParaRPr sz="1900"/>
+          </a:p>
+        </p:txBody>
+      </p:sp>
+      <p:sp>
+        <p:nvSpPr>
+          <p:cNvPr id="30" name="Text 27">
+            <a:extLst xmlns:a="http://schemas.openxmlformats.org/drawingml/2006/main">
+              <a:ext uri="{FF2B5EF4-FFF2-40B4-BE49-F238E27FC236}">
+                <a16:creationId xmlns:a16="http://schemas.microsoft.com/office/drawing/2014/main" id="{218C4906-3F42-4BCF-AD90-A44D05606B4C}"/>
+              </a:ext>
+            </a:extLst>
+          </p:cNvPr>
+          <p:cNvSpPr>
+            <a:spLocks xmlns:a="http://schemas.openxmlformats.org/drawingml/2006/main" noGrp="1"/>
+          </p:cNvSpPr>
+          <p:nvPr/>
+        </p:nvSpPr>
+        <p:spPr>
+          <a:xfrm xmlns:a="http://schemas.openxmlformats.org/drawingml/2006/main">
+            <a:off x="9098280" y="5148072"/>
+            <a:ext cx="2377440" cy="365760"/>
+          </a:xfrm>
+          <a:prstGeom xmlns:a="http://schemas.openxmlformats.org/drawingml/2006/main" prst="rect">
+            <a:avLst/>
+          </a:prstGeom>
+          <a:noFill xmlns:a="http://schemas.openxmlformats.org/drawingml/2006/main"/>
+        </p:spPr>
+        <p:txBody>
+          <a:bodyPr xmlns:a="http://schemas.openxmlformats.org/drawingml/2006/main" wrap="square" lIns="0" tIns="0" rIns="0" bIns="0" anchor="ctr"/>
+          <a:lstStyle xmlns:a="http://schemas.openxmlformats.org/drawingml/2006/main"/>
+          <a:p xmlns:a="http://schemas.openxmlformats.org/drawingml/2006/main">
+            <a:pPr marL="0" indent="0" algn="r">
+              <a:buNone/>
+            </a:pPr>
+            <a:r>
+              <a:rPr sz="1050">
+                <a:solidFill>
+                  <a:srgbClr val="FCF9F0"/>
+                </a:solidFill>
+                <a:latin typeface="Calibri"/>
+                <a:ea typeface="Calibri"/>
+                <a:cs typeface="Calibri"/>
+              </a:rPr>
+              <a:t>тільки Private Label</a:t>
+            </a:r>
+            <a:endParaRPr sz="1050"/>
+          </a:p>
+        </p:txBody>
+      </p:sp>
+      <p:sp>
+        <p:nvSpPr>
+          <p:cNvPr id="31" name="Shape 28">
+            <a:extLst xmlns:a="http://schemas.openxmlformats.org/drawingml/2006/main">
+              <a:ext uri="{FF2B5EF4-FFF2-40B4-BE49-F238E27FC236}">
+                <a16:creationId xmlns:a16="http://schemas.microsoft.com/office/drawing/2014/main" id="{5F74166D-A4F2-4F13-9CD5-9980A3D4D94F}"/>
+              </a:ext>
+            </a:extLst>
+          </p:cNvPr>
+          <p:cNvSpPr>
+            <a:spLocks xmlns:a="http://schemas.openxmlformats.org/drawingml/2006/main" noGrp="1"/>
+          </p:cNvSpPr>
+          <p:nvPr/>
+        </p:nvSpPr>
+        <p:spPr>
+          <a:xfrm xmlns:a="http://schemas.openxmlformats.org/drawingml/2006/main">
+            <a:off x="7534656" y="5660136"/>
+            <a:ext cx="4096512" cy="484632"/>
           </a:xfrm>
           <a:prstGeom xmlns:a="http://schemas.openxmlformats.org/drawingml/2006/main" prst="roundRect">
             <a:avLst>
-              <a:gd name="adj" fmla="val 5469"/>
-            </a:avLst>
-          </a:prstGeom>
-          <a:solidFill xmlns:a="http://schemas.openxmlformats.org/drawingml/2006/main">
-            <a:srgbClr val="1A5433">
-              <a:alpha val="92000"/>
-            </a:srgbClr>
-          </a:solidFill>
-          <a:ln xmlns:a="http://schemas.openxmlformats.org/drawingml/2006/main" w="9525">
-            <a:solidFill>
-              <a:srgbClr val="C89C40"/>
-            </a:solidFill>
-            <a:prstDash val="solid"/>
-          </a:ln>
-        </p:spPr>
-        <p:txBody>
-          <a:bodyPr xmlns:a="http://schemas.openxmlformats.org/drawingml/2006/main"/>
-          <a:lstStyle xmlns:a="http://schemas.openxmlformats.org/drawingml/2006/main"/>
-          <a:p xmlns:a="http://schemas.openxmlformats.org/drawingml/2006/main">
-            <a:endParaRPr/>
-          </a:p>
-        </p:txBody>
-      </p:sp>
-      <p:sp>
-        <p:nvSpPr>
-          <p:cNvPr id="47" name="Text 42">
-            <a:extLst xmlns:a="http://schemas.openxmlformats.org/drawingml/2006/main">
-              <a:ext uri="{FF2B5EF4-FFF2-40B4-BE49-F238E27FC236}">
-                <a16:creationId xmlns:a16="http://schemas.microsoft.com/office/drawing/2014/main" id="{49EEB924-E332-4CCD-95A2-34608E9213B3}"/>
-              </a:ext>
-            </a:extLst>
-          </p:cNvPr>
-          <p:cNvSpPr>
-            <a:spLocks xmlns:a="http://schemas.openxmlformats.org/drawingml/2006/main" noGrp="1"/>
-          </p:cNvSpPr>
-          <p:nvPr/>
-        </p:nvSpPr>
-        <p:spPr>
-          <a:xfrm xmlns:a="http://schemas.openxmlformats.org/drawingml/2006/main">
-            <a:off x="6492240" y="4855464"/>
-            <a:ext cx="2148840" cy="182880"/>
-          </a:xfrm>
-          <a:prstGeom xmlns:a="http://schemas.openxmlformats.org/drawingml/2006/main" prst="rect">
-            <a:avLst/>
-          </a:prstGeom>
-          <a:noFill xmlns:a="http://schemas.openxmlformats.org/drawingml/2006/main"/>
-        </p:spPr>
-        <p:txBody>
-          <a:bodyPr xmlns:a="http://schemas.openxmlformats.org/drawingml/2006/main" wrap="square" lIns="0" tIns="0" rIns="0" bIns="0" anchor="ctr"/>
-          <a:lstStyle xmlns:a="http://schemas.openxmlformats.org/drawingml/2006/main"/>
-          <a:p xmlns:a="http://schemas.openxmlformats.org/drawingml/2006/main">
-            <a:pPr marL="0" indent="0">
-              <a:buNone/>
-            </a:pPr>
-            <a:r>
-              <a:rPr sz="750" b="1" spc="100">
-                <a:solidFill>
-                  <a:srgbClr val="F5CE76"/>
-                </a:solidFill>
-                <a:latin typeface="Calibri"/>
-                <a:ea typeface="Calibri"/>
-                <a:cs typeface="Calibri"/>
-              </a:rPr>
-              <a:t>ПАРАМЕТРИ УПАКОВКИ</a:t>
-            </a:r>
-            <a:endParaRPr sz="750"/>
-          </a:p>
-        </p:txBody>
-      </p:sp>
-      <p:sp>
-        <p:nvSpPr>
-          <p:cNvPr id="48" name="Text 43">
-            <a:extLst xmlns:a="http://schemas.openxmlformats.org/drawingml/2006/main">
-              <a:ext uri="{FF2B5EF4-FFF2-40B4-BE49-F238E27FC236}">
-                <a16:creationId xmlns:a16="http://schemas.microsoft.com/office/drawing/2014/main" id="{1233661C-E122-46E4-B4AF-2E989ADA051C}"/>
-              </a:ext>
-            </a:extLst>
-          </p:cNvPr>
-          <p:cNvSpPr>
-            <a:spLocks xmlns:a="http://schemas.openxmlformats.org/drawingml/2006/main" noGrp="1"/>
-          </p:cNvSpPr>
-          <p:nvPr/>
-        </p:nvSpPr>
-        <p:spPr>
-          <a:xfrm xmlns:a="http://schemas.openxmlformats.org/drawingml/2006/main">
-            <a:off x="6492240" y="5056632"/>
-            <a:ext cx="658368" cy="192024"/>
-          </a:xfrm>
-          <a:prstGeom xmlns:a="http://schemas.openxmlformats.org/drawingml/2006/main" prst="rect">
-            <a:avLst/>
-          </a:prstGeom>
-          <a:noFill xmlns:a="http://schemas.openxmlformats.org/drawingml/2006/main"/>
-        </p:spPr>
-        <p:txBody>
-          <a:bodyPr xmlns:a="http://schemas.openxmlformats.org/drawingml/2006/main" wrap="square" lIns="0" tIns="0" rIns="0" bIns="0" anchor="ctr"/>
-          <a:lstStyle xmlns:a="http://schemas.openxmlformats.org/drawingml/2006/main"/>
-          <a:p xmlns:a="http://schemas.openxmlformats.org/drawingml/2006/main">
-            <a:pPr marL="0" indent="0">
-              <a:buNone/>
-            </a:pPr>
-            <a:r>
-              <a:rPr sz="900">
-                <a:solidFill>
-                  <a:srgbClr val="D2E4CE"/>
-                </a:solidFill>
-                <a:latin typeface="Calibri"/>
-                <a:ea typeface="Calibri"/>
-                <a:cs typeface="Calibri"/>
-              </a:rPr>
-              <a:t>Формат</a:t>
-            </a:r>
-            <a:endParaRPr sz="900"/>
-          </a:p>
-        </p:txBody>
-      </p:sp>
-      <p:sp>
-        <p:nvSpPr>
-          <p:cNvPr id="49" name="Text 44">
-            <a:extLst xmlns:a="http://schemas.openxmlformats.org/drawingml/2006/main">
-              <a:ext uri="{FF2B5EF4-FFF2-40B4-BE49-F238E27FC236}">
-                <a16:creationId xmlns:a16="http://schemas.microsoft.com/office/drawing/2014/main" id="{BFF0E6A6-EE49-4AEB-B04B-23DA22BE286F}"/>
-              </a:ext>
-            </a:extLst>
-          </p:cNvPr>
-          <p:cNvSpPr>
-            <a:spLocks xmlns:a="http://schemas.openxmlformats.org/drawingml/2006/main" noGrp="1"/>
-          </p:cNvSpPr>
-          <p:nvPr/>
-        </p:nvSpPr>
-        <p:spPr>
-          <a:xfrm xmlns:a="http://schemas.openxmlformats.org/drawingml/2006/main">
-            <a:off x="7132320" y="5056632"/>
-            <a:ext cx="1508760" cy="192024"/>
-          </a:xfrm>
-          <a:prstGeom xmlns:a="http://schemas.openxmlformats.org/drawingml/2006/main" prst="rect">
-            <a:avLst/>
-          </a:prstGeom>
-          <a:noFill xmlns:a="http://schemas.openxmlformats.org/drawingml/2006/main"/>
-        </p:spPr>
-        <p:txBody>
-          <a:bodyPr xmlns:a="http://schemas.openxmlformats.org/drawingml/2006/main" wrap="square" lIns="0" tIns="0" rIns="0" bIns="0" anchor="ctr"/>
-          <a:lstStyle xmlns:a="http://schemas.openxmlformats.org/drawingml/2006/main"/>
-          <a:p xmlns:a="http://schemas.openxmlformats.org/drawingml/2006/main">
-            <a:pPr marL="0" indent="0" algn="r">
-              <a:buNone/>
-            </a:pPr>
-            <a:r>
-              <a:rPr sz="950">
-                <a:solidFill>
-                  <a:srgbClr val="FCF9F0"/>
-                </a:solidFill>
-                <a:latin typeface="Calibri"/>
-                <a:ea typeface="Calibri"/>
-                <a:cs typeface="Calibri"/>
-              </a:rPr>
-              <a:t>2 × 125 г</a:t>
-            </a:r>
-            <a:endParaRPr sz="950"/>
-          </a:p>
-        </p:txBody>
-      </p:sp>
-      <p:sp>
-        <p:nvSpPr>
-          <p:cNvPr id="50" name="Text 45">
-            <a:extLst xmlns:a="http://schemas.openxmlformats.org/drawingml/2006/main">
-              <a:ext uri="{FF2B5EF4-FFF2-40B4-BE49-F238E27FC236}">
-                <a16:creationId xmlns:a16="http://schemas.microsoft.com/office/drawing/2014/main" id="{0696E1FB-7D6D-40FC-AD7C-66FBBC12B10C}"/>
-              </a:ext>
-            </a:extLst>
-          </p:cNvPr>
-          <p:cNvSpPr>
-            <a:spLocks xmlns:a="http://schemas.openxmlformats.org/drawingml/2006/main" noGrp="1"/>
-          </p:cNvSpPr>
-          <p:nvPr/>
-        </p:nvSpPr>
-        <p:spPr>
-          <a:xfrm xmlns:a="http://schemas.openxmlformats.org/drawingml/2006/main">
-            <a:off x="6492240" y="5262372"/>
-            <a:ext cx="658368" cy="192024"/>
-          </a:xfrm>
-          <a:prstGeom xmlns:a="http://schemas.openxmlformats.org/drawingml/2006/main" prst="rect">
-            <a:avLst/>
-          </a:prstGeom>
-          <a:noFill xmlns:a="http://schemas.openxmlformats.org/drawingml/2006/main"/>
-        </p:spPr>
-        <p:txBody>
-          <a:bodyPr xmlns:a="http://schemas.openxmlformats.org/drawingml/2006/main" wrap="square" lIns="0" tIns="0" rIns="0" bIns="0" anchor="ctr"/>
-          <a:lstStyle xmlns:a="http://schemas.openxmlformats.org/drawingml/2006/main"/>
-          <a:p xmlns:a="http://schemas.openxmlformats.org/drawingml/2006/main">
-            <a:pPr marL="0" indent="0">
-              <a:buNone/>
-            </a:pPr>
-            <a:r>
-              <a:rPr sz="900" b="1">
-                <a:solidFill>
-                  <a:srgbClr val="F5CE76"/>
-                </a:solidFill>
-                <a:latin typeface="Calibri"/>
-                <a:ea typeface="Calibri"/>
-                <a:cs typeface="Calibri"/>
-              </a:rPr>
-              <a:t>Короб</a:t>
-            </a:r>
-            <a:endParaRPr sz="900"/>
-          </a:p>
-        </p:txBody>
-      </p:sp>
-      <p:sp>
-        <p:nvSpPr>
-          <p:cNvPr id="51" name="Text 46">
-            <a:extLst xmlns:a="http://schemas.openxmlformats.org/drawingml/2006/main">
-              <a:ext uri="{FF2B5EF4-FFF2-40B4-BE49-F238E27FC236}">
-                <a16:creationId xmlns:a16="http://schemas.microsoft.com/office/drawing/2014/main" id="{EEC05408-8F7F-4048-A172-AEF7DC75A581}"/>
-              </a:ext>
-            </a:extLst>
-          </p:cNvPr>
-          <p:cNvSpPr>
-            <a:spLocks xmlns:a="http://schemas.openxmlformats.org/drawingml/2006/main" noGrp="1"/>
-          </p:cNvSpPr>
-          <p:nvPr/>
-        </p:nvSpPr>
-        <p:spPr>
-          <a:xfrm xmlns:a="http://schemas.openxmlformats.org/drawingml/2006/main">
-            <a:off x="7132320" y="5262372"/>
-            <a:ext cx="1508760" cy="192024"/>
-          </a:xfrm>
-          <a:prstGeom xmlns:a="http://schemas.openxmlformats.org/drawingml/2006/main" prst="rect">
-            <a:avLst/>
-          </a:prstGeom>
-          <a:noFill xmlns:a="http://schemas.openxmlformats.org/drawingml/2006/main"/>
-        </p:spPr>
-        <p:txBody>
-          <a:bodyPr xmlns:a="http://schemas.openxmlformats.org/drawingml/2006/main" wrap="square" lIns="0" tIns="0" rIns="0" bIns="0" anchor="ctr"/>
-          <a:lstStyle xmlns:a="http://schemas.openxmlformats.org/drawingml/2006/main"/>
-          <a:p xmlns:a="http://schemas.openxmlformats.org/drawingml/2006/main">
-            <a:pPr marL="0" indent="0" algn="r">
-              <a:buNone/>
-            </a:pPr>
-            <a:r>
-              <a:rPr sz="950" b="1">
-                <a:solidFill>
-                  <a:srgbClr val="F5CE76"/>
-                </a:solidFill>
-                <a:latin typeface="Calibri"/>
-                <a:ea typeface="Calibri"/>
-                <a:cs typeface="Calibri"/>
-              </a:rPr>
-              <a:t>6 од.</a:t>
-            </a:r>
-            <a:endParaRPr sz="950"/>
-          </a:p>
-        </p:txBody>
-      </p:sp>
-      <p:sp>
-        <p:nvSpPr>
-          <p:cNvPr id="52" name="Text 47">
-            <a:extLst xmlns:a="http://schemas.openxmlformats.org/drawingml/2006/main">
-              <a:ext uri="{FF2B5EF4-FFF2-40B4-BE49-F238E27FC236}">
-                <a16:creationId xmlns:a16="http://schemas.microsoft.com/office/drawing/2014/main" id="{EDF78F8F-BC3B-4297-9AED-58144068050A}"/>
-              </a:ext>
-            </a:extLst>
-          </p:cNvPr>
-          <p:cNvSpPr>
-            <a:spLocks xmlns:a="http://schemas.openxmlformats.org/drawingml/2006/main" noGrp="1"/>
-          </p:cNvSpPr>
-          <p:nvPr/>
-        </p:nvSpPr>
-        <p:spPr>
-          <a:xfrm xmlns:a="http://schemas.openxmlformats.org/drawingml/2006/main">
-            <a:off x="6492240" y="5468112"/>
-            <a:ext cx="658368" cy="192024"/>
-          </a:xfrm>
-          <a:prstGeom xmlns:a="http://schemas.openxmlformats.org/drawingml/2006/main" prst="rect">
-            <a:avLst/>
-          </a:prstGeom>
-          <a:noFill xmlns:a="http://schemas.openxmlformats.org/drawingml/2006/main"/>
-        </p:spPr>
-        <p:txBody>
-          <a:bodyPr xmlns:a="http://schemas.openxmlformats.org/drawingml/2006/main" wrap="square" lIns="0" tIns="0" rIns="0" bIns="0" anchor="ctr"/>
-          <a:lstStyle xmlns:a="http://schemas.openxmlformats.org/drawingml/2006/main"/>
-          <a:p xmlns:a="http://schemas.openxmlformats.org/drawingml/2006/main">
-            <a:pPr marL="0" indent="0">
-              <a:buNone/>
-            </a:pPr>
-            <a:r>
-              <a:rPr sz="900">
-                <a:solidFill>
-                  <a:srgbClr val="D2E4CE"/>
-                </a:solidFill>
-                <a:latin typeface="Calibri"/>
-                <a:ea typeface="Calibri"/>
-                <a:cs typeface="Calibri"/>
-              </a:rPr>
-              <a:t>Бренд</a:t>
-            </a:r>
-            <a:endParaRPr sz="900"/>
-          </a:p>
-        </p:txBody>
-      </p:sp>
-      <p:sp>
-        <p:nvSpPr>
-          <p:cNvPr id="53" name="Text 48">
-            <a:extLst xmlns:a="http://schemas.openxmlformats.org/drawingml/2006/main">
-              <a:ext uri="{FF2B5EF4-FFF2-40B4-BE49-F238E27FC236}">
-                <a16:creationId xmlns:a16="http://schemas.microsoft.com/office/drawing/2014/main" id="{7A843F49-7C4D-43E2-9A00-CD7BED7D7EEF}"/>
-              </a:ext>
-            </a:extLst>
-          </p:cNvPr>
-          <p:cNvSpPr>
-            <a:spLocks xmlns:a="http://schemas.openxmlformats.org/drawingml/2006/main" noGrp="1"/>
-          </p:cNvSpPr>
-          <p:nvPr/>
-        </p:nvSpPr>
-        <p:spPr>
-          <a:xfrm xmlns:a="http://schemas.openxmlformats.org/drawingml/2006/main">
-            <a:off x="7132320" y="5468112"/>
-            <a:ext cx="1508760" cy="192024"/>
-          </a:xfrm>
-          <a:prstGeom xmlns:a="http://schemas.openxmlformats.org/drawingml/2006/main" prst="rect">
-            <a:avLst/>
-          </a:prstGeom>
-          <a:noFill xmlns:a="http://schemas.openxmlformats.org/drawingml/2006/main"/>
-        </p:spPr>
-        <p:txBody>
-          <a:bodyPr xmlns:a="http://schemas.openxmlformats.org/drawingml/2006/main" wrap="square" lIns="0" tIns="0" rIns="0" bIns="0" anchor="ctr"/>
-          <a:lstStyle xmlns:a="http://schemas.openxmlformats.org/drawingml/2006/main"/>
-          <a:p xmlns:a="http://schemas.openxmlformats.org/drawingml/2006/main">
-            <a:pPr marL="0" indent="0" algn="r">
-              <a:buNone/>
-            </a:pPr>
-            <a:r>
-              <a:rPr sz="950">
-                <a:solidFill>
-                  <a:srgbClr val="FCF9F0"/>
-                </a:solidFill>
-                <a:latin typeface="Calibri"/>
-                <a:ea typeface="Calibri"/>
-                <a:cs typeface="Calibri"/>
-              </a:rPr>
-              <a:t>Private Label</a:t>
-            </a:r>
-            <a:endParaRPr sz="950"/>
-          </a:p>
-        </p:txBody>
-      </p:sp>
-      <p:sp>
-        <p:nvSpPr>
-          <p:cNvPr id="54" name="Text 49">
-            <a:extLst xmlns:a="http://schemas.openxmlformats.org/drawingml/2006/main">
-              <a:ext uri="{FF2B5EF4-FFF2-40B4-BE49-F238E27FC236}">
-                <a16:creationId xmlns:a16="http://schemas.microsoft.com/office/drawing/2014/main" id="{2766A248-70B7-4C50-86DC-4743FDE08FED}"/>
-              </a:ext>
-            </a:extLst>
-          </p:cNvPr>
-          <p:cNvSpPr>
-            <a:spLocks xmlns:a="http://schemas.openxmlformats.org/drawingml/2006/main" noGrp="1"/>
-          </p:cNvSpPr>
-          <p:nvPr/>
-        </p:nvSpPr>
-        <p:spPr>
-          <a:xfrm xmlns:a="http://schemas.openxmlformats.org/drawingml/2006/main">
-            <a:off x="6492240" y="5673852"/>
-            <a:ext cx="658368" cy="192024"/>
-          </a:xfrm>
-          <a:prstGeom xmlns:a="http://schemas.openxmlformats.org/drawingml/2006/main" prst="rect">
-            <a:avLst/>
-          </a:prstGeom>
-          <a:noFill xmlns:a="http://schemas.openxmlformats.org/drawingml/2006/main"/>
-        </p:spPr>
-        <p:txBody>
-          <a:bodyPr xmlns:a="http://schemas.openxmlformats.org/drawingml/2006/main" wrap="square" lIns="0" tIns="0" rIns="0" bIns="0" anchor="ctr"/>
-          <a:lstStyle xmlns:a="http://schemas.openxmlformats.org/drawingml/2006/main"/>
-          <a:p xmlns:a="http://schemas.openxmlformats.org/drawingml/2006/main">
-            <a:pPr marL="0" indent="0">
-              <a:buNone/>
-            </a:pPr>
-            <a:r>
-              <a:rPr sz="900">
-                <a:solidFill>
-                  <a:srgbClr val="D2E4CE"/>
-                </a:solidFill>
-                <a:latin typeface="Calibri"/>
-                <a:ea typeface="Calibri"/>
-                <a:cs typeface="Calibri"/>
-              </a:rPr>
-              <a:t>Sleeve</a:t>
-            </a:r>
-            <a:endParaRPr sz="900"/>
-          </a:p>
-        </p:txBody>
-      </p:sp>
-      <p:sp>
-        <p:nvSpPr>
-          <p:cNvPr id="55" name="Text 50">
-            <a:extLst xmlns:a="http://schemas.openxmlformats.org/drawingml/2006/main">
-              <a:ext uri="{FF2B5EF4-FFF2-40B4-BE49-F238E27FC236}">
-                <a16:creationId xmlns:a16="http://schemas.microsoft.com/office/drawing/2014/main" id="{9C30AE53-0A95-413F-B9EF-82A330647E84}"/>
-              </a:ext>
-            </a:extLst>
-          </p:cNvPr>
-          <p:cNvSpPr>
-            <a:spLocks xmlns:a="http://schemas.openxmlformats.org/drawingml/2006/main" noGrp="1"/>
-          </p:cNvSpPr>
-          <p:nvPr/>
-        </p:nvSpPr>
-        <p:spPr>
-          <a:xfrm xmlns:a="http://schemas.openxmlformats.org/drawingml/2006/main">
-            <a:off x="7132320" y="5673852"/>
-            <a:ext cx="1508760" cy="192024"/>
-          </a:xfrm>
-          <a:prstGeom xmlns:a="http://schemas.openxmlformats.org/drawingml/2006/main" prst="rect">
-            <a:avLst/>
-          </a:prstGeom>
-          <a:noFill xmlns:a="http://schemas.openxmlformats.org/drawingml/2006/main"/>
-        </p:spPr>
-        <p:txBody>
-          <a:bodyPr xmlns:a="http://schemas.openxmlformats.org/drawingml/2006/main" wrap="square" lIns="0" tIns="0" rIns="0" bIns="0" anchor="ctr"/>
-          <a:lstStyle xmlns:a="http://schemas.openxmlformats.org/drawingml/2006/main"/>
-          <a:p xmlns:a="http://schemas.openxmlformats.org/drawingml/2006/main">
-            <a:pPr marL="0" indent="0" algn="r">
-              <a:buNone/>
-            </a:pPr>
-            <a:r>
-              <a:rPr sz="950">
-                <a:solidFill>
-                  <a:srgbClr val="FCF9F0"/>
-                </a:solidFill>
-                <a:latin typeface="Calibri"/>
-                <a:ea typeface="Calibri"/>
-                <a:cs typeface="Calibri"/>
-              </a:rPr>
-              <a:t>дизайн клієнта</a:t>
-            </a:r>
-            <a:endParaRPr sz="950"/>
-          </a:p>
-        </p:txBody>
-      </p:sp>
-      <p:sp>
-        <p:nvSpPr>
-          <p:cNvPr id="56" name="Shape 51">
-            <a:extLst xmlns:a="http://schemas.openxmlformats.org/drawingml/2006/main">
-              <a:ext uri="{FF2B5EF4-FFF2-40B4-BE49-F238E27FC236}">
-                <a16:creationId xmlns:a16="http://schemas.microsoft.com/office/drawing/2014/main" id="{BB65C8A4-36FE-4323-95C1-6CF79F6F2BD2}"/>
-              </a:ext>
-            </a:extLst>
-          </p:cNvPr>
-          <p:cNvSpPr>
-            <a:spLocks xmlns:a="http://schemas.openxmlformats.org/drawingml/2006/main" noGrp="1"/>
-          </p:cNvSpPr>
-          <p:nvPr/>
-        </p:nvSpPr>
-        <p:spPr>
-          <a:xfrm xmlns:a="http://schemas.openxmlformats.org/drawingml/2006/main">
-            <a:off x="9015984" y="1536192"/>
-            <a:ext cx="2706624" cy="4626864"/>
-          </a:xfrm>
-          <a:prstGeom xmlns:a="http://schemas.openxmlformats.org/drawingml/2006/main" prst="roundRect">
-            <a:avLst>
-              <a:gd name="adj" fmla="val 4054"/>
+              <a:gd name="adj" fmla="val 15094"/>
             </a:avLst>
           </a:prstGeom>
           <a:solidFill xmlns:a="http://schemas.openxmlformats.org/drawingml/2006/main">
@@ -17257,401 +16195,81 @@
           </a:p>
         </p:txBody>
       </p:sp>
-      <p:pic>
-        <p:nvPicPr>
-          <p:cNvPr id="133" name="Picture 76"/>
-          <p:cNvPicPr>
-            <a:picLocks xmlns:a="http://schemas.openxmlformats.org/drawingml/2006/main" noChangeAspect="1"/>
-          </p:cNvPicPr>
-          <p:nvPr/>
-        </p:nvPicPr>
-        <p:blipFill>
-          <a:blip xmlns:r="http://schemas.openxmlformats.org/officeDocument/2006/relationships" xmlns:a="http://schemas.openxmlformats.org/drawingml/2006/main" r:embed="Re33a6bf00cf54ef3"/>
-          <a:stretch xmlns:a="http://schemas.openxmlformats.org/drawingml/2006/main">
-            <a:fillRect l="0" t="0" r="0" b="0"/>
-          </a:stretch>
-        </p:blipFill>
-        <p:spPr>
-          <a:xfrm xmlns:a="http://schemas.openxmlformats.org/drawingml/2006/main">
-            <a:off x="9198864" y="1700784"/>
-            <a:ext cx="2340864" cy="1810512"/>
-          </a:xfrm>
-          <a:prstGeom xmlns:a="http://schemas.openxmlformats.org/drawingml/2006/main" prst="roundRect">
-            <a:avLst/>
-          </a:prstGeom>
-        </p:spPr>
-      </p:pic>
-      <p:sp>
-        <p:nvSpPr>
-          <p:cNvPr id="58" name="Shape 52">
-            <a:extLst xmlns:a="http://schemas.openxmlformats.org/drawingml/2006/main">
-              <a:ext uri="{FF2B5EF4-FFF2-40B4-BE49-F238E27FC236}">
-                <a16:creationId xmlns:a16="http://schemas.microsoft.com/office/drawing/2014/main" id="{A089A1B1-F6D0-4239-90A9-2A5FF4C2A16C}"/>
-              </a:ext>
-            </a:extLst>
-          </p:cNvPr>
-          <p:cNvSpPr>
-            <a:spLocks xmlns:a="http://schemas.openxmlformats.org/drawingml/2006/main" noGrp="1"/>
-          </p:cNvSpPr>
-          <p:nvPr/>
-        </p:nvSpPr>
-        <p:spPr>
-          <a:xfrm xmlns:a="http://schemas.openxmlformats.org/drawingml/2006/main">
-            <a:off x="9198864" y="1700784"/>
-            <a:ext cx="2340864" cy="1810512"/>
-          </a:xfrm>
-          <a:prstGeom xmlns:a="http://schemas.openxmlformats.org/drawingml/2006/main" prst="rect">
-            <a:avLst/>
-          </a:prstGeom>
-          <a:ln xmlns:a="http://schemas.openxmlformats.org/drawingml/2006/main" w="12700">
-            <a:solidFill>
-              <a:srgbClr val="C89C40"/>
-            </a:solidFill>
-            <a:prstDash val="solid"/>
-          </a:ln>
-        </p:spPr>
-        <p:txBody>
-          <a:bodyPr xmlns:a="http://schemas.openxmlformats.org/drawingml/2006/main"/>
-          <a:lstStyle xmlns:a="http://schemas.openxmlformats.org/drawingml/2006/main"/>
-          <a:p xmlns:a="http://schemas.openxmlformats.org/drawingml/2006/main">
-            <a:endParaRPr/>
-          </a:p>
-        </p:txBody>
-      </p:sp>
-      <p:sp>
-        <p:nvSpPr>
-          <p:cNvPr id="59" name="Shape 53">
-            <a:extLst xmlns:a="http://schemas.openxmlformats.org/drawingml/2006/main">
-              <a:ext uri="{FF2B5EF4-FFF2-40B4-BE49-F238E27FC236}">
-                <a16:creationId xmlns:a16="http://schemas.microsoft.com/office/drawing/2014/main" id="{102F35A9-F072-41A9-A5EF-E4FBAAA99241}"/>
-              </a:ext>
-            </a:extLst>
-          </p:cNvPr>
-          <p:cNvSpPr>
-            <a:spLocks xmlns:a="http://schemas.openxmlformats.org/drawingml/2006/main" noGrp="1"/>
-          </p:cNvSpPr>
-          <p:nvPr/>
-        </p:nvSpPr>
-        <p:spPr>
-          <a:xfrm xmlns:a="http://schemas.openxmlformats.org/drawingml/2006/main">
-            <a:off x="9198864" y="3611880"/>
-            <a:ext cx="1417320" cy="237744"/>
-          </a:xfrm>
-          <a:prstGeom xmlns:a="http://schemas.openxmlformats.org/drawingml/2006/main" prst="roundRect">
-            <a:avLst>
-              <a:gd name="adj" fmla="val 23077"/>
-            </a:avLst>
-          </a:prstGeom>
-          <a:solidFill xmlns:a="http://schemas.openxmlformats.org/drawingml/2006/main">
-            <a:srgbClr val="B0762A"/>
-          </a:solidFill>
-          <a:ln xmlns:a="http://schemas.openxmlformats.org/drawingml/2006/main" w="6350">
-            <a:solidFill>
-              <a:srgbClr val="C89C40"/>
-            </a:solidFill>
-            <a:prstDash val="solid"/>
-          </a:ln>
-        </p:spPr>
-        <p:txBody>
-          <a:bodyPr xmlns:a="http://schemas.openxmlformats.org/drawingml/2006/main"/>
-          <a:lstStyle xmlns:a="http://schemas.openxmlformats.org/drawingml/2006/main"/>
-          <a:p xmlns:a="http://schemas.openxmlformats.org/drawingml/2006/main">
-            <a:endParaRPr/>
-          </a:p>
-        </p:txBody>
-      </p:sp>
-      <p:sp>
-        <p:nvSpPr>
-          <p:cNvPr id="60" name="Text 54">
-            <a:extLst xmlns:a="http://schemas.openxmlformats.org/drawingml/2006/main">
-              <a:ext uri="{FF2B5EF4-FFF2-40B4-BE49-F238E27FC236}">
-                <a16:creationId xmlns:a16="http://schemas.microsoft.com/office/drawing/2014/main" id="{EA0F7E19-BC03-4457-BB96-38AB3991AB1A}"/>
-              </a:ext>
-            </a:extLst>
-          </p:cNvPr>
-          <p:cNvSpPr>
-            <a:spLocks xmlns:a="http://schemas.openxmlformats.org/drawingml/2006/main" noGrp="1"/>
-          </p:cNvSpPr>
-          <p:nvPr/>
-        </p:nvSpPr>
-        <p:spPr>
-          <a:xfrm xmlns:a="http://schemas.openxmlformats.org/drawingml/2006/main">
-            <a:off x="9198864" y="3621024"/>
-            <a:ext cx="1417320" cy="219456"/>
-          </a:xfrm>
-          <a:prstGeom xmlns:a="http://schemas.openxmlformats.org/drawingml/2006/main" prst="rect">
-            <a:avLst/>
-          </a:prstGeom>
-          <a:noFill xmlns:a="http://schemas.openxmlformats.org/drawingml/2006/main"/>
-        </p:spPr>
-        <p:txBody>
-          <a:bodyPr xmlns:a="http://schemas.openxmlformats.org/drawingml/2006/main" wrap="square" lIns="0" tIns="0" rIns="0" bIns="0" anchor="ctr"/>
-          <a:lstStyle xmlns:a="http://schemas.openxmlformats.org/drawingml/2006/main"/>
-          <a:p xmlns:a="http://schemas.openxmlformats.org/drawingml/2006/main">
-            <a:pPr marL="0" indent="0" algn="ctr">
-              <a:buNone/>
-            </a:pPr>
-            <a:r>
-              <a:rPr sz="850" b="1" spc="60">
-                <a:solidFill>
-                  <a:srgbClr val="FFFFFF"/>
-                </a:solidFill>
-                <a:latin typeface="Calibri"/>
-                <a:ea typeface="Calibri"/>
-                <a:cs typeface="Calibri"/>
-              </a:rPr>
-              <a:t>MIX CONTAINER</a:t>
-            </a:r>
-            <a:endParaRPr sz="850"/>
-          </a:p>
-        </p:txBody>
-      </p:sp>
-      <p:sp>
-        <p:nvSpPr>
-          <p:cNvPr id="61" name="Text 55">
-            <a:extLst xmlns:a="http://schemas.openxmlformats.org/drawingml/2006/main">
-              <a:ext uri="{FF2B5EF4-FFF2-40B4-BE49-F238E27FC236}">
-                <a16:creationId xmlns:a16="http://schemas.microsoft.com/office/drawing/2014/main" id="{53175901-99C3-41D7-9C1A-329684E5875E}"/>
-              </a:ext>
-            </a:extLst>
-          </p:cNvPr>
-          <p:cNvSpPr>
-            <a:spLocks xmlns:a="http://schemas.openxmlformats.org/drawingml/2006/main" noGrp="1"/>
-          </p:cNvSpPr>
-          <p:nvPr/>
-        </p:nvSpPr>
-        <p:spPr>
-          <a:xfrm xmlns:a="http://schemas.openxmlformats.org/drawingml/2006/main">
-            <a:off x="9198864" y="3931920"/>
-            <a:ext cx="2340864" cy="548640"/>
-          </a:xfrm>
-          <a:prstGeom xmlns:a="http://schemas.openxmlformats.org/drawingml/2006/main" prst="rect">
-            <a:avLst/>
-          </a:prstGeom>
-          <a:noFill xmlns:a="http://schemas.openxmlformats.org/drawingml/2006/main"/>
-        </p:spPr>
-        <p:txBody>
-          <a:bodyPr xmlns:a="http://schemas.openxmlformats.org/drawingml/2006/main" wrap="square" lIns="0" tIns="0" rIns="0" bIns="0" anchor="t"/>
-          <a:lstStyle xmlns:a="http://schemas.openxmlformats.org/drawingml/2006/main"/>
-          <a:p xmlns:a="http://schemas.openxmlformats.org/drawingml/2006/main">
-            <a:pPr marL="0" indent="0">
-              <a:buNone/>
-            </a:pPr>
-            <a:r>
-              <a:rPr sz="1450" b="1">
-                <a:solidFill>
-                  <a:srgbClr val="FFFFFF"/>
+      <p:sp>
+        <p:nvSpPr>
+          <p:cNvPr id="32" name="Text 29">
+            <a:extLst xmlns:a="http://schemas.openxmlformats.org/drawingml/2006/main">
+              <a:ext uri="{FF2B5EF4-FFF2-40B4-BE49-F238E27FC236}">
+                <a16:creationId xmlns:a16="http://schemas.microsoft.com/office/drawing/2014/main" id="{261A9ED7-0551-4B4E-B905-410FED97DEDE}"/>
+              </a:ext>
+            </a:extLst>
+          </p:cNvPr>
+          <p:cNvSpPr>
+            <a:spLocks xmlns:a="http://schemas.openxmlformats.org/drawingml/2006/main" noGrp="1"/>
+          </p:cNvSpPr>
+          <p:nvPr/>
+        </p:nvSpPr>
+        <p:spPr>
+          <a:xfrm xmlns:a="http://schemas.openxmlformats.org/drawingml/2006/main">
+            <a:off x="7717536" y="5715000"/>
+            <a:ext cx="1371600" cy="365760"/>
+          </a:xfrm>
+          <a:prstGeom xmlns:a="http://schemas.openxmlformats.org/drawingml/2006/main" prst="rect">
+            <a:avLst/>
+          </a:prstGeom>
+          <a:noFill xmlns:a="http://schemas.openxmlformats.org/drawingml/2006/main"/>
+        </p:spPr>
+        <p:txBody>
+          <a:bodyPr xmlns:a="http://schemas.openxmlformats.org/drawingml/2006/main" wrap="square" lIns="0" tIns="0" rIns="0" bIns="0" anchor="ctr"/>
+          <a:lstStyle xmlns:a="http://schemas.openxmlformats.org/drawingml/2006/main"/>
+          <a:p xmlns:a="http://schemas.openxmlformats.org/drawingml/2006/main">
+            <a:pPr marL="0" indent="0">
+              <a:buNone/>
+            </a:pPr>
+            <a:r>
+              <a:rPr sz="1900" b="1">
+                <a:solidFill>
+                  <a:srgbClr val="F5CE76"/>
                 </a:solidFill>
                 <a:latin typeface="Cambria"/>
                 <a:ea typeface="Cambria"/>
                 <a:cs typeface="Cambria"/>
               </a:rPr>
-              <a:t>Cup + Pouch</a:t>
-            </a:r>
-            <a:endParaRPr sz="1450"/>
-          </a:p>
-        </p:txBody>
-      </p:sp>
-      <p:sp>
-        <p:nvSpPr>
-          <p:cNvPr id="62" name="Text 56">
-            <a:extLst xmlns:a="http://schemas.openxmlformats.org/drawingml/2006/main">
-              <a:ext uri="{FF2B5EF4-FFF2-40B4-BE49-F238E27FC236}">
-                <a16:creationId xmlns:a16="http://schemas.microsoft.com/office/drawing/2014/main" id="{B27564B5-2E37-4E8E-B961-4CCD25190B86}"/>
-              </a:ext>
-            </a:extLst>
-          </p:cNvPr>
-          <p:cNvSpPr>
-            <a:spLocks xmlns:a="http://schemas.openxmlformats.org/drawingml/2006/main" noGrp="1"/>
-          </p:cNvSpPr>
-          <p:nvPr/>
-        </p:nvSpPr>
-        <p:spPr>
-          <a:xfrm xmlns:a="http://schemas.openxmlformats.org/drawingml/2006/main">
-            <a:off x="9198864" y="4498848"/>
-            <a:ext cx="2340864" cy="237744"/>
-          </a:xfrm>
-          <a:prstGeom xmlns:a="http://schemas.openxmlformats.org/drawingml/2006/main" prst="rect">
-            <a:avLst/>
-          </a:prstGeom>
-          <a:noFill xmlns:a="http://schemas.openxmlformats.org/drawingml/2006/main"/>
-        </p:spPr>
-        <p:txBody>
-          <a:bodyPr xmlns:a="http://schemas.openxmlformats.org/drawingml/2006/main" wrap="square" lIns="0" tIns="0" rIns="0" bIns="0" anchor="ctr"/>
-          <a:lstStyle xmlns:a="http://schemas.openxmlformats.org/drawingml/2006/main"/>
-          <a:p xmlns:a="http://schemas.openxmlformats.org/drawingml/2006/main">
-            <a:pPr marL="0" indent="0">
-              <a:buNone/>
-            </a:pPr>
-            <a:r>
-              <a:rPr sz="1000">
-                <a:solidFill>
-                  <a:srgbClr val="D2E4CE"/>
-                </a:solidFill>
-                <a:latin typeface="Calibri"/>
-                <a:ea typeface="Calibri"/>
-                <a:cs typeface="Calibri"/>
-              </a:rPr>
-              <a:t>FOB Bangkok · навалом</a:t>
-            </a:r>
-            <a:endParaRPr sz="1000"/>
-          </a:p>
-        </p:txBody>
-      </p:sp>
-      <p:sp>
-        <p:nvSpPr>
-          <p:cNvPr id="63" name="Shape 57">
-            <a:extLst xmlns:a="http://schemas.openxmlformats.org/drawingml/2006/main">
-              <a:ext uri="{FF2B5EF4-FFF2-40B4-BE49-F238E27FC236}">
-                <a16:creationId xmlns:a16="http://schemas.microsoft.com/office/drawing/2014/main" id="{FE01E20B-9EBB-4017-A8D9-C2567B2E5EC1}"/>
-              </a:ext>
-            </a:extLst>
-          </p:cNvPr>
-          <p:cNvSpPr>
-            <a:spLocks xmlns:a="http://schemas.openxmlformats.org/drawingml/2006/main" noGrp="1"/>
-          </p:cNvSpPr>
-          <p:nvPr/>
-        </p:nvSpPr>
-        <p:spPr>
-          <a:xfrm xmlns:a="http://schemas.openxmlformats.org/drawingml/2006/main">
-            <a:off x="9198864" y="4791456"/>
-            <a:ext cx="2340864" cy="1170432"/>
-          </a:xfrm>
-          <a:prstGeom xmlns:a="http://schemas.openxmlformats.org/drawingml/2006/main" prst="roundRect">
-            <a:avLst>
-              <a:gd name="adj" fmla="val 5469"/>
-            </a:avLst>
-          </a:prstGeom>
-          <a:solidFill xmlns:a="http://schemas.openxmlformats.org/drawingml/2006/main">
-            <a:srgbClr val="1A5433">
-              <a:alpha val="92000"/>
-            </a:srgbClr>
-          </a:solidFill>
-          <a:ln xmlns:a="http://schemas.openxmlformats.org/drawingml/2006/main" w="9525">
-            <a:solidFill>
-              <a:srgbClr val="C89C40"/>
-            </a:solidFill>
-            <a:prstDash val="solid"/>
-          </a:ln>
-        </p:spPr>
-        <p:txBody>
-          <a:bodyPr xmlns:a="http://schemas.openxmlformats.org/drawingml/2006/main"/>
-          <a:lstStyle xmlns:a="http://schemas.openxmlformats.org/drawingml/2006/main"/>
-          <a:p xmlns:a="http://schemas.openxmlformats.org/drawingml/2006/main">
-            <a:endParaRPr/>
-          </a:p>
-        </p:txBody>
-      </p:sp>
-      <p:sp>
-        <p:nvSpPr>
-          <p:cNvPr id="64" name="Text 58">
-            <a:extLst xmlns:a="http://schemas.openxmlformats.org/drawingml/2006/main">
-              <a:ext uri="{FF2B5EF4-FFF2-40B4-BE49-F238E27FC236}">
-                <a16:creationId xmlns:a16="http://schemas.microsoft.com/office/drawing/2014/main" id="{669B1082-8915-4983-B2B6-C14A6B449D5E}"/>
-              </a:ext>
-            </a:extLst>
-          </p:cNvPr>
-          <p:cNvSpPr>
-            <a:spLocks xmlns:a="http://schemas.openxmlformats.org/drawingml/2006/main" noGrp="1"/>
-          </p:cNvSpPr>
-          <p:nvPr/>
-        </p:nvSpPr>
-        <p:spPr>
-          <a:xfrm xmlns:a="http://schemas.openxmlformats.org/drawingml/2006/main">
-            <a:off x="9308592" y="4855464"/>
-            <a:ext cx="2148840" cy="182880"/>
-          </a:xfrm>
-          <a:prstGeom xmlns:a="http://schemas.openxmlformats.org/drawingml/2006/main" prst="rect">
-            <a:avLst/>
-          </a:prstGeom>
-          <a:noFill xmlns:a="http://schemas.openxmlformats.org/drawingml/2006/main"/>
-        </p:spPr>
-        <p:txBody>
-          <a:bodyPr xmlns:a="http://schemas.openxmlformats.org/drawingml/2006/main" wrap="square" lIns="0" tIns="0" rIns="0" bIns="0" anchor="ctr"/>
-          <a:lstStyle xmlns:a="http://schemas.openxmlformats.org/drawingml/2006/main"/>
-          <a:p xmlns:a="http://schemas.openxmlformats.org/drawingml/2006/main">
-            <a:pPr marL="0" indent="0">
-              <a:buNone/>
-            </a:pPr>
-            <a:r>
-              <a:rPr sz="750" b="1" spc="100">
+              <a:t>SPAR</a:t>
+            </a:r>
+            <a:r>
+              <a:rPr sz="1100">
                 <a:solidFill>
                   <a:srgbClr val="F5CE76"/>
                 </a:solidFill>
-                <a:latin typeface="Calibri"/>
-                <a:ea typeface="Calibri"/>
-                <a:cs typeface="Calibri"/>
-              </a:rPr>
-              <a:t>ПАРАМЕТРИ ЗАВАНТАЖЕННЯ</a:t>
-            </a:r>
-            <a:endParaRPr sz="750"/>
-          </a:p>
-        </p:txBody>
-      </p:sp>
-      <p:sp>
-        <p:nvSpPr>
-          <p:cNvPr id="65" name="Text 59">
-            <a:extLst xmlns:a="http://schemas.openxmlformats.org/drawingml/2006/main">
-              <a:ext uri="{FF2B5EF4-FFF2-40B4-BE49-F238E27FC236}">
-                <a16:creationId xmlns:a16="http://schemas.microsoft.com/office/drawing/2014/main" id="{BD1C138D-AD32-4415-A37B-0EEFBF070D1B}"/>
-              </a:ext>
-            </a:extLst>
-          </p:cNvPr>
-          <p:cNvSpPr>
-            <a:spLocks xmlns:a="http://schemas.openxmlformats.org/drawingml/2006/main" noGrp="1"/>
-          </p:cNvSpPr>
-          <p:nvPr/>
-        </p:nvSpPr>
-        <p:spPr>
-          <a:xfrm xmlns:a="http://schemas.openxmlformats.org/drawingml/2006/main">
-            <a:off x="9308592" y="5056632"/>
-            <a:ext cx="658368" cy="192024"/>
-          </a:xfrm>
-          <a:prstGeom xmlns:a="http://schemas.openxmlformats.org/drawingml/2006/main" prst="rect">
-            <a:avLst/>
-          </a:prstGeom>
-          <a:noFill xmlns:a="http://schemas.openxmlformats.org/drawingml/2006/main"/>
-        </p:spPr>
-        <p:txBody>
-          <a:bodyPr xmlns:a="http://schemas.openxmlformats.org/drawingml/2006/main" wrap="square" lIns="0" tIns="0" rIns="0" bIns="0" anchor="ctr"/>
-          <a:lstStyle xmlns:a="http://schemas.openxmlformats.org/drawingml/2006/main"/>
-          <a:p xmlns:a="http://schemas.openxmlformats.org/drawingml/2006/main">
-            <a:pPr marL="0" indent="0">
-              <a:buNone/>
-            </a:pPr>
-            <a:r>
-              <a:rPr sz="900">
-                <a:solidFill>
-                  <a:srgbClr val="D2E4CE"/>
-                </a:solidFill>
-                <a:latin typeface="Calibri"/>
-                <a:ea typeface="Calibri"/>
-                <a:cs typeface="Calibri"/>
-              </a:rPr>
-              <a:t>Мікс</a:t>
-            </a:r>
-            <a:endParaRPr sz="900"/>
-          </a:p>
-        </p:txBody>
-      </p:sp>
-      <p:sp>
-        <p:nvSpPr>
-          <p:cNvPr id="66" name="Text 60">
-            <a:extLst xmlns:a="http://schemas.openxmlformats.org/drawingml/2006/main">
-              <a:ext uri="{FF2B5EF4-FFF2-40B4-BE49-F238E27FC236}">
-                <a16:creationId xmlns:a16="http://schemas.microsoft.com/office/drawing/2014/main" id="{6AD7731F-A450-4B30-9B7A-DC5E48D9DC38}"/>
-              </a:ext>
-            </a:extLst>
-          </p:cNvPr>
-          <p:cNvSpPr>
-            <a:spLocks xmlns:a="http://schemas.openxmlformats.org/drawingml/2006/main" noGrp="1"/>
-          </p:cNvSpPr>
-          <p:nvPr/>
-        </p:nvSpPr>
-        <p:spPr>
-          <a:xfrm xmlns:a="http://schemas.openxmlformats.org/drawingml/2006/main">
-            <a:off x="9948672" y="5056632"/>
-            <a:ext cx="1508760" cy="192024"/>
+                <a:latin typeface="Cambria"/>
+                <a:ea typeface="Cambria"/>
+                <a:cs typeface="Cambria"/>
+              </a:rPr>
+              <a:t/>
+            </a:r>
+            <a:endParaRPr sz="1900"/>
+          </a:p>
+        </p:txBody>
+      </p:sp>
+      <p:sp>
+        <p:nvSpPr>
+          <p:cNvPr id="33" name="Text 30">
+            <a:extLst xmlns:a="http://schemas.openxmlformats.org/drawingml/2006/main">
+              <a:ext uri="{FF2B5EF4-FFF2-40B4-BE49-F238E27FC236}">
+                <a16:creationId xmlns:a16="http://schemas.microsoft.com/office/drawing/2014/main" id="{E99E232B-CE92-4C25-B546-D18CAEAE1AAC}"/>
+              </a:ext>
+            </a:extLst>
+          </p:cNvPr>
+          <p:cNvSpPr>
+            <a:spLocks xmlns:a="http://schemas.openxmlformats.org/drawingml/2006/main" noGrp="1"/>
+          </p:cNvSpPr>
+          <p:nvPr/>
+        </p:nvSpPr>
+        <p:spPr>
+          <a:xfrm xmlns:a="http://schemas.openxmlformats.org/drawingml/2006/main">
+            <a:off x="9098280" y="5715000"/>
+            <a:ext cx="2377440" cy="365760"/>
           </a:xfrm>
           <a:prstGeom xmlns:a="http://schemas.openxmlformats.org/drawingml/2006/main" prst="rect">
             <a:avLst/>
@@ -17666,7 +16284,7 @@
               <a:buNone/>
             </a:pPr>
             <a:r>
-              <a:rPr sz="950">
+              <a:rPr sz="1050">
                 <a:solidFill>
                   <a:srgbClr val="FCF9F0"/>
                 </a:solidFill>
@@ -17674,294 +16292,18 @@
                 <a:ea typeface="Calibri"/>
                 <a:cs typeface="Calibri"/>
               </a:rPr>
-              <a:t>Cup + Pouch</a:t>
-            </a:r>
-            <a:endParaRPr sz="950"/>
-          </a:p>
-        </p:txBody>
-      </p:sp>
-      <p:sp>
-        <p:nvSpPr>
-          <p:cNvPr id="67" name="Text 61">
-            <a:extLst xmlns:a="http://schemas.openxmlformats.org/drawingml/2006/main">
-              <a:ext uri="{FF2B5EF4-FFF2-40B4-BE49-F238E27FC236}">
-                <a16:creationId xmlns:a16="http://schemas.microsoft.com/office/drawing/2014/main" id="{5987284E-222D-491D-BC8B-596809AE17F5}"/>
-              </a:ext>
-            </a:extLst>
-          </p:cNvPr>
-          <p:cNvSpPr>
-            <a:spLocks xmlns:a="http://schemas.openxmlformats.org/drawingml/2006/main" noGrp="1"/>
-          </p:cNvSpPr>
-          <p:nvPr/>
-        </p:nvSpPr>
-        <p:spPr>
-          <a:xfrm xmlns:a="http://schemas.openxmlformats.org/drawingml/2006/main">
-            <a:off x="9308592" y="5262372"/>
-            <a:ext cx="658368" cy="192024"/>
-          </a:xfrm>
-          <a:prstGeom xmlns:a="http://schemas.openxmlformats.org/drawingml/2006/main" prst="rect">
-            <a:avLst/>
-          </a:prstGeom>
-          <a:noFill xmlns:a="http://schemas.openxmlformats.org/drawingml/2006/main"/>
-        </p:spPr>
-        <p:txBody>
-          <a:bodyPr xmlns:a="http://schemas.openxmlformats.org/drawingml/2006/main" wrap="square" lIns="0" tIns="0" rIns="0" bIns="0" anchor="ctr"/>
-          <a:lstStyle xmlns:a="http://schemas.openxmlformats.org/drawingml/2006/main"/>
-          <a:p xmlns:a="http://schemas.openxmlformats.org/drawingml/2006/main">
-            <a:pPr marL="0" indent="0">
-              <a:buNone/>
-            </a:pPr>
-            <a:r>
-              <a:rPr sz="900" b="1">
-                <a:solidFill>
-                  <a:srgbClr val="F5CE76"/>
-                </a:solidFill>
-                <a:latin typeface="Calibri"/>
-                <a:ea typeface="Calibri"/>
-                <a:cs typeface="Calibri"/>
-              </a:rPr>
-              <a:t>Умови</a:t>
-            </a:r>
-            <a:endParaRPr sz="900"/>
-          </a:p>
-        </p:txBody>
-      </p:sp>
-      <p:sp>
-        <p:nvSpPr>
-          <p:cNvPr id="68" name="Text 62">
-            <a:extLst xmlns:a="http://schemas.openxmlformats.org/drawingml/2006/main">
-              <a:ext uri="{FF2B5EF4-FFF2-40B4-BE49-F238E27FC236}">
-                <a16:creationId xmlns:a16="http://schemas.microsoft.com/office/drawing/2014/main" id="{1E079831-7D60-433F-857F-D392391EEAB4}"/>
-              </a:ext>
-            </a:extLst>
-          </p:cNvPr>
-          <p:cNvSpPr>
-            <a:spLocks xmlns:a="http://schemas.openxmlformats.org/drawingml/2006/main" noGrp="1"/>
-          </p:cNvSpPr>
-          <p:nvPr/>
-        </p:nvSpPr>
-        <p:spPr>
-          <a:xfrm xmlns:a="http://schemas.openxmlformats.org/drawingml/2006/main">
-            <a:off x="9948672" y="5262372"/>
-            <a:ext cx="1508760" cy="192024"/>
-          </a:xfrm>
-          <a:prstGeom xmlns:a="http://schemas.openxmlformats.org/drawingml/2006/main" prst="rect">
-            <a:avLst/>
-          </a:prstGeom>
-          <a:noFill xmlns:a="http://schemas.openxmlformats.org/drawingml/2006/main"/>
-        </p:spPr>
-        <p:txBody>
-          <a:bodyPr xmlns:a="http://schemas.openxmlformats.org/drawingml/2006/main" wrap="square" lIns="0" tIns="0" rIns="0" bIns="0" anchor="ctr"/>
-          <a:lstStyle xmlns:a="http://schemas.openxmlformats.org/drawingml/2006/main"/>
-          <a:p xmlns:a="http://schemas.openxmlformats.org/drawingml/2006/main">
-            <a:pPr marL="0" indent="0" algn="r">
-              <a:buNone/>
-            </a:pPr>
-            <a:r>
-              <a:rPr sz="950" b="1">
-                <a:solidFill>
-                  <a:srgbClr val="F5CE76"/>
-                </a:solidFill>
-                <a:latin typeface="Calibri"/>
-                <a:ea typeface="Calibri"/>
-                <a:cs typeface="Calibri"/>
-              </a:rPr>
-              <a:t>FOB Bangkok</a:t>
-            </a:r>
-            <a:endParaRPr sz="950"/>
-          </a:p>
-        </p:txBody>
-      </p:sp>
-      <p:sp>
-        <p:nvSpPr>
-          <p:cNvPr id="69" name="Text 63">
-            <a:extLst xmlns:a="http://schemas.openxmlformats.org/drawingml/2006/main">
-              <a:ext uri="{FF2B5EF4-FFF2-40B4-BE49-F238E27FC236}">
-                <a16:creationId xmlns:a16="http://schemas.microsoft.com/office/drawing/2014/main" id="{5D9ED1D0-06AB-4B43-A177-0B40947578D3}"/>
-              </a:ext>
-            </a:extLst>
-          </p:cNvPr>
-          <p:cNvSpPr>
-            <a:spLocks xmlns:a="http://schemas.openxmlformats.org/drawingml/2006/main" noGrp="1"/>
-          </p:cNvSpPr>
-          <p:nvPr/>
-        </p:nvSpPr>
-        <p:spPr>
-          <a:xfrm xmlns:a="http://schemas.openxmlformats.org/drawingml/2006/main">
-            <a:off x="9308592" y="5468112"/>
-            <a:ext cx="658368" cy="192024"/>
-          </a:xfrm>
-          <a:prstGeom xmlns:a="http://schemas.openxmlformats.org/drawingml/2006/main" prst="rect">
-            <a:avLst/>
-          </a:prstGeom>
-          <a:noFill xmlns:a="http://schemas.openxmlformats.org/drawingml/2006/main"/>
-        </p:spPr>
-        <p:txBody>
-          <a:bodyPr xmlns:a="http://schemas.openxmlformats.org/drawingml/2006/main" wrap="square" lIns="0" tIns="0" rIns="0" bIns="0" anchor="ctr"/>
-          <a:lstStyle xmlns:a="http://schemas.openxmlformats.org/drawingml/2006/main"/>
-          <a:p xmlns:a="http://schemas.openxmlformats.org/drawingml/2006/main">
-            <a:pPr marL="0" indent="0">
-              <a:buNone/>
-            </a:pPr>
-            <a:r>
-              <a:rPr sz="900">
-                <a:solidFill>
-                  <a:srgbClr val="D2E4CE"/>
-                </a:solidFill>
-                <a:latin typeface="Calibri"/>
-                <a:ea typeface="Calibri"/>
-                <a:cs typeface="Calibri"/>
-              </a:rPr>
-              <a:t>Формат</a:t>
-            </a:r>
-            <a:endParaRPr sz="900"/>
-          </a:p>
-        </p:txBody>
-      </p:sp>
-      <p:sp>
-        <p:nvSpPr>
-          <p:cNvPr id="70" name="Text 64">
-            <a:extLst xmlns:a="http://schemas.openxmlformats.org/drawingml/2006/main">
-              <a:ext uri="{FF2B5EF4-FFF2-40B4-BE49-F238E27FC236}">
-                <a16:creationId xmlns:a16="http://schemas.microsoft.com/office/drawing/2014/main" id="{4C05FFD0-DA43-4E50-A387-C4186B7E3DA8}"/>
-              </a:ext>
-            </a:extLst>
-          </p:cNvPr>
-          <p:cNvSpPr>
-            <a:spLocks xmlns:a="http://schemas.openxmlformats.org/drawingml/2006/main" noGrp="1"/>
-          </p:cNvSpPr>
-          <p:nvPr/>
-        </p:nvSpPr>
-        <p:spPr>
-          <a:xfrm xmlns:a="http://schemas.openxmlformats.org/drawingml/2006/main">
-            <a:off x="9948672" y="5468112"/>
-            <a:ext cx="1508760" cy="192024"/>
-          </a:xfrm>
-          <a:prstGeom xmlns:a="http://schemas.openxmlformats.org/drawingml/2006/main" prst="rect">
-            <a:avLst/>
-          </a:prstGeom>
-          <a:noFill xmlns:a="http://schemas.openxmlformats.org/drawingml/2006/main"/>
-        </p:spPr>
-        <p:txBody>
-          <a:bodyPr xmlns:a="http://schemas.openxmlformats.org/drawingml/2006/main" wrap="square" lIns="0" tIns="0" rIns="0" bIns="0" anchor="ctr"/>
-          <a:lstStyle xmlns:a="http://schemas.openxmlformats.org/drawingml/2006/main"/>
-          <a:p xmlns:a="http://schemas.openxmlformats.org/drawingml/2006/main">
-            <a:pPr marL="0" indent="0" algn="r">
-              <a:buNone/>
-            </a:pPr>
-            <a:r>
-              <a:rPr sz="950">
-                <a:solidFill>
-                  <a:srgbClr val="FCF9F0"/>
-                </a:solidFill>
-                <a:latin typeface="Calibri"/>
-                <a:ea typeface="Calibri"/>
-                <a:cs typeface="Calibri"/>
-              </a:rPr>
-              <a:t>навалом</a:t>
-            </a:r>
-            <a:endParaRPr sz="950"/>
-          </a:p>
-        </p:txBody>
-      </p:sp>
-      <p:sp>
-        <p:nvSpPr>
-          <p:cNvPr id="71" name="Text 65">
-            <a:extLst xmlns:a="http://schemas.openxmlformats.org/drawingml/2006/main">
-              <a:ext uri="{FF2B5EF4-FFF2-40B4-BE49-F238E27FC236}">
-                <a16:creationId xmlns:a16="http://schemas.microsoft.com/office/drawing/2014/main" id="{7FE64998-BF0F-49B6-9E76-DCEF0AF292A4}"/>
-              </a:ext>
-            </a:extLst>
-          </p:cNvPr>
-          <p:cNvSpPr>
-            <a:spLocks xmlns:a="http://schemas.openxmlformats.org/drawingml/2006/main" noGrp="1"/>
-          </p:cNvSpPr>
-          <p:nvPr/>
-        </p:nvSpPr>
-        <p:spPr>
-          <a:xfrm xmlns:a="http://schemas.openxmlformats.org/drawingml/2006/main">
-            <a:off x="9308592" y="5673852"/>
-            <a:ext cx="658368" cy="192024"/>
-          </a:xfrm>
-          <a:prstGeom xmlns:a="http://schemas.openxmlformats.org/drawingml/2006/main" prst="rect">
-            <a:avLst/>
-          </a:prstGeom>
-          <a:noFill xmlns:a="http://schemas.openxmlformats.org/drawingml/2006/main"/>
-        </p:spPr>
-        <p:txBody>
-          <a:bodyPr xmlns:a="http://schemas.openxmlformats.org/drawingml/2006/main" wrap="square" lIns="0" tIns="0" rIns="0" bIns="0" anchor="ctr"/>
-          <a:lstStyle xmlns:a="http://schemas.openxmlformats.org/drawingml/2006/main"/>
-          <a:p xmlns:a="http://schemas.openxmlformats.org/drawingml/2006/main">
-            <a:pPr marL="0" indent="0">
-              <a:buNone/>
-            </a:pPr>
-            <a:r>
-              <a:rPr sz="900">
-                <a:solidFill>
-                  <a:srgbClr val="D2E4CE"/>
-                </a:solidFill>
-                <a:latin typeface="Calibri"/>
-                <a:ea typeface="Calibri"/>
-                <a:cs typeface="Calibri"/>
-              </a:rPr>
-              <a:t>Статус</a:t>
-            </a:r>
-            <a:endParaRPr sz="900"/>
-          </a:p>
-        </p:txBody>
-      </p:sp>
-      <p:sp>
-        <p:nvSpPr>
-          <p:cNvPr id="72" name="Text 66">
-            <a:extLst xmlns:a="http://schemas.openxmlformats.org/drawingml/2006/main">
-              <a:ext uri="{FF2B5EF4-FFF2-40B4-BE49-F238E27FC236}">
-                <a16:creationId xmlns:a16="http://schemas.microsoft.com/office/drawing/2014/main" id="{D5AA0317-8C8E-4654-AB48-6EF530E5DEEB}"/>
-              </a:ext>
-            </a:extLst>
-          </p:cNvPr>
-          <p:cNvSpPr>
-            <a:spLocks xmlns:a="http://schemas.openxmlformats.org/drawingml/2006/main" noGrp="1"/>
-          </p:cNvSpPr>
-          <p:nvPr/>
-        </p:nvSpPr>
-        <p:spPr>
-          <a:xfrm xmlns:a="http://schemas.openxmlformats.org/drawingml/2006/main">
-            <a:off x="9948672" y="5673852"/>
-            <a:ext cx="1508760" cy="192024"/>
-          </a:xfrm>
-          <a:prstGeom xmlns:a="http://schemas.openxmlformats.org/drawingml/2006/main" prst="rect">
-            <a:avLst/>
-          </a:prstGeom>
-          <a:noFill xmlns:a="http://schemas.openxmlformats.org/drawingml/2006/main"/>
-        </p:spPr>
-        <p:txBody>
-          <a:bodyPr xmlns:a="http://schemas.openxmlformats.org/drawingml/2006/main" wrap="square" lIns="0" tIns="0" rIns="0" bIns="0" anchor="ctr"/>
-          <a:lstStyle xmlns:a="http://schemas.openxmlformats.org/drawingml/2006/main"/>
-          <a:p xmlns:a="http://schemas.openxmlformats.org/drawingml/2006/main">
-            <a:pPr marL="0" indent="0" algn="r">
-              <a:buNone/>
-            </a:pPr>
-            <a:r>
-              <a:rPr sz="950">
-                <a:solidFill>
-                  <a:srgbClr val="FCF9F0"/>
-                </a:solidFill>
-                <a:latin typeface="Calibri"/>
-                <a:ea typeface="Calibri"/>
-                <a:cs typeface="Calibri"/>
-              </a:rPr>
-              <a:t>доступно</a:t>
-            </a:r>
-            <a:endParaRPr sz="950"/>
-          </a:p>
-        </p:txBody>
-      </p:sp>
-      <p:sp>
-        <p:nvSpPr>
-          <p:cNvPr id="73" name="Text 67">
-            <a:extLst xmlns:a="http://schemas.openxmlformats.org/drawingml/2006/main">
-              <a:ext uri="{FF2B5EF4-FFF2-40B4-BE49-F238E27FC236}">
-                <a16:creationId xmlns:a16="http://schemas.microsoft.com/office/drawing/2014/main" id="{8A12195C-5F27-417B-939C-737A8C06AF0C}"/>
+              <a:t>приклад упаковки клієнта</a:t>
+            </a:r>
+            <a:endParaRPr sz="1050"/>
+          </a:p>
+        </p:txBody>
+      </p:sp>
+      <p:sp>
+        <p:nvSpPr>
+          <p:cNvPr id="34" name="Text 31">
+            <a:extLst xmlns:a="http://schemas.openxmlformats.org/drawingml/2006/main">
+              <a:ext uri="{FF2B5EF4-FFF2-40B4-BE49-F238E27FC236}">
+                <a16:creationId xmlns:a16="http://schemas.microsoft.com/office/drawing/2014/main" id="{536F47F1-10DF-4B38-8365-3317E620F8C6}"/>
               </a:ext>
             </a:extLst>
           </p:cNvPr>
@@ -17996,82 +16338,16 @@
                 <a:ea typeface="Calibri"/>
                 <a:cs typeface="Calibri"/>
               </a:rPr>
-              <a:t>Джерело: Cup-Photo of Products.pdf · фото SPAR надано користувачем.</a:t>
+              <a:t>Джерело: Cup-Photo of Products.pdf; фото SPAR Jasmine Rice Cups надано користувачем. * Basmati — за запитом постачальника.</a:t>
             </a:r>
             <a:endParaRPr sz="900"/>
           </a:p>
         </p:txBody>
       </p:sp>
-      <p:pic>
-        <p:nvPicPr>
-          <p:cNvPr id="150" name=""/>
-          <p:cNvPicPr>
-            <a:picLocks xmlns:a="http://schemas.openxmlformats.org/drawingml/2006/main" noChangeAspect="1"/>
-          </p:cNvPicPr>
-          <p:nvPr/>
-        </p:nvPicPr>
-        <p:blipFill>
-          <a:blip xmlns:r="http://schemas.openxmlformats.org/officeDocument/2006/relationships" xmlns:a="http://schemas.openxmlformats.org/drawingml/2006/main" r:embed="R91a9306d32f94de1"/>
-          <a:stretch xmlns:a="http://schemas.openxmlformats.org/drawingml/2006/main"/>
-        </p:blipFill>
-        <p:spPr>
-          <a:xfrm xmlns:a="http://schemas.openxmlformats.org/drawingml/2006/main" flipH="0" flipV="0">
-            <a:off x="749808" y="1700784"/>
-            <a:ext cx="2340864" cy="1810512"/>
-          </a:xfrm>
-          <a:prstGeom xmlns:a="http://schemas.openxmlformats.org/drawingml/2006/main" prst="roundRect">
-            <a:avLst/>
-          </a:prstGeom>
-        </p:spPr>
-      </p:pic>
-      <p:pic>
-        <p:nvPicPr>
-          <p:cNvPr id="151" name=""/>
-          <p:cNvPicPr>
-            <a:picLocks xmlns:a="http://schemas.openxmlformats.org/drawingml/2006/main" noChangeAspect="1"/>
-          </p:cNvPicPr>
-          <p:nvPr/>
-        </p:nvPicPr>
-        <p:blipFill>
-          <a:blip xmlns:r="http://schemas.openxmlformats.org/officeDocument/2006/relationships" xmlns:a="http://schemas.openxmlformats.org/drawingml/2006/main" r:embed="R3412426887fc459e"/>
-          <a:stretch xmlns:a="http://schemas.openxmlformats.org/drawingml/2006/main"/>
-        </p:blipFill>
-        <p:spPr>
-          <a:xfrm xmlns:a="http://schemas.openxmlformats.org/drawingml/2006/main" flipH="0" flipV="0">
-            <a:off x="3566160" y="1700784"/>
-            <a:ext cx="2340864" cy="1810512"/>
-          </a:xfrm>
-          <a:prstGeom xmlns:a="http://schemas.openxmlformats.org/drawingml/2006/main" prst="roundRect">
-            <a:avLst/>
-          </a:prstGeom>
-        </p:spPr>
-      </p:pic>
-      <p:pic>
-        <p:nvPicPr>
-          <p:cNvPr id="152" name=""/>
-          <p:cNvPicPr>
-            <a:picLocks xmlns:a="http://schemas.openxmlformats.org/drawingml/2006/main" noChangeAspect="1"/>
-          </p:cNvPicPr>
-          <p:nvPr/>
-        </p:nvPicPr>
-        <p:blipFill>
-          <a:blip xmlns:r="http://schemas.openxmlformats.org/officeDocument/2006/relationships" xmlns:a="http://schemas.openxmlformats.org/drawingml/2006/main" r:embed="R2844c0cd4dc14710"/>
-          <a:stretch xmlns:a="http://schemas.openxmlformats.org/drawingml/2006/main"/>
-        </p:blipFill>
-        <p:spPr>
-          <a:xfrm xmlns:a="http://schemas.openxmlformats.org/drawingml/2006/main" flipH="0" flipV="0">
-            <a:off x="6382512" y="1700784"/>
-            <a:ext cx="2340864" cy="1810512"/>
-          </a:xfrm>
-          <a:prstGeom xmlns:a="http://schemas.openxmlformats.org/drawingml/2006/main" prst="roundRect">
-            <a:avLst/>
-          </a:prstGeom>
-        </p:spPr>
-      </p:pic>
     </p:spTree>
     <p:extLst>
       <p:ext uri="{BB962C8B-B14F-4D97-AF65-F5344CB8AC3E}">
-        <p14:creationId xmlns:p14="http://schemas.microsoft.com/office/powerpoint/2010/main" val="1503426620"/>
+        <p14:creationId xmlns:p14="http://schemas.microsoft.com/office/powerpoint/2010/main" val="59807226"/>
       </p:ext>
     </p:extLst>
   </p:cSld>

--- a/RTE_Rice_Suppliers.pptx
+++ b/RTE_Rice_Suppliers.pptx
@@ -11989,7 +11989,7 @@
                 <a:ea typeface="Calibri"/>
                 <a:cs typeface="Calibri"/>
               </a:rPr>
-              <a:t>Single Cup · Sleeve Box</a:t>
+              <a:t>FOB $0,500 · базовий SKU</a:t>
             </a:r>
             <a:endParaRPr sz="1000"/>
           </a:p>
@@ -12079,7 +12079,7 @@
                 <a:ea typeface="Calibri"/>
                 <a:cs typeface="Calibri"/>
               </a:rPr>
-              <a:t>ПАРАМЕТРИ УПАКОВКИ</a:t>
+              <a:t>СОБІВАРТІСТЬ, ЗА СТАКАНЧИК</a:t>
             </a:r>
             <a:endParaRPr sz="750"/>
           </a:p>
@@ -12125,7 +12125,7 @@
                 <a:ea typeface="Calibri"/>
                 <a:cs typeface="Calibri"/>
               </a:rPr>
-              <a:t>Формат</a:t>
+              <a:t>20′ FCL</a:t>
             </a:r>
             <a:endParaRPr sz="900"/>
           </a:p>
@@ -12171,7 +12171,7 @@
                 <a:ea typeface="Calibri"/>
                 <a:cs typeface="Calibri"/>
               </a:rPr>
-              <a:t>Single Cup</a:t>
+              <a:t>$0,871 / 39,18 ₴</a:t>
             </a:r>
             <a:endParaRPr sz="950"/>
           </a:p>
@@ -12217,7 +12217,7 @@
                 <a:ea typeface="Calibri"/>
                 <a:cs typeface="Calibri"/>
               </a:rPr>
-              <a:t>Вага</a:t>
+              <a:t>40′ FCL</a:t>
             </a:r>
             <a:endParaRPr sz="900"/>
           </a:p>
@@ -12263,7 +12263,7 @@
                 <a:ea typeface="Calibri"/>
                 <a:cs typeface="Calibri"/>
               </a:rPr>
-              <a:t>150 г</a:t>
+              <a:t>$0,772 / 34,72 ₴</a:t>
             </a:r>
             <a:endParaRPr sz="950"/>
           </a:p>
@@ -12309,7 +12309,7 @@
                 <a:ea typeface="Calibri"/>
                 <a:cs typeface="Calibri"/>
               </a:rPr>
-              <a:t>Короб</a:t>
+              <a:t>LCL 17 м³</a:t>
             </a:r>
             <a:endParaRPr sz="900"/>
           </a:p>
@@ -12355,7 +12355,7 @@
                 <a:ea typeface="Calibri"/>
                 <a:cs typeface="Calibri"/>
               </a:rPr>
-              <a:t>12 шт.</a:t>
+              <a:t>$0,878 / 39,49 ₴</a:t>
             </a:r>
             <a:endParaRPr sz="950"/>
           </a:p>
@@ -12401,7 +12401,7 @@
                 <a:ea typeface="Calibri"/>
                 <a:cs typeface="Calibri"/>
               </a:rPr>
-              <a:t>Sleeve</a:t>
+              <a:t>LCL 34 м³</a:t>
             </a:r>
             <a:endParaRPr sz="900"/>
           </a:p>
@@ -12447,7 +12447,7 @@
                 <a:ea typeface="Calibri"/>
                 <a:cs typeface="Calibri"/>
               </a:rPr>
-              <a:t>коробка</a:t>
+              <a:t>$0,808 / 36,38 ₴</a:t>
             </a:r>
             <a:endParaRPr sz="950"/>
           </a:p>
@@ -12715,7 +12715,7 @@
                 <a:ea typeface="Calibri"/>
                 <a:cs typeface="Calibri"/>
               </a:rPr>
-              <a:t>Single Cup · Sleeve Box</a:t>
+              <a:t>FOB $0,500 · базовий SKU</a:t>
             </a:r>
             <a:endParaRPr sz="1000"/>
           </a:p>
@@ -12805,7 +12805,7 @@
                 <a:ea typeface="Calibri"/>
                 <a:cs typeface="Calibri"/>
               </a:rPr>
-              <a:t>ПАРАМЕТРИ УПАКОВКИ</a:t>
+              <a:t>СОБІВАРТІСТЬ, ЗА СТАКАНЧИК</a:t>
             </a:r>
             <a:endParaRPr sz="750"/>
           </a:p>
@@ -12851,7 +12851,7 @@
                 <a:ea typeface="Calibri"/>
                 <a:cs typeface="Calibri"/>
               </a:rPr>
-              <a:t>Формат</a:t>
+              <a:t>20′ FCL</a:t>
             </a:r>
             <a:endParaRPr sz="900"/>
           </a:p>
@@ -12897,7 +12897,7 @@
                 <a:ea typeface="Calibri"/>
                 <a:cs typeface="Calibri"/>
               </a:rPr>
-              <a:t>Single Cup</a:t>
+              <a:t>$0,871 / 39,18 ₴</a:t>
             </a:r>
             <a:endParaRPr sz="950"/>
           </a:p>
@@ -12943,7 +12943,7 @@
                 <a:ea typeface="Calibri"/>
                 <a:cs typeface="Calibri"/>
               </a:rPr>
-              <a:t>Вага</a:t>
+              <a:t>40′ FCL</a:t>
             </a:r>
             <a:endParaRPr sz="900"/>
           </a:p>
@@ -12989,7 +12989,7 @@
                 <a:ea typeface="Calibri"/>
                 <a:cs typeface="Calibri"/>
               </a:rPr>
-              <a:t>150 г</a:t>
+              <a:t>$0,772 / 34,72 ₴</a:t>
             </a:r>
             <a:endParaRPr sz="950"/>
           </a:p>
@@ -13035,7 +13035,7 @@
                 <a:ea typeface="Calibri"/>
                 <a:cs typeface="Calibri"/>
               </a:rPr>
-              <a:t>Короб</a:t>
+              <a:t>LCL 17 м³</a:t>
             </a:r>
             <a:endParaRPr sz="900"/>
           </a:p>
@@ -13081,7 +13081,7 @@
                 <a:ea typeface="Calibri"/>
                 <a:cs typeface="Calibri"/>
               </a:rPr>
-              <a:t>12 шт.</a:t>
+              <a:t>$0,878 / 39,49 ₴</a:t>
             </a:r>
             <a:endParaRPr sz="950"/>
           </a:p>
@@ -13127,7 +13127,7 @@
                 <a:ea typeface="Calibri"/>
                 <a:cs typeface="Calibri"/>
               </a:rPr>
-              <a:t>Sleeve</a:t>
+              <a:t>LCL 34 м³</a:t>
             </a:r>
             <a:endParaRPr sz="900"/>
           </a:p>
@@ -13173,7 +13173,7 @@
                 <a:ea typeface="Calibri"/>
                 <a:cs typeface="Calibri"/>
               </a:rPr>
-              <a:t>коробка</a:t>
+              <a:t>$0,808 / 36,38 ₴</a:t>
             </a:r>
             <a:endParaRPr sz="950"/>
           </a:p>
@@ -13441,7 +13441,7 @@
                 <a:ea typeface="Calibri"/>
                 <a:cs typeface="Calibri"/>
               </a:rPr>
-              <a:t>Single Cup · Sleeve Box</a:t>
+              <a:t>FOB $0,542 · спеціальний SKU</a:t>
             </a:r>
             <a:endParaRPr sz="1000"/>
           </a:p>
@@ -13531,7 +13531,7 @@
                 <a:ea typeface="Calibri"/>
                 <a:cs typeface="Calibri"/>
               </a:rPr>
-              <a:t>ПАРАМЕТРИ УПАКОВКИ</a:t>
+              <a:t>СОБІВАРТІСТЬ, ЗА СТАКАНЧИК</a:t>
             </a:r>
             <a:endParaRPr sz="750"/>
           </a:p>
@@ -13577,7 +13577,7 @@
                 <a:ea typeface="Calibri"/>
                 <a:cs typeface="Calibri"/>
               </a:rPr>
-              <a:t>Формат</a:t>
+              <a:t>20′ FCL</a:t>
             </a:r>
             <a:endParaRPr sz="900"/>
           </a:p>
@@ -13623,7 +13623,7 @@
                 <a:ea typeface="Calibri"/>
                 <a:cs typeface="Calibri"/>
               </a:rPr>
-              <a:t>Single Cup</a:t>
+              <a:t>$0,943 / 42,45 ₴</a:t>
             </a:r>
             <a:endParaRPr sz="950"/>
           </a:p>
@@ -13669,7 +13669,7 @@
                 <a:ea typeface="Calibri"/>
                 <a:cs typeface="Calibri"/>
               </a:rPr>
-              <a:t>Вага</a:t>
+              <a:t>40′ FCL</a:t>
             </a:r>
             <a:endParaRPr sz="900"/>
           </a:p>
@@ -13715,7 +13715,7 @@
                 <a:ea typeface="Calibri"/>
                 <a:cs typeface="Calibri"/>
               </a:rPr>
-              <a:t>150 г</a:t>
+              <a:t>$0,836 / 37,61 ₴</a:t>
             </a:r>
             <a:endParaRPr sz="950"/>
           </a:p>
@@ -13761,7 +13761,7 @@
                 <a:ea typeface="Calibri"/>
                 <a:cs typeface="Calibri"/>
               </a:rPr>
-              <a:t>Короб</a:t>
+              <a:t>LCL 17 м³</a:t>
             </a:r>
             <a:endParaRPr sz="900"/>
           </a:p>
@@ -13807,7 +13807,7 @@
                 <a:ea typeface="Calibri"/>
                 <a:cs typeface="Calibri"/>
               </a:rPr>
-              <a:t>12 шт.</a:t>
+              <a:t>$0,951 / 42,78 ₴</a:t>
             </a:r>
             <a:endParaRPr sz="950"/>
           </a:p>
@@ -13853,7 +13853,7 @@
                 <a:ea typeface="Calibri"/>
                 <a:cs typeface="Calibri"/>
               </a:rPr>
-              <a:t>Sleeve</a:t>
+              <a:t>LCL 34 м³</a:t>
             </a:r>
             <a:endParaRPr sz="900"/>
           </a:p>
@@ -13899,7 +13899,7 @@
                 <a:ea typeface="Calibri"/>
                 <a:cs typeface="Calibri"/>
               </a:rPr>
-              <a:t>коробка</a:t>
+              <a:t>$0,876 / 39,41 ₴</a:t>
             </a:r>
             <a:endParaRPr sz="950"/>
           </a:p>
@@ -14167,7 +14167,7 @@
                 <a:ea typeface="Calibri"/>
                 <a:cs typeface="Calibri"/>
               </a:rPr>
-              <a:t>Single Cup · Sleeve Box</a:t>
+              <a:t>FOB $0,542 · спеціальний SKU</a:t>
             </a:r>
             <a:endParaRPr sz="1000"/>
           </a:p>
@@ -14257,7 +14257,7 @@
                 <a:ea typeface="Calibri"/>
                 <a:cs typeface="Calibri"/>
               </a:rPr>
-              <a:t>ПАРАМЕТРИ УПАКОВКИ</a:t>
+              <a:t>СОБІВАРТІСТЬ, ЗА СТАКАНЧИК</a:t>
             </a:r>
             <a:endParaRPr sz="750"/>
           </a:p>
@@ -14303,7 +14303,7 @@
                 <a:ea typeface="Calibri"/>
                 <a:cs typeface="Calibri"/>
               </a:rPr>
-              <a:t>Формат</a:t>
+              <a:t>20′ FCL</a:t>
             </a:r>
             <a:endParaRPr sz="900"/>
           </a:p>
@@ -14349,7 +14349,7 @@
                 <a:ea typeface="Calibri"/>
                 <a:cs typeface="Calibri"/>
               </a:rPr>
-              <a:t>Single Cup</a:t>
+              <a:t>$0,943 / 42,45 ₴</a:t>
             </a:r>
             <a:endParaRPr sz="950"/>
           </a:p>
@@ -14395,7 +14395,7 @@
                 <a:ea typeface="Calibri"/>
                 <a:cs typeface="Calibri"/>
               </a:rPr>
-              <a:t>Вага</a:t>
+              <a:t>40′ FCL</a:t>
             </a:r>
             <a:endParaRPr sz="900"/>
           </a:p>
@@ -14441,7 +14441,7 @@
                 <a:ea typeface="Calibri"/>
                 <a:cs typeface="Calibri"/>
               </a:rPr>
-              <a:t>150 г</a:t>
+              <a:t>$0,836 / 37,61 ₴</a:t>
             </a:r>
             <a:endParaRPr sz="950"/>
           </a:p>
@@ -14487,7 +14487,7 @@
                 <a:ea typeface="Calibri"/>
                 <a:cs typeface="Calibri"/>
               </a:rPr>
-              <a:t>Короб</a:t>
+              <a:t>LCL 17 м³</a:t>
             </a:r>
             <a:endParaRPr sz="900"/>
           </a:p>
@@ -14533,7 +14533,7 @@
                 <a:ea typeface="Calibri"/>
                 <a:cs typeface="Calibri"/>
               </a:rPr>
-              <a:t>12 шт.</a:t>
+              <a:t>$0,951 / 42,78 ₴</a:t>
             </a:r>
             <a:endParaRPr sz="950"/>
           </a:p>
@@ -14579,7 +14579,7 @@
                 <a:ea typeface="Calibri"/>
                 <a:cs typeface="Calibri"/>
               </a:rPr>
-              <a:t>Sleeve</a:t>
+              <a:t>LCL 34 м³</a:t>
             </a:r>
             <a:endParaRPr sz="900"/>
           </a:p>
@@ -14625,7 +14625,7 @@
                 <a:ea typeface="Calibri"/>
                 <a:cs typeface="Calibri"/>
               </a:rPr>
-              <a:t>коробка</a:t>
+              <a:t>$0,876 / 39,41 ₴</a:t>
             </a:r>
             <a:endParaRPr sz="950"/>
           </a:p>
@@ -14671,7 +14671,7 @@
                 <a:ea typeface="Calibri"/>
                 <a:cs typeface="Calibri"/>
               </a:rPr>
-              <a:t>Джерело: Cup-Photo of Products.pdf · нове виробництво BSCM Foods.</a:t>
+              <a:t>Джерело: Cup-Photo of Products.pdf, Self Cost Rice Brand.xlsx (BSCM(Bags+Cups) - Навалом) · курс 45,00 UAH/USD.</a:t>
             </a:r>
             <a:endParaRPr sz="900"/>
           </a:p>

--- a/RTE_Rice_Suppliers.pptx
+++ b/RTE_Rice_Suppliers.pptx
@@ -16,6 +16,7 @@
     <p:sldId id="261" r:id="rId7"/>
     <p:sldId id="264" r:id="rId14"/>
     <p:sldId id="263" r:id="rId8"/>
+    <p:sldId id="265" r:id="rId15"/>
   </p:sldIdLst>
   <p:sldSz cx="12192000" cy="6858000"/>
   <p:notesSz cx="6858000" cy="9144000"/>
@@ -15417,30 +15418,6 @@
           </a:p>
         </p:txBody>
       </p:sp>
-      <p:pic>
-        <p:nvPicPr>
-          <p:cNvPr id="58" name="Picture 57" descr="hero_appearance.jpg"/>
-          <p:cNvPicPr>
-            <a:picLocks noChangeAspect="1"/>
-          </p:cNvPicPr>
-          <p:nvPr/>
-        </p:nvPicPr>
-        <p:blipFill>
-          <a:blip r:embed="rId19"/>
-          <a:stretch>
-            <a:fillRect/>
-          </a:stretch>
-        </p:blipFill>
-        <p:spPr>
-          <a:xfrm>
-            <a:off x="7546553" y="1554480"/>
-            <a:ext cx="4096512" cy="2834640"/>
-          </a:xfrm>
-          <a:prstGeom prst="roundRect">
-            <a:avLst/>
-          </a:prstGeom>
-        </p:spPr>
-      </p:pic>
       <p:sp>
         <p:nvSpPr>
           <p:cNvPr id="24" name="Shape 21">
@@ -16585,6 +16562,122 @@
           <a:xfrm>
             <a:off x="5660136" y="5221224"/>
             <a:ext cx="1225296" cy="740664"/>
+          </a:xfrm>
+          <a:prstGeom prst="roundRect">
+            <a:avLst/>
+          </a:prstGeom>
+          <a:ln w="9525">
+            <a:solidFill>
+              <a:srgbClr val="C89C40"/>
+            </a:solidFill>
+          </a:ln>
+        </p:spPr>
+      </p:pic>
+      <p:pic>
+        <p:nvPicPr>
+          <p:cNvPr id="58" name="Picture 57" descr="grid_jasmine_left.jpg"/>
+          <p:cNvPicPr>
+            <a:picLocks noChangeAspect="1"/>
+          </p:cNvPicPr>
+          <p:nvPr/>
+        </p:nvPicPr>
+        <p:blipFill>
+          <a:blip r:embed="rId20"/>
+          <a:stretch>
+            <a:fillRect/>
+          </a:stretch>
+        </p:blipFill>
+        <p:spPr>
+          <a:xfrm>
+            <a:off x="7534656" y="1686581"/>
+            <a:ext cx="1979676" cy="1198351"/>
+          </a:xfrm>
+          <a:prstGeom prst="roundRect">
+            <a:avLst/>
+          </a:prstGeom>
+          <a:ln w="9525">
+            <a:solidFill>
+              <a:srgbClr val="C89C40"/>
+            </a:solidFill>
+          </a:ln>
+        </p:spPr>
+      </p:pic>
+      <p:pic>
+        <p:nvPicPr>
+          <p:cNvPr id="59" name="Picture 58" descr="grid_brown_left.jpg"/>
+          <p:cNvPicPr>
+            <a:picLocks noChangeAspect="1"/>
+          </p:cNvPicPr>
+          <p:nvPr/>
+        </p:nvPicPr>
+        <p:blipFill>
+          <a:blip r:embed="rId21"/>
+          <a:stretch>
+            <a:fillRect/>
+          </a:stretch>
+        </p:blipFill>
+        <p:spPr>
+          <a:xfrm>
+            <a:off x="9651492" y="1686581"/>
+            <a:ext cx="1979676" cy="1198351"/>
+          </a:xfrm>
+          <a:prstGeom prst="roundRect">
+            <a:avLst/>
+          </a:prstGeom>
+          <a:ln w="9525">
+            <a:solidFill>
+              <a:srgbClr val="C89C40"/>
+            </a:solidFill>
+          </a:ln>
+        </p:spPr>
+      </p:pic>
+      <p:pic>
+        <p:nvPicPr>
+          <p:cNvPr id="60" name="Picture 59" descr="grid_red_left.jpg"/>
+          <p:cNvPicPr>
+            <a:picLocks noChangeAspect="1"/>
+          </p:cNvPicPr>
+          <p:nvPr/>
+        </p:nvPicPr>
+        <p:blipFill>
+          <a:blip r:embed="rId22"/>
+          <a:stretch>
+            <a:fillRect/>
+          </a:stretch>
+        </p:blipFill>
+        <p:spPr>
+          <a:xfrm>
+            <a:off x="7534656" y="3022092"/>
+            <a:ext cx="1979676" cy="1198351"/>
+          </a:xfrm>
+          <a:prstGeom prst="roundRect">
+            <a:avLst/>
+          </a:prstGeom>
+          <a:ln w="9525">
+            <a:solidFill>
+              <a:srgbClr val="C89C40"/>
+            </a:solidFill>
+          </a:ln>
+        </p:spPr>
+      </p:pic>
+      <p:pic>
+        <p:nvPicPr>
+          <p:cNvPr id="61" name="Picture 60" descr="grid_berry_left.jpg"/>
+          <p:cNvPicPr>
+            <a:picLocks noChangeAspect="1"/>
+          </p:cNvPicPr>
+          <p:nvPr/>
+        </p:nvPicPr>
+        <p:blipFill>
+          <a:blip r:embed="rId23"/>
+          <a:stretch>
+            <a:fillRect/>
+          </a:stretch>
+        </p:blipFill>
+        <p:spPr>
+          <a:xfrm>
+            <a:off x="9651492" y="3022092"/>
+            <a:ext cx="1979676" cy="1198351"/>
           </a:xfrm>
           <a:prstGeom prst="roundRect">
             <a:avLst/>
@@ -18124,6 +18217,1667 @@
               <a:t>приклад упаковки клієнта</a:t>
             </a:r>
             <a:endParaRPr sz="1050"/>
+          </a:p>
+        </p:txBody>
+      </p:sp>
+      <p:sp>
+        <p:nvSpPr>
+          <p:cNvPr id="62" name="TextBox 61"/>
+          <p:cNvSpPr txBox="1"/>
+          <p:nvPr/>
+        </p:nvSpPr>
+        <p:spPr>
+          <a:xfrm>
+            <a:off x="566928" y="6355080"/>
+            <a:ext cx="11064240" cy="274320"/>
+          </a:xfrm>
+          <a:prstGeom prst="rect">
+            <a:avLst/>
+          </a:prstGeom>
+          <a:noFill/>
+        </p:spPr>
+        <p:txBody>
+          <a:bodyPr wrap="none" lIns="0" rIns="0" tIns="0" bIns="0">
+            <a:spAutoFit/>
+          </a:bodyPr>
+          <a:lstStyle/>
+          <a:p>
+            <a:r>
+              <a:rPr sz="900">
+                <a:solidFill>
+                  <a:srgbClr val="C3D7BF"/>
+                </a:solidFill>
+                <a:latin typeface="Calibri"/>
+              </a:rPr>
+              <a:t>Джерело: Cup-Photo of Products.pdf; фото SPAR Jasmine Rice Cups надано користувачем. * Basmati — за запитом постачальника.</a:t>
+            </a:r>
+          </a:p>
+        </p:txBody>
+      </p:sp>
+    </p:spTree>
+    <p:extLst>
+      <p:ext uri="{BB962C8B-B14F-4D97-AF65-F5344CB8AC3E}">
+        <p14:creationId xmlns:p14="http://schemas.microsoft.com/office/powerpoint/2010/main" val="59807226"/>
+      </p:ext>
+    </p:extLst>
+  </p:cSld>
+  <p:clrMapOvr>
+    <a:masterClrMapping/>
+  </p:clrMapOvr>
+</p:sld>
+</file>
+
+<file path=ppt/slides/slide9.xml><?xml version="1.0" encoding="utf-8"?>
+<p:sld xmlns:a="http://schemas.openxmlformats.org/drawingml/2006/main" xmlns:r="http://schemas.openxmlformats.org/officeDocument/2006/relationships" xmlns:p="http://schemas.openxmlformats.org/presentationml/2006/main">
+  <p:cSld>
+    <p:bg>
+      <p:bgPr>
+        <a:blipFill rotWithShape="1">
+          <a:blip r:embed="rId2">
+            <a:lum/>
+          </a:blip>
+          <a:srcRect/>
+          <a:stretch>
+            <a:fillRect/>
+          </a:stretch>
+        </a:blipFill>
+        <a:effectLst/>
+      </p:bgPr>
+    </p:bg>
+    <p:spTree>
+      <p:nvGrpSpPr>
+        <p:cNvPr id="1" name=""/>
+        <p:cNvGrpSpPr/>
+        <p:nvPr/>
+      </p:nvGrpSpPr>
+      <p:grpSpPr>
+        <a:xfrm>
+          <a:off x="0" y="0"/>
+          <a:ext cx="0" cy="0"/>
+          <a:chOff x="0" y="0"/>
+          <a:chExt cx="0" cy="0"/>
+        </a:xfrm>
+      </p:grpSpPr>
+      <p:sp>
+        <p:nvSpPr>
+          <p:cNvPr id="2" name="Text 0">
+            <a:extLst>
+              <a:ext uri="{FF2B5EF4-FFF2-40B4-BE49-F238E27FC236}">
+                <a16:creationId xmlns:a16="http://schemas.microsoft.com/office/drawing/2014/main" id="{BF77CD9A-0EFB-41E4-BB91-158CD8B97E51}"/>
+              </a:ext>
+            </a:extLst>
+          </p:cNvPr>
+          <p:cNvSpPr>
+            <a:spLocks noGrp="1"/>
+          </p:cNvSpPr>
+          <p:nvPr/>
+        </p:nvSpPr>
+        <p:spPr>
+          <a:xfrm>
+            <a:off x="566928" y="274320"/>
+            <a:ext cx="8229600" cy="237744"/>
+          </a:xfrm>
+          <a:prstGeom prst="rect">
+            <a:avLst/>
+          </a:prstGeom>
+          <a:noFill/>
+        </p:spPr>
+        <p:txBody>
+          <a:bodyPr wrap="square" lIns="0" tIns="0" rIns="0" bIns="0" anchor="ctr"/>
+          <a:lstStyle/>
+          <a:p>
+            <a:pPr marL="0" indent="0">
+              <a:buNone/>
+            </a:pPr>
+            <a:r>
+              <a:rPr sz="1100" b="1" spc="260">
+                <a:solidFill>
+                  <a:srgbClr val="F0AC58"/>
+                </a:solidFill>
+                <a:latin typeface="Calibri"/>
+                <a:ea typeface="Calibri"/>
+                <a:cs typeface="Calibri"/>
+              </a:rPr>
+              <a:t>BSCM FOODS  ·  DOUBLE CUP</a:t>
+            </a:r>
+            <a:endParaRPr sz="1100"/>
+          </a:p>
+        </p:txBody>
+      </p:sp>
+      <p:sp>
+        <p:nvSpPr>
+          <p:cNvPr id="3" name="Text 1">
+            <a:extLst>
+              <a:ext uri="{FF2B5EF4-FFF2-40B4-BE49-F238E27FC236}">
+                <a16:creationId xmlns:a16="http://schemas.microsoft.com/office/drawing/2014/main" id="{9496C762-5C3C-4C5E-AE52-4FCFDC0031FD}"/>
+              </a:ext>
+            </a:extLst>
+          </p:cNvPr>
+          <p:cNvSpPr>
+            <a:spLocks noGrp="1"/>
+          </p:cNvSpPr>
+          <p:nvPr/>
+        </p:nvSpPr>
+        <p:spPr>
+          <a:xfrm>
+            <a:off x="566928" y="548640"/>
+            <a:ext cx="11064240" cy="548640"/>
+          </a:xfrm>
+          <a:prstGeom prst="rect">
+            <a:avLst/>
+          </a:prstGeom>
+          <a:noFill/>
+        </p:spPr>
+        <p:txBody>
+          <a:bodyPr wrap="square" lIns="0" tIns="0" rIns="0" bIns="0" anchor="ctr"/>
+          <a:lstStyle/>
+          <a:p>
+            <a:pPr marL="0" indent="0">
+              <a:buNone/>
+            </a:pPr>
+            <a:r>
+              <a:rPr sz="3100" b="1">
+                <a:solidFill>
+                  <a:srgbClr val="FFFFFF"/>
+                </a:solidFill>
+                <a:latin typeface="Cambria"/>
+                <a:ea typeface="Cambria"/>
+                <a:cs typeface="Cambria"/>
+              </a:rPr>
+              <a:t>Ready Rice in Plastic Cup — вигляд упаковки</a:t>
+            </a:r>
+            <a:endParaRPr sz="3100"/>
+          </a:p>
+        </p:txBody>
+      </p:sp>
+      <p:sp>
+        <p:nvSpPr>
+          <p:cNvPr id="4" name="Text 2">
+            <a:extLst>
+              <a:ext uri="{FF2B5EF4-FFF2-40B4-BE49-F238E27FC236}">
+                <a16:creationId xmlns:a16="http://schemas.microsoft.com/office/drawing/2014/main" id="{477A47AF-CA07-4AD7-9441-ED43883C2405}"/>
+              </a:ext>
+            </a:extLst>
+          </p:cNvPr>
+          <p:cNvSpPr>
+            <a:spLocks noGrp="1"/>
+          </p:cNvSpPr>
+          <p:nvPr/>
+        </p:nvSpPr>
+        <p:spPr>
+          <a:xfrm>
+            <a:off x="585216" y="1115568"/>
+            <a:ext cx="11064240" cy="274320"/>
+          </a:xfrm>
+          <a:prstGeom prst="rect">
+            <a:avLst/>
+          </a:prstGeom>
+          <a:noFill/>
+        </p:spPr>
+        <p:txBody>
+          <a:bodyPr wrap="square" lIns="0" tIns="0" rIns="0" bIns="0" anchor="ctr"/>
+          <a:lstStyle/>
+          <a:p>
+            <a:pPr marL="0" indent="0">
+              <a:buNone/>
+            </a:pPr>
+            <a:r>
+              <a:rPr sz="1250" i="1">
+                <a:solidFill>
+                  <a:srgbClr val="D2E4CE"/>
+                </a:solidFill>
+                <a:latin typeface="Calibri"/>
+                <a:ea typeface="Calibri"/>
+                <a:cs typeface="Calibri"/>
+              </a:rPr>
+              <a:t>6 × (2 × 125 г) · один sleeve-дизайн під усі 7 смаків · приклад — SPAR Jasmine Rice</a:t>
+            </a:r>
+            <a:endParaRPr sz="1250"/>
+          </a:p>
+        </p:txBody>
+      </p:sp>
+      <p:sp>
+        <p:nvSpPr>
+          <p:cNvPr id="5" name="Shape 3">
+            <a:extLst>
+              <a:ext uri="{FF2B5EF4-FFF2-40B4-BE49-F238E27FC236}">
+                <a16:creationId xmlns:a16="http://schemas.microsoft.com/office/drawing/2014/main" id="{F1C3D159-6BBB-4F8D-B9ED-F6496F44B44F}"/>
+              </a:ext>
+            </a:extLst>
+          </p:cNvPr>
+          <p:cNvSpPr>
+            <a:spLocks noGrp="1"/>
+          </p:cNvSpPr>
+          <p:nvPr/>
+        </p:nvSpPr>
+        <p:spPr>
+          <a:xfrm>
+            <a:off x="566928" y="1536192"/>
+            <a:ext cx="6675120" cy="4626864"/>
+          </a:xfrm>
+          <a:prstGeom prst="roundRect">
+            <a:avLst>
+              <a:gd name="adj" fmla="val 2372"/>
+            </a:avLst>
+          </a:prstGeom>
+          <a:solidFill>
+            <a:srgbClr val="12452B">
+              <a:alpha val="90000"/>
+            </a:srgbClr>
+          </a:solidFill>
+          <a:ln w="15875">
+            <a:solidFill>
+              <a:srgbClr val="C89C40"/>
+            </a:solidFill>
+            <a:prstDash val="solid"/>
+          </a:ln>
+          <a:effectLst>
+            <a:outerShdw blurRad="177800" dist="38100" dir="5400000" algn="bl" rotWithShape="0">
+              <a:srgbClr val="000000">
+                <a:alpha val="45000"/>
+              </a:srgbClr>
+            </a:outerShdw>
+          </a:effectLst>
+        </p:spPr>
+        <p:txBody>
+          <a:bodyPr/>
+          <a:lstStyle/>
+          <a:p>
+            <a:endParaRPr/>
+          </a:p>
+        </p:txBody>
+      </p:sp>
+      <p:sp>
+        <p:nvSpPr>
+          <p:cNvPr id="6" name="Text 4">
+            <a:extLst>
+              <a:ext uri="{FF2B5EF4-FFF2-40B4-BE49-F238E27FC236}">
+                <a16:creationId xmlns:a16="http://schemas.microsoft.com/office/drawing/2014/main" id="{ABB6272E-A3D6-4F20-AF34-CF17DAB68835}"/>
+              </a:ext>
+            </a:extLst>
+          </p:cNvPr>
+          <p:cNvSpPr>
+            <a:spLocks noGrp="1"/>
+          </p:cNvSpPr>
+          <p:nvPr/>
+        </p:nvSpPr>
+        <p:spPr>
+          <a:xfrm>
+            <a:off x="841248" y="1737360"/>
+            <a:ext cx="6126480" cy="310896"/>
+          </a:xfrm>
+          <a:prstGeom prst="rect">
+            <a:avLst/>
+          </a:prstGeom>
+          <a:noFill/>
+        </p:spPr>
+        <p:txBody>
+          <a:bodyPr wrap="square" lIns="0" tIns="0" rIns="0" bIns="0" anchor="ctr"/>
+          <a:lstStyle/>
+          <a:p>
+            <a:pPr marL="0" indent="0">
+              <a:buNone/>
+            </a:pPr>
+            <a:r>
+              <a:rPr sz="1700" b="1">
+                <a:solidFill>
+                  <a:srgbClr val="F5CE76"/>
+                </a:solidFill>
+                <a:latin typeface="Cambria"/>
+                <a:ea typeface="Cambria"/>
+                <a:cs typeface="Cambria"/>
+              </a:rPr>
+              <a:t>Про формат</a:t>
+            </a:r>
+            <a:endParaRPr sz="1700"/>
+          </a:p>
+        </p:txBody>
+      </p:sp>
+      <p:sp>
+        <p:nvSpPr>
+          <p:cNvPr id="7" name="Text 5">
+            <a:extLst>
+              <a:ext uri="{FF2B5EF4-FFF2-40B4-BE49-F238E27FC236}">
+                <a16:creationId xmlns:a16="http://schemas.microsoft.com/office/drawing/2014/main" id="{F27C41B4-C39E-4BB3-87E3-96451AFDB1CC}"/>
+              </a:ext>
+            </a:extLst>
+          </p:cNvPr>
+          <p:cNvSpPr>
+            <a:spLocks noGrp="1"/>
+          </p:cNvSpPr>
+          <p:nvPr/>
+        </p:nvSpPr>
+        <p:spPr>
+          <a:xfrm>
+            <a:off x="841248" y="2103120"/>
+            <a:ext cx="6126480" cy="868680"/>
+          </a:xfrm>
+          <a:prstGeom prst="rect">
+            <a:avLst/>
+          </a:prstGeom>
+          <a:noFill/>
+        </p:spPr>
+        <p:txBody>
+          <a:bodyPr wrap="square" lIns="0" tIns="0" rIns="0" bIns="0" anchor="ctr"/>
+          <a:lstStyle/>
+          <a:p>
+            <a:pPr marL="0" indent="0">
+              <a:lnSpc>
+                <a:spcPts val="1700"/>
+              </a:lnSpc>
+              <a:buNone/>
+            </a:pPr>
+            <a:r>
+              <a:rPr sz="1200">
+                <a:solidFill>
+                  <a:srgbClr val="FCF9F0"/>
+                </a:solidFill>
+                <a:latin typeface="Calibri"/>
+                <a:ea typeface="Calibri"/>
+                <a:cs typeface="Calibri"/>
+              </a:rPr>
+              <a:t>Власного бренду BSCM у форматі double cup немає — цей формат постачальник випускає виключно під приватною маркою замовника. Sleeve-бокс друкується під дизайн клієнта; приклад нижче — Jasmine Rice Cups для мережі SPAR.</a:t>
+            </a:r>
+            <a:endParaRPr sz="1200"/>
+          </a:p>
+        </p:txBody>
+      </p:sp>
+      <p:sp>
+        <p:nvSpPr>
+          <p:cNvPr id="8" name="Text 6">
+            <a:extLst>
+              <a:ext uri="{FF2B5EF4-FFF2-40B4-BE49-F238E27FC236}">
+                <a16:creationId xmlns:a16="http://schemas.microsoft.com/office/drawing/2014/main" id="{650D0EC9-3F48-4B23-B62F-2DC20F4CB1E3}"/>
+              </a:ext>
+            </a:extLst>
+          </p:cNvPr>
+          <p:cNvSpPr>
+            <a:spLocks noGrp="1"/>
+          </p:cNvSpPr>
+          <p:nvPr/>
+        </p:nvSpPr>
+        <p:spPr>
+          <a:xfrm>
+            <a:off x="841248" y="3017520"/>
+            <a:ext cx="6126480" cy="310896"/>
+          </a:xfrm>
+          <a:prstGeom prst="rect">
+            <a:avLst/>
+          </a:prstGeom>
+          <a:noFill/>
+        </p:spPr>
+        <p:txBody>
+          <a:bodyPr wrap="square" lIns="0" tIns="0" rIns="0" bIns="0" anchor="ctr"/>
+          <a:lstStyle/>
+          <a:p>
+            <a:pPr marL="0" indent="0">
+              <a:buNone/>
+            </a:pPr>
+            <a:r>
+              <a:rPr sz="1700" b="1">
+                <a:solidFill>
+                  <a:srgbClr val="F5CE76"/>
+                </a:solidFill>
+                <a:latin typeface="Cambria"/>
+                <a:ea typeface="Cambria"/>
+                <a:cs typeface="Cambria"/>
+              </a:rPr>
+              <a:t>Смаки в офері</a:t>
+            </a:r>
+            <a:endParaRPr sz="1700"/>
+          </a:p>
+        </p:txBody>
+      </p:sp>
+      <p:sp>
+        <p:nvSpPr>
+          <p:cNvPr id="9" name="Text 7">
+            <a:extLst>
+              <a:ext uri="{FF2B5EF4-FFF2-40B4-BE49-F238E27FC236}">
+                <a16:creationId xmlns:a16="http://schemas.microsoft.com/office/drawing/2014/main" id="{7A91FA7F-CF81-4499-8A50-A7DEE4346D83}"/>
+              </a:ext>
+            </a:extLst>
+          </p:cNvPr>
+          <p:cNvSpPr>
+            <a:spLocks noGrp="1"/>
+          </p:cNvSpPr>
+          <p:nvPr/>
+        </p:nvSpPr>
+        <p:spPr>
+          <a:xfrm>
+            <a:off x="841248" y="3383280"/>
+            <a:ext cx="2103120" cy="256032"/>
+          </a:xfrm>
+          <a:prstGeom prst="rect">
+            <a:avLst/>
+          </a:prstGeom>
+          <a:noFill/>
+        </p:spPr>
+        <p:txBody>
+          <a:bodyPr wrap="square" lIns="0" tIns="0" rIns="0" bIns="0" anchor="ctr"/>
+          <a:lstStyle/>
+          <a:p>
+            <a:pPr marL="0" indent="0">
+              <a:buNone/>
+            </a:pPr>
+            <a:r>
+              <a:rPr sz="1050">
+                <a:solidFill>
+                  <a:srgbClr val="D2E4CE"/>
+                </a:solidFill>
+                <a:latin typeface="Calibri"/>
+                <a:ea typeface="Calibri"/>
+                <a:cs typeface="Calibri"/>
+              </a:rPr>
+              <a:t>Jasmine Rice, no oil</a:t>
+            </a:r>
+            <a:endParaRPr sz="1050"/>
+          </a:p>
+        </p:txBody>
+      </p:sp>
+      <p:sp>
+        <p:nvSpPr>
+          <p:cNvPr id="10" name="Text 8">
+            <a:extLst>
+              <a:ext uri="{FF2B5EF4-FFF2-40B4-BE49-F238E27FC236}">
+                <a16:creationId xmlns:a16="http://schemas.microsoft.com/office/drawing/2014/main" id="{BE8A5288-4469-45DA-BAD0-F665517C1E65}"/>
+              </a:ext>
+            </a:extLst>
+          </p:cNvPr>
+          <p:cNvSpPr>
+            <a:spLocks noGrp="1"/>
+          </p:cNvSpPr>
+          <p:nvPr/>
+        </p:nvSpPr>
+        <p:spPr>
+          <a:xfrm>
+            <a:off x="2971800" y="3383280"/>
+            <a:ext cx="4023360" cy="256032"/>
+          </a:xfrm>
+          <a:prstGeom prst="rect">
+            <a:avLst/>
+          </a:prstGeom>
+          <a:noFill/>
+        </p:spPr>
+        <p:txBody>
+          <a:bodyPr wrap="square" lIns="0" tIns="0" rIns="0" bIns="0" anchor="ctr"/>
+          <a:lstStyle/>
+          <a:p>
+            <a:pPr marL="0" indent="0">
+              <a:buNone/>
+            </a:pPr>
+            <a:r>
+              <a:rPr sz="1150" b="1">
+                <a:solidFill>
+                  <a:srgbClr val="FCF9F0"/>
+                </a:solidFill>
+                <a:latin typeface="Calibri"/>
+                <a:ea typeface="Calibri"/>
+                <a:cs typeface="Calibri"/>
+              </a:rPr>
+              <a:t>немає в PL</a:t>
+            </a:r>
+            <a:endParaRPr sz="1150"/>
+          </a:p>
+        </p:txBody>
+      </p:sp>
+      <p:sp>
+        <p:nvSpPr>
+          <p:cNvPr id="11" name="Text 9">
+            <a:extLst>
+              <a:ext uri="{FF2B5EF4-FFF2-40B4-BE49-F238E27FC236}">
+                <a16:creationId xmlns:a16="http://schemas.microsoft.com/office/drawing/2014/main" id="{FCACD5D8-D338-4EA5-B23F-C319A9D0F23D}"/>
+              </a:ext>
+            </a:extLst>
+          </p:cNvPr>
+          <p:cNvSpPr>
+            <a:spLocks noGrp="1"/>
+          </p:cNvSpPr>
+          <p:nvPr/>
+        </p:nvSpPr>
+        <p:spPr>
+          <a:xfrm>
+            <a:off x="841248" y="3717036"/>
+            <a:ext cx="2103120" cy="256032"/>
+          </a:xfrm>
+          <a:prstGeom prst="rect">
+            <a:avLst/>
+          </a:prstGeom>
+          <a:noFill/>
+        </p:spPr>
+        <p:txBody>
+          <a:bodyPr wrap="square" lIns="0" tIns="0" rIns="0" bIns="0" anchor="ctr"/>
+          <a:lstStyle/>
+          <a:p>
+            <a:pPr marL="0" indent="0">
+              <a:buNone/>
+            </a:pPr>
+            <a:r>
+              <a:rPr sz="1050">
+                <a:solidFill>
+                  <a:srgbClr val="D2E4CE"/>
+                </a:solidFill>
+                <a:latin typeface="Calibri"/>
+                <a:ea typeface="Calibri"/>
+                <a:cs typeface="Calibri"/>
+              </a:rPr>
+              <a:t>Jasmine Rice, w oil</a:t>
+            </a:r>
+            <a:endParaRPr sz="1050"/>
+          </a:p>
+        </p:txBody>
+      </p:sp>
+      <p:sp>
+        <p:nvSpPr>
+          <p:cNvPr id="12" name="Text 10">
+            <a:extLst>
+              <a:ext uri="{FF2B5EF4-FFF2-40B4-BE49-F238E27FC236}">
+                <a16:creationId xmlns:a16="http://schemas.microsoft.com/office/drawing/2014/main" id="{818D73A6-5619-40CD-864C-164E337887CE}"/>
+              </a:ext>
+            </a:extLst>
+          </p:cNvPr>
+          <p:cNvSpPr>
+            <a:spLocks noGrp="1"/>
+          </p:cNvSpPr>
+          <p:nvPr/>
+        </p:nvSpPr>
+        <p:spPr>
+          <a:xfrm>
+            <a:off x="2971800" y="3717036"/>
+            <a:ext cx="4023360" cy="256032"/>
+          </a:xfrm>
+          <a:prstGeom prst="rect">
+            <a:avLst/>
+          </a:prstGeom>
+          <a:noFill/>
+        </p:spPr>
+        <p:txBody>
+          <a:bodyPr wrap="square" lIns="0" tIns="0" rIns="0" bIns="0" anchor="ctr"/>
+          <a:lstStyle/>
+          <a:p>
+            <a:pPr marL="0" indent="0">
+              <a:buNone/>
+            </a:pPr>
+            <a:r>
+              <a:rPr sz="1150" b="1">
+                <a:solidFill>
+                  <a:srgbClr val="FCF9F0"/>
+                </a:solidFill>
+                <a:latin typeface="Calibri"/>
+                <a:ea typeface="Calibri"/>
+                <a:cs typeface="Calibri"/>
+              </a:rPr>
+              <a:t>доступно</a:t>
+            </a:r>
+            <a:endParaRPr sz="1150"/>
+          </a:p>
+        </p:txBody>
+      </p:sp>
+      <p:sp>
+        <p:nvSpPr>
+          <p:cNvPr id="13" name="Text 11">
+            <a:extLst>
+              <a:ext uri="{FF2B5EF4-FFF2-40B4-BE49-F238E27FC236}">
+                <a16:creationId xmlns:a16="http://schemas.microsoft.com/office/drawing/2014/main" id="{1B17E25C-EAC6-44DA-BED1-8DA3C384AB1F}"/>
+              </a:ext>
+            </a:extLst>
+          </p:cNvPr>
+          <p:cNvSpPr>
+            <a:spLocks noGrp="1"/>
+          </p:cNvSpPr>
+          <p:nvPr/>
+        </p:nvSpPr>
+        <p:spPr>
+          <a:xfrm>
+            <a:off x="841248" y="4050792"/>
+            <a:ext cx="2103120" cy="256032"/>
+          </a:xfrm>
+          <a:prstGeom prst="rect">
+            <a:avLst/>
+          </a:prstGeom>
+          <a:noFill/>
+        </p:spPr>
+        <p:txBody>
+          <a:bodyPr wrap="square" lIns="0" tIns="0" rIns="0" bIns="0" anchor="ctr"/>
+          <a:lstStyle/>
+          <a:p>
+            <a:pPr marL="0" indent="0">
+              <a:buNone/>
+            </a:pPr>
+            <a:r>
+              <a:rPr sz="1050">
+                <a:solidFill>
+                  <a:srgbClr val="D2E4CE"/>
+                </a:solidFill>
+                <a:latin typeface="Calibri"/>
+                <a:ea typeface="Calibri"/>
+                <a:cs typeface="Calibri"/>
+              </a:rPr>
+              <a:t>Jasmine Rice (Pathum), w oil</a:t>
+            </a:r>
+            <a:endParaRPr sz="1050"/>
+          </a:p>
+        </p:txBody>
+      </p:sp>
+      <p:sp>
+        <p:nvSpPr>
+          <p:cNvPr id="14" name="Text 12">
+            <a:extLst>
+              <a:ext uri="{FF2B5EF4-FFF2-40B4-BE49-F238E27FC236}">
+                <a16:creationId xmlns:a16="http://schemas.microsoft.com/office/drawing/2014/main" id="{1ACB90C5-BF37-41D9-8DC3-D21E41BC119E}"/>
+              </a:ext>
+            </a:extLst>
+          </p:cNvPr>
+          <p:cNvSpPr>
+            <a:spLocks noGrp="1"/>
+          </p:cNvSpPr>
+          <p:nvPr/>
+        </p:nvSpPr>
+        <p:spPr>
+          <a:xfrm>
+            <a:off x="2971800" y="4050792"/>
+            <a:ext cx="4023360" cy="256032"/>
+          </a:xfrm>
+          <a:prstGeom prst="rect">
+            <a:avLst/>
+          </a:prstGeom>
+          <a:noFill/>
+        </p:spPr>
+        <p:txBody>
+          <a:bodyPr wrap="square" lIns="0" tIns="0" rIns="0" bIns="0" anchor="ctr"/>
+          <a:lstStyle/>
+          <a:p>
+            <a:pPr marL="0" indent="0">
+              <a:buNone/>
+            </a:pPr>
+            <a:r>
+              <a:rPr sz="1150" b="1">
+                <a:solidFill>
+                  <a:srgbClr val="FCF9F0"/>
+                </a:solidFill>
+                <a:latin typeface="Calibri"/>
+                <a:ea typeface="Calibri"/>
+                <a:cs typeface="Calibri"/>
+              </a:rPr>
+              <a:t>доступно</a:t>
+            </a:r>
+            <a:endParaRPr sz="1150"/>
+          </a:p>
+        </p:txBody>
+      </p:sp>
+      <p:sp>
+        <p:nvSpPr>
+          <p:cNvPr id="15" name="Text 13">
+            <a:extLst>
+              <a:ext uri="{FF2B5EF4-FFF2-40B4-BE49-F238E27FC236}">
+                <a16:creationId xmlns:a16="http://schemas.microsoft.com/office/drawing/2014/main" id="{61BC70C4-0C92-435A-9487-D75013A4A699}"/>
+              </a:ext>
+            </a:extLst>
+          </p:cNvPr>
+          <p:cNvSpPr>
+            <a:spLocks noGrp="1"/>
+          </p:cNvSpPr>
+          <p:nvPr/>
+        </p:nvSpPr>
+        <p:spPr>
+          <a:xfrm>
+            <a:off x="841248" y="4384548"/>
+            <a:ext cx="2103120" cy="256032"/>
+          </a:xfrm>
+          <a:prstGeom prst="rect">
+            <a:avLst/>
+          </a:prstGeom>
+          <a:noFill/>
+        </p:spPr>
+        <p:txBody>
+          <a:bodyPr wrap="square" lIns="0" tIns="0" rIns="0" bIns="0" anchor="ctr"/>
+          <a:lstStyle/>
+          <a:p>
+            <a:pPr marL="0" indent="0">
+              <a:buNone/>
+            </a:pPr>
+            <a:r>
+              <a:rPr sz="1050">
+                <a:solidFill>
+                  <a:srgbClr val="D2E4CE"/>
+                </a:solidFill>
+                <a:latin typeface="Calibri"/>
+                <a:ea typeface="Calibri"/>
+                <a:cs typeface="Calibri"/>
+              </a:rPr>
+              <a:t>Brown Jasmine Rice, w oil</a:t>
+            </a:r>
+            <a:endParaRPr sz="1050"/>
+          </a:p>
+        </p:txBody>
+      </p:sp>
+      <p:sp>
+        <p:nvSpPr>
+          <p:cNvPr id="16" name="Text 14">
+            <a:extLst>
+              <a:ext uri="{FF2B5EF4-FFF2-40B4-BE49-F238E27FC236}">
+                <a16:creationId xmlns:a16="http://schemas.microsoft.com/office/drawing/2014/main" id="{3F159060-DCDF-44CC-8B6D-02E8ED33BA8F}"/>
+              </a:ext>
+            </a:extLst>
+          </p:cNvPr>
+          <p:cNvSpPr>
+            <a:spLocks noGrp="1"/>
+          </p:cNvSpPr>
+          <p:nvPr/>
+        </p:nvSpPr>
+        <p:spPr>
+          <a:xfrm>
+            <a:off x="2971800" y="4384548"/>
+            <a:ext cx="4023360" cy="256032"/>
+          </a:xfrm>
+          <a:prstGeom prst="rect">
+            <a:avLst/>
+          </a:prstGeom>
+          <a:noFill/>
+        </p:spPr>
+        <p:txBody>
+          <a:bodyPr wrap="square" lIns="0" tIns="0" rIns="0" bIns="0" anchor="ctr"/>
+          <a:lstStyle/>
+          <a:p>
+            <a:pPr marL="0" indent="0">
+              <a:buNone/>
+            </a:pPr>
+            <a:r>
+              <a:rPr sz="1150" b="1">
+                <a:solidFill>
+                  <a:srgbClr val="FCF9F0"/>
+                </a:solidFill>
+                <a:latin typeface="Calibri"/>
+                <a:ea typeface="Calibri"/>
+                <a:cs typeface="Calibri"/>
+              </a:rPr>
+              <a:t>доступно</a:t>
+            </a:r>
+            <a:endParaRPr sz="1150"/>
+          </a:p>
+        </p:txBody>
+      </p:sp>
+      <p:sp>
+        <p:nvSpPr>
+          <p:cNvPr id="17" name="Text 15">
+            <a:extLst>
+              <a:ext uri="{FF2B5EF4-FFF2-40B4-BE49-F238E27FC236}">
+                <a16:creationId xmlns:a16="http://schemas.microsoft.com/office/drawing/2014/main" id="{387B55C1-5453-4641-8FEE-2A2600E80415}"/>
+              </a:ext>
+            </a:extLst>
+          </p:cNvPr>
+          <p:cNvSpPr>
+            <a:spLocks noGrp="1"/>
+          </p:cNvSpPr>
+          <p:nvPr/>
+        </p:nvSpPr>
+        <p:spPr>
+          <a:xfrm>
+            <a:off x="841248" y="4718304"/>
+            <a:ext cx="2103120" cy="256032"/>
+          </a:xfrm>
+          <a:prstGeom prst="rect">
+            <a:avLst/>
+          </a:prstGeom>
+          <a:noFill/>
+        </p:spPr>
+        <p:txBody>
+          <a:bodyPr wrap="square" lIns="0" tIns="0" rIns="0" bIns="0" anchor="ctr"/>
+          <a:lstStyle/>
+          <a:p>
+            <a:pPr marL="0" indent="0">
+              <a:buNone/>
+            </a:pPr>
+            <a:r>
+              <a:rPr sz="1050">
+                <a:solidFill>
+                  <a:srgbClr val="D2E4CE"/>
+                </a:solidFill>
+                <a:latin typeface="Calibri"/>
+                <a:ea typeface="Calibri"/>
+                <a:cs typeface="Calibri"/>
+              </a:rPr>
+              <a:t>Brown Rice, w oil</a:t>
+            </a:r>
+            <a:endParaRPr sz="1050"/>
+          </a:p>
+        </p:txBody>
+      </p:sp>
+      <p:sp>
+        <p:nvSpPr>
+          <p:cNvPr id="18" name="Text 16">
+            <a:extLst>
+              <a:ext uri="{FF2B5EF4-FFF2-40B4-BE49-F238E27FC236}">
+                <a16:creationId xmlns:a16="http://schemas.microsoft.com/office/drawing/2014/main" id="{E5BCD84D-F4E9-40F7-AA7D-85E5A9A7C865}"/>
+              </a:ext>
+            </a:extLst>
+          </p:cNvPr>
+          <p:cNvSpPr>
+            <a:spLocks noGrp="1"/>
+          </p:cNvSpPr>
+          <p:nvPr/>
+        </p:nvSpPr>
+        <p:spPr>
+          <a:xfrm>
+            <a:off x="2971800" y="4718304"/>
+            <a:ext cx="4023360" cy="256032"/>
+          </a:xfrm>
+          <a:prstGeom prst="rect">
+            <a:avLst/>
+          </a:prstGeom>
+          <a:noFill/>
+        </p:spPr>
+        <p:txBody>
+          <a:bodyPr wrap="square" lIns="0" tIns="0" rIns="0" bIns="0" anchor="ctr"/>
+          <a:lstStyle/>
+          <a:p>
+            <a:pPr marL="0" indent="0">
+              <a:buNone/>
+            </a:pPr>
+            <a:r>
+              <a:rPr sz="1150" b="1">
+                <a:solidFill>
+                  <a:srgbClr val="FCF9F0"/>
+                </a:solidFill>
+                <a:latin typeface="Calibri"/>
+                <a:ea typeface="Calibri"/>
+                <a:cs typeface="Calibri"/>
+              </a:rPr>
+              <a:t>доступно</a:t>
+            </a:r>
+            <a:endParaRPr sz="1150"/>
+          </a:p>
+        </p:txBody>
+      </p:sp>
+      <p:sp>
+        <p:nvSpPr>
+          <p:cNvPr id="19" name="Text 17">
+            <a:extLst>
+              <a:ext uri="{FF2B5EF4-FFF2-40B4-BE49-F238E27FC236}">
+                <a16:creationId xmlns:a16="http://schemas.microsoft.com/office/drawing/2014/main" id="{9CD79870-7EED-40F1-B03F-865D47193057}"/>
+              </a:ext>
+            </a:extLst>
+          </p:cNvPr>
+          <p:cNvSpPr>
+            <a:spLocks noGrp="1"/>
+          </p:cNvSpPr>
+          <p:nvPr/>
+        </p:nvSpPr>
+        <p:spPr>
+          <a:xfrm>
+            <a:off x="841248" y="5052060"/>
+            <a:ext cx="2103120" cy="256032"/>
+          </a:xfrm>
+          <a:prstGeom prst="rect">
+            <a:avLst/>
+          </a:prstGeom>
+          <a:noFill/>
+        </p:spPr>
+        <p:txBody>
+          <a:bodyPr wrap="square" lIns="0" tIns="0" rIns="0" bIns="0" anchor="ctr"/>
+          <a:lstStyle/>
+          <a:p>
+            <a:pPr marL="0" indent="0">
+              <a:buNone/>
+            </a:pPr>
+            <a:r>
+              <a:rPr sz="1050">
+                <a:solidFill>
+                  <a:srgbClr val="D2E4CE"/>
+                </a:solidFill>
+                <a:latin typeface="Calibri"/>
+                <a:ea typeface="Calibri"/>
+                <a:cs typeface="Calibri"/>
+              </a:rPr>
+              <a:t>Basmati Rice*, w oil</a:t>
+            </a:r>
+            <a:endParaRPr sz="1050"/>
+          </a:p>
+        </p:txBody>
+      </p:sp>
+      <p:sp>
+        <p:nvSpPr>
+          <p:cNvPr id="20" name="Text 18">
+            <a:extLst>
+              <a:ext uri="{FF2B5EF4-FFF2-40B4-BE49-F238E27FC236}">
+                <a16:creationId xmlns:a16="http://schemas.microsoft.com/office/drawing/2014/main" id="{9696F0F8-6388-458A-9A6E-BD09F3ACBA30}"/>
+              </a:ext>
+            </a:extLst>
+          </p:cNvPr>
+          <p:cNvSpPr>
+            <a:spLocks noGrp="1"/>
+          </p:cNvSpPr>
+          <p:nvPr/>
+        </p:nvSpPr>
+        <p:spPr>
+          <a:xfrm>
+            <a:off x="2971800" y="5052060"/>
+            <a:ext cx="4023360" cy="256032"/>
+          </a:xfrm>
+          <a:prstGeom prst="rect">
+            <a:avLst/>
+          </a:prstGeom>
+          <a:noFill/>
+        </p:spPr>
+        <p:txBody>
+          <a:bodyPr wrap="square" lIns="0" tIns="0" rIns="0" bIns="0" anchor="ctr"/>
+          <a:lstStyle/>
+          <a:p>
+            <a:pPr marL="0" indent="0">
+              <a:buNone/>
+            </a:pPr>
+            <a:r>
+              <a:rPr sz="1150" b="1">
+                <a:solidFill>
+                  <a:srgbClr val="FCF9F0"/>
+                </a:solidFill>
+                <a:latin typeface="Calibri"/>
+                <a:ea typeface="Calibri"/>
+                <a:cs typeface="Calibri"/>
+              </a:rPr>
+              <a:t>доступно</a:t>
+            </a:r>
+            <a:endParaRPr sz="1150"/>
+          </a:p>
+        </p:txBody>
+      </p:sp>
+      <p:sp>
+        <p:nvSpPr>
+          <p:cNvPr id="21" name="Text 19">
+            <a:extLst>
+              <a:ext uri="{FF2B5EF4-FFF2-40B4-BE49-F238E27FC236}">
+                <a16:creationId xmlns:a16="http://schemas.microsoft.com/office/drawing/2014/main" id="{13A8E69A-5D22-455F-8007-BE2ECE9342F0}"/>
+              </a:ext>
+            </a:extLst>
+          </p:cNvPr>
+          <p:cNvSpPr>
+            <a:spLocks noGrp="1"/>
+          </p:cNvSpPr>
+          <p:nvPr/>
+        </p:nvSpPr>
+        <p:spPr>
+          <a:xfrm>
+            <a:off x="841248" y="5385816"/>
+            <a:ext cx="2103120" cy="256032"/>
+          </a:xfrm>
+          <a:prstGeom prst="rect">
+            <a:avLst/>
+          </a:prstGeom>
+          <a:noFill/>
+        </p:spPr>
+        <p:txBody>
+          <a:bodyPr wrap="square" lIns="0" tIns="0" rIns="0" bIns="0" anchor="ctr"/>
+          <a:lstStyle/>
+          <a:p>
+            <a:pPr marL="0" indent="0">
+              <a:buNone/>
+            </a:pPr>
+            <a:r>
+              <a:rPr sz="1050">
+                <a:solidFill>
+                  <a:srgbClr val="D2E4CE"/>
+                </a:solidFill>
+                <a:latin typeface="Calibri"/>
+                <a:ea typeface="Calibri"/>
+                <a:cs typeface="Calibri"/>
+              </a:rPr>
+              <a:t>Long Grain, w oil</a:t>
+            </a:r>
+            <a:endParaRPr sz="1050"/>
+          </a:p>
+        </p:txBody>
+      </p:sp>
+      <p:sp>
+        <p:nvSpPr>
+          <p:cNvPr id="22" name="Text 20">
+            <a:extLst>
+              <a:ext uri="{FF2B5EF4-FFF2-40B4-BE49-F238E27FC236}">
+                <a16:creationId xmlns:a16="http://schemas.microsoft.com/office/drawing/2014/main" id="{0F71CE83-5380-4313-A831-A097BEC1C816}"/>
+              </a:ext>
+            </a:extLst>
+          </p:cNvPr>
+          <p:cNvSpPr>
+            <a:spLocks noGrp="1"/>
+          </p:cNvSpPr>
+          <p:nvPr/>
+        </p:nvSpPr>
+        <p:spPr>
+          <a:xfrm>
+            <a:off x="2971800" y="5385816"/>
+            <a:ext cx="4023360" cy="256032"/>
+          </a:xfrm>
+          <a:prstGeom prst="rect">
+            <a:avLst/>
+          </a:prstGeom>
+          <a:noFill/>
+        </p:spPr>
+        <p:txBody>
+          <a:bodyPr wrap="square" lIns="0" tIns="0" rIns="0" bIns="0" anchor="ctr"/>
+          <a:lstStyle/>
+          <a:p>
+            <a:pPr marL="0" indent="0">
+              <a:buNone/>
+            </a:pPr>
+            <a:r>
+              <a:rPr sz="1150" b="1">
+                <a:solidFill>
+                  <a:srgbClr val="FCF9F0"/>
+                </a:solidFill>
+                <a:latin typeface="Calibri"/>
+                <a:ea typeface="Calibri"/>
+                <a:cs typeface="Calibri"/>
+              </a:rPr>
+              <a:t>доступно</a:t>
+            </a:r>
+            <a:endParaRPr sz="1150"/>
+          </a:p>
+        </p:txBody>
+      </p:sp>
+      <p:sp>
+        <p:nvSpPr>
+          <p:cNvPr id="24" name="Shape 21">
+            <a:extLst>
+              <a:ext uri="{FF2B5EF4-FFF2-40B4-BE49-F238E27FC236}">
+                <a16:creationId xmlns:a16="http://schemas.microsoft.com/office/drawing/2014/main" id="{7366CF28-1B6D-49C3-946A-65C3FD0C8631}"/>
+              </a:ext>
+            </a:extLst>
+          </p:cNvPr>
+          <p:cNvSpPr>
+            <a:spLocks noGrp="1"/>
+          </p:cNvSpPr>
+          <p:nvPr/>
+        </p:nvSpPr>
+        <p:spPr>
+          <a:xfrm>
+            <a:off x="7534656" y="1536192"/>
+            <a:ext cx="4096512" cy="2834640"/>
+          </a:xfrm>
+          <a:prstGeom prst="rect">
+            <a:avLst/>
+          </a:prstGeom>
+          <a:ln w="15875">
+            <a:solidFill>
+              <a:srgbClr val="C89C40"/>
+            </a:solidFill>
+            <a:prstDash val="solid"/>
+          </a:ln>
+        </p:spPr>
+        <p:txBody>
+          <a:bodyPr/>
+          <a:lstStyle/>
+          <a:p>
+            <a:endParaRPr/>
+          </a:p>
+        </p:txBody>
+      </p:sp>
+      <p:sp>
+        <p:nvSpPr>
+          <p:cNvPr id="25" name="Shape 22">
+            <a:extLst>
+              <a:ext uri="{FF2B5EF4-FFF2-40B4-BE49-F238E27FC236}">
+                <a16:creationId xmlns:a16="http://schemas.microsoft.com/office/drawing/2014/main" id="{831A629E-B7E5-4A9F-8D0C-CEFC366EAB2E}"/>
+              </a:ext>
+            </a:extLst>
+          </p:cNvPr>
+          <p:cNvSpPr>
+            <a:spLocks noGrp="1"/>
+          </p:cNvSpPr>
+          <p:nvPr/>
+        </p:nvSpPr>
+        <p:spPr>
+          <a:xfrm>
+            <a:off x="7534656" y="4526280"/>
+            <a:ext cx="4096512" cy="484632"/>
+          </a:xfrm>
+          <a:prstGeom prst="roundRect">
+            <a:avLst>
+              <a:gd name="adj" fmla="val 15094"/>
+            </a:avLst>
+          </a:prstGeom>
+          <a:solidFill>
+            <a:srgbClr val="12452B">
+              <a:alpha val="90000"/>
+            </a:srgbClr>
+          </a:solidFill>
+          <a:ln w="15875">
+            <a:solidFill>
+              <a:srgbClr val="C89C40"/>
+            </a:solidFill>
+            <a:prstDash val="solid"/>
+          </a:ln>
+          <a:effectLst>
+            <a:outerShdw blurRad="177800" dist="38100" dir="5400000" algn="bl" rotWithShape="0">
+              <a:srgbClr val="000000">
+                <a:alpha val="45000"/>
+              </a:srgbClr>
+            </a:outerShdw>
+          </a:effectLst>
+        </p:spPr>
+        <p:txBody>
+          <a:bodyPr/>
+          <a:lstStyle/>
+          <a:p>
+            <a:endParaRPr/>
+          </a:p>
+        </p:txBody>
+      </p:sp>
+      <p:sp>
+        <p:nvSpPr>
+          <p:cNvPr id="26" name="Text 23">
+            <a:extLst>
+              <a:ext uri="{FF2B5EF4-FFF2-40B4-BE49-F238E27FC236}">
+                <a16:creationId xmlns:a16="http://schemas.microsoft.com/office/drawing/2014/main" id="{3B99B33F-CA18-49F8-8EC9-D0A44AF63E2D}"/>
+              </a:ext>
+            </a:extLst>
+          </p:cNvPr>
+          <p:cNvSpPr>
+            <a:spLocks noGrp="1"/>
+          </p:cNvSpPr>
+          <p:nvPr/>
+        </p:nvSpPr>
+        <p:spPr>
+          <a:xfrm>
+            <a:off x="7717536" y="4581144"/>
+            <a:ext cx="1371600" cy="365760"/>
+          </a:xfrm>
+          <a:prstGeom prst="rect">
+            <a:avLst/>
+          </a:prstGeom>
+          <a:noFill/>
+        </p:spPr>
+        <p:txBody>
+          <a:bodyPr wrap="square" lIns="0" tIns="0" rIns="0" bIns="0" anchor="ctr"/>
+          <a:lstStyle/>
+          <a:p>
+            <a:pPr marL="0" indent="0">
+              <a:buNone/>
+            </a:pPr>
+            <a:r>
+              <a:rPr sz="1900" b="1">
+                <a:solidFill>
+                  <a:srgbClr val="F5CE76"/>
+                </a:solidFill>
+                <a:latin typeface="Cambria"/>
+                <a:ea typeface="Cambria"/>
+                <a:cs typeface="Cambria"/>
+              </a:rPr>
+              <a:t>6 од.</a:t>
+            </a:r>
+            <a:r>
+              <a:rPr sz="1100">
+                <a:solidFill>
+                  <a:srgbClr val="F5CE76"/>
+                </a:solidFill>
+                <a:latin typeface="Cambria"/>
+                <a:ea typeface="Cambria"/>
+                <a:cs typeface="Cambria"/>
+              </a:rPr>
+              <a:t> у коробі</a:t>
+            </a:r>
+            <a:endParaRPr sz="1900"/>
+          </a:p>
+        </p:txBody>
+      </p:sp>
+      <p:sp>
+        <p:nvSpPr>
+          <p:cNvPr id="27" name="Text 24">
+            <a:extLst>
+              <a:ext uri="{FF2B5EF4-FFF2-40B4-BE49-F238E27FC236}">
+                <a16:creationId xmlns:a16="http://schemas.microsoft.com/office/drawing/2014/main" id="{9254B401-36F1-4B46-897A-3CB2BDEB1BA4}"/>
+              </a:ext>
+            </a:extLst>
+          </p:cNvPr>
+          <p:cNvSpPr>
+            <a:spLocks noGrp="1"/>
+          </p:cNvSpPr>
+          <p:nvPr/>
+        </p:nvSpPr>
+        <p:spPr>
+          <a:xfrm>
+            <a:off x="9098280" y="4581144"/>
+            <a:ext cx="2377440" cy="365760"/>
+          </a:xfrm>
+          <a:prstGeom prst="rect">
+            <a:avLst/>
+          </a:prstGeom>
+          <a:noFill/>
+        </p:spPr>
+        <p:txBody>
+          <a:bodyPr wrap="square" lIns="0" tIns="0" rIns="0" bIns="0" anchor="ctr"/>
+          <a:lstStyle/>
+          <a:p>
+            <a:pPr marL="0" indent="0" algn="r">
+              <a:buNone/>
+            </a:pPr>
+            <a:r>
+              <a:rPr sz="1050">
+                <a:solidFill>
+                  <a:srgbClr val="FCF9F0"/>
+                </a:solidFill>
+                <a:latin typeface="Calibri"/>
+                <a:ea typeface="Calibri"/>
+                <a:cs typeface="Calibri"/>
+              </a:rPr>
+              <a:t>2 × 125 г = 250 г / уніт</a:t>
+            </a:r>
+            <a:endParaRPr sz="1050"/>
+          </a:p>
+        </p:txBody>
+      </p:sp>
+      <p:sp>
+        <p:nvSpPr>
+          <p:cNvPr id="28" name="Shape 25">
+            <a:extLst>
+              <a:ext uri="{FF2B5EF4-FFF2-40B4-BE49-F238E27FC236}">
+                <a16:creationId xmlns:a16="http://schemas.microsoft.com/office/drawing/2014/main" id="{B6DB6DF8-9EDE-4700-B934-B2C5D27FD37C}"/>
+              </a:ext>
+            </a:extLst>
+          </p:cNvPr>
+          <p:cNvSpPr>
+            <a:spLocks noGrp="1"/>
+          </p:cNvSpPr>
+          <p:nvPr/>
+        </p:nvSpPr>
+        <p:spPr>
+          <a:xfrm>
+            <a:off x="7534656" y="5093208"/>
+            <a:ext cx="4096512" cy="484632"/>
+          </a:xfrm>
+          <a:prstGeom prst="roundRect">
+            <a:avLst>
+              <a:gd name="adj" fmla="val 15094"/>
+            </a:avLst>
+          </a:prstGeom>
+          <a:solidFill>
+            <a:srgbClr val="12452B">
+              <a:alpha val="90000"/>
+            </a:srgbClr>
+          </a:solidFill>
+          <a:ln w="15875">
+            <a:solidFill>
+              <a:srgbClr val="C89C40"/>
+            </a:solidFill>
+            <a:prstDash val="solid"/>
+          </a:ln>
+          <a:effectLst>
+            <a:outerShdw blurRad="177800" dist="38100" dir="5400000" algn="bl" rotWithShape="0">
+              <a:srgbClr val="000000">
+                <a:alpha val="45000"/>
+              </a:srgbClr>
+            </a:outerShdw>
+          </a:effectLst>
+        </p:spPr>
+        <p:txBody>
+          <a:bodyPr/>
+          <a:lstStyle/>
+          <a:p>
+            <a:endParaRPr/>
+          </a:p>
+        </p:txBody>
+      </p:sp>
+      <p:sp>
+        <p:nvSpPr>
+          <p:cNvPr id="29" name="Text 26">
+            <a:extLst>
+              <a:ext uri="{FF2B5EF4-FFF2-40B4-BE49-F238E27FC236}">
+                <a16:creationId xmlns:a16="http://schemas.microsoft.com/office/drawing/2014/main" id="{C0BEDDE1-3BA8-41C7-A18B-3458416DEE72}"/>
+              </a:ext>
+            </a:extLst>
+          </p:cNvPr>
+          <p:cNvSpPr>
+            <a:spLocks noGrp="1"/>
+          </p:cNvSpPr>
+          <p:nvPr/>
+        </p:nvSpPr>
+        <p:spPr>
+          <a:xfrm>
+            <a:off x="7717536" y="5148072"/>
+            <a:ext cx="1371600" cy="365760"/>
+          </a:xfrm>
+          <a:prstGeom prst="rect">
+            <a:avLst/>
+          </a:prstGeom>
+          <a:noFill/>
+        </p:spPr>
+        <p:txBody>
+          <a:bodyPr wrap="square" lIns="0" tIns="0" rIns="0" bIns="0" anchor="ctr"/>
+          <a:lstStyle/>
+          <a:p>
+            <a:pPr marL="0" indent="0">
+              <a:buNone/>
+            </a:pPr>
+            <a:r>
+              <a:rPr sz="1900" b="1">
+                <a:solidFill>
+                  <a:srgbClr val="F5CE76"/>
+                </a:solidFill>
+                <a:latin typeface="Cambria"/>
+                <a:ea typeface="Cambria"/>
+                <a:cs typeface="Cambria"/>
+              </a:rPr>
+              <a:t>PL</a:t>
+            </a:r>
+            <a:r>
+              <a:rPr sz="1100">
+                <a:solidFill>
+                  <a:srgbClr val="F5CE76"/>
+                </a:solidFill>
+                <a:latin typeface="Cambria"/>
+                <a:ea typeface="Cambria"/>
+                <a:cs typeface="Cambria"/>
+              </a:rPr>
+              <a:t> бренд</a:t>
+            </a:r>
+            <a:endParaRPr sz="1900"/>
+          </a:p>
+        </p:txBody>
+      </p:sp>
+      <p:sp>
+        <p:nvSpPr>
+          <p:cNvPr id="30" name="Text 27">
+            <a:extLst>
+              <a:ext uri="{FF2B5EF4-FFF2-40B4-BE49-F238E27FC236}">
+                <a16:creationId xmlns:a16="http://schemas.microsoft.com/office/drawing/2014/main" id="{218C4906-3F42-4BCF-AD90-A44D05606B4C}"/>
+              </a:ext>
+            </a:extLst>
+          </p:cNvPr>
+          <p:cNvSpPr>
+            <a:spLocks noGrp="1"/>
+          </p:cNvSpPr>
+          <p:nvPr/>
+        </p:nvSpPr>
+        <p:spPr>
+          <a:xfrm>
+            <a:off x="9098280" y="5148072"/>
+            <a:ext cx="2377440" cy="365760"/>
+          </a:xfrm>
+          <a:prstGeom prst="rect">
+            <a:avLst/>
+          </a:prstGeom>
+          <a:noFill/>
+        </p:spPr>
+        <p:txBody>
+          <a:bodyPr wrap="square" lIns="0" tIns="0" rIns="0" bIns="0" anchor="ctr"/>
+          <a:lstStyle/>
+          <a:p>
+            <a:pPr marL="0" indent="0" algn="r">
+              <a:buNone/>
+            </a:pPr>
+            <a:r>
+              <a:rPr sz="1050">
+                <a:solidFill>
+                  <a:srgbClr val="FCF9F0"/>
+                </a:solidFill>
+                <a:latin typeface="Calibri"/>
+                <a:ea typeface="Calibri"/>
+                <a:cs typeface="Calibri"/>
+              </a:rPr>
+              <a:t>тільки Private Label</a:t>
+            </a:r>
+            <a:endParaRPr sz="1050"/>
+          </a:p>
+        </p:txBody>
+      </p:sp>
+      <p:sp>
+        <p:nvSpPr>
+          <p:cNvPr id="31" name="Shape 28">
+            <a:extLst>
+              <a:ext uri="{FF2B5EF4-FFF2-40B4-BE49-F238E27FC236}">
+                <a16:creationId xmlns:a16="http://schemas.microsoft.com/office/drawing/2014/main" id="{5F74166D-A4F2-4F13-9CD5-9980A3D4D94F}"/>
+              </a:ext>
+            </a:extLst>
+          </p:cNvPr>
+          <p:cNvSpPr>
+            <a:spLocks noGrp="1"/>
+          </p:cNvSpPr>
+          <p:nvPr/>
+        </p:nvSpPr>
+        <p:spPr>
+          <a:xfrm>
+            <a:off x="7534656" y="5660136"/>
+            <a:ext cx="4096512" cy="484632"/>
+          </a:xfrm>
+          <a:prstGeom prst="roundRect">
+            <a:avLst>
+              <a:gd name="adj" fmla="val 15094"/>
+            </a:avLst>
+          </a:prstGeom>
+          <a:solidFill>
+            <a:srgbClr val="12452B">
+              <a:alpha val="90000"/>
+            </a:srgbClr>
+          </a:solidFill>
+          <a:ln w="15875">
+            <a:solidFill>
+              <a:srgbClr val="C89C40"/>
+            </a:solidFill>
+            <a:prstDash val="solid"/>
+          </a:ln>
+          <a:effectLst>
+            <a:outerShdw blurRad="177800" dist="38100" dir="5400000" algn="bl" rotWithShape="0">
+              <a:srgbClr val="000000">
+                <a:alpha val="45000"/>
+              </a:srgbClr>
+            </a:outerShdw>
+          </a:effectLst>
+        </p:spPr>
+        <p:txBody>
+          <a:bodyPr/>
+          <a:lstStyle/>
+          <a:p>
+            <a:endParaRPr/>
+          </a:p>
+        </p:txBody>
+      </p:sp>
+      <p:sp>
+        <p:nvSpPr>
+          <p:cNvPr id="32" name="Text 29">
+            <a:extLst>
+              <a:ext uri="{FF2B5EF4-FFF2-40B4-BE49-F238E27FC236}">
+                <a16:creationId xmlns:a16="http://schemas.microsoft.com/office/drawing/2014/main" id="{261A9ED7-0551-4B4E-B905-410FED97DEDE}"/>
+              </a:ext>
+            </a:extLst>
+          </p:cNvPr>
+          <p:cNvSpPr>
+            <a:spLocks noGrp="1"/>
+          </p:cNvSpPr>
+          <p:nvPr/>
+        </p:nvSpPr>
+        <p:spPr>
+          <a:xfrm>
+            <a:off x="7717536" y="5715000"/>
+            <a:ext cx="1371600" cy="365760"/>
+          </a:xfrm>
+          <a:prstGeom prst="rect">
+            <a:avLst/>
+          </a:prstGeom>
+          <a:noFill/>
+        </p:spPr>
+        <p:txBody>
+          <a:bodyPr wrap="square" lIns="0" tIns="0" rIns="0" bIns="0" anchor="ctr"/>
+          <a:lstStyle/>
+          <a:p>
+            <a:pPr marL="0" indent="0">
+              <a:buNone/>
+            </a:pPr>
+            <a:r>
+              <a:rPr sz="1900" b="1">
+                <a:solidFill>
+                  <a:srgbClr val="F5CE76"/>
+                </a:solidFill>
+                <a:latin typeface="Cambria"/>
+                <a:ea typeface="Cambria"/>
+                <a:cs typeface="Cambria"/>
+              </a:rPr>
+              <a:t>OEM</a:t>
+            </a:r>
+            <a:endParaRPr sz="1900"/>
+          </a:p>
+        </p:txBody>
+      </p:sp>
+      <p:sp>
+        <p:nvSpPr>
+          <p:cNvPr id="33" name="Text 30">
+            <a:extLst>
+              <a:ext uri="{FF2B5EF4-FFF2-40B4-BE49-F238E27FC236}">
+                <a16:creationId xmlns:a16="http://schemas.microsoft.com/office/drawing/2014/main" id="{E99E232B-CE92-4C25-B546-D18CAEAE1AAC}"/>
+              </a:ext>
+            </a:extLst>
+          </p:cNvPr>
+          <p:cNvSpPr>
+            <a:spLocks noGrp="1"/>
+          </p:cNvSpPr>
+          <p:nvPr/>
+        </p:nvSpPr>
+        <p:spPr>
+          <a:xfrm>
+            <a:off x="9098280" y="5715000"/>
+            <a:ext cx="2377440" cy="365760"/>
+          </a:xfrm>
+          <a:prstGeom prst="rect">
+            <a:avLst/>
+          </a:prstGeom>
+          <a:noFill/>
+        </p:spPr>
+        <p:txBody>
+          <a:bodyPr wrap="square" lIns="0" tIns="0" rIns="0" bIns="0" anchor="ctr"/>
+          <a:lstStyle/>
+          <a:p>
+            <a:pPr marL="0" indent="0" algn="r">
+              <a:buNone/>
+            </a:pPr>
+            <a:r>
+              <a:rPr sz="1050">
+                <a:solidFill>
+                  <a:srgbClr val="FCF9F0"/>
+                </a:solidFill>
+                <a:latin typeface="Calibri"/>
+                <a:ea typeface="Calibri"/>
+                <a:cs typeface="Calibri"/>
+              </a:rPr>
+              <a:t>друк дизайну клієнта на sleeve</a:t>
+            </a:r>
+            <a:endParaRPr sz="1050"/>
+          </a:p>
+        </p:txBody>
+      </p:sp>
+      <p:pic>
+        <p:nvPicPr>
+          <p:cNvPr id="34" name="Picture 33" descr="sleeve_25_p.jpg"/>
+          <p:cNvPicPr>
+            <a:picLocks noChangeAspect="1"/>
+          </p:cNvPicPr>
+          <p:nvPr/>
+        </p:nvPicPr>
+        <p:blipFill>
+          <a:blip r:embed="rId4"/>
+          <a:stretch>
+            <a:fillRect/>
+          </a:stretch>
+        </p:blipFill>
+        <p:spPr>
+          <a:xfrm>
+            <a:off x="7534656" y="2355201"/>
+            <a:ext cx="1292352" cy="1196622"/>
+          </a:xfrm>
+          <a:prstGeom prst="roundRect">
+            <a:avLst/>
+          </a:prstGeom>
+          <a:ln w="9525">
+            <a:solidFill>
+              <a:srgbClr val="C89C40"/>
+            </a:solidFill>
+          </a:ln>
+        </p:spPr>
+      </p:pic>
+      <p:pic>
+        <p:nvPicPr>
+          <p:cNvPr id="35" name="Picture 34" descr="sleeve_26_p.jpg"/>
+          <p:cNvPicPr>
+            <a:picLocks noChangeAspect="1"/>
+          </p:cNvPicPr>
+          <p:nvPr/>
+        </p:nvPicPr>
+        <p:blipFill>
+          <a:blip r:embed="rId5"/>
+          <a:stretch>
+            <a:fillRect/>
+          </a:stretch>
+        </p:blipFill>
+        <p:spPr>
+          <a:xfrm>
+            <a:off x="8936736" y="2355201"/>
+            <a:ext cx="1292352" cy="1196622"/>
+          </a:xfrm>
+          <a:prstGeom prst="roundRect">
+            <a:avLst/>
+          </a:prstGeom>
+          <a:ln w="9525">
+            <a:solidFill>
+              <a:srgbClr val="C89C40"/>
+            </a:solidFill>
+          </a:ln>
+        </p:spPr>
+      </p:pic>
+      <p:pic>
+        <p:nvPicPr>
+          <p:cNvPr id="36" name="Picture 35" descr="sleeve_27_p.jpg"/>
+          <p:cNvPicPr>
+            <a:picLocks noChangeAspect="1"/>
+          </p:cNvPicPr>
+          <p:nvPr/>
+        </p:nvPicPr>
+        <p:blipFill>
+          <a:blip r:embed="rId6"/>
+          <a:stretch>
+            <a:fillRect/>
+          </a:stretch>
+        </p:blipFill>
+        <p:spPr>
+          <a:xfrm>
+            <a:off x="10338816" y="2355201"/>
+            <a:ext cx="1292352" cy="1196622"/>
+          </a:xfrm>
+          <a:prstGeom prst="roundRect">
+            <a:avLst/>
+          </a:prstGeom>
+          <a:ln w="9525">
+            <a:solidFill>
+              <a:srgbClr val="C89C40"/>
+            </a:solidFill>
+          </a:ln>
+        </p:spPr>
+      </p:pic>
+      <p:sp>
+        <p:nvSpPr>
+          <p:cNvPr id="37" name="TextBox 36"/>
+          <p:cNvSpPr txBox="1"/>
+          <p:nvPr/>
+        </p:nvSpPr>
+        <p:spPr>
+          <a:xfrm>
+            <a:off x="566928" y="6355080"/>
+            <a:ext cx="11064240" cy="274320"/>
+          </a:xfrm>
+          <a:prstGeom prst="rect">
+            <a:avLst/>
+          </a:prstGeom>
+          <a:noFill/>
+        </p:spPr>
+        <p:txBody>
+          <a:bodyPr wrap="none" lIns="0" rIns="0" tIns="0" bIns="0">
+            <a:spAutoFit/>
+          </a:bodyPr>
+          <a:lstStyle/>
+          <a:p>
+            <a:r>
+              <a:rPr sz="900">
+                <a:solidFill>
+                  <a:srgbClr val="C3D7BF"/>
+                </a:solidFill>
+                <a:latin typeface="Calibri"/>
+              </a:rPr>
+              <a:t>Джерело: Cup-Photo of Products.pdf — фото порожньої sleeve-упаковки від BSCM Foods; фото SPAR Jasmine Rice Cups надано користувачем.</a:t>
+            </a:r>
           </a:p>
         </p:txBody>
       </p:sp>

--- a/RTE_Rice_Suppliers.pptx
+++ b/RTE_Rice_Suppliers.pptx
@@ -17065,10 +17065,10 @@
       </p:sp>
       <p:sp>
         <p:nvSpPr>
-          <p:cNvPr id="9" name="Text 7">
-            <a:extLst>
-              <a:ext uri="{FF2B5EF4-FFF2-40B4-BE49-F238E27FC236}">
-                <a16:creationId xmlns:a16="http://schemas.microsoft.com/office/drawing/2014/main" id="{7A91FA7F-CF81-4499-8A50-A7DEE4346D83}"/>
+          <p:cNvPr id="11" name="Text 9">
+            <a:extLst>
+              <a:ext uri="{FF2B5EF4-FFF2-40B4-BE49-F238E27FC236}">
+                <a16:creationId xmlns:a16="http://schemas.microsoft.com/office/drawing/2014/main" id="{FCACD5D8-D338-4EA5-B23F-C319A9D0F23D}"/>
               </a:ext>
             </a:extLst>
           </p:cNvPr>
@@ -17080,30 +17080,35 @@
         <p:spPr>
           <a:xfrm>
             <a:off x="841248" y="3383280"/>
-            <a:ext cx="2103120" cy="256032"/>
-          </a:xfrm>
-          <a:prstGeom prst="rect">
-            <a:avLst/>
-          </a:prstGeom>
-          <a:noFill/>
-        </p:spPr>
-        <p:txBody>
-          <a:bodyPr wrap="square" lIns="0" tIns="0" rIns="0" bIns="0" anchor="ctr"/>
-          <a:lstStyle/>
-          <a:p>
-            <a:pPr marL="0" indent="0">
-              <a:buNone/>
-            </a:pPr>
-            <a:r>
-              <a:rPr sz="1050">
-                <a:solidFill>
-                  <a:srgbClr val="D2E4CE"/>
-                </a:solidFill>
-                <a:latin typeface="Calibri"/>
-                <a:ea typeface="Calibri"/>
-                <a:cs typeface="Calibri"/>
-              </a:rPr>
-              <a:t>Jasmine Rice, no oil</a:t>
+            <a:ext cx="5486400" cy="256032"/>
+          </a:xfrm>
+          <a:prstGeom prst="rect">
+            <a:avLst/>
+          </a:prstGeom>
+          <a:noFill/>
+        </p:spPr>
+        <p:txBody>
+          <a:bodyPr wrap="square" lIns="0" tIns="0" rIns="0" bIns="0" anchor="ctr"/>
+          <a:lstStyle/>
+          <a:p>
+            <a:pPr marL="201168" indent="-201168">
+              <a:buNone/>
+              <a:buClr>
+                <a:srgbClr val="F5CE76"/>
+              </a:buClr>
+              <a:buFont typeface="Arial"/>
+              <a:buChar char="●"/>
+            </a:pPr>
+            <a:r>
+              <a:rPr sz="1400" b="0">
+                <a:solidFill>
+                  <a:srgbClr val="FCF9F0"/>
+                </a:solidFill>
+                <a:latin typeface="Calibri"/>
+                <a:ea typeface="Calibri"/>
+                <a:cs typeface="Calibri"/>
+              </a:rPr>
+              <a:t>Jasmine Rice</a:t>
             </a:r>
             <a:endParaRPr sz="1050"/>
           </a:p>
@@ -17111,37 +17116,42 @@
       </p:sp>
       <p:sp>
         <p:nvSpPr>
-          <p:cNvPr id="10" name="Text 8">
-            <a:extLst>
-              <a:ext uri="{FF2B5EF4-FFF2-40B4-BE49-F238E27FC236}">
-                <a16:creationId xmlns:a16="http://schemas.microsoft.com/office/drawing/2014/main" id="{BE8A5288-4469-45DA-BAD0-F665517C1E65}"/>
-              </a:ext>
-            </a:extLst>
-          </p:cNvPr>
-          <p:cNvSpPr>
-            <a:spLocks noGrp="1"/>
-          </p:cNvSpPr>
-          <p:nvPr/>
-        </p:nvSpPr>
-        <p:spPr>
-          <a:xfrm>
-            <a:off x="2971800" y="3383280"/>
-            <a:ext cx="4023360" cy="256032"/>
-          </a:xfrm>
-          <a:prstGeom prst="rect">
-            <a:avLst/>
-          </a:prstGeom>
-          <a:noFill/>
-        </p:spPr>
-        <p:txBody>
-          <a:bodyPr wrap="square" lIns="0" tIns="0" rIns="0" bIns="0" anchor="ctr"/>
-          <a:lstStyle/>
-          <a:p>
-            <a:pPr marL="0" indent="0">
-              <a:buNone/>
-            </a:pPr>
-            <a:r>
-              <a:rPr sz="1150" b="1">
+          <p:cNvPr id="13" name="Text 11">
+            <a:extLst>
+              <a:ext uri="{FF2B5EF4-FFF2-40B4-BE49-F238E27FC236}">
+                <a16:creationId xmlns:a16="http://schemas.microsoft.com/office/drawing/2014/main" id="{1B17E25C-EAC6-44DA-BED1-8DA3C384AB1F}"/>
+              </a:ext>
+            </a:extLst>
+          </p:cNvPr>
+          <p:cNvSpPr>
+            <a:spLocks noGrp="1"/>
+          </p:cNvSpPr>
+          <p:nvPr/>
+        </p:nvSpPr>
+        <p:spPr>
+          <a:xfrm>
+            <a:off x="841248" y="3749040"/>
+            <a:ext cx="5486400" cy="256032"/>
+          </a:xfrm>
+          <a:prstGeom prst="rect">
+            <a:avLst/>
+          </a:prstGeom>
+          <a:noFill/>
+        </p:spPr>
+        <p:txBody>
+          <a:bodyPr wrap="square" lIns="0" tIns="0" rIns="0" bIns="0" anchor="ctr"/>
+          <a:lstStyle/>
+          <a:p>
+            <a:pPr marL="201168" indent="-201168">
+              <a:buNone/>
+              <a:buClr>
+                <a:srgbClr val="F5CE76"/>
+              </a:buClr>
+              <a:buFont typeface="Arial"/>
+              <a:buChar char="●"/>
+            </a:pPr>
+            <a:r>
+              <a:rPr sz="1400" b="0">
                 <a:solidFill>
                   <a:srgbClr val="FCF9F0"/>
                 </a:solidFill>
@@ -17149,53 +17159,7 @@
                 <a:ea typeface="Calibri"/>
                 <a:cs typeface="Calibri"/>
               </a:rPr>
-              <a:t>немає в PL</a:t>
-            </a:r>
-            <a:endParaRPr sz="1150"/>
-          </a:p>
-        </p:txBody>
-      </p:sp>
-      <p:sp>
-        <p:nvSpPr>
-          <p:cNvPr id="11" name="Text 9">
-            <a:extLst>
-              <a:ext uri="{FF2B5EF4-FFF2-40B4-BE49-F238E27FC236}">
-                <a16:creationId xmlns:a16="http://schemas.microsoft.com/office/drawing/2014/main" id="{FCACD5D8-D338-4EA5-B23F-C319A9D0F23D}"/>
-              </a:ext>
-            </a:extLst>
-          </p:cNvPr>
-          <p:cNvSpPr>
-            <a:spLocks noGrp="1"/>
-          </p:cNvSpPr>
-          <p:nvPr/>
-        </p:nvSpPr>
-        <p:spPr>
-          <a:xfrm>
-            <a:off x="841248" y="3717036"/>
-            <a:ext cx="2103120" cy="256032"/>
-          </a:xfrm>
-          <a:prstGeom prst="rect">
-            <a:avLst/>
-          </a:prstGeom>
-          <a:noFill/>
-        </p:spPr>
-        <p:txBody>
-          <a:bodyPr wrap="square" lIns="0" tIns="0" rIns="0" bIns="0" anchor="ctr"/>
-          <a:lstStyle/>
-          <a:p>
-            <a:pPr marL="0" indent="0">
-              <a:buNone/>
-            </a:pPr>
-            <a:r>
-              <a:rPr sz="1050">
-                <a:solidFill>
-                  <a:srgbClr val="D2E4CE"/>
-                </a:solidFill>
-                <a:latin typeface="Calibri"/>
-                <a:ea typeface="Calibri"/>
-                <a:cs typeface="Calibri"/>
-              </a:rPr>
-              <a:t>Jasmine Rice, w oil</a:t>
+              <a:t>Jasmine Rice (Pathum)</a:t>
             </a:r>
             <a:endParaRPr sz="1050"/>
           </a:p>
@@ -17203,37 +17167,42 @@
       </p:sp>
       <p:sp>
         <p:nvSpPr>
-          <p:cNvPr id="12" name="Text 10">
-            <a:extLst>
-              <a:ext uri="{FF2B5EF4-FFF2-40B4-BE49-F238E27FC236}">
-                <a16:creationId xmlns:a16="http://schemas.microsoft.com/office/drawing/2014/main" id="{818D73A6-5619-40CD-864C-164E337887CE}"/>
-              </a:ext>
-            </a:extLst>
-          </p:cNvPr>
-          <p:cNvSpPr>
-            <a:spLocks noGrp="1"/>
-          </p:cNvSpPr>
-          <p:nvPr/>
-        </p:nvSpPr>
-        <p:spPr>
-          <a:xfrm>
-            <a:off x="2971800" y="3717036"/>
-            <a:ext cx="4023360" cy="256032"/>
-          </a:xfrm>
-          <a:prstGeom prst="rect">
-            <a:avLst/>
-          </a:prstGeom>
-          <a:noFill/>
-        </p:spPr>
-        <p:txBody>
-          <a:bodyPr wrap="square" lIns="0" tIns="0" rIns="0" bIns="0" anchor="ctr"/>
-          <a:lstStyle/>
-          <a:p>
-            <a:pPr marL="0" indent="0">
-              <a:buNone/>
-            </a:pPr>
-            <a:r>
-              <a:rPr sz="1150" b="1">
+          <p:cNvPr id="15" name="Text 13">
+            <a:extLst>
+              <a:ext uri="{FF2B5EF4-FFF2-40B4-BE49-F238E27FC236}">
+                <a16:creationId xmlns:a16="http://schemas.microsoft.com/office/drawing/2014/main" id="{61BC70C4-0C92-435A-9487-D75013A4A699}"/>
+              </a:ext>
+            </a:extLst>
+          </p:cNvPr>
+          <p:cNvSpPr>
+            <a:spLocks noGrp="1"/>
+          </p:cNvSpPr>
+          <p:nvPr/>
+        </p:nvSpPr>
+        <p:spPr>
+          <a:xfrm>
+            <a:off x="841248" y="4114800"/>
+            <a:ext cx="5486400" cy="256032"/>
+          </a:xfrm>
+          <a:prstGeom prst="rect">
+            <a:avLst/>
+          </a:prstGeom>
+          <a:noFill/>
+        </p:spPr>
+        <p:txBody>
+          <a:bodyPr wrap="square" lIns="0" tIns="0" rIns="0" bIns="0" anchor="ctr"/>
+          <a:lstStyle/>
+          <a:p>
+            <a:pPr marL="201168" indent="-201168">
+              <a:buNone/>
+              <a:buClr>
+                <a:srgbClr val="F5CE76"/>
+              </a:buClr>
+              <a:buFont typeface="Arial"/>
+              <a:buChar char="●"/>
+            </a:pPr>
+            <a:r>
+              <a:rPr sz="1400" b="0">
                 <a:solidFill>
                   <a:srgbClr val="FCF9F0"/>
                 </a:solidFill>
@@ -17241,53 +17210,7 @@
                 <a:ea typeface="Calibri"/>
                 <a:cs typeface="Calibri"/>
               </a:rPr>
-              <a:t>доступно</a:t>
-            </a:r>
-            <a:endParaRPr sz="1150"/>
-          </a:p>
-        </p:txBody>
-      </p:sp>
-      <p:sp>
-        <p:nvSpPr>
-          <p:cNvPr id="13" name="Text 11">
-            <a:extLst>
-              <a:ext uri="{FF2B5EF4-FFF2-40B4-BE49-F238E27FC236}">
-                <a16:creationId xmlns:a16="http://schemas.microsoft.com/office/drawing/2014/main" id="{1B17E25C-EAC6-44DA-BED1-8DA3C384AB1F}"/>
-              </a:ext>
-            </a:extLst>
-          </p:cNvPr>
-          <p:cNvSpPr>
-            <a:spLocks noGrp="1"/>
-          </p:cNvSpPr>
-          <p:nvPr/>
-        </p:nvSpPr>
-        <p:spPr>
-          <a:xfrm>
-            <a:off x="841248" y="4050792"/>
-            <a:ext cx="2103120" cy="256032"/>
-          </a:xfrm>
-          <a:prstGeom prst="rect">
-            <a:avLst/>
-          </a:prstGeom>
-          <a:noFill/>
-        </p:spPr>
-        <p:txBody>
-          <a:bodyPr wrap="square" lIns="0" tIns="0" rIns="0" bIns="0" anchor="ctr"/>
-          <a:lstStyle/>
-          <a:p>
-            <a:pPr marL="0" indent="0">
-              <a:buNone/>
-            </a:pPr>
-            <a:r>
-              <a:rPr sz="1050">
-                <a:solidFill>
-                  <a:srgbClr val="D2E4CE"/>
-                </a:solidFill>
-                <a:latin typeface="Calibri"/>
-                <a:ea typeface="Calibri"/>
-                <a:cs typeface="Calibri"/>
-              </a:rPr>
-              <a:t>Jasmine Rice (Pathum), w oil</a:t>
+              <a:t>Brown Jasmine Rice</a:t>
             </a:r>
             <a:endParaRPr sz="1050"/>
           </a:p>
@@ -17295,37 +17218,42 @@
       </p:sp>
       <p:sp>
         <p:nvSpPr>
-          <p:cNvPr id="14" name="Text 12">
-            <a:extLst>
-              <a:ext uri="{FF2B5EF4-FFF2-40B4-BE49-F238E27FC236}">
-                <a16:creationId xmlns:a16="http://schemas.microsoft.com/office/drawing/2014/main" id="{1ACB90C5-BF37-41D9-8DC3-D21E41BC119E}"/>
-              </a:ext>
-            </a:extLst>
-          </p:cNvPr>
-          <p:cNvSpPr>
-            <a:spLocks noGrp="1"/>
-          </p:cNvSpPr>
-          <p:nvPr/>
-        </p:nvSpPr>
-        <p:spPr>
-          <a:xfrm>
-            <a:off x="2971800" y="4050792"/>
-            <a:ext cx="4023360" cy="256032"/>
-          </a:xfrm>
-          <a:prstGeom prst="rect">
-            <a:avLst/>
-          </a:prstGeom>
-          <a:noFill/>
-        </p:spPr>
-        <p:txBody>
-          <a:bodyPr wrap="square" lIns="0" tIns="0" rIns="0" bIns="0" anchor="ctr"/>
-          <a:lstStyle/>
-          <a:p>
-            <a:pPr marL="0" indent="0">
-              <a:buNone/>
-            </a:pPr>
-            <a:r>
-              <a:rPr sz="1150" b="1">
+          <p:cNvPr id="17" name="Text 15">
+            <a:extLst>
+              <a:ext uri="{FF2B5EF4-FFF2-40B4-BE49-F238E27FC236}">
+                <a16:creationId xmlns:a16="http://schemas.microsoft.com/office/drawing/2014/main" id="{387B55C1-5453-4641-8FEE-2A2600E80415}"/>
+              </a:ext>
+            </a:extLst>
+          </p:cNvPr>
+          <p:cNvSpPr>
+            <a:spLocks noGrp="1"/>
+          </p:cNvSpPr>
+          <p:nvPr/>
+        </p:nvSpPr>
+        <p:spPr>
+          <a:xfrm>
+            <a:off x="841248" y="4480560"/>
+            <a:ext cx="5486400" cy="256032"/>
+          </a:xfrm>
+          <a:prstGeom prst="rect">
+            <a:avLst/>
+          </a:prstGeom>
+          <a:noFill/>
+        </p:spPr>
+        <p:txBody>
+          <a:bodyPr wrap="square" lIns="0" tIns="0" rIns="0" bIns="0" anchor="ctr"/>
+          <a:lstStyle/>
+          <a:p>
+            <a:pPr marL="201168" indent="-201168">
+              <a:buNone/>
+              <a:buClr>
+                <a:srgbClr val="F5CE76"/>
+              </a:buClr>
+              <a:buFont typeface="Arial"/>
+              <a:buChar char="●"/>
+            </a:pPr>
+            <a:r>
+              <a:rPr sz="1400" b="0">
                 <a:solidFill>
                   <a:srgbClr val="FCF9F0"/>
                 </a:solidFill>
@@ -17333,53 +17261,7 @@
                 <a:ea typeface="Calibri"/>
                 <a:cs typeface="Calibri"/>
               </a:rPr>
-              <a:t>доступно</a:t>
-            </a:r>
-            <a:endParaRPr sz="1150"/>
-          </a:p>
-        </p:txBody>
-      </p:sp>
-      <p:sp>
-        <p:nvSpPr>
-          <p:cNvPr id="15" name="Text 13">
-            <a:extLst>
-              <a:ext uri="{FF2B5EF4-FFF2-40B4-BE49-F238E27FC236}">
-                <a16:creationId xmlns:a16="http://schemas.microsoft.com/office/drawing/2014/main" id="{61BC70C4-0C92-435A-9487-D75013A4A699}"/>
-              </a:ext>
-            </a:extLst>
-          </p:cNvPr>
-          <p:cNvSpPr>
-            <a:spLocks noGrp="1"/>
-          </p:cNvSpPr>
-          <p:nvPr/>
-        </p:nvSpPr>
-        <p:spPr>
-          <a:xfrm>
-            <a:off x="841248" y="4384548"/>
-            <a:ext cx="2103120" cy="256032"/>
-          </a:xfrm>
-          <a:prstGeom prst="rect">
-            <a:avLst/>
-          </a:prstGeom>
-          <a:noFill/>
-        </p:spPr>
-        <p:txBody>
-          <a:bodyPr wrap="square" lIns="0" tIns="0" rIns="0" bIns="0" anchor="ctr"/>
-          <a:lstStyle/>
-          <a:p>
-            <a:pPr marL="0" indent="0">
-              <a:buNone/>
-            </a:pPr>
-            <a:r>
-              <a:rPr sz="1050">
-                <a:solidFill>
-                  <a:srgbClr val="D2E4CE"/>
-                </a:solidFill>
-                <a:latin typeface="Calibri"/>
-                <a:ea typeface="Calibri"/>
-                <a:cs typeface="Calibri"/>
-              </a:rPr>
-              <a:t>Brown Jasmine Rice, w oil</a:t>
+              <a:t>Brown Rice</a:t>
             </a:r>
             <a:endParaRPr sz="1050"/>
           </a:p>
@@ -17387,37 +17269,42 @@
       </p:sp>
       <p:sp>
         <p:nvSpPr>
-          <p:cNvPr id="16" name="Text 14">
-            <a:extLst>
-              <a:ext uri="{FF2B5EF4-FFF2-40B4-BE49-F238E27FC236}">
-                <a16:creationId xmlns:a16="http://schemas.microsoft.com/office/drawing/2014/main" id="{3F159060-DCDF-44CC-8B6D-02E8ED33BA8F}"/>
-              </a:ext>
-            </a:extLst>
-          </p:cNvPr>
-          <p:cNvSpPr>
-            <a:spLocks noGrp="1"/>
-          </p:cNvSpPr>
-          <p:nvPr/>
-        </p:nvSpPr>
-        <p:spPr>
-          <a:xfrm>
-            <a:off x="2971800" y="4384548"/>
-            <a:ext cx="4023360" cy="256032"/>
-          </a:xfrm>
-          <a:prstGeom prst="rect">
-            <a:avLst/>
-          </a:prstGeom>
-          <a:noFill/>
-        </p:spPr>
-        <p:txBody>
-          <a:bodyPr wrap="square" lIns="0" tIns="0" rIns="0" bIns="0" anchor="ctr"/>
-          <a:lstStyle/>
-          <a:p>
-            <a:pPr marL="0" indent="0">
-              <a:buNone/>
-            </a:pPr>
-            <a:r>
-              <a:rPr sz="1150" b="1">
+          <p:cNvPr id="19" name="Text 17">
+            <a:extLst>
+              <a:ext uri="{FF2B5EF4-FFF2-40B4-BE49-F238E27FC236}">
+                <a16:creationId xmlns:a16="http://schemas.microsoft.com/office/drawing/2014/main" id="{9CD79870-7EED-40F1-B03F-865D47193057}"/>
+              </a:ext>
+            </a:extLst>
+          </p:cNvPr>
+          <p:cNvSpPr>
+            <a:spLocks noGrp="1"/>
+          </p:cNvSpPr>
+          <p:nvPr/>
+        </p:nvSpPr>
+        <p:spPr>
+          <a:xfrm>
+            <a:off x="841248" y="4846320"/>
+            <a:ext cx="5486400" cy="256032"/>
+          </a:xfrm>
+          <a:prstGeom prst="rect">
+            <a:avLst/>
+          </a:prstGeom>
+          <a:noFill/>
+        </p:spPr>
+        <p:txBody>
+          <a:bodyPr wrap="square" lIns="0" tIns="0" rIns="0" bIns="0" anchor="ctr"/>
+          <a:lstStyle/>
+          <a:p>
+            <a:pPr marL="201168" indent="-201168">
+              <a:buNone/>
+              <a:buClr>
+                <a:srgbClr val="F5CE76"/>
+              </a:buClr>
+              <a:buFont typeface="Arial"/>
+              <a:buChar char="●"/>
+            </a:pPr>
+            <a:r>
+              <a:rPr sz="1400" b="0">
                 <a:solidFill>
                   <a:srgbClr val="FCF9F0"/>
                 </a:solidFill>
@@ -17425,53 +17312,7 @@
                 <a:ea typeface="Calibri"/>
                 <a:cs typeface="Calibri"/>
               </a:rPr>
-              <a:t>доступно</a:t>
-            </a:r>
-            <a:endParaRPr sz="1150"/>
-          </a:p>
-        </p:txBody>
-      </p:sp>
-      <p:sp>
-        <p:nvSpPr>
-          <p:cNvPr id="17" name="Text 15">
-            <a:extLst>
-              <a:ext uri="{FF2B5EF4-FFF2-40B4-BE49-F238E27FC236}">
-                <a16:creationId xmlns:a16="http://schemas.microsoft.com/office/drawing/2014/main" id="{387B55C1-5453-4641-8FEE-2A2600E80415}"/>
-              </a:ext>
-            </a:extLst>
-          </p:cNvPr>
-          <p:cNvSpPr>
-            <a:spLocks noGrp="1"/>
-          </p:cNvSpPr>
-          <p:nvPr/>
-        </p:nvSpPr>
-        <p:spPr>
-          <a:xfrm>
-            <a:off x="841248" y="4718304"/>
-            <a:ext cx="2103120" cy="256032"/>
-          </a:xfrm>
-          <a:prstGeom prst="rect">
-            <a:avLst/>
-          </a:prstGeom>
-          <a:noFill/>
-        </p:spPr>
-        <p:txBody>
-          <a:bodyPr wrap="square" lIns="0" tIns="0" rIns="0" bIns="0" anchor="ctr"/>
-          <a:lstStyle/>
-          <a:p>
-            <a:pPr marL="0" indent="0">
-              <a:buNone/>
-            </a:pPr>
-            <a:r>
-              <a:rPr sz="1050">
-                <a:solidFill>
-                  <a:srgbClr val="D2E4CE"/>
-                </a:solidFill>
-                <a:latin typeface="Calibri"/>
-                <a:ea typeface="Calibri"/>
-                <a:cs typeface="Calibri"/>
-              </a:rPr>
-              <a:t>Brown Rice, w oil</a:t>
+              <a:t>Basmati Rice*</a:t>
             </a:r>
             <a:endParaRPr sz="1050"/>
           </a:p>
@@ -17479,37 +17320,42 @@
       </p:sp>
       <p:sp>
         <p:nvSpPr>
-          <p:cNvPr id="18" name="Text 16">
-            <a:extLst>
-              <a:ext uri="{FF2B5EF4-FFF2-40B4-BE49-F238E27FC236}">
-                <a16:creationId xmlns:a16="http://schemas.microsoft.com/office/drawing/2014/main" id="{E5BCD84D-F4E9-40F7-AA7D-85E5A9A7C865}"/>
-              </a:ext>
-            </a:extLst>
-          </p:cNvPr>
-          <p:cNvSpPr>
-            <a:spLocks noGrp="1"/>
-          </p:cNvSpPr>
-          <p:nvPr/>
-        </p:nvSpPr>
-        <p:spPr>
-          <a:xfrm>
-            <a:off x="2971800" y="4718304"/>
-            <a:ext cx="4023360" cy="256032"/>
-          </a:xfrm>
-          <a:prstGeom prst="rect">
-            <a:avLst/>
-          </a:prstGeom>
-          <a:noFill/>
-        </p:spPr>
-        <p:txBody>
-          <a:bodyPr wrap="square" lIns="0" tIns="0" rIns="0" bIns="0" anchor="ctr"/>
-          <a:lstStyle/>
-          <a:p>
-            <a:pPr marL="0" indent="0">
-              <a:buNone/>
-            </a:pPr>
-            <a:r>
-              <a:rPr sz="1150" b="1">
+          <p:cNvPr id="21" name="Text 19">
+            <a:extLst>
+              <a:ext uri="{FF2B5EF4-FFF2-40B4-BE49-F238E27FC236}">
+                <a16:creationId xmlns:a16="http://schemas.microsoft.com/office/drawing/2014/main" id="{13A8E69A-5D22-455F-8007-BE2ECE9342F0}"/>
+              </a:ext>
+            </a:extLst>
+          </p:cNvPr>
+          <p:cNvSpPr>
+            <a:spLocks noGrp="1"/>
+          </p:cNvSpPr>
+          <p:nvPr/>
+        </p:nvSpPr>
+        <p:spPr>
+          <a:xfrm>
+            <a:off x="841248" y="5212080"/>
+            <a:ext cx="5486400" cy="256032"/>
+          </a:xfrm>
+          <a:prstGeom prst="rect">
+            <a:avLst/>
+          </a:prstGeom>
+          <a:noFill/>
+        </p:spPr>
+        <p:txBody>
+          <a:bodyPr wrap="square" lIns="0" tIns="0" rIns="0" bIns="0" anchor="ctr"/>
+          <a:lstStyle/>
+          <a:p>
+            <a:pPr marL="201168" indent="-201168">
+              <a:buNone/>
+              <a:buClr>
+                <a:srgbClr val="F5CE76"/>
+              </a:buClr>
+              <a:buFont typeface="Arial"/>
+              <a:buChar char="●"/>
+            </a:pPr>
+            <a:r>
+              <a:rPr sz="1400" b="0">
                 <a:solidFill>
                   <a:srgbClr val="FCF9F0"/>
                 </a:solidFill>
@@ -17517,193 +17363,9 @@
                 <a:ea typeface="Calibri"/>
                 <a:cs typeface="Calibri"/>
               </a:rPr>
-              <a:t>доступно</a:t>
-            </a:r>
-            <a:endParaRPr sz="1150"/>
-          </a:p>
-        </p:txBody>
-      </p:sp>
-      <p:sp>
-        <p:nvSpPr>
-          <p:cNvPr id="19" name="Text 17">
-            <a:extLst>
-              <a:ext uri="{FF2B5EF4-FFF2-40B4-BE49-F238E27FC236}">
-                <a16:creationId xmlns:a16="http://schemas.microsoft.com/office/drawing/2014/main" id="{9CD79870-7EED-40F1-B03F-865D47193057}"/>
-              </a:ext>
-            </a:extLst>
-          </p:cNvPr>
-          <p:cNvSpPr>
-            <a:spLocks noGrp="1"/>
-          </p:cNvSpPr>
-          <p:nvPr/>
-        </p:nvSpPr>
-        <p:spPr>
-          <a:xfrm>
-            <a:off x="841248" y="5052060"/>
-            <a:ext cx="2103120" cy="256032"/>
-          </a:xfrm>
-          <a:prstGeom prst="rect">
-            <a:avLst/>
-          </a:prstGeom>
-          <a:noFill/>
-        </p:spPr>
-        <p:txBody>
-          <a:bodyPr wrap="square" lIns="0" tIns="0" rIns="0" bIns="0" anchor="ctr"/>
-          <a:lstStyle/>
-          <a:p>
-            <a:pPr marL="0" indent="0">
-              <a:buNone/>
-            </a:pPr>
-            <a:r>
-              <a:rPr sz="1050">
-                <a:solidFill>
-                  <a:srgbClr val="D2E4CE"/>
-                </a:solidFill>
-                <a:latin typeface="Calibri"/>
-                <a:ea typeface="Calibri"/>
-                <a:cs typeface="Calibri"/>
-              </a:rPr>
-              <a:t>Basmati Rice*, w oil</a:t>
+              <a:t>Long Grain</a:t>
             </a:r>
             <a:endParaRPr sz="1050"/>
-          </a:p>
-        </p:txBody>
-      </p:sp>
-      <p:sp>
-        <p:nvSpPr>
-          <p:cNvPr id="20" name="Text 18">
-            <a:extLst>
-              <a:ext uri="{FF2B5EF4-FFF2-40B4-BE49-F238E27FC236}">
-                <a16:creationId xmlns:a16="http://schemas.microsoft.com/office/drawing/2014/main" id="{9696F0F8-6388-458A-9A6E-BD09F3ACBA30}"/>
-              </a:ext>
-            </a:extLst>
-          </p:cNvPr>
-          <p:cNvSpPr>
-            <a:spLocks noGrp="1"/>
-          </p:cNvSpPr>
-          <p:nvPr/>
-        </p:nvSpPr>
-        <p:spPr>
-          <a:xfrm>
-            <a:off x="2971800" y="5052060"/>
-            <a:ext cx="4023360" cy="256032"/>
-          </a:xfrm>
-          <a:prstGeom prst="rect">
-            <a:avLst/>
-          </a:prstGeom>
-          <a:noFill/>
-        </p:spPr>
-        <p:txBody>
-          <a:bodyPr wrap="square" lIns="0" tIns="0" rIns="0" bIns="0" anchor="ctr"/>
-          <a:lstStyle/>
-          <a:p>
-            <a:pPr marL="0" indent="0">
-              <a:buNone/>
-            </a:pPr>
-            <a:r>
-              <a:rPr sz="1150" b="1">
-                <a:solidFill>
-                  <a:srgbClr val="FCF9F0"/>
-                </a:solidFill>
-                <a:latin typeface="Calibri"/>
-                <a:ea typeface="Calibri"/>
-                <a:cs typeface="Calibri"/>
-              </a:rPr>
-              <a:t>доступно</a:t>
-            </a:r>
-            <a:endParaRPr sz="1150"/>
-          </a:p>
-        </p:txBody>
-      </p:sp>
-      <p:sp>
-        <p:nvSpPr>
-          <p:cNvPr id="21" name="Text 19">
-            <a:extLst>
-              <a:ext uri="{FF2B5EF4-FFF2-40B4-BE49-F238E27FC236}">
-                <a16:creationId xmlns:a16="http://schemas.microsoft.com/office/drawing/2014/main" id="{13A8E69A-5D22-455F-8007-BE2ECE9342F0}"/>
-              </a:ext>
-            </a:extLst>
-          </p:cNvPr>
-          <p:cNvSpPr>
-            <a:spLocks noGrp="1"/>
-          </p:cNvSpPr>
-          <p:nvPr/>
-        </p:nvSpPr>
-        <p:spPr>
-          <a:xfrm>
-            <a:off x="841248" y="5385816"/>
-            <a:ext cx="2103120" cy="256032"/>
-          </a:xfrm>
-          <a:prstGeom prst="rect">
-            <a:avLst/>
-          </a:prstGeom>
-          <a:noFill/>
-        </p:spPr>
-        <p:txBody>
-          <a:bodyPr wrap="square" lIns="0" tIns="0" rIns="0" bIns="0" anchor="ctr"/>
-          <a:lstStyle/>
-          <a:p>
-            <a:pPr marL="0" indent="0">
-              <a:buNone/>
-            </a:pPr>
-            <a:r>
-              <a:rPr sz="1050">
-                <a:solidFill>
-                  <a:srgbClr val="D2E4CE"/>
-                </a:solidFill>
-                <a:latin typeface="Calibri"/>
-                <a:ea typeface="Calibri"/>
-                <a:cs typeface="Calibri"/>
-              </a:rPr>
-              <a:t>Long Grain, w oil</a:t>
-            </a:r>
-            <a:endParaRPr sz="1050"/>
-          </a:p>
-        </p:txBody>
-      </p:sp>
-      <p:sp>
-        <p:nvSpPr>
-          <p:cNvPr id="22" name="Text 20">
-            <a:extLst>
-              <a:ext uri="{FF2B5EF4-FFF2-40B4-BE49-F238E27FC236}">
-                <a16:creationId xmlns:a16="http://schemas.microsoft.com/office/drawing/2014/main" id="{0F71CE83-5380-4313-A831-A097BEC1C816}"/>
-              </a:ext>
-            </a:extLst>
-          </p:cNvPr>
-          <p:cNvSpPr>
-            <a:spLocks noGrp="1"/>
-          </p:cNvSpPr>
-          <p:nvPr/>
-        </p:nvSpPr>
-        <p:spPr>
-          <a:xfrm>
-            <a:off x="2971800" y="5385816"/>
-            <a:ext cx="4023360" cy="256032"/>
-          </a:xfrm>
-          <a:prstGeom prst="rect">
-            <a:avLst/>
-          </a:prstGeom>
-          <a:noFill/>
-        </p:spPr>
-        <p:txBody>
-          <a:bodyPr wrap="square" lIns="0" tIns="0" rIns="0" bIns="0" anchor="ctr"/>
-          <a:lstStyle/>
-          <a:p>
-            <a:pPr marL="0" indent="0">
-              <a:buNone/>
-            </a:pPr>
-            <a:r>
-              <a:rPr sz="1150" b="1">
-                <a:solidFill>
-                  <a:srgbClr val="FCF9F0"/>
-                </a:solidFill>
-                <a:latin typeface="Calibri"/>
-                <a:ea typeface="Calibri"/>
-                <a:cs typeface="Calibri"/>
-              </a:rPr>
-              <a:t>доступно</a:t>
-            </a:r>
-            <a:endParaRPr sz="1150"/>
           </a:p>
         </p:txBody>
       </p:sp>
@@ -18527,7 +18189,7 @@
                 <a:ea typeface="Cambria"/>
                 <a:cs typeface="Cambria"/>
               </a:rPr>
-              <a:t>Про формат</a:t>
+              <a:t>Як це виглядає</a:t>
             </a:r>
             <a:endParaRPr sz="1700"/>
           </a:p>
@@ -18549,8 +18211,8 @@
         </p:nvSpPr>
         <p:spPr>
           <a:xfrm>
-            <a:off x="841248" y="2103120"/>
-            <a:ext cx="6126480" cy="868680"/>
+            <a:off x="841248" y="3200400"/>
+            <a:ext cx="6126480" cy="1645920"/>
           </a:xfrm>
           <a:prstGeom prst="rect">
             <a:avLst/>
@@ -18568,7 +18230,7 @@
               <a:buNone/>
             </a:pPr>
             <a:r>
-              <a:rPr sz="1200">
+              <a:rPr sz="1500">
                 <a:solidFill>
                   <a:srgbClr val="FCF9F0"/>
                 </a:solidFill>
@@ -18576,699 +18238,9 @@
                 <a:ea typeface="Calibri"/>
                 <a:cs typeface="Calibri"/>
               </a:rPr>
-              <a:t>Власного бренду BSCM у форматі double cup немає — цей формат постачальник випускає виключно під приватною маркою замовника. Sleeve-бокс друкується під дизайн клієнта; приклад нижче — Jasmine Rice Cups для мережі SPAR.</a:t>
+              <a:t>Один sleeve-дизайн друкується під усі смаки лінійки — окремих фото пакування для кожного смаку постачальник не надає. Нижче показано сам бокс і приклад друку для мережі SPAR; повний перелік смаків — на попередньому слайді.</a:t>
             </a:r>
             <a:endParaRPr sz="1200"/>
-          </a:p>
-        </p:txBody>
-      </p:sp>
-      <p:sp>
-        <p:nvSpPr>
-          <p:cNvPr id="8" name="Text 6">
-            <a:extLst>
-              <a:ext uri="{FF2B5EF4-FFF2-40B4-BE49-F238E27FC236}">
-                <a16:creationId xmlns:a16="http://schemas.microsoft.com/office/drawing/2014/main" id="{650D0EC9-3F48-4B23-B62F-2DC20F4CB1E3}"/>
-              </a:ext>
-            </a:extLst>
-          </p:cNvPr>
-          <p:cNvSpPr>
-            <a:spLocks noGrp="1"/>
-          </p:cNvSpPr>
-          <p:nvPr/>
-        </p:nvSpPr>
-        <p:spPr>
-          <a:xfrm>
-            <a:off x="841248" y="3017520"/>
-            <a:ext cx="6126480" cy="310896"/>
-          </a:xfrm>
-          <a:prstGeom prst="rect">
-            <a:avLst/>
-          </a:prstGeom>
-          <a:noFill/>
-        </p:spPr>
-        <p:txBody>
-          <a:bodyPr wrap="square" lIns="0" tIns="0" rIns="0" bIns="0" anchor="ctr"/>
-          <a:lstStyle/>
-          <a:p>
-            <a:pPr marL="0" indent="0">
-              <a:buNone/>
-            </a:pPr>
-            <a:r>
-              <a:rPr sz="1700" b="1">
-                <a:solidFill>
-                  <a:srgbClr val="F5CE76"/>
-                </a:solidFill>
-                <a:latin typeface="Cambria"/>
-                <a:ea typeface="Cambria"/>
-                <a:cs typeface="Cambria"/>
-              </a:rPr>
-              <a:t>Смаки в офері</a:t>
-            </a:r>
-            <a:endParaRPr sz="1700"/>
-          </a:p>
-        </p:txBody>
-      </p:sp>
-      <p:sp>
-        <p:nvSpPr>
-          <p:cNvPr id="9" name="Text 7">
-            <a:extLst>
-              <a:ext uri="{FF2B5EF4-FFF2-40B4-BE49-F238E27FC236}">
-                <a16:creationId xmlns:a16="http://schemas.microsoft.com/office/drawing/2014/main" id="{7A91FA7F-CF81-4499-8A50-A7DEE4346D83}"/>
-              </a:ext>
-            </a:extLst>
-          </p:cNvPr>
-          <p:cNvSpPr>
-            <a:spLocks noGrp="1"/>
-          </p:cNvSpPr>
-          <p:nvPr/>
-        </p:nvSpPr>
-        <p:spPr>
-          <a:xfrm>
-            <a:off x="841248" y="3383280"/>
-            <a:ext cx="2103120" cy="256032"/>
-          </a:xfrm>
-          <a:prstGeom prst="rect">
-            <a:avLst/>
-          </a:prstGeom>
-          <a:noFill/>
-        </p:spPr>
-        <p:txBody>
-          <a:bodyPr wrap="square" lIns="0" tIns="0" rIns="0" bIns="0" anchor="ctr"/>
-          <a:lstStyle/>
-          <a:p>
-            <a:pPr marL="0" indent="0">
-              <a:buNone/>
-            </a:pPr>
-            <a:r>
-              <a:rPr sz="1050">
-                <a:solidFill>
-                  <a:srgbClr val="D2E4CE"/>
-                </a:solidFill>
-                <a:latin typeface="Calibri"/>
-                <a:ea typeface="Calibri"/>
-                <a:cs typeface="Calibri"/>
-              </a:rPr>
-              <a:t>Jasmine Rice, no oil</a:t>
-            </a:r>
-            <a:endParaRPr sz="1050"/>
-          </a:p>
-        </p:txBody>
-      </p:sp>
-      <p:sp>
-        <p:nvSpPr>
-          <p:cNvPr id="10" name="Text 8">
-            <a:extLst>
-              <a:ext uri="{FF2B5EF4-FFF2-40B4-BE49-F238E27FC236}">
-                <a16:creationId xmlns:a16="http://schemas.microsoft.com/office/drawing/2014/main" id="{BE8A5288-4469-45DA-BAD0-F665517C1E65}"/>
-              </a:ext>
-            </a:extLst>
-          </p:cNvPr>
-          <p:cNvSpPr>
-            <a:spLocks noGrp="1"/>
-          </p:cNvSpPr>
-          <p:nvPr/>
-        </p:nvSpPr>
-        <p:spPr>
-          <a:xfrm>
-            <a:off x="2971800" y="3383280"/>
-            <a:ext cx="4023360" cy="256032"/>
-          </a:xfrm>
-          <a:prstGeom prst="rect">
-            <a:avLst/>
-          </a:prstGeom>
-          <a:noFill/>
-        </p:spPr>
-        <p:txBody>
-          <a:bodyPr wrap="square" lIns="0" tIns="0" rIns="0" bIns="0" anchor="ctr"/>
-          <a:lstStyle/>
-          <a:p>
-            <a:pPr marL="0" indent="0">
-              <a:buNone/>
-            </a:pPr>
-            <a:r>
-              <a:rPr sz="1150" b="1">
-                <a:solidFill>
-                  <a:srgbClr val="FCF9F0"/>
-                </a:solidFill>
-                <a:latin typeface="Calibri"/>
-                <a:ea typeface="Calibri"/>
-                <a:cs typeface="Calibri"/>
-              </a:rPr>
-              <a:t>немає в PL</a:t>
-            </a:r>
-            <a:endParaRPr sz="1150"/>
-          </a:p>
-        </p:txBody>
-      </p:sp>
-      <p:sp>
-        <p:nvSpPr>
-          <p:cNvPr id="11" name="Text 9">
-            <a:extLst>
-              <a:ext uri="{FF2B5EF4-FFF2-40B4-BE49-F238E27FC236}">
-                <a16:creationId xmlns:a16="http://schemas.microsoft.com/office/drawing/2014/main" id="{FCACD5D8-D338-4EA5-B23F-C319A9D0F23D}"/>
-              </a:ext>
-            </a:extLst>
-          </p:cNvPr>
-          <p:cNvSpPr>
-            <a:spLocks noGrp="1"/>
-          </p:cNvSpPr>
-          <p:nvPr/>
-        </p:nvSpPr>
-        <p:spPr>
-          <a:xfrm>
-            <a:off x="841248" y="3717036"/>
-            <a:ext cx="2103120" cy="256032"/>
-          </a:xfrm>
-          <a:prstGeom prst="rect">
-            <a:avLst/>
-          </a:prstGeom>
-          <a:noFill/>
-        </p:spPr>
-        <p:txBody>
-          <a:bodyPr wrap="square" lIns="0" tIns="0" rIns="0" bIns="0" anchor="ctr"/>
-          <a:lstStyle/>
-          <a:p>
-            <a:pPr marL="0" indent="0">
-              <a:buNone/>
-            </a:pPr>
-            <a:r>
-              <a:rPr sz="1050">
-                <a:solidFill>
-                  <a:srgbClr val="D2E4CE"/>
-                </a:solidFill>
-                <a:latin typeface="Calibri"/>
-                <a:ea typeface="Calibri"/>
-                <a:cs typeface="Calibri"/>
-              </a:rPr>
-              <a:t>Jasmine Rice, w oil</a:t>
-            </a:r>
-            <a:endParaRPr sz="1050"/>
-          </a:p>
-        </p:txBody>
-      </p:sp>
-      <p:sp>
-        <p:nvSpPr>
-          <p:cNvPr id="12" name="Text 10">
-            <a:extLst>
-              <a:ext uri="{FF2B5EF4-FFF2-40B4-BE49-F238E27FC236}">
-                <a16:creationId xmlns:a16="http://schemas.microsoft.com/office/drawing/2014/main" id="{818D73A6-5619-40CD-864C-164E337887CE}"/>
-              </a:ext>
-            </a:extLst>
-          </p:cNvPr>
-          <p:cNvSpPr>
-            <a:spLocks noGrp="1"/>
-          </p:cNvSpPr>
-          <p:nvPr/>
-        </p:nvSpPr>
-        <p:spPr>
-          <a:xfrm>
-            <a:off x="2971800" y="3717036"/>
-            <a:ext cx="4023360" cy="256032"/>
-          </a:xfrm>
-          <a:prstGeom prst="rect">
-            <a:avLst/>
-          </a:prstGeom>
-          <a:noFill/>
-        </p:spPr>
-        <p:txBody>
-          <a:bodyPr wrap="square" lIns="0" tIns="0" rIns="0" bIns="0" anchor="ctr"/>
-          <a:lstStyle/>
-          <a:p>
-            <a:pPr marL="0" indent="0">
-              <a:buNone/>
-            </a:pPr>
-            <a:r>
-              <a:rPr sz="1150" b="1">
-                <a:solidFill>
-                  <a:srgbClr val="FCF9F0"/>
-                </a:solidFill>
-                <a:latin typeface="Calibri"/>
-                <a:ea typeface="Calibri"/>
-                <a:cs typeface="Calibri"/>
-              </a:rPr>
-              <a:t>доступно</a:t>
-            </a:r>
-            <a:endParaRPr sz="1150"/>
-          </a:p>
-        </p:txBody>
-      </p:sp>
-      <p:sp>
-        <p:nvSpPr>
-          <p:cNvPr id="13" name="Text 11">
-            <a:extLst>
-              <a:ext uri="{FF2B5EF4-FFF2-40B4-BE49-F238E27FC236}">
-                <a16:creationId xmlns:a16="http://schemas.microsoft.com/office/drawing/2014/main" id="{1B17E25C-EAC6-44DA-BED1-8DA3C384AB1F}"/>
-              </a:ext>
-            </a:extLst>
-          </p:cNvPr>
-          <p:cNvSpPr>
-            <a:spLocks noGrp="1"/>
-          </p:cNvSpPr>
-          <p:nvPr/>
-        </p:nvSpPr>
-        <p:spPr>
-          <a:xfrm>
-            <a:off x="841248" y="4050792"/>
-            <a:ext cx="2103120" cy="256032"/>
-          </a:xfrm>
-          <a:prstGeom prst="rect">
-            <a:avLst/>
-          </a:prstGeom>
-          <a:noFill/>
-        </p:spPr>
-        <p:txBody>
-          <a:bodyPr wrap="square" lIns="0" tIns="0" rIns="0" bIns="0" anchor="ctr"/>
-          <a:lstStyle/>
-          <a:p>
-            <a:pPr marL="0" indent="0">
-              <a:buNone/>
-            </a:pPr>
-            <a:r>
-              <a:rPr sz="1050">
-                <a:solidFill>
-                  <a:srgbClr val="D2E4CE"/>
-                </a:solidFill>
-                <a:latin typeface="Calibri"/>
-                <a:ea typeface="Calibri"/>
-                <a:cs typeface="Calibri"/>
-              </a:rPr>
-              <a:t>Jasmine Rice (Pathum), w oil</a:t>
-            </a:r>
-            <a:endParaRPr sz="1050"/>
-          </a:p>
-        </p:txBody>
-      </p:sp>
-      <p:sp>
-        <p:nvSpPr>
-          <p:cNvPr id="14" name="Text 12">
-            <a:extLst>
-              <a:ext uri="{FF2B5EF4-FFF2-40B4-BE49-F238E27FC236}">
-                <a16:creationId xmlns:a16="http://schemas.microsoft.com/office/drawing/2014/main" id="{1ACB90C5-BF37-41D9-8DC3-D21E41BC119E}"/>
-              </a:ext>
-            </a:extLst>
-          </p:cNvPr>
-          <p:cNvSpPr>
-            <a:spLocks noGrp="1"/>
-          </p:cNvSpPr>
-          <p:nvPr/>
-        </p:nvSpPr>
-        <p:spPr>
-          <a:xfrm>
-            <a:off x="2971800" y="4050792"/>
-            <a:ext cx="4023360" cy="256032"/>
-          </a:xfrm>
-          <a:prstGeom prst="rect">
-            <a:avLst/>
-          </a:prstGeom>
-          <a:noFill/>
-        </p:spPr>
-        <p:txBody>
-          <a:bodyPr wrap="square" lIns="0" tIns="0" rIns="0" bIns="0" anchor="ctr"/>
-          <a:lstStyle/>
-          <a:p>
-            <a:pPr marL="0" indent="0">
-              <a:buNone/>
-            </a:pPr>
-            <a:r>
-              <a:rPr sz="1150" b="1">
-                <a:solidFill>
-                  <a:srgbClr val="FCF9F0"/>
-                </a:solidFill>
-                <a:latin typeface="Calibri"/>
-                <a:ea typeface="Calibri"/>
-                <a:cs typeface="Calibri"/>
-              </a:rPr>
-              <a:t>доступно</a:t>
-            </a:r>
-            <a:endParaRPr sz="1150"/>
-          </a:p>
-        </p:txBody>
-      </p:sp>
-      <p:sp>
-        <p:nvSpPr>
-          <p:cNvPr id="15" name="Text 13">
-            <a:extLst>
-              <a:ext uri="{FF2B5EF4-FFF2-40B4-BE49-F238E27FC236}">
-                <a16:creationId xmlns:a16="http://schemas.microsoft.com/office/drawing/2014/main" id="{61BC70C4-0C92-435A-9487-D75013A4A699}"/>
-              </a:ext>
-            </a:extLst>
-          </p:cNvPr>
-          <p:cNvSpPr>
-            <a:spLocks noGrp="1"/>
-          </p:cNvSpPr>
-          <p:nvPr/>
-        </p:nvSpPr>
-        <p:spPr>
-          <a:xfrm>
-            <a:off x="841248" y="4384548"/>
-            <a:ext cx="2103120" cy="256032"/>
-          </a:xfrm>
-          <a:prstGeom prst="rect">
-            <a:avLst/>
-          </a:prstGeom>
-          <a:noFill/>
-        </p:spPr>
-        <p:txBody>
-          <a:bodyPr wrap="square" lIns="0" tIns="0" rIns="0" bIns="0" anchor="ctr"/>
-          <a:lstStyle/>
-          <a:p>
-            <a:pPr marL="0" indent="0">
-              <a:buNone/>
-            </a:pPr>
-            <a:r>
-              <a:rPr sz="1050">
-                <a:solidFill>
-                  <a:srgbClr val="D2E4CE"/>
-                </a:solidFill>
-                <a:latin typeface="Calibri"/>
-                <a:ea typeface="Calibri"/>
-                <a:cs typeface="Calibri"/>
-              </a:rPr>
-              <a:t>Brown Jasmine Rice, w oil</a:t>
-            </a:r>
-            <a:endParaRPr sz="1050"/>
-          </a:p>
-        </p:txBody>
-      </p:sp>
-      <p:sp>
-        <p:nvSpPr>
-          <p:cNvPr id="16" name="Text 14">
-            <a:extLst>
-              <a:ext uri="{FF2B5EF4-FFF2-40B4-BE49-F238E27FC236}">
-                <a16:creationId xmlns:a16="http://schemas.microsoft.com/office/drawing/2014/main" id="{3F159060-DCDF-44CC-8B6D-02E8ED33BA8F}"/>
-              </a:ext>
-            </a:extLst>
-          </p:cNvPr>
-          <p:cNvSpPr>
-            <a:spLocks noGrp="1"/>
-          </p:cNvSpPr>
-          <p:nvPr/>
-        </p:nvSpPr>
-        <p:spPr>
-          <a:xfrm>
-            <a:off x="2971800" y="4384548"/>
-            <a:ext cx="4023360" cy="256032"/>
-          </a:xfrm>
-          <a:prstGeom prst="rect">
-            <a:avLst/>
-          </a:prstGeom>
-          <a:noFill/>
-        </p:spPr>
-        <p:txBody>
-          <a:bodyPr wrap="square" lIns="0" tIns="0" rIns="0" bIns="0" anchor="ctr"/>
-          <a:lstStyle/>
-          <a:p>
-            <a:pPr marL="0" indent="0">
-              <a:buNone/>
-            </a:pPr>
-            <a:r>
-              <a:rPr sz="1150" b="1">
-                <a:solidFill>
-                  <a:srgbClr val="FCF9F0"/>
-                </a:solidFill>
-                <a:latin typeface="Calibri"/>
-                <a:ea typeface="Calibri"/>
-                <a:cs typeface="Calibri"/>
-              </a:rPr>
-              <a:t>доступно</a:t>
-            </a:r>
-            <a:endParaRPr sz="1150"/>
-          </a:p>
-        </p:txBody>
-      </p:sp>
-      <p:sp>
-        <p:nvSpPr>
-          <p:cNvPr id="17" name="Text 15">
-            <a:extLst>
-              <a:ext uri="{FF2B5EF4-FFF2-40B4-BE49-F238E27FC236}">
-                <a16:creationId xmlns:a16="http://schemas.microsoft.com/office/drawing/2014/main" id="{387B55C1-5453-4641-8FEE-2A2600E80415}"/>
-              </a:ext>
-            </a:extLst>
-          </p:cNvPr>
-          <p:cNvSpPr>
-            <a:spLocks noGrp="1"/>
-          </p:cNvSpPr>
-          <p:nvPr/>
-        </p:nvSpPr>
-        <p:spPr>
-          <a:xfrm>
-            <a:off x="841248" y="4718304"/>
-            <a:ext cx="2103120" cy="256032"/>
-          </a:xfrm>
-          <a:prstGeom prst="rect">
-            <a:avLst/>
-          </a:prstGeom>
-          <a:noFill/>
-        </p:spPr>
-        <p:txBody>
-          <a:bodyPr wrap="square" lIns="0" tIns="0" rIns="0" bIns="0" anchor="ctr"/>
-          <a:lstStyle/>
-          <a:p>
-            <a:pPr marL="0" indent="0">
-              <a:buNone/>
-            </a:pPr>
-            <a:r>
-              <a:rPr sz="1050">
-                <a:solidFill>
-                  <a:srgbClr val="D2E4CE"/>
-                </a:solidFill>
-                <a:latin typeface="Calibri"/>
-                <a:ea typeface="Calibri"/>
-                <a:cs typeface="Calibri"/>
-              </a:rPr>
-              <a:t>Brown Rice, w oil</a:t>
-            </a:r>
-            <a:endParaRPr sz="1050"/>
-          </a:p>
-        </p:txBody>
-      </p:sp>
-      <p:sp>
-        <p:nvSpPr>
-          <p:cNvPr id="18" name="Text 16">
-            <a:extLst>
-              <a:ext uri="{FF2B5EF4-FFF2-40B4-BE49-F238E27FC236}">
-                <a16:creationId xmlns:a16="http://schemas.microsoft.com/office/drawing/2014/main" id="{E5BCD84D-F4E9-40F7-AA7D-85E5A9A7C865}"/>
-              </a:ext>
-            </a:extLst>
-          </p:cNvPr>
-          <p:cNvSpPr>
-            <a:spLocks noGrp="1"/>
-          </p:cNvSpPr>
-          <p:nvPr/>
-        </p:nvSpPr>
-        <p:spPr>
-          <a:xfrm>
-            <a:off x="2971800" y="4718304"/>
-            <a:ext cx="4023360" cy="256032"/>
-          </a:xfrm>
-          <a:prstGeom prst="rect">
-            <a:avLst/>
-          </a:prstGeom>
-          <a:noFill/>
-        </p:spPr>
-        <p:txBody>
-          <a:bodyPr wrap="square" lIns="0" tIns="0" rIns="0" bIns="0" anchor="ctr"/>
-          <a:lstStyle/>
-          <a:p>
-            <a:pPr marL="0" indent="0">
-              <a:buNone/>
-            </a:pPr>
-            <a:r>
-              <a:rPr sz="1150" b="1">
-                <a:solidFill>
-                  <a:srgbClr val="FCF9F0"/>
-                </a:solidFill>
-                <a:latin typeface="Calibri"/>
-                <a:ea typeface="Calibri"/>
-                <a:cs typeface="Calibri"/>
-              </a:rPr>
-              <a:t>доступно</a:t>
-            </a:r>
-            <a:endParaRPr sz="1150"/>
-          </a:p>
-        </p:txBody>
-      </p:sp>
-      <p:sp>
-        <p:nvSpPr>
-          <p:cNvPr id="19" name="Text 17">
-            <a:extLst>
-              <a:ext uri="{FF2B5EF4-FFF2-40B4-BE49-F238E27FC236}">
-                <a16:creationId xmlns:a16="http://schemas.microsoft.com/office/drawing/2014/main" id="{9CD79870-7EED-40F1-B03F-865D47193057}"/>
-              </a:ext>
-            </a:extLst>
-          </p:cNvPr>
-          <p:cNvSpPr>
-            <a:spLocks noGrp="1"/>
-          </p:cNvSpPr>
-          <p:nvPr/>
-        </p:nvSpPr>
-        <p:spPr>
-          <a:xfrm>
-            <a:off x="841248" y="5052060"/>
-            <a:ext cx="2103120" cy="256032"/>
-          </a:xfrm>
-          <a:prstGeom prst="rect">
-            <a:avLst/>
-          </a:prstGeom>
-          <a:noFill/>
-        </p:spPr>
-        <p:txBody>
-          <a:bodyPr wrap="square" lIns="0" tIns="0" rIns="0" bIns="0" anchor="ctr"/>
-          <a:lstStyle/>
-          <a:p>
-            <a:pPr marL="0" indent="0">
-              <a:buNone/>
-            </a:pPr>
-            <a:r>
-              <a:rPr sz="1050">
-                <a:solidFill>
-                  <a:srgbClr val="D2E4CE"/>
-                </a:solidFill>
-                <a:latin typeface="Calibri"/>
-                <a:ea typeface="Calibri"/>
-                <a:cs typeface="Calibri"/>
-              </a:rPr>
-              <a:t>Basmati Rice*, w oil</a:t>
-            </a:r>
-            <a:endParaRPr sz="1050"/>
-          </a:p>
-        </p:txBody>
-      </p:sp>
-      <p:sp>
-        <p:nvSpPr>
-          <p:cNvPr id="20" name="Text 18">
-            <a:extLst>
-              <a:ext uri="{FF2B5EF4-FFF2-40B4-BE49-F238E27FC236}">
-                <a16:creationId xmlns:a16="http://schemas.microsoft.com/office/drawing/2014/main" id="{9696F0F8-6388-458A-9A6E-BD09F3ACBA30}"/>
-              </a:ext>
-            </a:extLst>
-          </p:cNvPr>
-          <p:cNvSpPr>
-            <a:spLocks noGrp="1"/>
-          </p:cNvSpPr>
-          <p:nvPr/>
-        </p:nvSpPr>
-        <p:spPr>
-          <a:xfrm>
-            <a:off x="2971800" y="5052060"/>
-            <a:ext cx="4023360" cy="256032"/>
-          </a:xfrm>
-          <a:prstGeom prst="rect">
-            <a:avLst/>
-          </a:prstGeom>
-          <a:noFill/>
-        </p:spPr>
-        <p:txBody>
-          <a:bodyPr wrap="square" lIns="0" tIns="0" rIns="0" bIns="0" anchor="ctr"/>
-          <a:lstStyle/>
-          <a:p>
-            <a:pPr marL="0" indent="0">
-              <a:buNone/>
-            </a:pPr>
-            <a:r>
-              <a:rPr sz="1150" b="1">
-                <a:solidFill>
-                  <a:srgbClr val="FCF9F0"/>
-                </a:solidFill>
-                <a:latin typeface="Calibri"/>
-                <a:ea typeface="Calibri"/>
-                <a:cs typeface="Calibri"/>
-              </a:rPr>
-              <a:t>доступно</a:t>
-            </a:r>
-            <a:endParaRPr sz="1150"/>
-          </a:p>
-        </p:txBody>
-      </p:sp>
-      <p:sp>
-        <p:nvSpPr>
-          <p:cNvPr id="21" name="Text 19">
-            <a:extLst>
-              <a:ext uri="{FF2B5EF4-FFF2-40B4-BE49-F238E27FC236}">
-                <a16:creationId xmlns:a16="http://schemas.microsoft.com/office/drawing/2014/main" id="{13A8E69A-5D22-455F-8007-BE2ECE9342F0}"/>
-              </a:ext>
-            </a:extLst>
-          </p:cNvPr>
-          <p:cNvSpPr>
-            <a:spLocks noGrp="1"/>
-          </p:cNvSpPr>
-          <p:nvPr/>
-        </p:nvSpPr>
-        <p:spPr>
-          <a:xfrm>
-            <a:off x="841248" y="5385816"/>
-            <a:ext cx="2103120" cy="256032"/>
-          </a:xfrm>
-          <a:prstGeom prst="rect">
-            <a:avLst/>
-          </a:prstGeom>
-          <a:noFill/>
-        </p:spPr>
-        <p:txBody>
-          <a:bodyPr wrap="square" lIns="0" tIns="0" rIns="0" bIns="0" anchor="ctr"/>
-          <a:lstStyle/>
-          <a:p>
-            <a:pPr marL="0" indent="0">
-              <a:buNone/>
-            </a:pPr>
-            <a:r>
-              <a:rPr sz="1050">
-                <a:solidFill>
-                  <a:srgbClr val="D2E4CE"/>
-                </a:solidFill>
-                <a:latin typeface="Calibri"/>
-                <a:ea typeface="Calibri"/>
-                <a:cs typeface="Calibri"/>
-              </a:rPr>
-              <a:t>Long Grain, w oil</a:t>
-            </a:r>
-            <a:endParaRPr sz="1050"/>
-          </a:p>
-        </p:txBody>
-      </p:sp>
-      <p:sp>
-        <p:nvSpPr>
-          <p:cNvPr id="22" name="Text 20">
-            <a:extLst>
-              <a:ext uri="{FF2B5EF4-FFF2-40B4-BE49-F238E27FC236}">
-                <a16:creationId xmlns:a16="http://schemas.microsoft.com/office/drawing/2014/main" id="{0F71CE83-5380-4313-A831-A097BEC1C816}"/>
-              </a:ext>
-            </a:extLst>
-          </p:cNvPr>
-          <p:cNvSpPr>
-            <a:spLocks noGrp="1"/>
-          </p:cNvSpPr>
-          <p:nvPr/>
-        </p:nvSpPr>
-        <p:spPr>
-          <a:xfrm>
-            <a:off x="2971800" y="5385816"/>
-            <a:ext cx="4023360" cy="256032"/>
-          </a:xfrm>
-          <a:prstGeom prst="rect">
-            <a:avLst/>
-          </a:prstGeom>
-          <a:noFill/>
-        </p:spPr>
-        <p:txBody>
-          <a:bodyPr wrap="square" lIns="0" tIns="0" rIns="0" bIns="0" anchor="ctr"/>
-          <a:lstStyle/>
-          <a:p>
-            <a:pPr marL="0" indent="0">
-              <a:buNone/>
-            </a:pPr>
-            <a:r>
-              <a:rPr sz="1150" b="1">
-                <a:solidFill>
-                  <a:srgbClr val="FCF9F0"/>
-                </a:solidFill>
-                <a:latin typeface="Calibri"/>
-                <a:ea typeface="Calibri"/>
-                <a:cs typeface="Calibri"/>
-              </a:rPr>
-              <a:t>доступно</a:t>
-            </a:r>
-            <a:endParaRPr sz="1150"/>
           </a:p>
         </p:txBody>
       </p:sp>

--- a/RTE_Rice_Suppliers.pptx
+++ b/RTE_Rice_Suppliers.pptx
@@ -25064,7 +25064,7 @@
                 <a:ea typeface="Calibri"/>
                 <a:cs typeface="Calibri"/>
               </a:rPr>
-              <a:t>$0,700 / 31,51 ₴</a:t>
+              <a:t>$0,777 / 34,95 ₴</a:t>
             </a:r>
             <a:endParaRPr sz="950"/>
           </a:p>
@@ -25790,7 +25790,7 @@
                 <a:ea typeface="Calibri"/>
                 <a:cs typeface="Calibri"/>
               </a:rPr>
-              <a:t>$0,700 / 31,51 ₴</a:t>
+              <a:t>$0,777 / 34,95 ₴</a:t>
             </a:r>
             <a:endParaRPr sz="950"/>
           </a:p>
@@ -26516,7 +26516,7 @@
                 <a:ea typeface="Calibri"/>
                 <a:cs typeface="Calibri"/>
               </a:rPr>
-              <a:t>$0,759 / 34,14 ₴</a:t>
+              <a:t>$0,841 / 37,86 ₴</a:t>
             </a:r>
             <a:endParaRPr sz="950"/>
           </a:p>
@@ -27762,7 +27762,7 @@
                 <a:ea typeface="Calibri"/>
                 <a:cs typeface="Calibri"/>
               </a:rPr>
-              <a:t>$0,759 / 34,14 ₴</a:t>
+              <a:t>$0,841 / 37,86 ₴</a:t>
             </a:r>
             <a:endParaRPr sz="950"/>
           </a:p>
@@ -27808,7 +27808,7 @@
                 <a:ea typeface="Calibri"/>
                 <a:cs typeface="Calibri"/>
               </a:rPr>
-              <a:t>$0,759 / 34,14 ₴</a:t>
+              <a:t>$0,841 / 37,86 ₴</a:t>
             </a:r>
             <a:endParaRPr sz="950"/>
           </a:p>

--- a/RTE_Rice_Suppliers.pptx
+++ b/RTE_Rice_Suppliers.pptx
@@ -4825,7 +4825,7 @@
                 <a:ea typeface="Calibri"/>
                 <a:cs typeface="Calibri"/>
               </a:rPr>
-              <a:t>Собівартість буде додано після розрахунку.</a:t>
+              <a:t>Джерело: Self_Cost_Rice_Brand..xlsx, аркуш «BSCM(Double cup) - Навалом».</a:t>
             </a:r>
             <a:endParaRPr sz="1200"/>
           </a:p>
@@ -5220,7 +5220,7 @@
                 </a:solidFill>
                 <a:latin typeface="Calibri"/>
               </a:rPr>
-              <a:t>—</a:t>
+              <a:t>$1,628 / 73,24 ₴</a:t>
             </a:r>
           </a:p>
         </p:txBody>
@@ -5255,7 +5255,7 @@
                 </a:solidFill>
                 <a:latin typeface="Calibri"/>
               </a:rPr>
-              <a:t>—</a:t>
+              <a:t>$1,434 / 64,51 ₴</a:t>
             </a:r>
           </a:p>
         </p:txBody>
@@ -5290,7 +5290,7 @@
                 </a:solidFill>
                 <a:latin typeface="Calibri"/>
               </a:rPr>
-              <a:t>—</a:t>
+              <a:t>$1,633 / 73,51 ₴</a:t>
             </a:r>
           </a:p>
         </p:txBody>
@@ -5325,7 +5325,7 @@
                 </a:solidFill>
                 <a:latin typeface="Calibri"/>
               </a:rPr>
-              <a:t>—</a:t>
+              <a:t>$1,499 / 67,44 ₴</a:t>
             </a:r>
           </a:p>
         </p:txBody>
@@ -5440,7 +5440,7 @@
                 </a:solidFill>
                 <a:latin typeface="Calibri"/>
               </a:rPr>
-              <a:t>—</a:t>
+              <a:t>$1,628 / 73,24 ₴</a:t>
             </a:r>
           </a:p>
         </p:txBody>
@@ -5475,7 +5475,7 @@
                 </a:solidFill>
                 <a:latin typeface="Calibri"/>
               </a:rPr>
-              <a:t>—</a:t>
+              <a:t>$1,434 / 64,51 ₴</a:t>
             </a:r>
           </a:p>
         </p:txBody>
@@ -5510,7 +5510,7 @@
                 </a:solidFill>
                 <a:latin typeface="Calibri"/>
               </a:rPr>
-              <a:t>—</a:t>
+              <a:t>$1,633 / 73,51 ₴</a:t>
             </a:r>
           </a:p>
         </p:txBody>
@@ -5545,7 +5545,7 @@
                 </a:solidFill>
                 <a:latin typeface="Calibri"/>
               </a:rPr>
-              <a:t>—</a:t>
+              <a:t>$1,499 / 67,44 ₴</a:t>
             </a:r>
           </a:p>
         </p:txBody>
@@ -5660,7 +5660,7 @@
                 </a:solidFill>
                 <a:latin typeface="Calibri"/>
               </a:rPr>
-              <a:t>—</a:t>
+              <a:t>$1,480 / 66,58 ₴</a:t>
             </a:r>
           </a:p>
         </p:txBody>
@@ -5695,7 +5695,7 @@
                 </a:solidFill>
                 <a:latin typeface="Calibri"/>
               </a:rPr>
-              <a:t>—</a:t>
+              <a:t>$1,303 / 58,65 ₴</a:t>
             </a:r>
           </a:p>
         </p:txBody>
@@ -5730,7 +5730,7 @@
                 </a:solidFill>
                 <a:latin typeface="Calibri"/>
               </a:rPr>
-              <a:t>—</a:t>
+              <a:t>$1,485 / 66,82 ₴</a:t>
             </a:r>
           </a:p>
         </p:txBody>
@@ -5765,7 +5765,7 @@
                 </a:solidFill>
                 <a:latin typeface="Calibri"/>
               </a:rPr>
-              <a:t>—</a:t>
+              <a:t>$1,362 / 61,31 ₴</a:t>
             </a:r>
           </a:p>
         </p:txBody>
@@ -5880,7 +5880,7 @@
                 </a:solidFill>
                 <a:latin typeface="Calibri"/>
               </a:rPr>
-              <a:t>—</a:t>
+              <a:t>$1,628 / 73,24 ₴</a:t>
             </a:r>
           </a:p>
         </p:txBody>
@@ -5915,7 +5915,7 @@
                 </a:solidFill>
                 <a:latin typeface="Calibri"/>
               </a:rPr>
-              <a:t>—</a:t>
+              <a:t>$1,434 / 64,51 ₴</a:t>
             </a:r>
           </a:p>
         </p:txBody>
@@ -5950,7 +5950,7 @@
                 </a:solidFill>
                 <a:latin typeface="Calibri"/>
               </a:rPr>
-              <a:t>—</a:t>
+              <a:t>$1,633 / 75,14 ₴</a:t>
             </a:r>
           </a:p>
         </p:txBody>
@@ -5985,7 +5985,7 @@
                 </a:solidFill>
                 <a:latin typeface="Calibri"/>
               </a:rPr>
-              <a:t>—</a:t>
+              <a:t>$1,499 / 68,94 ₴</a:t>
             </a:r>
           </a:p>
         </p:txBody>
@@ -6100,7 +6100,7 @@
                 </a:solidFill>
                 <a:latin typeface="Calibri"/>
               </a:rPr>
-              <a:t>—</a:t>
+              <a:t>$1,628 / 73,24 ₴</a:t>
             </a:r>
           </a:p>
         </p:txBody>
@@ -6135,7 +6135,7 @@
                 </a:solidFill>
                 <a:latin typeface="Calibri"/>
               </a:rPr>
-              <a:t>—</a:t>
+              <a:t>$1,434 / 64,51 ₴</a:t>
             </a:r>
           </a:p>
         </p:txBody>
@@ -6170,7 +6170,7 @@
                 </a:solidFill>
                 <a:latin typeface="Calibri"/>
               </a:rPr>
-              <a:t>—</a:t>
+              <a:t>$1,633 / 73,51 ₴</a:t>
             </a:r>
           </a:p>
         </p:txBody>
@@ -6205,7 +6205,7 @@
                 </a:solidFill>
                 <a:latin typeface="Calibri"/>
               </a:rPr>
-              <a:t>—</a:t>
+              <a:t>$1,499 / 67,44 ₴</a:t>
             </a:r>
           </a:p>
         </p:txBody>
@@ -6320,7 +6320,7 @@
                 </a:solidFill>
                 <a:latin typeface="Calibri"/>
               </a:rPr>
-              <a:t>—</a:t>
+              <a:t>$1,776 / 79,90 ₴</a:t>
             </a:r>
           </a:p>
         </p:txBody>
@@ -6355,7 +6355,7 @@
                 </a:solidFill>
                 <a:latin typeface="Calibri"/>
               </a:rPr>
-              <a:t>—</a:t>
+              <a:t>$1,564 / 70,38 ₴</a:t>
             </a:r>
           </a:p>
         </p:txBody>
@@ -6390,7 +6390,7 @@
                 </a:solidFill>
                 <a:latin typeface="Calibri"/>
               </a:rPr>
-              <a:t>—</a:t>
+              <a:t>$1,782 / 80,19 ₴</a:t>
             </a:r>
           </a:p>
         </p:txBody>
@@ -6425,7 +6425,7 @@
                 </a:solidFill>
                 <a:latin typeface="Calibri"/>
               </a:rPr>
-              <a:t>—</a:t>
+              <a:t>$1,635 / 73,57 ₴</a:t>
             </a:r>
           </a:p>
         </p:txBody>
@@ -6540,7 +6540,7 @@
                 </a:solidFill>
                 <a:latin typeface="Calibri"/>
               </a:rPr>
-              <a:t>—</a:t>
+              <a:t>$1,391 / 62,59 ₴</a:t>
             </a:r>
           </a:p>
         </p:txBody>
@@ -6575,7 +6575,7 @@
                 </a:solidFill>
                 <a:latin typeface="Calibri"/>
               </a:rPr>
-              <a:t>—</a:t>
+              <a:t>$1,225 / 55,13 ₴</a:t>
             </a:r>
           </a:p>
         </p:txBody>
@@ -6610,7 +6610,7 @@
                 </a:solidFill>
                 <a:latin typeface="Calibri"/>
               </a:rPr>
-              <a:t>—</a:t>
+              <a:t>$1,396 / 62,82 ₴</a:t>
             </a:r>
           </a:p>
         </p:txBody>
@@ -6645,7 +6645,7 @@
                 </a:solidFill>
                 <a:latin typeface="Calibri"/>
               </a:rPr>
-              <a:t>—</a:t>
+              <a:t>$1,281 / 57,63 ₴</a:t>
             </a:r>
           </a:p>
         </p:txBody>
@@ -17428,7 +17428,7 @@
                 <a:ea typeface="Calibri"/>
                 <a:cs typeface="Calibri"/>
               </a:rPr>
-              <a:t>Доступні позиції</a:t>
+              <a:t>Гнучкий асортимент</a:t>
             </a:r>
             <a:endParaRPr sz="1200"/>
           </a:p>
@@ -17796,8 +17796,8 @@
         </p:blipFill>
         <p:spPr>
           <a:xfrm xmlns:a="http://schemas.openxmlformats.org/drawingml/2006/main">
-            <a:off x="571500" y="2248942"/>
-            <a:ext cx="4381500" cy="3388816"/>
+            <a:off x="979322" y="2554191"/>
+            <a:ext cx="3566160" cy="2758202"/>
           </a:xfrm>
           <a:prstGeom xmlns:a="http://schemas.openxmlformats.org/drawingml/2006/main" prst="roundRect">
             <a:avLst>
@@ -17814,8 +17814,8 @@
         </p:nvSpPr>
         <p:spPr>
           <a:xfrm>
-            <a:off x="5924580" y="5505450"/>
-            <a:ext cx="5695950" cy="1298448"/>
+            <a:off x="5924398" y="5505450"/>
+            <a:ext cx="5695950" cy="1097280"/>
           </a:xfrm>
           <a:prstGeom prst="rect">
             <a:avLst/>
@@ -17823,97 +17823,81 @@
           <a:noFill/>
         </p:spPr>
         <p:txBody>
-          <a:bodyPr wrap="none" lIns="0" rIns="0" tIns="0" bIns="0" anchor="t">
+          <a:bodyPr wrap="square" lIns="0" rIns="0" tIns="0" bIns="0">
             <a:spAutoFit/>
           </a:bodyPr>
           <a:lstStyle/>
           <a:p>
-            <a:pPr algn="l" marL="219456" indent="-219456">
-              <a:buClr>
-                <a:srgbClr val="F5CE76"/>
-              </a:buClr>
-              <a:buFont typeface="Arial"/>
-              <a:buChar char="●"/>
-            </a:pPr>
-            <a:r>
-              <a:rPr sz="1500" b="0">
+            <a:pPr algn="l"/>
+            <a:r>
+              <a:rPr sz="1500">
                 <a:solidFill>
                   <a:srgbClr val="FCF9F0"/>
                 </a:solidFill>
                 <a:latin typeface="Calibri"/>
               </a:rPr>
-              <a:t>Jasmine Rice</a:t>
-            </a:r>
-          </a:p>
-          <a:p>
-            <a:pPr algn="l" marL="219456" indent="-219456">
-              <a:buClr>
-                <a:srgbClr val="F5CE76"/>
-              </a:buClr>
-              <a:buFont typeface="Arial"/>
-              <a:buChar char="●"/>
-            </a:pPr>
-            <a:r>
-              <a:rPr sz="1500" b="0">
-                <a:solidFill>
-                  <a:srgbClr val="FCF9F0"/>
-                </a:solidFill>
-                <a:latin typeface="Calibri"/>
-              </a:rPr>
-              <a:t>Mexican Rice</a:t>
-            </a:r>
-          </a:p>
-          <a:p>
-            <a:pPr algn="l" marL="219456" indent="-219456">
-              <a:buClr>
-                <a:srgbClr val="F5CE76"/>
-              </a:buClr>
-              <a:buFont typeface="Arial"/>
-              <a:buChar char="●"/>
-            </a:pPr>
-            <a:r>
-              <a:rPr sz="1500" b="0">
-                <a:solidFill>
-                  <a:srgbClr val="FCF9F0"/>
-                </a:solidFill>
-                <a:latin typeface="Calibri"/>
-              </a:rPr>
-              <a:t>Japanese Style Rice</a:t>
-            </a:r>
-          </a:p>
-          <a:p>
-            <a:pPr algn="l" marL="219456" indent="-219456">
-              <a:buClr>
-                <a:srgbClr val="F5CE76"/>
-              </a:buClr>
-              <a:buFont typeface="Arial"/>
-              <a:buChar char="●"/>
-            </a:pPr>
-            <a:r>
-              <a:rPr sz="1500" b="0">
-                <a:solidFill>
-                  <a:srgbClr val="FCF9F0"/>
-                </a:solidFill>
-                <a:latin typeface="Calibri"/>
-              </a:rPr>
-              <a:t>Hot and Spicy Rice</a:t>
+              <a:t>Доступно для будь-якої позиції лінійки Ready Rice — конкретний асортимент і формат погоджуємо під замовлення.</a:t>
             </a:r>
           </a:p>
           <a:p>
             <a:pPr algn="l">
               <a:spcBef>
-                <a:spcPts val="800"/>
+                <a:spcPts val="1000"/>
               </a:spcBef>
             </a:pPr>
             <a:r>
-              <a:rPr sz="1100" b="0">
+              <a:rPr sz="1100">
                 <a:solidFill>
                   <a:srgbClr val="D2E4CE"/>
                 </a:solidFill>
                 <a:latin typeface="Calibri"/>
               </a:rPr>
-              <a:t>Собівартість для 150 г та 200 г — на наступних двох слайдах.</a:t>
-            </a:r>
+              <a:t>Собівартість для 150 г та 200 г — на попередніх двох слайдах.</a:t>
+            </a:r>
+          </a:p>
+        </p:txBody>
+      </p:sp>
+      <p:sp xmlns:a="http://schemas.openxmlformats.org/drawingml/2006/main">
+        <p:nvSpPr>
+          <p:cNvPr id="78" name="Rectangle 77"/>
+          <p:cNvSpPr/>
+          <p:nvPr/>
+        </p:nvSpPr>
+        <p:spPr>
+          <a:xfrm>
+            <a:off x="979322" y="2554191"/>
+            <a:ext cx="3566160" cy="2758202"/>
+          </a:xfrm>
+          <a:prstGeom prst="rect">
+            <a:avLst/>
+          </a:prstGeom>
+          <a:noFill/>
+          <a:ln w="12700">
+            <a:solidFill>
+              <a:srgbClr val="C89C40"/>
+            </a:solidFill>
+          </a:ln>
+          <a:effectLst/>
+        </p:spPr>
+        <p:style>
+          <a:lnRef idx="1">
+            <a:schemeClr val="accent1"/>
+          </a:lnRef>
+          <a:fillRef idx="3">
+            <a:schemeClr val="accent1"/>
+          </a:fillRef>
+          <a:effectRef idx="2">
+            <a:schemeClr val="accent1"/>
+          </a:effectRef>
+          <a:fontRef idx="minor">
+            <a:schemeClr val="lt1"/>
+          </a:fontRef>
+        </p:style>
+        <p:txBody>
+          <a:bodyPr rtlCol="0" anchor="ctr"/>
+          <a:lstStyle/>
+          <a:p>
+            <a:pPr algn="ctr"/>
           </a:p>
         </p:txBody>
       </p:sp>

--- a/RTE_Rice_Suppliers.pptx
+++ b/RTE_Rice_Suppliers.pptx
@@ -4478,7 +4478,7 @@
         <p:spPr>
           <a:xfrm xmlns:a="http://schemas.openxmlformats.org/drawingml/2006/main">
             <a:off x="6191250" y="5210175"/>
-            <a:ext cx="5429250" cy="723900"/>
+            <a:ext cx="5429250" cy="914400"/>
           </a:xfrm>
           <a:prstGeom xmlns:a="http://schemas.openxmlformats.org/drawingml/2006/main" prst="rect">
             <a:avLst/>
@@ -4503,39 +4503,53 @@
               </a:defRPr>
             </a:pPr>
             <a:r>
-              <a:rPr sz="1800" b="0" i="0">
+              <a:rPr sz="1800" b="1" i="0">
+                <a:solidFill>
+                  <a:srgbClr val="F5CE76"/>
+                </a:solidFill>
+                <a:latin typeface="Calibri"/>
+                <a:ea typeface="Calibri"/>
+                <a:cs typeface="Calibri"/>
+              </a:rPr>
+              <a:t>Тільки Private Label</a:t>
+            </a:r>
+          </a:p>
+          <a:p xmlns:a="http://schemas.openxmlformats.org/drawingml/2006/main">
+            <a:pPr algn="l">
+              <a:buNone/>
+              <a:defRPr sz="1800" b="0" i="0">
                 <a:solidFill>
                   <a:srgbClr val="FCF9F0"/>
                 </a:solidFill>
                 <a:latin typeface="Calibri"/>
                 <a:ea typeface="Calibri"/>
                 <a:cs typeface="Calibri"/>
-              </a:rPr>
-              <a:t>Виробництво під Private Label.</a:t>
+              </a:defRPr>
+            </a:pPr>
+            <a:r>
+              <a:rPr sz="1500" b="0" i="0">
+                <a:solidFill>
+                  <a:srgbClr val="FCF9F0"/>
+                </a:solidFill>
+                <a:latin typeface="Calibri"/>
+                <a:ea typeface="Calibri"/>
+                <a:cs typeface="Calibri"/>
+              </a:rPr>
+              <a:t>Власного бренду в цьому форматі немає.</a:t>
             </a:r>
           </a:p>
           <a:p xmlns:a="http://schemas.openxmlformats.org/drawingml/2006/main">
             <a:pPr algn="l">
               <a:buNone/>
-              <a:defRPr sz="1800" b="0" i="0">
+            </a:pPr>
+            <a:r>
+              <a:rPr sz="1500" b="0">
                 <a:solidFill>
                   <a:srgbClr val="FCF9F0"/>
                 </a:solidFill>
                 <a:latin typeface="Calibri"/>
-                <a:ea typeface="Calibri"/>
-                <a:cs typeface="Calibri"/>
-              </a:defRPr>
-            </a:pPr>
-            <a:r>
-              <a:rPr sz="1800" b="0" i="0">
-                <a:solidFill>
-                  <a:srgbClr val="FCF9F0"/>
-                </a:solidFill>
-                <a:latin typeface="Calibri"/>
-                <a:ea typeface="Calibri"/>
-                <a:cs typeface="Calibri"/>
-              </a:rPr>
-              <a:t>Дизайн — під нашу торгову марку.</a:t>
+              </a:rPr>
+              <a:t>Тільки під торговою маркою замовника.</a:t>
             </a:r>
           </a:p>
         </p:txBody>

--- a/RTE_Rice_Suppliers.pptx
+++ b/RTE_Rice_Suppliers.pptx
@@ -21,6 +21,8 @@
     <p:sldId id="264" r:id="rId12"/>
     <p:sldId id="265" r:id="rId13"/>
     <p:sldId id="266" r:id="rId14"/>
+    <p:sldId id="269" r:id="rId20"/>
+    <p:sldId id="270" r:id="rId21"/>
   </p:sldIdLst>
   <p:sldSz cx="12192000" cy="6858000"/>
   <p:notesSz cx="6858000" cy="9144000"/>
@@ -1823,7 +1825,7 @@
                 <a:ea typeface="Calibri"/>
                 <a:cs typeface="Calibri"/>
               </a:rPr>
-              <a:t>BSCM Foods Co., Ltd.</a:t>
+              <a:t>BSCM Foods</a:t>
             </a:r>
             <a:r>
               <a:rPr sz="1150">
@@ -1834,7 +1836,7 @@
                 <a:ea typeface="Calibri"/>
                 <a:cs typeface="Calibri"/>
               </a:rPr>
-              <a:t>   ·   </a:t>
+              <a:t>  ·  </a:t>
             </a:r>
             <a:r>
               <a:rPr sz="1150" b="1">
@@ -1845,7 +1847,29 @@
                 <a:ea typeface="Calibri"/>
                 <a:cs typeface="Calibri"/>
               </a:rPr>
-              <a:t>CM Premium Rice Co., Ltd.</a:t>
+              <a:t>CM Premium Rice</a:t>
+            </a:r>
+            <a:r>
+              <a:rPr sz="1150">
+                <a:solidFill>
+                  <a:srgbClr val="C89C40"/>
+                </a:solidFill>
+                <a:latin typeface="Calibri"/>
+                <a:ea typeface="Calibri"/>
+                <a:cs typeface="Calibri"/>
+              </a:rPr>
+              <a:t>  ·  </a:t>
+            </a:r>
+            <a:r>
+              <a:rPr sz="1150" b="1">
+                <a:solidFill>
+                  <a:srgbClr val="FFFFFF"/>
+                </a:solidFill>
+                <a:latin typeface="Calibri"/>
+                <a:ea typeface="Calibri"/>
+                <a:cs typeface="Calibri"/>
+              </a:rPr>
+              <a:t>One's International</a:t>
             </a:r>
             <a:endParaRPr sz="1350"/>
           </a:p>
@@ -1891,7 +1915,7 @@
                 <a:ea typeface="Calibri"/>
                 <a:cs typeface="Calibri"/>
               </a:rPr>
-              <a:t>Таїланд · FOB Bangkok · завантаження навалом</a:t>
+              <a:t>Таїланд · Корея · FOB Bangkok / Busan</a:t>
             </a:r>
             <a:endParaRPr sz="1150"/>
           </a:p>
@@ -3675,62 +3699,6 @@
       </p:sp>
       <p:sp>
         <p:nvSpPr>
-          <p:cNvPr id="6" name="Text 4">
-            <a:extLst>
-              <a:ext uri="{FF2B5EF4-FFF2-40B4-BE49-F238E27FC236}">
-                <a16:creationId xmlns:a16="http://schemas.microsoft.com/office/drawing/2014/main" id="{ABB6272E-A3D6-4F20-AF34-CF17DAB68835}"/>
-              </a:ext>
-            </a:extLst>
-          </p:cNvPr>
-          <p:cNvSpPr>
-            <a:spLocks noGrp="1"/>
-          </p:cNvSpPr>
-          <p:nvPr/>
-        </p:nvSpPr>
-        <p:spPr>
-          <a:xfrm>
-            <a:off x="571500" y="1743075"/>
-            <a:ext cx="4953000" cy="285750"/>
-          </a:xfrm>
-          <a:prstGeom prst="rect">
-            <a:avLst/>
-          </a:prstGeom>
-          <a:noFill/>
-        </p:spPr>
-        <p:txBody>
-          <a:bodyPr wrap="none" lIns="0" tIns="0" rIns="0" bIns="0" anchor="ctr">
-            <a:noAutofit/>
-          </a:bodyPr>
-          <a:lstStyle/>
-          <a:p>
-            <a:pPr marL="0" indent="0" algn="l">
-              <a:buNone/>
-              <a:defRPr sz="1200" b="1" i="0">
-                <a:solidFill>
-                  <a:srgbClr val="F0AC58"/>
-                </a:solidFill>
-                <a:latin typeface="Calibri"/>
-                <a:ea typeface="Calibri"/>
-                <a:cs typeface="Calibri"/>
-              </a:defRPr>
-            </a:pPr>
-            <a:r>
-              <a:rPr sz="1200" b="1" i="0">
-                <a:solidFill>
-                  <a:srgbClr val="F0AC58"/>
-                </a:solidFill>
-                <a:latin typeface="Calibri"/>
-                <a:ea typeface="Calibri"/>
-                <a:cs typeface="Calibri"/>
-              </a:rPr>
-              <a:t>ПРИКЛАД ГОТОВОГО ПРОДУКТУ  ·  SPAR</a:t>
-            </a:r>
-            <a:endParaRPr sz="1700"/>
-          </a:p>
-        </p:txBody>
-      </p:sp>
-      <p:sp>
-        <p:nvSpPr>
           <p:cNvPr id="8" name="Text 6">
             <a:extLst>
               <a:ext uri="{FF2B5EF4-FFF2-40B4-BE49-F238E27FC236}">
@@ -3981,7 +3949,7 @@
         </p:nvSpPr>
         <p:spPr>
           <a:xfrm>
-            <a:off x="6167437" y="4512085"/>
+            <a:off x="6364082" y="4364601"/>
             <a:ext cx="5429250" cy="914400"/>
           </a:xfrm>
           <a:prstGeom prst="rect">
@@ -4325,6 +4293,7 @@
           <a:lstStyle/>
           <a:p>
             <a:pPr algn="ctr"/>
+            <a:endParaRPr/>
           </a:p>
         </p:txBody>
       </p:sp>
@@ -4336,7 +4305,7 @@
         </p:nvSpPr>
         <p:spPr>
           <a:xfrm>
-            <a:off x="800100" y="5934456"/>
+            <a:off x="929030" y="5905353"/>
             <a:ext cx="1188720" cy="722376"/>
           </a:xfrm>
           <a:prstGeom prst="rect">
@@ -4345,14 +4314,14 @@
           <a:noFill/>
         </p:spPr>
         <p:txBody>
-          <a:bodyPr wrap="none" lIns="0" rIns="0" tIns="0" bIns="0" anchor="ctr">
+          <a:bodyPr wrap="none" lIns="0" tIns="0" rIns="0" bIns="0" anchor="ctr">
             <a:spAutoFit/>
           </a:bodyPr>
           <a:lstStyle/>
           <a:p>
             <a:pPr algn="l"/>
             <a:r>
-              <a:rPr sz="2600" b="1" spc="100">
+              <a:rPr sz="2600" b="1" spc="100" dirty="0">
                 <a:solidFill>
                   <a:srgbClr val="F5CE76"/>
                 </a:solidFill>
@@ -4406,6 +4375,7 @@
           <a:lstStyle/>
           <a:p>
             <a:pPr algn="ctr"/>
+            <a:endParaRPr/>
           </a:p>
         </p:txBody>
       </p:sp>
@@ -4417,30 +4387,81 @@
         </p:nvSpPr>
         <p:spPr>
           <a:xfrm>
-            <a:off x="2304288" y="5934456"/>
-            <a:ext cx="3108960" cy="722376"/>
-          </a:xfrm>
-          <a:prstGeom prst="rect">
-            <a:avLst/>
-          </a:prstGeom>
-          <a:noFill/>
-        </p:spPr>
-        <p:txBody>
-          <a:bodyPr wrap="none" lIns="0" rIns="0" tIns="0" bIns="0" anchor="ctr">
+            <a:off x="2304288" y="6099436"/>
+            <a:ext cx="2107821" cy="392415"/>
+          </a:xfrm>
+          <a:prstGeom prst="rect">
+            <a:avLst/>
+          </a:prstGeom>
+          <a:noFill/>
+        </p:spPr>
+        <p:txBody>
+          <a:bodyPr wrap="none" lIns="0" tIns="0" rIns="0" bIns="0" anchor="ctr">
             <a:spAutoFit/>
           </a:bodyPr>
           <a:lstStyle/>
           <a:p>
             <a:pPr algn="l"/>
             <a:r>
-              <a:rPr sz="1250" b="1">
+              <a:rPr sz="1250" b="1" dirty="0" err="1">
                 <a:solidFill>
                   <a:srgbClr val="FCF9F0"/>
                 </a:solidFill>
                 <a:latin typeface="Calibri"/>
               </a:rPr>
-              <a:t>Виготовлено для мережі SPAR</a:t>
-            </a:r>
+              <a:t>Виготовлено</a:t>
+            </a:r>
+            <a:r>
+              <a:rPr sz="1250" b="1" dirty="0">
+                <a:solidFill>
+                  <a:srgbClr val="FCF9F0"/>
+                </a:solidFill>
+                <a:latin typeface="Calibri"/>
+              </a:rPr>
+              <a:t> </a:t>
+            </a:r>
+            <a:r>
+              <a:rPr sz="1250" b="1" dirty="0" err="1">
+                <a:solidFill>
+                  <a:srgbClr val="FCF9F0"/>
+                </a:solidFill>
+                <a:latin typeface="Calibri"/>
+              </a:rPr>
+              <a:t>для</a:t>
+            </a:r>
+            <a:r>
+              <a:rPr sz="1250" b="1" dirty="0">
+                <a:solidFill>
+                  <a:srgbClr val="FCF9F0"/>
+                </a:solidFill>
+                <a:latin typeface="Calibri"/>
+              </a:rPr>
+              <a:t> </a:t>
+            </a:r>
+            <a:r>
+              <a:rPr sz="1250" b="1" dirty="0" err="1">
+                <a:solidFill>
+                  <a:srgbClr val="FCF9F0"/>
+                </a:solidFill>
+                <a:latin typeface="Calibri"/>
+              </a:rPr>
+              <a:t>мережі</a:t>
+            </a:r>
+            <a:r>
+              <a:rPr sz="1250" b="1" dirty="0">
+                <a:solidFill>
+                  <a:srgbClr val="FCF9F0"/>
+                </a:solidFill>
+                <a:latin typeface="Calibri"/>
+              </a:rPr>
+              <a:t> SPAR</a:t>
+            </a:r>
+            <a:endParaRPr lang="uk-UA" sz="1250" b="1" dirty="0">
+              <a:solidFill>
+                <a:srgbClr val="FCF9F0"/>
+              </a:solidFill>
+              <a:latin typeface="Calibri"/>
+            </a:endParaRPr>
           </a:p>
           <a:p>
             <a:pPr algn="l">
@@ -4449,13 +4470,40 @@
               </a:spcBef>
             </a:pPr>
             <a:r>
-              <a:rPr sz="1050" b="0">
+              <a:rPr lang="ru-UA" sz="1050" dirty="0">
                 <a:solidFill>
                   <a:srgbClr val="D2E4CE"/>
                 </a:solidFill>
                 <a:latin typeface="Calibri"/>
               </a:rPr>
-              <a:t>реальний кейс Private Label</a:t>
+              <a:t>Р</a:t>
+            </a:r>
+            <a:r>
+              <a:rPr lang="uk-UA" sz="1050" b="0" dirty="0" err="1">
+                <a:solidFill>
+                  <a:srgbClr val="D2E4CE"/>
+                </a:solidFill>
+                <a:latin typeface="Calibri"/>
+              </a:rPr>
+              <a:t>еальний</a:t>
+            </a:r>
+            <a:r>
+              <a:rPr lang="uk-UA" sz="1050" b="0" dirty="0">
+                <a:solidFill>
+                  <a:srgbClr val="D2E4CE"/>
+                </a:solidFill>
+                <a:latin typeface="Calibri"/>
+              </a:rPr>
+              <a:t> кейс </a:t>
+            </a:r>
+            <a:r>
+              <a:rPr lang="en-US" sz="1050" b="0" dirty="0">
+                <a:solidFill>
+                  <a:srgbClr val="D2E4CE"/>
+                </a:solidFill>
+                <a:latin typeface="Calibri"/>
+              </a:rPr>
+              <a:t>Private Label</a:t>
             </a:r>
           </a:p>
         </p:txBody>
@@ -4658,7 +4706,7 @@
               </a:defRPr>
             </a:pPr>
             <a:r>
-              <a:rPr sz="1425" b="0" i="0">
+              <a:rPr sz="1425" b="0" i="0" dirty="0" err="1">
                 <a:solidFill>
                   <a:srgbClr val="D2E4CE"/>
                 </a:solidFill>
@@ -4666,58 +4714,21 @@
                 <a:ea typeface="Calibri"/>
                 <a:cs typeface="Calibri"/>
               </a:rPr>
-              <a:t>За споживчу упаковку 2 × 125 г · USD / UAH · 6 упаковок у транспортному коробі</a:t>
-            </a:r>
-            <a:endParaRPr sz="1250"/>
-          </a:p>
-        </p:txBody>
-      </p:sp>
-      <p:sp>
-        <p:nvSpPr>
-          <p:cNvPr id="7" name="Text 5">
-            <a:extLst>
-              <a:ext uri="{FF2B5EF4-FFF2-40B4-BE49-F238E27FC236}">
-                <a16:creationId xmlns:a16="http://schemas.microsoft.com/office/drawing/2014/main" id="{F27C41B4-C39E-4BB3-87E3-96451AFDB1CC}"/>
-              </a:ext>
-            </a:extLst>
-          </p:cNvPr>
-          <p:cNvSpPr>
-            <a:spLocks noGrp="1"/>
-          </p:cNvSpPr>
-          <p:nvPr/>
-        </p:nvSpPr>
-        <p:spPr>
-          <a:xfrm>
-            <a:off x="571500" y="5905500"/>
-            <a:ext cx="11049000" cy="333375"/>
-          </a:xfrm>
-          <a:prstGeom prst="rect">
-            <a:avLst/>
-          </a:prstGeom>
-          <a:noFill/>
-        </p:spPr>
-        <p:txBody>
-          <a:bodyPr wrap="none" lIns="0" tIns="0" rIns="0" bIns="0" anchor="ctr">
-            <a:noAutofit/>
-          </a:bodyPr>
-          <a:lstStyle/>
-          <a:p>
-            <a:pPr marL="0" indent="0" algn="l">
-              <a:lnSpc>
-                <a:spcPts val="1700"/>
-              </a:lnSpc>
-              <a:buNone/>
-              <a:defRPr sz="1500" b="0" i="0">
+              <a:t>За</a:t>
+            </a:r>
+            <a:r>
+              <a:rPr sz="1425" b="0" i="0" dirty="0">
                 <a:solidFill>
                   <a:srgbClr val="D2E4CE"/>
                 </a:solidFill>
                 <a:latin typeface="Calibri"/>
                 <a:ea typeface="Calibri"/>
                 <a:cs typeface="Calibri"/>
-              </a:defRPr>
-            </a:pPr>
-            <a:r>
-              <a:rPr sz="1500" b="0" i="0">
+              </a:rPr>
+              <a:t> </a:t>
+            </a:r>
+            <a:r>
+              <a:rPr sz="1425" b="0" i="0" dirty="0" err="1">
                 <a:solidFill>
                   <a:srgbClr val="D2E4CE"/>
                 </a:solidFill>
@@ -4725,55 +4736,21 @@
                 <a:ea typeface="Calibri"/>
                 <a:cs typeface="Calibri"/>
               </a:rPr>
-              <a:t>Джерело: Self_Cost_Rice_Brand..xlsx, аркуш «BSCM(Double cup) - Навалом».</a:t>
-            </a:r>
-            <a:endParaRPr sz="1200"/>
-          </a:p>
-        </p:txBody>
-      </p:sp>
-      <p:sp>
-        <p:nvSpPr>
-          <p:cNvPr id="62" name="TextBox 61">
-            <a:extLst>
-              <a:ext uri="{FF2B5EF4-FFF2-40B4-BE49-F238E27FC236}">
-                <a16:creationId xmlns:a16="http://schemas.microsoft.com/office/drawing/2014/main" id="{C196FC4C-6289-4874-9259-944555FAC5FA}"/>
-              </a:ext>
-            </a:extLst>
-          </p:cNvPr>
-          <p:cNvSpPr>
-            <a:spLocks noGrp="1"/>
-          </p:cNvSpPr>
-          <p:nvPr/>
-        </p:nvSpPr>
-        <p:spPr>
-          <a:xfrm>
-            <a:off x="571500" y="6419850"/>
-            <a:ext cx="11049000" cy="228600"/>
-          </a:xfrm>
-          <a:prstGeom prst="rect">
-            <a:avLst/>
-          </a:prstGeom>
-          <a:noFill/>
-        </p:spPr>
-        <p:txBody>
-          <a:bodyPr wrap="none" lIns="0" tIns="0" rIns="0" bIns="0" anchor="ctr">
-            <a:noAutofit/>
-          </a:bodyPr>
-          <a:lstStyle/>
-          <a:p>
-            <a:pPr algn="l">
-              <a:buNone/>
-              <a:defRPr sz="975" b="0" i="0">
+              <a:t>споживчу</a:t>
+            </a:r>
+            <a:r>
+              <a:rPr sz="1425" b="0" i="0" dirty="0">
                 <a:solidFill>
                   <a:srgbClr val="D2E4CE"/>
                 </a:solidFill>
                 <a:latin typeface="Calibri"/>
                 <a:ea typeface="Calibri"/>
                 <a:cs typeface="Calibri"/>
-              </a:defRPr>
-            </a:pPr>
-            <a:r>
-              <a:rPr sz="975" b="0" i="0">
+              </a:rPr>
+              <a:t> </a:t>
+            </a:r>
+            <a:r>
+              <a:rPr sz="1425" b="0" i="0" dirty="0" err="1">
                 <a:solidFill>
                   <a:srgbClr val="D2E4CE"/>
                 </a:solidFill>
@@ -4781,8 +4758,20 @@
                 <a:ea typeface="Calibri"/>
                 <a:cs typeface="Calibri"/>
               </a:rPr>
-              <a:t>* Basmati — за погодженням із постачальником.</a:t>
-            </a:r>
+              <a:t>упаковку</a:t>
+            </a:r>
+            <a:r>
+              <a:rPr sz="1425" b="0" i="0" dirty="0">
+                <a:solidFill>
+                  <a:srgbClr val="D2E4CE"/>
+                </a:solidFill>
+                <a:latin typeface="Calibri"/>
+                <a:ea typeface="Calibri"/>
+                <a:cs typeface="Calibri"/>
+              </a:rPr>
+              <a:t> 2 × 125 г ·</a:t>
+            </a:r>
+            <a:endParaRPr sz="1250" dirty="0"/>
           </a:p>
         </p:txBody>
       </p:sp>
@@ -7245,65 +7234,4537 @@
           </a:ln>
         </p:spPr>
       </p:pic>
-      <p:sp>
-        <p:nvSpPr>
-          <p:cNvPr id="37" name="TextBox 36">
-            <a:extLst>
-              <a:ext uri="{FF2B5EF4-FFF2-40B4-BE49-F238E27FC236}">
-                <a16:creationId xmlns:a16="http://schemas.microsoft.com/office/drawing/2014/main" id="{5BD72AA7-C24E-4F22-8E79-8984695C9224}"/>
-              </a:ext>
-            </a:extLst>
-          </p:cNvPr>
-          <p:cNvSpPr>
-            <a:spLocks noGrp="1"/>
-          </p:cNvSpPr>
-          <p:nvPr/>
-        </p:nvSpPr>
-        <p:spPr>
-          <a:xfrm>
-            <a:off x="571500" y="6400800"/>
-            <a:ext cx="11049000" cy="228600"/>
-          </a:xfrm>
-          <a:prstGeom prst="rect">
-            <a:avLst/>
-          </a:prstGeom>
-          <a:noFill/>
-        </p:spPr>
-        <p:txBody>
-          <a:bodyPr wrap="none" lIns="0" tIns="0" rIns="0" bIns="0" anchor="ctr">
-            <a:noAutofit/>
-          </a:bodyPr>
-          <a:lstStyle/>
-          <a:p>
-            <a:pPr algn="l">
-              <a:buNone/>
-              <a:defRPr sz="900" b="0" i="0">
-                <a:solidFill>
-                  <a:srgbClr val="D2E4CE"/>
-                </a:solidFill>
-                <a:latin typeface="Calibri"/>
-                <a:ea typeface="Calibri"/>
-                <a:cs typeface="Calibri"/>
-              </a:defRPr>
-            </a:pPr>
-            <a:r>
-              <a:rPr sz="900" b="0" i="0">
-                <a:solidFill>
-                  <a:srgbClr val="D2E4CE"/>
-                </a:solidFill>
-                <a:latin typeface="Calibri"/>
-                <a:ea typeface="Calibri"/>
-                <a:cs typeface="Calibri"/>
-              </a:rPr>
-              <a:t>Фото постачальника: Double Cup без друку — основа для дизайну нашої торгової марки.</a:t>
-            </a:r>
-          </a:p>
-        </p:txBody>
-      </p:sp>
     </p:spTree>
     <p:extLst>
       <p:ext uri="{BB962C8B-B14F-4D97-AF65-F5344CB8AC3E}">
         <p14:creationId xmlns:p14="http://schemas.microsoft.com/office/powerpoint/2010/main" val="59807226"/>
+      </p:ext>
+    </p:extLst>
+  </p:cSld>
+  <p:clrMapOvr>
+    <a:masterClrMapping/>
+  </p:clrMapOvr>
+</p:sld>
+</file>
+
+<file path=ppt/slides/slide14.xml><?xml version="1.0" encoding="utf-8"?>
+<p:sld xmlns:a="http://schemas.openxmlformats.org/drawingml/2006/main" xmlns:r="http://schemas.openxmlformats.org/officeDocument/2006/relationships" xmlns:p="http://schemas.openxmlformats.org/presentationml/2006/main">
+  <p:cSld>
+    <p:bg>
+      <p:bgPr>
+        <a:blipFill rotWithShape="1">
+          <a:blip r:embed="rId3">
+            <a:lum/>
+          </a:blip>
+          <a:srcRect/>
+          <a:stretch>
+            <a:fillRect/>
+          </a:stretch>
+        </a:blipFill>
+        <a:effectLst/>
+      </p:bgPr>
+    </p:bg>
+    <p:spTree>
+      <p:nvGrpSpPr>
+        <p:cNvPr id="1" name=""/>
+        <p:cNvGrpSpPr/>
+        <p:nvPr/>
+      </p:nvGrpSpPr>
+      <p:grpSpPr>
+        <a:xfrm>
+          <a:off x="0" y="0"/>
+          <a:ext cx="0" cy="0"/>
+          <a:chOff x="0" y="0"/>
+          <a:chExt cx="0" cy="0"/>
+        </a:xfrm>
+      </p:grpSpPr>
+      <p:sp>
+        <p:nvSpPr>
+          <p:cNvPr id="2" name="Text 0">
+            <a:extLst>
+              <a:ext uri="{FF2B5EF4-FFF2-40B4-BE49-F238E27FC236}">
+                <a16:creationId xmlns:a16="http://schemas.microsoft.com/office/drawing/2014/main" id="{CCD19144-9505-47D6-9275-6089C661FC3E}"/>
+              </a:ext>
+            </a:extLst>
+          </p:cNvPr>
+          <p:cNvSpPr>
+            <a:spLocks noGrp="1"/>
+          </p:cNvSpPr>
+          <p:nvPr/>
+        </p:nvSpPr>
+        <p:spPr>
+          <a:xfrm>
+            <a:off x="566928" y="274320"/>
+            <a:ext cx="8229600" cy="237744"/>
+          </a:xfrm>
+          <a:prstGeom prst="rect">
+            <a:avLst/>
+          </a:prstGeom>
+          <a:noFill/>
+        </p:spPr>
+        <p:txBody>
+          <a:bodyPr wrap="square" lIns="0" tIns="0" rIns="0" bIns="0" anchor="ctr"/>
+          <a:lstStyle/>
+          <a:p>
+            <a:pPr marL="0" indent="0">
+              <a:buNone/>
+            </a:pPr>
+            <a:r>
+              <a:rPr sz="1100" b="1" spc="260">
+                <a:solidFill>
+                  <a:srgbClr val="F0938D"/>
+                </a:solidFill>
+                <a:latin typeface="Calibri"/>
+                <a:ea typeface="Calibri"/>
+                <a:cs typeface="Calibri"/>
+              </a:rPr>
+              <a:t>ПОСТАЧАЛЬНИК 3</a:t>
+            </a:r>
+            <a:endParaRPr sz="1100"/>
+          </a:p>
+        </p:txBody>
+      </p:sp>
+      <p:sp>
+        <p:nvSpPr>
+          <p:cNvPr id="3" name="Text 1">
+            <a:extLst>
+              <a:ext uri="{FF2B5EF4-FFF2-40B4-BE49-F238E27FC236}">
+                <a16:creationId xmlns:a16="http://schemas.microsoft.com/office/drawing/2014/main" id="{4A44E652-7531-4B42-A2E4-24C4B8731333}"/>
+              </a:ext>
+            </a:extLst>
+          </p:cNvPr>
+          <p:cNvSpPr>
+            <a:spLocks noGrp="1"/>
+          </p:cNvSpPr>
+          <p:nvPr/>
+        </p:nvSpPr>
+        <p:spPr>
+          <a:xfrm>
+            <a:off x="566928" y="548640"/>
+            <a:ext cx="11064240" cy="548640"/>
+          </a:xfrm>
+          <a:prstGeom prst="rect">
+            <a:avLst/>
+          </a:prstGeom>
+          <a:noFill/>
+        </p:spPr>
+        <p:txBody>
+          <a:bodyPr wrap="square" lIns="0" tIns="0" rIns="0" bIns="0" anchor="ctr"/>
+          <a:lstStyle/>
+          <a:p>
+            <a:pPr marL="0" indent="0">
+              <a:buNone/>
+            </a:pPr>
+            <a:r>
+              <a:rPr sz="3100" b="1">
+                <a:solidFill>
+                  <a:srgbClr val="FFFFFF"/>
+                </a:solidFill>
+                <a:latin typeface="Cambria"/>
+                <a:ea typeface="Cambria"/>
+                <a:cs typeface="Cambria"/>
+              </a:rPr>
+              <a:t>One's International — профіль компанії</a:t>
+            </a:r>
+            <a:endParaRPr sz="3100"/>
+          </a:p>
+        </p:txBody>
+      </p:sp>
+      <p:sp>
+        <p:nvSpPr>
+          <p:cNvPr id="4" name="Text 2">
+            <a:extLst>
+              <a:ext uri="{FF2B5EF4-FFF2-40B4-BE49-F238E27FC236}">
+                <a16:creationId xmlns:a16="http://schemas.microsoft.com/office/drawing/2014/main" id="{423ADB82-A208-4FF8-8484-E70CE2076607}"/>
+              </a:ext>
+            </a:extLst>
+          </p:cNvPr>
+          <p:cNvSpPr>
+            <a:spLocks noGrp="1"/>
+          </p:cNvSpPr>
+          <p:nvPr/>
+        </p:nvSpPr>
+        <p:spPr>
+          <a:xfrm>
+            <a:off x="585216" y="1115568"/>
+            <a:ext cx="11064240" cy="274320"/>
+          </a:xfrm>
+          <a:prstGeom prst="rect">
+            <a:avLst/>
+          </a:prstGeom>
+          <a:noFill/>
+        </p:spPr>
+        <p:txBody>
+          <a:bodyPr wrap="square" lIns="0" tIns="0" rIns="0" bIns="0" anchor="ctr"/>
+          <a:lstStyle/>
+          <a:p>
+            <a:pPr marL="0" indent="0">
+              <a:buNone/>
+            </a:pPr>
+            <a:r>
+              <a:rPr sz="1250" i="1">
+                <a:solidFill>
+                  <a:srgbClr val="D2E4CE"/>
+                </a:solidFill>
+                <a:latin typeface="Calibri"/>
+                <a:ea typeface="Calibri"/>
+                <a:cs typeface="Calibri"/>
+              </a:rPr>
+              <a:t>Корейський виробник готових страв, бренд KBROS · Ready-to-eat Fried Rice</a:t>
+            </a:r>
+            <a:endParaRPr sz="1250"/>
+          </a:p>
+        </p:txBody>
+      </p:sp>
+      <p:sp>
+        <p:nvSpPr>
+          <p:cNvPr id="5" name="Shape 3">
+            <a:extLst>
+              <a:ext uri="{FF2B5EF4-FFF2-40B4-BE49-F238E27FC236}">
+                <a16:creationId xmlns:a16="http://schemas.microsoft.com/office/drawing/2014/main" id="{B901CC53-360D-4866-8073-8A9412E5D929}"/>
+              </a:ext>
+            </a:extLst>
+          </p:cNvPr>
+          <p:cNvSpPr>
+            <a:spLocks noGrp="1"/>
+          </p:cNvSpPr>
+          <p:nvPr/>
+        </p:nvSpPr>
+        <p:spPr>
+          <a:xfrm>
+            <a:off x="566928" y="1536192"/>
+            <a:ext cx="6675120" cy="4626864"/>
+          </a:xfrm>
+          <a:prstGeom prst="roundRect">
+            <a:avLst>
+              <a:gd name="adj" fmla="val 2372"/>
+            </a:avLst>
+          </a:prstGeom>
+          <a:solidFill>
+            <a:srgbClr val="12452B">
+              <a:alpha val="90000"/>
+            </a:srgbClr>
+          </a:solidFill>
+          <a:ln w="15875">
+            <a:solidFill>
+              <a:srgbClr val="C89C40"/>
+            </a:solidFill>
+            <a:prstDash val="solid"/>
+          </a:ln>
+          <a:effectLst>
+            <a:outerShdw blurRad="177800" dist="38100" dir="5400000" algn="bl" rotWithShape="0">
+              <a:srgbClr val="000000">
+                <a:alpha val="45000"/>
+              </a:srgbClr>
+            </a:outerShdw>
+          </a:effectLst>
+        </p:spPr>
+        <p:txBody>
+          <a:bodyPr/>
+          <a:lstStyle/>
+          <a:p>
+            <a:endParaRPr/>
+          </a:p>
+        </p:txBody>
+      </p:sp>
+      <p:sp>
+        <p:nvSpPr>
+          <p:cNvPr id="6" name="Text 4">
+            <a:extLst>
+              <a:ext uri="{FF2B5EF4-FFF2-40B4-BE49-F238E27FC236}">
+                <a16:creationId xmlns:a16="http://schemas.microsoft.com/office/drawing/2014/main" id="{7FC212FD-4906-4748-A36F-7D4284B1BC29}"/>
+              </a:ext>
+            </a:extLst>
+          </p:cNvPr>
+          <p:cNvSpPr>
+            <a:spLocks noGrp="1"/>
+          </p:cNvSpPr>
+          <p:nvPr/>
+        </p:nvSpPr>
+        <p:spPr>
+          <a:xfrm>
+            <a:off x="841248" y="1737360"/>
+            <a:ext cx="6126480" cy="310896"/>
+          </a:xfrm>
+          <a:prstGeom prst="rect">
+            <a:avLst/>
+          </a:prstGeom>
+          <a:noFill/>
+        </p:spPr>
+        <p:txBody>
+          <a:bodyPr wrap="square" lIns="0" tIns="0" rIns="0" bIns="0" anchor="ctr"/>
+          <a:lstStyle/>
+          <a:p>
+            <a:pPr marL="0" indent="0">
+              <a:buNone/>
+            </a:pPr>
+            <a:r>
+              <a:rPr sz="1700" b="1">
+                <a:solidFill>
+                  <a:srgbClr val="F5CE76"/>
+                </a:solidFill>
+                <a:latin typeface="Cambria"/>
+                <a:ea typeface="Cambria"/>
+                <a:cs typeface="Cambria"/>
+              </a:rPr>
+              <a:t>Про компанію</a:t>
+            </a:r>
+            <a:endParaRPr sz="1700"/>
+          </a:p>
+        </p:txBody>
+      </p:sp>
+      <p:sp>
+        <p:nvSpPr>
+          <p:cNvPr id="7" name="Text 5">
+            <a:extLst>
+              <a:ext uri="{FF2B5EF4-FFF2-40B4-BE49-F238E27FC236}">
+                <a16:creationId xmlns:a16="http://schemas.microsoft.com/office/drawing/2014/main" id="{B3820750-8730-426F-96FA-819EACDEEADD}"/>
+              </a:ext>
+            </a:extLst>
+          </p:cNvPr>
+          <p:cNvSpPr>
+            <a:spLocks noGrp="1"/>
+          </p:cNvSpPr>
+          <p:nvPr/>
+        </p:nvSpPr>
+        <p:spPr>
+          <a:xfrm>
+            <a:off x="841248" y="2103120"/>
+            <a:ext cx="6126480" cy="868680"/>
+          </a:xfrm>
+          <a:prstGeom prst="rect">
+            <a:avLst/>
+          </a:prstGeom>
+          <a:noFill/>
+        </p:spPr>
+        <p:txBody>
+          <a:bodyPr wrap="square" lIns="0" tIns="0" rIns="0" bIns="0" anchor="ctr"/>
+          <a:lstStyle/>
+          <a:p>
+            <a:pPr marL="0" indent="0">
+              <a:lnSpc>
+                <a:spcPts val="1700"/>
+              </a:lnSpc>
+              <a:buNone/>
+            </a:pPr>
+            <a:r>
+              <a:rPr sz="1200">
+                <a:solidFill>
+                  <a:srgbClr val="FCF9F0"/>
+                </a:solidFill>
+                <a:latin typeface="Calibri"/>
+                <a:ea typeface="Calibri"/>
+                <a:cs typeface="Calibri"/>
+              </a:rPr>
+              <a:t>One's International Co., Ltd. — постачальник готових страв із Республіки Корея. Смажений рис у лотках під брендом KBROS: зберігання за кімнатної температури, розігрів у мікрохвильовці за 90 секунд.</a:t>
+            </a:r>
+            <a:endParaRPr sz="1200"/>
+          </a:p>
+        </p:txBody>
+      </p:sp>
+      <p:sp>
+        <p:nvSpPr>
+          <p:cNvPr id="8" name="Text 6">
+            <a:extLst>
+              <a:ext uri="{FF2B5EF4-FFF2-40B4-BE49-F238E27FC236}">
+                <a16:creationId xmlns:a16="http://schemas.microsoft.com/office/drawing/2014/main" id="{1737FF36-89C7-40BF-8029-7E30F7FC5E72}"/>
+              </a:ext>
+            </a:extLst>
+          </p:cNvPr>
+          <p:cNvSpPr>
+            <a:spLocks noGrp="1"/>
+          </p:cNvSpPr>
+          <p:nvPr/>
+        </p:nvSpPr>
+        <p:spPr>
+          <a:xfrm>
+            <a:off x="841248" y="3017520"/>
+            <a:ext cx="6126480" cy="310896"/>
+          </a:xfrm>
+          <a:prstGeom prst="rect">
+            <a:avLst/>
+          </a:prstGeom>
+          <a:noFill/>
+        </p:spPr>
+        <p:txBody>
+          <a:bodyPr wrap="square" lIns="0" tIns="0" rIns="0" bIns="0" anchor="ctr"/>
+          <a:lstStyle/>
+          <a:p>
+            <a:pPr marL="0" indent="0">
+              <a:buNone/>
+            </a:pPr>
+            <a:r>
+              <a:rPr sz="1700" b="1">
+                <a:solidFill>
+                  <a:srgbClr val="F5CE76"/>
+                </a:solidFill>
+                <a:latin typeface="Cambria"/>
+                <a:ea typeface="Cambria"/>
+                <a:cs typeface="Cambria"/>
+              </a:rPr>
+              <a:t>Ключові параметри</a:t>
+            </a:r>
+            <a:endParaRPr sz="1700"/>
+          </a:p>
+        </p:txBody>
+      </p:sp>
+      <p:sp>
+        <p:nvSpPr>
+          <p:cNvPr id="9" name="Text 7">
+            <a:extLst>
+              <a:ext uri="{FF2B5EF4-FFF2-40B4-BE49-F238E27FC236}">
+                <a16:creationId xmlns:a16="http://schemas.microsoft.com/office/drawing/2014/main" id="{310913A5-A195-4C35-8BEC-22AF2B15B7E7}"/>
+              </a:ext>
+            </a:extLst>
+          </p:cNvPr>
+          <p:cNvSpPr>
+            <a:spLocks noGrp="1"/>
+          </p:cNvSpPr>
+          <p:nvPr/>
+        </p:nvSpPr>
+        <p:spPr>
+          <a:xfrm>
+            <a:off x="841248" y="3383280"/>
+            <a:ext cx="2103120" cy="256032"/>
+          </a:xfrm>
+          <a:prstGeom prst="rect">
+            <a:avLst/>
+          </a:prstGeom>
+          <a:noFill/>
+        </p:spPr>
+        <p:txBody>
+          <a:bodyPr wrap="square" lIns="0" tIns="0" rIns="0" bIns="0" anchor="ctr"/>
+          <a:lstStyle/>
+          <a:p>
+            <a:pPr marL="0" indent="0">
+              <a:buNone/>
+            </a:pPr>
+            <a:r>
+              <a:rPr sz="1050">
+                <a:solidFill>
+                  <a:srgbClr val="D2E4CE"/>
+                </a:solidFill>
+                <a:latin typeface="Calibri"/>
+                <a:ea typeface="Calibri"/>
+                <a:cs typeface="Calibri"/>
+              </a:rPr>
+              <a:t>Локація</a:t>
+            </a:r>
+            <a:endParaRPr sz="1050"/>
+          </a:p>
+        </p:txBody>
+      </p:sp>
+      <p:sp>
+        <p:nvSpPr>
+          <p:cNvPr id="10" name="Text 8">
+            <a:extLst>
+              <a:ext uri="{FF2B5EF4-FFF2-40B4-BE49-F238E27FC236}">
+                <a16:creationId xmlns:a16="http://schemas.microsoft.com/office/drawing/2014/main" id="{86A606B1-78BD-42D4-97F2-25019B04EA50}"/>
+              </a:ext>
+            </a:extLst>
+          </p:cNvPr>
+          <p:cNvSpPr>
+            <a:spLocks noGrp="1"/>
+          </p:cNvSpPr>
+          <p:nvPr/>
+        </p:nvSpPr>
+        <p:spPr>
+          <a:xfrm>
+            <a:off x="2971800" y="3383280"/>
+            <a:ext cx="4023360" cy="256032"/>
+          </a:xfrm>
+          <a:prstGeom prst="rect">
+            <a:avLst/>
+          </a:prstGeom>
+          <a:noFill/>
+        </p:spPr>
+        <p:txBody>
+          <a:bodyPr wrap="square" lIns="0" tIns="0" rIns="0" bIns="0" anchor="ctr"/>
+          <a:lstStyle/>
+          <a:p>
+            <a:pPr marL="0" indent="0">
+              <a:buNone/>
+            </a:pPr>
+            <a:r>
+              <a:rPr sz="1150" b="1">
+                <a:solidFill>
+                  <a:srgbClr val="FCF9F0"/>
+                </a:solidFill>
+                <a:latin typeface="Calibri"/>
+                <a:ea typeface="Calibri"/>
+                <a:cs typeface="Calibri"/>
+              </a:rPr>
+              <a:t>Гурі-сі, Кьонгідо, Республіка Корея</a:t>
+            </a:r>
+            <a:endParaRPr sz="1150"/>
+          </a:p>
+        </p:txBody>
+      </p:sp>
+      <p:sp>
+        <p:nvSpPr>
+          <p:cNvPr id="11" name="Text 9">
+            <a:extLst>
+              <a:ext uri="{FF2B5EF4-FFF2-40B4-BE49-F238E27FC236}">
+                <a16:creationId xmlns:a16="http://schemas.microsoft.com/office/drawing/2014/main" id="{578BF7FC-C005-4DB0-828C-5DE23D336C1C}"/>
+              </a:ext>
+            </a:extLst>
+          </p:cNvPr>
+          <p:cNvSpPr>
+            <a:spLocks noGrp="1"/>
+          </p:cNvSpPr>
+          <p:nvPr/>
+        </p:nvSpPr>
+        <p:spPr>
+          <a:xfrm>
+            <a:off x="841248" y="3717036"/>
+            <a:ext cx="2103120" cy="256032"/>
+          </a:xfrm>
+          <a:prstGeom prst="rect">
+            <a:avLst/>
+          </a:prstGeom>
+          <a:noFill/>
+        </p:spPr>
+        <p:txBody>
+          <a:bodyPr wrap="square" lIns="0" tIns="0" rIns="0" bIns="0" anchor="ctr"/>
+          <a:lstStyle/>
+          <a:p>
+            <a:pPr marL="0" indent="0">
+              <a:buNone/>
+            </a:pPr>
+            <a:r>
+              <a:rPr sz="1050">
+                <a:solidFill>
+                  <a:srgbClr val="D2E4CE"/>
+                </a:solidFill>
+                <a:latin typeface="Calibri"/>
+                <a:ea typeface="Calibri"/>
+                <a:cs typeface="Calibri"/>
+              </a:rPr>
+              <a:t>Бренд</a:t>
+            </a:r>
+            <a:endParaRPr sz="1050"/>
+          </a:p>
+        </p:txBody>
+      </p:sp>
+      <p:sp>
+        <p:nvSpPr>
+          <p:cNvPr id="12" name="Text 10">
+            <a:extLst>
+              <a:ext uri="{FF2B5EF4-FFF2-40B4-BE49-F238E27FC236}">
+                <a16:creationId xmlns:a16="http://schemas.microsoft.com/office/drawing/2014/main" id="{A42A9028-10DB-4B72-B30E-FB49E15FA6C9}"/>
+              </a:ext>
+            </a:extLst>
+          </p:cNvPr>
+          <p:cNvSpPr>
+            <a:spLocks noGrp="1"/>
+          </p:cNvSpPr>
+          <p:nvPr/>
+        </p:nvSpPr>
+        <p:spPr>
+          <a:xfrm>
+            <a:off x="2971800" y="3717036"/>
+            <a:ext cx="4023360" cy="256032"/>
+          </a:xfrm>
+          <a:prstGeom prst="rect">
+            <a:avLst/>
+          </a:prstGeom>
+          <a:noFill/>
+        </p:spPr>
+        <p:txBody>
+          <a:bodyPr wrap="square" lIns="0" tIns="0" rIns="0" bIns="0" anchor="ctr"/>
+          <a:lstStyle/>
+          <a:p>
+            <a:pPr marL="0" indent="0">
+              <a:buNone/>
+            </a:pPr>
+            <a:r>
+              <a:rPr sz="1150" b="1">
+                <a:solidFill>
+                  <a:srgbClr val="FCF9F0"/>
+                </a:solidFill>
+                <a:latin typeface="Calibri"/>
+                <a:ea typeface="Calibri"/>
+                <a:cs typeface="Calibri"/>
+              </a:rPr>
+              <a:t>KBROS · власна ТМ виробника</a:t>
+            </a:r>
+            <a:endParaRPr sz="1150"/>
+          </a:p>
+        </p:txBody>
+      </p:sp>
+      <p:sp>
+        <p:nvSpPr>
+          <p:cNvPr id="13" name="Text 11">
+            <a:extLst>
+              <a:ext uri="{FF2B5EF4-FFF2-40B4-BE49-F238E27FC236}">
+                <a16:creationId xmlns:a16="http://schemas.microsoft.com/office/drawing/2014/main" id="{FE95C3E2-EA1E-42D7-A32D-5FC6276536E0}"/>
+              </a:ext>
+            </a:extLst>
+          </p:cNvPr>
+          <p:cNvSpPr>
+            <a:spLocks noGrp="1"/>
+          </p:cNvSpPr>
+          <p:nvPr/>
+        </p:nvSpPr>
+        <p:spPr>
+          <a:xfrm>
+            <a:off x="841248" y="4050792"/>
+            <a:ext cx="2103120" cy="256032"/>
+          </a:xfrm>
+          <a:prstGeom prst="rect">
+            <a:avLst/>
+          </a:prstGeom>
+          <a:noFill/>
+        </p:spPr>
+        <p:txBody>
+          <a:bodyPr wrap="square" lIns="0" tIns="0" rIns="0" bIns="0" anchor="ctr"/>
+          <a:lstStyle/>
+          <a:p>
+            <a:pPr marL="0" indent="0">
+              <a:buNone/>
+            </a:pPr>
+            <a:r>
+              <a:rPr sz="1050">
+                <a:solidFill>
+                  <a:srgbClr val="D2E4CE"/>
+                </a:solidFill>
+                <a:latin typeface="Calibri"/>
+                <a:ea typeface="Calibri"/>
+                <a:cs typeface="Calibri"/>
+              </a:rPr>
+              <a:t>Умови поставки</a:t>
+            </a:r>
+            <a:endParaRPr sz="1050"/>
+          </a:p>
+        </p:txBody>
+      </p:sp>
+      <p:sp>
+        <p:nvSpPr>
+          <p:cNvPr id="14" name="Text 12">
+            <a:extLst>
+              <a:ext uri="{FF2B5EF4-FFF2-40B4-BE49-F238E27FC236}">
+                <a16:creationId xmlns:a16="http://schemas.microsoft.com/office/drawing/2014/main" id="{BD427EAD-08DF-4E7A-9C4C-835EFAE70855}"/>
+              </a:ext>
+            </a:extLst>
+          </p:cNvPr>
+          <p:cNvSpPr>
+            <a:spLocks noGrp="1"/>
+          </p:cNvSpPr>
+          <p:nvPr/>
+        </p:nvSpPr>
+        <p:spPr>
+          <a:xfrm>
+            <a:off x="2971800" y="4050792"/>
+            <a:ext cx="4023360" cy="256032"/>
+          </a:xfrm>
+          <a:prstGeom prst="rect">
+            <a:avLst/>
+          </a:prstGeom>
+          <a:noFill/>
+        </p:spPr>
+        <p:txBody>
+          <a:bodyPr wrap="square" lIns="0" tIns="0" rIns="0" bIns="0" anchor="ctr"/>
+          <a:lstStyle/>
+          <a:p>
+            <a:pPr marL="0" indent="0">
+              <a:buNone/>
+            </a:pPr>
+            <a:r>
+              <a:rPr sz="1150" b="1">
+                <a:solidFill>
+                  <a:srgbClr val="FCF9F0"/>
+                </a:solidFill>
+                <a:latin typeface="Calibri"/>
+                <a:ea typeface="Calibri"/>
+                <a:cs typeface="Calibri"/>
+              </a:rPr>
+              <a:t>FOB Busan · передоплата 100% (T/T)</a:t>
+            </a:r>
+            <a:endParaRPr sz="1150"/>
+          </a:p>
+        </p:txBody>
+      </p:sp>
+      <p:sp>
+        <p:nvSpPr>
+          <p:cNvPr id="15" name="Text 13">
+            <a:extLst>
+              <a:ext uri="{FF2B5EF4-FFF2-40B4-BE49-F238E27FC236}">
+                <a16:creationId xmlns:a16="http://schemas.microsoft.com/office/drawing/2014/main" id="{1D34AC2F-EE39-497C-8F1A-55D934AC95C0}"/>
+              </a:ext>
+            </a:extLst>
+          </p:cNvPr>
+          <p:cNvSpPr>
+            <a:spLocks noGrp="1"/>
+          </p:cNvSpPr>
+          <p:nvPr/>
+        </p:nvSpPr>
+        <p:spPr>
+          <a:xfrm>
+            <a:off x="841248" y="4384548"/>
+            <a:ext cx="2103120" cy="256032"/>
+          </a:xfrm>
+          <a:prstGeom prst="rect">
+            <a:avLst/>
+          </a:prstGeom>
+          <a:noFill/>
+        </p:spPr>
+        <p:txBody>
+          <a:bodyPr wrap="square" lIns="0" tIns="0" rIns="0" bIns="0" anchor="ctr"/>
+          <a:lstStyle/>
+          <a:p>
+            <a:pPr marL="0" indent="0">
+              <a:buNone/>
+            </a:pPr>
+            <a:r>
+              <a:rPr sz="1050">
+                <a:solidFill>
+                  <a:srgbClr val="D2E4CE"/>
+                </a:solidFill>
+                <a:latin typeface="Calibri"/>
+                <a:ea typeface="Calibri"/>
+                <a:cs typeface="Calibri"/>
+              </a:rPr>
+              <a:t>MOQ</a:t>
+            </a:r>
+            <a:endParaRPr sz="1050"/>
+          </a:p>
+        </p:txBody>
+      </p:sp>
+      <p:sp>
+        <p:nvSpPr>
+          <p:cNvPr id="16" name="Text 14">
+            <a:extLst>
+              <a:ext uri="{FF2B5EF4-FFF2-40B4-BE49-F238E27FC236}">
+                <a16:creationId xmlns:a16="http://schemas.microsoft.com/office/drawing/2014/main" id="{A2B1EB85-2BAF-45AA-8C18-39BD7B6AE924}"/>
+              </a:ext>
+            </a:extLst>
+          </p:cNvPr>
+          <p:cNvSpPr>
+            <a:spLocks noGrp="1"/>
+          </p:cNvSpPr>
+          <p:nvPr/>
+        </p:nvSpPr>
+        <p:spPr>
+          <a:xfrm>
+            <a:off x="2971800" y="4384548"/>
+            <a:ext cx="4023360" cy="256032"/>
+          </a:xfrm>
+          <a:prstGeom prst="rect">
+            <a:avLst/>
+          </a:prstGeom>
+          <a:noFill/>
+        </p:spPr>
+        <p:txBody>
+          <a:bodyPr wrap="square" lIns="0" tIns="0" rIns="0" bIns="0" anchor="ctr"/>
+          <a:lstStyle/>
+          <a:p>
+            <a:pPr marL="0" indent="0">
+              <a:buNone/>
+            </a:pPr>
+            <a:r>
+              <a:rPr sz="1150" b="1">
+                <a:solidFill>
+                  <a:srgbClr val="FCF9F0"/>
+                </a:solidFill>
+                <a:latin typeface="Calibri"/>
+                <a:ea typeface="Calibri"/>
+                <a:cs typeface="Calibri"/>
+              </a:rPr>
+              <a:t>200 коробів на кожне SKU</a:t>
+            </a:r>
+            <a:endParaRPr sz="1150"/>
+          </a:p>
+        </p:txBody>
+      </p:sp>
+      <p:sp>
+        <p:nvSpPr>
+          <p:cNvPr id="17" name="Text 15">
+            <a:extLst>
+              <a:ext uri="{FF2B5EF4-FFF2-40B4-BE49-F238E27FC236}">
+                <a16:creationId xmlns:a16="http://schemas.microsoft.com/office/drawing/2014/main" id="{CC1BCD09-C026-44CF-8F8B-173FAD36743F}"/>
+              </a:ext>
+            </a:extLst>
+          </p:cNvPr>
+          <p:cNvSpPr>
+            <a:spLocks noGrp="1"/>
+          </p:cNvSpPr>
+          <p:nvPr/>
+        </p:nvSpPr>
+        <p:spPr>
+          <a:xfrm>
+            <a:off x="841248" y="4718304"/>
+            <a:ext cx="2103120" cy="256032"/>
+          </a:xfrm>
+          <a:prstGeom prst="rect">
+            <a:avLst/>
+          </a:prstGeom>
+          <a:noFill/>
+        </p:spPr>
+        <p:txBody>
+          <a:bodyPr wrap="square" lIns="0" tIns="0" rIns="0" bIns="0" anchor="ctr"/>
+          <a:lstStyle/>
+          <a:p>
+            <a:pPr marL="0" indent="0">
+              <a:buNone/>
+            </a:pPr>
+            <a:r>
+              <a:rPr sz="1050">
+                <a:solidFill>
+                  <a:srgbClr val="D2E4CE"/>
+                </a:solidFill>
+                <a:latin typeface="Calibri"/>
+                <a:ea typeface="Calibri"/>
+                <a:cs typeface="Calibri"/>
+              </a:rPr>
+              <a:t>Термін придатності</a:t>
+            </a:r>
+            <a:endParaRPr sz="1050"/>
+          </a:p>
+        </p:txBody>
+      </p:sp>
+      <p:sp>
+        <p:nvSpPr>
+          <p:cNvPr id="18" name="Text 16">
+            <a:extLst>
+              <a:ext uri="{FF2B5EF4-FFF2-40B4-BE49-F238E27FC236}">
+                <a16:creationId xmlns:a16="http://schemas.microsoft.com/office/drawing/2014/main" id="{2D27C77E-48F9-4FBD-A728-1F2B80DFD2D6}"/>
+              </a:ext>
+            </a:extLst>
+          </p:cNvPr>
+          <p:cNvSpPr>
+            <a:spLocks noGrp="1"/>
+          </p:cNvSpPr>
+          <p:nvPr/>
+        </p:nvSpPr>
+        <p:spPr>
+          <a:xfrm>
+            <a:off x="2971800" y="4718304"/>
+            <a:ext cx="4023360" cy="256032"/>
+          </a:xfrm>
+          <a:prstGeom prst="rect">
+            <a:avLst/>
+          </a:prstGeom>
+          <a:noFill/>
+        </p:spPr>
+        <p:txBody>
+          <a:bodyPr wrap="square" lIns="0" tIns="0" rIns="0" bIns="0" anchor="ctr"/>
+          <a:lstStyle/>
+          <a:p>
+            <a:pPr marL="0" indent="0">
+              <a:buNone/>
+            </a:pPr>
+            <a:r>
+              <a:rPr sz="1150" b="1">
+                <a:solidFill>
+                  <a:srgbClr val="FCF9F0"/>
+                </a:solidFill>
+                <a:latin typeface="Calibri"/>
+                <a:ea typeface="Calibri"/>
+                <a:cs typeface="Calibri"/>
+              </a:rPr>
+              <a:t>12 місяців від дати виробництва</a:t>
+            </a:r>
+            <a:endParaRPr sz="1150"/>
+          </a:p>
+        </p:txBody>
+      </p:sp>
+      <p:sp>
+        <p:nvSpPr>
+          <p:cNvPr id="19" name="Text 17">
+            <a:extLst>
+              <a:ext uri="{FF2B5EF4-FFF2-40B4-BE49-F238E27FC236}">
+                <a16:creationId xmlns:a16="http://schemas.microsoft.com/office/drawing/2014/main" id="{54E2C5A1-D625-4BFD-AE8C-D9C86960782D}"/>
+              </a:ext>
+            </a:extLst>
+          </p:cNvPr>
+          <p:cNvSpPr>
+            <a:spLocks noGrp="1"/>
+          </p:cNvSpPr>
+          <p:nvPr/>
+        </p:nvSpPr>
+        <p:spPr>
+          <a:xfrm>
+            <a:off x="841248" y="5052060"/>
+            <a:ext cx="2103120" cy="256032"/>
+          </a:xfrm>
+          <a:prstGeom prst="rect">
+            <a:avLst/>
+          </a:prstGeom>
+          <a:noFill/>
+        </p:spPr>
+        <p:txBody>
+          <a:bodyPr wrap="square" lIns="0" tIns="0" rIns="0" bIns="0" anchor="ctr"/>
+          <a:lstStyle/>
+          <a:p>
+            <a:pPr marL="0" indent="0">
+              <a:buNone/>
+            </a:pPr>
+            <a:r>
+              <a:rPr sz="1050">
+                <a:solidFill>
+                  <a:srgbClr val="D2E4CE"/>
+                </a:solidFill>
+                <a:latin typeface="Calibri"/>
+                <a:ea typeface="Calibri"/>
+                <a:cs typeface="Calibri"/>
+              </a:rPr>
+              <a:t>Розігрів</a:t>
+            </a:r>
+            <a:endParaRPr sz="1050"/>
+          </a:p>
+        </p:txBody>
+      </p:sp>
+      <p:sp>
+        <p:nvSpPr>
+          <p:cNvPr id="20" name="Text 18">
+            <a:extLst>
+              <a:ext uri="{FF2B5EF4-FFF2-40B4-BE49-F238E27FC236}">
+                <a16:creationId xmlns:a16="http://schemas.microsoft.com/office/drawing/2014/main" id="{FC81496A-087D-4BDF-97C0-9C0AD33F324A}"/>
+              </a:ext>
+            </a:extLst>
+          </p:cNvPr>
+          <p:cNvSpPr>
+            <a:spLocks noGrp="1"/>
+          </p:cNvSpPr>
+          <p:nvPr/>
+        </p:nvSpPr>
+        <p:spPr>
+          <a:xfrm>
+            <a:off x="2971800" y="5052060"/>
+            <a:ext cx="4023360" cy="256032"/>
+          </a:xfrm>
+          <a:prstGeom prst="rect">
+            <a:avLst/>
+          </a:prstGeom>
+          <a:noFill/>
+        </p:spPr>
+        <p:txBody>
+          <a:bodyPr wrap="square" lIns="0" tIns="0" rIns="0" bIns="0" anchor="ctr"/>
+          <a:lstStyle/>
+          <a:p>
+            <a:pPr marL="0" indent="0">
+              <a:buNone/>
+            </a:pPr>
+            <a:r>
+              <a:rPr sz="1150" b="1">
+                <a:solidFill>
+                  <a:srgbClr val="FCF9F0"/>
+                </a:solidFill>
+                <a:latin typeface="Calibri"/>
+                <a:ea typeface="Calibri"/>
+                <a:cs typeface="Calibri"/>
+              </a:rPr>
+              <a:t>мікрохвильова піч, 90 сек</a:t>
+            </a:r>
+            <a:endParaRPr sz="1150"/>
+          </a:p>
+        </p:txBody>
+      </p:sp>
+      <p:sp>
+        <p:nvSpPr>
+          <p:cNvPr id="21" name="Text 19">
+            <a:extLst>
+              <a:ext uri="{FF2B5EF4-FFF2-40B4-BE49-F238E27FC236}">
+                <a16:creationId xmlns:a16="http://schemas.microsoft.com/office/drawing/2014/main" id="{D29F56F1-072F-45B9-B669-E6DB5952B5DC}"/>
+              </a:ext>
+            </a:extLst>
+          </p:cNvPr>
+          <p:cNvSpPr>
+            <a:spLocks noGrp="1"/>
+          </p:cNvSpPr>
+          <p:nvPr/>
+        </p:nvSpPr>
+        <p:spPr>
+          <a:xfrm>
+            <a:off x="841248" y="5385816"/>
+            <a:ext cx="2103120" cy="256032"/>
+          </a:xfrm>
+          <a:prstGeom prst="rect">
+            <a:avLst/>
+          </a:prstGeom>
+          <a:noFill/>
+        </p:spPr>
+        <p:txBody>
+          <a:bodyPr wrap="square" lIns="0" tIns="0" rIns="0" bIns="0" anchor="ctr"/>
+          <a:lstStyle/>
+          <a:p>
+            <a:pPr marL="0" indent="0">
+              <a:buNone/>
+            </a:pPr>
+            <a:r>
+              <a:rPr sz="1050">
+                <a:solidFill>
+                  <a:srgbClr val="D2E4CE"/>
+                </a:solidFill>
+                <a:latin typeface="Calibri"/>
+                <a:ea typeface="Calibri"/>
+                <a:cs typeface="Calibri"/>
+              </a:rPr>
+              <a:t>Формат</a:t>
+            </a:r>
+            <a:endParaRPr sz="1050"/>
+          </a:p>
+        </p:txBody>
+      </p:sp>
+      <p:sp>
+        <p:nvSpPr>
+          <p:cNvPr id="22" name="Text 20">
+            <a:extLst>
+              <a:ext uri="{FF2B5EF4-FFF2-40B4-BE49-F238E27FC236}">
+                <a16:creationId xmlns:a16="http://schemas.microsoft.com/office/drawing/2014/main" id="{422D9B28-342C-4F6C-855A-E29107EE1B2A}"/>
+              </a:ext>
+            </a:extLst>
+          </p:cNvPr>
+          <p:cNvSpPr>
+            <a:spLocks noGrp="1"/>
+          </p:cNvSpPr>
+          <p:nvPr/>
+        </p:nvSpPr>
+        <p:spPr>
+          <a:xfrm>
+            <a:off x="2971800" y="5385816"/>
+            <a:ext cx="4023360" cy="256032"/>
+          </a:xfrm>
+          <a:prstGeom prst="rect">
+            <a:avLst/>
+          </a:prstGeom>
+          <a:noFill/>
+        </p:spPr>
+        <p:txBody>
+          <a:bodyPr wrap="square" lIns="0" tIns="0" rIns="0" bIns="0" anchor="ctr"/>
+          <a:lstStyle/>
+          <a:p>
+            <a:pPr marL="0" indent="0">
+              <a:buNone/>
+            </a:pPr>
+            <a:r>
+              <a:rPr sz="1150" b="1">
+                <a:solidFill>
+                  <a:srgbClr val="FCF9F0"/>
+                </a:solidFill>
+                <a:latin typeface="Calibri"/>
+                <a:ea typeface="Calibri"/>
+                <a:cs typeface="Calibri"/>
+              </a:rPr>
+              <a:t>лоток 200 г / 210 г · 12 шт у коробі</a:t>
+            </a:r>
+            <a:endParaRPr sz="1150"/>
+          </a:p>
+        </p:txBody>
+      </p:sp>
+      <p:sp>
+        <p:nvSpPr>
+          <p:cNvPr id="35" name="Text 19">
+            <a:extLst>
+              <a:ext uri="{FF2B5EF4-FFF2-40B4-BE49-F238E27FC236}">
+                <a16:creationId xmlns:a16="http://schemas.microsoft.com/office/drawing/2014/main" id="{FE1BA39C-F91D-4286-BEF8-67FC2D0BD2F1}"/>
+              </a:ext>
+            </a:extLst>
+          </p:cNvPr>
+          <p:cNvSpPr>
+            <a:spLocks noGrp="1"/>
+          </p:cNvSpPr>
+          <p:nvPr/>
+        </p:nvSpPr>
+        <p:spPr>
+          <a:xfrm>
+            <a:off x="841248" y="5719572"/>
+            <a:ext cx="2103120" cy="256032"/>
+          </a:xfrm>
+          <a:prstGeom prst="rect">
+            <a:avLst/>
+          </a:prstGeom>
+          <a:noFill/>
+        </p:spPr>
+        <p:txBody>
+          <a:bodyPr wrap="square" lIns="0" tIns="0" rIns="0" bIns="0" anchor="ctr"/>
+          <a:lstStyle/>
+          <a:p>
+            <a:pPr marL="0" indent="0">
+              <a:buNone/>
+            </a:pPr>
+            <a:r>
+              <a:rPr sz="1050">
+                <a:solidFill>
+                  <a:srgbClr val="D2E4CE"/>
+                </a:solidFill>
+                <a:latin typeface="Calibri"/>
+                <a:ea typeface="Calibri"/>
+                <a:cs typeface="Calibri"/>
+              </a:rPr>
+              <a:t>Сертифікація</a:t>
+            </a:r>
+            <a:endParaRPr sz="1050"/>
+          </a:p>
+        </p:txBody>
+      </p:sp>
+      <p:sp>
+        <p:nvSpPr>
+          <p:cNvPr id="36" name="Text 20">
+            <a:extLst>
+              <a:ext uri="{FF2B5EF4-FFF2-40B4-BE49-F238E27FC236}">
+                <a16:creationId xmlns:a16="http://schemas.microsoft.com/office/drawing/2014/main" id="{FD7FBD8F-742F-466D-99D3-4E9D925A8522}"/>
+              </a:ext>
+            </a:extLst>
+          </p:cNvPr>
+          <p:cNvSpPr>
+            <a:spLocks noGrp="1"/>
+          </p:cNvSpPr>
+          <p:nvPr/>
+        </p:nvSpPr>
+        <p:spPr>
+          <a:xfrm>
+            <a:off x="2971800" y="5719572"/>
+            <a:ext cx="4023360" cy="256032"/>
+          </a:xfrm>
+          <a:prstGeom prst="rect">
+            <a:avLst/>
+          </a:prstGeom>
+          <a:noFill/>
+        </p:spPr>
+        <p:txBody>
+          <a:bodyPr wrap="square" lIns="0" tIns="0" rIns="0" bIns="0" anchor="ctr"/>
+          <a:lstStyle/>
+          <a:p>
+            <a:pPr marL="0" indent="0">
+              <a:buNone/>
+            </a:pPr>
+            <a:r>
+              <a:rPr sz="1150" b="1">
+                <a:solidFill>
+                  <a:srgbClr val="FCF9F0"/>
+                </a:solidFill>
+                <a:latin typeface="Calibri"/>
+                <a:ea typeface="Calibri"/>
+                <a:cs typeface="Calibri"/>
+              </a:rPr>
+              <a:t>HACCP · FSSC 22000</a:t>
+            </a:r>
+            <a:endParaRPr sz="1150"/>
+          </a:p>
+        </p:txBody>
+      </p:sp>
+      <p:pic>
+        <p:nvPicPr>
+          <p:cNvPr id="37" name="Picture 36" descr="hero_collage.jpg"/>
+          <p:cNvPicPr>
+            <a:picLocks noChangeAspect="1"/>
+          </p:cNvPicPr>
+          <p:nvPr/>
+        </p:nvPicPr>
+        <p:blipFill>
+          <a:blip r:embed="rId2"/>
+          <a:stretch>
+            <a:fillRect/>
+          </a:stretch>
+        </p:blipFill>
+        <p:spPr>
+          <a:xfrm>
+            <a:off x="7534656" y="1536192"/>
+            <a:ext cx="4096512" cy="2834640"/>
+          </a:xfrm>
+          <a:prstGeom prst="roundRect">
+            <a:avLst/>
+          </a:prstGeom>
+        </p:spPr>
+      </p:pic>
+      <p:sp>
+        <p:nvSpPr>
+          <p:cNvPr id="24" name="Shape 21">
+            <a:extLst>
+              <a:ext uri="{FF2B5EF4-FFF2-40B4-BE49-F238E27FC236}">
+                <a16:creationId xmlns:a16="http://schemas.microsoft.com/office/drawing/2014/main" id="{0A6243D7-99BD-4671-9140-C29A8D2841F5}"/>
+              </a:ext>
+            </a:extLst>
+          </p:cNvPr>
+          <p:cNvSpPr>
+            <a:spLocks noGrp="1"/>
+          </p:cNvSpPr>
+          <p:nvPr/>
+        </p:nvSpPr>
+        <p:spPr>
+          <a:xfrm>
+            <a:off x="7534656" y="1536192"/>
+            <a:ext cx="4096512" cy="2834640"/>
+          </a:xfrm>
+          <a:prstGeom prst="rect">
+            <a:avLst/>
+          </a:prstGeom>
+          <a:ln w="15875">
+            <a:solidFill>
+              <a:srgbClr val="C89C40"/>
+            </a:solidFill>
+            <a:prstDash val="solid"/>
+          </a:ln>
+        </p:spPr>
+        <p:txBody>
+          <a:bodyPr/>
+          <a:lstStyle/>
+          <a:p>
+            <a:endParaRPr/>
+          </a:p>
+        </p:txBody>
+      </p:sp>
+      <p:sp>
+        <p:nvSpPr>
+          <p:cNvPr id="25" name="Shape 22">
+            <a:extLst>
+              <a:ext uri="{FF2B5EF4-FFF2-40B4-BE49-F238E27FC236}">
+                <a16:creationId xmlns:a16="http://schemas.microsoft.com/office/drawing/2014/main" id="{FAD82CE1-305C-4565-A1FE-D051AE2156E0}"/>
+              </a:ext>
+            </a:extLst>
+          </p:cNvPr>
+          <p:cNvSpPr>
+            <a:spLocks noGrp="1"/>
+          </p:cNvSpPr>
+          <p:nvPr/>
+        </p:nvSpPr>
+        <p:spPr>
+          <a:xfrm>
+            <a:off x="7534656" y="4526280"/>
+            <a:ext cx="4096512" cy="484632"/>
+          </a:xfrm>
+          <a:prstGeom prst="roundRect">
+            <a:avLst>
+              <a:gd name="adj" fmla="val 15094"/>
+            </a:avLst>
+          </a:prstGeom>
+          <a:solidFill>
+            <a:srgbClr val="12452B">
+              <a:alpha val="90000"/>
+            </a:srgbClr>
+          </a:solidFill>
+          <a:ln w="15875">
+            <a:solidFill>
+              <a:srgbClr val="C89C40"/>
+            </a:solidFill>
+            <a:prstDash val="solid"/>
+          </a:ln>
+          <a:effectLst>
+            <a:outerShdw blurRad="177800" dist="38100" dir="5400000" algn="bl" rotWithShape="0">
+              <a:srgbClr val="000000">
+                <a:alpha val="45000"/>
+              </a:srgbClr>
+            </a:outerShdw>
+          </a:effectLst>
+        </p:spPr>
+        <p:txBody>
+          <a:bodyPr/>
+          <a:lstStyle/>
+          <a:p>
+            <a:endParaRPr/>
+          </a:p>
+        </p:txBody>
+      </p:sp>
+      <p:sp>
+        <p:nvSpPr>
+          <p:cNvPr id="26" name="Text 23">
+            <a:extLst>
+              <a:ext uri="{FF2B5EF4-FFF2-40B4-BE49-F238E27FC236}">
+                <a16:creationId xmlns:a16="http://schemas.microsoft.com/office/drawing/2014/main" id="{358CC28A-4F81-47DF-8E77-5628B5CD7532}"/>
+              </a:ext>
+            </a:extLst>
+          </p:cNvPr>
+          <p:cNvSpPr>
+            <a:spLocks noGrp="1"/>
+          </p:cNvSpPr>
+          <p:nvPr/>
+        </p:nvSpPr>
+        <p:spPr>
+          <a:xfrm>
+            <a:off x="7717536" y="4581144"/>
+            <a:ext cx="1737360" cy="365760"/>
+          </a:xfrm>
+          <a:prstGeom prst="rect">
+            <a:avLst/>
+          </a:prstGeom>
+          <a:noFill/>
+        </p:spPr>
+        <p:txBody>
+          <a:bodyPr wrap="square" lIns="0" tIns="0" rIns="0" bIns="0" anchor="ctr"/>
+          <a:lstStyle/>
+          <a:p>
+            <a:pPr marL="0" indent="0">
+              <a:buNone/>
+            </a:pPr>
+            <a:r>
+              <a:rPr sz="1900" b="1">
+                <a:solidFill>
+                  <a:srgbClr val="F5CE76"/>
+                </a:solidFill>
+                <a:latin typeface="Cambria"/>
+                <a:ea typeface="Cambria"/>
+                <a:cs typeface="Cambria"/>
+              </a:rPr>
+              <a:t>12</a:t>
+            </a:r>
+            <a:r>
+              <a:rPr sz="1100" b="0">
+                <a:solidFill>
+                  <a:srgbClr val="F5CE76"/>
+                </a:solidFill>
+                <a:latin typeface="Cambria"/>
+                <a:ea typeface="Cambria"/>
+                <a:cs typeface="Cambria"/>
+              </a:rPr>
+              <a:t> міс</a:t>
+            </a:r>
+            <a:endParaRPr sz="1900"/>
+          </a:p>
+        </p:txBody>
+      </p:sp>
+      <p:sp>
+        <p:nvSpPr>
+          <p:cNvPr id="27" name="Text 24">
+            <a:extLst>
+              <a:ext uri="{FF2B5EF4-FFF2-40B4-BE49-F238E27FC236}">
+                <a16:creationId xmlns:a16="http://schemas.microsoft.com/office/drawing/2014/main" id="{3FCE24DD-1F3F-42BD-8089-4BCD25EBA58A}"/>
+              </a:ext>
+            </a:extLst>
+          </p:cNvPr>
+          <p:cNvSpPr>
+            <a:spLocks noGrp="1"/>
+          </p:cNvSpPr>
+          <p:nvPr/>
+        </p:nvSpPr>
+        <p:spPr>
+          <a:xfrm>
+            <a:off x="9418320" y="4581144"/>
+            <a:ext cx="2057400" cy="365760"/>
+          </a:xfrm>
+          <a:prstGeom prst="rect">
+            <a:avLst/>
+          </a:prstGeom>
+          <a:noFill/>
+        </p:spPr>
+        <p:txBody>
+          <a:bodyPr wrap="square" lIns="0" tIns="0" rIns="0" bIns="0" anchor="ctr"/>
+          <a:lstStyle/>
+          <a:p>
+            <a:pPr marL="0" indent="0" algn="r">
+              <a:buNone/>
+            </a:pPr>
+            <a:r>
+              <a:rPr sz="1050">
+                <a:solidFill>
+                  <a:srgbClr val="FCF9F0"/>
+                </a:solidFill>
+                <a:latin typeface="Calibri"/>
+                <a:ea typeface="Calibri"/>
+                <a:cs typeface="Calibri"/>
+              </a:rPr>
+              <a:t>термін придатності</a:t>
+            </a:r>
+            <a:endParaRPr sz="1050"/>
+          </a:p>
+        </p:txBody>
+      </p:sp>
+      <p:sp>
+        <p:nvSpPr>
+          <p:cNvPr id="28" name="Shape 25">
+            <a:extLst>
+              <a:ext uri="{FF2B5EF4-FFF2-40B4-BE49-F238E27FC236}">
+                <a16:creationId xmlns:a16="http://schemas.microsoft.com/office/drawing/2014/main" id="{89975636-2973-43EB-8284-82876E89595D}"/>
+              </a:ext>
+            </a:extLst>
+          </p:cNvPr>
+          <p:cNvSpPr>
+            <a:spLocks noGrp="1"/>
+          </p:cNvSpPr>
+          <p:nvPr/>
+        </p:nvSpPr>
+        <p:spPr>
+          <a:xfrm>
+            <a:off x="7534656" y="5093208"/>
+            <a:ext cx="4096512" cy="484632"/>
+          </a:xfrm>
+          <a:prstGeom prst="roundRect">
+            <a:avLst>
+              <a:gd name="adj" fmla="val 15094"/>
+            </a:avLst>
+          </a:prstGeom>
+          <a:solidFill>
+            <a:srgbClr val="12452B">
+              <a:alpha val="90000"/>
+            </a:srgbClr>
+          </a:solidFill>
+          <a:ln w="15875">
+            <a:solidFill>
+              <a:srgbClr val="C89C40"/>
+            </a:solidFill>
+            <a:prstDash val="solid"/>
+          </a:ln>
+          <a:effectLst>
+            <a:outerShdw blurRad="177800" dist="38100" dir="5400000" algn="bl" rotWithShape="0">
+              <a:srgbClr val="000000">
+                <a:alpha val="45000"/>
+              </a:srgbClr>
+            </a:outerShdw>
+          </a:effectLst>
+        </p:spPr>
+        <p:txBody>
+          <a:bodyPr/>
+          <a:lstStyle/>
+          <a:p>
+            <a:endParaRPr/>
+          </a:p>
+        </p:txBody>
+      </p:sp>
+      <p:sp>
+        <p:nvSpPr>
+          <p:cNvPr id="29" name="Text 26">
+            <a:extLst>
+              <a:ext uri="{FF2B5EF4-FFF2-40B4-BE49-F238E27FC236}">
+                <a16:creationId xmlns:a16="http://schemas.microsoft.com/office/drawing/2014/main" id="{A645AB62-8A4D-4512-8F74-DE418179E43B}"/>
+              </a:ext>
+            </a:extLst>
+          </p:cNvPr>
+          <p:cNvSpPr>
+            <a:spLocks noGrp="1"/>
+          </p:cNvSpPr>
+          <p:nvPr/>
+        </p:nvSpPr>
+        <p:spPr>
+          <a:xfrm>
+            <a:off x="7717536" y="5148072"/>
+            <a:ext cx="1737360" cy="365760"/>
+          </a:xfrm>
+          <a:prstGeom prst="rect">
+            <a:avLst/>
+          </a:prstGeom>
+          <a:noFill/>
+        </p:spPr>
+        <p:txBody>
+          <a:bodyPr wrap="square" lIns="0" tIns="0" rIns="0" bIns="0" anchor="ctr"/>
+          <a:lstStyle/>
+          <a:p>
+            <a:pPr marL="0" indent="0">
+              <a:buNone/>
+            </a:pPr>
+            <a:r>
+              <a:rPr sz="1900" b="1">
+                <a:solidFill>
+                  <a:srgbClr val="F5CE76"/>
+                </a:solidFill>
+                <a:latin typeface="Cambria"/>
+                <a:ea typeface="Cambria"/>
+                <a:cs typeface="Cambria"/>
+              </a:rPr>
+              <a:t>90</a:t>
+            </a:r>
+            <a:r>
+              <a:rPr sz="1100">
+                <a:solidFill>
+                  <a:srgbClr val="F5CE76"/>
+                </a:solidFill>
+                <a:latin typeface="Cambria"/>
+                <a:ea typeface="Cambria"/>
+                <a:cs typeface="Cambria"/>
+              </a:rPr>
+              <a:t> сек</a:t>
+            </a:r>
+            <a:endParaRPr sz="1900"/>
+          </a:p>
+        </p:txBody>
+      </p:sp>
+      <p:sp>
+        <p:nvSpPr>
+          <p:cNvPr id="30" name="Text 27">
+            <a:extLst>
+              <a:ext uri="{FF2B5EF4-FFF2-40B4-BE49-F238E27FC236}">
+                <a16:creationId xmlns:a16="http://schemas.microsoft.com/office/drawing/2014/main" id="{4117B712-25E2-4520-9FD2-EBDF52F2E339}"/>
+              </a:ext>
+            </a:extLst>
+          </p:cNvPr>
+          <p:cNvSpPr>
+            <a:spLocks noGrp="1"/>
+          </p:cNvSpPr>
+          <p:nvPr/>
+        </p:nvSpPr>
+        <p:spPr>
+          <a:xfrm>
+            <a:off x="9418320" y="5148072"/>
+            <a:ext cx="2057400" cy="365760"/>
+          </a:xfrm>
+          <a:prstGeom prst="rect">
+            <a:avLst/>
+          </a:prstGeom>
+          <a:noFill/>
+        </p:spPr>
+        <p:txBody>
+          <a:bodyPr wrap="square" lIns="0" tIns="0" rIns="0" bIns="0" anchor="ctr"/>
+          <a:lstStyle/>
+          <a:p>
+            <a:pPr marL="0" indent="0" algn="r">
+              <a:buNone/>
+            </a:pPr>
+            <a:r>
+              <a:rPr sz="1050">
+                <a:solidFill>
+                  <a:srgbClr val="FCF9F0"/>
+                </a:solidFill>
+                <a:latin typeface="Calibri"/>
+                <a:ea typeface="Calibri"/>
+                <a:cs typeface="Calibri"/>
+              </a:rPr>
+              <a:t>розігрів у мікрохвильовці</a:t>
+            </a:r>
+            <a:endParaRPr sz="1050"/>
+          </a:p>
+        </p:txBody>
+      </p:sp>
+      <p:sp>
+        <p:nvSpPr>
+          <p:cNvPr id="31" name="Shape 28">
+            <a:extLst>
+              <a:ext uri="{FF2B5EF4-FFF2-40B4-BE49-F238E27FC236}">
+                <a16:creationId xmlns:a16="http://schemas.microsoft.com/office/drawing/2014/main" id="{E9455139-65F1-448B-8A7C-86FFA827F351}"/>
+              </a:ext>
+            </a:extLst>
+          </p:cNvPr>
+          <p:cNvSpPr>
+            <a:spLocks noGrp="1"/>
+          </p:cNvSpPr>
+          <p:nvPr/>
+        </p:nvSpPr>
+        <p:spPr>
+          <a:xfrm>
+            <a:off x="7534656" y="5660136"/>
+            <a:ext cx="4096512" cy="484632"/>
+          </a:xfrm>
+          <a:prstGeom prst="roundRect">
+            <a:avLst>
+              <a:gd name="adj" fmla="val 15094"/>
+            </a:avLst>
+          </a:prstGeom>
+          <a:solidFill>
+            <a:srgbClr val="12452B">
+              <a:alpha val="90000"/>
+            </a:srgbClr>
+          </a:solidFill>
+          <a:ln w="15875">
+            <a:solidFill>
+              <a:srgbClr val="C89C40"/>
+            </a:solidFill>
+            <a:prstDash val="solid"/>
+          </a:ln>
+          <a:effectLst>
+            <a:outerShdw blurRad="177800" dist="38100" dir="5400000" algn="bl" rotWithShape="0">
+              <a:srgbClr val="000000">
+                <a:alpha val="45000"/>
+              </a:srgbClr>
+            </a:outerShdw>
+          </a:effectLst>
+        </p:spPr>
+        <p:txBody>
+          <a:bodyPr/>
+          <a:lstStyle/>
+          <a:p>
+            <a:endParaRPr/>
+          </a:p>
+        </p:txBody>
+      </p:sp>
+      <p:sp>
+        <p:nvSpPr>
+          <p:cNvPr id="32" name="Text 29">
+            <a:extLst>
+              <a:ext uri="{FF2B5EF4-FFF2-40B4-BE49-F238E27FC236}">
+                <a16:creationId xmlns:a16="http://schemas.microsoft.com/office/drawing/2014/main" id="{D40C00FA-3D9E-4C88-BA29-ECBF4916B185}"/>
+              </a:ext>
+            </a:extLst>
+          </p:cNvPr>
+          <p:cNvSpPr>
+            <a:spLocks noGrp="1"/>
+          </p:cNvSpPr>
+          <p:nvPr/>
+        </p:nvSpPr>
+        <p:spPr>
+          <a:xfrm>
+            <a:off x="7717536" y="5715000"/>
+            <a:ext cx="1737360" cy="365760"/>
+          </a:xfrm>
+          <a:prstGeom prst="rect">
+            <a:avLst/>
+          </a:prstGeom>
+          <a:noFill/>
+        </p:spPr>
+        <p:txBody>
+          <a:bodyPr wrap="square" lIns="0" tIns="0" rIns="0" bIns="0" anchor="ctr"/>
+          <a:lstStyle/>
+          <a:p>
+            <a:pPr marL="0" indent="0">
+              <a:buNone/>
+            </a:pPr>
+            <a:r>
+              <a:rPr sz="1900" b="1">
+                <a:solidFill>
+                  <a:srgbClr val="F5CE76"/>
+                </a:solidFill>
+                <a:latin typeface="Cambria"/>
+                <a:ea typeface="Cambria"/>
+                <a:cs typeface="Cambria"/>
+              </a:rPr>
+              <a:t>200</a:t>
+            </a:r>
+            <a:r>
+              <a:rPr sz="1100">
+                <a:solidFill>
+                  <a:srgbClr val="F5CE76"/>
+                </a:solidFill>
+                <a:latin typeface="Cambria"/>
+                <a:ea typeface="Cambria"/>
+                <a:cs typeface="Cambria"/>
+              </a:rPr>
+              <a:t> ctn</a:t>
+            </a:r>
+            <a:endParaRPr sz="1900"/>
+          </a:p>
+        </p:txBody>
+      </p:sp>
+      <p:sp>
+        <p:nvSpPr>
+          <p:cNvPr id="33" name="Text 30">
+            <a:extLst>
+              <a:ext uri="{FF2B5EF4-FFF2-40B4-BE49-F238E27FC236}">
+                <a16:creationId xmlns:a16="http://schemas.microsoft.com/office/drawing/2014/main" id="{5324D476-C6D4-42C7-BAFD-4CF0E84F17CB}"/>
+              </a:ext>
+            </a:extLst>
+          </p:cNvPr>
+          <p:cNvSpPr>
+            <a:spLocks noGrp="1"/>
+          </p:cNvSpPr>
+          <p:nvPr/>
+        </p:nvSpPr>
+        <p:spPr>
+          <a:xfrm>
+            <a:off x="9418320" y="5715000"/>
+            <a:ext cx="2057400" cy="365760"/>
+          </a:xfrm>
+          <a:prstGeom prst="rect">
+            <a:avLst/>
+          </a:prstGeom>
+          <a:noFill/>
+        </p:spPr>
+        <p:txBody>
+          <a:bodyPr wrap="square" lIns="0" tIns="0" rIns="0" bIns="0" anchor="ctr"/>
+          <a:lstStyle/>
+          <a:p>
+            <a:pPr marL="0" indent="0" algn="r">
+              <a:buNone/>
+            </a:pPr>
+            <a:r>
+              <a:rPr sz="1050">
+                <a:solidFill>
+                  <a:srgbClr val="FCF9F0"/>
+                </a:solidFill>
+                <a:latin typeface="Calibri"/>
+                <a:ea typeface="Calibri"/>
+                <a:cs typeface="Calibri"/>
+              </a:rPr>
+              <a:t>мінімальне замовлення, SKU</a:t>
+            </a:r>
+            <a:endParaRPr sz="1050"/>
+          </a:p>
+        </p:txBody>
+      </p:sp>
+      <p:sp>
+        <p:nvSpPr>
+          <p:cNvPr id="34" name="Text 31">
+            <a:extLst>
+              <a:ext uri="{FF2B5EF4-FFF2-40B4-BE49-F238E27FC236}">
+                <a16:creationId xmlns:a16="http://schemas.microsoft.com/office/drawing/2014/main" id="{E7A215B1-AD40-45DA-BB18-23E7B159186F}"/>
+              </a:ext>
+            </a:extLst>
+          </p:cNvPr>
+          <p:cNvSpPr>
+            <a:spLocks noGrp="1"/>
+          </p:cNvSpPr>
+          <p:nvPr/>
+        </p:nvSpPr>
+        <p:spPr>
+          <a:xfrm>
+            <a:off x="566928" y="6355080"/>
+            <a:ext cx="11064240" cy="274320"/>
+          </a:xfrm>
+          <a:prstGeom prst="rect">
+            <a:avLst/>
+          </a:prstGeom>
+          <a:noFill/>
+        </p:spPr>
+        <p:txBody>
+          <a:bodyPr wrap="square" lIns="0" tIns="0" rIns="0" bIns="0" anchor="ctr"/>
+          <a:lstStyle/>
+          <a:p>
+            <a:pPr marL="0" indent="0">
+              <a:buNone/>
+            </a:pPr>
+            <a:r>
+              <a:rPr sz="900">
+                <a:solidFill>
+                  <a:srgbClr val="C3D7BF"/>
+                </a:solidFill>
+                <a:latin typeface="Calibri"/>
+                <a:ea typeface="Calibri"/>
+                <a:cs typeface="Calibri"/>
+              </a:rPr>
+              <a:t>Джерело: Quotation One's International Co., Ltd. (бренд KBROS), FOB Busan, чинна до 31.12.2026; фото продукції — з комерційної пропозиції постачальника.</a:t>
+            </a:r>
+            <a:endParaRPr sz="900"/>
+          </a:p>
+        </p:txBody>
+      </p:sp>
+    </p:spTree>
+    <p:extLst>
+      <p:ext uri="{BB962C8B-B14F-4D97-AF65-F5344CB8AC3E}">
+        <p14:creationId xmlns:p14="http://schemas.microsoft.com/office/powerpoint/2010/main" val="973573466"/>
+      </p:ext>
+    </p:extLst>
+  </p:cSld>
+  <p:clrMapOvr>
+    <a:masterClrMapping/>
+  </p:clrMapOvr>
+</p:sld>
+</file>
+
+<file path=ppt/slides/slide15.xml><?xml version="1.0" encoding="utf-8"?>
+<p:sld xmlns:a="http://schemas.openxmlformats.org/drawingml/2006/main" xmlns:r="http://schemas.openxmlformats.org/officeDocument/2006/relationships" xmlns:p="http://schemas.openxmlformats.org/presentationml/2006/main">
+  <p:cSld>
+    <p:bg>
+      <p:bgPr>
+        <a:blipFill rotWithShape="1">
+          <a:blip r:embed="rId3">
+            <a:lum/>
+          </a:blip>
+          <a:srcRect/>
+          <a:stretch>
+            <a:fillRect/>
+          </a:stretch>
+        </a:blipFill>
+        <a:effectLst/>
+      </p:bgPr>
+    </p:bg>
+    <p:spTree>
+      <p:nvGrpSpPr>
+        <p:cNvPr id="1" name=""/>
+        <p:cNvGrpSpPr/>
+        <p:nvPr/>
+      </p:nvGrpSpPr>
+      <p:grpSpPr>
+        <a:xfrm>
+          <a:off x="0" y="0"/>
+          <a:ext cx="0" cy="0"/>
+          <a:chOff x="0" y="0"/>
+          <a:chExt cx="0" cy="0"/>
+        </a:xfrm>
+      </p:grpSpPr>
+      <p:sp>
+        <p:nvSpPr>
+          <p:cNvPr id="2" name="Text 0">
+            <a:extLst>
+              <a:ext uri="{FF2B5EF4-FFF2-40B4-BE49-F238E27FC236}">
+                <a16:creationId xmlns:a16="http://schemas.microsoft.com/office/drawing/2014/main" id="{C9A6D18B-A944-45D2-8E87-358191F7E4AF}"/>
+              </a:ext>
+            </a:extLst>
+          </p:cNvPr>
+          <p:cNvSpPr>
+            <a:spLocks noGrp="1"/>
+          </p:cNvSpPr>
+          <p:nvPr/>
+        </p:nvSpPr>
+        <p:spPr>
+          <a:xfrm>
+            <a:off x="566928" y="274320"/>
+            <a:ext cx="8229600" cy="237744"/>
+          </a:xfrm>
+          <a:prstGeom prst="rect">
+            <a:avLst/>
+          </a:prstGeom>
+          <a:noFill/>
+        </p:spPr>
+        <p:txBody>
+          <a:bodyPr wrap="square" lIns="0" tIns="0" rIns="0" bIns="0" anchor="ctr"/>
+          <a:lstStyle/>
+          <a:p>
+            <a:pPr marL="0" indent="0">
+              <a:buNone/>
+            </a:pPr>
+            <a:r>
+              <a:rPr sz="1100" b="1" spc="260">
+                <a:solidFill>
+                  <a:srgbClr val="F0938D"/>
+                </a:solidFill>
+                <a:latin typeface="Calibri"/>
+                <a:ea typeface="Calibri"/>
+                <a:cs typeface="Calibri"/>
+              </a:rPr>
+              <a:t>ПОСТАЧАЛЬНИК 3  ·  KBROS / ONE'S INTERNATIONAL</a:t>
+            </a:r>
+            <a:endParaRPr sz="1100"/>
+          </a:p>
+        </p:txBody>
+      </p:sp>
+      <p:sp>
+        <p:nvSpPr>
+          <p:cNvPr id="3" name="Text 1">
+            <a:extLst>
+              <a:ext uri="{FF2B5EF4-FFF2-40B4-BE49-F238E27FC236}">
+                <a16:creationId xmlns:a16="http://schemas.microsoft.com/office/drawing/2014/main" id="{0B4F6B36-12AD-4E80-B246-044D6B11275B}"/>
+              </a:ext>
+            </a:extLst>
+          </p:cNvPr>
+          <p:cNvSpPr>
+            <a:spLocks noGrp="1"/>
+          </p:cNvSpPr>
+          <p:nvPr/>
+        </p:nvSpPr>
+        <p:spPr>
+          <a:xfrm>
+            <a:off x="566928" y="548640"/>
+            <a:ext cx="11064240" cy="548640"/>
+          </a:xfrm>
+          <a:prstGeom prst="rect">
+            <a:avLst/>
+          </a:prstGeom>
+          <a:noFill/>
+        </p:spPr>
+        <p:txBody>
+          <a:bodyPr wrap="square" lIns="0" tIns="0" rIns="0" bIns="0" anchor="ctr"/>
+          <a:lstStyle/>
+          <a:p>
+            <a:pPr marL="0" indent="0">
+              <a:buNone/>
+            </a:pPr>
+            <a:r>
+              <a:rPr sz="3100" b="1">
+                <a:solidFill>
+                  <a:srgbClr val="FFFFFF"/>
+                </a:solidFill>
+                <a:latin typeface="Cambria"/>
+                <a:ea typeface="Cambria"/>
+                <a:cs typeface="Cambria"/>
+              </a:rPr>
+              <a:t>KBROS Fried Rice 12 × 200 г — собівартість</a:t>
+            </a:r>
+            <a:endParaRPr sz="3100"/>
+          </a:p>
+        </p:txBody>
+      </p:sp>
+      <p:sp>
+        <p:nvSpPr>
+          <p:cNvPr id="4" name="Text 2">
+            <a:extLst>
+              <a:ext uri="{FF2B5EF4-FFF2-40B4-BE49-F238E27FC236}">
+                <a16:creationId xmlns:a16="http://schemas.microsoft.com/office/drawing/2014/main" id="{CB3E3610-3F77-4808-A291-CC88332A673B}"/>
+              </a:ext>
+            </a:extLst>
+          </p:cNvPr>
+          <p:cNvSpPr>
+            <a:spLocks noGrp="1"/>
+          </p:cNvSpPr>
+          <p:nvPr/>
+        </p:nvSpPr>
+        <p:spPr>
+          <a:xfrm>
+            <a:off x="585216" y="1115568"/>
+            <a:ext cx="11064240" cy="274320"/>
+          </a:xfrm>
+          <a:prstGeom prst="rect">
+            <a:avLst/>
+          </a:prstGeom>
+          <a:noFill/>
+        </p:spPr>
+        <p:txBody>
+          <a:bodyPr wrap="square" lIns="0" tIns="0" rIns="0" bIns="0" anchor="ctr"/>
+          <a:lstStyle/>
+          <a:p>
+            <a:pPr marL="0" indent="0">
+              <a:buNone/>
+            </a:pPr>
+            <a:r>
+              <a:rPr sz="1250" i="1">
+                <a:solidFill>
+                  <a:srgbClr val="D2E4CE"/>
+                </a:solidFill>
+                <a:latin typeface="Calibri"/>
+                <a:ea typeface="Calibri"/>
+                <a:cs typeface="Calibri"/>
+              </a:rPr>
+              <a:t>Постачання на європалетах, FOB Busan · 20′ FCL — 11 палет · 40′ FCL — 25 палет</a:t>
+            </a:r>
+            <a:endParaRPr sz="1250"/>
+          </a:p>
+        </p:txBody>
+      </p:sp>
+      <p:sp>
+        <p:nvSpPr>
+          <p:cNvPr id="5" name="Shape 3">
+            <a:extLst>
+              <a:ext uri="{FF2B5EF4-FFF2-40B4-BE49-F238E27FC236}">
+                <a16:creationId xmlns:a16="http://schemas.microsoft.com/office/drawing/2014/main" id="{8777A169-A18D-4352-B969-19E1FAD489B5}"/>
+              </a:ext>
+            </a:extLst>
+          </p:cNvPr>
+          <p:cNvSpPr>
+            <a:spLocks noGrp="1"/>
+          </p:cNvSpPr>
+          <p:nvPr/>
+        </p:nvSpPr>
+        <p:spPr>
+          <a:xfrm>
+            <a:off x="566928" y="1536192"/>
+            <a:ext cx="2706624" cy="4626864"/>
+          </a:xfrm>
+          <a:prstGeom prst="roundRect">
+            <a:avLst>
+              <a:gd name="adj" fmla="val 4054"/>
+            </a:avLst>
+          </a:prstGeom>
+          <a:solidFill>
+            <a:srgbClr val="12452B">
+              <a:alpha val="90000"/>
+            </a:srgbClr>
+          </a:solidFill>
+          <a:ln w="15875">
+            <a:solidFill>
+              <a:srgbClr val="C89C40"/>
+            </a:solidFill>
+            <a:prstDash val="solid"/>
+          </a:ln>
+          <a:effectLst>
+            <a:outerShdw blurRad="177800" dist="38100" dir="5400000" algn="bl" rotWithShape="0">
+              <a:srgbClr val="000000">
+                <a:alpha val="45000"/>
+              </a:srgbClr>
+            </a:outerShdw>
+          </a:effectLst>
+        </p:spPr>
+        <p:txBody>
+          <a:bodyPr/>
+          <a:lstStyle/>
+          <a:p>
+            <a:endParaRPr/>
+          </a:p>
+        </p:txBody>
+      </p:sp>
+      <p:pic>
+        <p:nvPicPr>
+          <p:cNvPr id="133" name="Picture 132" descr="card_kimchi.jpg"/>
+          <p:cNvPicPr>
+            <a:picLocks noChangeAspect="1"/>
+          </p:cNvPicPr>
+          <p:nvPr/>
+        </p:nvPicPr>
+        <p:blipFill>
+          <a:blip r:embed="rId2"/>
+          <a:stretch>
+            <a:fillRect/>
+          </a:stretch>
+        </p:blipFill>
+        <p:spPr>
+          <a:xfrm>
+            <a:off x="749808" y="1700784"/>
+            <a:ext cx="2340864" cy="1810512"/>
+          </a:xfrm>
+          <a:prstGeom prst="roundRect">
+            <a:avLst/>
+          </a:prstGeom>
+        </p:spPr>
+      </p:pic>
+      <p:sp>
+        <p:nvSpPr>
+          <p:cNvPr id="7" name="Shape 4">
+            <a:extLst>
+              <a:ext uri="{FF2B5EF4-FFF2-40B4-BE49-F238E27FC236}">
+                <a16:creationId xmlns:a16="http://schemas.microsoft.com/office/drawing/2014/main" id="{87232188-1DCC-4781-85AB-61CF6976C5DA}"/>
+              </a:ext>
+            </a:extLst>
+          </p:cNvPr>
+          <p:cNvSpPr>
+            <a:spLocks noGrp="1"/>
+          </p:cNvSpPr>
+          <p:nvPr/>
+        </p:nvSpPr>
+        <p:spPr>
+          <a:xfrm>
+            <a:off x="749808" y="1700784"/>
+            <a:ext cx="2340864" cy="1810512"/>
+          </a:xfrm>
+          <a:prstGeom prst="rect">
+            <a:avLst/>
+          </a:prstGeom>
+          <a:ln w="12700">
+            <a:solidFill>
+              <a:srgbClr val="C89C40"/>
+            </a:solidFill>
+            <a:prstDash val="solid"/>
+          </a:ln>
+        </p:spPr>
+        <p:txBody>
+          <a:bodyPr/>
+          <a:lstStyle/>
+          <a:p>
+            <a:endParaRPr/>
+          </a:p>
+        </p:txBody>
+      </p:sp>
+      <p:sp>
+        <p:nvSpPr>
+          <p:cNvPr id="8" name="Shape 5">
+            <a:extLst>
+              <a:ext uri="{FF2B5EF4-FFF2-40B4-BE49-F238E27FC236}">
+                <a16:creationId xmlns:a16="http://schemas.microsoft.com/office/drawing/2014/main" id="{EAA2BFF8-08EA-4127-88A8-7020E461BE87}"/>
+              </a:ext>
+            </a:extLst>
+          </p:cNvPr>
+          <p:cNvSpPr>
+            <a:spLocks noGrp="1"/>
+          </p:cNvSpPr>
+          <p:nvPr/>
+        </p:nvSpPr>
+        <p:spPr>
+          <a:xfrm>
+            <a:off x="749808" y="3611880"/>
+            <a:ext cx="1417320" cy="237744"/>
+          </a:xfrm>
+          <a:prstGeom prst="roundRect">
+            <a:avLst>
+              <a:gd name="adj" fmla="val 23077"/>
+            </a:avLst>
+          </a:prstGeom>
+          <a:solidFill>
+            <a:srgbClr val="B3312D"/>
+          </a:solidFill>
+          <a:ln w="6350">
+            <a:solidFill>
+              <a:srgbClr val="C89C40"/>
+            </a:solidFill>
+            <a:prstDash val="solid"/>
+          </a:ln>
+        </p:spPr>
+        <p:txBody>
+          <a:bodyPr/>
+          <a:lstStyle/>
+          <a:p>
+            <a:endParaRPr/>
+          </a:p>
+        </p:txBody>
+      </p:sp>
+      <p:sp>
+        <p:nvSpPr>
+          <p:cNvPr id="9" name="Text 6">
+            <a:extLst>
+              <a:ext uri="{FF2B5EF4-FFF2-40B4-BE49-F238E27FC236}">
+                <a16:creationId xmlns:a16="http://schemas.microsoft.com/office/drawing/2014/main" id="{E9C00E7C-A4B5-4F70-BF95-2F612003EAA9}"/>
+              </a:ext>
+            </a:extLst>
+          </p:cNvPr>
+          <p:cNvSpPr>
+            <a:spLocks noGrp="1"/>
+          </p:cNvSpPr>
+          <p:nvPr/>
+        </p:nvSpPr>
+        <p:spPr>
+          <a:xfrm>
+            <a:off x="749808" y="3621024"/>
+            <a:ext cx="1417320" cy="219456"/>
+          </a:xfrm>
+          <a:prstGeom prst="rect">
+            <a:avLst/>
+          </a:prstGeom>
+          <a:noFill/>
+        </p:spPr>
+        <p:txBody>
+          <a:bodyPr wrap="square" lIns="0" tIns="0" rIns="0" bIns="0" anchor="ctr"/>
+          <a:lstStyle/>
+          <a:p>
+            <a:pPr marL="0" indent="0" algn="ctr">
+              <a:buNone/>
+            </a:pPr>
+            <a:r>
+              <a:rPr sz="850" b="1" spc="60">
+                <a:solidFill>
+                  <a:srgbClr val="FFFFFF"/>
+                </a:solidFill>
+                <a:latin typeface="Calibri"/>
+                <a:ea typeface="Calibri"/>
+                <a:cs typeface="Calibri"/>
+              </a:rPr>
+              <a:t>ЛОТОК 200 Г · AMBIENT</a:t>
+            </a:r>
+            <a:endParaRPr sz="850"/>
+          </a:p>
+        </p:txBody>
+      </p:sp>
+      <p:sp>
+        <p:nvSpPr>
+          <p:cNvPr id="10" name="Text 7">
+            <a:extLst>
+              <a:ext uri="{FF2B5EF4-FFF2-40B4-BE49-F238E27FC236}">
+                <a16:creationId xmlns:a16="http://schemas.microsoft.com/office/drawing/2014/main" id="{955875F5-C8AA-4604-BC2B-C7F2B6B61192}"/>
+              </a:ext>
+            </a:extLst>
+          </p:cNvPr>
+          <p:cNvSpPr>
+            <a:spLocks noGrp="1"/>
+          </p:cNvSpPr>
+          <p:nvPr/>
+        </p:nvSpPr>
+        <p:spPr>
+          <a:xfrm>
+            <a:off x="749808" y="3931920"/>
+            <a:ext cx="2340864" cy="548640"/>
+          </a:xfrm>
+          <a:prstGeom prst="rect">
+            <a:avLst/>
+          </a:prstGeom>
+          <a:noFill/>
+        </p:spPr>
+        <p:txBody>
+          <a:bodyPr wrap="square" lIns="0" tIns="0" rIns="0" bIns="0" anchor="t"/>
+          <a:lstStyle/>
+          <a:p>
+            <a:pPr marL="0" indent="0">
+              <a:buNone/>
+            </a:pPr>
+            <a:r>
+              <a:rPr sz="1450" b="1">
+                <a:solidFill>
+                  <a:srgbClr val="FFFFFF"/>
+                </a:solidFill>
+                <a:latin typeface="Cambria"/>
+                <a:ea typeface="Cambria"/>
+                <a:cs typeface="Cambria"/>
+              </a:rPr>
+              <a:t>Kimchi Fried Rice</a:t>
+            </a:r>
+            <a:endParaRPr sz="1450"/>
+          </a:p>
+        </p:txBody>
+      </p:sp>
+      <p:sp>
+        <p:nvSpPr>
+          <p:cNvPr id="11" name="Text 8">
+            <a:extLst>
+              <a:ext uri="{FF2B5EF4-FFF2-40B4-BE49-F238E27FC236}">
+                <a16:creationId xmlns:a16="http://schemas.microsoft.com/office/drawing/2014/main" id="{CC304521-7003-41C9-A3DF-B606C354369E}"/>
+              </a:ext>
+            </a:extLst>
+          </p:cNvPr>
+          <p:cNvSpPr>
+            <a:spLocks noGrp="1"/>
+          </p:cNvSpPr>
+          <p:nvPr/>
+        </p:nvSpPr>
+        <p:spPr>
+          <a:xfrm>
+            <a:off x="749808" y="4498848"/>
+            <a:ext cx="2340864" cy="237744"/>
+          </a:xfrm>
+          <a:prstGeom prst="rect">
+            <a:avLst/>
+          </a:prstGeom>
+          <a:noFill/>
+        </p:spPr>
+        <p:txBody>
+          <a:bodyPr wrap="square" lIns="0" tIns="0" rIns="0" bIns="0" anchor="ctr"/>
+          <a:lstStyle/>
+          <a:p>
+            <a:pPr marL="0" indent="0">
+              <a:buNone/>
+            </a:pPr>
+            <a:r>
+              <a:rPr sz="1000">
+                <a:solidFill>
+                  <a:srgbClr val="D2E4CE"/>
+                </a:solidFill>
+                <a:latin typeface="Calibri"/>
+                <a:ea typeface="Calibri"/>
+                <a:cs typeface="Calibri"/>
+              </a:rPr>
+              <a:t>FOB $1,300 · </a:t>
+            </a:r>
+            <a:endParaRPr sz="1000"/>
+          </a:p>
+        </p:txBody>
+      </p:sp>
+      <p:sp>
+        <p:nvSpPr>
+          <p:cNvPr id="12" name="Shape 9">
+            <a:extLst>
+              <a:ext uri="{FF2B5EF4-FFF2-40B4-BE49-F238E27FC236}">
+                <a16:creationId xmlns:a16="http://schemas.microsoft.com/office/drawing/2014/main" id="{4A033679-0F16-416E-9BC4-280F6974334A}"/>
+              </a:ext>
+            </a:extLst>
+          </p:cNvPr>
+          <p:cNvSpPr>
+            <a:spLocks noGrp="1"/>
+          </p:cNvSpPr>
+          <p:nvPr/>
+        </p:nvSpPr>
+        <p:spPr>
+          <a:xfrm>
+            <a:off x="749808" y="4791456"/>
+            <a:ext cx="2340864" cy="1170432"/>
+          </a:xfrm>
+          <a:prstGeom prst="roundRect">
+            <a:avLst>
+              <a:gd name="adj" fmla="val 5469"/>
+            </a:avLst>
+          </a:prstGeom>
+          <a:solidFill>
+            <a:srgbClr val="1A5433">
+              <a:alpha val="92000"/>
+            </a:srgbClr>
+          </a:solidFill>
+          <a:ln w="9525">
+            <a:solidFill>
+              <a:srgbClr val="C89C40"/>
+            </a:solidFill>
+            <a:prstDash val="solid"/>
+          </a:ln>
+        </p:spPr>
+        <p:txBody>
+          <a:bodyPr/>
+          <a:lstStyle/>
+          <a:p>
+            <a:endParaRPr/>
+          </a:p>
+        </p:txBody>
+      </p:sp>
+      <p:sp>
+        <p:nvSpPr>
+          <p:cNvPr id="13" name="Text 10">
+            <a:extLst>
+              <a:ext uri="{FF2B5EF4-FFF2-40B4-BE49-F238E27FC236}">
+                <a16:creationId xmlns:a16="http://schemas.microsoft.com/office/drawing/2014/main" id="{C2BA45D7-6F03-4868-BDD2-44FC1BFF8AEA}"/>
+              </a:ext>
+            </a:extLst>
+          </p:cNvPr>
+          <p:cNvSpPr>
+            <a:spLocks noGrp="1"/>
+          </p:cNvSpPr>
+          <p:nvPr/>
+        </p:nvSpPr>
+        <p:spPr>
+          <a:xfrm>
+            <a:off x="859536" y="4855464"/>
+            <a:ext cx="2148840" cy="182880"/>
+          </a:xfrm>
+          <a:prstGeom prst="rect">
+            <a:avLst/>
+          </a:prstGeom>
+          <a:noFill/>
+        </p:spPr>
+        <p:txBody>
+          <a:bodyPr wrap="square" lIns="0" tIns="0" rIns="0" bIns="0" anchor="ctr"/>
+          <a:lstStyle/>
+          <a:p>
+            <a:pPr marL="0" indent="0">
+              <a:buNone/>
+            </a:pPr>
+            <a:r>
+              <a:rPr sz="750" b="1" spc="100">
+                <a:solidFill>
+                  <a:srgbClr val="F5CE76"/>
+                </a:solidFill>
+                <a:latin typeface="Calibri"/>
+                <a:ea typeface="Calibri"/>
+                <a:cs typeface="Calibri"/>
+              </a:rPr>
+              <a:t>СОБІВАРТІСТЬ, ЗА ЛОТОК</a:t>
+            </a:r>
+            <a:endParaRPr sz="750"/>
+          </a:p>
+        </p:txBody>
+      </p:sp>
+      <p:sp>
+        <p:nvSpPr>
+          <p:cNvPr id="14" name="Text 11">
+            <a:extLst>
+              <a:ext uri="{FF2B5EF4-FFF2-40B4-BE49-F238E27FC236}">
+                <a16:creationId xmlns:a16="http://schemas.microsoft.com/office/drawing/2014/main" id="{ED9F963D-2EFD-42F1-A3D8-955B0A886C4D}"/>
+              </a:ext>
+            </a:extLst>
+          </p:cNvPr>
+          <p:cNvSpPr>
+            <a:spLocks noGrp="1"/>
+          </p:cNvSpPr>
+          <p:nvPr/>
+        </p:nvSpPr>
+        <p:spPr>
+          <a:xfrm>
+            <a:off x="859536" y="5056632"/>
+            <a:ext cx="658368" cy="192024"/>
+          </a:xfrm>
+          <a:prstGeom prst="rect">
+            <a:avLst/>
+          </a:prstGeom>
+          <a:noFill/>
+        </p:spPr>
+        <p:txBody>
+          <a:bodyPr wrap="square" lIns="0" tIns="0" rIns="0" bIns="0" anchor="ctr"/>
+          <a:lstStyle/>
+          <a:p>
+            <a:pPr marL="0" indent="0">
+              <a:buNone/>
+            </a:pPr>
+            <a:r>
+              <a:rPr sz="900">
+                <a:solidFill>
+                  <a:srgbClr val="D2E4CE"/>
+                </a:solidFill>
+                <a:latin typeface="Calibri"/>
+                <a:ea typeface="Calibri"/>
+                <a:cs typeface="Calibri"/>
+              </a:rPr>
+              <a:t>20′ FCL</a:t>
+            </a:r>
+            <a:endParaRPr sz="900"/>
+          </a:p>
+        </p:txBody>
+      </p:sp>
+      <p:sp>
+        <p:nvSpPr>
+          <p:cNvPr id="15" name="Text 12">
+            <a:extLst>
+              <a:ext uri="{FF2B5EF4-FFF2-40B4-BE49-F238E27FC236}">
+                <a16:creationId xmlns:a16="http://schemas.microsoft.com/office/drawing/2014/main" id="{6844CDDA-23FC-437B-9119-7C16195CDFA0}"/>
+              </a:ext>
+            </a:extLst>
+          </p:cNvPr>
+          <p:cNvSpPr>
+            <a:spLocks noGrp="1"/>
+          </p:cNvSpPr>
+          <p:nvPr/>
+        </p:nvSpPr>
+        <p:spPr>
+          <a:xfrm>
+            <a:off x="1499616" y="5056632"/>
+            <a:ext cx="1508760" cy="192024"/>
+          </a:xfrm>
+          <a:prstGeom prst="rect">
+            <a:avLst/>
+          </a:prstGeom>
+          <a:noFill/>
+        </p:spPr>
+        <p:txBody>
+          <a:bodyPr wrap="square" lIns="0" tIns="0" rIns="0" bIns="0" anchor="ctr"/>
+          <a:lstStyle/>
+          <a:p>
+            <a:pPr marL="0" indent="0" algn="r">
+              <a:buNone/>
+            </a:pPr>
+            <a:r>
+              <a:rPr sz="950">
+                <a:solidFill>
+                  <a:srgbClr val="FCF9F0"/>
+                </a:solidFill>
+                <a:latin typeface="Calibri"/>
+                <a:ea typeface="Calibri"/>
+                <a:cs typeface="Calibri"/>
+              </a:rPr>
+              <a:t>$2,176 / 97,92 ₴</a:t>
+            </a:r>
+            <a:endParaRPr sz="950"/>
+          </a:p>
+        </p:txBody>
+      </p:sp>
+      <p:sp>
+        <p:nvSpPr>
+          <p:cNvPr id="16" name="Text 13">
+            <a:extLst>
+              <a:ext uri="{FF2B5EF4-FFF2-40B4-BE49-F238E27FC236}">
+                <a16:creationId xmlns:a16="http://schemas.microsoft.com/office/drawing/2014/main" id="{27DB5FDD-4BCF-480F-AC44-12CE6BC0A357}"/>
+              </a:ext>
+            </a:extLst>
+          </p:cNvPr>
+          <p:cNvSpPr>
+            <a:spLocks noGrp="1"/>
+          </p:cNvSpPr>
+          <p:nvPr/>
+        </p:nvSpPr>
+        <p:spPr>
+          <a:xfrm>
+            <a:off x="859536" y="5262372"/>
+            <a:ext cx="658368" cy="192024"/>
+          </a:xfrm>
+          <a:prstGeom prst="rect">
+            <a:avLst/>
+          </a:prstGeom>
+          <a:noFill/>
+        </p:spPr>
+        <p:txBody>
+          <a:bodyPr wrap="square" lIns="0" tIns="0" rIns="0" bIns="0" anchor="ctr"/>
+          <a:lstStyle/>
+          <a:p>
+            <a:pPr marL="0" indent="0">
+              <a:buNone/>
+            </a:pPr>
+            <a:r>
+              <a:rPr sz="900" b="1">
+                <a:solidFill>
+                  <a:srgbClr val="F5CE76"/>
+                </a:solidFill>
+                <a:latin typeface="Calibri"/>
+                <a:ea typeface="Calibri"/>
+                <a:cs typeface="Calibri"/>
+              </a:rPr>
+              <a:t>40′ FCL</a:t>
+            </a:r>
+            <a:endParaRPr sz="900"/>
+          </a:p>
+        </p:txBody>
+      </p:sp>
+      <p:sp>
+        <p:nvSpPr>
+          <p:cNvPr id="17" name="Text 14">
+            <a:extLst>
+              <a:ext uri="{FF2B5EF4-FFF2-40B4-BE49-F238E27FC236}">
+                <a16:creationId xmlns:a16="http://schemas.microsoft.com/office/drawing/2014/main" id="{582BA0A6-D97E-4819-8CA9-388C425BB098}"/>
+              </a:ext>
+            </a:extLst>
+          </p:cNvPr>
+          <p:cNvSpPr>
+            <a:spLocks noGrp="1"/>
+          </p:cNvSpPr>
+          <p:nvPr/>
+        </p:nvSpPr>
+        <p:spPr>
+          <a:xfrm>
+            <a:off x="1499616" y="5262372"/>
+            <a:ext cx="1508760" cy="192024"/>
+          </a:xfrm>
+          <a:prstGeom prst="rect">
+            <a:avLst/>
+          </a:prstGeom>
+          <a:noFill/>
+        </p:spPr>
+        <p:txBody>
+          <a:bodyPr wrap="square" lIns="0" tIns="0" rIns="0" bIns="0" anchor="ctr"/>
+          <a:lstStyle/>
+          <a:p>
+            <a:pPr marL="0" indent="0" algn="r">
+              <a:buNone/>
+            </a:pPr>
+            <a:r>
+              <a:rPr sz="950" b="1">
+                <a:solidFill>
+                  <a:srgbClr val="F5CE76"/>
+                </a:solidFill>
+                <a:latin typeface="Calibri"/>
+                <a:ea typeface="Calibri"/>
+                <a:cs typeface="Calibri"/>
+              </a:rPr>
+              <a:t>$1,960 / 88,18 ₴</a:t>
+            </a:r>
+            <a:endParaRPr sz="950"/>
+          </a:p>
+        </p:txBody>
+      </p:sp>
+      <p:sp>
+        <p:nvSpPr>
+          <p:cNvPr id="18" name="Text 15">
+            <a:extLst>
+              <a:ext uri="{FF2B5EF4-FFF2-40B4-BE49-F238E27FC236}">
+                <a16:creationId xmlns:a16="http://schemas.microsoft.com/office/drawing/2014/main" id="{744B828A-FAD0-48B0-A84B-5C4651E029AF}"/>
+              </a:ext>
+            </a:extLst>
+          </p:cNvPr>
+          <p:cNvSpPr>
+            <a:spLocks noGrp="1"/>
+          </p:cNvSpPr>
+          <p:nvPr/>
+        </p:nvSpPr>
+        <p:spPr>
+          <a:xfrm>
+            <a:off x="859536" y="5468112"/>
+            <a:ext cx="658368" cy="192024"/>
+          </a:xfrm>
+          <a:prstGeom prst="rect">
+            <a:avLst/>
+          </a:prstGeom>
+          <a:noFill/>
+        </p:spPr>
+        <p:txBody>
+          <a:bodyPr wrap="square" lIns="0" tIns="0" rIns="0" bIns="0" anchor="ctr"/>
+          <a:lstStyle/>
+          <a:p>
+            <a:pPr marL="0" indent="0">
+              <a:buNone/>
+            </a:pPr>
+            <a:r>
+              <a:rPr sz="900">
+                <a:solidFill>
+                  <a:srgbClr val="D2E4CE"/>
+                </a:solidFill>
+                <a:latin typeface="Calibri"/>
+                <a:ea typeface="Calibri"/>
+                <a:cs typeface="Calibri"/>
+              </a:rPr>
+              <a:t>10 палет</a:t>
+            </a:r>
+            <a:endParaRPr sz="900"/>
+          </a:p>
+        </p:txBody>
+      </p:sp>
+      <p:sp>
+        <p:nvSpPr>
+          <p:cNvPr id="19" name="Text 16">
+            <a:extLst>
+              <a:ext uri="{FF2B5EF4-FFF2-40B4-BE49-F238E27FC236}">
+                <a16:creationId xmlns:a16="http://schemas.microsoft.com/office/drawing/2014/main" id="{13BF0E51-D744-4257-9C8D-7D20E2A440E5}"/>
+              </a:ext>
+            </a:extLst>
+          </p:cNvPr>
+          <p:cNvSpPr>
+            <a:spLocks noGrp="1"/>
+          </p:cNvSpPr>
+          <p:nvPr/>
+        </p:nvSpPr>
+        <p:spPr>
+          <a:xfrm>
+            <a:off x="1499616" y="5468112"/>
+            <a:ext cx="1508760" cy="192024"/>
+          </a:xfrm>
+          <a:prstGeom prst="rect">
+            <a:avLst/>
+          </a:prstGeom>
+          <a:noFill/>
+        </p:spPr>
+        <p:txBody>
+          <a:bodyPr wrap="square" lIns="0" tIns="0" rIns="0" bIns="0" anchor="ctr"/>
+          <a:lstStyle/>
+          <a:p>
+            <a:pPr marL="0" indent="0" algn="r">
+              <a:buNone/>
+            </a:pPr>
+            <a:r>
+              <a:rPr sz="950">
+                <a:solidFill>
+                  <a:srgbClr val="FCF9F0"/>
+                </a:solidFill>
+                <a:latin typeface="Calibri"/>
+                <a:ea typeface="Calibri"/>
+                <a:cs typeface="Calibri"/>
+              </a:rPr>
+              <a:t>$2,026 / 91,16 ₴</a:t>
+            </a:r>
+            <a:endParaRPr sz="950"/>
+          </a:p>
+        </p:txBody>
+      </p:sp>
+      <p:sp>
+        <p:nvSpPr>
+          <p:cNvPr id="22" name="Shape 19">
+            <a:extLst>
+              <a:ext uri="{FF2B5EF4-FFF2-40B4-BE49-F238E27FC236}">
+                <a16:creationId xmlns:a16="http://schemas.microsoft.com/office/drawing/2014/main" id="{221615AB-3FD4-4403-AFF6-D6A56343CBC2}"/>
+              </a:ext>
+            </a:extLst>
+          </p:cNvPr>
+          <p:cNvSpPr>
+            <a:spLocks noGrp="1"/>
+          </p:cNvSpPr>
+          <p:nvPr/>
+        </p:nvSpPr>
+        <p:spPr>
+          <a:xfrm>
+            <a:off x="3383280" y="1536192"/>
+            <a:ext cx="2706624" cy="4626864"/>
+          </a:xfrm>
+          <a:prstGeom prst="roundRect">
+            <a:avLst>
+              <a:gd name="adj" fmla="val 4054"/>
+            </a:avLst>
+          </a:prstGeom>
+          <a:solidFill>
+            <a:srgbClr val="12452B">
+              <a:alpha val="90000"/>
+            </a:srgbClr>
+          </a:solidFill>
+          <a:ln w="15875">
+            <a:solidFill>
+              <a:srgbClr val="C89C40"/>
+            </a:solidFill>
+            <a:prstDash val="solid"/>
+          </a:ln>
+          <a:effectLst>
+            <a:outerShdw blurRad="177800" dist="38100" dir="5400000" algn="bl" rotWithShape="0">
+              <a:srgbClr val="000000">
+                <a:alpha val="45000"/>
+              </a:srgbClr>
+            </a:outerShdw>
+          </a:effectLst>
+        </p:spPr>
+        <p:txBody>
+          <a:bodyPr/>
+          <a:lstStyle/>
+          <a:p>
+            <a:endParaRPr/>
+          </a:p>
+        </p:txBody>
+      </p:sp>
+      <p:pic>
+        <p:nvPicPr>
+          <p:cNvPr id="134" name="Picture 133" descr="card_vegetable.jpg"/>
+          <p:cNvPicPr>
+            <a:picLocks noChangeAspect="1"/>
+          </p:cNvPicPr>
+          <p:nvPr/>
+        </p:nvPicPr>
+        <p:blipFill>
+          <a:blip r:embed="rId8"/>
+          <a:stretch>
+            <a:fillRect/>
+          </a:stretch>
+        </p:blipFill>
+        <p:spPr>
+          <a:xfrm>
+            <a:off x="3566160" y="1700784"/>
+            <a:ext cx="2340864" cy="1810512"/>
+          </a:xfrm>
+          <a:prstGeom prst="roundRect">
+            <a:avLst/>
+          </a:prstGeom>
+        </p:spPr>
+      </p:pic>
+      <p:sp>
+        <p:nvSpPr>
+          <p:cNvPr id="24" name="Shape 20">
+            <a:extLst>
+              <a:ext uri="{FF2B5EF4-FFF2-40B4-BE49-F238E27FC236}">
+                <a16:creationId xmlns:a16="http://schemas.microsoft.com/office/drawing/2014/main" id="{04C442D0-2F30-4863-8F74-AF51825B409B}"/>
+              </a:ext>
+            </a:extLst>
+          </p:cNvPr>
+          <p:cNvSpPr>
+            <a:spLocks noGrp="1"/>
+          </p:cNvSpPr>
+          <p:nvPr/>
+        </p:nvSpPr>
+        <p:spPr>
+          <a:xfrm>
+            <a:off x="3566160" y="1700784"/>
+            <a:ext cx="2340864" cy="1810512"/>
+          </a:xfrm>
+          <a:prstGeom prst="rect">
+            <a:avLst/>
+          </a:prstGeom>
+          <a:ln w="12700">
+            <a:solidFill>
+              <a:srgbClr val="C89C40"/>
+            </a:solidFill>
+            <a:prstDash val="solid"/>
+          </a:ln>
+        </p:spPr>
+        <p:txBody>
+          <a:bodyPr/>
+          <a:lstStyle/>
+          <a:p>
+            <a:endParaRPr/>
+          </a:p>
+        </p:txBody>
+      </p:sp>
+      <p:sp>
+        <p:nvSpPr>
+          <p:cNvPr id="25" name="Shape 21">
+            <a:extLst>
+              <a:ext uri="{FF2B5EF4-FFF2-40B4-BE49-F238E27FC236}">
+                <a16:creationId xmlns:a16="http://schemas.microsoft.com/office/drawing/2014/main" id="{68FDFA6F-6582-4237-9B22-00A082830131}"/>
+              </a:ext>
+            </a:extLst>
+          </p:cNvPr>
+          <p:cNvSpPr>
+            <a:spLocks noGrp="1"/>
+          </p:cNvSpPr>
+          <p:nvPr/>
+        </p:nvSpPr>
+        <p:spPr>
+          <a:xfrm>
+            <a:off x="3566160" y="3611880"/>
+            <a:ext cx="1417320" cy="237744"/>
+          </a:xfrm>
+          <a:prstGeom prst="roundRect">
+            <a:avLst>
+              <a:gd name="adj" fmla="val 23077"/>
+            </a:avLst>
+          </a:prstGeom>
+          <a:solidFill>
+            <a:srgbClr val="B3312D"/>
+          </a:solidFill>
+          <a:ln w="6350">
+            <a:solidFill>
+              <a:srgbClr val="C89C40"/>
+            </a:solidFill>
+            <a:prstDash val="solid"/>
+          </a:ln>
+        </p:spPr>
+        <p:txBody>
+          <a:bodyPr/>
+          <a:lstStyle/>
+          <a:p>
+            <a:endParaRPr/>
+          </a:p>
+        </p:txBody>
+      </p:sp>
+      <p:sp>
+        <p:nvSpPr>
+          <p:cNvPr id="26" name="Text 22">
+            <a:extLst>
+              <a:ext uri="{FF2B5EF4-FFF2-40B4-BE49-F238E27FC236}">
+                <a16:creationId xmlns:a16="http://schemas.microsoft.com/office/drawing/2014/main" id="{3BF42D84-D0AF-4217-B04F-C90FB592237C}"/>
+              </a:ext>
+            </a:extLst>
+          </p:cNvPr>
+          <p:cNvSpPr>
+            <a:spLocks noGrp="1"/>
+          </p:cNvSpPr>
+          <p:nvPr/>
+        </p:nvSpPr>
+        <p:spPr>
+          <a:xfrm>
+            <a:off x="3566160" y="3621024"/>
+            <a:ext cx="1417320" cy="219456"/>
+          </a:xfrm>
+          <a:prstGeom prst="rect">
+            <a:avLst/>
+          </a:prstGeom>
+          <a:noFill/>
+        </p:spPr>
+        <p:txBody>
+          <a:bodyPr wrap="square" lIns="0" tIns="0" rIns="0" bIns="0" anchor="ctr"/>
+          <a:lstStyle/>
+          <a:p>
+            <a:pPr marL="0" indent="0" algn="ctr">
+              <a:buNone/>
+            </a:pPr>
+            <a:r>
+              <a:rPr sz="850" b="1" spc="60">
+                <a:solidFill>
+                  <a:srgbClr val="FFFFFF"/>
+                </a:solidFill>
+                <a:latin typeface="Calibri"/>
+                <a:ea typeface="Calibri"/>
+                <a:cs typeface="Calibri"/>
+              </a:rPr>
+              <a:t>ЛОТОК 200 Г · AMBIENT</a:t>
+            </a:r>
+            <a:endParaRPr sz="850"/>
+          </a:p>
+        </p:txBody>
+      </p:sp>
+      <p:sp>
+        <p:nvSpPr>
+          <p:cNvPr id="27" name="Text 23">
+            <a:extLst>
+              <a:ext uri="{FF2B5EF4-FFF2-40B4-BE49-F238E27FC236}">
+                <a16:creationId xmlns:a16="http://schemas.microsoft.com/office/drawing/2014/main" id="{ACDE96DD-6C77-424C-B5EB-F3F2EA231669}"/>
+              </a:ext>
+            </a:extLst>
+          </p:cNvPr>
+          <p:cNvSpPr>
+            <a:spLocks noGrp="1"/>
+          </p:cNvSpPr>
+          <p:nvPr/>
+        </p:nvSpPr>
+        <p:spPr>
+          <a:xfrm>
+            <a:off x="3566160" y="3931920"/>
+            <a:ext cx="2340864" cy="548640"/>
+          </a:xfrm>
+          <a:prstGeom prst="rect">
+            <a:avLst/>
+          </a:prstGeom>
+          <a:noFill/>
+        </p:spPr>
+        <p:txBody>
+          <a:bodyPr wrap="square" lIns="0" tIns="0" rIns="0" bIns="0" anchor="t"/>
+          <a:lstStyle/>
+          <a:p>
+            <a:pPr marL="0" indent="0">
+              <a:buNone/>
+            </a:pPr>
+            <a:r>
+              <a:rPr sz="1450" b="1">
+                <a:solidFill>
+                  <a:srgbClr val="FFFFFF"/>
+                </a:solidFill>
+                <a:latin typeface="Cambria"/>
+                <a:ea typeface="Cambria"/>
+                <a:cs typeface="Cambria"/>
+              </a:rPr>
+              <a:t>Vegetable Fried Rice</a:t>
+            </a:r>
+            <a:endParaRPr sz="1450"/>
+          </a:p>
+        </p:txBody>
+      </p:sp>
+      <p:sp>
+        <p:nvSpPr>
+          <p:cNvPr id="28" name="Text 24">
+            <a:extLst>
+              <a:ext uri="{FF2B5EF4-FFF2-40B4-BE49-F238E27FC236}">
+                <a16:creationId xmlns:a16="http://schemas.microsoft.com/office/drawing/2014/main" id="{68A85A44-B6CB-4D71-8000-A653E3694AD7}"/>
+              </a:ext>
+            </a:extLst>
+          </p:cNvPr>
+          <p:cNvSpPr>
+            <a:spLocks noGrp="1"/>
+          </p:cNvSpPr>
+          <p:nvPr/>
+        </p:nvSpPr>
+        <p:spPr>
+          <a:xfrm>
+            <a:off x="3566160" y="4498848"/>
+            <a:ext cx="2340864" cy="237744"/>
+          </a:xfrm>
+          <a:prstGeom prst="rect">
+            <a:avLst/>
+          </a:prstGeom>
+          <a:noFill/>
+        </p:spPr>
+        <p:txBody>
+          <a:bodyPr wrap="square" lIns="0" tIns="0" rIns="0" bIns="0" anchor="ctr"/>
+          <a:lstStyle/>
+          <a:p>
+            <a:pPr marL="0" indent="0">
+              <a:buNone/>
+            </a:pPr>
+            <a:r>
+              <a:rPr sz="1000">
+                <a:solidFill>
+                  <a:srgbClr val="D2E4CE"/>
+                </a:solidFill>
+                <a:latin typeface="Calibri"/>
+                <a:ea typeface="Calibri"/>
+                <a:cs typeface="Calibri"/>
+              </a:rPr>
+              <a:t>FOB $1,300 · </a:t>
+            </a:r>
+            <a:endParaRPr sz="1000"/>
+          </a:p>
+        </p:txBody>
+      </p:sp>
+      <p:sp>
+        <p:nvSpPr>
+          <p:cNvPr id="29" name="Shape 25">
+            <a:extLst>
+              <a:ext uri="{FF2B5EF4-FFF2-40B4-BE49-F238E27FC236}">
+                <a16:creationId xmlns:a16="http://schemas.microsoft.com/office/drawing/2014/main" id="{BB6ACCF8-0216-4C21-8A34-38A25C9E2A95}"/>
+              </a:ext>
+            </a:extLst>
+          </p:cNvPr>
+          <p:cNvSpPr>
+            <a:spLocks noGrp="1"/>
+          </p:cNvSpPr>
+          <p:nvPr/>
+        </p:nvSpPr>
+        <p:spPr>
+          <a:xfrm>
+            <a:off x="3566160" y="4791456"/>
+            <a:ext cx="2340864" cy="1170432"/>
+          </a:xfrm>
+          <a:prstGeom prst="roundRect">
+            <a:avLst>
+              <a:gd name="adj" fmla="val 5469"/>
+            </a:avLst>
+          </a:prstGeom>
+          <a:solidFill>
+            <a:srgbClr val="1A5433">
+              <a:alpha val="92000"/>
+            </a:srgbClr>
+          </a:solidFill>
+          <a:ln w="9525">
+            <a:solidFill>
+              <a:srgbClr val="C89C40"/>
+            </a:solidFill>
+            <a:prstDash val="solid"/>
+          </a:ln>
+        </p:spPr>
+        <p:txBody>
+          <a:bodyPr/>
+          <a:lstStyle/>
+          <a:p>
+            <a:endParaRPr/>
+          </a:p>
+        </p:txBody>
+      </p:sp>
+      <p:sp>
+        <p:nvSpPr>
+          <p:cNvPr id="30" name="Text 26">
+            <a:extLst>
+              <a:ext uri="{FF2B5EF4-FFF2-40B4-BE49-F238E27FC236}">
+                <a16:creationId xmlns:a16="http://schemas.microsoft.com/office/drawing/2014/main" id="{AE847F71-A762-450C-A559-36DCDA518904}"/>
+              </a:ext>
+            </a:extLst>
+          </p:cNvPr>
+          <p:cNvSpPr>
+            <a:spLocks noGrp="1"/>
+          </p:cNvSpPr>
+          <p:nvPr/>
+        </p:nvSpPr>
+        <p:spPr>
+          <a:xfrm>
+            <a:off x="3675888" y="4855464"/>
+            <a:ext cx="2148840" cy="182880"/>
+          </a:xfrm>
+          <a:prstGeom prst="rect">
+            <a:avLst/>
+          </a:prstGeom>
+          <a:noFill/>
+        </p:spPr>
+        <p:txBody>
+          <a:bodyPr wrap="square" lIns="0" tIns="0" rIns="0" bIns="0" anchor="ctr"/>
+          <a:lstStyle/>
+          <a:p>
+            <a:pPr marL="0" indent="0">
+              <a:buNone/>
+            </a:pPr>
+            <a:r>
+              <a:rPr sz="750" b="1" spc="100">
+                <a:solidFill>
+                  <a:srgbClr val="F5CE76"/>
+                </a:solidFill>
+                <a:latin typeface="Calibri"/>
+                <a:ea typeface="Calibri"/>
+                <a:cs typeface="Calibri"/>
+              </a:rPr>
+              <a:t>СОБІВАРТІСТЬ, ЗА ЛОТОК</a:t>
+            </a:r>
+            <a:endParaRPr sz="750"/>
+          </a:p>
+        </p:txBody>
+      </p:sp>
+      <p:sp>
+        <p:nvSpPr>
+          <p:cNvPr id="31" name="Text 27">
+            <a:extLst>
+              <a:ext uri="{FF2B5EF4-FFF2-40B4-BE49-F238E27FC236}">
+                <a16:creationId xmlns:a16="http://schemas.microsoft.com/office/drawing/2014/main" id="{716B44C2-FF59-4FA7-AB65-3092D174973A}"/>
+              </a:ext>
+            </a:extLst>
+          </p:cNvPr>
+          <p:cNvSpPr>
+            <a:spLocks noGrp="1"/>
+          </p:cNvSpPr>
+          <p:nvPr/>
+        </p:nvSpPr>
+        <p:spPr>
+          <a:xfrm>
+            <a:off x="3675888" y="5056632"/>
+            <a:ext cx="658368" cy="192024"/>
+          </a:xfrm>
+          <a:prstGeom prst="rect">
+            <a:avLst/>
+          </a:prstGeom>
+          <a:noFill/>
+        </p:spPr>
+        <p:txBody>
+          <a:bodyPr wrap="square" lIns="0" tIns="0" rIns="0" bIns="0" anchor="ctr"/>
+          <a:lstStyle/>
+          <a:p>
+            <a:pPr marL="0" indent="0">
+              <a:buNone/>
+            </a:pPr>
+            <a:r>
+              <a:rPr sz="900">
+                <a:solidFill>
+                  <a:srgbClr val="D2E4CE"/>
+                </a:solidFill>
+                <a:latin typeface="Calibri"/>
+                <a:ea typeface="Calibri"/>
+                <a:cs typeface="Calibri"/>
+              </a:rPr>
+              <a:t>20′ FCL</a:t>
+            </a:r>
+            <a:endParaRPr sz="900"/>
+          </a:p>
+        </p:txBody>
+      </p:sp>
+      <p:sp>
+        <p:nvSpPr>
+          <p:cNvPr id="32" name="Text 28">
+            <a:extLst>
+              <a:ext uri="{FF2B5EF4-FFF2-40B4-BE49-F238E27FC236}">
+                <a16:creationId xmlns:a16="http://schemas.microsoft.com/office/drawing/2014/main" id="{4BFD8799-39A3-483C-B443-61D7961487B8}"/>
+              </a:ext>
+            </a:extLst>
+          </p:cNvPr>
+          <p:cNvSpPr>
+            <a:spLocks noGrp="1"/>
+          </p:cNvSpPr>
+          <p:nvPr/>
+        </p:nvSpPr>
+        <p:spPr>
+          <a:xfrm>
+            <a:off x="4315968" y="5056632"/>
+            <a:ext cx="1508760" cy="192024"/>
+          </a:xfrm>
+          <a:prstGeom prst="rect">
+            <a:avLst/>
+          </a:prstGeom>
+          <a:noFill/>
+        </p:spPr>
+        <p:txBody>
+          <a:bodyPr wrap="square" lIns="0" tIns="0" rIns="0" bIns="0" anchor="ctr"/>
+          <a:lstStyle/>
+          <a:p>
+            <a:pPr marL="0" indent="0" algn="r">
+              <a:buNone/>
+            </a:pPr>
+            <a:r>
+              <a:rPr sz="950">
+                <a:solidFill>
+                  <a:srgbClr val="FCF9F0"/>
+                </a:solidFill>
+                <a:latin typeface="Calibri"/>
+                <a:ea typeface="Calibri"/>
+                <a:cs typeface="Calibri"/>
+              </a:rPr>
+              <a:t>$2,176 / 97,92 ₴</a:t>
+            </a:r>
+            <a:endParaRPr sz="950"/>
+          </a:p>
+        </p:txBody>
+      </p:sp>
+      <p:sp>
+        <p:nvSpPr>
+          <p:cNvPr id="33" name="Text 29">
+            <a:extLst>
+              <a:ext uri="{FF2B5EF4-FFF2-40B4-BE49-F238E27FC236}">
+                <a16:creationId xmlns:a16="http://schemas.microsoft.com/office/drawing/2014/main" id="{6236FB47-8D66-49B9-890D-86AFDDAD03E0}"/>
+              </a:ext>
+            </a:extLst>
+          </p:cNvPr>
+          <p:cNvSpPr>
+            <a:spLocks noGrp="1"/>
+          </p:cNvSpPr>
+          <p:nvPr/>
+        </p:nvSpPr>
+        <p:spPr>
+          <a:xfrm>
+            <a:off x="3675888" y="5262372"/>
+            <a:ext cx="658368" cy="192024"/>
+          </a:xfrm>
+          <a:prstGeom prst="rect">
+            <a:avLst/>
+          </a:prstGeom>
+          <a:noFill/>
+        </p:spPr>
+        <p:txBody>
+          <a:bodyPr wrap="square" lIns="0" tIns="0" rIns="0" bIns="0" anchor="ctr"/>
+          <a:lstStyle/>
+          <a:p>
+            <a:pPr marL="0" indent="0">
+              <a:buNone/>
+            </a:pPr>
+            <a:r>
+              <a:rPr sz="900" b="1">
+                <a:solidFill>
+                  <a:srgbClr val="F5CE76"/>
+                </a:solidFill>
+                <a:latin typeface="Calibri"/>
+                <a:ea typeface="Calibri"/>
+                <a:cs typeface="Calibri"/>
+              </a:rPr>
+              <a:t>40′ FCL</a:t>
+            </a:r>
+            <a:endParaRPr sz="900"/>
+          </a:p>
+        </p:txBody>
+      </p:sp>
+      <p:sp>
+        <p:nvSpPr>
+          <p:cNvPr id="34" name="Text 30">
+            <a:extLst>
+              <a:ext uri="{FF2B5EF4-FFF2-40B4-BE49-F238E27FC236}">
+                <a16:creationId xmlns:a16="http://schemas.microsoft.com/office/drawing/2014/main" id="{1C5B3AD2-2E31-4934-829B-92559C96C96C}"/>
+              </a:ext>
+            </a:extLst>
+          </p:cNvPr>
+          <p:cNvSpPr>
+            <a:spLocks noGrp="1"/>
+          </p:cNvSpPr>
+          <p:nvPr/>
+        </p:nvSpPr>
+        <p:spPr>
+          <a:xfrm>
+            <a:off x="4315968" y="5262372"/>
+            <a:ext cx="1508760" cy="192024"/>
+          </a:xfrm>
+          <a:prstGeom prst="rect">
+            <a:avLst/>
+          </a:prstGeom>
+          <a:noFill/>
+        </p:spPr>
+        <p:txBody>
+          <a:bodyPr wrap="square" lIns="0" tIns="0" rIns="0" bIns="0" anchor="ctr"/>
+          <a:lstStyle/>
+          <a:p>
+            <a:pPr marL="0" indent="0" algn="r">
+              <a:buNone/>
+            </a:pPr>
+            <a:r>
+              <a:rPr sz="950" b="1">
+                <a:solidFill>
+                  <a:srgbClr val="F5CE76"/>
+                </a:solidFill>
+                <a:latin typeface="Calibri"/>
+                <a:ea typeface="Calibri"/>
+                <a:cs typeface="Calibri"/>
+              </a:rPr>
+              <a:t>$1,960 / 88,18 ₴</a:t>
+            </a:r>
+            <a:endParaRPr sz="950"/>
+          </a:p>
+        </p:txBody>
+      </p:sp>
+      <p:sp>
+        <p:nvSpPr>
+          <p:cNvPr id="35" name="Text 31">
+            <a:extLst>
+              <a:ext uri="{FF2B5EF4-FFF2-40B4-BE49-F238E27FC236}">
+                <a16:creationId xmlns:a16="http://schemas.microsoft.com/office/drawing/2014/main" id="{AB5675A7-525E-4791-993A-B3BFA05842FE}"/>
+              </a:ext>
+            </a:extLst>
+          </p:cNvPr>
+          <p:cNvSpPr>
+            <a:spLocks noGrp="1"/>
+          </p:cNvSpPr>
+          <p:nvPr/>
+        </p:nvSpPr>
+        <p:spPr>
+          <a:xfrm>
+            <a:off x="3675888" y="5468112"/>
+            <a:ext cx="658368" cy="192024"/>
+          </a:xfrm>
+          <a:prstGeom prst="rect">
+            <a:avLst/>
+          </a:prstGeom>
+          <a:noFill/>
+        </p:spPr>
+        <p:txBody>
+          <a:bodyPr wrap="square" lIns="0" tIns="0" rIns="0" bIns="0" anchor="ctr"/>
+          <a:lstStyle/>
+          <a:p>
+            <a:pPr marL="0" indent="0">
+              <a:buNone/>
+            </a:pPr>
+            <a:r>
+              <a:rPr sz="900">
+                <a:solidFill>
+                  <a:srgbClr val="D2E4CE"/>
+                </a:solidFill>
+                <a:latin typeface="Calibri"/>
+                <a:ea typeface="Calibri"/>
+                <a:cs typeface="Calibri"/>
+              </a:rPr>
+              <a:t>10 палет</a:t>
+            </a:r>
+            <a:endParaRPr sz="900"/>
+          </a:p>
+        </p:txBody>
+      </p:sp>
+      <p:sp>
+        <p:nvSpPr>
+          <p:cNvPr id="36" name="Text 32">
+            <a:extLst>
+              <a:ext uri="{FF2B5EF4-FFF2-40B4-BE49-F238E27FC236}">
+                <a16:creationId xmlns:a16="http://schemas.microsoft.com/office/drawing/2014/main" id="{1497E892-700F-4999-8614-DBAADE2E6A5A}"/>
+              </a:ext>
+            </a:extLst>
+          </p:cNvPr>
+          <p:cNvSpPr>
+            <a:spLocks noGrp="1"/>
+          </p:cNvSpPr>
+          <p:nvPr/>
+        </p:nvSpPr>
+        <p:spPr>
+          <a:xfrm>
+            <a:off x="4315968" y="5468112"/>
+            <a:ext cx="1508760" cy="192024"/>
+          </a:xfrm>
+          <a:prstGeom prst="rect">
+            <a:avLst/>
+          </a:prstGeom>
+          <a:noFill/>
+        </p:spPr>
+        <p:txBody>
+          <a:bodyPr wrap="square" lIns="0" tIns="0" rIns="0" bIns="0" anchor="ctr"/>
+          <a:lstStyle/>
+          <a:p>
+            <a:pPr marL="0" indent="0" algn="r">
+              <a:buNone/>
+            </a:pPr>
+            <a:r>
+              <a:rPr sz="950">
+                <a:solidFill>
+                  <a:srgbClr val="FCF9F0"/>
+                </a:solidFill>
+                <a:latin typeface="Calibri"/>
+                <a:ea typeface="Calibri"/>
+                <a:cs typeface="Calibri"/>
+              </a:rPr>
+              <a:t>$2,026 / 91,16 ₴</a:t>
+            </a:r>
+            <a:endParaRPr sz="950"/>
+          </a:p>
+        </p:txBody>
+      </p:sp>
+      <p:sp>
+        <p:nvSpPr>
+          <p:cNvPr id="39" name="Shape 35">
+            <a:extLst>
+              <a:ext uri="{FF2B5EF4-FFF2-40B4-BE49-F238E27FC236}">
+                <a16:creationId xmlns:a16="http://schemas.microsoft.com/office/drawing/2014/main" id="{E9A5A22F-E04B-4856-A6EE-5DB1869CB5A4}"/>
+              </a:ext>
+            </a:extLst>
+          </p:cNvPr>
+          <p:cNvSpPr>
+            <a:spLocks noGrp="1"/>
+          </p:cNvSpPr>
+          <p:nvPr/>
+        </p:nvSpPr>
+        <p:spPr>
+          <a:xfrm>
+            <a:off x="6199632" y="1536192"/>
+            <a:ext cx="2706624" cy="4626864"/>
+          </a:xfrm>
+          <a:prstGeom prst="roundRect">
+            <a:avLst>
+              <a:gd name="adj" fmla="val 4054"/>
+            </a:avLst>
+          </a:prstGeom>
+          <a:solidFill>
+            <a:srgbClr val="12452B">
+              <a:alpha val="90000"/>
+            </a:srgbClr>
+          </a:solidFill>
+          <a:ln w="15875">
+            <a:solidFill>
+              <a:srgbClr val="C89C40"/>
+            </a:solidFill>
+            <a:prstDash val="solid"/>
+          </a:ln>
+          <a:effectLst>
+            <a:outerShdw blurRad="177800" dist="38100" dir="5400000" algn="bl" rotWithShape="0">
+              <a:srgbClr val="000000">
+                <a:alpha val="45000"/>
+              </a:srgbClr>
+            </a:outerShdw>
+          </a:effectLst>
+        </p:spPr>
+        <p:txBody>
+          <a:bodyPr/>
+          <a:lstStyle/>
+          <a:p>
+            <a:endParaRPr/>
+          </a:p>
+        </p:txBody>
+      </p:sp>
+      <p:pic>
+        <p:nvPicPr>
+          <p:cNvPr id="135" name="Picture 134" descr="card_japchae.jpg"/>
+          <p:cNvPicPr>
+            <a:picLocks noChangeAspect="1"/>
+          </p:cNvPicPr>
+          <p:nvPr/>
+        </p:nvPicPr>
+        <p:blipFill>
+          <a:blip r:embed="rId9"/>
+          <a:stretch>
+            <a:fillRect/>
+          </a:stretch>
+        </p:blipFill>
+        <p:spPr>
+          <a:xfrm>
+            <a:off x="6382512" y="1700784"/>
+            <a:ext cx="2340864" cy="1810512"/>
+          </a:xfrm>
+          <a:prstGeom prst="roundRect">
+            <a:avLst/>
+          </a:prstGeom>
+        </p:spPr>
+      </p:pic>
+      <p:sp>
+        <p:nvSpPr>
+          <p:cNvPr id="41" name="Shape 36">
+            <a:extLst>
+              <a:ext uri="{FF2B5EF4-FFF2-40B4-BE49-F238E27FC236}">
+                <a16:creationId xmlns:a16="http://schemas.microsoft.com/office/drawing/2014/main" id="{F9B242CE-9FC3-4F31-9E90-E76F07CC34D9}"/>
+              </a:ext>
+            </a:extLst>
+          </p:cNvPr>
+          <p:cNvSpPr>
+            <a:spLocks noGrp="1"/>
+          </p:cNvSpPr>
+          <p:nvPr/>
+        </p:nvSpPr>
+        <p:spPr>
+          <a:xfrm>
+            <a:off x="6382512" y="1700784"/>
+            <a:ext cx="2340864" cy="1810512"/>
+          </a:xfrm>
+          <a:prstGeom prst="rect">
+            <a:avLst/>
+          </a:prstGeom>
+          <a:ln w="12700">
+            <a:solidFill>
+              <a:srgbClr val="C89C40"/>
+            </a:solidFill>
+            <a:prstDash val="solid"/>
+          </a:ln>
+        </p:spPr>
+        <p:txBody>
+          <a:bodyPr/>
+          <a:lstStyle/>
+          <a:p>
+            <a:endParaRPr/>
+          </a:p>
+        </p:txBody>
+      </p:sp>
+      <p:sp>
+        <p:nvSpPr>
+          <p:cNvPr id="42" name="Shape 37">
+            <a:extLst>
+              <a:ext uri="{FF2B5EF4-FFF2-40B4-BE49-F238E27FC236}">
+                <a16:creationId xmlns:a16="http://schemas.microsoft.com/office/drawing/2014/main" id="{A50AE707-BF33-4DC0-8761-DC73CA95E9E3}"/>
+              </a:ext>
+            </a:extLst>
+          </p:cNvPr>
+          <p:cNvSpPr>
+            <a:spLocks noGrp="1"/>
+          </p:cNvSpPr>
+          <p:nvPr/>
+        </p:nvSpPr>
+        <p:spPr>
+          <a:xfrm>
+            <a:off x="6382512" y="3611880"/>
+            <a:ext cx="1417320" cy="237744"/>
+          </a:xfrm>
+          <a:prstGeom prst="roundRect">
+            <a:avLst>
+              <a:gd name="adj" fmla="val 23077"/>
+            </a:avLst>
+          </a:prstGeom>
+          <a:solidFill>
+            <a:srgbClr val="B3312D"/>
+          </a:solidFill>
+          <a:ln w="6350">
+            <a:solidFill>
+              <a:srgbClr val="C89C40"/>
+            </a:solidFill>
+            <a:prstDash val="solid"/>
+          </a:ln>
+        </p:spPr>
+        <p:txBody>
+          <a:bodyPr/>
+          <a:lstStyle/>
+          <a:p>
+            <a:endParaRPr/>
+          </a:p>
+        </p:txBody>
+      </p:sp>
+      <p:sp>
+        <p:nvSpPr>
+          <p:cNvPr id="43" name="Text 38">
+            <a:extLst>
+              <a:ext uri="{FF2B5EF4-FFF2-40B4-BE49-F238E27FC236}">
+                <a16:creationId xmlns:a16="http://schemas.microsoft.com/office/drawing/2014/main" id="{83B499CA-E5CA-4A54-A2B7-6FC3B8C2A8E6}"/>
+              </a:ext>
+            </a:extLst>
+          </p:cNvPr>
+          <p:cNvSpPr>
+            <a:spLocks noGrp="1"/>
+          </p:cNvSpPr>
+          <p:nvPr/>
+        </p:nvSpPr>
+        <p:spPr>
+          <a:xfrm>
+            <a:off x="6382512" y="3621024"/>
+            <a:ext cx="1417320" cy="219456"/>
+          </a:xfrm>
+          <a:prstGeom prst="rect">
+            <a:avLst/>
+          </a:prstGeom>
+          <a:noFill/>
+        </p:spPr>
+        <p:txBody>
+          <a:bodyPr wrap="square" lIns="0" tIns="0" rIns="0" bIns="0" anchor="ctr"/>
+          <a:lstStyle/>
+          <a:p>
+            <a:pPr marL="0" indent="0" algn="ctr">
+              <a:buNone/>
+            </a:pPr>
+            <a:r>
+              <a:rPr sz="850" b="1" spc="60">
+                <a:solidFill>
+                  <a:srgbClr val="FFFFFF"/>
+                </a:solidFill>
+                <a:latin typeface="Calibri"/>
+                <a:ea typeface="Calibri"/>
+                <a:cs typeface="Calibri"/>
+              </a:rPr>
+              <a:t>ЛОТОК 200 Г · AMBIENT</a:t>
+            </a:r>
+            <a:endParaRPr sz="850"/>
+          </a:p>
+        </p:txBody>
+      </p:sp>
+      <p:sp>
+        <p:nvSpPr>
+          <p:cNvPr id="44" name="Text 39">
+            <a:extLst>
+              <a:ext uri="{FF2B5EF4-FFF2-40B4-BE49-F238E27FC236}">
+                <a16:creationId xmlns:a16="http://schemas.microsoft.com/office/drawing/2014/main" id="{44658F7D-867D-4A61-B46E-876DD11E5E0F}"/>
+              </a:ext>
+            </a:extLst>
+          </p:cNvPr>
+          <p:cNvSpPr>
+            <a:spLocks noGrp="1"/>
+          </p:cNvSpPr>
+          <p:nvPr/>
+        </p:nvSpPr>
+        <p:spPr>
+          <a:xfrm>
+            <a:off x="6382512" y="3931920"/>
+            <a:ext cx="2340864" cy="548640"/>
+          </a:xfrm>
+          <a:prstGeom prst="rect">
+            <a:avLst/>
+          </a:prstGeom>
+          <a:noFill/>
+        </p:spPr>
+        <p:txBody>
+          <a:bodyPr wrap="square" lIns="0" tIns="0" rIns="0" bIns="0" anchor="t"/>
+          <a:lstStyle/>
+          <a:p>
+            <a:pPr marL="0" indent="0">
+              <a:buNone/>
+            </a:pPr>
+            <a:r>
+              <a:rPr sz="1450" b="1">
+                <a:solidFill>
+                  <a:srgbClr val="FFFFFF"/>
+                </a:solidFill>
+                <a:latin typeface="Cambria"/>
+                <a:ea typeface="Cambria"/>
+                <a:cs typeface="Cambria"/>
+              </a:rPr>
+              <a:t>Japchae Fried Rice</a:t>
+            </a:r>
+            <a:endParaRPr sz="1450"/>
+          </a:p>
+        </p:txBody>
+      </p:sp>
+      <p:sp>
+        <p:nvSpPr>
+          <p:cNvPr id="45" name="Text 40">
+            <a:extLst>
+              <a:ext uri="{FF2B5EF4-FFF2-40B4-BE49-F238E27FC236}">
+                <a16:creationId xmlns:a16="http://schemas.microsoft.com/office/drawing/2014/main" id="{9C8F21B4-2ED4-4F90-8A4E-B929F37C5243}"/>
+              </a:ext>
+            </a:extLst>
+          </p:cNvPr>
+          <p:cNvSpPr>
+            <a:spLocks noGrp="1"/>
+          </p:cNvSpPr>
+          <p:nvPr/>
+        </p:nvSpPr>
+        <p:spPr>
+          <a:xfrm>
+            <a:off x="6382512" y="4498848"/>
+            <a:ext cx="2340864" cy="237744"/>
+          </a:xfrm>
+          <a:prstGeom prst="rect">
+            <a:avLst/>
+          </a:prstGeom>
+          <a:noFill/>
+        </p:spPr>
+        <p:txBody>
+          <a:bodyPr wrap="square" lIns="0" tIns="0" rIns="0" bIns="0" anchor="ctr"/>
+          <a:lstStyle/>
+          <a:p>
+            <a:pPr marL="0" indent="0">
+              <a:buNone/>
+            </a:pPr>
+            <a:r>
+              <a:rPr sz="1000">
+                <a:solidFill>
+                  <a:srgbClr val="D2E4CE"/>
+                </a:solidFill>
+                <a:latin typeface="Calibri"/>
+                <a:ea typeface="Calibri"/>
+                <a:cs typeface="Calibri"/>
+              </a:rPr>
+              <a:t>FOB $1,300 · </a:t>
+            </a:r>
+            <a:endParaRPr sz="1000"/>
+          </a:p>
+        </p:txBody>
+      </p:sp>
+      <p:sp>
+        <p:nvSpPr>
+          <p:cNvPr id="46" name="Shape 41">
+            <a:extLst>
+              <a:ext uri="{FF2B5EF4-FFF2-40B4-BE49-F238E27FC236}">
+                <a16:creationId xmlns:a16="http://schemas.microsoft.com/office/drawing/2014/main" id="{CB4E5E2B-AB82-4890-B02A-60C7FFBEFA40}"/>
+              </a:ext>
+            </a:extLst>
+          </p:cNvPr>
+          <p:cNvSpPr>
+            <a:spLocks noGrp="1"/>
+          </p:cNvSpPr>
+          <p:nvPr/>
+        </p:nvSpPr>
+        <p:spPr>
+          <a:xfrm>
+            <a:off x="6382512" y="4791456"/>
+            <a:ext cx="2340864" cy="1170432"/>
+          </a:xfrm>
+          <a:prstGeom prst="roundRect">
+            <a:avLst>
+              <a:gd name="adj" fmla="val 5469"/>
+            </a:avLst>
+          </a:prstGeom>
+          <a:solidFill>
+            <a:srgbClr val="1A5433">
+              <a:alpha val="92000"/>
+            </a:srgbClr>
+          </a:solidFill>
+          <a:ln w="9525">
+            <a:solidFill>
+              <a:srgbClr val="C89C40"/>
+            </a:solidFill>
+            <a:prstDash val="solid"/>
+          </a:ln>
+        </p:spPr>
+        <p:txBody>
+          <a:bodyPr/>
+          <a:lstStyle/>
+          <a:p>
+            <a:endParaRPr/>
+          </a:p>
+        </p:txBody>
+      </p:sp>
+      <p:sp>
+        <p:nvSpPr>
+          <p:cNvPr id="47" name="Text 42">
+            <a:extLst>
+              <a:ext uri="{FF2B5EF4-FFF2-40B4-BE49-F238E27FC236}">
+                <a16:creationId xmlns:a16="http://schemas.microsoft.com/office/drawing/2014/main" id="{64AB014A-05C3-45B0-AEEE-0D5F7B45FEB4}"/>
+              </a:ext>
+            </a:extLst>
+          </p:cNvPr>
+          <p:cNvSpPr>
+            <a:spLocks noGrp="1"/>
+          </p:cNvSpPr>
+          <p:nvPr/>
+        </p:nvSpPr>
+        <p:spPr>
+          <a:xfrm>
+            <a:off x="6492240" y="4855464"/>
+            <a:ext cx="2148840" cy="182880"/>
+          </a:xfrm>
+          <a:prstGeom prst="rect">
+            <a:avLst/>
+          </a:prstGeom>
+          <a:noFill/>
+        </p:spPr>
+        <p:txBody>
+          <a:bodyPr wrap="square" lIns="0" tIns="0" rIns="0" bIns="0" anchor="ctr"/>
+          <a:lstStyle/>
+          <a:p>
+            <a:pPr marL="0" indent="0">
+              <a:buNone/>
+            </a:pPr>
+            <a:r>
+              <a:rPr sz="750" b="1" spc="100">
+                <a:solidFill>
+                  <a:srgbClr val="F5CE76"/>
+                </a:solidFill>
+                <a:latin typeface="Calibri"/>
+                <a:ea typeface="Calibri"/>
+                <a:cs typeface="Calibri"/>
+              </a:rPr>
+              <a:t>СОБІВАРТІСТЬ, ЗА ЛОТОК</a:t>
+            </a:r>
+            <a:endParaRPr sz="750"/>
+          </a:p>
+        </p:txBody>
+      </p:sp>
+      <p:sp>
+        <p:nvSpPr>
+          <p:cNvPr id="48" name="Text 43">
+            <a:extLst>
+              <a:ext uri="{FF2B5EF4-FFF2-40B4-BE49-F238E27FC236}">
+                <a16:creationId xmlns:a16="http://schemas.microsoft.com/office/drawing/2014/main" id="{19FE6818-4F14-4862-A822-5259E90FC4D8}"/>
+              </a:ext>
+            </a:extLst>
+          </p:cNvPr>
+          <p:cNvSpPr>
+            <a:spLocks noGrp="1"/>
+          </p:cNvSpPr>
+          <p:nvPr/>
+        </p:nvSpPr>
+        <p:spPr>
+          <a:xfrm>
+            <a:off x="6492240" y="5056632"/>
+            <a:ext cx="658368" cy="192024"/>
+          </a:xfrm>
+          <a:prstGeom prst="rect">
+            <a:avLst/>
+          </a:prstGeom>
+          <a:noFill/>
+        </p:spPr>
+        <p:txBody>
+          <a:bodyPr wrap="square" lIns="0" tIns="0" rIns="0" bIns="0" anchor="ctr"/>
+          <a:lstStyle/>
+          <a:p>
+            <a:pPr marL="0" indent="0">
+              <a:buNone/>
+            </a:pPr>
+            <a:r>
+              <a:rPr sz="900">
+                <a:solidFill>
+                  <a:srgbClr val="D2E4CE"/>
+                </a:solidFill>
+                <a:latin typeface="Calibri"/>
+                <a:ea typeface="Calibri"/>
+                <a:cs typeface="Calibri"/>
+              </a:rPr>
+              <a:t>20′ FCL</a:t>
+            </a:r>
+            <a:endParaRPr sz="900"/>
+          </a:p>
+        </p:txBody>
+      </p:sp>
+      <p:sp>
+        <p:nvSpPr>
+          <p:cNvPr id="49" name="Text 44">
+            <a:extLst>
+              <a:ext uri="{FF2B5EF4-FFF2-40B4-BE49-F238E27FC236}">
+                <a16:creationId xmlns:a16="http://schemas.microsoft.com/office/drawing/2014/main" id="{5C9DFA8C-DC12-493F-89E1-05F82142934A}"/>
+              </a:ext>
+            </a:extLst>
+          </p:cNvPr>
+          <p:cNvSpPr>
+            <a:spLocks noGrp="1"/>
+          </p:cNvSpPr>
+          <p:nvPr/>
+        </p:nvSpPr>
+        <p:spPr>
+          <a:xfrm>
+            <a:off x="7132320" y="5056632"/>
+            <a:ext cx="1508760" cy="192024"/>
+          </a:xfrm>
+          <a:prstGeom prst="rect">
+            <a:avLst/>
+          </a:prstGeom>
+          <a:noFill/>
+        </p:spPr>
+        <p:txBody>
+          <a:bodyPr wrap="square" lIns="0" tIns="0" rIns="0" bIns="0" anchor="ctr"/>
+          <a:lstStyle/>
+          <a:p>
+            <a:pPr marL="0" indent="0" algn="r">
+              <a:buNone/>
+            </a:pPr>
+            <a:r>
+              <a:rPr sz="950">
+                <a:solidFill>
+                  <a:srgbClr val="FCF9F0"/>
+                </a:solidFill>
+                <a:latin typeface="Calibri"/>
+                <a:ea typeface="Calibri"/>
+                <a:cs typeface="Calibri"/>
+              </a:rPr>
+              <a:t>$2,176 / 97,92 ₴</a:t>
+            </a:r>
+            <a:endParaRPr sz="950"/>
+          </a:p>
+        </p:txBody>
+      </p:sp>
+      <p:sp>
+        <p:nvSpPr>
+          <p:cNvPr id="50" name="Text 45">
+            <a:extLst>
+              <a:ext uri="{FF2B5EF4-FFF2-40B4-BE49-F238E27FC236}">
+                <a16:creationId xmlns:a16="http://schemas.microsoft.com/office/drawing/2014/main" id="{351C6F62-3582-446E-9329-137053C4895C}"/>
+              </a:ext>
+            </a:extLst>
+          </p:cNvPr>
+          <p:cNvSpPr>
+            <a:spLocks noGrp="1"/>
+          </p:cNvSpPr>
+          <p:nvPr/>
+        </p:nvSpPr>
+        <p:spPr>
+          <a:xfrm>
+            <a:off x="6492240" y="5262372"/>
+            <a:ext cx="658368" cy="192024"/>
+          </a:xfrm>
+          <a:prstGeom prst="rect">
+            <a:avLst/>
+          </a:prstGeom>
+          <a:noFill/>
+        </p:spPr>
+        <p:txBody>
+          <a:bodyPr wrap="square" lIns="0" tIns="0" rIns="0" bIns="0" anchor="ctr"/>
+          <a:lstStyle/>
+          <a:p>
+            <a:pPr marL="0" indent="0">
+              <a:buNone/>
+            </a:pPr>
+            <a:r>
+              <a:rPr sz="900" b="1">
+                <a:solidFill>
+                  <a:srgbClr val="F5CE76"/>
+                </a:solidFill>
+                <a:latin typeface="Calibri"/>
+                <a:ea typeface="Calibri"/>
+                <a:cs typeface="Calibri"/>
+              </a:rPr>
+              <a:t>40′ FCL</a:t>
+            </a:r>
+            <a:endParaRPr sz="900"/>
+          </a:p>
+        </p:txBody>
+      </p:sp>
+      <p:sp>
+        <p:nvSpPr>
+          <p:cNvPr id="51" name="Text 46">
+            <a:extLst>
+              <a:ext uri="{FF2B5EF4-FFF2-40B4-BE49-F238E27FC236}">
+                <a16:creationId xmlns:a16="http://schemas.microsoft.com/office/drawing/2014/main" id="{1CB0E785-438F-46B1-9B4D-45FFA085CF82}"/>
+              </a:ext>
+            </a:extLst>
+          </p:cNvPr>
+          <p:cNvSpPr>
+            <a:spLocks noGrp="1"/>
+          </p:cNvSpPr>
+          <p:nvPr/>
+        </p:nvSpPr>
+        <p:spPr>
+          <a:xfrm>
+            <a:off x="7132320" y="5262372"/>
+            <a:ext cx="1508760" cy="192024"/>
+          </a:xfrm>
+          <a:prstGeom prst="rect">
+            <a:avLst/>
+          </a:prstGeom>
+          <a:noFill/>
+        </p:spPr>
+        <p:txBody>
+          <a:bodyPr wrap="square" lIns="0" tIns="0" rIns="0" bIns="0" anchor="ctr"/>
+          <a:lstStyle/>
+          <a:p>
+            <a:pPr marL="0" indent="0" algn="r">
+              <a:buNone/>
+            </a:pPr>
+            <a:r>
+              <a:rPr sz="950" b="1">
+                <a:solidFill>
+                  <a:srgbClr val="F5CE76"/>
+                </a:solidFill>
+                <a:latin typeface="Calibri"/>
+                <a:ea typeface="Calibri"/>
+                <a:cs typeface="Calibri"/>
+              </a:rPr>
+              <a:t>$1,960 / 88,18 ₴</a:t>
+            </a:r>
+            <a:endParaRPr sz="950"/>
+          </a:p>
+        </p:txBody>
+      </p:sp>
+      <p:sp>
+        <p:nvSpPr>
+          <p:cNvPr id="52" name="Text 47">
+            <a:extLst>
+              <a:ext uri="{FF2B5EF4-FFF2-40B4-BE49-F238E27FC236}">
+                <a16:creationId xmlns:a16="http://schemas.microsoft.com/office/drawing/2014/main" id="{843D82C3-467A-4031-AA4E-8835A62B789E}"/>
+              </a:ext>
+            </a:extLst>
+          </p:cNvPr>
+          <p:cNvSpPr>
+            <a:spLocks noGrp="1"/>
+          </p:cNvSpPr>
+          <p:nvPr/>
+        </p:nvSpPr>
+        <p:spPr>
+          <a:xfrm>
+            <a:off x="6492240" y="5468112"/>
+            <a:ext cx="658368" cy="192024"/>
+          </a:xfrm>
+          <a:prstGeom prst="rect">
+            <a:avLst/>
+          </a:prstGeom>
+          <a:noFill/>
+        </p:spPr>
+        <p:txBody>
+          <a:bodyPr wrap="square" lIns="0" tIns="0" rIns="0" bIns="0" anchor="ctr"/>
+          <a:lstStyle/>
+          <a:p>
+            <a:pPr marL="0" indent="0">
+              <a:buNone/>
+            </a:pPr>
+            <a:r>
+              <a:rPr sz="900">
+                <a:solidFill>
+                  <a:srgbClr val="D2E4CE"/>
+                </a:solidFill>
+                <a:latin typeface="Calibri"/>
+                <a:ea typeface="Calibri"/>
+                <a:cs typeface="Calibri"/>
+              </a:rPr>
+              <a:t>10 палет</a:t>
+            </a:r>
+            <a:endParaRPr sz="900"/>
+          </a:p>
+        </p:txBody>
+      </p:sp>
+      <p:sp>
+        <p:nvSpPr>
+          <p:cNvPr id="53" name="Text 48">
+            <a:extLst>
+              <a:ext uri="{FF2B5EF4-FFF2-40B4-BE49-F238E27FC236}">
+                <a16:creationId xmlns:a16="http://schemas.microsoft.com/office/drawing/2014/main" id="{219E8FB0-85D4-446F-8CAB-519B563DBBC5}"/>
+              </a:ext>
+            </a:extLst>
+          </p:cNvPr>
+          <p:cNvSpPr>
+            <a:spLocks noGrp="1"/>
+          </p:cNvSpPr>
+          <p:nvPr/>
+        </p:nvSpPr>
+        <p:spPr>
+          <a:xfrm>
+            <a:off x="7132320" y="5468112"/>
+            <a:ext cx="1508760" cy="192024"/>
+          </a:xfrm>
+          <a:prstGeom prst="rect">
+            <a:avLst/>
+          </a:prstGeom>
+          <a:noFill/>
+        </p:spPr>
+        <p:txBody>
+          <a:bodyPr wrap="square" lIns="0" tIns="0" rIns="0" bIns="0" anchor="ctr"/>
+          <a:lstStyle/>
+          <a:p>
+            <a:pPr marL="0" indent="0" algn="r">
+              <a:buNone/>
+            </a:pPr>
+            <a:r>
+              <a:rPr sz="950">
+                <a:solidFill>
+                  <a:srgbClr val="FCF9F0"/>
+                </a:solidFill>
+                <a:latin typeface="Calibri"/>
+                <a:ea typeface="Calibri"/>
+                <a:cs typeface="Calibri"/>
+              </a:rPr>
+              <a:t>$2,026 / 91,16 ₴</a:t>
+            </a:r>
+            <a:endParaRPr sz="950"/>
+          </a:p>
+        </p:txBody>
+      </p:sp>
+      <p:sp>
+        <p:nvSpPr>
+          <p:cNvPr id="56" name="Shape 51">
+            <a:extLst>
+              <a:ext uri="{FF2B5EF4-FFF2-40B4-BE49-F238E27FC236}">
+                <a16:creationId xmlns:a16="http://schemas.microsoft.com/office/drawing/2014/main" id="{251A2DC7-D0DC-4DDD-94FC-121AF67D8149}"/>
+              </a:ext>
+            </a:extLst>
+          </p:cNvPr>
+          <p:cNvSpPr>
+            <a:spLocks noGrp="1"/>
+          </p:cNvSpPr>
+          <p:nvPr/>
+        </p:nvSpPr>
+        <p:spPr>
+          <a:xfrm>
+            <a:off x="9015984" y="1536192"/>
+            <a:ext cx="2706624" cy="4626864"/>
+          </a:xfrm>
+          <a:prstGeom prst="roundRect">
+            <a:avLst>
+              <a:gd name="adj" fmla="val 4054"/>
+            </a:avLst>
+          </a:prstGeom>
+          <a:solidFill>
+            <a:srgbClr val="12452B">
+              <a:alpha val="90000"/>
+            </a:srgbClr>
+          </a:solidFill>
+          <a:ln w="15875">
+            <a:solidFill>
+              <a:srgbClr val="C89C40"/>
+            </a:solidFill>
+            <a:prstDash val="solid"/>
+          </a:ln>
+          <a:effectLst>
+            <a:outerShdw blurRad="177800" dist="38100" dir="5400000" algn="bl" rotWithShape="0">
+              <a:srgbClr val="000000">
+                <a:alpha val="45000"/>
+              </a:srgbClr>
+            </a:outerShdw>
+          </a:effectLst>
+        </p:spPr>
+        <p:txBody>
+          <a:bodyPr/>
+          <a:lstStyle/>
+          <a:p>
+            <a:endParaRPr/>
+          </a:p>
+        </p:txBody>
+      </p:sp>
+      <p:pic>
+        <p:nvPicPr>
+          <p:cNvPr id="136" name="Picture 135" descr="card_white.jpg"/>
+          <p:cNvPicPr>
+            <a:picLocks noChangeAspect="1"/>
+          </p:cNvPicPr>
+          <p:nvPr/>
+        </p:nvPicPr>
+        <p:blipFill>
+          <a:blip r:embed="rId10"/>
+          <a:stretch>
+            <a:fillRect/>
+          </a:stretch>
+        </p:blipFill>
+        <p:spPr>
+          <a:xfrm>
+            <a:off x="9198864" y="1700784"/>
+            <a:ext cx="2340864" cy="1810512"/>
+          </a:xfrm>
+          <a:prstGeom prst="roundRect">
+            <a:avLst/>
+          </a:prstGeom>
+        </p:spPr>
+      </p:pic>
+      <p:sp>
+        <p:nvSpPr>
+          <p:cNvPr id="58" name="Shape 52">
+            <a:extLst>
+              <a:ext uri="{FF2B5EF4-FFF2-40B4-BE49-F238E27FC236}">
+                <a16:creationId xmlns:a16="http://schemas.microsoft.com/office/drawing/2014/main" id="{F2C3BE02-E820-4936-861D-46D3D3E589BF}"/>
+              </a:ext>
+            </a:extLst>
+          </p:cNvPr>
+          <p:cNvSpPr>
+            <a:spLocks noGrp="1"/>
+          </p:cNvSpPr>
+          <p:nvPr/>
+        </p:nvSpPr>
+        <p:spPr>
+          <a:xfrm>
+            <a:off x="9198864" y="1700784"/>
+            <a:ext cx="2340864" cy="1810512"/>
+          </a:xfrm>
+          <a:prstGeom prst="rect">
+            <a:avLst/>
+          </a:prstGeom>
+          <a:ln w="12700">
+            <a:solidFill>
+              <a:srgbClr val="C89C40"/>
+            </a:solidFill>
+            <a:prstDash val="solid"/>
+          </a:ln>
+        </p:spPr>
+        <p:txBody>
+          <a:bodyPr/>
+          <a:lstStyle/>
+          <a:p>
+            <a:endParaRPr/>
+          </a:p>
+        </p:txBody>
+      </p:sp>
+      <p:sp>
+        <p:nvSpPr>
+          <p:cNvPr id="59" name="Shape 53">
+            <a:extLst>
+              <a:ext uri="{FF2B5EF4-FFF2-40B4-BE49-F238E27FC236}">
+                <a16:creationId xmlns:a16="http://schemas.microsoft.com/office/drawing/2014/main" id="{1490DA2D-D85E-4489-896A-3376EF0EC2F2}"/>
+              </a:ext>
+            </a:extLst>
+          </p:cNvPr>
+          <p:cNvSpPr>
+            <a:spLocks noGrp="1"/>
+          </p:cNvSpPr>
+          <p:nvPr/>
+        </p:nvSpPr>
+        <p:spPr>
+          <a:xfrm>
+            <a:off x="9198864" y="3611880"/>
+            <a:ext cx="1417320" cy="237744"/>
+          </a:xfrm>
+          <a:prstGeom prst="roundRect">
+            <a:avLst>
+              <a:gd name="adj" fmla="val 23077"/>
+            </a:avLst>
+          </a:prstGeom>
+          <a:solidFill>
+            <a:srgbClr val="B3312D"/>
+          </a:solidFill>
+          <a:ln w="6350">
+            <a:solidFill>
+              <a:srgbClr val="C89C40"/>
+            </a:solidFill>
+            <a:prstDash val="solid"/>
+          </a:ln>
+        </p:spPr>
+        <p:txBody>
+          <a:bodyPr/>
+          <a:lstStyle/>
+          <a:p>
+            <a:endParaRPr/>
+          </a:p>
+        </p:txBody>
+      </p:sp>
+      <p:sp>
+        <p:nvSpPr>
+          <p:cNvPr id="60" name="Text 54">
+            <a:extLst>
+              <a:ext uri="{FF2B5EF4-FFF2-40B4-BE49-F238E27FC236}">
+                <a16:creationId xmlns:a16="http://schemas.microsoft.com/office/drawing/2014/main" id="{1BAD208D-D6B2-4DF7-AE5B-808AFC5016F0}"/>
+              </a:ext>
+            </a:extLst>
+          </p:cNvPr>
+          <p:cNvSpPr>
+            <a:spLocks noGrp="1"/>
+          </p:cNvSpPr>
+          <p:nvPr/>
+        </p:nvSpPr>
+        <p:spPr>
+          <a:xfrm>
+            <a:off x="9198864" y="3621024"/>
+            <a:ext cx="1417320" cy="219456"/>
+          </a:xfrm>
+          <a:prstGeom prst="rect">
+            <a:avLst/>
+          </a:prstGeom>
+          <a:noFill/>
+        </p:spPr>
+        <p:txBody>
+          <a:bodyPr wrap="square" lIns="0" tIns="0" rIns="0" bIns="0" anchor="ctr"/>
+          <a:lstStyle/>
+          <a:p>
+            <a:pPr marL="0" indent="0" algn="ctr">
+              <a:buNone/>
+            </a:pPr>
+            <a:r>
+              <a:rPr sz="850" b="1" spc="60">
+                <a:solidFill>
+                  <a:srgbClr val="FFFFFF"/>
+                </a:solidFill>
+                <a:latin typeface="Calibri"/>
+                <a:ea typeface="Calibri"/>
+                <a:cs typeface="Calibri"/>
+              </a:rPr>
+              <a:t>ЛОТОК 210 Г · AMBIENT</a:t>
+            </a:r>
+            <a:endParaRPr sz="850"/>
+          </a:p>
+        </p:txBody>
+      </p:sp>
+      <p:sp>
+        <p:nvSpPr>
+          <p:cNvPr id="61" name="Text 55">
+            <a:extLst>
+              <a:ext uri="{FF2B5EF4-FFF2-40B4-BE49-F238E27FC236}">
+                <a16:creationId xmlns:a16="http://schemas.microsoft.com/office/drawing/2014/main" id="{D32F869F-1422-4380-8509-FD4EC7795CA7}"/>
+              </a:ext>
+            </a:extLst>
+          </p:cNvPr>
+          <p:cNvSpPr>
+            <a:spLocks noGrp="1"/>
+          </p:cNvSpPr>
+          <p:nvPr/>
+        </p:nvSpPr>
+        <p:spPr>
+          <a:xfrm>
+            <a:off x="9198864" y="3931920"/>
+            <a:ext cx="2340864" cy="548640"/>
+          </a:xfrm>
+          <a:prstGeom prst="rect">
+            <a:avLst/>
+          </a:prstGeom>
+          <a:noFill/>
+        </p:spPr>
+        <p:txBody>
+          <a:bodyPr wrap="square" lIns="0" tIns="0" rIns="0" bIns="0" anchor="t"/>
+          <a:lstStyle/>
+          <a:p>
+            <a:pPr marL="0" indent="0">
+              <a:buNone/>
+            </a:pPr>
+            <a:r>
+              <a:rPr sz="1450" b="1">
+                <a:solidFill>
+                  <a:srgbClr val="FFFFFF"/>
+                </a:solidFill>
+                <a:latin typeface="Cambria"/>
+                <a:ea typeface="Cambria"/>
+                <a:cs typeface="Cambria"/>
+              </a:rPr>
+              <a:t>Cooked White Rice</a:t>
+            </a:r>
+            <a:endParaRPr sz="1450"/>
+          </a:p>
+        </p:txBody>
+      </p:sp>
+      <p:sp>
+        <p:nvSpPr>
+          <p:cNvPr id="62" name="Text 56">
+            <a:extLst>
+              <a:ext uri="{FF2B5EF4-FFF2-40B4-BE49-F238E27FC236}">
+                <a16:creationId xmlns:a16="http://schemas.microsoft.com/office/drawing/2014/main" id="{C56AF3DF-CE25-4AEE-B9EA-65DA2178D6C8}"/>
+              </a:ext>
+            </a:extLst>
+          </p:cNvPr>
+          <p:cNvSpPr>
+            <a:spLocks noGrp="1"/>
+          </p:cNvSpPr>
+          <p:nvPr/>
+        </p:nvSpPr>
+        <p:spPr>
+          <a:xfrm>
+            <a:off x="9198864" y="4498848"/>
+            <a:ext cx="2340864" cy="237744"/>
+          </a:xfrm>
+          <a:prstGeom prst="rect">
+            <a:avLst/>
+          </a:prstGeom>
+          <a:noFill/>
+        </p:spPr>
+        <p:txBody>
+          <a:bodyPr wrap="square" lIns="0" tIns="0" rIns="0" bIns="0" anchor="ctr"/>
+          <a:lstStyle/>
+          <a:p>
+            <a:pPr marL="0" indent="0">
+              <a:buNone/>
+            </a:pPr>
+            <a:r>
+              <a:rPr sz="1000">
+                <a:solidFill>
+                  <a:srgbClr val="D2E4CE"/>
+                </a:solidFill>
+                <a:latin typeface="Calibri"/>
+                <a:ea typeface="Calibri"/>
+                <a:cs typeface="Calibri"/>
+              </a:rPr>
+              <a:t>FOB $0,600 · </a:t>
+            </a:r>
+            <a:endParaRPr sz="1000"/>
+          </a:p>
+        </p:txBody>
+      </p:sp>
+      <p:sp>
+        <p:nvSpPr>
+          <p:cNvPr id="63" name="Shape 57">
+            <a:extLst>
+              <a:ext uri="{FF2B5EF4-FFF2-40B4-BE49-F238E27FC236}">
+                <a16:creationId xmlns:a16="http://schemas.microsoft.com/office/drawing/2014/main" id="{B87B54C9-A9BC-4125-8EB8-417D870F885A}"/>
+              </a:ext>
+            </a:extLst>
+          </p:cNvPr>
+          <p:cNvSpPr>
+            <a:spLocks noGrp="1"/>
+          </p:cNvSpPr>
+          <p:nvPr/>
+        </p:nvSpPr>
+        <p:spPr>
+          <a:xfrm>
+            <a:off x="9198864" y="4791456"/>
+            <a:ext cx="2340864" cy="1170432"/>
+          </a:xfrm>
+          <a:prstGeom prst="roundRect">
+            <a:avLst>
+              <a:gd name="adj" fmla="val 5469"/>
+            </a:avLst>
+          </a:prstGeom>
+          <a:solidFill>
+            <a:srgbClr val="1A5433">
+              <a:alpha val="92000"/>
+            </a:srgbClr>
+          </a:solidFill>
+          <a:ln w="9525">
+            <a:solidFill>
+              <a:srgbClr val="C89C40"/>
+            </a:solidFill>
+            <a:prstDash val="solid"/>
+          </a:ln>
+        </p:spPr>
+        <p:txBody>
+          <a:bodyPr/>
+          <a:lstStyle/>
+          <a:p>
+            <a:endParaRPr/>
+          </a:p>
+        </p:txBody>
+      </p:sp>
+      <p:sp>
+        <p:nvSpPr>
+          <p:cNvPr id="64" name="Text 58">
+            <a:extLst>
+              <a:ext uri="{FF2B5EF4-FFF2-40B4-BE49-F238E27FC236}">
+                <a16:creationId xmlns:a16="http://schemas.microsoft.com/office/drawing/2014/main" id="{5CDDC64B-111E-4034-BB84-739716A535C5}"/>
+              </a:ext>
+            </a:extLst>
+          </p:cNvPr>
+          <p:cNvSpPr>
+            <a:spLocks noGrp="1"/>
+          </p:cNvSpPr>
+          <p:nvPr/>
+        </p:nvSpPr>
+        <p:spPr>
+          <a:xfrm>
+            <a:off x="9308592" y="4855464"/>
+            <a:ext cx="2148840" cy="182880"/>
+          </a:xfrm>
+          <a:prstGeom prst="rect">
+            <a:avLst/>
+          </a:prstGeom>
+          <a:noFill/>
+        </p:spPr>
+        <p:txBody>
+          <a:bodyPr wrap="square" lIns="0" tIns="0" rIns="0" bIns="0" anchor="ctr"/>
+          <a:lstStyle/>
+          <a:p>
+            <a:pPr marL="0" indent="0">
+              <a:buNone/>
+            </a:pPr>
+            <a:r>
+              <a:rPr sz="750" b="1" spc="100">
+                <a:solidFill>
+                  <a:srgbClr val="F5CE76"/>
+                </a:solidFill>
+                <a:latin typeface="Calibri"/>
+                <a:ea typeface="Calibri"/>
+                <a:cs typeface="Calibri"/>
+              </a:rPr>
+              <a:t>СОБІВАРТІСТЬ, ЗА ЛОТОК</a:t>
+            </a:r>
+            <a:endParaRPr sz="750"/>
+          </a:p>
+        </p:txBody>
+      </p:sp>
+      <p:sp>
+        <p:nvSpPr>
+          <p:cNvPr id="65" name="Text 59">
+            <a:extLst>
+              <a:ext uri="{FF2B5EF4-FFF2-40B4-BE49-F238E27FC236}">
+                <a16:creationId xmlns:a16="http://schemas.microsoft.com/office/drawing/2014/main" id="{B6A939BB-1670-4E52-9CBF-2148FF618BE5}"/>
+              </a:ext>
+            </a:extLst>
+          </p:cNvPr>
+          <p:cNvSpPr>
+            <a:spLocks noGrp="1"/>
+          </p:cNvSpPr>
+          <p:nvPr/>
+        </p:nvSpPr>
+        <p:spPr>
+          <a:xfrm>
+            <a:off x="9308592" y="5056632"/>
+            <a:ext cx="658368" cy="192024"/>
+          </a:xfrm>
+          <a:prstGeom prst="rect">
+            <a:avLst/>
+          </a:prstGeom>
+          <a:noFill/>
+        </p:spPr>
+        <p:txBody>
+          <a:bodyPr wrap="square" lIns="0" tIns="0" rIns="0" bIns="0" anchor="ctr"/>
+          <a:lstStyle/>
+          <a:p>
+            <a:pPr marL="0" indent="0">
+              <a:buNone/>
+            </a:pPr>
+            <a:r>
+              <a:rPr sz="900">
+                <a:solidFill>
+                  <a:srgbClr val="D2E4CE"/>
+                </a:solidFill>
+                <a:latin typeface="Calibri"/>
+                <a:ea typeface="Calibri"/>
+                <a:cs typeface="Calibri"/>
+              </a:rPr>
+              <a:t>20′ FCL</a:t>
+            </a:r>
+            <a:endParaRPr sz="900"/>
+          </a:p>
+        </p:txBody>
+      </p:sp>
+      <p:sp>
+        <p:nvSpPr>
+          <p:cNvPr id="66" name="Text 60">
+            <a:extLst>
+              <a:ext uri="{FF2B5EF4-FFF2-40B4-BE49-F238E27FC236}">
+                <a16:creationId xmlns:a16="http://schemas.microsoft.com/office/drawing/2014/main" id="{89315069-AA8B-4FB9-B0D8-4EEFAFCC5D68}"/>
+              </a:ext>
+            </a:extLst>
+          </p:cNvPr>
+          <p:cNvSpPr>
+            <a:spLocks noGrp="1"/>
+          </p:cNvSpPr>
+          <p:nvPr/>
+        </p:nvSpPr>
+        <p:spPr>
+          <a:xfrm>
+            <a:off x="9948672" y="5056632"/>
+            <a:ext cx="1508760" cy="192024"/>
+          </a:xfrm>
+          <a:prstGeom prst="rect">
+            <a:avLst/>
+          </a:prstGeom>
+          <a:noFill/>
+        </p:spPr>
+        <p:txBody>
+          <a:bodyPr wrap="square" lIns="0" tIns="0" rIns="0" bIns="0" anchor="ctr"/>
+          <a:lstStyle/>
+          <a:p>
+            <a:pPr marL="0" indent="0" algn="r">
+              <a:buNone/>
+            </a:pPr>
+            <a:r>
+              <a:rPr sz="950">
+                <a:solidFill>
+                  <a:srgbClr val="FCF9F0"/>
+                </a:solidFill>
+                <a:latin typeface="Calibri"/>
+                <a:ea typeface="Calibri"/>
+                <a:cs typeface="Calibri"/>
+              </a:rPr>
+              <a:t>$2,176 / 97,92 ₴</a:t>
+            </a:r>
+            <a:endParaRPr sz="950"/>
+          </a:p>
+        </p:txBody>
+      </p:sp>
+      <p:sp>
+        <p:nvSpPr>
+          <p:cNvPr id="67" name="Text 61">
+            <a:extLst>
+              <a:ext uri="{FF2B5EF4-FFF2-40B4-BE49-F238E27FC236}">
+                <a16:creationId xmlns:a16="http://schemas.microsoft.com/office/drawing/2014/main" id="{EF2C8EF4-AF40-4A42-B5F5-CD3A89AECD13}"/>
+              </a:ext>
+            </a:extLst>
+          </p:cNvPr>
+          <p:cNvSpPr>
+            <a:spLocks noGrp="1"/>
+          </p:cNvSpPr>
+          <p:nvPr/>
+        </p:nvSpPr>
+        <p:spPr>
+          <a:xfrm>
+            <a:off x="9308592" y="5262372"/>
+            <a:ext cx="658368" cy="192024"/>
+          </a:xfrm>
+          <a:prstGeom prst="rect">
+            <a:avLst/>
+          </a:prstGeom>
+          <a:noFill/>
+        </p:spPr>
+        <p:txBody>
+          <a:bodyPr wrap="square" lIns="0" tIns="0" rIns="0" bIns="0" anchor="ctr"/>
+          <a:lstStyle/>
+          <a:p>
+            <a:pPr marL="0" indent="0">
+              <a:buNone/>
+            </a:pPr>
+            <a:r>
+              <a:rPr sz="900" b="1">
+                <a:solidFill>
+                  <a:srgbClr val="F5CE76"/>
+                </a:solidFill>
+                <a:latin typeface="Calibri"/>
+                <a:ea typeface="Calibri"/>
+                <a:cs typeface="Calibri"/>
+              </a:rPr>
+              <a:t>40′ FCL</a:t>
+            </a:r>
+            <a:endParaRPr sz="900"/>
+          </a:p>
+        </p:txBody>
+      </p:sp>
+      <p:sp>
+        <p:nvSpPr>
+          <p:cNvPr id="68" name="Text 62">
+            <a:extLst>
+              <a:ext uri="{FF2B5EF4-FFF2-40B4-BE49-F238E27FC236}">
+                <a16:creationId xmlns:a16="http://schemas.microsoft.com/office/drawing/2014/main" id="{4A437B21-276B-4A8E-B4FA-E55E4C8EB3D4}"/>
+              </a:ext>
+            </a:extLst>
+          </p:cNvPr>
+          <p:cNvSpPr>
+            <a:spLocks noGrp="1"/>
+          </p:cNvSpPr>
+          <p:nvPr/>
+        </p:nvSpPr>
+        <p:spPr>
+          <a:xfrm>
+            <a:off x="9948672" y="5262372"/>
+            <a:ext cx="1508760" cy="192024"/>
+          </a:xfrm>
+          <a:prstGeom prst="rect">
+            <a:avLst/>
+          </a:prstGeom>
+          <a:noFill/>
+        </p:spPr>
+        <p:txBody>
+          <a:bodyPr wrap="square" lIns="0" tIns="0" rIns="0" bIns="0" anchor="ctr"/>
+          <a:lstStyle/>
+          <a:p>
+            <a:pPr marL="0" indent="0" algn="r">
+              <a:buNone/>
+            </a:pPr>
+            <a:r>
+              <a:rPr sz="950" b="1">
+                <a:solidFill>
+                  <a:srgbClr val="F5CE76"/>
+                </a:solidFill>
+                <a:latin typeface="Calibri"/>
+                <a:ea typeface="Calibri"/>
+                <a:cs typeface="Calibri"/>
+              </a:rPr>
+              <a:t>$1,960 / 88,18 ₴</a:t>
+            </a:r>
+            <a:endParaRPr sz="950"/>
+          </a:p>
+        </p:txBody>
+      </p:sp>
+      <p:sp>
+        <p:nvSpPr>
+          <p:cNvPr id="69" name="Text 63">
+            <a:extLst>
+              <a:ext uri="{FF2B5EF4-FFF2-40B4-BE49-F238E27FC236}">
+                <a16:creationId xmlns:a16="http://schemas.microsoft.com/office/drawing/2014/main" id="{D3FCC8C4-076B-4094-B816-197B2B0E688C}"/>
+              </a:ext>
+            </a:extLst>
+          </p:cNvPr>
+          <p:cNvSpPr>
+            <a:spLocks noGrp="1"/>
+          </p:cNvSpPr>
+          <p:nvPr/>
+        </p:nvSpPr>
+        <p:spPr>
+          <a:xfrm>
+            <a:off x="9308592" y="5468112"/>
+            <a:ext cx="658368" cy="192024"/>
+          </a:xfrm>
+          <a:prstGeom prst="rect">
+            <a:avLst/>
+          </a:prstGeom>
+          <a:noFill/>
+        </p:spPr>
+        <p:txBody>
+          <a:bodyPr wrap="square" lIns="0" tIns="0" rIns="0" bIns="0" anchor="ctr"/>
+          <a:lstStyle/>
+          <a:p>
+            <a:pPr marL="0" indent="0">
+              <a:buNone/>
+            </a:pPr>
+            <a:r>
+              <a:rPr sz="900">
+                <a:solidFill>
+                  <a:srgbClr val="D2E4CE"/>
+                </a:solidFill>
+                <a:latin typeface="Calibri"/>
+                <a:ea typeface="Calibri"/>
+                <a:cs typeface="Calibri"/>
+              </a:rPr>
+              <a:t>10 палет</a:t>
+            </a:r>
+            <a:endParaRPr sz="900"/>
+          </a:p>
+        </p:txBody>
+      </p:sp>
+      <p:sp>
+        <p:nvSpPr>
+          <p:cNvPr id="70" name="Text 64">
+            <a:extLst>
+              <a:ext uri="{FF2B5EF4-FFF2-40B4-BE49-F238E27FC236}">
+                <a16:creationId xmlns:a16="http://schemas.microsoft.com/office/drawing/2014/main" id="{4AC58F4C-4853-4DE5-929B-AF4822760C15}"/>
+              </a:ext>
+            </a:extLst>
+          </p:cNvPr>
+          <p:cNvSpPr>
+            <a:spLocks noGrp="1"/>
+          </p:cNvSpPr>
+          <p:nvPr/>
+        </p:nvSpPr>
+        <p:spPr>
+          <a:xfrm>
+            <a:off x="9948672" y="5468112"/>
+            <a:ext cx="1508760" cy="192024"/>
+          </a:xfrm>
+          <a:prstGeom prst="rect">
+            <a:avLst/>
+          </a:prstGeom>
+          <a:noFill/>
+        </p:spPr>
+        <p:txBody>
+          <a:bodyPr wrap="square" lIns="0" tIns="0" rIns="0" bIns="0" anchor="ctr"/>
+          <a:lstStyle/>
+          <a:p>
+            <a:pPr marL="0" indent="0" algn="r">
+              <a:buNone/>
+            </a:pPr>
+            <a:r>
+              <a:rPr sz="950">
+                <a:solidFill>
+                  <a:srgbClr val="FCF9F0"/>
+                </a:solidFill>
+                <a:latin typeface="Calibri"/>
+                <a:ea typeface="Calibri"/>
+                <a:cs typeface="Calibri"/>
+              </a:rPr>
+              <a:t>$2,026 / 91,16 ₴</a:t>
+            </a:r>
+            <a:endParaRPr sz="950"/>
+          </a:p>
+        </p:txBody>
+      </p:sp>
+      <p:sp>
+        <p:nvSpPr>
+          <p:cNvPr id="137" name="TextBox 136"/>
+          <p:cNvSpPr txBox="1"/>
+          <p:nvPr/>
+        </p:nvSpPr>
+        <p:spPr>
+          <a:xfrm>
+            <a:off x="566928" y="6355080"/>
+            <a:ext cx="11064240" cy="274320"/>
+          </a:xfrm>
+          <a:prstGeom prst="rect">
+            <a:avLst/>
+          </a:prstGeom>
+          <a:noFill/>
+        </p:spPr>
+        <p:txBody>
+          <a:bodyPr wrap="none" lIns="0" rIns="0" tIns="0" bIns="0">
+            <a:spAutoFit/>
+          </a:bodyPr>
+          <a:lstStyle/>
+          <a:p>
+            <a:r>
+              <a:rPr sz="900">
+                <a:solidFill>
+                  <a:srgbClr val="C3D7BF"/>
+                </a:solidFill>
+                <a:latin typeface="Calibri"/>
+              </a:rPr>
+              <a:t>Джерело: Quotation One's International (KBROS); Self_Cost_Rice_Brand..xlsx, аркуш «ONE'S INTERNATIONAL_Паллеты» · мито 10%, ПДВ 20%, транспорт, кредитні гроші 2,5% · курс 45,00 UAH/USD.</a:t>
+            </a:r>
+          </a:p>
+        </p:txBody>
+      </p:sp>
+    </p:spTree>
+    <p:extLst>
+      <p:ext uri="{BB962C8B-B14F-4D97-AF65-F5344CB8AC3E}">
+        <p14:creationId xmlns:p14="http://schemas.microsoft.com/office/powerpoint/2010/main" val="1152137640"/>
       </p:ext>
     </p:extLst>
   </p:cSld>

--- a/RTE_Rice_Suppliers.pptx
+++ b/RTE_Rice_Suppliers.pptx
@@ -8346,14 +8346,14 @@
       </p:sp>
       <p:pic>
         <p:nvPicPr>
-          <p:cNvPr id="37" name="Picture 36" descr="hero_collage.jpg"/>
+          <p:cNvPr id="37" name="Picture 36" descr="hero_collage_tall.jpg"/>
           <p:cNvPicPr>
             <a:picLocks noChangeAspect="1"/>
           </p:cNvPicPr>
           <p:nvPr/>
         </p:nvPicPr>
         <p:blipFill>
-          <a:blip r:embed="rId2"/>
+          <a:blip r:embed="rId5"/>
           <a:stretch>
             <a:fillRect/>
           </a:stretch>
@@ -8361,7 +8361,7 @@
         <p:spPr>
           <a:xfrm>
             <a:off x="7534656" y="1536192"/>
-            <a:ext cx="4096512" cy="2834640"/>
+            <a:ext cx="4096512" cy="3401568"/>
           </a:xfrm>
           <a:prstGeom prst="roundRect">
             <a:avLst/>
@@ -8385,7 +8385,7 @@
         <p:spPr>
           <a:xfrm>
             <a:off x="7534656" y="1536192"/>
-            <a:ext cx="4096512" cy="2834640"/>
+            <a:ext cx="4096512" cy="3401568"/>
           </a:xfrm>
           <a:prstGeom prst="rect">
             <a:avLst/>
@@ -8421,7 +8421,7 @@
         </p:nvSpPr>
         <p:spPr>
           <a:xfrm>
-            <a:off x="7534656" y="4526280"/>
+            <a:off x="7534656" y="5093208"/>
             <a:ext cx="4096512" cy="484632"/>
           </a:xfrm>
           <a:prstGeom prst="roundRect">
@@ -8472,7 +8472,7 @@
         </p:nvSpPr>
         <p:spPr>
           <a:xfrm>
-            <a:off x="7717536" y="4581144"/>
+            <a:off x="7717536" y="5148072"/>
             <a:ext cx="1737360" cy="365760"/>
           </a:xfrm>
           <a:prstGeom prst="rect">
@@ -8529,7 +8529,7 @@
         </p:nvSpPr>
         <p:spPr>
           <a:xfrm>
-            <a:off x="9418320" y="4581144"/>
+            <a:off x="9418320" y="5148072"/>
             <a:ext cx="2057400" cy="365760"/>
           </a:xfrm>
           <a:prstGeom prst="rect">
@@ -8575,7 +8575,7 @@
         </p:nvSpPr>
         <p:spPr>
           <a:xfrm>
-            <a:off x="7534656" y="5093208"/>
+            <a:off x="7534656" y="5660136"/>
             <a:ext cx="4096512" cy="484632"/>
           </a:xfrm>
           <a:prstGeom prst="roundRect">
@@ -8626,7 +8626,7 @@
         </p:nvSpPr>
         <p:spPr>
           <a:xfrm>
-            <a:off x="7717536" y="5148072"/>
+            <a:off x="7717536" y="5715000"/>
             <a:ext cx="1737360" cy="365760"/>
           </a:xfrm>
           <a:prstGeom prst="rect">
@@ -8683,160 +8683,6 @@
         </p:nvSpPr>
         <p:spPr>
           <a:xfrm>
-            <a:off x="9418320" y="5148072"/>
-            <a:ext cx="2057400" cy="365760"/>
-          </a:xfrm>
-          <a:prstGeom prst="rect">
-            <a:avLst/>
-          </a:prstGeom>
-          <a:noFill/>
-        </p:spPr>
-        <p:txBody>
-          <a:bodyPr wrap="square" lIns="0" tIns="0" rIns="0" bIns="0" anchor="ctr"/>
-          <a:lstStyle/>
-          <a:p>
-            <a:pPr marL="0" indent="0" algn="r">
-              <a:buNone/>
-            </a:pPr>
-            <a:r>
-              <a:rPr sz="1050">
-                <a:solidFill>
-                  <a:srgbClr val="FCF9F0"/>
-                </a:solidFill>
-                <a:latin typeface="Calibri"/>
-                <a:ea typeface="Calibri"/>
-                <a:cs typeface="Calibri"/>
-              </a:rPr>
-              <a:t>розігрів у мікрохвильовці</a:t>
-            </a:r>
-            <a:endParaRPr sz="1050"/>
-          </a:p>
-        </p:txBody>
-      </p:sp>
-      <p:sp>
-        <p:nvSpPr>
-          <p:cNvPr id="31" name="Shape 28">
-            <a:extLst>
-              <a:ext uri="{FF2B5EF4-FFF2-40B4-BE49-F238E27FC236}">
-                <a16:creationId xmlns:a16="http://schemas.microsoft.com/office/drawing/2014/main" id="{E9455139-65F1-448B-8A7C-86FFA827F351}"/>
-              </a:ext>
-            </a:extLst>
-          </p:cNvPr>
-          <p:cNvSpPr>
-            <a:spLocks noGrp="1"/>
-          </p:cNvSpPr>
-          <p:nvPr/>
-        </p:nvSpPr>
-        <p:spPr>
-          <a:xfrm>
-            <a:off x="7534656" y="5660136"/>
-            <a:ext cx="4096512" cy="484632"/>
-          </a:xfrm>
-          <a:prstGeom prst="roundRect">
-            <a:avLst>
-              <a:gd name="adj" fmla="val 15094"/>
-            </a:avLst>
-          </a:prstGeom>
-          <a:solidFill>
-            <a:srgbClr val="12452B">
-              <a:alpha val="90000"/>
-            </a:srgbClr>
-          </a:solidFill>
-          <a:ln w="15875">
-            <a:solidFill>
-              <a:srgbClr val="C89C40"/>
-            </a:solidFill>
-            <a:prstDash val="solid"/>
-          </a:ln>
-          <a:effectLst>
-            <a:outerShdw blurRad="177800" dist="38100" dir="5400000" algn="bl" rotWithShape="0">
-              <a:srgbClr val="000000">
-                <a:alpha val="45000"/>
-              </a:srgbClr>
-            </a:outerShdw>
-          </a:effectLst>
-        </p:spPr>
-        <p:txBody>
-          <a:bodyPr/>
-          <a:lstStyle/>
-          <a:p>
-            <a:endParaRPr/>
-          </a:p>
-        </p:txBody>
-      </p:sp>
-      <p:sp>
-        <p:nvSpPr>
-          <p:cNvPr id="32" name="Text 29">
-            <a:extLst>
-              <a:ext uri="{FF2B5EF4-FFF2-40B4-BE49-F238E27FC236}">
-                <a16:creationId xmlns:a16="http://schemas.microsoft.com/office/drawing/2014/main" id="{D40C00FA-3D9E-4C88-BA29-ECBF4916B185}"/>
-              </a:ext>
-            </a:extLst>
-          </p:cNvPr>
-          <p:cNvSpPr>
-            <a:spLocks noGrp="1"/>
-          </p:cNvSpPr>
-          <p:nvPr/>
-        </p:nvSpPr>
-        <p:spPr>
-          <a:xfrm>
-            <a:off x="7717536" y="5715000"/>
-            <a:ext cx="1737360" cy="365760"/>
-          </a:xfrm>
-          <a:prstGeom prst="rect">
-            <a:avLst/>
-          </a:prstGeom>
-          <a:noFill/>
-        </p:spPr>
-        <p:txBody>
-          <a:bodyPr wrap="square" lIns="0" tIns="0" rIns="0" bIns="0" anchor="ctr"/>
-          <a:lstStyle/>
-          <a:p>
-            <a:pPr marL="0" indent="0">
-              <a:buNone/>
-            </a:pPr>
-            <a:r>
-              <a:rPr sz="1900" b="1">
-                <a:solidFill>
-                  <a:srgbClr val="F5CE76"/>
-                </a:solidFill>
-                <a:latin typeface="Cambria"/>
-                <a:ea typeface="Cambria"/>
-                <a:cs typeface="Cambria"/>
-              </a:rPr>
-              <a:t>200</a:t>
-            </a:r>
-            <a:r>
-              <a:rPr sz="1100">
-                <a:solidFill>
-                  <a:srgbClr val="F5CE76"/>
-                </a:solidFill>
-                <a:latin typeface="Cambria"/>
-                <a:ea typeface="Cambria"/>
-                <a:cs typeface="Cambria"/>
-              </a:rPr>
-              <a:t> ctn</a:t>
-            </a:r>
-            <a:endParaRPr sz="1900"/>
-          </a:p>
-        </p:txBody>
-      </p:sp>
-      <p:sp>
-        <p:nvSpPr>
-          <p:cNvPr id="33" name="Text 30">
-            <a:extLst>
-              <a:ext uri="{FF2B5EF4-FFF2-40B4-BE49-F238E27FC236}">
-                <a16:creationId xmlns:a16="http://schemas.microsoft.com/office/drawing/2014/main" id="{5324D476-C6D4-42C7-BAFD-4CF0E84F17CB}"/>
-              </a:ext>
-            </a:extLst>
-          </p:cNvPr>
-          <p:cNvSpPr>
-            <a:spLocks noGrp="1"/>
-          </p:cNvSpPr>
-          <p:nvPr/>
-        </p:nvSpPr>
-        <p:spPr>
-          <a:xfrm>
             <a:off x="9418320" y="5715000"/>
             <a:ext cx="2057400" cy="365760"/>
           </a:xfrm>
@@ -8861,7 +8707,7 @@
                 <a:ea typeface="Calibri"/>
                 <a:cs typeface="Calibri"/>
               </a:rPr>
-              <a:t>мінімальне замовлення, SKU</a:t>
+              <a:t>розігрів у мікрохвильовці</a:t>
             </a:r>
             <a:endParaRPr sz="1050"/>
           </a:p>

--- a/RTE_Rice_Suppliers.pptx
+++ b/RTE_Rice_Suppliers.pptx
@@ -5,7 +5,7 @@
     <p:sldMasterId id="2147483648" r:id="rId1"/>
   </p:sldMasterIdLst>
   <p:notesMasterIdLst>
-    <p:notesMasterId r:id="rId15"/>
+    <p:notesMasterId r:id="rId17"/>
   </p:notesMasterIdLst>
   <p:sldIdLst>
     <p:sldId id="256" r:id="rId2"/>
@@ -21,8 +21,8 @@
     <p:sldId id="264" r:id="rId12"/>
     <p:sldId id="265" r:id="rId13"/>
     <p:sldId id="266" r:id="rId14"/>
-    <p:sldId id="269" r:id="rId20"/>
-    <p:sldId id="270" r:id="rId21"/>
+    <p:sldId id="269" r:id="rId15"/>
+    <p:sldId id="270" r:id="rId16"/>
   </p:sldIdLst>
   <p:sldSz cx="12192000" cy="6858000"/>
   <p:notesSz cx="6858000" cy="9144000"/>
@@ -4650,7 +4650,7 @@
               </a:defRPr>
             </a:pPr>
             <a:r>
-              <a:rPr sz="3225" b="1" i="0">
+              <a:rPr sz="3225" b="1" i="0" dirty="0">
                 <a:solidFill>
                   <a:srgbClr val="FFFFFF"/>
                 </a:solidFill>
@@ -4658,9 +4658,53 @@
                 <a:ea typeface="Calibri"/>
                 <a:cs typeface="Calibri"/>
               </a:rPr>
-              <a:t>Double Cup — асортимент і собівартість</a:t>
-            </a:r>
-            <a:endParaRPr sz="3100"/>
+              <a:t>Double Cup — </a:t>
+            </a:r>
+            <a:r>
+              <a:rPr sz="3225" b="1" i="0" dirty="0" err="1">
+                <a:solidFill>
+                  <a:srgbClr val="FFFFFF"/>
+                </a:solidFill>
+                <a:latin typeface="Calibri"/>
+                <a:ea typeface="Calibri"/>
+                <a:cs typeface="Calibri"/>
+              </a:rPr>
+              <a:t>асортимент</a:t>
+            </a:r>
+            <a:r>
+              <a:rPr sz="3225" b="1" i="0" dirty="0">
+                <a:solidFill>
+                  <a:srgbClr val="FFFFFF"/>
+                </a:solidFill>
+                <a:latin typeface="Calibri"/>
+                <a:ea typeface="Calibri"/>
+                <a:cs typeface="Calibri"/>
+              </a:rPr>
+              <a:t> і </a:t>
+            </a:r>
+            <a:r>
+              <a:rPr sz="3225" b="1" i="0" dirty="0" err="1">
+                <a:solidFill>
+                  <a:srgbClr val="FFFFFF"/>
+                </a:solidFill>
+                <a:latin typeface="Calibri"/>
+                <a:ea typeface="Calibri"/>
+                <a:cs typeface="Calibri"/>
+              </a:rPr>
+              <a:t>собівартість</a:t>
+            </a:r>
+            <a:r>
+              <a:rPr sz="3225" b="1" i="0" dirty="0">
+                <a:solidFill>
+                  <a:srgbClr val="FFFFFF"/>
+                </a:solidFill>
+                <a:latin typeface="Calibri"/>
+                <a:ea typeface="Calibri"/>
+                <a:cs typeface="Calibri"/>
+              </a:rPr>
+              <a:t>.</a:t>
+            </a:r>
+            <a:endParaRPr sz="3100" dirty="0"/>
           </a:p>
         </p:txBody>
       </p:sp>
@@ -7253,7 +7297,7 @@
     <p:bg>
       <p:bgPr>
         <a:blipFill rotWithShape="1">
-          <a:blip r:embed="rId3">
+          <a:blip r:embed="rId2">
             <a:lum/>
           </a:blip>
           <a:srcRect/>
@@ -8353,7 +8397,7 @@
           <p:nvPr/>
         </p:nvPicPr>
         <p:blipFill>
-          <a:blip r:embed="rId5"/>
+          <a:blip r:embed="rId3"/>
           <a:stretch>
             <a:fillRect/>
           </a:stretch>
@@ -8778,7 +8822,7 @@
     <p:bg>
       <p:bgPr>
         <a:blipFill rotWithShape="1">
-          <a:blip r:embed="rId3">
+          <a:blip r:embed="rId2">
             <a:lum/>
           </a:blip>
           <a:srcRect/>
@@ -8881,7 +8925,7 @@
               <a:buNone/>
             </a:pPr>
             <a:r>
-              <a:rPr sz="3100" b="1">
+              <a:rPr sz="3100" b="1" dirty="0">
                 <a:solidFill>
                   <a:srgbClr val="FFFFFF"/>
                 </a:solidFill>
@@ -8889,55 +8933,31 @@
                 <a:ea typeface="Cambria"/>
                 <a:cs typeface="Cambria"/>
               </a:rPr>
-              <a:t>KBROS Fried Rice 12 × 200 г — собівартість</a:t>
-            </a:r>
-            <a:endParaRPr sz="3100"/>
-          </a:p>
-        </p:txBody>
-      </p:sp>
-      <p:sp>
-        <p:nvSpPr>
-          <p:cNvPr id="4" name="Text 2">
-            <a:extLst>
-              <a:ext uri="{FF2B5EF4-FFF2-40B4-BE49-F238E27FC236}">
-                <a16:creationId xmlns:a16="http://schemas.microsoft.com/office/drawing/2014/main" id="{CB3E3610-3F77-4808-A291-CC88332A673B}"/>
-              </a:ext>
-            </a:extLst>
-          </p:cNvPr>
-          <p:cNvSpPr>
-            <a:spLocks noGrp="1"/>
-          </p:cNvSpPr>
-          <p:nvPr/>
-        </p:nvSpPr>
-        <p:spPr>
-          <a:xfrm>
-            <a:off x="585216" y="1115568"/>
-            <a:ext cx="11064240" cy="274320"/>
-          </a:xfrm>
-          <a:prstGeom prst="rect">
-            <a:avLst/>
-          </a:prstGeom>
-          <a:noFill/>
-        </p:spPr>
-        <p:txBody>
-          <a:bodyPr wrap="square" lIns="0" tIns="0" rIns="0" bIns="0" anchor="ctr"/>
-          <a:lstStyle/>
-          <a:p>
-            <a:pPr marL="0" indent="0">
-              <a:buNone/>
-            </a:pPr>
-            <a:r>
-              <a:rPr sz="1250" i="1">
-                <a:solidFill>
-                  <a:srgbClr val="D2E4CE"/>
-                </a:solidFill>
-                <a:latin typeface="Calibri"/>
-                <a:ea typeface="Calibri"/>
-                <a:cs typeface="Calibri"/>
-              </a:rPr>
-              <a:t>Постачання на європалетах, FOB Busan · 20′ FCL — 11 палет · 40′ FCL — 25 палет</a:t>
-            </a:r>
-            <a:endParaRPr sz="1250"/>
+              <a:t>KBROS Fried Rice 12 × 200 г — </a:t>
+            </a:r>
+            <a:r>
+              <a:rPr sz="3100" b="1" dirty="0" err="1">
+                <a:solidFill>
+                  <a:srgbClr val="FFFFFF"/>
+                </a:solidFill>
+                <a:latin typeface="Cambria"/>
+                <a:ea typeface="Cambria"/>
+                <a:cs typeface="Cambria"/>
+              </a:rPr>
+              <a:t>собівартість</a:t>
+            </a:r>
+            <a:r>
+              <a:rPr sz="3100" b="1" dirty="0">
+                <a:solidFill>
+                  <a:srgbClr val="FFFFFF"/>
+                </a:solidFill>
+                <a:latin typeface="Cambria"/>
+                <a:ea typeface="Cambria"/>
+                <a:cs typeface="Cambria"/>
+              </a:rPr>
+              <a:t>.</a:t>
+            </a:r>
+            <a:endParaRPr sz="3100" dirty="0"/>
           </a:p>
         </p:txBody>
       </p:sp>
@@ -9001,7 +9021,7 @@
           <p:nvPr/>
         </p:nvPicPr>
         <p:blipFill>
-          <a:blip r:embed="rId2"/>
+          <a:blip r:embed="rId3"/>
           <a:stretch>
             <a:fillRect/>
           </a:stretch>
@@ -9409,7 +9429,7 @@
                 <a:ea typeface="Calibri"/>
                 <a:cs typeface="Calibri"/>
               </a:rPr>
-              <a:t>$2,176 / 97,92 ₴</a:t>
+              <a:t>$2,105 / 94,72 ₴</a:t>
             </a:r>
             <a:endParaRPr sz="950"/>
           </a:p>
@@ -9501,7 +9521,7 @@
                 <a:ea typeface="Calibri"/>
                 <a:cs typeface="Calibri"/>
               </a:rPr>
-              <a:t>$1,960 / 88,18 ₴</a:t>
+              <a:t>$1,939 / 87,26 ₴</a:t>
             </a:r>
             <a:endParaRPr sz="950"/>
           </a:p>
@@ -9547,7 +9567,53 @@
                 <a:ea typeface="Calibri"/>
                 <a:cs typeface="Calibri"/>
               </a:rPr>
-              <a:t>10 палет</a:t>
+              <a:t>LCL 17 м³</a:t>
+            </a:r>
+            <a:endParaRPr sz="900"/>
+          </a:p>
+        </p:txBody>
+      </p:sp>
+      <p:sp>
+        <p:nvSpPr>
+          <p:cNvPr id="18" name="Text 15">
+            <a:extLst>
+              <a:ext uri="{FF2B5EF4-FFF2-40B4-BE49-F238E27FC236}">
+                <a16:creationId xmlns:a16="http://schemas.microsoft.com/office/drawing/2014/main" id="{744B828A-FAD0-48B0-A84B-5C4651E029AF}"/>
+              </a:ext>
+            </a:extLst>
+          </p:cNvPr>
+          <p:cNvSpPr>
+            <a:spLocks noGrp="1"/>
+          </p:cNvSpPr>
+          <p:nvPr/>
+        </p:nvSpPr>
+        <p:spPr>
+          <a:xfrm>
+            <a:off x="859536" y="5673852"/>
+            <a:ext cx="658368" cy="192024"/>
+          </a:xfrm>
+          <a:prstGeom prst="rect">
+            <a:avLst/>
+          </a:prstGeom>
+          <a:noFill/>
+        </p:spPr>
+        <p:txBody>
+          <a:bodyPr wrap="square" lIns="0" tIns="0" rIns="0" bIns="0" anchor="ctr"/>
+          <a:lstStyle/>
+          <a:p>
+            <a:pPr marL="0" indent="0">
+              <a:buNone/>
+            </a:pPr>
+            <a:r>
+              <a:rPr sz="900">
+                <a:solidFill>
+                  <a:srgbClr val="D2E4CE"/>
+                </a:solidFill>
+                <a:latin typeface="Calibri"/>
+                <a:ea typeface="Calibri"/>
+                <a:cs typeface="Calibri"/>
+              </a:rPr>
+              <a:t>LCL 34 м³</a:t>
             </a:r>
             <a:endParaRPr sz="900"/>
           </a:p>
@@ -9593,7 +9659,53 @@
                 <a:ea typeface="Calibri"/>
                 <a:cs typeface="Calibri"/>
               </a:rPr>
-              <a:t>$2,026 / 91,16 ₴</a:t>
+              <a:t>$2,109 / 94,92 ₴</a:t>
+            </a:r>
+            <a:endParaRPr sz="950"/>
+          </a:p>
+        </p:txBody>
+      </p:sp>
+      <p:sp>
+        <p:nvSpPr>
+          <p:cNvPr id="19" name="Text 16">
+            <a:extLst>
+              <a:ext uri="{FF2B5EF4-FFF2-40B4-BE49-F238E27FC236}">
+                <a16:creationId xmlns:a16="http://schemas.microsoft.com/office/drawing/2014/main" id="{13BF0E51-D744-4257-9C8D-7D20E2A440E5}"/>
+              </a:ext>
+            </a:extLst>
+          </p:cNvPr>
+          <p:cNvSpPr>
+            <a:spLocks noGrp="1"/>
+          </p:cNvSpPr>
+          <p:nvPr/>
+        </p:nvSpPr>
+        <p:spPr>
+          <a:xfrm>
+            <a:off x="1499616" y="5673852"/>
+            <a:ext cx="1508760" cy="192024"/>
+          </a:xfrm>
+          <a:prstGeom prst="rect">
+            <a:avLst/>
+          </a:prstGeom>
+          <a:noFill/>
+        </p:spPr>
+        <p:txBody>
+          <a:bodyPr wrap="square" lIns="0" tIns="0" rIns="0" bIns="0" anchor="ctr"/>
+          <a:lstStyle/>
+          <a:p>
+            <a:pPr marL="0" indent="0" algn="r">
+              <a:buNone/>
+            </a:pPr>
+            <a:r>
+              <a:rPr sz="950">
+                <a:solidFill>
+                  <a:srgbClr val="FCF9F0"/>
+                </a:solidFill>
+                <a:latin typeface="Calibri"/>
+                <a:ea typeface="Calibri"/>
+                <a:cs typeface="Calibri"/>
+              </a:rPr>
+              <a:t>$1,989 / 89,52 ₴</a:t>
             </a:r>
             <a:endParaRPr sz="950"/>
           </a:p>
@@ -9659,7 +9771,7 @@
           <p:nvPr/>
         </p:nvPicPr>
         <p:blipFill>
-          <a:blip r:embed="rId8"/>
+          <a:blip r:embed="rId4"/>
           <a:stretch>
             <a:fillRect/>
           </a:stretch>
@@ -10067,7 +10179,7 @@
                 <a:ea typeface="Calibri"/>
                 <a:cs typeface="Calibri"/>
               </a:rPr>
-              <a:t>$2,176 / 97,92 ₴</a:t>
+              <a:t>$2,105 / 94,72 ₴</a:t>
             </a:r>
             <a:endParaRPr sz="950"/>
           </a:p>
@@ -10159,7 +10271,7 @@
                 <a:ea typeface="Calibri"/>
                 <a:cs typeface="Calibri"/>
               </a:rPr>
-              <a:t>$1,960 / 88,18 ₴</a:t>
+              <a:t>$1,939 / 87,26 ₴</a:t>
             </a:r>
             <a:endParaRPr sz="950"/>
           </a:p>
@@ -10205,7 +10317,53 @@
                 <a:ea typeface="Calibri"/>
                 <a:cs typeface="Calibri"/>
               </a:rPr>
-              <a:t>10 палет</a:t>
+              <a:t>LCL 17 м³</a:t>
+            </a:r>
+            <a:endParaRPr sz="900"/>
+          </a:p>
+        </p:txBody>
+      </p:sp>
+      <p:sp>
+        <p:nvSpPr>
+          <p:cNvPr id="35" name="Text 31">
+            <a:extLst>
+              <a:ext uri="{FF2B5EF4-FFF2-40B4-BE49-F238E27FC236}">
+                <a16:creationId xmlns:a16="http://schemas.microsoft.com/office/drawing/2014/main" id="{AB5675A7-525E-4791-993A-B3BFA05842FE}"/>
+              </a:ext>
+            </a:extLst>
+          </p:cNvPr>
+          <p:cNvSpPr>
+            <a:spLocks noGrp="1"/>
+          </p:cNvSpPr>
+          <p:nvPr/>
+        </p:nvSpPr>
+        <p:spPr>
+          <a:xfrm>
+            <a:off x="3675888" y="5673852"/>
+            <a:ext cx="658368" cy="192024"/>
+          </a:xfrm>
+          <a:prstGeom prst="rect">
+            <a:avLst/>
+          </a:prstGeom>
+          <a:noFill/>
+        </p:spPr>
+        <p:txBody>
+          <a:bodyPr wrap="square" lIns="0" tIns="0" rIns="0" bIns="0" anchor="ctr"/>
+          <a:lstStyle/>
+          <a:p>
+            <a:pPr marL="0" indent="0">
+              <a:buNone/>
+            </a:pPr>
+            <a:r>
+              <a:rPr sz="900">
+                <a:solidFill>
+                  <a:srgbClr val="D2E4CE"/>
+                </a:solidFill>
+                <a:latin typeface="Calibri"/>
+                <a:ea typeface="Calibri"/>
+                <a:cs typeface="Calibri"/>
+              </a:rPr>
+              <a:t>LCL 34 м³</a:t>
             </a:r>
             <a:endParaRPr sz="900"/>
           </a:p>
@@ -10251,7 +10409,53 @@
                 <a:ea typeface="Calibri"/>
                 <a:cs typeface="Calibri"/>
               </a:rPr>
-              <a:t>$2,026 / 91,16 ₴</a:t>
+              <a:t>$2,109 / 94,92 ₴</a:t>
+            </a:r>
+            <a:endParaRPr sz="950"/>
+          </a:p>
+        </p:txBody>
+      </p:sp>
+      <p:sp>
+        <p:nvSpPr>
+          <p:cNvPr id="36" name="Text 32">
+            <a:extLst>
+              <a:ext uri="{FF2B5EF4-FFF2-40B4-BE49-F238E27FC236}">
+                <a16:creationId xmlns:a16="http://schemas.microsoft.com/office/drawing/2014/main" id="{1497E892-700F-4999-8614-DBAADE2E6A5A}"/>
+              </a:ext>
+            </a:extLst>
+          </p:cNvPr>
+          <p:cNvSpPr>
+            <a:spLocks noGrp="1"/>
+          </p:cNvSpPr>
+          <p:nvPr/>
+        </p:nvSpPr>
+        <p:spPr>
+          <a:xfrm>
+            <a:off x="4315968" y="5673852"/>
+            <a:ext cx="1508760" cy="192024"/>
+          </a:xfrm>
+          <a:prstGeom prst="rect">
+            <a:avLst/>
+          </a:prstGeom>
+          <a:noFill/>
+        </p:spPr>
+        <p:txBody>
+          <a:bodyPr wrap="square" lIns="0" tIns="0" rIns="0" bIns="0" anchor="ctr"/>
+          <a:lstStyle/>
+          <a:p>
+            <a:pPr marL="0" indent="0" algn="r">
+              <a:buNone/>
+            </a:pPr>
+            <a:r>
+              <a:rPr sz="950">
+                <a:solidFill>
+                  <a:srgbClr val="FCF9F0"/>
+                </a:solidFill>
+                <a:latin typeface="Calibri"/>
+                <a:ea typeface="Calibri"/>
+                <a:cs typeface="Calibri"/>
+              </a:rPr>
+              <a:t>$1,989 / 89,52 ₴</a:t>
             </a:r>
             <a:endParaRPr sz="950"/>
           </a:p>
@@ -10317,7 +10521,7 @@
           <p:nvPr/>
         </p:nvPicPr>
         <p:blipFill>
-          <a:blip r:embed="rId9"/>
+          <a:blip r:embed="rId5"/>
           <a:stretch>
             <a:fillRect/>
           </a:stretch>
@@ -10725,7 +10929,7 @@
                 <a:ea typeface="Calibri"/>
                 <a:cs typeface="Calibri"/>
               </a:rPr>
-              <a:t>$2,176 / 97,92 ₴</a:t>
+              <a:t>$2,105 / 94,72 ₴</a:t>
             </a:r>
             <a:endParaRPr sz="950"/>
           </a:p>
@@ -10817,7 +11021,7 @@
                 <a:ea typeface="Calibri"/>
                 <a:cs typeface="Calibri"/>
               </a:rPr>
-              <a:t>$1,960 / 88,18 ₴</a:t>
+              <a:t>$1,939 / 87,26 ₴</a:t>
             </a:r>
             <a:endParaRPr sz="950"/>
           </a:p>
@@ -10863,7 +11067,53 @@
                 <a:ea typeface="Calibri"/>
                 <a:cs typeface="Calibri"/>
               </a:rPr>
-              <a:t>10 палет</a:t>
+              <a:t>LCL 17 м³</a:t>
+            </a:r>
+            <a:endParaRPr sz="900"/>
+          </a:p>
+        </p:txBody>
+      </p:sp>
+      <p:sp>
+        <p:nvSpPr>
+          <p:cNvPr id="52" name="Text 47">
+            <a:extLst>
+              <a:ext uri="{FF2B5EF4-FFF2-40B4-BE49-F238E27FC236}">
+                <a16:creationId xmlns:a16="http://schemas.microsoft.com/office/drawing/2014/main" id="{843D82C3-467A-4031-AA4E-8835A62B789E}"/>
+              </a:ext>
+            </a:extLst>
+          </p:cNvPr>
+          <p:cNvSpPr>
+            <a:spLocks noGrp="1"/>
+          </p:cNvSpPr>
+          <p:nvPr/>
+        </p:nvSpPr>
+        <p:spPr>
+          <a:xfrm>
+            <a:off x="6492240" y="5673852"/>
+            <a:ext cx="658368" cy="192024"/>
+          </a:xfrm>
+          <a:prstGeom prst="rect">
+            <a:avLst/>
+          </a:prstGeom>
+          <a:noFill/>
+        </p:spPr>
+        <p:txBody>
+          <a:bodyPr wrap="square" lIns="0" tIns="0" rIns="0" bIns="0" anchor="ctr"/>
+          <a:lstStyle/>
+          <a:p>
+            <a:pPr marL="0" indent="0">
+              <a:buNone/>
+            </a:pPr>
+            <a:r>
+              <a:rPr sz="900">
+                <a:solidFill>
+                  <a:srgbClr val="D2E4CE"/>
+                </a:solidFill>
+                <a:latin typeface="Calibri"/>
+                <a:ea typeface="Calibri"/>
+                <a:cs typeface="Calibri"/>
+              </a:rPr>
+              <a:t>LCL 34 м³</a:t>
             </a:r>
             <a:endParaRPr sz="900"/>
           </a:p>
@@ -10909,7 +11159,53 @@
                 <a:ea typeface="Calibri"/>
                 <a:cs typeface="Calibri"/>
               </a:rPr>
-              <a:t>$2,026 / 91,16 ₴</a:t>
+              <a:t>$2,109 / 94,92 ₴</a:t>
+            </a:r>
+            <a:endParaRPr sz="950"/>
+          </a:p>
+        </p:txBody>
+      </p:sp>
+      <p:sp>
+        <p:nvSpPr>
+          <p:cNvPr id="53" name="Text 48">
+            <a:extLst>
+              <a:ext uri="{FF2B5EF4-FFF2-40B4-BE49-F238E27FC236}">
+                <a16:creationId xmlns:a16="http://schemas.microsoft.com/office/drawing/2014/main" id="{219E8FB0-85D4-446F-8CAB-519B563DBBC5}"/>
+              </a:ext>
+            </a:extLst>
+          </p:cNvPr>
+          <p:cNvSpPr>
+            <a:spLocks noGrp="1"/>
+          </p:cNvSpPr>
+          <p:nvPr/>
+        </p:nvSpPr>
+        <p:spPr>
+          <a:xfrm>
+            <a:off x="7132320" y="5673852"/>
+            <a:ext cx="1508760" cy="192024"/>
+          </a:xfrm>
+          <a:prstGeom prst="rect">
+            <a:avLst/>
+          </a:prstGeom>
+          <a:noFill/>
+        </p:spPr>
+        <p:txBody>
+          <a:bodyPr wrap="square" lIns="0" tIns="0" rIns="0" bIns="0" anchor="ctr"/>
+          <a:lstStyle/>
+          <a:p>
+            <a:pPr marL="0" indent="0" algn="r">
+              <a:buNone/>
+            </a:pPr>
+            <a:r>
+              <a:rPr sz="950">
+                <a:solidFill>
+                  <a:srgbClr val="FCF9F0"/>
+                </a:solidFill>
+                <a:latin typeface="Calibri"/>
+                <a:ea typeface="Calibri"/>
+                <a:cs typeface="Calibri"/>
+              </a:rPr>
+              <a:t>$1,989 / 89,52 ₴</a:t>
             </a:r>
             <a:endParaRPr sz="950"/>
           </a:p>
@@ -10975,7 +11271,7 @@
           <p:nvPr/>
         </p:nvPicPr>
         <p:blipFill>
-          <a:blip r:embed="rId10"/>
+          <a:blip r:embed="rId6"/>
           <a:stretch>
             <a:fillRect/>
           </a:stretch>
@@ -11383,7 +11679,7 @@
                 <a:ea typeface="Calibri"/>
                 <a:cs typeface="Calibri"/>
               </a:rPr>
-              <a:t>$2,176 / 97,92 ₴</a:t>
+              <a:t>$0,971 / 43,72 ₴</a:t>
             </a:r>
             <a:endParaRPr sz="950"/>
           </a:p>
@@ -11475,7 +11771,7 @@
                 <a:ea typeface="Calibri"/>
                 <a:cs typeface="Calibri"/>
               </a:rPr>
-              <a:t>$1,960 / 88,18 ₴</a:t>
+              <a:t>$0,895 / 40,27 ₴</a:t>
             </a:r>
             <a:endParaRPr sz="950"/>
           </a:p>
@@ -11521,7 +11817,53 @@
                 <a:ea typeface="Calibri"/>
                 <a:cs typeface="Calibri"/>
               </a:rPr>
-              <a:t>10 палет</a:t>
+              <a:t>LCL 17 м³</a:t>
+            </a:r>
+            <a:endParaRPr sz="900"/>
+          </a:p>
+        </p:txBody>
+      </p:sp>
+      <p:sp>
+        <p:nvSpPr>
+          <p:cNvPr id="69" name="Text 63">
+            <a:extLst>
+              <a:ext uri="{FF2B5EF4-FFF2-40B4-BE49-F238E27FC236}">
+                <a16:creationId xmlns:a16="http://schemas.microsoft.com/office/drawing/2014/main" id="{D3FCC8C4-076B-4094-B816-197B2B0E688C}"/>
+              </a:ext>
+            </a:extLst>
+          </p:cNvPr>
+          <p:cNvSpPr>
+            <a:spLocks noGrp="1"/>
+          </p:cNvSpPr>
+          <p:nvPr/>
+        </p:nvSpPr>
+        <p:spPr>
+          <a:xfrm>
+            <a:off x="9308592" y="5673852"/>
+            <a:ext cx="658368" cy="192024"/>
+          </a:xfrm>
+          <a:prstGeom prst="rect">
+            <a:avLst/>
+          </a:prstGeom>
+          <a:noFill/>
+        </p:spPr>
+        <p:txBody>
+          <a:bodyPr wrap="square" lIns="0" tIns="0" rIns="0" bIns="0" anchor="ctr"/>
+          <a:lstStyle/>
+          <a:p>
+            <a:pPr marL="0" indent="0">
+              <a:buNone/>
+            </a:pPr>
+            <a:r>
+              <a:rPr sz="900">
+                <a:solidFill>
+                  <a:srgbClr val="D2E4CE"/>
+                </a:solidFill>
+                <a:latin typeface="Calibri"/>
+                <a:ea typeface="Calibri"/>
+                <a:cs typeface="Calibri"/>
+              </a:rPr>
+              <a:t>LCL 34 м³</a:t>
             </a:r>
             <a:endParaRPr sz="900"/>
           </a:p>
@@ -11567,7 +11909,53 @@
                 <a:ea typeface="Calibri"/>
                 <a:cs typeface="Calibri"/>
               </a:rPr>
-              <a:t>$2,026 / 91,16 ₴</a:t>
+              <a:t>$0,974 / 43,81 ₴</a:t>
+            </a:r>
+            <a:endParaRPr sz="950"/>
+          </a:p>
+        </p:txBody>
+      </p:sp>
+      <p:sp>
+        <p:nvSpPr>
+          <p:cNvPr id="70" name="Text 64">
+            <a:extLst>
+              <a:ext uri="{FF2B5EF4-FFF2-40B4-BE49-F238E27FC236}">
+                <a16:creationId xmlns:a16="http://schemas.microsoft.com/office/drawing/2014/main" id="{4AC58F4C-4853-4DE5-929B-AF4822760C15}"/>
+              </a:ext>
+            </a:extLst>
+          </p:cNvPr>
+          <p:cNvSpPr>
+            <a:spLocks noGrp="1"/>
+          </p:cNvSpPr>
+          <p:nvPr/>
+        </p:nvSpPr>
+        <p:spPr>
+          <a:xfrm>
+            <a:off x="9948672" y="5673852"/>
+            <a:ext cx="1508760" cy="192024"/>
+          </a:xfrm>
+          <a:prstGeom prst="rect">
+            <a:avLst/>
+          </a:prstGeom>
+          <a:noFill/>
+        </p:spPr>
+        <p:txBody>
+          <a:bodyPr wrap="square" lIns="0" tIns="0" rIns="0" bIns="0" anchor="ctr"/>
+          <a:lstStyle/>
+          <a:p>
+            <a:pPr marL="0" indent="0" algn="r">
+              <a:buNone/>
+            </a:pPr>
+            <a:r>
+              <a:rPr sz="950">
+                <a:solidFill>
+                  <a:srgbClr val="FCF9F0"/>
+                </a:solidFill>
+                <a:latin typeface="Calibri"/>
+                <a:ea typeface="Calibri"/>
+                <a:cs typeface="Calibri"/>
+              </a:rPr>
+              <a:t>$0,918 / 41,32 ₴</a:t>
             </a:r>
             <a:endParaRPr sz="950"/>
           </a:p>
@@ -11590,7 +11978,7 @@
           <a:noFill/>
         </p:spPr>
         <p:txBody>
-          <a:bodyPr wrap="none" lIns="0" rIns="0" tIns="0" bIns="0">
+          <a:bodyPr wrap="none" lIns="0" tIns="0" rIns="0" bIns="0">
             <a:spAutoFit/>
           </a:bodyPr>
           <a:lstStyle/>
@@ -11602,7 +11990,7 @@
                 </a:solidFill>
                 <a:latin typeface="Calibri"/>
               </a:rPr>
-              <a:t>Джерело: Quotation One's International (KBROS); Self_Cost_Rice_Brand..xlsx, аркуш «ONE'S INTERNATIONAL_Паллеты» · мито 10%, ПДВ 20%, транспорт, кредитні гроші 2,5% · курс 45,00 UAH/USD.</a:t>
+              <a:t>Джерело: Quotation One's International (KBROS); Self_Cost_Rice_Brand..xlsx, аркуш «ONE'S INTERNATIONAL_Навалом.» — завантаження навалом · мито 10%, ПДВ 20%, транспорт, кредитні гроші 2,5% · курс 45,00 UAH/USD.</a:t>
             </a:r>
           </a:p>
         </p:txBody>
@@ -11683,7 +12071,7 @@
               <a:buNone/>
             </a:pPr>
             <a:r>
-              <a:rPr sz="1100" b="1" spc="260">
+              <a:rPr sz="1100" b="1" spc="260" dirty="0">
                 <a:solidFill>
                   <a:srgbClr val="9BD473"/>
                 </a:solidFill>
@@ -11691,9 +12079,9 @@
                 <a:ea typeface="Calibri"/>
                 <a:cs typeface="Calibri"/>
               </a:rPr>
-              <a:t>ПОСТАЧАЛЬНИК 2</a:t>
-            </a:r>
-            <a:endParaRPr sz="1100"/>
+              <a:t>ПОСТАЧАЛЬНИК 1</a:t>
+            </a:r>
+            <a:endParaRPr sz="1100" dirty="0"/>
           </a:p>
         </p:txBody>
       </p:sp>
@@ -13350,7 +13738,7 @@
               <a:buNone/>
             </a:pPr>
             <a:r>
-              <a:rPr sz="1100" b="1" spc="260">
+              <a:rPr sz="1100" b="1" spc="260" dirty="0">
                 <a:solidFill>
                   <a:srgbClr val="9BD473"/>
                 </a:solidFill>
@@ -13358,9 +13746,9 @@
                 <a:ea typeface="Calibri"/>
                 <a:cs typeface="Calibri"/>
               </a:rPr>
-              <a:t>ПОСТАЧАЛЬНИК 2  ·  CHEFREY / CM PREMIUM</a:t>
-            </a:r>
-            <a:endParaRPr sz="1100"/>
+              <a:t>ПОСТАЧАЛЬНИК 1  ·  CHEFREY / CM PREMIUM</a:t>
+            </a:r>
+            <a:endParaRPr sz="1100" dirty="0"/>
           </a:p>
         </p:txBody>
       </p:sp>
@@ -13396,7 +13784,7 @@
               <a:buNone/>
             </a:pPr>
             <a:r>
-              <a:rPr sz="3100" b="1">
+              <a:rPr sz="3100" b="1" dirty="0" err="1">
                 <a:solidFill>
                   <a:srgbClr val="FFFFFF"/>
                 </a:solidFill>
@@ -13404,9 +13792,42 @@
                 <a:ea typeface="Cambria"/>
                 <a:cs typeface="Cambria"/>
               </a:rPr>
-              <a:t>Chefrey Organic RTE 6 × 250 г — собівартість</a:t>
-            </a:r>
-            <a:endParaRPr sz="3100"/>
+              <a:t>Chefrey</a:t>
+            </a:r>
+            <a:r>
+              <a:rPr sz="3100" b="1" dirty="0">
+                <a:solidFill>
+                  <a:srgbClr val="FFFFFF"/>
+                </a:solidFill>
+                <a:latin typeface="Cambria"/>
+                <a:ea typeface="Cambria"/>
+                <a:cs typeface="Cambria"/>
+              </a:rPr>
+              <a:t> Organic RTE 6 × 250 г — </a:t>
+            </a:r>
+            <a:r>
+              <a:rPr sz="3100" b="1" dirty="0" err="1">
+                <a:solidFill>
+                  <a:srgbClr val="FFFFFF"/>
+                </a:solidFill>
+                <a:latin typeface="Cambria"/>
+                <a:ea typeface="Cambria"/>
+                <a:cs typeface="Cambria"/>
+              </a:rPr>
+              <a:t>собівартість</a:t>
+            </a:r>
+            <a:r>
+              <a:rPr sz="3100" b="1" dirty="0">
+                <a:solidFill>
+                  <a:srgbClr val="FFFFFF"/>
+                </a:solidFill>
+                <a:latin typeface="Cambria"/>
+                <a:ea typeface="Cambria"/>
+                <a:cs typeface="Cambria"/>
+              </a:rPr>
+              <a:t>.</a:t>
+            </a:r>
+            <a:endParaRPr sz="3100" dirty="0"/>
           </a:p>
         </p:txBody>
       </p:sp>
@@ -14032,7 +14453,7 @@
                 <a:ea typeface="Calibri"/>
                 <a:cs typeface="Calibri"/>
               </a:rPr>
-              <a:t>$1,028 / 46,27 ₴</a:t>
+              <a:t>$1,017 / 45,78 ₴</a:t>
             </a:r>
             <a:endParaRPr sz="950"/>
           </a:p>
@@ -14781,7 +15202,7 @@
                 <a:ea typeface="Calibri"/>
                 <a:cs typeface="Calibri"/>
               </a:rPr>
-              <a:t>$1,028 / 46,27 ₴</a:t>
+              <a:t>$1,017 / 45,78 ₴</a:t>
             </a:r>
             <a:endParaRPr sz="950"/>
           </a:p>
@@ -15530,7 +15951,7 @@
                 <a:ea typeface="Calibri"/>
                 <a:cs typeface="Calibri"/>
               </a:rPr>
-              <a:t>$1,028 / 46,27 ₴</a:t>
+              <a:t>$1,017 / 45,78 ₴</a:t>
             </a:r>
             <a:endParaRPr sz="950"/>
           </a:p>
@@ -16005,7 +16426,7 @@
                 <a:ea typeface="Calibri"/>
                 <a:cs typeface="Calibri"/>
               </a:rPr>
-              <a:t>FOB $0,583 · </a:t>
+              <a:t>FOB $0,667 · </a:t>
             </a:r>
             <a:endParaRPr sz="1000"/>
           </a:p>
@@ -16187,7 +16608,7 @@
                 <a:ea typeface="Calibri"/>
                 <a:cs typeface="Calibri"/>
               </a:rPr>
-              <a:t>$1,020 / 45,91 ₴</a:t>
+              <a:t>$1,133 / 50,99 ₴</a:t>
             </a:r>
             <a:endParaRPr sz="950"/>
           </a:p>
@@ -16279,7 +16700,7 @@
                 <a:ea typeface="Calibri"/>
                 <a:cs typeface="Calibri"/>
               </a:rPr>
-              <a:t>$0,915 / 41,20 ₴</a:t>
+              <a:t>$1,017 / 45,78 ₴</a:t>
             </a:r>
             <a:endParaRPr sz="950"/>
           </a:p>
@@ -16371,7 +16792,7 @@
                 <a:ea typeface="Calibri"/>
                 <a:cs typeface="Calibri"/>
               </a:rPr>
-              <a:t>$1,215 / 54,68 ₴</a:t>
+              <a:t>$1,339 / 60,27 ₴</a:t>
             </a:r>
             <a:endParaRPr sz="950"/>
           </a:p>
@@ -16463,7 +16884,7 @@
                 <a:ea typeface="Calibri"/>
                 <a:cs typeface="Calibri"/>
               </a:rPr>
-              <a:t>$0,944 / 42,48 ₴</a:t>
+              <a:t>$1,056 / 47,53 ₴</a:t>
             </a:r>
             <a:endParaRPr sz="950"/>
           </a:p>
@@ -16545,7 +16966,7 @@
               <a:buNone/>
             </a:pPr>
             <a:r>
-              <a:rPr sz="1100" b="1" spc="260">
+              <a:rPr sz="1100" b="1" spc="260" dirty="0">
                 <a:solidFill>
                   <a:srgbClr val="F0AC58"/>
                 </a:solidFill>
@@ -16553,9 +16974,9 @@
                 <a:ea typeface="Calibri"/>
                 <a:cs typeface="Calibri"/>
               </a:rPr>
-              <a:t>ПОСТАЧАЛЬНИК 1</a:t>
-            </a:r>
-            <a:endParaRPr sz="1100"/>
+              <a:t>ПОСТАЧАЛЬНИК 2</a:t>
+            </a:r>
+            <a:endParaRPr sz="1100" dirty="0"/>
           </a:p>
         </p:txBody>
       </p:sp>
@@ -18224,7 +18645,7 @@
               <a:buNone/>
             </a:pPr>
             <a:r>
-              <a:rPr sz="1100" b="1" spc="260">
+              <a:rPr sz="1100" b="1" spc="260" dirty="0">
                 <a:solidFill>
                   <a:srgbClr val="F0AC58"/>
                 </a:solidFill>
@@ -18232,9 +18653,9 @@
                 <a:ea typeface="Calibri"/>
                 <a:cs typeface="Calibri"/>
               </a:rPr>
-              <a:t>ПОСТАЧАЛЬНИК 1  ·  BSCM FOODS</a:t>
-            </a:r>
-            <a:endParaRPr sz="1100"/>
+              <a:t>ПОСТАЧАЛЬНИК 2  ·  BSCM FOODS</a:t>
+            </a:r>
+            <a:endParaRPr sz="1100" dirty="0"/>
           </a:p>
         </p:txBody>
       </p:sp>
@@ -18266,11 +18687,8 @@
           <a:bodyPr wrap="square" lIns="0" tIns="0" rIns="0" bIns="0" anchor="ctr"/>
           <a:lstStyle/>
           <a:p>
-            <a:pPr marL="0" indent="0">
-              <a:buNone/>
-            </a:pPr>
-            <a:r>
-              <a:rPr sz="3100" b="1">
+            <a:r>
+              <a:rPr sz="3100" b="1" dirty="0">
                 <a:solidFill>
                   <a:srgbClr val="FFFFFF"/>
                 </a:solidFill>
@@ -18278,9 +18696,31 @@
                 <a:ea typeface="Cambria"/>
                 <a:cs typeface="Cambria"/>
               </a:rPr>
-              <a:t>Ready Rice 6 × 240 г</a:t>
-            </a:r>
-            <a:endParaRPr sz="3100"/>
+              <a:t>Ready Rice 6 × 240 г </a:t>
+            </a:r>
+            <a:r>
+              <a:rPr lang="uk-UA" sz="3100" b="1" dirty="0">
+                <a:solidFill>
+                  <a:srgbClr val="FFFFFF"/>
+                </a:solidFill>
+                <a:latin typeface="Cambria"/>
+                <a:ea typeface="Cambria"/>
+                <a:cs typeface="Cambria"/>
+              </a:rPr>
+              <a:t>— собівартість</a:t>
+            </a:r>
+            <a:r>
+              <a:rPr lang="ru-UA" sz="3100" b="1" dirty="0">
+                <a:solidFill>
+                  <a:srgbClr val="FFFFFF"/>
+                </a:solidFill>
+                <a:latin typeface="Cambria"/>
+                <a:ea typeface="Cambria"/>
+                <a:cs typeface="Cambria"/>
+              </a:rPr>
+              <a:t>.</a:t>
+            </a:r>
+            <a:endParaRPr sz="3100" dirty="0"/>
           </a:p>
         </p:txBody>
       </p:sp>
@@ -28416,23 +28856,20 @@
         </p:nvSpPr>
         <p:spPr>
           <a:xfrm>
-            <a:off x="566928" y="548640"/>
-            <a:ext cx="8761682" cy="548640"/>
-          </a:xfrm>
-          <a:prstGeom prst="rect">
-            <a:avLst/>
-          </a:prstGeom>
-          <a:noFill/>
-        </p:spPr>
-        <p:txBody>
-          <a:bodyPr wrap="square" lIns="0" tIns="0" rIns="0" bIns="0" anchor="ctr"/>
-          <a:lstStyle/>
-          <a:p>
-            <a:pPr marL="0" indent="0">
-              <a:buNone/>
-            </a:pPr>
-            <a:r>
-              <a:rPr sz="3100" b="1">
+            <a:off x="566927" y="548640"/>
+            <a:ext cx="9678285" cy="548640"/>
+          </a:xfrm>
+          <a:prstGeom prst="rect">
+            <a:avLst/>
+          </a:prstGeom>
+          <a:noFill/>
+        </p:spPr>
+        <p:txBody>
+          <a:bodyPr wrap="square" lIns="0" tIns="0" rIns="0" bIns="0" anchor="ctr"/>
+          <a:lstStyle/>
+          <a:p>
+            <a:r>
+              <a:rPr sz="3100" b="1" dirty="0">
                 <a:solidFill>
                   <a:srgbClr val="FFFFFF"/>
                 </a:solidFill>
@@ -28440,9 +28877,31 @@
                 <a:ea typeface="Cambria"/>
                 <a:cs typeface="Cambria"/>
               </a:rPr>
-              <a:t>Ready Rice in Plastic Cup 12 × 150 г</a:t>
-            </a:r>
-            <a:endParaRPr sz="3100"/>
+              <a:t>Ready Rice in Plastic Cup 12 × 150 г </a:t>
+            </a:r>
+            <a:r>
+              <a:rPr lang="uk-UA" sz="3100" b="1" dirty="0">
+                <a:solidFill>
+                  <a:srgbClr val="FFFFFF"/>
+                </a:solidFill>
+                <a:latin typeface="Cambria"/>
+                <a:ea typeface="Cambria"/>
+                <a:cs typeface="Cambria"/>
+              </a:rPr>
+              <a:t>— собівартість</a:t>
+            </a:r>
+            <a:r>
+              <a:rPr lang="ru-UA" sz="3100" b="1" dirty="0">
+                <a:solidFill>
+                  <a:srgbClr val="FFFFFF"/>
+                </a:solidFill>
+                <a:latin typeface="Cambria"/>
+                <a:ea typeface="Cambria"/>
+                <a:cs typeface="Cambria"/>
+              </a:rPr>
+              <a:t>.</a:t>
+            </a:r>
+            <a:endParaRPr sz="3100" dirty="0"/>
           </a:p>
         </p:txBody>
       </p:sp>

--- a/RTE_Rice_Suppliers.pptx
+++ b/RTE_Rice_Suppliers.pptx
@@ -5888,7 +5888,7 @@
                 </a:solidFill>
                 <a:latin typeface="Calibri"/>
               </a:rPr>
-              <a:t>$1,633 / 75,14 ₴</a:t>
+              <a:t>$1,633 / 73,51 ₴</a:t>
             </a:r>
           </a:p>
         </p:txBody>
@@ -5923,7 +5923,7 @@
                 </a:solidFill>
                 <a:latin typeface="Calibri"/>
               </a:rPr>
-              <a:t>$1,499 / 68,94 ₴</a:t>
+              <a:t>$1,499 / 67,44 ₴</a:t>
             </a:r>
           </a:p>
         </p:txBody>
